--- a/CHAPTER 2 RAG Part I_Indexing Your Data.pptx
+++ b/CHAPTER 2 RAG Part I_Indexing Your Data.pptx
@@ -5,10 +5,10 @@
     <p:sldMasterId id="2147483660" r:id="rId1"/>
   </p:sldMasterIdLst>
   <p:notesMasterIdLst>
-    <p:notesMasterId r:id="rId11"/>
+    <p:notesMasterId r:id="rId16"/>
   </p:notesMasterIdLst>
   <p:handoutMasterIdLst>
-    <p:handoutMasterId r:id="rId12"/>
+    <p:handoutMasterId r:id="rId17"/>
   </p:handoutMasterIdLst>
   <p:sldIdLst>
     <p:sldId id="256" r:id="rId2"/>
@@ -19,7 +19,12 @@
     <p:sldId id="1141" r:id="rId7"/>
     <p:sldId id="1142" r:id="rId8"/>
     <p:sldId id="1143" r:id="rId9"/>
-    <p:sldId id="1144" r:id="rId10"/>
+    <p:sldId id="1145" r:id="rId10"/>
+    <p:sldId id="1144" r:id="rId11"/>
+    <p:sldId id="1146" r:id="rId12"/>
+    <p:sldId id="1147" r:id="rId13"/>
+    <p:sldId id="1148" r:id="rId14"/>
+    <p:sldId id="1149" r:id="rId15"/>
   </p:sldIdLst>
   <p:sldSz cx="12192000" cy="6858000"/>
   <p:notesSz cx="6858000" cy="9144000"/>
@@ -135,7 +140,12 @@
             <p14:sldId id="1141"/>
             <p14:sldId id="1142"/>
             <p14:sldId id="1143"/>
+            <p14:sldId id="1145"/>
             <p14:sldId id="1144"/>
+            <p14:sldId id="1146"/>
+            <p14:sldId id="1147"/>
+            <p14:sldId id="1148"/>
+            <p14:sldId id="1149"/>
           </p14:sldIdLst>
         </p14:section>
         <p14:section name="자세한 정보" id="{2CC34DB2-6590-42C0-AD4B-A04C6060184E}">
@@ -3037,6 +3047,3418 @@
 </p:sld>
 </file>
 
+<file path=ppt/slides/slide10.xml><?xml version="1.0" encoding="utf-8"?>
+<p:sld xmlns:a="http://schemas.openxmlformats.org/drawingml/2006/main" xmlns:r="http://schemas.openxmlformats.org/officeDocument/2006/relationships" xmlns:p="http://schemas.openxmlformats.org/presentationml/2006/main">
+  <p:cSld>
+    <p:spTree>
+      <p:nvGrpSpPr>
+        <p:cNvPr id="1" name="">
+          <a:extLst>
+            <a:ext uri="{FF2B5EF4-FFF2-40B4-BE49-F238E27FC236}">
+              <a16:creationId xmlns:a16="http://schemas.microsoft.com/office/drawing/2014/main" id="{F3D51295-47CC-7FDC-BF9B-2262C9DCFCE3}"/>
+            </a:ext>
+          </a:extLst>
+        </p:cNvPr>
+        <p:cNvGrpSpPr/>
+        <p:nvPr/>
+      </p:nvGrpSpPr>
+      <p:grpSpPr>
+        <a:xfrm>
+          <a:off x="0" y="0"/>
+          <a:ext cx="0" cy="0"/>
+          <a:chOff x="0" y="0"/>
+          <a:chExt cx="0" cy="0"/>
+        </a:xfrm>
+      </p:grpSpPr>
+      <p:sp>
+        <p:nvSpPr>
+          <p:cNvPr id="4" name="슬라이드 번호 개체 틀 3">
+            <a:extLst>
+              <a:ext uri="{FF2B5EF4-FFF2-40B4-BE49-F238E27FC236}">
+                <a16:creationId xmlns:a16="http://schemas.microsoft.com/office/drawing/2014/main" id="{6E5B0EE9-A47D-0478-066B-BC245DBACAFA}"/>
+              </a:ext>
+            </a:extLst>
+          </p:cNvPr>
+          <p:cNvSpPr>
+            <a:spLocks noGrp="1"/>
+          </p:cNvSpPr>
+          <p:nvPr>
+            <p:ph type="sldNum" sz="quarter" idx="12"/>
+          </p:nvPr>
+        </p:nvSpPr>
+        <p:spPr>
+          <a:xfrm>
+            <a:off x="10514011" y="6036261"/>
+            <a:ext cx="753545" cy="365125"/>
+          </a:xfrm>
+        </p:spPr>
+        <p:txBody>
+          <a:bodyPr/>
+          <a:lstStyle/>
+          <a:p>
+            <a:fld id="{D57F1E4F-1CFF-5643-939E-217C01CDF565}" type="slidenum">
+              <a:rPr lang="en-US" smtClean="0"/>
+              <a:pPr/>
+              <a:t>10</a:t>
+            </a:fld>
+            <a:endParaRPr lang="en-US" dirty="0"/>
+          </a:p>
+        </p:txBody>
+      </p:sp>
+      <p:sp>
+        <p:nvSpPr>
+          <p:cNvPr id="3" name="제목 1">
+            <a:extLst>
+              <a:ext uri="{FF2B5EF4-FFF2-40B4-BE49-F238E27FC236}">
+                <a16:creationId xmlns:a16="http://schemas.microsoft.com/office/drawing/2014/main" id="{6961916C-61AB-5184-1360-3ED0005E8D5D}"/>
+              </a:ext>
+            </a:extLst>
+          </p:cNvPr>
+          <p:cNvSpPr txBox="1">
+            <a:spLocks/>
+          </p:cNvSpPr>
+          <p:nvPr/>
+        </p:nvSpPr>
+        <p:spPr>
+          <a:xfrm>
+            <a:off x="475645" y="481983"/>
+            <a:ext cx="10353762" cy="766439"/>
+          </a:xfrm>
+          <a:prstGeom prst="rect">
+            <a:avLst/>
+          </a:prstGeom>
+        </p:spPr>
+        <p:txBody>
+          <a:bodyPr vert="horz" lIns="91440" tIns="45720" rIns="91440" bIns="45720" rtlCol="0" anchor="ctr">
+            <a:normAutofit/>
+          </a:bodyPr>
+          <a:lstStyle>
+            <a:lvl1pPr algn="ctr" defTabSz="914400" rtl="0" eaLnBrk="1" latinLnBrk="1" hangingPunct="1">
+              <a:lnSpc>
+                <a:spcPct val="90000"/>
+              </a:lnSpc>
+              <a:spcBef>
+                <a:spcPct val="0"/>
+              </a:spcBef>
+              <a:buNone/>
+              <a:defRPr sz="3200" kern="1200" cap="all" baseline="0">
+                <a:solidFill>
+                  <a:schemeClr val="tx1"/>
+                </a:solidFill>
+                <a:effectLst/>
+                <a:latin typeface="Batang" panose="02030600000101010101" pitchFamily="18" charset="-127"/>
+                <a:ea typeface="Batang" panose="02030600000101010101" pitchFamily="18" charset="-127"/>
+                <a:cs typeface="+mj-cs"/>
+              </a:defRPr>
+            </a:lvl1pPr>
+          </a:lstStyle>
+          <a:p>
+            <a:pPr algn="l"/>
+            <a:r>
+              <a:rPr lang="en-US" altLang="ko-KR" sz="2800" cap="none" dirty="0">
+                <a:solidFill>
+                  <a:schemeClr val="bg2">
+                    <a:lumMod val="25000"/>
+                  </a:schemeClr>
+                </a:solidFill>
+                <a:latin typeface="D2Coding" panose="020B0609020101020101" pitchFamily="49" charset="-127"/>
+                <a:ea typeface="D2Coding" panose="020B0609020101020101" pitchFamily="49" charset="-127"/>
+                <a:cs typeface="Segoe UI Light" panose="020B0502040204020203" pitchFamily="34" charset="0"/>
+              </a:rPr>
+              <a:t>LLM-Based Embeddings </a:t>
+            </a:r>
+            <a:endParaRPr lang="ko-KR" altLang="en-US" sz="2800" cap="none" dirty="0">
+              <a:solidFill>
+                <a:schemeClr val="bg2">
+                  <a:lumMod val="25000"/>
+                </a:schemeClr>
+              </a:solidFill>
+              <a:latin typeface="D2Coding" panose="020B0609020101020101" pitchFamily="49" charset="-127"/>
+              <a:ea typeface="D2Coding" panose="020B0609020101020101" pitchFamily="49" charset="-127"/>
+              <a:cs typeface="Segoe UI Light" panose="020B0502040204020203" pitchFamily="34" charset="0"/>
+            </a:endParaRPr>
+          </a:p>
+        </p:txBody>
+      </p:sp>
+      <p:sp>
+        <p:nvSpPr>
+          <p:cNvPr id="2" name="TextBox 1">
+            <a:extLst>
+              <a:ext uri="{FF2B5EF4-FFF2-40B4-BE49-F238E27FC236}">
+                <a16:creationId xmlns:a16="http://schemas.microsoft.com/office/drawing/2014/main" id="{D0E26A79-7B54-C862-F7BE-BF4BBB839E5F}"/>
+              </a:ext>
+            </a:extLst>
+          </p:cNvPr>
+          <p:cNvSpPr txBox="1"/>
+          <p:nvPr/>
+        </p:nvSpPr>
+        <p:spPr>
+          <a:xfrm>
+            <a:off x="7200900" y="654811"/>
+            <a:ext cx="4419600" cy="400110"/>
+          </a:xfrm>
+          <a:prstGeom prst="rect">
+            <a:avLst/>
+          </a:prstGeom>
+          <a:noFill/>
+        </p:spPr>
+        <p:txBody>
+          <a:bodyPr wrap="square">
+            <a:spAutoFit/>
+          </a:bodyPr>
+          <a:lstStyle/>
+          <a:p>
+            <a:pPr algn="r"/>
+            <a:r>
+              <a:rPr lang="en-US" altLang="ko-KR" sz="2000" dirty="0">
+                <a:latin typeface="D2Coding" panose="020B0609020101020101" pitchFamily="49" charset="-127"/>
+                <a:ea typeface="D2Coding" panose="020B0609020101020101" pitchFamily="49" charset="-127"/>
+              </a:rPr>
+              <a:t>Semantic Embeddings Explained</a:t>
+            </a:r>
+            <a:endParaRPr lang="ko-KR" altLang="en-US" sz="2000" dirty="0">
+              <a:latin typeface="D2Coding" panose="020B0609020101020101" pitchFamily="49" charset="-127"/>
+              <a:ea typeface="D2Coding" panose="020B0609020101020101" pitchFamily="49" charset="-127"/>
+            </a:endParaRPr>
+          </a:p>
+        </p:txBody>
+      </p:sp>
+      <p:pic>
+        <p:nvPicPr>
+          <p:cNvPr id="5" name="Picture 2">
+            <a:extLst>
+              <a:ext uri="{FF2B5EF4-FFF2-40B4-BE49-F238E27FC236}">
+                <a16:creationId xmlns:a16="http://schemas.microsoft.com/office/drawing/2014/main" id="{DDB58B20-EA3F-9E46-5A4C-690B81174E0E}"/>
+              </a:ext>
+            </a:extLst>
+          </p:cNvPr>
+          <p:cNvPicPr>
+            <a:picLocks noChangeAspect="1" noChangeArrowheads="1"/>
+          </p:cNvPicPr>
+          <p:nvPr/>
+        </p:nvPicPr>
+        <p:blipFill>
+          <a:blip r:embed="rId2">
+            <a:extLst>
+              <a:ext uri="{28A0092B-C50C-407E-A947-70E740481C1C}">
+                <a14:useLocalDpi xmlns:a14="http://schemas.microsoft.com/office/drawing/2010/main" val="0"/>
+              </a:ext>
+            </a:extLst>
+          </a:blip>
+          <a:srcRect/>
+          <a:stretch>
+            <a:fillRect/>
+          </a:stretch>
+        </p:blipFill>
+        <p:spPr bwMode="auto">
+          <a:xfrm>
+            <a:off x="4185590" y="1684922"/>
+            <a:ext cx="7434910" cy="1393077"/>
+          </a:xfrm>
+          <a:prstGeom prst="rect">
+            <a:avLst/>
+          </a:prstGeom>
+          <a:noFill/>
+          <a:extLst>
+            <a:ext uri="{909E8E84-426E-40DD-AFC4-6F175D3DCCD1}">
+              <a14:hiddenFill xmlns:a14="http://schemas.microsoft.com/office/drawing/2010/main">
+                <a:solidFill>
+                  <a:srgbClr val="FFFFFF"/>
+                </a:solidFill>
+              </a14:hiddenFill>
+            </a:ext>
+          </a:extLst>
+        </p:spPr>
+      </p:pic>
+      <p:sp>
+        <p:nvSpPr>
+          <p:cNvPr id="6" name="TextBox 5">
+            <a:extLst>
+              <a:ext uri="{FF2B5EF4-FFF2-40B4-BE49-F238E27FC236}">
+                <a16:creationId xmlns:a16="http://schemas.microsoft.com/office/drawing/2014/main" id="{64DEAE80-AE71-B78C-9740-C65477983F90}"/>
+              </a:ext>
+            </a:extLst>
+          </p:cNvPr>
+          <p:cNvSpPr txBox="1"/>
+          <p:nvPr/>
+        </p:nvSpPr>
+        <p:spPr>
+          <a:xfrm>
+            <a:off x="1032296" y="1768157"/>
+            <a:ext cx="2901529" cy="338554"/>
+          </a:xfrm>
+          <a:prstGeom prst="rect">
+            <a:avLst/>
+          </a:prstGeom>
+          <a:noFill/>
+        </p:spPr>
+        <p:txBody>
+          <a:bodyPr wrap="square">
+            <a:spAutoFit/>
+          </a:bodyPr>
+          <a:lstStyle/>
+          <a:p>
+            <a:r>
+              <a:rPr lang="en-US" altLang="ko-KR" sz="1600" dirty="0">
+                <a:solidFill>
+                  <a:srgbClr val="00B0F0"/>
+                </a:solidFill>
+                <a:latin typeface="D2Coding" panose="020B0609020101020101" pitchFamily="49" charset="-127"/>
+                <a:ea typeface="D2Coding" panose="020B0609020101020101" pitchFamily="49" charset="-127"/>
+                <a:sym typeface="Wingdings" panose="05000000000000000000" pitchFamily="2" charset="2"/>
+                <a:hlinkClick r:id="rId3">
+                  <a:extLst>
+                    <a:ext uri="{A12FA001-AC4F-418D-AE19-62706E023703}">
+                      <ahyp:hlinkClr xmlns:ahyp="http://schemas.microsoft.com/office/drawing/2018/hyperlinkcolor" val="tx"/>
+                    </a:ext>
+                  </a:extLst>
+                </a:hlinkClick>
+              </a:rPr>
+              <a:t>Semantic</a:t>
+            </a:r>
+            <a:r>
+              <a:rPr lang="ko-KR" altLang="en-US" sz="1600" dirty="0">
+                <a:solidFill>
+                  <a:srgbClr val="00B0F0"/>
+                </a:solidFill>
+                <a:latin typeface="D2Coding" panose="020B0609020101020101" pitchFamily="49" charset="-127"/>
+                <a:ea typeface="D2Coding" panose="020B0609020101020101" pitchFamily="49" charset="-127"/>
+                <a:sym typeface="Wingdings" panose="05000000000000000000" pitchFamily="2" charset="2"/>
+                <a:hlinkClick r:id="rId3">
+                  <a:extLst>
+                    <a:ext uri="{A12FA001-AC4F-418D-AE19-62706E023703}">
+                      <ahyp:hlinkClr xmlns:ahyp="http://schemas.microsoft.com/office/drawing/2018/hyperlinkcolor" val="tx"/>
+                    </a:ext>
+                  </a:extLst>
+                </a:hlinkClick>
+              </a:rPr>
+              <a:t> </a:t>
+            </a:r>
+            <a:r>
+              <a:rPr lang="en-US" altLang="ko-KR" sz="1600" dirty="0" err="1">
+                <a:solidFill>
+                  <a:srgbClr val="00B0F0"/>
+                </a:solidFill>
+                <a:latin typeface="D2Coding" panose="020B0609020101020101" pitchFamily="49" charset="-127"/>
+                <a:ea typeface="D2Coding" panose="020B0609020101020101" pitchFamily="49" charset="-127"/>
+                <a:sym typeface="Wingdings" panose="05000000000000000000" pitchFamily="2" charset="2"/>
+                <a:hlinkClick r:id="rId3">
+                  <a:extLst>
+                    <a:ext uri="{A12FA001-AC4F-418D-AE19-62706E023703}">
+                      <ahyp:hlinkClr xmlns:ahyp="http://schemas.microsoft.com/office/drawing/2018/hyperlinkcolor" val="tx"/>
+                    </a:ext>
+                  </a:extLst>
+                </a:hlinkClick>
+              </a:rPr>
+              <a:t>Densed</a:t>
+            </a:r>
+            <a:r>
+              <a:rPr lang="en-US" altLang="ko-KR" sz="1600" dirty="0">
+                <a:solidFill>
+                  <a:srgbClr val="00B0F0"/>
+                </a:solidFill>
+                <a:latin typeface="D2Coding" panose="020B0609020101020101" pitchFamily="49" charset="-127"/>
+                <a:ea typeface="D2Coding" panose="020B0609020101020101" pitchFamily="49" charset="-127"/>
+                <a:sym typeface="Wingdings" panose="05000000000000000000" pitchFamily="2" charset="2"/>
+                <a:hlinkClick r:id="rId3">
+                  <a:extLst>
+                    <a:ext uri="{A12FA001-AC4F-418D-AE19-62706E023703}">
+                      <ahyp:hlinkClr xmlns:ahyp="http://schemas.microsoft.com/office/drawing/2018/hyperlinkcolor" val="tx"/>
+                    </a:ext>
+                  </a:extLst>
+                </a:hlinkClick>
+              </a:rPr>
+              <a:t> Embedding</a:t>
+            </a:r>
+            <a:endParaRPr lang="en-US" altLang="ko-KR" sz="1600" dirty="0">
+              <a:solidFill>
+                <a:srgbClr val="00B0F0"/>
+              </a:solidFill>
+              <a:latin typeface="D2Coding" panose="020B0609020101020101" pitchFamily="49" charset="-127"/>
+              <a:ea typeface="D2Coding" panose="020B0609020101020101" pitchFamily="49" charset="-127"/>
+              <a:sym typeface="Wingdings" panose="05000000000000000000" pitchFamily="2" charset="2"/>
+              <a:hlinkClick r:id="rId4">
+                <a:extLst>
+                  <a:ext uri="{A12FA001-AC4F-418D-AE19-62706E023703}">
+                    <ahyp:hlinkClr xmlns:ahyp="http://schemas.microsoft.com/office/drawing/2018/hyperlinkcolor" val="tx"/>
+                  </a:ext>
+                </a:extLst>
+              </a:hlinkClick>
+            </a:endParaRPr>
+          </a:p>
+        </p:txBody>
+      </p:sp>
+      <p:pic>
+        <p:nvPicPr>
+          <p:cNvPr id="7170" name="Picture 2">
+            <a:extLst>
+              <a:ext uri="{FF2B5EF4-FFF2-40B4-BE49-F238E27FC236}">
+                <a16:creationId xmlns:a16="http://schemas.microsoft.com/office/drawing/2014/main" id="{89325022-F44F-28CE-80B9-BB4EE199D3BB}"/>
+              </a:ext>
+            </a:extLst>
+          </p:cNvPr>
+          <p:cNvPicPr>
+            <a:picLocks noChangeAspect="1" noChangeArrowheads="1"/>
+          </p:cNvPicPr>
+          <p:nvPr/>
+        </p:nvPicPr>
+        <p:blipFill>
+          <a:blip r:embed="rId5">
+            <a:extLst>
+              <a:ext uri="{28A0092B-C50C-407E-A947-70E740481C1C}">
+                <a14:useLocalDpi xmlns:a14="http://schemas.microsoft.com/office/drawing/2010/main" val="0"/>
+              </a:ext>
+            </a:extLst>
+          </a:blip>
+          <a:srcRect/>
+          <a:stretch>
+            <a:fillRect/>
+          </a:stretch>
+        </p:blipFill>
+        <p:spPr bwMode="auto">
+          <a:xfrm>
+            <a:off x="2956346" y="3952320"/>
+            <a:ext cx="7706942" cy="2250869"/>
+          </a:xfrm>
+          <a:prstGeom prst="rect">
+            <a:avLst/>
+          </a:prstGeom>
+          <a:noFill/>
+          <a:extLst>
+            <a:ext uri="{909E8E84-426E-40DD-AFC4-6F175D3DCCD1}">
+              <a14:hiddenFill xmlns:a14="http://schemas.microsoft.com/office/drawing/2010/main">
+                <a:solidFill>
+                  <a:srgbClr val="FFFFFF"/>
+                </a:solidFill>
+              </a14:hiddenFill>
+            </a:ext>
+          </a:extLst>
+        </p:spPr>
+      </p:pic>
+      <p:sp>
+        <p:nvSpPr>
+          <p:cNvPr id="8" name="TextBox 7">
+            <a:extLst>
+              <a:ext uri="{FF2B5EF4-FFF2-40B4-BE49-F238E27FC236}">
+                <a16:creationId xmlns:a16="http://schemas.microsoft.com/office/drawing/2014/main" id="{E82D5D71-8A2C-B6C7-94E2-6246C77FA68F}"/>
+              </a:ext>
+            </a:extLst>
+          </p:cNvPr>
+          <p:cNvSpPr txBox="1"/>
+          <p:nvPr/>
+        </p:nvSpPr>
+        <p:spPr>
+          <a:xfrm>
+            <a:off x="1032296" y="3952320"/>
+            <a:ext cx="2987254" cy="338554"/>
+          </a:xfrm>
+          <a:prstGeom prst="rect">
+            <a:avLst/>
+          </a:prstGeom>
+          <a:noFill/>
+        </p:spPr>
+        <p:txBody>
+          <a:bodyPr wrap="square">
+            <a:spAutoFit/>
+          </a:bodyPr>
+          <a:lstStyle/>
+          <a:p>
+            <a:r>
+              <a:rPr lang="en-US" altLang="ko-KR" sz="1600" dirty="0">
+                <a:latin typeface="D2Coding" panose="020B0609020101020101" pitchFamily="49" charset="-127"/>
+                <a:ea typeface="D2Coding" panose="020B0609020101020101" pitchFamily="49" charset="-127"/>
+                <a:sym typeface="Wingdings" panose="05000000000000000000" pitchFamily="2" charset="2"/>
+              </a:rPr>
+              <a:t>Deep Learning </a:t>
+            </a:r>
+            <a:r>
+              <a:rPr lang="ko-KR" altLang="en-US" sz="1600" dirty="0">
+                <a:latin typeface="D2Coding" panose="020B0609020101020101" pitchFamily="49" charset="-127"/>
+                <a:ea typeface="D2Coding" panose="020B0609020101020101" pitchFamily="49" charset="-127"/>
+                <a:sym typeface="Wingdings" panose="05000000000000000000" pitchFamily="2" charset="2"/>
+              </a:rPr>
+              <a:t>방식</a:t>
+            </a:r>
+            <a:endParaRPr lang="en-US" altLang="ko-KR" sz="1600" dirty="0">
+              <a:latin typeface="D2Coding" panose="020B0609020101020101" pitchFamily="49" charset="-127"/>
+              <a:ea typeface="D2Coding" panose="020B0609020101020101" pitchFamily="49" charset="-127"/>
+              <a:sym typeface="Wingdings" panose="05000000000000000000" pitchFamily="2" charset="2"/>
+            </a:endParaRPr>
+          </a:p>
+        </p:txBody>
+      </p:sp>
+      <p:sp>
+        <p:nvSpPr>
+          <p:cNvPr id="13" name="TextBox 12">
+            <a:extLst>
+              <a:ext uri="{FF2B5EF4-FFF2-40B4-BE49-F238E27FC236}">
+                <a16:creationId xmlns:a16="http://schemas.microsoft.com/office/drawing/2014/main" id="{AB389590-FF1D-9EAF-473E-0BAF0CF7372B}"/>
+              </a:ext>
+            </a:extLst>
+          </p:cNvPr>
+          <p:cNvSpPr txBox="1"/>
+          <p:nvPr/>
+        </p:nvSpPr>
+        <p:spPr>
+          <a:xfrm>
+            <a:off x="10663288" y="5205264"/>
+            <a:ext cx="1053067" cy="830997"/>
+          </a:xfrm>
+          <a:prstGeom prst="rect">
+            <a:avLst/>
+          </a:prstGeom>
+          <a:noFill/>
+        </p:spPr>
+        <p:txBody>
+          <a:bodyPr wrap="square">
+            <a:spAutoFit/>
+          </a:bodyPr>
+          <a:lstStyle/>
+          <a:p>
+            <a:r>
+              <a:rPr lang="ko-KR" altLang="en-US" sz="1200" dirty="0">
+                <a:latin typeface="D2Coding" panose="020B0609020101020101" pitchFamily="49" charset="-127"/>
+                <a:ea typeface="D2Coding" panose="020B0609020101020101" pitchFamily="49" charset="-127"/>
+              </a:rPr>
+              <a:t>(</a:t>
+            </a:r>
+            <a:r>
+              <a:rPr lang="ko-KR" altLang="en-US" sz="1200" dirty="0" err="1">
+                <a:latin typeface="D2Coding" panose="020B0609020101020101" pitchFamily="49" charset="-127"/>
+                <a:ea typeface="D2Coding" panose="020B0609020101020101" pitchFamily="49" charset="-127"/>
+              </a:rPr>
+              <a:t>batch</a:t>
+            </a:r>
+            <a:r>
+              <a:rPr lang="ko-KR" altLang="en-US" sz="1200" dirty="0">
+                <a:latin typeface="D2Coding" panose="020B0609020101020101" pitchFamily="49" charset="-127"/>
+                <a:ea typeface="D2Coding" panose="020B0609020101020101" pitchFamily="49" charset="-127"/>
+              </a:rPr>
+              <a:t>, </a:t>
+            </a:r>
+            <a:r>
+              <a:rPr lang="ko-KR" altLang="en-US" sz="1200" dirty="0" err="1">
+                <a:latin typeface="D2Coding" panose="020B0609020101020101" pitchFamily="49" charset="-127"/>
+                <a:ea typeface="D2Coding" panose="020B0609020101020101" pitchFamily="49" charset="-127"/>
+              </a:rPr>
+              <a:t>embedding</a:t>
+            </a:r>
+            <a:r>
+              <a:rPr lang="ko-KR" altLang="en-US" sz="1200" dirty="0">
+                <a:latin typeface="D2Coding" panose="020B0609020101020101" pitchFamily="49" charset="-127"/>
+                <a:ea typeface="D2Coding" panose="020B0609020101020101" pitchFamily="49" charset="-127"/>
+              </a:rPr>
+              <a:t> </a:t>
+            </a:r>
+            <a:r>
+              <a:rPr lang="ko-KR" altLang="en-US" sz="1200" dirty="0" err="1">
+                <a:latin typeface="D2Coding" panose="020B0609020101020101" pitchFamily="49" charset="-127"/>
+                <a:ea typeface="D2Coding" panose="020B0609020101020101" pitchFamily="49" charset="-127"/>
+              </a:rPr>
+              <a:t>size</a:t>
+            </a:r>
+            <a:r>
+              <a:rPr lang="ko-KR" altLang="en-US" sz="1200" dirty="0">
+                <a:latin typeface="D2Coding" panose="020B0609020101020101" pitchFamily="49" charset="-127"/>
+                <a:ea typeface="D2Coding" panose="020B0609020101020101" pitchFamily="49" charset="-127"/>
+              </a:rPr>
+              <a:t> 표기 오류)</a:t>
+            </a:r>
+          </a:p>
+        </p:txBody>
+      </p:sp>
+    </p:spTree>
+    <p:extLst>
+      <p:ext uri="{BB962C8B-B14F-4D97-AF65-F5344CB8AC3E}">
+        <p14:creationId xmlns:p14="http://schemas.microsoft.com/office/powerpoint/2010/main" val="2322676009"/>
+      </p:ext>
+    </p:extLst>
+  </p:cSld>
+  <p:clrMapOvr>
+    <a:masterClrMapping/>
+  </p:clrMapOvr>
+</p:sld>
+</file>
+
+<file path=ppt/slides/slide11.xml><?xml version="1.0" encoding="utf-8"?>
+<p:sld xmlns:a="http://schemas.openxmlformats.org/drawingml/2006/main" xmlns:r="http://schemas.openxmlformats.org/officeDocument/2006/relationships" xmlns:p="http://schemas.openxmlformats.org/presentationml/2006/main">
+  <p:cSld>
+    <p:spTree>
+      <p:nvGrpSpPr>
+        <p:cNvPr id="1" name="">
+          <a:extLst>
+            <a:ext uri="{FF2B5EF4-FFF2-40B4-BE49-F238E27FC236}">
+              <a16:creationId xmlns:a16="http://schemas.microsoft.com/office/drawing/2014/main" id="{82B53C72-47F2-5508-A63D-0B7F6B1E324F}"/>
+            </a:ext>
+          </a:extLst>
+        </p:cNvPr>
+        <p:cNvGrpSpPr/>
+        <p:nvPr/>
+      </p:nvGrpSpPr>
+      <p:grpSpPr>
+        <a:xfrm>
+          <a:off x="0" y="0"/>
+          <a:ext cx="0" cy="0"/>
+          <a:chOff x="0" y="0"/>
+          <a:chExt cx="0" cy="0"/>
+        </a:xfrm>
+      </p:grpSpPr>
+      <p:sp>
+        <p:nvSpPr>
+          <p:cNvPr id="4" name="슬라이드 번호 개체 틀 3">
+            <a:extLst>
+              <a:ext uri="{FF2B5EF4-FFF2-40B4-BE49-F238E27FC236}">
+                <a16:creationId xmlns:a16="http://schemas.microsoft.com/office/drawing/2014/main" id="{E7F0D95A-8383-F535-0C6D-6B10395D5C95}"/>
+              </a:ext>
+            </a:extLst>
+          </p:cNvPr>
+          <p:cNvSpPr>
+            <a:spLocks noGrp="1"/>
+          </p:cNvSpPr>
+          <p:nvPr>
+            <p:ph type="sldNum" sz="quarter" idx="12"/>
+          </p:nvPr>
+        </p:nvSpPr>
+        <p:spPr>
+          <a:xfrm>
+            <a:off x="10514011" y="6036261"/>
+            <a:ext cx="753545" cy="365125"/>
+          </a:xfrm>
+        </p:spPr>
+        <p:txBody>
+          <a:bodyPr/>
+          <a:lstStyle/>
+          <a:p>
+            <a:fld id="{D57F1E4F-1CFF-5643-939E-217C01CDF565}" type="slidenum">
+              <a:rPr lang="en-US" smtClean="0"/>
+              <a:pPr/>
+              <a:t>11</a:t>
+            </a:fld>
+            <a:endParaRPr lang="en-US" dirty="0"/>
+          </a:p>
+        </p:txBody>
+      </p:sp>
+      <p:sp>
+        <p:nvSpPr>
+          <p:cNvPr id="3" name="제목 1">
+            <a:extLst>
+              <a:ext uri="{FF2B5EF4-FFF2-40B4-BE49-F238E27FC236}">
+                <a16:creationId xmlns:a16="http://schemas.microsoft.com/office/drawing/2014/main" id="{1D1BBD92-1479-E67B-78C7-C5D24F49D0A3}"/>
+              </a:ext>
+            </a:extLst>
+          </p:cNvPr>
+          <p:cNvSpPr txBox="1">
+            <a:spLocks/>
+          </p:cNvSpPr>
+          <p:nvPr/>
+        </p:nvSpPr>
+        <p:spPr>
+          <a:xfrm>
+            <a:off x="475645" y="481983"/>
+            <a:ext cx="10353762" cy="766439"/>
+          </a:xfrm>
+          <a:prstGeom prst="rect">
+            <a:avLst/>
+          </a:prstGeom>
+        </p:spPr>
+        <p:txBody>
+          <a:bodyPr vert="horz" lIns="91440" tIns="45720" rIns="91440" bIns="45720" rtlCol="0" anchor="ctr">
+            <a:normAutofit/>
+          </a:bodyPr>
+          <a:lstStyle>
+            <a:lvl1pPr algn="ctr" defTabSz="914400" rtl="0" eaLnBrk="1" latinLnBrk="1" hangingPunct="1">
+              <a:lnSpc>
+                <a:spcPct val="90000"/>
+              </a:lnSpc>
+              <a:spcBef>
+                <a:spcPct val="0"/>
+              </a:spcBef>
+              <a:buNone/>
+              <a:defRPr sz="3200" kern="1200" cap="all" baseline="0">
+                <a:solidFill>
+                  <a:schemeClr val="tx1"/>
+                </a:solidFill>
+                <a:effectLst/>
+                <a:latin typeface="Batang" panose="02030600000101010101" pitchFamily="18" charset="-127"/>
+                <a:ea typeface="Batang" panose="02030600000101010101" pitchFamily="18" charset="-127"/>
+                <a:cs typeface="+mj-cs"/>
+              </a:defRPr>
+            </a:lvl1pPr>
+          </a:lstStyle>
+          <a:p>
+            <a:pPr algn="l"/>
+            <a:r>
+              <a:rPr lang="en-US" altLang="ko-KR" sz="2800" cap="none" dirty="0">
+                <a:solidFill>
+                  <a:schemeClr val="bg2">
+                    <a:lumMod val="25000"/>
+                  </a:schemeClr>
+                </a:solidFill>
+                <a:latin typeface="D2Coding" panose="020B0609020101020101" pitchFamily="49" charset="-127"/>
+                <a:ea typeface="D2Coding" panose="020B0609020101020101" pitchFamily="49" charset="-127"/>
+                <a:cs typeface="Segoe UI Light" panose="020B0502040204020203" pitchFamily="34" charset="0"/>
+              </a:rPr>
+              <a:t>LLM-Based Embeddings </a:t>
+            </a:r>
+            <a:endParaRPr lang="ko-KR" altLang="en-US" sz="2800" cap="none" dirty="0">
+              <a:solidFill>
+                <a:schemeClr val="bg2">
+                  <a:lumMod val="25000"/>
+                </a:schemeClr>
+              </a:solidFill>
+              <a:latin typeface="D2Coding" panose="020B0609020101020101" pitchFamily="49" charset="-127"/>
+              <a:ea typeface="D2Coding" panose="020B0609020101020101" pitchFamily="49" charset="-127"/>
+              <a:cs typeface="Segoe UI Light" panose="020B0502040204020203" pitchFamily="34" charset="0"/>
+            </a:endParaRPr>
+          </a:p>
+        </p:txBody>
+      </p:sp>
+      <p:sp>
+        <p:nvSpPr>
+          <p:cNvPr id="10" name="TextBox 9">
+            <a:extLst>
+              <a:ext uri="{FF2B5EF4-FFF2-40B4-BE49-F238E27FC236}">
+                <a16:creationId xmlns:a16="http://schemas.microsoft.com/office/drawing/2014/main" id="{5822BDDC-F9DD-C4E6-9584-AEF9DD3F222A}"/>
+              </a:ext>
+            </a:extLst>
+          </p:cNvPr>
+          <p:cNvSpPr txBox="1"/>
+          <p:nvPr/>
+        </p:nvSpPr>
+        <p:spPr>
+          <a:xfrm>
+            <a:off x="685800" y="1498036"/>
+            <a:ext cx="5276850" cy="338554"/>
+          </a:xfrm>
+          <a:prstGeom prst="rect">
+            <a:avLst/>
+          </a:prstGeom>
+          <a:solidFill>
+            <a:schemeClr val="tx1"/>
+          </a:solidFill>
+        </p:spPr>
+        <p:txBody>
+          <a:bodyPr wrap="square">
+            <a:spAutoFit/>
+          </a:bodyPr>
+          <a:lstStyle/>
+          <a:p>
+            <a:pPr marL="285750" indent="-285750">
+              <a:buFont typeface="Wingdings" panose="05000000000000000000" pitchFamily="2" charset="2"/>
+              <a:buChar char="v"/>
+            </a:pPr>
+            <a:r>
+              <a:rPr lang="ko-KR" altLang="ko-KR" sz="1600" dirty="0">
+                <a:solidFill>
+                  <a:schemeClr val="bg1"/>
+                </a:solidFill>
+                <a:latin typeface="D2Coding" panose="020B0609020101020101" pitchFamily="49" charset="-127"/>
+                <a:ea typeface="D2Coding" panose="020B0609020101020101" pitchFamily="49" charset="-127"/>
+              </a:rPr>
+              <a:t>1단계: </a:t>
+            </a:r>
+            <a:r>
+              <a:rPr lang="en-US" altLang="ko-KR" sz="1600" dirty="0">
+                <a:solidFill>
+                  <a:schemeClr val="bg1"/>
+                </a:solidFill>
+                <a:latin typeface="D2Coding" panose="020B0609020101020101" pitchFamily="49" charset="-127"/>
+                <a:ea typeface="D2Coding" panose="020B0609020101020101" pitchFamily="49" charset="-127"/>
+              </a:rPr>
+              <a:t>Converting Your Documents into Text</a:t>
+            </a:r>
+            <a:endParaRPr lang="ko-KR" altLang="en-US" sz="1600" dirty="0">
+              <a:solidFill>
+                <a:schemeClr val="bg1"/>
+              </a:solidFill>
+              <a:latin typeface="D2Coding" panose="020B0609020101020101" pitchFamily="49" charset="-127"/>
+              <a:ea typeface="D2Coding" panose="020B0609020101020101" pitchFamily="49" charset="-127"/>
+            </a:endParaRPr>
+          </a:p>
+        </p:txBody>
+      </p:sp>
+      <p:sp>
+        <p:nvSpPr>
+          <p:cNvPr id="12" name="TextBox 11">
+            <a:extLst>
+              <a:ext uri="{FF2B5EF4-FFF2-40B4-BE49-F238E27FC236}">
+                <a16:creationId xmlns:a16="http://schemas.microsoft.com/office/drawing/2014/main" id="{F51F35B0-F14F-6A58-E813-62D6843EFA9D}"/>
+              </a:ext>
+            </a:extLst>
+          </p:cNvPr>
+          <p:cNvSpPr txBox="1"/>
+          <p:nvPr/>
+        </p:nvSpPr>
+        <p:spPr>
+          <a:xfrm>
+            <a:off x="685800" y="3539391"/>
+            <a:ext cx="6096000" cy="338554"/>
+          </a:xfrm>
+          <a:prstGeom prst="rect">
+            <a:avLst/>
+          </a:prstGeom>
+          <a:solidFill>
+            <a:schemeClr val="tx1"/>
+          </a:solidFill>
+        </p:spPr>
+        <p:txBody>
+          <a:bodyPr wrap="square">
+            <a:spAutoFit/>
+          </a:bodyPr>
+          <a:lstStyle/>
+          <a:p>
+            <a:pPr marL="285750" indent="-285750">
+              <a:buFont typeface="Wingdings" panose="05000000000000000000" pitchFamily="2" charset="2"/>
+              <a:buChar char="v"/>
+            </a:pPr>
+            <a:r>
+              <a:rPr lang="ko-KR" altLang="ko-KR" sz="1600" dirty="0">
+                <a:solidFill>
+                  <a:schemeClr val="bg1"/>
+                </a:solidFill>
+                <a:latin typeface="D2Coding" panose="020B0609020101020101" pitchFamily="49" charset="-127"/>
+                <a:ea typeface="D2Coding" panose="020B0609020101020101" pitchFamily="49" charset="-127"/>
+              </a:rPr>
+              <a:t>2단계: </a:t>
+            </a:r>
+            <a:r>
+              <a:rPr lang="en-US" altLang="ko-KR" sz="1600" dirty="0">
+                <a:solidFill>
+                  <a:schemeClr val="bg1"/>
+                </a:solidFill>
+                <a:latin typeface="D2Coding" panose="020B0609020101020101" pitchFamily="49" charset="-127"/>
+                <a:ea typeface="D2Coding" panose="020B0609020101020101" pitchFamily="49" charset="-127"/>
+              </a:rPr>
+              <a:t>Splitting Your Text into Chunks</a:t>
+            </a:r>
+            <a:endParaRPr lang="ko-KR" altLang="en-US" sz="1600" dirty="0">
+              <a:solidFill>
+                <a:schemeClr val="bg1"/>
+              </a:solidFill>
+              <a:latin typeface="D2Coding" panose="020B0609020101020101" pitchFamily="49" charset="-127"/>
+              <a:ea typeface="D2Coding" panose="020B0609020101020101" pitchFamily="49" charset="-127"/>
+            </a:endParaRPr>
+          </a:p>
+        </p:txBody>
+      </p:sp>
+      <p:sp>
+        <p:nvSpPr>
+          <p:cNvPr id="15" name="TextBox 14">
+            <a:extLst>
+              <a:ext uri="{FF2B5EF4-FFF2-40B4-BE49-F238E27FC236}">
+                <a16:creationId xmlns:a16="http://schemas.microsoft.com/office/drawing/2014/main" id="{333A03B0-E773-EF70-78FD-4D01CB3D1FB2}"/>
+              </a:ext>
+            </a:extLst>
+          </p:cNvPr>
+          <p:cNvSpPr txBox="1"/>
+          <p:nvPr/>
+        </p:nvSpPr>
+        <p:spPr>
+          <a:xfrm>
+            <a:off x="5715000" y="2068259"/>
+            <a:ext cx="6191250" cy="1118255"/>
+          </a:xfrm>
+          <a:prstGeom prst="rect">
+            <a:avLst/>
+          </a:prstGeom>
+          <a:solidFill>
+            <a:srgbClr val="76E3FF"/>
+          </a:solidFill>
+        </p:spPr>
+        <p:txBody>
+          <a:bodyPr wrap="square">
+            <a:spAutoFit/>
+          </a:bodyPr>
+          <a:lstStyle/>
+          <a:p>
+            <a:pPr>
+              <a:lnSpc>
+                <a:spcPts val="1575"/>
+              </a:lnSpc>
+              <a:buNone/>
+            </a:pPr>
+            <a:r>
+              <a:rPr lang="en-US" altLang="ko-KR" sz="1400" b="0" dirty="0">
+                <a:effectLst/>
+                <a:latin typeface="D2Coding" panose="020B0609020101020101" pitchFamily="49" charset="-127"/>
+                <a:ea typeface="D2Coding" panose="020B0609020101020101" pitchFamily="49" charset="-127"/>
+              </a:rPr>
+              <a:t>from </a:t>
+            </a:r>
+            <a:r>
+              <a:rPr lang="en-US" altLang="ko-KR" sz="1400" b="0" dirty="0" err="1">
+                <a:effectLst/>
+                <a:latin typeface="D2Coding" panose="020B0609020101020101" pitchFamily="49" charset="-127"/>
+                <a:ea typeface="D2Coding" panose="020B0609020101020101" pitchFamily="49" charset="-127"/>
+              </a:rPr>
+              <a:t>langchain_community.document_loaders</a:t>
+            </a:r>
+            <a:r>
+              <a:rPr lang="en-US" altLang="ko-KR" sz="1400" b="0" dirty="0">
+                <a:effectLst/>
+                <a:latin typeface="D2Coding" panose="020B0609020101020101" pitchFamily="49" charset="-127"/>
+                <a:ea typeface="D2Coding" panose="020B0609020101020101" pitchFamily="49" charset="-127"/>
+              </a:rPr>
+              <a:t> import </a:t>
+            </a:r>
+            <a:r>
+              <a:rPr lang="en-US" altLang="ko-KR" sz="1400" b="0" dirty="0" err="1">
+                <a:effectLst/>
+                <a:latin typeface="D2Coding" panose="020B0609020101020101" pitchFamily="49" charset="-127"/>
+                <a:ea typeface="D2Coding" panose="020B0609020101020101" pitchFamily="49" charset="-127"/>
+              </a:rPr>
+              <a:t>PyPDFLoader</a:t>
+            </a:r>
+            <a:endParaRPr lang="en-US" altLang="ko-KR" sz="1400" b="0" dirty="0">
+              <a:effectLst/>
+              <a:latin typeface="D2Coding" panose="020B0609020101020101" pitchFamily="49" charset="-127"/>
+              <a:ea typeface="D2Coding" panose="020B0609020101020101" pitchFamily="49" charset="-127"/>
+            </a:endParaRPr>
+          </a:p>
+          <a:p>
+            <a:pPr>
+              <a:lnSpc>
+                <a:spcPts val="1575"/>
+              </a:lnSpc>
+              <a:buNone/>
+            </a:pPr>
+            <a:endParaRPr lang="en-US" altLang="ko-KR" sz="1400" b="0" dirty="0">
+              <a:effectLst/>
+              <a:latin typeface="D2Coding" panose="020B0609020101020101" pitchFamily="49" charset="-127"/>
+              <a:ea typeface="D2Coding" panose="020B0609020101020101" pitchFamily="49" charset="-127"/>
+            </a:endParaRPr>
+          </a:p>
+          <a:p>
+            <a:pPr>
+              <a:lnSpc>
+                <a:spcPts val="1575"/>
+              </a:lnSpc>
+            </a:pPr>
+            <a:r>
+              <a:rPr lang="en-US" altLang="ko-KR" sz="1400" dirty="0">
+                <a:latin typeface="D2Coding" panose="020B0609020101020101" pitchFamily="49" charset="-127"/>
+                <a:ea typeface="D2Coding" panose="020B0609020101020101" pitchFamily="49" charset="-127"/>
+              </a:rPr>
+              <a:t>loader = </a:t>
+            </a:r>
+            <a:r>
+              <a:rPr lang="en-US" altLang="ko-KR" sz="1400" dirty="0" err="1">
+                <a:latin typeface="D2Coding" panose="020B0609020101020101" pitchFamily="49" charset="-127"/>
+                <a:ea typeface="D2Coding" panose="020B0609020101020101" pitchFamily="49" charset="-127"/>
+              </a:rPr>
+              <a:t>TextLoader</a:t>
+            </a:r>
+            <a:r>
+              <a:rPr lang="en-US" altLang="ko-KR" sz="1400" dirty="0">
+                <a:latin typeface="D2Coding" panose="020B0609020101020101" pitchFamily="49" charset="-127"/>
+                <a:ea typeface="D2Coding" panose="020B0609020101020101" pitchFamily="49" charset="-127"/>
+              </a:rPr>
+              <a:t>('./test.txt', encoding="utf-8")</a:t>
+            </a:r>
+          </a:p>
+          <a:p>
+            <a:pPr>
+              <a:lnSpc>
+                <a:spcPts val="1575"/>
+              </a:lnSpc>
+            </a:pPr>
+            <a:endParaRPr lang="en-US" altLang="ko-KR" sz="1400" dirty="0">
+              <a:latin typeface="D2Coding" panose="020B0609020101020101" pitchFamily="49" charset="-127"/>
+              <a:ea typeface="D2Coding" panose="020B0609020101020101" pitchFamily="49" charset="-127"/>
+            </a:endParaRPr>
+          </a:p>
+          <a:p>
+            <a:pPr>
+              <a:lnSpc>
+                <a:spcPts val="1575"/>
+              </a:lnSpc>
+            </a:pPr>
+            <a:r>
+              <a:rPr lang="en-US" altLang="ko-KR" sz="1400" dirty="0">
+                <a:latin typeface="D2Coding" panose="020B0609020101020101" pitchFamily="49" charset="-127"/>
+                <a:ea typeface="D2Coding" panose="020B0609020101020101" pitchFamily="49" charset="-127"/>
+              </a:rPr>
+              <a:t>docs = </a:t>
+            </a:r>
+            <a:r>
+              <a:rPr lang="en-US" altLang="ko-KR" sz="1400" dirty="0" err="1">
+                <a:latin typeface="D2Coding" panose="020B0609020101020101" pitchFamily="49" charset="-127"/>
+                <a:ea typeface="D2Coding" panose="020B0609020101020101" pitchFamily="49" charset="-127"/>
+              </a:rPr>
+              <a:t>loader.load</a:t>
+            </a:r>
+            <a:r>
+              <a:rPr lang="en-US" altLang="ko-KR" sz="1400" dirty="0">
+                <a:latin typeface="D2Coding" panose="020B0609020101020101" pitchFamily="49" charset="-127"/>
+                <a:ea typeface="D2Coding" panose="020B0609020101020101" pitchFamily="49" charset="-127"/>
+              </a:rPr>
+              <a:t>()</a:t>
+            </a:r>
+          </a:p>
+        </p:txBody>
+      </p:sp>
+      <p:sp>
+        <p:nvSpPr>
+          <p:cNvPr id="22" name="TextBox 21">
+            <a:extLst>
+              <a:ext uri="{FF2B5EF4-FFF2-40B4-BE49-F238E27FC236}">
+                <a16:creationId xmlns:a16="http://schemas.microsoft.com/office/drawing/2014/main" id="{DF3E8D59-9B61-237D-A043-C8A932077354}"/>
+              </a:ext>
+            </a:extLst>
+          </p:cNvPr>
+          <p:cNvSpPr txBox="1"/>
+          <p:nvPr/>
+        </p:nvSpPr>
+        <p:spPr>
+          <a:xfrm>
+            <a:off x="1666875" y="4980581"/>
+            <a:ext cx="3762375" cy="1200329"/>
+          </a:xfrm>
+          <a:prstGeom prst="rect">
+            <a:avLst/>
+          </a:prstGeom>
+          <a:noFill/>
+        </p:spPr>
+        <p:txBody>
+          <a:bodyPr wrap="square">
+            <a:spAutoFit/>
+          </a:bodyPr>
+          <a:lstStyle/>
+          <a:p>
+            <a:pPr algn="ctr"/>
+            <a:r>
+              <a:rPr lang="ko-KR" altLang="en-US" sz="1200" dirty="0">
+                <a:latin typeface="D2Coding" panose="020B0609020101020101" pitchFamily="49" charset="-127"/>
+                <a:ea typeface="D2Coding" panose="020B0609020101020101" pitchFamily="49" charset="-127"/>
+              </a:rPr>
+              <a:t>불러온 문서의 길이가 </a:t>
+            </a:r>
+            <a:r>
+              <a:rPr lang="en-US" altLang="ko-KR" sz="1200" dirty="0">
+                <a:latin typeface="D2Coding" panose="020B0609020101020101" pitchFamily="49" charset="-127"/>
+                <a:ea typeface="D2Coding" panose="020B0609020101020101" pitchFamily="49" charset="-127"/>
+              </a:rPr>
+              <a:t>10</a:t>
+            </a:r>
+            <a:r>
+              <a:rPr lang="ko-KR" altLang="en-US" sz="1200" dirty="0">
+                <a:latin typeface="D2Coding" panose="020B0609020101020101" pitchFamily="49" charset="-127"/>
+                <a:ea typeface="D2Coding" panose="020B0609020101020101" pitchFamily="49" charset="-127"/>
+              </a:rPr>
+              <a:t>만 자를 넘게 되어</a:t>
+            </a:r>
+            <a:r>
+              <a:rPr lang="en-US" altLang="ko-KR" sz="1200" dirty="0">
+                <a:latin typeface="D2Coding" panose="020B0609020101020101" pitchFamily="49" charset="-127"/>
+                <a:ea typeface="D2Coding" panose="020B0609020101020101" pitchFamily="49" charset="-127"/>
+              </a:rPr>
+              <a:t> LLM(</a:t>
+            </a:r>
+            <a:r>
+              <a:rPr lang="ko-KR" altLang="en-US" sz="1200" dirty="0">
+                <a:latin typeface="D2Coding" panose="020B0609020101020101" pitchFamily="49" charset="-127"/>
+                <a:ea typeface="D2Coding" panose="020B0609020101020101" pitchFamily="49" charset="-127"/>
+              </a:rPr>
+              <a:t>대형 언어 모델</a:t>
+            </a:r>
+            <a:r>
+              <a:rPr lang="en-US" altLang="ko-KR" sz="1200" dirty="0">
+                <a:latin typeface="D2Coding" panose="020B0609020101020101" pitchFamily="49" charset="-127"/>
+                <a:ea typeface="D2Coding" panose="020B0609020101020101" pitchFamily="49" charset="-127"/>
+              </a:rPr>
+              <a:t>)</a:t>
+            </a:r>
+            <a:r>
+              <a:rPr lang="ko-KR" altLang="en-US" sz="1200" dirty="0">
+                <a:latin typeface="D2Coding" panose="020B0609020101020101" pitchFamily="49" charset="-127"/>
+                <a:ea typeface="D2Coding" panose="020B0609020101020101" pitchFamily="49" charset="-127"/>
+              </a:rPr>
+              <a:t>이나 </a:t>
+            </a:r>
+            <a:r>
+              <a:rPr lang="ko-KR" altLang="en-US" sz="1200" dirty="0" err="1">
+                <a:latin typeface="D2Coding" panose="020B0609020101020101" pitchFamily="49" charset="-127"/>
+                <a:ea typeface="D2Coding" panose="020B0609020101020101" pitchFamily="49" charset="-127"/>
+              </a:rPr>
+              <a:t>임베딩</a:t>
+            </a:r>
+            <a:r>
+              <a:rPr lang="ko-KR" altLang="en-US" sz="1200" dirty="0">
+                <a:latin typeface="D2Coding" panose="020B0609020101020101" pitchFamily="49" charset="-127"/>
+                <a:ea typeface="D2Coding" panose="020B0609020101020101" pitchFamily="49" charset="-127"/>
+              </a:rPr>
+              <a:t> 모델의 컨텍스트 창</a:t>
+            </a:r>
+            <a:r>
+              <a:rPr lang="en-US" altLang="ko-KR" sz="1200" dirty="0">
+                <a:latin typeface="D2Coding" panose="020B0609020101020101" pitchFamily="49" charset="-127"/>
+                <a:ea typeface="D2Coding" panose="020B0609020101020101" pitchFamily="49" charset="-127"/>
+              </a:rPr>
+              <a:t>(Context Window, </a:t>
+            </a:r>
+            <a:r>
+              <a:rPr lang="ko-KR" altLang="en-US" sz="1200" dirty="0">
+                <a:latin typeface="D2Coding" panose="020B0609020101020101" pitchFamily="49" charset="-127"/>
+                <a:ea typeface="D2Coding" panose="020B0609020101020101" pitchFamily="49" charset="-127"/>
+              </a:rPr>
+              <a:t>한 번에 처리할 수 있는 텍스트 양</a:t>
+            </a:r>
+            <a:r>
+              <a:rPr lang="en-US" altLang="ko-KR" sz="1200" dirty="0">
+                <a:latin typeface="D2Coding" panose="020B0609020101020101" pitchFamily="49" charset="-127"/>
+                <a:ea typeface="D2Coding" panose="020B0609020101020101" pitchFamily="49" charset="-127"/>
+              </a:rPr>
+              <a:t>)</a:t>
+            </a:r>
+            <a:r>
+              <a:rPr lang="ko-KR" altLang="en-US" sz="1200" dirty="0">
+                <a:latin typeface="D2Coding" panose="020B0609020101020101" pitchFamily="49" charset="-127"/>
+                <a:ea typeface="D2Coding" panose="020B0609020101020101" pitchFamily="49" charset="-127"/>
+              </a:rPr>
+              <a:t>에 다 들어가지 않기 때문에 문서를 다루기 쉬운 크기의 </a:t>
+            </a:r>
+            <a:r>
+              <a:rPr lang="en-US" altLang="ko-KR" sz="1200" dirty="0">
+                <a:latin typeface="D2Coding" panose="020B0609020101020101" pitchFamily="49" charset="-127"/>
+                <a:ea typeface="D2Coding" panose="020B0609020101020101" pitchFamily="49" charset="-127"/>
+              </a:rPr>
+              <a:t>'</a:t>
+            </a:r>
+            <a:r>
+              <a:rPr lang="ko-KR" altLang="en-US" sz="1200" dirty="0">
+                <a:latin typeface="D2Coding" panose="020B0609020101020101" pitchFamily="49" charset="-127"/>
+                <a:ea typeface="D2Coding" panose="020B0609020101020101" pitchFamily="49" charset="-127"/>
+              </a:rPr>
+              <a:t>텍스트 조각</a:t>
+            </a:r>
+            <a:r>
+              <a:rPr lang="en-US" altLang="ko-KR" sz="1200" dirty="0">
+                <a:latin typeface="D2Coding" panose="020B0609020101020101" pitchFamily="49" charset="-127"/>
+                <a:ea typeface="D2Coding" panose="020B0609020101020101" pitchFamily="49" charset="-127"/>
+              </a:rPr>
+              <a:t>(Chunk, </a:t>
+            </a:r>
+            <a:r>
+              <a:rPr lang="ko-KR" altLang="en-US" sz="1200" dirty="0" err="1">
+                <a:latin typeface="D2Coding" panose="020B0609020101020101" pitchFamily="49" charset="-127"/>
+                <a:ea typeface="D2Coding" panose="020B0609020101020101" pitchFamily="49" charset="-127"/>
+              </a:rPr>
+              <a:t>청크</a:t>
+            </a:r>
+            <a:r>
+              <a:rPr lang="en-US" altLang="ko-KR" sz="1200" dirty="0">
+                <a:latin typeface="D2Coding" panose="020B0609020101020101" pitchFamily="49" charset="-127"/>
+                <a:ea typeface="D2Coding" panose="020B0609020101020101" pitchFamily="49" charset="-127"/>
+              </a:rPr>
+              <a:t>)'</a:t>
+            </a:r>
+            <a:r>
+              <a:rPr lang="ko-KR" altLang="en-US" sz="1200" dirty="0">
+                <a:latin typeface="D2Coding" panose="020B0609020101020101" pitchFamily="49" charset="-127"/>
+                <a:ea typeface="D2Coding" panose="020B0609020101020101" pitchFamily="49" charset="-127"/>
+              </a:rPr>
+              <a:t>들로 쪼개야 함</a:t>
+            </a:r>
+          </a:p>
+        </p:txBody>
+      </p:sp>
+      <p:sp>
+        <p:nvSpPr>
+          <p:cNvPr id="24" name="TextBox 23">
+            <a:extLst>
+              <a:ext uri="{FF2B5EF4-FFF2-40B4-BE49-F238E27FC236}">
+                <a16:creationId xmlns:a16="http://schemas.microsoft.com/office/drawing/2014/main" id="{153FCADF-A26C-4232-F617-92DDC3C700FE}"/>
+              </a:ext>
+            </a:extLst>
+          </p:cNvPr>
+          <p:cNvSpPr txBox="1"/>
+          <p:nvPr/>
+        </p:nvSpPr>
+        <p:spPr>
+          <a:xfrm>
+            <a:off x="5715000" y="4098169"/>
+            <a:ext cx="6191250" cy="1323439"/>
+          </a:xfrm>
+          <a:prstGeom prst="rect">
+            <a:avLst/>
+          </a:prstGeom>
+          <a:solidFill>
+            <a:srgbClr val="76E3FF"/>
+          </a:solidFill>
+        </p:spPr>
+        <p:txBody>
+          <a:bodyPr wrap="square">
+            <a:spAutoFit/>
+          </a:bodyPr>
+          <a:lstStyle/>
+          <a:p>
+            <a:pPr>
+              <a:lnSpc>
+                <a:spcPts val="1575"/>
+              </a:lnSpc>
+            </a:pPr>
+            <a:r>
+              <a:rPr lang="en-US" altLang="ko-KR" sz="1400" dirty="0">
+                <a:latin typeface="D2Coding" panose="020B0609020101020101" pitchFamily="49" charset="-127"/>
+                <a:ea typeface="D2Coding" panose="020B0609020101020101" pitchFamily="49" charset="-127"/>
+              </a:rPr>
+              <a:t>from </a:t>
+            </a:r>
+            <a:r>
+              <a:rPr lang="en-US" altLang="ko-KR" sz="1400" dirty="0" err="1">
+                <a:latin typeface="D2Coding" panose="020B0609020101020101" pitchFamily="49" charset="-127"/>
+                <a:ea typeface="D2Coding" panose="020B0609020101020101" pitchFamily="49" charset="-127"/>
+              </a:rPr>
+              <a:t>langchain_text_splitters</a:t>
+            </a:r>
+            <a:r>
+              <a:rPr lang="en-US" altLang="ko-KR" sz="1400" dirty="0">
+                <a:latin typeface="D2Coding" panose="020B0609020101020101" pitchFamily="49" charset="-127"/>
+                <a:ea typeface="D2Coding" panose="020B0609020101020101" pitchFamily="49" charset="-127"/>
+              </a:rPr>
+              <a:t> import </a:t>
+            </a:r>
+            <a:r>
+              <a:rPr lang="en-US" altLang="ko-KR" sz="1400" dirty="0" err="1">
+                <a:latin typeface="D2Coding" panose="020B0609020101020101" pitchFamily="49" charset="-127"/>
+                <a:ea typeface="D2Coding" panose="020B0609020101020101" pitchFamily="49" charset="-127"/>
+              </a:rPr>
+              <a:t>RecursiveCharacterTextSplitter</a:t>
+            </a:r>
+            <a:br>
+              <a:rPr lang="en-US" altLang="ko-KR" sz="1400" dirty="0">
+                <a:latin typeface="D2Coding" panose="020B0609020101020101" pitchFamily="49" charset="-127"/>
+                <a:ea typeface="D2Coding" panose="020B0609020101020101" pitchFamily="49" charset="-127"/>
+              </a:rPr>
+            </a:br>
+            <a:endParaRPr lang="en-US" altLang="ko-KR" sz="1400" dirty="0">
+              <a:latin typeface="D2Coding" panose="020B0609020101020101" pitchFamily="49" charset="-127"/>
+              <a:ea typeface="D2Coding" panose="020B0609020101020101" pitchFamily="49" charset="-127"/>
+            </a:endParaRPr>
+          </a:p>
+          <a:p>
+            <a:pPr>
+              <a:lnSpc>
+                <a:spcPts val="1575"/>
+              </a:lnSpc>
+            </a:pPr>
+            <a:r>
+              <a:rPr lang="en-US" altLang="ko-KR" sz="1400" dirty="0">
+                <a:latin typeface="D2Coding" panose="020B0609020101020101" pitchFamily="49" charset="-127"/>
+                <a:ea typeface="D2Coding" panose="020B0609020101020101" pitchFamily="49" charset="-127"/>
+              </a:rPr>
+              <a:t>splitter = </a:t>
+            </a:r>
+            <a:r>
+              <a:rPr lang="en-US" altLang="ko-KR" sz="1400" dirty="0" err="1">
+                <a:latin typeface="D2Coding" panose="020B0609020101020101" pitchFamily="49" charset="-127"/>
+                <a:ea typeface="D2Coding" panose="020B0609020101020101" pitchFamily="49" charset="-127"/>
+              </a:rPr>
+              <a:t>RecursiveCharacterTextSplitter</a:t>
+            </a:r>
+            <a:r>
+              <a:rPr lang="en-US" altLang="ko-KR" sz="1400" dirty="0">
+                <a:latin typeface="D2Coding" panose="020B0609020101020101" pitchFamily="49" charset="-127"/>
+                <a:ea typeface="D2Coding" panose="020B0609020101020101" pitchFamily="49" charset="-127"/>
+              </a:rPr>
+              <a:t>(</a:t>
+            </a:r>
+            <a:r>
+              <a:rPr lang="en-US" altLang="ko-KR" sz="1400" dirty="0" err="1">
+                <a:latin typeface="D2Coding" panose="020B0609020101020101" pitchFamily="49" charset="-127"/>
+                <a:ea typeface="D2Coding" panose="020B0609020101020101" pitchFamily="49" charset="-127"/>
+              </a:rPr>
+              <a:t>chunk_size</a:t>
+            </a:r>
+            <a:r>
+              <a:rPr lang="en-US" altLang="ko-KR" sz="1400" dirty="0">
+                <a:latin typeface="D2Coding" panose="020B0609020101020101" pitchFamily="49" charset="-127"/>
+                <a:ea typeface="D2Coding" panose="020B0609020101020101" pitchFamily="49" charset="-127"/>
+              </a:rPr>
+              <a:t>=1000, </a:t>
+            </a:r>
+          </a:p>
+          <a:p>
+            <a:pPr>
+              <a:lnSpc>
+                <a:spcPts val="1575"/>
+              </a:lnSpc>
+            </a:pPr>
+            <a:r>
+              <a:rPr lang="en-US" altLang="ko-KR" sz="1400" dirty="0">
+                <a:latin typeface="D2Coding" panose="020B0609020101020101" pitchFamily="49" charset="-127"/>
+                <a:ea typeface="D2Coding" panose="020B0609020101020101" pitchFamily="49" charset="-127"/>
+              </a:rPr>
+              <a:t>                                          </a:t>
+            </a:r>
+            <a:r>
+              <a:rPr lang="en-US" altLang="ko-KR" sz="1400" dirty="0" err="1">
+                <a:latin typeface="D2Coding" panose="020B0609020101020101" pitchFamily="49" charset="-127"/>
+                <a:ea typeface="D2Coding" panose="020B0609020101020101" pitchFamily="49" charset="-127"/>
+              </a:rPr>
+              <a:t>chunk_overlap</a:t>
+            </a:r>
+            <a:r>
+              <a:rPr lang="en-US" altLang="ko-KR" sz="1400" dirty="0">
+                <a:latin typeface="D2Coding" panose="020B0609020101020101" pitchFamily="49" charset="-127"/>
+                <a:ea typeface="D2Coding" panose="020B0609020101020101" pitchFamily="49" charset="-127"/>
+              </a:rPr>
+              <a:t>=200)</a:t>
+            </a:r>
+          </a:p>
+          <a:p>
+            <a:pPr>
+              <a:lnSpc>
+                <a:spcPts val="1575"/>
+              </a:lnSpc>
+            </a:pPr>
+            <a:endParaRPr lang="en-US" altLang="ko-KR" sz="1400" dirty="0">
+              <a:latin typeface="D2Coding" panose="020B0609020101020101" pitchFamily="49" charset="-127"/>
+              <a:ea typeface="D2Coding" panose="020B0609020101020101" pitchFamily="49" charset="-127"/>
+            </a:endParaRPr>
+          </a:p>
+          <a:p>
+            <a:pPr>
+              <a:lnSpc>
+                <a:spcPts val="1575"/>
+              </a:lnSpc>
+            </a:pPr>
+            <a:r>
+              <a:rPr lang="en-US" altLang="ko-KR" sz="1400" dirty="0" err="1">
+                <a:latin typeface="D2Coding" panose="020B0609020101020101" pitchFamily="49" charset="-127"/>
+                <a:ea typeface="D2Coding" panose="020B0609020101020101" pitchFamily="49" charset="-127"/>
+              </a:rPr>
+              <a:t>splitted_docs</a:t>
+            </a:r>
+            <a:r>
+              <a:rPr lang="en-US" altLang="ko-KR" sz="1400" dirty="0">
+                <a:latin typeface="D2Coding" panose="020B0609020101020101" pitchFamily="49" charset="-127"/>
+                <a:ea typeface="D2Coding" panose="020B0609020101020101" pitchFamily="49" charset="-127"/>
+              </a:rPr>
+              <a:t> = </a:t>
+            </a:r>
+            <a:r>
+              <a:rPr lang="en-US" altLang="ko-KR" sz="1400" dirty="0" err="1">
+                <a:latin typeface="D2Coding" panose="020B0609020101020101" pitchFamily="49" charset="-127"/>
+                <a:ea typeface="D2Coding" panose="020B0609020101020101" pitchFamily="49" charset="-127"/>
+              </a:rPr>
+              <a:t>splitter.split_documents</a:t>
+            </a:r>
+            <a:r>
+              <a:rPr lang="en-US" altLang="ko-KR" sz="1400" dirty="0">
+                <a:latin typeface="D2Coding" panose="020B0609020101020101" pitchFamily="49" charset="-127"/>
+                <a:ea typeface="D2Coding" panose="020B0609020101020101" pitchFamily="49" charset="-127"/>
+              </a:rPr>
+              <a:t>(docs)</a:t>
+            </a:r>
+          </a:p>
+        </p:txBody>
+      </p:sp>
+      <p:cxnSp>
+        <p:nvCxnSpPr>
+          <p:cNvPr id="26" name="연결선: 꺾임 25">
+            <a:extLst>
+              <a:ext uri="{FF2B5EF4-FFF2-40B4-BE49-F238E27FC236}">
+                <a16:creationId xmlns:a16="http://schemas.microsoft.com/office/drawing/2014/main" id="{4565F167-C7E7-9948-CB9C-45FE92689FD4}"/>
+              </a:ext>
+            </a:extLst>
+          </p:cNvPr>
+          <p:cNvCxnSpPr>
+            <a:cxnSpLocks/>
+            <a:stCxn id="10" idx="2"/>
+            <a:endCxn id="15" idx="1"/>
+          </p:cNvCxnSpPr>
+          <p:nvPr/>
+        </p:nvCxnSpPr>
+        <p:spPr>
+          <a:xfrm rot="16200000" flipH="1">
+            <a:off x="4124214" y="1036600"/>
+            <a:ext cx="790797" cy="2390775"/>
+          </a:xfrm>
+          <a:prstGeom prst="bentConnector2">
+            <a:avLst/>
+          </a:prstGeom>
+          <a:ln>
+            <a:tailEnd type="triangle"/>
+          </a:ln>
+        </p:spPr>
+        <p:style>
+          <a:lnRef idx="1">
+            <a:schemeClr val="dk1"/>
+          </a:lnRef>
+          <a:fillRef idx="0">
+            <a:schemeClr val="dk1"/>
+          </a:fillRef>
+          <a:effectRef idx="0">
+            <a:schemeClr val="dk1"/>
+          </a:effectRef>
+          <a:fontRef idx="minor">
+            <a:schemeClr val="tx1"/>
+          </a:fontRef>
+        </p:style>
+      </p:cxnSp>
+      <p:cxnSp>
+        <p:nvCxnSpPr>
+          <p:cNvPr id="27" name="연결선: 꺾임 26">
+            <a:extLst>
+              <a:ext uri="{FF2B5EF4-FFF2-40B4-BE49-F238E27FC236}">
+                <a16:creationId xmlns:a16="http://schemas.microsoft.com/office/drawing/2014/main" id="{118A30FF-7E21-22F1-71E4-77097280861C}"/>
+              </a:ext>
+            </a:extLst>
+          </p:cNvPr>
+          <p:cNvCxnSpPr>
+            <a:cxnSpLocks/>
+            <a:stCxn id="12" idx="2"/>
+            <a:endCxn id="24" idx="1"/>
+          </p:cNvCxnSpPr>
+          <p:nvPr/>
+        </p:nvCxnSpPr>
+        <p:spPr>
+          <a:xfrm rot="16200000" flipH="1">
+            <a:off x="4283428" y="3328317"/>
+            <a:ext cx="881944" cy="1981200"/>
+          </a:xfrm>
+          <a:prstGeom prst="bentConnector2">
+            <a:avLst/>
+          </a:prstGeom>
+          <a:ln>
+            <a:tailEnd type="triangle"/>
+          </a:ln>
+        </p:spPr>
+        <p:style>
+          <a:lnRef idx="1">
+            <a:schemeClr val="dk1"/>
+          </a:lnRef>
+          <a:fillRef idx="0">
+            <a:schemeClr val="dk1"/>
+          </a:fillRef>
+          <a:effectRef idx="0">
+            <a:schemeClr val="dk1"/>
+          </a:effectRef>
+          <a:fontRef idx="minor">
+            <a:schemeClr val="tx1"/>
+          </a:fontRef>
+        </p:style>
+      </p:cxnSp>
+    </p:spTree>
+    <p:extLst>
+      <p:ext uri="{BB962C8B-B14F-4D97-AF65-F5344CB8AC3E}">
+        <p14:creationId xmlns:p14="http://schemas.microsoft.com/office/powerpoint/2010/main" val="2733680149"/>
+      </p:ext>
+    </p:extLst>
+  </p:cSld>
+  <p:clrMapOvr>
+    <a:masterClrMapping/>
+  </p:clrMapOvr>
+</p:sld>
+</file>
+
+<file path=ppt/slides/slide12.xml><?xml version="1.0" encoding="utf-8"?>
+<p:sld xmlns:a="http://schemas.openxmlformats.org/drawingml/2006/main" xmlns:r="http://schemas.openxmlformats.org/officeDocument/2006/relationships" xmlns:p="http://schemas.openxmlformats.org/presentationml/2006/main">
+  <p:cSld>
+    <p:spTree>
+      <p:nvGrpSpPr>
+        <p:cNvPr id="1" name="">
+          <a:extLst>
+            <a:ext uri="{FF2B5EF4-FFF2-40B4-BE49-F238E27FC236}">
+              <a16:creationId xmlns:a16="http://schemas.microsoft.com/office/drawing/2014/main" id="{0872214A-5A47-F725-936B-7582FD6CE2E5}"/>
+            </a:ext>
+          </a:extLst>
+        </p:cNvPr>
+        <p:cNvGrpSpPr/>
+        <p:nvPr/>
+      </p:nvGrpSpPr>
+      <p:grpSpPr>
+        <a:xfrm>
+          <a:off x="0" y="0"/>
+          <a:ext cx="0" cy="0"/>
+          <a:chOff x="0" y="0"/>
+          <a:chExt cx="0" cy="0"/>
+        </a:xfrm>
+      </p:grpSpPr>
+      <p:sp>
+        <p:nvSpPr>
+          <p:cNvPr id="4" name="슬라이드 번호 개체 틀 3">
+            <a:extLst>
+              <a:ext uri="{FF2B5EF4-FFF2-40B4-BE49-F238E27FC236}">
+                <a16:creationId xmlns:a16="http://schemas.microsoft.com/office/drawing/2014/main" id="{ACEA98C2-42FF-2089-82F5-0A9271C14E68}"/>
+              </a:ext>
+            </a:extLst>
+          </p:cNvPr>
+          <p:cNvSpPr>
+            <a:spLocks noGrp="1"/>
+          </p:cNvSpPr>
+          <p:nvPr>
+            <p:ph type="sldNum" sz="quarter" idx="12"/>
+          </p:nvPr>
+        </p:nvSpPr>
+        <p:spPr>
+          <a:xfrm>
+            <a:off x="10514011" y="6036261"/>
+            <a:ext cx="753545" cy="365125"/>
+          </a:xfrm>
+        </p:spPr>
+        <p:txBody>
+          <a:bodyPr/>
+          <a:lstStyle/>
+          <a:p>
+            <a:fld id="{D57F1E4F-1CFF-5643-939E-217C01CDF565}" type="slidenum">
+              <a:rPr lang="en-US" smtClean="0"/>
+              <a:pPr/>
+              <a:t>12</a:t>
+            </a:fld>
+            <a:endParaRPr lang="en-US" dirty="0"/>
+          </a:p>
+        </p:txBody>
+      </p:sp>
+      <p:sp>
+        <p:nvSpPr>
+          <p:cNvPr id="3" name="제목 1">
+            <a:extLst>
+              <a:ext uri="{FF2B5EF4-FFF2-40B4-BE49-F238E27FC236}">
+                <a16:creationId xmlns:a16="http://schemas.microsoft.com/office/drawing/2014/main" id="{FB284A37-1E3F-A59D-2F10-FB8C69BF0E76}"/>
+              </a:ext>
+            </a:extLst>
+          </p:cNvPr>
+          <p:cNvSpPr txBox="1">
+            <a:spLocks/>
+          </p:cNvSpPr>
+          <p:nvPr/>
+        </p:nvSpPr>
+        <p:spPr>
+          <a:xfrm>
+            <a:off x="475645" y="481983"/>
+            <a:ext cx="10353762" cy="766439"/>
+          </a:xfrm>
+          <a:prstGeom prst="rect">
+            <a:avLst/>
+          </a:prstGeom>
+        </p:spPr>
+        <p:txBody>
+          <a:bodyPr vert="horz" lIns="91440" tIns="45720" rIns="91440" bIns="45720" rtlCol="0" anchor="ctr">
+            <a:normAutofit/>
+          </a:bodyPr>
+          <a:lstStyle>
+            <a:lvl1pPr algn="ctr" defTabSz="914400" rtl="0" eaLnBrk="1" latinLnBrk="1" hangingPunct="1">
+              <a:lnSpc>
+                <a:spcPct val="90000"/>
+              </a:lnSpc>
+              <a:spcBef>
+                <a:spcPct val="0"/>
+              </a:spcBef>
+              <a:buNone/>
+              <a:defRPr sz="3200" kern="1200" cap="all" baseline="0">
+                <a:solidFill>
+                  <a:schemeClr val="tx1"/>
+                </a:solidFill>
+                <a:effectLst/>
+                <a:latin typeface="Batang" panose="02030600000101010101" pitchFamily="18" charset="-127"/>
+                <a:ea typeface="Batang" panose="02030600000101010101" pitchFamily="18" charset="-127"/>
+                <a:cs typeface="+mj-cs"/>
+              </a:defRPr>
+            </a:lvl1pPr>
+          </a:lstStyle>
+          <a:p>
+            <a:pPr algn="l"/>
+            <a:r>
+              <a:rPr lang="en-US" altLang="ko-KR" sz="2800" cap="none" dirty="0">
+                <a:solidFill>
+                  <a:schemeClr val="bg2">
+                    <a:lumMod val="25000"/>
+                  </a:schemeClr>
+                </a:solidFill>
+                <a:latin typeface="D2Coding" panose="020B0609020101020101" pitchFamily="49" charset="-127"/>
+                <a:ea typeface="D2Coding" panose="020B0609020101020101" pitchFamily="49" charset="-127"/>
+                <a:cs typeface="Segoe UI Light" panose="020B0502040204020203" pitchFamily="34" charset="0"/>
+              </a:rPr>
+              <a:t>LLM-Based Embeddings </a:t>
+            </a:r>
+            <a:endParaRPr lang="ko-KR" altLang="en-US" sz="2800" cap="none" dirty="0">
+              <a:solidFill>
+                <a:schemeClr val="bg2">
+                  <a:lumMod val="25000"/>
+                </a:schemeClr>
+              </a:solidFill>
+              <a:latin typeface="D2Coding" panose="020B0609020101020101" pitchFamily="49" charset="-127"/>
+              <a:ea typeface="D2Coding" panose="020B0609020101020101" pitchFamily="49" charset="-127"/>
+              <a:cs typeface="Segoe UI Light" panose="020B0502040204020203" pitchFamily="34" charset="0"/>
+            </a:endParaRPr>
+          </a:p>
+        </p:txBody>
+      </p:sp>
+      <p:sp>
+        <p:nvSpPr>
+          <p:cNvPr id="5" name="TextBox 4">
+            <a:extLst>
+              <a:ext uri="{FF2B5EF4-FFF2-40B4-BE49-F238E27FC236}">
+                <a16:creationId xmlns:a16="http://schemas.microsoft.com/office/drawing/2014/main" id="{FDDEEF56-9A7B-D1F8-04E7-B25421A59C46}"/>
+              </a:ext>
+            </a:extLst>
+          </p:cNvPr>
+          <p:cNvSpPr txBox="1"/>
+          <p:nvPr/>
+        </p:nvSpPr>
+        <p:spPr>
+          <a:xfrm>
+            <a:off x="709007" y="2284598"/>
+            <a:ext cx="10921320" cy="1754326"/>
+          </a:xfrm>
+          <a:prstGeom prst="rect">
+            <a:avLst/>
+          </a:prstGeom>
+          <a:solidFill>
+            <a:schemeClr val="tx1"/>
+          </a:solidFill>
+        </p:spPr>
+        <p:txBody>
+          <a:bodyPr wrap="square">
+            <a:spAutoFit/>
+          </a:bodyPr>
+          <a:lstStyle/>
+          <a:p>
+            <a:r>
+              <a:rPr lang="en-US" altLang="ko-KR" sz="1200" dirty="0">
+                <a:solidFill>
+                  <a:schemeClr val="bg1"/>
+                </a:solidFill>
+                <a:latin typeface="D2Coding" panose="020B0609020101020101" pitchFamily="49" charset="-127"/>
+                <a:ea typeface="D2Coding" panose="020B0609020101020101" pitchFamily="49" charset="-127"/>
+              </a:rPr>
+              <a:t>[1</a:t>
+            </a:r>
+            <a:r>
+              <a:rPr lang="ko-KR" altLang="en-US" sz="1200" dirty="0">
+                <a:solidFill>
+                  <a:schemeClr val="bg1"/>
+                </a:solidFill>
+                <a:latin typeface="D2Coding" panose="020B0609020101020101" pitchFamily="49" charset="-127"/>
+                <a:ea typeface="D2Coding" panose="020B0609020101020101" pitchFamily="49" charset="-127"/>
+              </a:rPr>
+              <a:t>단계</a:t>
+            </a:r>
+            <a:r>
+              <a:rPr lang="en-US" altLang="ko-KR" sz="1200" dirty="0">
+                <a:solidFill>
+                  <a:schemeClr val="bg1"/>
+                </a:solidFill>
+                <a:latin typeface="D2Coding" panose="020B0609020101020101" pitchFamily="49" charset="-127"/>
+                <a:ea typeface="D2Coding" panose="020B0609020101020101" pitchFamily="49" charset="-127"/>
+              </a:rPr>
+              <a:t>: </a:t>
+            </a:r>
+            <a:r>
+              <a:rPr lang="ko-KR" altLang="en-US" sz="1200" dirty="0">
+                <a:solidFill>
+                  <a:schemeClr val="bg1"/>
+                </a:solidFill>
+                <a:latin typeface="D2Coding" panose="020B0609020101020101" pitchFamily="49" charset="-127"/>
+                <a:ea typeface="D2Coding" panose="020B0609020101020101" pitchFamily="49" charset="-127"/>
+              </a:rPr>
+              <a:t>단락 자르기</a:t>
+            </a:r>
+            <a:r>
+              <a:rPr lang="en-US" altLang="ko-KR" sz="1200" dirty="0">
+                <a:solidFill>
+                  <a:schemeClr val="bg1"/>
+                </a:solidFill>
+                <a:latin typeface="D2Coding" panose="020B0609020101020101" pitchFamily="49" charset="-127"/>
+                <a:ea typeface="D2Coding" panose="020B0609020101020101" pitchFamily="49" charset="-127"/>
+              </a:rPr>
+              <a:t>] ──▶ </a:t>
+            </a:r>
+            <a:r>
+              <a:rPr lang="ko-KR" altLang="en-US" sz="1200" dirty="0">
+                <a:solidFill>
+                  <a:schemeClr val="bg1"/>
+                </a:solidFill>
+                <a:latin typeface="D2Coding" panose="020B0609020101020101" pitchFamily="49" charset="-127"/>
+                <a:ea typeface="D2Coding" panose="020B0609020101020101" pitchFamily="49" charset="-127"/>
+              </a:rPr>
+              <a:t>모든 단락을 </a:t>
+            </a:r>
+            <a:r>
+              <a:rPr lang="en-US" altLang="ko-KR" sz="1200" dirty="0">
+                <a:solidFill>
+                  <a:schemeClr val="bg1"/>
+                </a:solidFill>
+                <a:latin typeface="D2Coding" panose="020B0609020101020101" pitchFamily="49" charset="-127"/>
+                <a:ea typeface="D2Coding" panose="020B0609020101020101" pitchFamily="49" charset="-127"/>
+              </a:rPr>
+              <a:t>'\n\n' </a:t>
+            </a:r>
+            <a:r>
+              <a:rPr lang="ko-KR" altLang="en-US" sz="1200" dirty="0">
+                <a:solidFill>
+                  <a:schemeClr val="bg1"/>
+                </a:solidFill>
+                <a:latin typeface="D2Coding" panose="020B0609020101020101" pitchFamily="49" charset="-127"/>
+                <a:ea typeface="D2Coding" panose="020B0609020101020101" pitchFamily="49" charset="-127"/>
+              </a:rPr>
+              <a:t>기준으로 쪼갬 </a:t>
+            </a:r>
+            <a:endParaRPr lang="en-US" altLang="ko-KR" sz="1200" dirty="0">
+              <a:solidFill>
+                <a:schemeClr val="bg1"/>
+              </a:solidFill>
+              <a:latin typeface="D2Coding" panose="020B0609020101020101" pitchFamily="49" charset="-127"/>
+              <a:ea typeface="D2Coding" panose="020B0609020101020101" pitchFamily="49" charset="-127"/>
+            </a:endParaRPr>
+          </a:p>
+          <a:p>
+            <a:pPr lvl="6"/>
+            <a:r>
+              <a:rPr lang="ko-KR" altLang="en-US" sz="1200" dirty="0">
+                <a:solidFill>
+                  <a:schemeClr val="bg1"/>
+                </a:solidFill>
+                <a:latin typeface="D2Coding" panose="020B0609020101020101" pitchFamily="49" charset="-127"/>
+                <a:ea typeface="D2Coding" panose="020B0609020101020101" pitchFamily="49" charset="-127"/>
+              </a:rPr>
+              <a:t>│ </a:t>
+            </a:r>
+            <a:endParaRPr lang="en-US" altLang="ko-KR" sz="1200" dirty="0">
+              <a:solidFill>
+                <a:schemeClr val="bg1"/>
+              </a:solidFill>
+              <a:latin typeface="D2Coding" panose="020B0609020101020101" pitchFamily="49" charset="-127"/>
+              <a:ea typeface="D2Coding" panose="020B0609020101020101" pitchFamily="49" charset="-127"/>
+            </a:endParaRPr>
+          </a:p>
+          <a:p>
+            <a:pPr lvl="6"/>
+            <a:r>
+              <a:rPr lang="ko-KR" altLang="en-US" sz="1200" dirty="0">
+                <a:solidFill>
+                  <a:schemeClr val="bg1"/>
+                </a:solidFill>
+                <a:latin typeface="D2Coding" panose="020B0609020101020101" pitchFamily="49" charset="-127"/>
+                <a:ea typeface="D2Coding" panose="020B0609020101020101" pitchFamily="49" charset="-127"/>
+              </a:rPr>
+              <a:t>├─▶ </a:t>
+            </a:r>
+            <a:r>
+              <a:rPr lang="en-US" altLang="ko-KR" sz="1200" dirty="0">
+                <a:solidFill>
+                  <a:schemeClr val="bg1"/>
+                </a:solidFill>
+                <a:latin typeface="D2Coding" panose="020B0609020101020101" pitchFamily="49" charset="-127"/>
+                <a:ea typeface="D2Coding" panose="020B0609020101020101" pitchFamily="49" charset="-127"/>
+              </a:rPr>
+              <a:t>1,000</a:t>
+            </a:r>
+            <a:r>
+              <a:rPr lang="ko-KR" altLang="en-US" sz="1200" dirty="0">
+                <a:solidFill>
+                  <a:schemeClr val="bg1"/>
+                </a:solidFill>
+                <a:latin typeface="D2Coding" panose="020B0609020101020101" pitchFamily="49" charset="-127"/>
+                <a:ea typeface="D2Coding" panose="020B0609020101020101" pitchFamily="49" charset="-127"/>
+              </a:rPr>
+              <a:t>자 이하인 조각 ──▶ 통과</a:t>
+            </a:r>
+            <a:r>
+              <a:rPr lang="en-US" altLang="ko-KR" sz="1200" dirty="0">
+                <a:solidFill>
+                  <a:schemeClr val="bg1"/>
+                </a:solidFill>
+                <a:latin typeface="D2Coding" panose="020B0609020101020101" pitchFamily="49" charset="-127"/>
+                <a:ea typeface="D2Coding" panose="020B0609020101020101" pitchFamily="49" charset="-127"/>
+              </a:rPr>
+              <a:t>! (</a:t>
+            </a:r>
+            <a:r>
+              <a:rPr lang="ko-KR" altLang="en-US" sz="1200" dirty="0">
+                <a:solidFill>
+                  <a:schemeClr val="bg1"/>
+                </a:solidFill>
+                <a:latin typeface="D2Coding" panose="020B0609020101020101" pitchFamily="49" charset="-127"/>
+                <a:ea typeface="D2Coding" panose="020B0609020101020101" pitchFamily="49" charset="-127"/>
+              </a:rPr>
+              <a:t>그대로 둠</a:t>
+            </a:r>
+            <a:r>
+              <a:rPr lang="en-US" altLang="ko-KR" sz="1200" dirty="0">
+                <a:solidFill>
+                  <a:schemeClr val="bg1"/>
+                </a:solidFill>
+                <a:latin typeface="D2Coding" panose="020B0609020101020101" pitchFamily="49" charset="-127"/>
+                <a:ea typeface="D2Coding" panose="020B0609020101020101" pitchFamily="49" charset="-127"/>
+              </a:rPr>
+              <a:t>) </a:t>
+            </a:r>
+          </a:p>
+          <a:p>
+            <a:pPr lvl="6"/>
+            <a:r>
+              <a:rPr lang="en-US" altLang="ko-KR" sz="1200" dirty="0">
+                <a:solidFill>
+                  <a:schemeClr val="bg1"/>
+                </a:solidFill>
+                <a:latin typeface="D2Coding" panose="020B0609020101020101" pitchFamily="49" charset="-127"/>
+                <a:ea typeface="D2Coding" panose="020B0609020101020101" pitchFamily="49" charset="-127"/>
+              </a:rPr>
+              <a:t>└─▶ 1,500</a:t>
+            </a:r>
+            <a:r>
+              <a:rPr lang="ko-KR" altLang="en-US" sz="1200" dirty="0">
+                <a:solidFill>
+                  <a:schemeClr val="bg1"/>
+                </a:solidFill>
+                <a:latin typeface="D2Coding" panose="020B0609020101020101" pitchFamily="49" charset="-127"/>
+                <a:ea typeface="D2Coding" panose="020B0609020101020101" pitchFamily="49" charset="-127"/>
+              </a:rPr>
+              <a:t>자짜리 거대 단락 발견</a:t>
+            </a:r>
+            <a:r>
+              <a:rPr lang="en-US" altLang="ko-KR" sz="1200" dirty="0">
+                <a:solidFill>
+                  <a:schemeClr val="bg1"/>
+                </a:solidFill>
+                <a:latin typeface="D2Coding" panose="020B0609020101020101" pitchFamily="49" charset="-127"/>
+                <a:ea typeface="D2Coding" panose="020B0609020101020101" pitchFamily="49" charset="-127"/>
+              </a:rPr>
+              <a:t>! </a:t>
+            </a:r>
+          </a:p>
+          <a:p>
+            <a:r>
+              <a:rPr lang="en-US" altLang="ko-KR" sz="1200" dirty="0">
+                <a:solidFill>
+                  <a:schemeClr val="bg1"/>
+                </a:solidFill>
+                <a:latin typeface="D2Coding" panose="020B0609020101020101" pitchFamily="49" charset="-127"/>
+                <a:ea typeface="D2Coding" panose="020B0609020101020101" pitchFamily="49" charset="-127"/>
+              </a:rPr>
+              <a:t>			     │ </a:t>
+            </a:r>
+          </a:p>
+          <a:p>
+            <a:r>
+              <a:rPr lang="en-US" altLang="ko-KR" sz="1200" dirty="0">
+                <a:solidFill>
+                  <a:schemeClr val="bg1"/>
+                </a:solidFill>
+                <a:latin typeface="D2Coding" panose="020B0609020101020101" pitchFamily="49" charset="-127"/>
+                <a:ea typeface="D2Coding" panose="020B0609020101020101" pitchFamily="49" charset="-127"/>
+              </a:rPr>
+              <a:t>[2</a:t>
+            </a:r>
+            <a:r>
+              <a:rPr lang="ko-KR" altLang="en-US" sz="1200" dirty="0">
+                <a:solidFill>
+                  <a:schemeClr val="bg1"/>
+                </a:solidFill>
+                <a:latin typeface="D2Coding" panose="020B0609020101020101" pitchFamily="49" charset="-127"/>
+                <a:ea typeface="D2Coding" panose="020B0609020101020101" pitchFamily="49" charset="-127"/>
+              </a:rPr>
+              <a:t>단계</a:t>
+            </a:r>
+            <a:r>
+              <a:rPr lang="en-US" altLang="ko-KR" sz="1200" dirty="0">
+                <a:solidFill>
+                  <a:schemeClr val="bg1"/>
+                </a:solidFill>
+                <a:latin typeface="D2Coding" panose="020B0609020101020101" pitchFamily="49" charset="-127"/>
+                <a:ea typeface="D2Coding" panose="020B0609020101020101" pitchFamily="49" charset="-127"/>
+              </a:rPr>
+              <a:t>: </a:t>
+            </a:r>
+            <a:r>
+              <a:rPr lang="ko-KR" altLang="en-US" sz="1200" dirty="0">
+                <a:solidFill>
+                  <a:schemeClr val="bg1"/>
+                </a:solidFill>
+                <a:latin typeface="D2Coding" panose="020B0609020101020101" pitchFamily="49" charset="-127"/>
+                <a:ea typeface="D2Coding" panose="020B0609020101020101" pitchFamily="49" charset="-127"/>
+              </a:rPr>
+              <a:t>다음 가위 가동</a:t>
+            </a:r>
+            <a:r>
+              <a:rPr lang="en-US" altLang="ko-KR" sz="1200" dirty="0">
+                <a:solidFill>
+                  <a:schemeClr val="bg1"/>
+                </a:solidFill>
+                <a:latin typeface="D2Coding" panose="020B0609020101020101" pitchFamily="49" charset="-127"/>
+                <a:ea typeface="D2Coding" panose="020B0609020101020101" pitchFamily="49" charset="-127"/>
+              </a:rPr>
+              <a:t>] ────────────┴──▶ </a:t>
+            </a:r>
+            <a:r>
+              <a:rPr lang="ko-KR" altLang="en-US" sz="1200" dirty="0">
+                <a:solidFill>
+                  <a:schemeClr val="bg1"/>
+                </a:solidFill>
+                <a:latin typeface="D2Coding" panose="020B0609020101020101" pitchFamily="49" charset="-127"/>
+                <a:ea typeface="D2Coding" panose="020B0609020101020101" pitchFamily="49" charset="-127"/>
+              </a:rPr>
+              <a:t>이 거대 단락만 가져와서 </a:t>
+            </a:r>
+            <a:r>
+              <a:rPr lang="en-US" altLang="ko-KR" sz="1200" dirty="0">
+                <a:solidFill>
+                  <a:schemeClr val="bg1"/>
+                </a:solidFill>
+                <a:latin typeface="D2Coding" panose="020B0609020101020101" pitchFamily="49" charset="-127"/>
+                <a:ea typeface="D2Coding" panose="020B0609020101020101" pitchFamily="49" charset="-127"/>
+              </a:rPr>
+              <a:t>'\n'(</a:t>
+            </a:r>
+            <a:r>
+              <a:rPr lang="ko-KR" altLang="en-US" sz="1200" dirty="0" err="1">
+                <a:solidFill>
+                  <a:schemeClr val="bg1"/>
+                </a:solidFill>
+                <a:latin typeface="D2Coding" panose="020B0609020101020101" pitchFamily="49" charset="-127"/>
+                <a:ea typeface="D2Coding" panose="020B0609020101020101" pitchFamily="49" charset="-127"/>
+              </a:rPr>
+              <a:t>줄바꿈</a:t>
+            </a:r>
+            <a:r>
+              <a:rPr lang="en-US" altLang="ko-KR" sz="1200" dirty="0">
+                <a:solidFill>
+                  <a:schemeClr val="bg1"/>
+                </a:solidFill>
+                <a:latin typeface="D2Coding" panose="020B0609020101020101" pitchFamily="49" charset="-127"/>
+                <a:ea typeface="D2Coding" panose="020B0609020101020101" pitchFamily="49" charset="-127"/>
+              </a:rPr>
+              <a:t>) </a:t>
+            </a:r>
+            <a:r>
+              <a:rPr lang="ko-KR" altLang="en-US" sz="1200" dirty="0">
+                <a:solidFill>
+                  <a:schemeClr val="bg1"/>
+                </a:solidFill>
+                <a:latin typeface="D2Coding" panose="020B0609020101020101" pitchFamily="49" charset="-127"/>
+                <a:ea typeface="D2Coding" panose="020B0609020101020101" pitchFamily="49" charset="-127"/>
+              </a:rPr>
+              <a:t>기준으로 다시 쪼갬 </a:t>
+            </a:r>
+            <a:endParaRPr lang="en-US" altLang="ko-KR" sz="1200" dirty="0">
+              <a:solidFill>
+                <a:schemeClr val="bg1"/>
+              </a:solidFill>
+              <a:latin typeface="D2Coding" panose="020B0609020101020101" pitchFamily="49" charset="-127"/>
+              <a:ea typeface="D2Coding" panose="020B0609020101020101" pitchFamily="49" charset="-127"/>
+            </a:endParaRPr>
+          </a:p>
+          <a:p>
+            <a:pPr lvl="8"/>
+            <a:r>
+              <a:rPr lang="ko-KR" altLang="en-US" sz="1200" dirty="0">
+                <a:solidFill>
+                  <a:schemeClr val="bg1"/>
+                </a:solidFill>
+                <a:latin typeface="D2Coding" panose="020B0609020101020101" pitchFamily="49" charset="-127"/>
+                <a:ea typeface="D2Coding" panose="020B0609020101020101" pitchFamily="49" charset="-127"/>
+              </a:rPr>
+              <a:t>     │ </a:t>
+            </a:r>
+            <a:endParaRPr lang="en-US" altLang="ko-KR" sz="1200" dirty="0">
+              <a:solidFill>
+                <a:schemeClr val="bg1"/>
+              </a:solidFill>
+              <a:latin typeface="D2Coding" panose="020B0609020101020101" pitchFamily="49" charset="-127"/>
+              <a:ea typeface="D2Coding" panose="020B0609020101020101" pitchFamily="49" charset="-127"/>
+            </a:endParaRPr>
+          </a:p>
+          <a:p>
+            <a:pPr lvl="8"/>
+            <a:r>
+              <a:rPr lang="ko-KR" altLang="en-US" sz="1200" dirty="0">
+                <a:solidFill>
+                  <a:schemeClr val="bg1"/>
+                </a:solidFill>
+                <a:latin typeface="D2Coding" panose="020B0609020101020101" pitchFamily="49" charset="-127"/>
+                <a:ea typeface="D2Coding" panose="020B0609020101020101" pitchFamily="49" charset="-127"/>
+              </a:rPr>
+              <a:t>     ├─▶ 이제 </a:t>
+            </a:r>
+            <a:r>
+              <a:rPr lang="en-US" altLang="ko-KR" sz="1200" dirty="0">
+                <a:solidFill>
+                  <a:schemeClr val="bg1"/>
+                </a:solidFill>
+                <a:latin typeface="D2Coding" panose="020B0609020101020101" pitchFamily="49" charset="-127"/>
+                <a:ea typeface="D2Coding" panose="020B0609020101020101" pitchFamily="49" charset="-127"/>
+              </a:rPr>
+              <a:t>1,000</a:t>
+            </a:r>
+            <a:r>
+              <a:rPr lang="ko-KR" altLang="en-US" sz="1200" dirty="0">
+                <a:solidFill>
+                  <a:schemeClr val="bg1"/>
+                </a:solidFill>
+                <a:latin typeface="D2Coding" panose="020B0609020101020101" pitchFamily="49" charset="-127"/>
+                <a:ea typeface="D2Coding" panose="020B0609020101020101" pitchFamily="49" charset="-127"/>
+              </a:rPr>
+              <a:t>자 이하가 됨 ──▶ 통과</a:t>
+            </a:r>
+            <a:r>
+              <a:rPr lang="en-US" altLang="ko-KR" sz="1200" dirty="0">
+                <a:solidFill>
+                  <a:schemeClr val="bg1"/>
+                </a:solidFill>
+                <a:latin typeface="D2Coding" panose="020B0609020101020101" pitchFamily="49" charset="-127"/>
+                <a:ea typeface="D2Coding" panose="020B0609020101020101" pitchFamily="49" charset="-127"/>
+              </a:rPr>
+              <a:t>! </a:t>
+            </a:r>
+          </a:p>
+          <a:p>
+            <a:pPr lvl="8"/>
+            <a:r>
+              <a:rPr lang="en-US" altLang="ko-KR" sz="1200" dirty="0">
+                <a:solidFill>
+                  <a:schemeClr val="bg1"/>
+                </a:solidFill>
+                <a:latin typeface="D2Coding" panose="020B0609020101020101" pitchFamily="49" charset="-127"/>
+                <a:ea typeface="D2Coding" panose="020B0609020101020101" pitchFamily="49" charset="-127"/>
+              </a:rPr>
+              <a:t>     └─▶ </a:t>
+            </a:r>
+            <a:r>
+              <a:rPr lang="ko-KR" altLang="en-US" sz="1200" dirty="0">
+                <a:solidFill>
+                  <a:schemeClr val="bg1"/>
+                </a:solidFill>
+                <a:latin typeface="D2Coding" panose="020B0609020101020101" pitchFamily="49" charset="-127"/>
+                <a:ea typeface="D2Coding" panose="020B0609020101020101" pitchFamily="49" charset="-127"/>
+              </a:rPr>
+              <a:t>그래도 </a:t>
+            </a:r>
+            <a:r>
+              <a:rPr lang="en-US" altLang="ko-KR" sz="1200" dirty="0">
+                <a:solidFill>
+                  <a:schemeClr val="bg1"/>
+                </a:solidFill>
+                <a:latin typeface="D2Coding" panose="020B0609020101020101" pitchFamily="49" charset="-127"/>
+                <a:ea typeface="D2Coding" panose="020B0609020101020101" pitchFamily="49" charset="-127"/>
+              </a:rPr>
+              <a:t>1,200</a:t>
+            </a:r>
+            <a:r>
+              <a:rPr lang="ko-KR" altLang="en-US" sz="1200" dirty="0">
+                <a:solidFill>
+                  <a:schemeClr val="bg1"/>
+                </a:solidFill>
+                <a:latin typeface="D2Coding" panose="020B0609020101020101" pitchFamily="49" charset="-127"/>
+                <a:ea typeface="D2Coding" panose="020B0609020101020101" pitchFamily="49" charset="-127"/>
+              </a:rPr>
+              <a:t>자짜리 줄 발견</a:t>
+            </a:r>
+            <a:r>
+              <a:rPr lang="en-US" altLang="ko-KR" sz="1200" dirty="0">
+                <a:solidFill>
+                  <a:schemeClr val="bg1"/>
+                </a:solidFill>
+                <a:latin typeface="D2Coding" panose="020B0609020101020101" pitchFamily="49" charset="-127"/>
+                <a:ea typeface="D2Coding" panose="020B0609020101020101" pitchFamily="49" charset="-127"/>
+              </a:rPr>
+              <a:t>! ──▶ '</a:t>
+            </a:r>
+            <a:r>
+              <a:rPr lang="ko-KR" altLang="en-US" sz="1200" dirty="0">
+                <a:solidFill>
+                  <a:schemeClr val="bg1"/>
+                </a:solidFill>
+                <a:latin typeface="D2Coding" panose="020B0609020101020101" pitchFamily="49" charset="-127"/>
+                <a:ea typeface="D2Coding" panose="020B0609020101020101" pitchFamily="49" charset="-127"/>
+              </a:rPr>
+              <a:t>공백</a:t>
+            </a:r>
+            <a:r>
+              <a:rPr lang="en-US" altLang="ko-KR" sz="1200" dirty="0">
+                <a:solidFill>
+                  <a:schemeClr val="bg1"/>
+                </a:solidFill>
+                <a:latin typeface="D2Coding" panose="020B0609020101020101" pitchFamily="49" charset="-127"/>
+                <a:ea typeface="D2Coding" panose="020B0609020101020101" pitchFamily="49" charset="-127"/>
+              </a:rPr>
+              <a:t>(</a:t>
+            </a:r>
+            <a:r>
+              <a:rPr lang="ko-KR" altLang="en-US" sz="1200" dirty="0">
+                <a:solidFill>
+                  <a:schemeClr val="bg1"/>
+                </a:solidFill>
+                <a:latin typeface="D2Coding" panose="020B0609020101020101" pitchFamily="49" charset="-127"/>
+                <a:ea typeface="D2Coding" panose="020B0609020101020101" pitchFamily="49" charset="-127"/>
+              </a:rPr>
+              <a:t>띄어쓰기</a:t>
+            </a:r>
+            <a:r>
+              <a:rPr lang="en-US" altLang="ko-KR" sz="1200" dirty="0">
+                <a:solidFill>
+                  <a:schemeClr val="bg1"/>
+                </a:solidFill>
+                <a:latin typeface="D2Coding" panose="020B0609020101020101" pitchFamily="49" charset="-127"/>
+                <a:ea typeface="D2Coding" panose="020B0609020101020101" pitchFamily="49" charset="-127"/>
+              </a:rPr>
+              <a:t>)'</a:t>
+            </a:r>
+            <a:r>
+              <a:rPr lang="ko-KR" altLang="en-US" sz="1200" dirty="0">
+                <a:solidFill>
+                  <a:schemeClr val="bg1"/>
+                </a:solidFill>
+                <a:latin typeface="D2Coding" panose="020B0609020101020101" pitchFamily="49" charset="-127"/>
+                <a:ea typeface="D2Coding" panose="020B0609020101020101" pitchFamily="49" charset="-127"/>
+              </a:rPr>
+              <a:t>으로 또 쪼갬</a:t>
+            </a:r>
+            <a:r>
+              <a:rPr lang="en-US" altLang="ko-KR" sz="1200" dirty="0">
+                <a:solidFill>
+                  <a:schemeClr val="bg1"/>
+                </a:solidFill>
+                <a:latin typeface="D2Coding" panose="020B0609020101020101" pitchFamily="49" charset="-127"/>
+                <a:ea typeface="D2Coding" panose="020B0609020101020101" pitchFamily="49" charset="-127"/>
+              </a:rPr>
+              <a:t>!</a:t>
+            </a:r>
+            <a:endParaRPr lang="ko-KR" altLang="en-US" sz="1200" dirty="0">
+              <a:solidFill>
+                <a:schemeClr val="bg1"/>
+              </a:solidFill>
+              <a:latin typeface="D2Coding" panose="020B0609020101020101" pitchFamily="49" charset="-127"/>
+              <a:ea typeface="D2Coding" panose="020B0609020101020101" pitchFamily="49" charset="-127"/>
+            </a:endParaRPr>
+          </a:p>
+        </p:txBody>
+      </p:sp>
+      <p:sp>
+        <p:nvSpPr>
+          <p:cNvPr id="9" name="TextBox 8">
+            <a:extLst>
+              <a:ext uri="{FF2B5EF4-FFF2-40B4-BE49-F238E27FC236}">
+                <a16:creationId xmlns:a16="http://schemas.microsoft.com/office/drawing/2014/main" id="{1B42669A-B35A-2A00-C20A-0A565058A55F}"/>
+              </a:ext>
+            </a:extLst>
+          </p:cNvPr>
+          <p:cNvSpPr txBox="1"/>
+          <p:nvPr/>
+        </p:nvSpPr>
+        <p:spPr>
+          <a:xfrm>
+            <a:off x="561672" y="1248422"/>
+            <a:ext cx="11068655" cy="793166"/>
+          </a:xfrm>
+          <a:prstGeom prst="rect">
+            <a:avLst/>
+          </a:prstGeom>
+          <a:noFill/>
+        </p:spPr>
+        <p:txBody>
+          <a:bodyPr wrap="square">
+            <a:spAutoFit/>
+          </a:bodyPr>
+          <a:lstStyle/>
+          <a:p>
+            <a:pPr marL="285750" indent="-285750">
+              <a:lnSpc>
+                <a:spcPct val="150000"/>
+              </a:lnSpc>
+              <a:buFont typeface="Wingdings" panose="05000000000000000000" pitchFamily="2" charset="2"/>
+              <a:buChar char="v"/>
+            </a:pPr>
+            <a:r>
+              <a:rPr lang="en-US" altLang="ko-KR" sz="1600" dirty="0" err="1">
+                <a:latin typeface="D2Coding" panose="020B0609020101020101" pitchFamily="49" charset="-127"/>
+                <a:ea typeface="D2Coding" panose="020B0609020101020101" pitchFamily="49" charset="-127"/>
+              </a:rPr>
+              <a:t>RecursiveCharacterTextSplitter</a:t>
+            </a:r>
+            <a:r>
+              <a:rPr lang="en-US" altLang="ko-KR" sz="1600" dirty="0">
+                <a:latin typeface="D2Coding" panose="020B0609020101020101" pitchFamily="49" charset="-127"/>
+                <a:ea typeface="D2Coding" panose="020B0609020101020101" pitchFamily="49" charset="-127"/>
+              </a:rPr>
+              <a:t> : </a:t>
+            </a:r>
+            <a:r>
+              <a:rPr lang="ko-KR" altLang="en-US" sz="1600" dirty="0">
+                <a:latin typeface="D2Coding" panose="020B0609020101020101" pitchFamily="49" charset="-127"/>
+                <a:ea typeface="D2Coding" panose="020B0609020101020101" pitchFamily="49" charset="-127"/>
+              </a:rPr>
+              <a:t>이 분할기는 무작정 가위질을 하지 않고</a:t>
+            </a:r>
+            <a:r>
+              <a:rPr lang="en-US" altLang="ko-KR" sz="1600" dirty="0">
+                <a:latin typeface="D2Coding" panose="020B0609020101020101" pitchFamily="49" charset="-127"/>
+                <a:ea typeface="D2Coding" panose="020B0609020101020101" pitchFamily="49" charset="-127"/>
+              </a:rPr>
+              <a:t>, </a:t>
+            </a:r>
+            <a:r>
+              <a:rPr lang="ko-KR" altLang="en-US" sz="1600" dirty="0">
+                <a:latin typeface="D2Coding" panose="020B0609020101020101" pitchFamily="49" charset="-127"/>
+                <a:ea typeface="D2Coding" panose="020B0609020101020101" pitchFamily="49" charset="-127"/>
+              </a:rPr>
+              <a:t>인간이 글을 읽는 단위를 고려하여 </a:t>
+            </a:r>
+            <a:r>
+              <a:rPr lang="en-US" altLang="ko-KR" sz="1600" dirty="0">
+                <a:latin typeface="D2Coding" panose="020B0609020101020101" pitchFamily="49" charset="-127"/>
+                <a:ea typeface="D2Coding" panose="020B0609020101020101" pitchFamily="49" charset="-127"/>
+              </a:rPr>
+              <a:t>'</a:t>
+            </a:r>
+            <a:r>
+              <a:rPr lang="ko-KR" altLang="en-US" sz="1600" dirty="0">
+                <a:latin typeface="D2Coding" panose="020B0609020101020101" pitchFamily="49" charset="-127"/>
+                <a:ea typeface="D2Coding" panose="020B0609020101020101" pitchFamily="49" charset="-127"/>
+              </a:rPr>
+              <a:t>최대한 의미가 통하는 덩어리</a:t>
+            </a:r>
+            <a:r>
+              <a:rPr lang="en-US" altLang="ko-KR" sz="1600" dirty="0">
+                <a:latin typeface="D2Coding" panose="020B0609020101020101" pitchFamily="49" charset="-127"/>
+                <a:ea typeface="D2Coding" panose="020B0609020101020101" pitchFamily="49" charset="-127"/>
+              </a:rPr>
+              <a:t>'</a:t>
+            </a:r>
+            <a:r>
+              <a:rPr lang="ko-KR" altLang="en-US" sz="1600" dirty="0">
+                <a:latin typeface="D2Coding" panose="020B0609020101020101" pitchFamily="49" charset="-127"/>
+                <a:ea typeface="D2Coding" panose="020B0609020101020101" pitchFamily="49" charset="-127"/>
+              </a:rPr>
+              <a:t>를 유지하며 재귀적</a:t>
+            </a:r>
+            <a:r>
+              <a:rPr lang="en-US" altLang="ko-KR" sz="1600" dirty="0">
+                <a:latin typeface="D2Coding" panose="020B0609020101020101" pitchFamily="49" charset="-127"/>
+                <a:ea typeface="D2Coding" panose="020B0609020101020101" pitchFamily="49" charset="-127"/>
+              </a:rPr>
+              <a:t>(</a:t>
+            </a:r>
+            <a:r>
+              <a:rPr lang="ko-KR" altLang="en-US" sz="1600" dirty="0">
+                <a:latin typeface="D2Coding" panose="020B0609020101020101" pitchFamily="49" charset="-127"/>
+                <a:ea typeface="D2Coding" panose="020B0609020101020101" pitchFamily="49" charset="-127"/>
+              </a:rPr>
+              <a:t>단계적</a:t>
+            </a:r>
+            <a:r>
+              <a:rPr lang="en-US" altLang="ko-KR" sz="1600" dirty="0">
+                <a:latin typeface="D2Coding" panose="020B0609020101020101" pitchFamily="49" charset="-127"/>
+                <a:ea typeface="D2Coding" panose="020B0609020101020101" pitchFamily="49" charset="-127"/>
+              </a:rPr>
+              <a:t>)</a:t>
+            </a:r>
+            <a:r>
+              <a:rPr lang="ko-KR" altLang="en-US" sz="1600" dirty="0">
+                <a:latin typeface="D2Coding" panose="020B0609020101020101" pitchFamily="49" charset="-127"/>
+                <a:ea typeface="D2Coding" panose="020B0609020101020101" pitchFamily="49" charset="-127"/>
+              </a:rPr>
+              <a:t>으로 아래와 같이 안전하게 </a:t>
+            </a:r>
+            <a:r>
+              <a:rPr lang="ko-KR" altLang="en-US" sz="1600" dirty="0" err="1">
+                <a:latin typeface="D2Coding" panose="020B0609020101020101" pitchFamily="49" charset="-127"/>
+                <a:ea typeface="D2Coding" panose="020B0609020101020101" pitchFamily="49" charset="-127"/>
+              </a:rPr>
+              <a:t>잘라줌</a:t>
+            </a:r>
+            <a:endParaRPr lang="ko-KR" altLang="en-US" sz="1600" dirty="0">
+              <a:latin typeface="D2Coding" panose="020B0609020101020101" pitchFamily="49" charset="-127"/>
+              <a:ea typeface="D2Coding" panose="020B0609020101020101" pitchFamily="49" charset="-127"/>
+            </a:endParaRPr>
+          </a:p>
+        </p:txBody>
+      </p:sp>
+      <p:sp>
+        <p:nvSpPr>
+          <p:cNvPr id="13" name="TextBox 12">
+            <a:extLst>
+              <a:ext uri="{FF2B5EF4-FFF2-40B4-BE49-F238E27FC236}">
+                <a16:creationId xmlns:a16="http://schemas.microsoft.com/office/drawing/2014/main" id="{F2FD76BF-CD36-909D-E978-CD9FF32B9E87}"/>
+              </a:ext>
+            </a:extLst>
+          </p:cNvPr>
+          <p:cNvSpPr txBox="1"/>
+          <p:nvPr/>
+        </p:nvSpPr>
+        <p:spPr>
+          <a:xfrm>
+            <a:off x="628650" y="4272409"/>
+            <a:ext cx="11268075" cy="423834"/>
+          </a:xfrm>
+          <a:prstGeom prst="rect">
+            <a:avLst/>
+          </a:prstGeom>
+          <a:noFill/>
+        </p:spPr>
+        <p:txBody>
+          <a:bodyPr wrap="square">
+            <a:spAutoFit/>
+          </a:bodyPr>
+          <a:lstStyle/>
+          <a:p>
+            <a:pPr marL="285750" indent="-285750">
+              <a:lnSpc>
+                <a:spcPct val="150000"/>
+              </a:lnSpc>
+              <a:buFont typeface="Wingdings" panose="05000000000000000000" pitchFamily="2" charset="2"/>
+              <a:buChar char="v"/>
+            </a:pPr>
+            <a:r>
+              <a:rPr lang="ko-KR" altLang="en-US" sz="1600" dirty="0">
+                <a:latin typeface="D2Coding" panose="020B0609020101020101" pitchFamily="49" charset="-127"/>
+                <a:ea typeface="D2Coding" panose="020B0609020101020101" pitchFamily="49" charset="-127"/>
+              </a:rPr>
+              <a:t>메타데이터</a:t>
+            </a:r>
+            <a:r>
+              <a:rPr lang="en-US" altLang="ko-KR" sz="1600" dirty="0">
+                <a:latin typeface="D2Coding" panose="020B0609020101020101" pitchFamily="49" charset="-127"/>
+                <a:ea typeface="D2Coding" panose="020B0609020101020101" pitchFamily="49" charset="-127"/>
+              </a:rPr>
+              <a:t>(Metadata)</a:t>
+            </a:r>
+            <a:r>
+              <a:rPr lang="ko-KR" altLang="en-US" sz="1600" dirty="0">
+                <a:latin typeface="D2Coding" panose="020B0609020101020101" pitchFamily="49" charset="-127"/>
+                <a:ea typeface="D2Coding" panose="020B0609020101020101" pitchFamily="49" charset="-127"/>
+              </a:rPr>
+              <a:t>는 텍스트를 아무리 잘게 쪼개도 원본의 출처와 위치를 찾는 </a:t>
+            </a:r>
+            <a:r>
+              <a:rPr lang="en-US" altLang="ko-KR" sz="1600" dirty="0">
+                <a:latin typeface="D2Coding" panose="020B0609020101020101" pitchFamily="49" charset="-127"/>
+                <a:ea typeface="D2Coding" panose="020B0609020101020101" pitchFamily="49" charset="-127"/>
+              </a:rPr>
+              <a:t>'</a:t>
+            </a:r>
+            <a:r>
+              <a:rPr lang="ko-KR" altLang="en-US" sz="1600" dirty="0">
+                <a:latin typeface="D2Coding" panose="020B0609020101020101" pitchFamily="49" charset="-127"/>
+                <a:ea typeface="D2Coding" panose="020B0609020101020101" pitchFamily="49" charset="-127"/>
+              </a:rPr>
+              <a:t>데이터 네비게이션 꼬리표</a:t>
+            </a:r>
+            <a:r>
+              <a:rPr lang="en-US" altLang="ko-KR" sz="1600" dirty="0">
+                <a:latin typeface="D2Coding" panose="020B0609020101020101" pitchFamily="49" charset="-127"/>
+                <a:ea typeface="D2Coding" panose="020B0609020101020101" pitchFamily="49" charset="-127"/>
+              </a:rPr>
+              <a:t>'</a:t>
+            </a:r>
+            <a:endParaRPr lang="ko-KR" altLang="en-US" sz="1600" dirty="0">
+              <a:latin typeface="D2Coding" panose="020B0609020101020101" pitchFamily="49" charset="-127"/>
+              <a:ea typeface="D2Coding" panose="020B0609020101020101" pitchFamily="49" charset="-127"/>
+            </a:endParaRPr>
+          </a:p>
+        </p:txBody>
+      </p:sp>
+      <p:sp>
+        <p:nvSpPr>
+          <p:cNvPr id="16" name="TextBox 15">
+            <a:extLst>
+              <a:ext uri="{FF2B5EF4-FFF2-40B4-BE49-F238E27FC236}">
+                <a16:creationId xmlns:a16="http://schemas.microsoft.com/office/drawing/2014/main" id="{30AA800D-6A32-A57C-52FD-67A1AE2EA5C4}"/>
+              </a:ext>
+            </a:extLst>
+          </p:cNvPr>
+          <p:cNvSpPr txBox="1"/>
+          <p:nvPr/>
+        </p:nvSpPr>
+        <p:spPr>
+          <a:xfrm>
+            <a:off x="2766407" y="4746610"/>
+            <a:ext cx="7658100" cy="505908"/>
+          </a:xfrm>
+          <a:prstGeom prst="rect">
+            <a:avLst/>
+          </a:prstGeom>
+          <a:solidFill>
+            <a:srgbClr val="76E3FF"/>
+          </a:solidFill>
+        </p:spPr>
+        <p:txBody>
+          <a:bodyPr wrap="square">
+            <a:spAutoFit/>
+          </a:bodyPr>
+          <a:lstStyle/>
+          <a:p>
+            <a:pPr>
+              <a:lnSpc>
+                <a:spcPts val="1575"/>
+              </a:lnSpc>
+              <a:buNone/>
+            </a:pPr>
+            <a:r>
+              <a:rPr lang="en-US" altLang="ko-KR" sz="1400" b="0" dirty="0">
+                <a:effectLst/>
+                <a:latin typeface="D2Coding" panose="020B0609020101020101" pitchFamily="49" charset="-127"/>
+                <a:ea typeface="D2Coding" panose="020B0609020101020101" pitchFamily="49" charset="-127"/>
+              </a:rPr>
+              <a:t>for </a:t>
+            </a:r>
+            <a:r>
+              <a:rPr lang="en-US" altLang="ko-KR" sz="1400" b="0" dirty="0" err="1">
+                <a:effectLst/>
+                <a:latin typeface="D2Coding" panose="020B0609020101020101" pitchFamily="49" charset="-127"/>
+                <a:ea typeface="D2Coding" panose="020B0609020101020101" pitchFamily="49" charset="-127"/>
+              </a:rPr>
+              <a:t>i</a:t>
+            </a:r>
+            <a:r>
+              <a:rPr lang="en-US" altLang="ko-KR" sz="1400" b="0" dirty="0">
+                <a:effectLst/>
+                <a:latin typeface="D2Coding" panose="020B0609020101020101" pitchFamily="49" charset="-127"/>
+                <a:ea typeface="D2Coding" panose="020B0609020101020101" pitchFamily="49" charset="-127"/>
+              </a:rPr>
+              <a:t> in range(5): # 864</a:t>
+            </a:r>
+            <a:r>
+              <a:rPr lang="ko-KR" altLang="en-US" sz="1400" b="0" dirty="0">
+                <a:effectLst/>
+                <a:latin typeface="D2Coding" panose="020B0609020101020101" pitchFamily="49" charset="-127"/>
+                <a:ea typeface="D2Coding" panose="020B0609020101020101" pitchFamily="49" charset="-127"/>
+              </a:rPr>
+              <a:t>개  </a:t>
+            </a:r>
+            <a:r>
+              <a:rPr lang="en-US" altLang="ko-KR" sz="1400" b="0" dirty="0">
+                <a:effectLst/>
+                <a:latin typeface="D2Coding" panose="020B0609020101020101" pitchFamily="49" charset="-127"/>
+                <a:ea typeface="D2Coding" panose="020B0609020101020101" pitchFamily="49" charset="-127"/>
+              </a:rPr>
+              <a:t>Document</a:t>
+            </a:r>
+          </a:p>
+          <a:p>
+            <a:pPr>
+              <a:lnSpc>
+                <a:spcPts val="1575"/>
+              </a:lnSpc>
+              <a:buNone/>
+            </a:pPr>
+            <a:r>
+              <a:rPr lang="en-US" altLang="ko-KR" sz="1400" b="0" dirty="0">
+                <a:effectLst/>
+                <a:latin typeface="D2Coding" panose="020B0609020101020101" pitchFamily="49" charset="-127"/>
+                <a:ea typeface="D2Coding" panose="020B0609020101020101" pitchFamily="49" charset="-127"/>
+              </a:rPr>
+              <a:t>    print(</a:t>
+            </a:r>
+            <a:r>
+              <a:rPr lang="en-US" altLang="ko-KR" sz="1400" b="0" dirty="0" err="1">
+                <a:effectLst/>
+                <a:latin typeface="D2Coding" panose="020B0609020101020101" pitchFamily="49" charset="-127"/>
+                <a:ea typeface="D2Coding" panose="020B0609020101020101" pitchFamily="49" charset="-127"/>
+              </a:rPr>
+              <a:t>f"Document</a:t>
+            </a:r>
+            <a:r>
+              <a:rPr lang="en-US" altLang="ko-KR" sz="1400" b="0" dirty="0">
+                <a:effectLst/>
+                <a:latin typeface="D2Coding" panose="020B0609020101020101" pitchFamily="49" charset="-127"/>
+                <a:ea typeface="D2Coding" panose="020B0609020101020101" pitchFamily="49" charset="-127"/>
+              </a:rPr>
+              <a:t> {</a:t>
+            </a:r>
+            <a:r>
+              <a:rPr lang="en-US" altLang="ko-KR" sz="1400" b="0" dirty="0" err="1">
+                <a:effectLst/>
+                <a:latin typeface="D2Coding" panose="020B0609020101020101" pitchFamily="49" charset="-127"/>
+                <a:ea typeface="D2Coding" panose="020B0609020101020101" pitchFamily="49" charset="-127"/>
+              </a:rPr>
+              <a:t>i</a:t>
+            </a:r>
+            <a:r>
+              <a:rPr lang="en-US" altLang="ko-KR" sz="1400" b="0" dirty="0">
+                <a:effectLst/>
+                <a:latin typeface="D2Coding" panose="020B0609020101020101" pitchFamily="49" charset="-127"/>
+                <a:ea typeface="D2Coding" panose="020B0609020101020101" pitchFamily="49" charset="-127"/>
+              </a:rPr>
+              <a:t>} metadata: {</a:t>
+            </a:r>
+            <a:r>
+              <a:rPr lang="en-US" altLang="ko-KR" sz="1400" b="0" dirty="0" err="1">
+                <a:effectLst/>
+                <a:latin typeface="D2Coding" panose="020B0609020101020101" pitchFamily="49" charset="-127"/>
+                <a:ea typeface="D2Coding" panose="020B0609020101020101" pitchFamily="49" charset="-127"/>
+              </a:rPr>
+              <a:t>splitted_docs</a:t>
+            </a:r>
+            <a:r>
+              <a:rPr lang="en-US" altLang="ko-KR" sz="1400" b="0" dirty="0">
+                <a:effectLst/>
+                <a:latin typeface="D2Coding" panose="020B0609020101020101" pitchFamily="49" charset="-127"/>
+                <a:ea typeface="D2Coding" panose="020B0609020101020101" pitchFamily="49" charset="-127"/>
+              </a:rPr>
+              <a:t>[</a:t>
+            </a:r>
+            <a:r>
+              <a:rPr lang="en-US" altLang="ko-KR" sz="1400" b="0" dirty="0" err="1">
+                <a:effectLst/>
+                <a:latin typeface="D2Coding" panose="020B0609020101020101" pitchFamily="49" charset="-127"/>
+                <a:ea typeface="D2Coding" panose="020B0609020101020101" pitchFamily="49" charset="-127"/>
+              </a:rPr>
+              <a:t>i</a:t>
+            </a:r>
+            <a:r>
+              <a:rPr lang="en-US" altLang="ko-KR" sz="1400" b="0" dirty="0">
+                <a:effectLst/>
+                <a:latin typeface="D2Coding" panose="020B0609020101020101" pitchFamily="49" charset="-127"/>
+                <a:ea typeface="D2Coding" panose="020B0609020101020101" pitchFamily="49" charset="-127"/>
+              </a:rPr>
+              <a:t>].metadata}")</a:t>
+            </a:r>
+          </a:p>
+        </p:txBody>
+      </p:sp>
+      <p:sp>
+        <p:nvSpPr>
+          <p:cNvPr id="18" name="TextBox 17">
+            <a:extLst>
+              <a:ext uri="{FF2B5EF4-FFF2-40B4-BE49-F238E27FC236}">
+                <a16:creationId xmlns:a16="http://schemas.microsoft.com/office/drawing/2014/main" id="{7EE94E3D-8975-8772-9C78-A47A7C4CB7D9}"/>
+              </a:ext>
+            </a:extLst>
+          </p:cNvPr>
+          <p:cNvSpPr txBox="1"/>
+          <p:nvPr/>
+        </p:nvSpPr>
+        <p:spPr>
+          <a:xfrm>
+            <a:off x="2766407" y="5242679"/>
+            <a:ext cx="4282093" cy="1169551"/>
+          </a:xfrm>
+          <a:prstGeom prst="rect">
+            <a:avLst/>
+          </a:prstGeom>
+          <a:solidFill>
+            <a:schemeClr val="tx1"/>
+          </a:solidFill>
+        </p:spPr>
+        <p:txBody>
+          <a:bodyPr wrap="square">
+            <a:spAutoFit/>
+          </a:bodyPr>
+          <a:lstStyle/>
+          <a:p>
+            <a:r>
+              <a:rPr lang="en-US" altLang="ko-KR" sz="1400" b="0" i="0" dirty="0">
+                <a:solidFill>
+                  <a:schemeClr val="bg1"/>
+                </a:solidFill>
+                <a:effectLst/>
+                <a:latin typeface="D2Coding" panose="020B0609020101020101" pitchFamily="49" charset="-127"/>
+                <a:ea typeface="D2Coding" panose="020B0609020101020101" pitchFamily="49" charset="-127"/>
+              </a:rPr>
+              <a:t>Document 0 metadata: {'source': './test.txt'} Document 1 metadata: {'source': './test.txt'} Document 2 metadata: {'source': './test.txt'} Document 3 metadata: {'source': './test.txt'} Document 4 metadata: {'source': './test.txt'}</a:t>
+            </a:r>
+            <a:endParaRPr lang="ko-KR" altLang="en-US" sz="1400" dirty="0">
+              <a:solidFill>
+                <a:schemeClr val="bg1"/>
+              </a:solidFill>
+              <a:latin typeface="D2Coding" panose="020B0609020101020101" pitchFamily="49" charset="-127"/>
+              <a:ea typeface="D2Coding" panose="020B0609020101020101" pitchFamily="49" charset="-127"/>
+            </a:endParaRPr>
+          </a:p>
+        </p:txBody>
+      </p:sp>
+    </p:spTree>
+    <p:extLst>
+      <p:ext uri="{BB962C8B-B14F-4D97-AF65-F5344CB8AC3E}">
+        <p14:creationId xmlns:p14="http://schemas.microsoft.com/office/powerpoint/2010/main" val="3949300632"/>
+      </p:ext>
+    </p:extLst>
+  </p:cSld>
+  <p:clrMapOvr>
+    <a:masterClrMapping/>
+  </p:clrMapOvr>
+</p:sld>
+</file>
+
+<file path=ppt/slides/slide13.xml><?xml version="1.0" encoding="utf-8"?>
+<p:sld xmlns:a="http://schemas.openxmlformats.org/drawingml/2006/main" xmlns:r="http://schemas.openxmlformats.org/officeDocument/2006/relationships" xmlns:p="http://schemas.openxmlformats.org/presentationml/2006/main">
+  <p:cSld>
+    <p:spTree>
+      <p:nvGrpSpPr>
+        <p:cNvPr id="1" name="">
+          <a:extLst>
+            <a:ext uri="{FF2B5EF4-FFF2-40B4-BE49-F238E27FC236}">
+              <a16:creationId xmlns:a16="http://schemas.microsoft.com/office/drawing/2014/main" id="{D42B73FF-AAFE-527E-BAC9-4E68AE04780C}"/>
+            </a:ext>
+          </a:extLst>
+        </p:cNvPr>
+        <p:cNvGrpSpPr/>
+        <p:nvPr/>
+      </p:nvGrpSpPr>
+      <p:grpSpPr>
+        <a:xfrm>
+          <a:off x="0" y="0"/>
+          <a:ext cx="0" cy="0"/>
+          <a:chOff x="0" y="0"/>
+          <a:chExt cx="0" cy="0"/>
+        </a:xfrm>
+      </p:grpSpPr>
+      <p:sp>
+        <p:nvSpPr>
+          <p:cNvPr id="4" name="슬라이드 번호 개체 틀 3">
+            <a:extLst>
+              <a:ext uri="{FF2B5EF4-FFF2-40B4-BE49-F238E27FC236}">
+                <a16:creationId xmlns:a16="http://schemas.microsoft.com/office/drawing/2014/main" id="{F0900995-5D88-1C91-B630-DB3EE9C09FC1}"/>
+              </a:ext>
+            </a:extLst>
+          </p:cNvPr>
+          <p:cNvSpPr>
+            <a:spLocks noGrp="1"/>
+          </p:cNvSpPr>
+          <p:nvPr>
+            <p:ph type="sldNum" sz="quarter" idx="12"/>
+          </p:nvPr>
+        </p:nvSpPr>
+        <p:spPr>
+          <a:xfrm>
+            <a:off x="10514011" y="6036261"/>
+            <a:ext cx="753545" cy="365125"/>
+          </a:xfrm>
+        </p:spPr>
+        <p:txBody>
+          <a:bodyPr/>
+          <a:lstStyle/>
+          <a:p>
+            <a:fld id="{D57F1E4F-1CFF-5643-939E-217C01CDF565}" type="slidenum">
+              <a:rPr lang="en-US" smtClean="0"/>
+              <a:pPr/>
+              <a:t>13</a:t>
+            </a:fld>
+            <a:endParaRPr lang="en-US" dirty="0"/>
+          </a:p>
+        </p:txBody>
+      </p:sp>
+      <p:sp>
+        <p:nvSpPr>
+          <p:cNvPr id="3" name="제목 1">
+            <a:extLst>
+              <a:ext uri="{FF2B5EF4-FFF2-40B4-BE49-F238E27FC236}">
+                <a16:creationId xmlns:a16="http://schemas.microsoft.com/office/drawing/2014/main" id="{2AAC3C16-5355-24BF-217A-D8985CCD3D36}"/>
+              </a:ext>
+            </a:extLst>
+          </p:cNvPr>
+          <p:cNvSpPr txBox="1">
+            <a:spLocks/>
+          </p:cNvSpPr>
+          <p:nvPr/>
+        </p:nvSpPr>
+        <p:spPr>
+          <a:xfrm>
+            <a:off x="475645" y="481983"/>
+            <a:ext cx="10353762" cy="766439"/>
+          </a:xfrm>
+          <a:prstGeom prst="rect">
+            <a:avLst/>
+          </a:prstGeom>
+        </p:spPr>
+        <p:txBody>
+          <a:bodyPr vert="horz" lIns="91440" tIns="45720" rIns="91440" bIns="45720" rtlCol="0" anchor="ctr">
+            <a:normAutofit/>
+          </a:bodyPr>
+          <a:lstStyle>
+            <a:lvl1pPr algn="ctr" defTabSz="914400" rtl="0" eaLnBrk="1" latinLnBrk="1" hangingPunct="1">
+              <a:lnSpc>
+                <a:spcPct val="90000"/>
+              </a:lnSpc>
+              <a:spcBef>
+                <a:spcPct val="0"/>
+              </a:spcBef>
+              <a:buNone/>
+              <a:defRPr sz="3200" kern="1200" cap="all" baseline="0">
+                <a:solidFill>
+                  <a:schemeClr val="tx1"/>
+                </a:solidFill>
+                <a:effectLst/>
+                <a:latin typeface="Batang" panose="02030600000101010101" pitchFamily="18" charset="-127"/>
+                <a:ea typeface="Batang" panose="02030600000101010101" pitchFamily="18" charset="-127"/>
+                <a:cs typeface="+mj-cs"/>
+              </a:defRPr>
+            </a:lvl1pPr>
+          </a:lstStyle>
+          <a:p>
+            <a:pPr algn="l"/>
+            <a:r>
+              <a:rPr lang="en-US" altLang="ko-KR" sz="2800" cap="none" dirty="0">
+                <a:solidFill>
+                  <a:schemeClr val="bg2">
+                    <a:lumMod val="25000"/>
+                  </a:schemeClr>
+                </a:solidFill>
+                <a:latin typeface="D2Coding" panose="020B0609020101020101" pitchFamily="49" charset="-127"/>
+                <a:ea typeface="D2Coding" panose="020B0609020101020101" pitchFamily="49" charset="-127"/>
+                <a:cs typeface="Segoe UI Light" panose="020B0502040204020203" pitchFamily="34" charset="0"/>
+              </a:rPr>
+              <a:t>LLM-Based Embeddings </a:t>
+            </a:r>
+            <a:endParaRPr lang="ko-KR" altLang="en-US" sz="2800" cap="none" dirty="0">
+              <a:solidFill>
+                <a:schemeClr val="bg2">
+                  <a:lumMod val="25000"/>
+                </a:schemeClr>
+              </a:solidFill>
+              <a:latin typeface="D2Coding" panose="020B0609020101020101" pitchFamily="49" charset="-127"/>
+              <a:ea typeface="D2Coding" panose="020B0609020101020101" pitchFamily="49" charset="-127"/>
+              <a:cs typeface="Segoe UI Light" panose="020B0502040204020203" pitchFamily="34" charset="0"/>
+            </a:endParaRPr>
+          </a:p>
+        </p:txBody>
+      </p:sp>
+      <p:sp>
+        <p:nvSpPr>
+          <p:cNvPr id="2" name="TextBox 1">
+            <a:extLst>
+              <a:ext uri="{FF2B5EF4-FFF2-40B4-BE49-F238E27FC236}">
+                <a16:creationId xmlns:a16="http://schemas.microsoft.com/office/drawing/2014/main" id="{D5DF5E29-AB53-8B63-6C3C-6C3A8D5AC840}"/>
+              </a:ext>
+            </a:extLst>
+          </p:cNvPr>
+          <p:cNvSpPr txBox="1"/>
+          <p:nvPr/>
+        </p:nvSpPr>
+        <p:spPr>
+          <a:xfrm>
+            <a:off x="619125" y="1481991"/>
+            <a:ext cx="6096000" cy="338554"/>
+          </a:xfrm>
+          <a:prstGeom prst="rect">
+            <a:avLst/>
+          </a:prstGeom>
+          <a:solidFill>
+            <a:schemeClr val="tx1"/>
+          </a:solidFill>
+        </p:spPr>
+        <p:txBody>
+          <a:bodyPr wrap="square">
+            <a:spAutoFit/>
+          </a:bodyPr>
+          <a:lstStyle/>
+          <a:p>
+            <a:pPr marL="285750" indent="-285750">
+              <a:buFont typeface="Wingdings" panose="05000000000000000000" pitchFamily="2" charset="2"/>
+              <a:buChar char="v"/>
+            </a:pPr>
+            <a:r>
+              <a:rPr lang="en-US" altLang="ko-KR" sz="1600" dirty="0">
+                <a:solidFill>
+                  <a:schemeClr val="bg1"/>
+                </a:solidFill>
+                <a:latin typeface="D2Coding" panose="020B0609020101020101" pitchFamily="49" charset="-127"/>
+                <a:ea typeface="D2Coding" panose="020B0609020101020101" pitchFamily="49" charset="-127"/>
+              </a:rPr>
+              <a:t>3</a:t>
+            </a:r>
+            <a:r>
+              <a:rPr lang="ko-KR" altLang="ko-KR" sz="1600" dirty="0">
+                <a:solidFill>
+                  <a:schemeClr val="bg1"/>
+                </a:solidFill>
+                <a:latin typeface="D2Coding" panose="020B0609020101020101" pitchFamily="49" charset="-127"/>
+                <a:ea typeface="D2Coding" panose="020B0609020101020101" pitchFamily="49" charset="-127"/>
+              </a:rPr>
+              <a:t>단계: </a:t>
+            </a:r>
+            <a:r>
+              <a:rPr lang="en-US" altLang="ko-KR" sz="1600" dirty="0">
+                <a:solidFill>
+                  <a:schemeClr val="bg1"/>
+                </a:solidFill>
+                <a:latin typeface="D2Coding" panose="020B0609020101020101" pitchFamily="49" charset="-127"/>
+                <a:ea typeface="D2Coding" panose="020B0609020101020101" pitchFamily="49" charset="-127"/>
+              </a:rPr>
+              <a:t>Generating Text Embeddings</a:t>
+            </a:r>
+            <a:r>
+              <a:rPr lang="ko-KR" altLang="ko-KR" sz="1600" dirty="0">
+                <a:solidFill>
+                  <a:schemeClr val="bg1"/>
+                </a:solidFill>
+                <a:latin typeface="D2Coding" panose="020B0609020101020101" pitchFamily="49" charset="-127"/>
+                <a:ea typeface="D2Coding" panose="020B0609020101020101" pitchFamily="49" charset="-127"/>
+              </a:rPr>
+              <a:t> </a:t>
+            </a:r>
+            <a:endParaRPr lang="ko-KR" altLang="en-US" sz="1600" dirty="0">
+              <a:solidFill>
+                <a:schemeClr val="bg1"/>
+              </a:solidFill>
+              <a:latin typeface="D2Coding" panose="020B0609020101020101" pitchFamily="49" charset="-127"/>
+              <a:ea typeface="D2Coding" panose="020B0609020101020101" pitchFamily="49" charset="-127"/>
+            </a:endParaRPr>
+          </a:p>
+        </p:txBody>
+      </p:sp>
+      <p:sp>
+        <p:nvSpPr>
+          <p:cNvPr id="9" name="TextBox 8">
+            <a:extLst>
+              <a:ext uri="{FF2B5EF4-FFF2-40B4-BE49-F238E27FC236}">
+                <a16:creationId xmlns:a16="http://schemas.microsoft.com/office/drawing/2014/main" id="{C5978E78-C955-BE92-5C0A-F325975087A6}"/>
+              </a:ext>
+            </a:extLst>
+          </p:cNvPr>
+          <p:cNvSpPr txBox="1"/>
+          <p:nvPr/>
+        </p:nvSpPr>
+        <p:spPr>
+          <a:xfrm>
+            <a:off x="1781175" y="2113577"/>
+            <a:ext cx="9858375" cy="3262432"/>
+          </a:xfrm>
+          <a:prstGeom prst="rect">
+            <a:avLst/>
+          </a:prstGeom>
+          <a:solidFill>
+            <a:srgbClr val="76E3FF"/>
+          </a:solidFill>
+        </p:spPr>
+        <p:txBody>
+          <a:bodyPr wrap="square">
+            <a:spAutoFit/>
+          </a:bodyPr>
+          <a:lstStyle/>
+          <a:p>
+            <a:pPr>
+              <a:lnSpc>
+                <a:spcPts val="1575"/>
+              </a:lnSpc>
+              <a:buNone/>
+            </a:pPr>
+            <a:r>
+              <a:rPr lang="en-US" altLang="ko-KR" sz="1400" b="0" dirty="0">
+                <a:effectLst/>
+                <a:latin typeface="D2Coding" panose="020B0609020101020101" pitchFamily="49" charset="-127"/>
+                <a:ea typeface="D2Coding" panose="020B0609020101020101" pitchFamily="49" charset="-127"/>
+              </a:rPr>
+              <a:t>from</a:t>
+            </a:r>
+            <a:r>
+              <a:rPr lang="ko-KR" altLang="en-US" sz="1400" b="0" dirty="0">
+                <a:effectLst/>
+                <a:latin typeface="D2Coding" panose="020B0609020101020101" pitchFamily="49" charset="-127"/>
+                <a:ea typeface="D2Coding" panose="020B0609020101020101" pitchFamily="49" charset="-127"/>
+              </a:rPr>
+              <a:t> </a:t>
+            </a:r>
+            <a:r>
+              <a:rPr lang="en-US" altLang="ko-KR" sz="1400" b="0" dirty="0" err="1">
+                <a:effectLst/>
+                <a:latin typeface="D2Coding" panose="020B0609020101020101" pitchFamily="49" charset="-127"/>
+                <a:ea typeface="D2Coding" panose="020B0609020101020101" pitchFamily="49" charset="-127"/>
+              </a:rPr>
+              <a:t>langchain_community.embeddings</a:t>
+            </a:r>
+            <a:r>
+              <a:rPr lang="en-US" altLang="ko-KR" sz="1400" b="0" dirty="0">
+                <a:effectLst/>
+                <a:latin typeface="D2Coding" panose="020B0609020101020101" pitchFamily="49" charset="-127"/>
+                <a:ea typeface="D2Coding" panose="020B0609020101020101" pitchFamily="49" charset="-127"/>
+              </a:rPr>
+              <a:t> import</a:t>
+            </a:r>
+            <a:r>
+              <a:rPr lang="ko-KR" altLang="en-US" sz="1400" b="0" dirty="0">
+                <a:effectLst/>
+                <a:latin typeface="D2Coding" panose="020B0609020101020101" pitchFamily="49" charset="-127"/>
+                <a:ea typeface="D2Coding" panose="020B0609020101020101" pitchFamily="49" charset="-127"/>
+              </a:rPr>
+              <a:t> </a:t>
+            </a:r>
+            <a:r>
+              <a:rPr lang="en-US" altLang="ko-KR" sz="1400" b="0" dirty="0" err="1">
+                <a:effectLst/>
+                <a:latin typeface="D2Coding" panose="020B0609020101020101" pitchFamily="49" charset="-127"/>
+                <a:ea typeface="D2Coding" panose="020B0609020101020101" pitchFamily="49" charset="-127"/>
+              </a:rPr>
+              <a:t>HuggingFaceEmbeddings</a:t>
+            </a:r>
+            <a:endParaRPr lang="en-US" altLang="ko-KR" sz="1400" b="0" dirty="0">
+              <a:effectLst/>
+              <a:latin typeface="D2Coding" panose="020B0609020101020101" pitchFamily="49" charset="-127"/>
+              <a:ea typeface="D2Coding" panose="020B0609020101020101" pitchFamily="49" charset="-127"/>
+            </a:endParaRPr>
+          </a:p>
+          <a:p>
+            <a:pPr>
+              <a:lnSpc>
+                <a:spcPts val="1575"/>
+              </a:lnSpc>
+              <a:buNone/>
+            </a:pPr>
+            <a:br>
+              <a:rPr lang="en-US" altLang="ko-KR" sz="1400" b="0" dirty="0">
+                <a:effectLst/>
+                <a:latin typeface="D2Coding" panose="020B0609020101020101" pitchFamily="49" charset="-127"/>
+                <a:ea typeface="D2Coding" panose="020B0609020101020101" pitchFamily="49" charset="-127"/>
+              </a:rPr>
+            </a:br>
+            <a:r>
+              <a:rPr lang="en-US" altLang="ko-KR" sz="1400" b="0" dirty="0">
+                <a:effectLst/>
+                <a:latin typeface="D2Coding" panose="020B0609020101020101" pitchFamily="49" charset="-127"/>
+                <a:ea typeface="D2Coding" panose="020B0609020101020101" pitchFamily="49" charset="-127"/>
+              </a:rPr>
+              <a:t># </a:t>
+            </a:r>
+            <a:r>
+              <a:rPr lang="ko-KR" altLang="en-US" sz="1400" b="0" dirty="0">
+                <a:effectLst/>
+                <a:latin typeface="D2Coding" panose="020B0609020101020101" pitchFamily="49" charset="-127"/>
+                <a:ea typeface="D2Coding" panose="020B0609020101020101" pitchFamily="49" charset="-127"/>
+              </a:rPr>
+              <a:t>인터넷 너머의 </a:t>
+            </a:r>
+            <a:r>
+              <a:rPr lang="en-US" altLang="ko-KR" sz="1400" b="0" dirty="0" err="1">
+                <a:effectLst/>
+                <a:latin typeface="D2Coding" panose="020B0609020101020101" pitchFamily="49" charset="-127"/>
+                <a:ea typeface="D2Coding" panose="020B0609020101020101" pitchFamily="49" charset="-127"/>
+              </a:rPr>
+              <a:t>Groq</a:t>
+            </a:r>
+            <a:r>
+              <a:rPr lang="ko-KR" altLang="en-US" sz="1400" b="0" dirty="0">
+                <a:effectLst/>
+                <a:latin typeface="D2Coding" panose="020B0609020101020101" pitchFamily="49" charset="-127"/>
+                <a:ea typeface="D2Coding" panose="020B0609020101020101" pitchFamily="49" charset="-127"/>
+              </a:rPr>
+              <a:t>이나 </a:t>
+            </a:r>
+            <a:r>
+              <a:rPr lang="en-US" altLang="ko-KR" sz="1400" b="0" dirty="0">
+                <a:effectLst/>
+                <a:latin typeface="D2Coding" panose="020B0609020101020101" pitchFamily="49" charset="-127"/>
+                <a:ea typeface="D2Coding" panose="020B0609020101020101" pitchFamily="49" charset="-127"/>
+              </a:rPr>
+              <a:t>OpenAI </a:t>
+            </a:r>
+            <a:r>
+              <a:rPr lang="ko-KR" altLang="en-US" sz="1400" b="0" dirty="0">
+                <a:effectLst/>
+                <a:latin typeface="D2Coding" panose="020B0609020101020101" pitchFamily="49" charset="-127"/>
+                <a:ea typeface="D2Coding" panose="020B0609020101020101" pitchFamily="49" charset="-127"/>
+              </a:rPr>
+              <a:t>서버를 전혀 부르지 않고 </a:t>
+            </a:r>
+            <a:endParaRPr lang="en-US" altLang="ko-KR" sz="1400" b="0" dirty="0">
+              <a:effectLst/>
+              <a:latin typeface="D2Coding" panose="020B0609020101020101" pitchFamily="49" charset="-127"/>
+              <a:ea typeface="D2Coding" panose="020B0609020101020101" pitchFamily="49" charset="-127"/>
+            </a:endParaRPr>
+          </a:p>
+          <a:p>
+            <a:pPr>
+              <a:lnSpc>
+                <a:spcPts val="1575"/>
+              </a:lnSpc>
+              <a:buNone/>
+            </a:pPr>
+            <a:r>
+              <a:rPr lang="en-US" altLang="ko-KR" sz="1400" dirty="0">
+                <a:latin typeface="D2Coding" panose="020B0609020101020101" pitchFamily="49" charset="-127"/>
+                <a:ea typeface="D2Coding" panose="020B0609020101020101" pitchFamily="49" charset="-127"/>
+              </a:rPr>
+              <a:t># </a:t>
+            </a:r>
+            <a:r>
+              <a:rPr lang="en-US" altLang="ko-KR" sz="1400" b="0" dirty="0" err="1">
+                <a:effectLst/>
+                <a:latin typeface="D2Coding" panose="020B0609020101020101" pitchFamily="49" charset="-127"/>
+                <a:ea typeface="D2Coding" panose="020B0609020101020101" pitchFamily="49" charset="-127"/>
+              </a:rPr>
+              <a:t>Colab</a:t>
+            </a:r>
+            <a:r>
+              <a:rPr lang="ko-KR" altLang="en-US" sz="1400" b="0" dirty="0">
+                <a:effectLst/>
+                <a:latin typeface="D2Coding" panose="020B0609020101020101" pitchFamily="49" charset="-127"/>
+                <a:ea typeface="D2Coding" panose="020B0609020101020101" pitchFamily="49" charset="-127"/>
+              </a:rPr>
+              <a:t>메모리에 이 </a:t>
+            </a:r>
+            <a:r>
+              <a:rPr lang="ko-KR" altLang="en-US" sz="1400" b="0" dirty="0" err="1">
+                <a:effectLst/>
+                <a:latin typeface="D2Coding" panose="020B0609020101020101" pitchFamily="49" charset="-127"/>
+                <a:ea typeface="D2Coding" panose="020B0609020101020101" pitchFamily="49" charset="-127"/>
+              </a:rPr>
+              <a:t>임베딩를</a:t>
+            </a:r>
+            <a:r>
+              <a:rPr lang="ko-KR" altLang="en-US" sz="1400" b="0" dirty="0">
+                <a:effectLst/>
+                <a:latin typeface="D2Coding" panose="020B0609020101020101" pitchFamily="49" charset="-127"/>
+                <a:ea typeface="D2Coding" panose="020B0609020101020101" pitchFamily="49" charset="-127"/>
+              </a:rPr>
+              <a:t> 직접 </a:t>
+            </a:r>
+            <a:r>
+              <a:rPr lang="ko-KR" altLang="en-US" sz="1400" b="0" dirty="0" err="1">
+                <a:effectLst/>
+                <a:latin typeface="D2Coding" panose="020B0609020101020101" pitchFamily="49" charset="-127"/>
+                <a:ea typeface="D2Coding" panose="020B0609020101020101" pitchFamily="49" charset="-127"/>
+              </a:rPr>
+              <a:t>다운로드받아</a:t>
+            </a:r>
+            <a:r>
+              <a:rPr lang="ko-KR" altLang="en-US" sz="1400" b="0" dirty="0">
+                <a:effectLst/>
+                <a:latin typeface="D2Coding" panose="020B0609020101020101" pitchFamily="49" charset="-127"/>
+                <a:ea typeface="D2Coding" panose="020B0609020101020101" pitchFamily="49" charset="-127"/>
+              </a:rPr>
+              <a:t> 설치하는 명령어</a:t>
+            </a:r>
+          </a:p>
+          <a:p>
+            <a:pPr>
+              <a:lnSpc>
+                <a:spcPts val="1575"/>
+              </a:lnSpc>
+              <a:buNone/>
+            </a:pPr>
+            <a:r>
+              <a:rPr lang="en-US" altLang="ko-KR" sz="1400" b="0" dirty="0" err="1">
+                <a:effectLst/>
+                <a:latin typeface="D2Coding" panose="020B0609020101020101" pitchFamily="49" charset="-127"/>
+                <a:ea typeface="D2Coding" panose="020B0609020101020101" pitchFamily="49" charset="-127"/>
+              </a:rPr>
+              <a:t>embed_model</a:t>
+            </a:r>
+            <a:r>
+              <a:rPr lang="en-US" altLang="ko-KR" sz="1400" b="0" dirty="0">
+                <a:effectLst/>
+                <a:latin typeface="D2Coding" panose="020B0609020101020101" pitchFamily="49" charset="-127"/>
+                <a:ea typeface="D2Coding" panose="020B0609020101020101" pitchFamily="49" charset="-127"/>
+              </a:rPr>
+              <a:t> = </a:t>
+            </a:r>
+            <a:r>
+              <a:rPr lang="en-US" altLang="ko-KR" sz="1400" b="0" dirty="0" err="1">
+                <a:effectLst/>
+                <a:latin typeface="D2Coding" panose="020B0609020101020101" pitchFamily="49" charset="-127"/>
+                <a:ea typeface="D2Coding" panose="020B0609020101020101" pitchFamily="49" charset="-127"/>
+              </a:rPr>
+              <a:t>HuggingFaceEmbeddings</a:t>
+            </a:r>
+            <a:r>
+              <a:rPr lang="en-US" altLang="ko-KR" sz="1400" b="0" dirty="0">
+                <a:effectLst/>
+                <a:latin typeface="D2Coding" panose="020B0609020101020101" pitchFamily="49" charset="-127"/>
+                <a:ea typeface="D2Coding" panose="020B0609020101020101" pitchFamily="49" charset="-127"/>
+              </a:rPr>
+              <a:t>(</a:t>
+            </a:r>
+            <a:r>
+              <a:rPr lang="en-US" altLang="ko-KR" sz="1400" b="0" dirty="0" err="1">
+                <a:effectLst/>
+                <a:latin typeface="D2Coding" panose="020B0609020101020101" pitchFamily="49" charset="-127"/>
+                <a:ea typeface="D2Coding" panose="020B0609020101020101" pitchFamily="49" charset="-127"/>
+              </a:rPr>
+              <a:t>model_name</a:t>
+            </a:r>
+            <a:r>
+              <a:rPr lang="en-US" altLang="ko-KR" sz="1400" b="0" dirty="0">
+                <a:effectLst/>
+                <a:latin typeface="D2Coding" panose="020B0609020101020101" pitchFamily="49" charset="-127"/>
+                <a:ea typeface="D2Coding" panose="020B0609020101020101" pitchFamily="49" charset="-127"/>
+              </a:rPr>
+              <a:t>="all-MiniLM-L6-v2")</a:t>
+            </a:r>
+          </a:p>
+          <a:p>
+            <a:pPr>
+              <a:lnSpc>
+                <a:spcPts val="1575"/>
+              </a:lnSpc>
+              <a:buNone/>
+            </a:pPr>
+            <a:endParaRPr lang="en-US" altLang="ko-KR" sz="1400" dirty="0">
+              <a:latin typeface="D2Coding" panose="020B0609020101020101" pitchFamily="49" charset="-127"/>
+              <a:ea typeface="D2Coding" panose="020B0609020101020101" pitchFamily="49" charset="-127"/>
+            </a:endParaRPr>
+          </a:p>
+          <a:p>
+            <a:r>
+              <a:rPr lang="en-US" altLang="ko-KR" sz="1400" dirty="0">
+                <a:latin typeface="D2Coding" panose="020B0609020101020101" pitchFamily="49" charset="-127"/>
+                <a:ea typeface="D2Coding" panose="020B0609020101020101" pitchFamily="49" charset="-127"/>
+              </a:rPr>
+              <a:t>embeddings = </a:t>
+            </a:r>
+            <a:r>
+              <a:rPr lang="en-US" altLang="ko-KR" sz="1400" dirty="0" err="1">
+                <a:latin typeface="D2Coding" panose="020B0609020101020101" pitchFamily="49" charset="-127"/>
+                <a:ea typeface="D2Coding" panose="020B0609020101020101" pitchFamily="49" charset="-127"/>
+              </a:rPr>
+              <a:t>embed_model.embed_documents</a:t>
+            </a:r>
+            <a:r>
+              <a:rPr lang="en-US" altLang="ko-KR" sz="1400" dirty="0">
+                <a:latin typeface="D2Coding" panose="020B0609020101020101" pitchFamily="49" charset="-127"/>
+                <a:ea typeface="D2Coding" panose="020B0609020101020101" pitchFamily="49" charset="-127"/>
+              </a:rPr>
+              <a:t>([</a:t>
+            </a:r>
+          </a:p>
+          <a:p>
+            <a:r>
+              <a:rPr lang="en-US" altLang="ko-KR" sz="1400" dirty="0">
+                <a:latin typeface="D2Coding" panose="020B0609020101020101" pitchFamily="49" charset="-127"/>
+                <a:ea typeface="D2Coding" panose="020B0609020101020101" pitchFamily="49" charset="-127"/>
+              </a:rPr>
+              <a:t>    "Hi there!",</a:t>
+            </a:r>
+          </a:p>
+          <a:p>
+            <a:r>
+              <a:rPr lang="en-US" altLang="ko-KR" sz="1400" dirty="0">
+                <a:latin typeface="D2Coding" panose="020B0609020101020101" pitchFamily="49" charset="-127"/>
+                <a:ea typeface="D2Coding" panose="020B0609020101020101" pitchFamily="49" charset="-127"/>
+              </a:rPr>
+              <a:t>    "Oh, hello!",</a:t>
+            </a:r>
+          </a:p>
+          <a:p>
+            <a:r>
+              <a:rPr lang="en-US" altLang="ko-KR" sz="1400" dirty="0">
+                <a:latin typeface="D2Coding" panose="020B0609020101020101" pitchFamily="49" charset="-127"/>
+                <a:ea typeface="D2Coding" panose="020B0609020101020101" pitchFamily="49" charset="-127"/>
+              </a:rPr>
+              <a:t>    "What's your name?",</a:t>
+            </a:r>
+          </a:p>
+          <a:p>
+            <a:r>
+              <a:rPr lang="en-US" altLang="ko-KR" sz="1400" dirty="0">
+                <a:latin typeface="D2Coding" panose="020B0609020101020101" pitchFamily="49" charset="-127"/>
+                <a:ea typeface="D2Coding" panose="020B0609020101020101" pitchFamily="49" charset="-127"/>
+              </a:rPr>
+              <a:t>    "My friends call me World",</a:t>
+            </a:r>
+          </a:p>
+          <a:p>
+            <a:r>
+              <a:rPr lang="en-US" altLang="ko-KR" sz="1400" dirty="0">
+                <a:latin typeface="D2Coding" panose="020B0609020101020101" pitchFamily="49" charset="-127"/>
+                <a:ea typeface="D2Coding" panose="020B0609020101020101" pitchFamily="49" charset="-127"/>
+              </a:rPr>
+              <a:t>    "Hello World!"</a:t>
+            </a:r>
+          </a:p>
+          <a:p>
+            <a:r>
+              <a:rPr lang="en-US" altLang="ko-KR" sz="1400" dirty="0">
+                <a:latin typeface="D2Coding" panose="020B0609020101020101" pitchFamily="49" charset="-127"/>
+                <a:ea typeface="D2Coding" panose="020B0609020101020101" pitchFamily="49" charset="-127"/>
+              </a:rPr>
+              <a:t>])</a:t>
+            </a:r>
+          </a:p>
+          <a:p>
+            <a:endParaRPr lang="en-US" altLang="ko-KR" sz="1400" dirty="0">
+              <a:latin typeface="D2Coding" panose="020B0609020101020101" pitchFamily="49" charset="-127"/>
+              <a:ea typeface="D2Coding" panose="020B0609020101020101" pitchFamily="49" charset="-127"/>
+            </a:endParaRPr>
+          </a:p>
+          <a:p>
+            <a:r>
+              <a:rPr lang="en-US" altLang="ko-KR" sz="1400" dirty="0">
+                <a:latin typeface="D2Coding" panose="020B0609020101020101" pitchFamily="49" charset="-127"/>
+                <a:ea typeface="D2Coding" panose="020B0609020101020101" pitchFamily="49" charset="-127"/>
+              </a:rPr>
+              <a:t>print(embeddings)</a:t>
+            </a:r>
+          </a:p>
+        </p:txBody>
+      </p:sp>
+    </p:spTree>
+    <p:extLst>
+      <p:ext uri="{BB962C8B-B14F-4D97-AF65-F5344CB8AC3E}">
+        <p14:creationId xmlns:p14="http://schemas.microsoft.com/office/powerpoint/2010/main" val="2717806563"/>
+      </p:ext>
+    </p:extLst>
+  </p:cSld>
+  <p:clrMapOvr>
+    <a:masterClrMapping/>
+  </p:clrMapOvr>
+</p:sld>
+</file>
+
+<file path=ppt/slides/slide14.xml><?xml version="1.0" encoding="utf-8"?>
+<p:sld xmlns:a="http://schemas.openxmlformats.org/drawingml/2006/main" xmlns:r="http://schemas.openxmlformats.org/officeDocument/2006/relationships" xmlns:p="http://schemas.openxmlformats.org/presentationml/2006/main">
+  <p:cSld>
+    <p:spTree>
+      <p:nvGrpSpPr>
+        <p:cNvPr id="1" name="">
+          <a:extLst>
+            <a:ext uri="{FF2B5EF4-FFF2-40B4-BE49-F238E27FC236}">
+              <a16:creationId xmlns:a16="http://schemas.microsoft.com/office/drawing/2014/main" id="{8A3EE74C-F6AF-0FFF-02C0-065BB714C3E5}"/>
+            </a:ext>
+          </a:extLst>
+        </p:cNvPr>
+        <p:cNvGrpSpPr/>
+        <p:nvPr/>
+      </p:nvGrpSpPr>
+      <p:grpSpPr>
+        <a:xfrm>
+          <a:off x="0" y="0"/>
+          <a:ext cx="0" cy="0"/>
+          <a:chOff x="0" y="0"/>
+          <a:chExt cx="0" cy="0"/>
+        </a:xfrm>
+      </p:grpSpPr>
+      <p:sp>
+        <p:nvSpPr>
+          <p:cNvPr id="4" name="슬라이드 번호 개체 틀 3">
+            <a:extLst>
+              <a:ext uri="{FF2B5EF4-FFF2-40B4-BE49-F238E27FC236}">
+                <a16:creationId xmlns:a16="http://schemas.microsoft.com/office/drawing/2014/main" id="{848DEC33-1D4B-3FB2-FC36-771DC8DE7B2E}"/>
+              </a:ext>
+            </a:extLst>
+          </p:cNvPr>
+          <p:cNvSpPr>
+            <a:spLocks noGrp="1"/>
+          </p:cNvSpPr>
+          <p:nvPr>
+            <p:ph type="sldNum" sz="quarter" idx="12"/>
+          </p:nvPr>
+        </p:nvSpPr>
+        <p:spPr>
+          <a:xfrm>
+            <a:off x="10514011" y="6036261"/>
+            <a:ext cx="753545" cy="365125"/>
+          </a:xfrm>
+        </p:spPr>
+        <p:txBody>
+          <a:bodyPr/>
+          <a:lstStyle/>
+          <a:p>
+            <a:fld id="{D57F1E4F-1CFF-5643-939E-217C01CDF565}" type="slidenum">
+              <a:rPr lang="en-US" smtClean="0"/>
+              <a:pPr/>
+              <a:t>14</a:t>
+            </a:fld>
+            <a:endParaRPr lang="en-US" dirty="0"/>
+          </a:p>
+        </p:txBody>
+      </p:sp>
+      <p:sp>
+        <p:nvSpPr>
+          <p:cNvPr id="3" name="제목 1">
+            <a:extLst>
+              <a:ext uri="{FF2B5EF4-FFF2-40B4-BE49-F238E27FC236}">
+                <a16:creationId xmlns:a16="http://schemas.microsoft.com/office/drawing/2014/main" id="{B4EF9347-1C5A-215B-828D-012466499AA4}"/>
+              </a:ext>
+            </a:extLst>
+          </p:cNvPr>
+          <p:cNvSpPr txBox="1">
+            <a:spLocks/>
+          </p:cNvSpPr>
+          <p:nvPr/>
+        </p:nvSpPr>
+        <p:spPr>
+          <a:xfrm>
+            <a:off x="475645" y="481983"/>
+            <a:ext cx="10353762" cy="766439"/>
+          </a:xfrm>
+          <a:prstGeom prst="rect">
+            <a:avLst/>
+          </a:prstGeom>
+        </p:spPr>
+        <p:txBody>
+          <a:bodyPr vert="horz" lIns="91440" tIns="45720" rIns="91440" bIns="45720" rtlCol="0" anchor="ctr">
+            <a:normAutofit/>
+          </a:bodyPr>
+          <a:lstStyle>
+            <a:lvl1pPr algn="ctr" defTabSz="914400" rtl="0" eaLnBrk="1" latinLnBrk="1" hangingPunct="1">
+              <a:lnSpc>
+                <a:spcPct val="90000"/>
+              </a:lnSpc>
+              <a:spcBef>
+                <a:spcPct val="0"/>
+              </a:spcBef>
+              <a:buNone/>
+              <a:defRPr sz="3200" kern="1200" cap="all" baseline="0">
+                <a:solidFill>
+                  <a:schemeClr val="tx1"/>
+                </a:solidFill>
+                <a:effectLst/>
+                <a:latin typeface="Batang" panose="02030600000101010101" pitchFamily="18" charset="-127"/>
+                <a:ea typeface="Batang" panose="02030600000101010101" pitchFamily="18" charset="-127"/>
+                <a:cs typeface="+mj-cs"/>
+              </a:defRPr>
+            </a:lvl1pPr>
+          </a:lstStyle>
+          <a:p>
+            <a:pPr algn="l"/>
+            <a:r>
+              <a:rPr lang="en-US" altLang="ko-KR" sz="2800" cap="none" dirty="0">
+                <a:solidFill>
+                  <a:schemeClr val="bg2">
+                    <a:lumMod val="25000"/>
+                  </a:schemeClr>
+                </a:solidFill>
+                <a:latin typeface="D2Coding" panose="020B0609020101020101" pitchFamily="49" charset="-127"/>
+                <a:ea typeface="D2Coding" panose="020B0609020101020101" pitchFamily="49" charset="-127"/>
+                <a:cs typeface="Segoe UI Light" panose="020B0502040204020203" pitchFamily="34" charset="0"/>
+              </a:rPr>
+              <a:t>LLM-Based Embeddings </a:t>
+            </a:r>
+            <a:endParaRPr lang="ko-KR" altLang="en-US" sz="2800" cap="none" dirty="0">
+              <a:solidFill>
+                <a:schemeClr val="bg2">
+                  <a:lumMod val="25000"/>
+                </a:schemeClr>
+              </a:solidFill>
+              <a:latin typeface="D2Coding" panose="020B0609020101020101" pitchFamily="49" charset="-127"/>
+              <a:ea typeface="D2Coding" panose="020B0609020101020101" pitchFamily="49" charset="-127"/>
+              <a:cs typeface="Segoe UI Light" panose="020B0502040204020203" pitchFamily="34" charset="0"/>
+            </a:endParaRPr>
+          </a:p>
+        </p:txBody>
+      </p:sp>
+      <p:sp>
+        <p:nvSpPr>
+          <p:cNvPr id="2" name="TextBox 1">
+            <a:extLst>
+              <a:ext uri="{FF2B5EF4-FFF2-40B4-BE49-F238E27FC236}">
+                <a16:creationId xmlns:a16="http://schemas.microsoft.com/office/drawing/2014/main" id="{7B665088-6AF0-9054-3062-EC384D0230FF}"/>
+              </a:ext>
+            </a:extLst>
+          </p:cNvPr>
+          <p:cNvSpPr txBox="1"/>
+          <p:nvPr/>
+        </p:nvSpPr>
+        <p:spPr>
+          <a:xfrm>
+            <a:off x="619125" y="1481991"/>
+            <a:ext cx="6096000" cy="338554"/>
+          </a:xfrm>
+          <a:prstGeom prst="rect">
+            <a:avLst/>
+          </a:prstGeom>
+          <a:solidFill>
+            <a:schemeClr val="tx1"/>
+          </a:solidFill>
+        </p:spPr>
+        <p:txBody>
+          <a:bodyPr wrap="square">
+            <a:spAutoFit/>
+          </a:bodyPr>
+          <a:lstStyle/>
+          <a:p>
+            <a:pPr marL="285750" indent="-285750">
+              <a:buFont typeface="Wingdings" panose="05000000000000000000" pitchFamily="2" charset="2"/>
+              <a:buChar char="v"/>
+            </a:pPr>
+            <a:r>
+              <a:rPr lang="en-US" altLang="ko-KR" sz="1600" dirty="0">
+                <a:solidFill>
+                  <a:schemeClr val="bg1"/>
+                </a:solidFill>
+                <a:latin typeface="D2Coding" panose="020B0609020101020101" pitchFamily="49" charset="-127"/>
+                <a:ea typeface="D2Coding" panose="020B0609020101020101" pitchFamily="49" charset="-127"/>
+              </a:rPr>
+              <a:t>4</a:t>
+            </a:r>
+            <a:r>
+              <a:rPr lang="ko-KR" altLang="ko-KR" sz="1600" dirty="0">
+                <a:solidFill>
+                  <a:schemeClr val="bg1"/>
+                </a:solidFill>
+                <a:latin typeface="D2Coding" panose="020B0609020101020101" pitchFamily="49" charset="-127"/>
+                <a:ea typeface="D2Coding" panose="020B0609020101020101" pitchFamily="49" charset="-127"/>
+              </a:rPr>
+              <a:t>단계: </a:t>
+            </a:r>
+            <a:r>
+              <a:rPr lang="en-US" altLang="ko-KR" sz="1600" dirty="0">
+                <a:solidFill>
+                  <a:schemeClr val="bg1"/>
+                </a:solidFill>
+                <a:latin typeface="D2Coding" panose="020B0609020101020101" pitchFamily="49" charset="-127"/>
+                <a:ea typeface="D2Coding" panose="020B0609020101020101" pitchFamily="49" charset="-127"/>
+              </a:rPr>
+              <a:t>Storing Embeddings in a Vector Store</a:t>
+            </a:r>
+            <a:r>
+              <a:rPr lang="ko-KR" altLang="ko-KR" sz="1600" dirty="0">
+                <a:solidFill>
+                  <a:schemeClr val="bg1"/>
+                </a:solidFill>
+                <a:latin typeface="D2Coding" panose="020B0609020101020101" pitchFamily="49" charset="-127"/>
+                <a:ea typeface="D2Coding" panose="020B0609020101020101" pitchFamily="49" charset="-127"/>
+              </a:rPr>
+              <a:t> </a:t>
+            </a:r>
+            <a:endParaRPr lang="ko-KR" altLang="en-US" sz="1600" dirty="0">
+              <a:solidFill>
+                <a:schemeClr val="bg1"/>
+              </a:solidFill>
+              <a:latin typeface="D2Coding" panose="020B0609020101020101" pitchFamily="49" charset="-127"/>
+              <a:ea typeface="D2Coding" panose="020B0609020101020101" pitchFamily="49" charset="-127"/>
+            </a:endParaRPr>
+          </a:p>
+        </p:txBody>
+      </p:sp>
+      <p:sp>
+        <p:nvSpPr>
+          <p:cNvPr id="9" name="TextBox 8">
+            <a:extLst>
+              <a:ext uri="{FF2B5EF4-FFF2-40B4-BE49-F238E27FC236}">
+                <a16:creationId xmlns:a16="http://schemas.microsoft.com/office/drawing/2014/main" id="{6C977091-07CB-8CF5-976C-1D5E34563CEA}"/>
+              </a:ext>
+            </a:extLst>
+          </p:cNvPr>
+          <p:cNvSpPr txBox="1"/>
+          <p:nvPr/>
+        </p:nvSpPr>
+        <p:spPr>
+          <a:xfrm>
+            <a:off x="1781175" y="2113577"/>
+            <a:ext cx="9858375" cy="297517"/>
+          </a:xfrm>
+          <a:prstGeom prst="rect">
+            <a:avLst/>
+          </a:prstGeom>
+          <a:solidFill>
+            <a:srgbClr val="76E3FF"/>
+          </a:solidFill>
+        </p:spPr>
+        <p:txBody>
+          <a:bodyPr wrap="square">
+            <a:spAutoFit/>
+          </a:bodyPr>
+          <a:lstStyle/>
+          <a:p>
+            <a:pPr>
+              <a:lnSpc>
+                <a:spcPts val="1575"/>
+              </a:lnSpc>
+              <a:buNone/>
+            </a:pPr>
+            <a:endParaRPr lang="en-US" altLang="ko-KR" sz="1400" dirty="0">
+              <a:latin typeface="D2Coding" panose="020B0609020101020101" pitchFamily="49" charset="-127"/>
+              <a:ea typeface="D2Coding" panose="020B0609020101020101" pitchFamily="49" charset="-127"/>
+            </a:endParaRPr>
+          </a:p>
+        </p:txBody>
+      </p:sp>
+    </p:spTree>
+    <p:extLst>
+      <p:ext uri="{BB962C8B-B14F-4D97-AF65-F5344CB8AC3E}">
+        <p14:creationId xmlns:p14="http://schemas.microsoft.com/office/powerpoint/2010/main" val="591459622"/>
+      </p:ext>
+    </p:extLst>
+  </p:cSld>
+  <p:clrMapOvr>
+    <a:masterClrMapping/>
+  </p:clrMapOvr>
+</p:sld>
+</file>
+
 <file path=ppt/slides/slide2.xml><?xml version="1.0" encoding="utf-8"?>
 <p:sld xmlns:a="http://schemas.openxmlformats.org/drawingml/2006/main" xmlns:r="http://schemas.openxmlformats.org/officeDocument/2006/relationships" xmlns:p="http://schemas.openxmlformats.org/presentationml/2006/main">
   <p:cSld>
@@ -4538,10 +7960,12 @@
           </a:bodyPr>
           <a:lstStyle/>
           <a:p>
-            <a:pPr>
+            <a:pPr marL="285750" indent="-285750">
               <a:lnSpc>
                 <a:spcPct val="150000"/>
               </a:lnSpc>
+              <a:buFont typeface="Wingdings" panose="05000000000000000000" pitchFamily="2" charset="2"/>
+              <a:buChar char="v"/>
             </a:pPr>
             <a:r>
               <a:rPr lang="en-US" altLang="ko-KR" sz="1600" b="1" dirty="0">
@@ -4993,7 +8417,7 @@
         <p:spPr>
           <a:xfrm>
             <a:off x="552450" y="1248422"/>
-            <a:ext cx="11068050" cy="1162498"/>
+            <a:ext cx="11068050" cy="1028808"/>
           </a:xfrm>
           <a:prstGeom prst="rect">
             <a:avLst/>
@@ -5006,140 +8430,141 @@
           </a:bodyPr>
           <a:lstStyle/>
           <a:p>
-            <a:pPr>
+            <a:pPr marL="285750" indent="-285750">
               <a:lnSpc>
                 <a:spcPct val="150000"/>
               </a:lnSpc>
-              <a:buNone/>
+              <a:buFont typeface="Wingdings" panose="05000000000000000000" pitchFamily="2" charset="2"/>
+              <a:buChar char="v"/>
             </a:pPr>
             <a:r>
-              <a:rPr lang="ko-KR" altLang="en-US" sz="1600" dirty="0" err="1">
+              <a:rPr lang="ko-KR" altLang="en-US" sz="1400" dirty="0" err="1">
                 <a:latin typeface="D2Coding" panose="020B0609020101020101" pitchFamily="49" charset="-127"/>
                 <a:ea typeface="D2Coding" panose="020B0609020101020101" pitchFamily="49" charset="-127"/>
               </a:rPr>
               <a:t>임베딩</a:t>
             </a:r>
             <a:r>
-              <a:rPr lang="en-US" altLang="ko-KR" sz="1600" dirty="0">
+              <a:rPr lang="en-US" altLang="ko-KR" sz="1400" dirty="0">
                 <a:latin typeface="D2Coding" panose="020B0609020101020101" pitchFamily="49" charset="-127"/>
                 <a:ea typeface="D2Coding" panose="020B0609020101020101" pitchFamily="49" charset="-127"/>
               </a:rPr>
               <a:t>(Embedding)</a:t>
             </a:r>
             <a:r>
-              <a:rPr lang="ko-KR" altLang="en-US" sz="1600" dirty="0">
+              <a:rPr lang="ko-KR" altLang="en-US" sz="1400" dirty="0">
                 <a:latin typeface="D2Coding" panose="020B0609020101020101" pitchFamily="49" charset="-127"/>
                 <a:ea typeface="D2Coding" panose="020B0609020101020101" pitchFamily="49" charset="-127"/>
               </a:rPr>
               <a:t>이란</a:t>
             </a:r>
             <a:r>
-              <a:rPr lang="en-US" altLang="ko-KR" sz="1600" dirty="0">
+              <a:rPr lang="en-US" altLang="ko-KR" sz="1400" dirty="0">
                 <a:latin typeface="D2Coding" panose="020B0609020101020101" pitchFamily="49" charset="-127"/>
                 <a:ea typeface="D2Coding" panose="020B0609020101020101" pitchFamily="49" charset="-127"/>
               </a:rPr>
               <a:t> </a:t>
             </a:r>
             <a:r>
-              <a:rPr lang="ko-KR" altLang="en-US" sz="1600" dirty="0">
+              <a:rPr lang="ko-KR" altLang="en-US" sz="1400" dirty="0">
                 <a:latin typeface="D2Coding" panose="020B0609020101020101" pitchFamily="49" charset="-127"/>
                 <a:ea typeface="D2Coding" panose="020B0609020101020101" pitchFamily="49" charset="-127"/>
               </a:rPr>
               <a:t>텍스트</a:t>
             </a:r>
             <a:r>
-              <a:rPr lang="en-US" altLang="ko-KR" sz="1600" dirty="0">
+              <a:rPr lang="en-US" altLang="ko-KR" sz="1400" dirty="0">
                 <a:latin typeface="D2Coding" panose="020B0609020101020101" pitchFamily="49" charset="-127"/>
                 <a:ea typeface="D2Coding" panose="020B0609020101020101" pitchFamily="49" charset="-127"/>
               </a:rPr>
               <a:t>(</a:t>
             </a:r>
             <a:r>
-              <a:rPr lang="ko-KR" altLang="en-US" sz="1600" dirty="0">
+              <a:rPr lang="ko-KR" altLang="en-US" sz="1400" dirty="0">
                 <a:latin typeface="D2Coding" panose="020B0609020101020101" pitchFamily="49" charset="-127"/>
                 <a:ea typeface="D2Coding" panose="020B0609020101020101" pitchFamily="49" charset="-127"/>
               </a:rPr>
               <a:t>단어</a:t>
             </a:r>
             <a:r>
-              <a:rPr lang="en-US" altLang="ko-KR" sz="1600" dirty="0">
+              <a:rPr lang="en-US" altLang="ko-KR" sz="1400" dirty="0">
                 <a:latin typeface="D2Coding" panose="020B0609020101020101" pitchFamily="49" charset="-127"/>
                 <a:ea typeface="D2Coding" panose="020B0609020101020101" pitchFamily="49" charset="-127"/>
               </a:rPr>
               <a:t>/</a:t>
             </a:r>
             <a:r>
-              <a:rPr lang="ko-KR" altLang="en-US" sz="1600" dirty="0">
+              <a:rPr lang="ko-KR" altLang="en-US" sz="1400" dirty="0">
                 <a:latin typeface="D2Coding" panose="020B0609020101020101" pitchFamily="49" charset="-127"/>
                 <a:ea typeface="D2Coding" panose="020B0609020101020101" pitchFamily="49" charset="-127"/>
               </a:rPr>
               <a:t>문장</a:t>
             </a:r>
             <a:r>
-              <a:rPr lang="en-US" altLang="ko-KR" sz="1600" dirty="0">
+              <a:rPr lang="en-US" altLang="ko-KR" sz="1400" dirty="0">
                 <a:latin typeface="D2Coding" panose="020B0609020101020101" pitchFamily="49" charset="-127"/>
                 <a:ea typeface="D2Coding" panose="020B0609020101020101" pitchFamily="49" charset="-127"/>
               </a:rPr>
               <a:t>)</a:t>
             </a:r>
             <a:r>
-              <a:rPr lang="ko-KR" altLang="en-US" sz="1600" dirty="0">
+              <a:rPr lang="ko-KR" altLang="en-US" sz="1400" dirty="0">
                 <a:latin typeface="D2Coding" panose="020B0609020101020101" pitchFamily="49" charset="-127"/>
                 <a:ea typeface="D2Coding" panose="020B0609020101020101" pitchFamily="49" charset="-127"/>
               </a:rPr>
               <a:t>를 하나의 길고 연속된 숫자 배열</a:t>
             </a:r>
             <a:r>
-              <a:rPr lang="en-US" altLang="ko-KR" sz="1600" dirty="0">
+              <a:rPr lang="en-US" altLang="ko-KR" sz="1400" dirty="0">
                 <a:latin typeface="D2Coding" panose="020B0609020101020101" pitchFamily="49" charset="-127"/>
                 <a:ea typeface="D2Coding" panose="020B0609020101020101" pitchFamily="49" charset="-127"/>
               </a:rPr>
               <a:t>(</a:t>
             </a:r>
             <a:r>
-              <a:rPr lang="ko-KR" altLang="en-US" sz="1600" dirty="0">
+              <a:rPr lang="ko-KR" altLang="en-US" sz="1400" dirty="0">
                 <a:latin typeface="D2Coding" panose="020B0609020101020101" pitchFamily="49" charset="-127"/>
                 <a:ea typeface="D2Coding" panose="020B0609020101020101" pitchFamily="49" charset="-127"/>
               </a:rPr>
               <a:t>벡터</a:t>
             </a:r>
             <a:r>
-              <a:rPr lang="en-US" altLang="ko-KR" sz="1600" dirty="0">
+              <a:rPr lang="en-US" altLang="ko-KR" sz="1400" dirty="0">
                 <a:latin typeface="D2Coding" panose="020B0609020101020101" pitchFamily="49" charset="-127"/>
                 <a:ea typeface="D2Coding" panose="020B0609020101020101" pitchFamily="49" charset="-127"/>
               </a:rPr>
               <a:t>)</a:t>
             </a:r>
             <a:r>
-              <a:rPr lang="ko-KR" altLang="en-US" sz="1600" dirty="0">
+              <a:rPr lang="ko-KR" altLang="en-US" sz="1400" dirty="0">
                 <a:latin typeface="D2Coding" panose="020B0609020101020101" pitchFamily="49" charset="-127"/>
                 <a:ea typeface="D2Coding" panose="020B0609020101020101" pitchFamily="49" charset="-127"/>
               </a:rPr>
               <a:t>로 변환하는 기술로 손실 압축</a:t>
             </a:r>
             <a:r>
-              <a:rPr lang="en-US" altLang="ko-KR" sz="1600" dirty="0">
+              <a:rPr lang="en-US" altLang="ko-KR" sz="1400" dirty="0">
                 <a:latin typeface="D2Coding" panose="020B0609020101020101" pitchFamily="49" charset="-127"/>
                 <a:ea typeface="D2Coding" panose="020B0609020101020101" pitchFamily="49" charset="-127"/>
               </a:rPr>
               <a:t>(Lossy Representation)</a:t>
             </a:r>
             <a:r>
-              <a:rPr lang="ko-KR" altLang="en-US" sz="1600" dirty="0">
+              <a:rPr lang="ko-KR" altLang="en-US" sz="1400" dirty="0">
                 <a:latin typeface="D2Coding" panose="020B0609020101020101" pitchFamily="49" charset="-127"/>
                 <a:ea typeface="D2Coding" panose="020B0609020101020101" pitchFamily="49" charset="-127"/>
               </a:rPr>
               <a:t>이 되어 숫자로 바꾸는 과정에서 정보가 일부 유실되므로</a:t>
             </a:r>
             <a:r>
-              <a:rPr lang="en-US" altLang="ko-KR" sz="1600" dirty="0">
+              <a:rPr lang="en-US" altLang="ko-KR" sz="1400" dirty="0">
                 <a:latin typeface="D2Coding" panose="020B0609020101020101" pitchFamily="49" charset="-127"/>
                 <a:ea typeface="D2Coding" panose="020B0609020101020101" pitchFamily="49" charset="-127"/>
               </a:rPr>
               <a:t>, </a:t>
             </a:r>
             <a:r>
-              <a:rPr lang="ko-KR" altLang="en-US" sz="1600" dirty="0">
+              <a:rPr lang="ko-KR" altLang="en-US" sz="1400" dirty="0">
                 <a:latin typeface="D2Coding" panose="020B0609020101020101" pitchFamily="49" charset="-127"/>
                 <a:ea typeface="D2Coding" panose="020B0609020101020101" pitchFamily="49" charset="-127"/>
               </a:rPr>
@@ -5679,8 +9104,8 @@
         </p:nvSpPr>
         <p:spPr>
           <a:xfrm>
-            <a:off x="1009045" y="5604200"/>
-            <a:ext cx="2731813" cy="374911"/>
+            <a:off x="1023376" y="5672691"/>
+            <a:ext cx="4605899" cy="663002"/>
           </a:xfrm>
           <a:prstGeom prst="rect">
             <a:avLst/>
@@ -5693,11 +9118,12 @@
           </a:bodyPr>
           <a:lstStyle/>
           <a:p>
-            <a:pPr>
+            <a:pPr marL="285750" indent="-285750">
               <a:lnSpc>
                 <a:spcPts val="2250"/>
               </a:lnSpc>
-              <a:buNone/>
+              <a:buFont typeface="Wingdings" panose="05000000000000000000" pitchFamily="2" charset="2"/>
+              <a:buChar char="§"/>
             </a:pPr>
             <a:r>
               <a:rPr lang="en-US" altLang="ko-KR" sz="1600" i="0" dirty="0">
@@ -5711,41 +9137,13 @@
               <a:t>Bag-of-N grams algorithm</a:t>
             </a:r>
           </a:p>
-        </p:txBody>
-      </p:sp>
-      <p:sp>
-        <p:nvSpPr>
-          <p:cNvPr id="22" name="TextBox 21">
-            <a:extLst>
-              <a:ext uri="{FF2B5EF4-FFF2-40B4-BE49-F238E27FC236}">
-                <a16:creationId xmlns:a16="http://schemas.microsoft.com/office/drawing/2014/main" id="{DCC71A25-AE38-C8F1-9025-2F2B1F659709}"/>
-              </a:ext>
-            </a:extLst>
-          </p:cNvPr>
-          <p:cNvSpPr txBox="1"/>
-          <p:nvPr/>
-        </p:nvSpPr>
-        <p:spPr>
-          <a:xfrm>
-            <a:off x="1009045" y="5969325"/>
-            <a:ext cx="2731813" cy="374911"/>
-          </a:xfrm>
-          <a:prstGeom prst="rect">
-            <a:avLst/>
-          </a:prstGeom>
-          <a:noFill/>
-        </p:spPr>
-        <p:txBody>
-          <a:bodyPr wrap="square">
-            <a:spAutoFit/>
-          </a:bodyPr>
-          <a:lstStyle/>
-          <a:p>
-            <a:pPr>
+          <a:p>
+            <a:pPr marL="285750" indent="-285750">
               <a:lnSpc>
                 <a:spcPts val="2250"/>
               </a:lnSpc>
-              <a:buNone/>
+              <a:buFont typeface="Wingdings" panose="05000000000000000000" pitchFamily="2" charset="2"/>
+              <a:buChar char="§"/>
             </a:pPr>
             <a:r>
               <a:rPr lang="en-US" altLang="ko-KR" sz="1600" dirty="0">
@@ -5755,18 +9153,7 @@
                 <a:latin typeface="D2Coding" panose="020B0609020101020101" pitchFamily="49" charset="-127"/>
                 <a:ea typeface="D2Coding" panose="020B0609020101020101" pitchFamily="49" charset="-127"/>
               </a:rPr>
-              <a:t>TF-IDF</a:t>
-            </a:r>
-            <a:r>
-              <a:rPr lang="en-US" altLang="ko-KR" sz="1600" i="0" dirty="0">
-                <a:solidFill>
-                  <a:srgbClr val="242424"/>
-                </a:solidFill>
-                <a:effectLst/>
-                <a:latin typeface="D2Coding" panose="020B0609020101020101" pitchFamily="49" charset="-127"/>
-                <a:ea typeface="D2Coding" panose="020B0609020101020101" pitchFamily="49" charset="-127"/>
-              </a:rPr>
-              <a:t> algorithm</a:t>
+              <a:t>TF-IDF algorithm</a:t>
             </a:r>
           </a:p>
         </p:txBody>
@@ -6189,14 +9576,7 @@
                 <a:latin typeface="D2Coding" panose="020B0609020101020101" pitchFamily="49" charset="-127"/>
                 <a:ea typeface="D2Coding" panose="020B0609020101020101" pitchFamily="49" charset="-127"/>
               </a:rPr>
-              <a:t>때문에 단어의 </a:t>
-            </a:r>
-            <a:r>
-              <a:rPr lang="ko-KR" altLang="en-US" sz="1600" dirty="0" err="1">
-                <a:latin typeface="D2Coding" panose="020B0609020101020101" pitchFamily="49" charset="-127"/>
-                <a:ea typeface="D2Coding" panose="020B0609020101020101" pitchFamily="49" charset="-127"/>
-              </a:rPr>
-              <a:t>의미을</a:t>
+              <a:t>때문에 단어의 의미를</a:t>
             </a:r>
             <a:r>
               <a:rPr lang="en-US" altLang="ko-KR" sz="1600" dirty="0">
@@ -7589,7 +10969,7 @@
         <p:cNvPr id="1" name="">
           <a:extLst>
             <a:ext uri="{FF2B5EF4-FFF2-40B4-BE49-F238E27FC236}">
-              <a16:creationId xmlns:a16="http://schemas.microsoft.com/office/drawing/2014/main" id="{F3D51295-47CC-7FDC-BF9B-2262C9DCFCE3}"/>
+              <a16:creationId xmlns:a16="http://schemas.microsoft.com/office/drawing/2014/main" id="{4FD9C13E-F294-2A6E-3342-FFC723E0EAEA}"/>
             </a:ext>
           </a:extLst>
         </p:cNvPr>
@@ -7609,7 +10989,7 @@
           <p:cNvPr id="4" name="슬라이드 번호 개체 틀 3">
             <a:extLst>
               <a:ext uri="{FF2B5EF4-FFF2-40B4-BE49-F238E27FC236}">
-                <a16:creationId xmlns:a16="http://schemas.microsoft.com/office/drawing/2014/main" id="{6E5B0EE9-A47D-0478-066B-BC245DBACAFA}"/>
+                <a16:creationId xmlns:a16="http://schemas.microsoft.com/office/drawing/2014/main" id="{9C6849D0-C491-D099-4000-839C3D78D53A}"/>
               </a:ext>
             </a:extLst>
           </p:cNvPr>
@@ -7644,7 +11024,7 @@
           <p:cNvPr id="3" name="제목 1">
             <a:extLst>
               <a:ext uri="{FF2B5EF4-FFF2-40B4-BE49-F238E27FC236}">
-                <a16:creationId xmlns:a16="http://schemas.microsoft.com/office/drawing/2014/main" id="{6961916C-61AB-5184-1360-3ED0005E8D5D}"/>
+                <a16:creationId xmlns:a16="http://schemas.microsoft.com/office/drawing/2014/main" id="{D5BA32C1-1767-EA50-91DB-819B96D78493}"/>
               </a:ext>
             </a:extLst>
           </p:cNvPr>
@@ -7719,7 +11099,7 @@
           <p:cNvPr id="2" name="TextBox 1">
             <a:extLst>
               <a:ext uri="{FF2B5EF4-FFF2-40B4-BE49-F238E27FC236}">
-                <a16:creationId xmlns:a16="http://schemas.microsoft.com/office/drawing/2014/main" id="{D0E26A79-7B54-C862-F7BE-BF4BBB839E5F}"/>
+                <a16:creationId xmlns:a16="http://schemas.microsoft.com/office/drawing/2014/main" id="{61BDF977-EBB2-5BE7-BA5F-D0695C11FC0F}"/>
               </a:ext>
             </a:extLst>
           </p:cNvPr>
@@ -7762,7 +11142,7 @@
           <p:cNvPr id="7" name="TextBox 6">
             <a:extLst>
               <a:ext uri="{FF2B5EF4-FFF2-40B4-BE49-F238E27FC236}">
-                <a16:creationId xmlns:a16="http://schemas.microsoft.com/office/drawing/2014/main" id="{4672E4FF-9515-FBBD-7381-B27D329AF737}"/>
+                <a16:creationId xmlns:a16="http://schemas.microsoft.com/office/drawing/2014/main" id="{EFB1B62A-A13C-786F-E0F6-33F6742DFD56}"/>
               </a:ext>
             </a:extLst>
           </p:cNvPr>
@@ -7772,7 +11152,7 @@
         <p:spPr>
           <a:xfrm>
             <a:off x="537022" y="1248422"/>
-            <a:ext cx="11179333" cy="423834"/>
+            <a:ext cx="11179333" cy="465320"/>
           </a:xfrm>
           <a:prstGeom prst="rect">
             <a:avLst/>
@@ -7791,35 +11171,35 @@
               </a:lnSpc>
             </a:pPr>
             <a:r>
-              <a:rPr lang="ko-KR" altLang="en-US" sz="1600" dirty="0">
+              <a:rPr lang="ko-KR" altLang="en-US" dirty="0">
                 <a:latin typeface="D2Coding" panose="020B0609020101020101" pitchFamily="49" charset="-127"/>
                 <a:ea typeface="D2Coding" panose="020B0609020101020101" pitchFamily="49" charset="-127"/>
               </a:rPr>
               <a:t>차원은 특정 </a:t>
             </a:r>
             <a:r>
-              <a:rPr lang="en-US" altLang="ko-KR" sz="1600" dirty="0">
+              <a:rPr lang="en-US" altLang="ko-KR" dirty="0">
                 <a:latin typeface="D2Coding" panose="020B0609020101020101" pitchFamily="49" charset="-127"/>
                 <a:ea typeface="D2Coding" panose="020B0609020101020101" pitchFamily="49" charset="-127"/>
               </a:rPr>
               <a:t>Feature, </a:t>
             </a:r>
             <a:r>
-              <a:rPr lang="ko-KR" altLang="en-US" sz="1600" dirty="0">
+              <a:rPr lang="ko-KR" altLang="en-US" dirty="0">
                 <a:latin typeface="D2Coding" panose="020B0609020101020101" pitchFamily="49" charset="-127"/>
                 <a:ea typeface="D2Coding" panose="020B0609020101020101" pitchFamily="49" charset="-127"/>
               </a:rPr>
               <a:t>즉 의미</a:t>
             </a:r>
             <a:r>
-              <a:rPr lang="en-US" altLang="ko-KR" sz="1600" dirty="0">
+              <a:rPr lang="en-US" altLang="ko-KR" dirty="0">
                 <a:latin typeface="D2Coding" panose="020B0609020101020101" pitchFamily="49" charset="-127"/>
                 <a:ea typeface="D2Coding" panose="020B0609020101020101" pitchFamily="49" charset="-127"/>
               </a:rPr>
               <a:t>(semantic dimension)</a:t>
             </a:r>
             <a:r>
-              <a:rPr lang="ko-KR" altLang="en-US" sz="1600" dirty="0">
+              <a:rPr lang="ko-KR" altLang="en-US" dirty="0">
                 <a:latin typeface="D2Coding" panose="020B0609020101020101" pitchFamily="49" charset="-127"/>
                 <a:ea typeface="D2Coding" panose="020B0609020101020101" pitchFamily="49" charset="-127"/>
               </a:rPr>
@@ -7830,57 +11210,40 @@
       </p:sp>
       <p:pic>
         <p:nvPicPr>
-          <p:cNvPr id="5" name="Picture 2">
+          <p:cNvPr id="12" name="그림 11">
             <a:extLst>
               <a:ext uri="{FF2B5EF4-FFF2-40B4-BE49-F238E27FC236}">
-                <a16:creationId xmlns:a16="http://schemas.microsoft.com/office/drawing/2014/main" id="{DDB58B20-EA3F-9E46-5A4C-690B81174E0E}"/>
+                <a16:creationId xmlns:a16="http://schemas.microsoft.com/office/drawing/2014/main" id="{9376B82E-8B6E-FCEE-91B1-12493B6A06B2}"/>
               </a:ext>
             </a:extLst>
           </p:cNvPr>
           <p:cNvPicPr>
-            <a:picLocks noChangeAspect="1" noChangeArrowheads="1"/>
+            <a:picLocks noChangeAspect="1"/>
           </p:cNvPicPr>
           <p:nvPr/>
         </p:nvPicPr>
         <p:blipFill>
-          <a:blip r:embed="rId2">
-            <a:extLst>
-              <a:ext uri="{28A0092B-C50C-407E-A947-70E740481C1C}">
-                <a14:useLocalDpi xmlns:a14="http://schemas.microsoft.com/office/drawing/2010/main" val="0"/>
-              </a:ext>
-            </a:extLst>
-          </a:blip>
-          <a:srcRect/>
+          <a:blip r:embed="rId2"/>
           <a:stretch>
             <a:fillRect/>
           </a:stretch>
         </p:blipFill>
-        <p:spPr bwMode="auto">
-          <a:xfrm>
-            <a:off x="4185590" y="2037347"/>
-            <a:ext cx="7434910" cy="1393077"/>
+        <p:spPr>
+          <a:xfrm>
+            <a:off x="1563874" y="3019425"/>
+            <a:ext cx="2861914" cy="2501471"/>
           </a:xfrm>
           <a:prstGeom prst="rect">
             <a:avLst/>
           </a:prstGeom>
-          <a:noFill/>
-          <a:extLst>
-            <a:ext uri="{909E8E84-426E-40DD-AFC4-6F175D3DCCD1}">
-              <a14:hiddenFill xmlns:a14="http://schemas.microsoft.com/office/drawing/2010/main">
-                <a:solidFill>
-                  <a:srgbClr val="FFFFFF"/>
-                </a:solidFill>
-              </a14:hiddenFill>
-            </a:ext>
-          </a:extLst>
         </p:spPr>
       </p:pic>
       <p:sp>
         <p:nvSpPr>
-          <p:cNvPr id="6" name="TextBox 5">
+          <p:cNvPr id="15" name="TextBox 14">
             <a:extLst>
               <a:ext uri="{FF2B5EF4-FFF2-40B4-BE49-F238E27FC236}">
-                <a16:creationId xmlns:a16="http://schemas.microsoft.com/office/drawing/2014/main" id="{64DEAE80-AE71-B78C-9740-C65477983F90}"/>
+                <a16:creationId xmlns:a16="http://schemas.microsoft.com/office/drawing/2014/main" id="{616F8386-CECD-6CE6-2553-C04C3A31695E}"/>
               </a:ext>
             </a:extLst>
           </p:cNvPr>
@@ -7889,8 +11252,8 @@
         </p:nvSpPr>
         <p:spPr>
           <a:xfrm>
-            <a:off x="1032296" y="2120582"/>
-            <a:ext cx="2901529" cy="338554"/>
+            <a:off x="1055501" y="5752268"/>
+            <a:ext cx="3773674" cy="338554"/>
           </a:xfrm>
           <a:prstGeom prst="rect">
             <a:avLst/>
@@ -7905,129 +11268,54 @@
           <a:p>
             <a:r>
               <a:rPr lang="en-US" altLang="ko-KR" sz="1600" dirty="0">
-                <a:solidFill>
-                  <a:srgbClr val="00B0F0"/>
-                </a:solidFill>
-                <a:latin typeface="D2Coding" panose="020B0609020101020101" pitchFamily="49" charset="-127"/>
-                <a:ea typeface="D2Coding" panose="020B0609020101020101" pitchFamily="49" charset="-127"/>
-                <a:sym typeface="Wingdings" panose="05000000000000000000" pitchFamily="2" charset="2"/>
-                <a:hlinkClick r:id="rId3">
-                  <a:extLst>
-                    <a:ext uri="{A12FA001-AC4F-418D-AE19-62706E023703}">
-                      <ahyp:hlinkClr xmlns:ahyp="http://schemas.microsoft.com/office/drawing/2018/hyperlinkcolor" val="tx"/>
-                    </a:ext>
-                  </a:extLst>
-                </a:hlinkClick>
-              </a:rPr>
-              <a:t>Semantic</a:t>
-            </a:r>
-            <a:r>
-              <a:rPr lang="ko-KR" altLang="en-US" sz="1600" dirty="0">
-                <a:solidFill>
-                  <a:srgbClr val="00B0F0"/>
-                </a:solidFill>
-                <a:latin typeface="D2Coding" panose="020B0609020101020101" pitchFamily="49" charset="-127"/>
-                <a:ea typeface="D2Coding" panose="020B0609020101020101" pitchFamily="49" charset="-127"/>
-                <a:sym typeface="Wingdings" panose="05000000000000000000" pitchFamily="2" charset="2"/>
-                <a:hlinkClick r:id="rId3">
-                  <a:extLst>
-                    <a:ext uri="{A12FA001-AC4F-418D-AE19-62706E023703}">
-                      <ahyp:hlinkClr xmlns:ahyp="http://schemas.microsoft.com/office/drawing/2018/hyperlinkcolor" val="tx"/>
-                    </a:ext>
-                  </a:extLst>
-                </a:hlinkClick>
-              </a:rPr>
-              <a:t> </a:t>
-            </a:r>
-            <a:r>
-              <a:rPr lang="en-US" altLang="ko-KR" sz="1600" dirty="0">
-                <a:solidFill>
-                  <a:srgbClr val="00B0F0"/>
-                </a:solidFill>
-                <a:latin typeface="D2Coding" panose="020B0609020101020101" pitchFamily="49" charset="-127"/>
-                <a:ea typeface="D2Coding" panose="020B0609020101020101" pitchFamily="49" charset="-127"/>
-                <a:sym typeface="Wingdings" panose="05000000000000000000" pitchFamily="2" charset="2"/>
-                <a:hlinkClick r:id="rId3">
-                  <a:extLst>
-                    <a:ext uri="{A12FA001-AC4F-418D-AE19-62706E023703}">
-                      <ahyp:hlinkClr xmlns:ahyp="http://schemas.microsoft.com/office/drawing/2018/hyperlinkcolor" val="tx"/>
-                    </a:ext>
-                  </a:extLst>
-                </a:hlinkClick>
-              </a:rPr>
-              <a:t>Based Embedding</a:t>
-            </a:r>
-            <a:endParaRPr lang="en-US" altLang="ko-KR" sz="1600" dirty="0">
-              <a:solidFill>
-                <a:srgbClr val="00B0F0"/>
-              </a:solidFill>
+                <a:latin typeface="D2Coding" panose="020B0609020101020101" pitchFamily="49" charset="-127"/>
+                <a:ea typeface="D2Coding" panose="020B0609020101020101" pitchFamily="49" charset="-127"/>
+              </a:rPr>
+              <a:t>Semantic representations of words</a:t>
+            </a:r>
+            <a:endParaRPr lang="ko-KR" altLang="en-US" sz="1600" dirty="0">
               <a:latin typeface="D2Coding" panose="020B0609020101020101" pitchFamily="49" charset="-127"/>
               <a:ea typeface="D2Coding" panose="020B0609020101020101" pitchFamily="49" charset="-127"/>
-              <a:sym typeface="Wingdings" panose="05000000000000000000" pitchFamily="2" charset="2"/>
-              <a:hlinkClick r:id="rId4">
-                <a:extLst>
-                  <a:ext uri="{A12FA001-AC4F-418D-AE19-62706E023703}">
-                    <ahyp:hlinkClr xmlns:ahyp="http://schemas.microsoft.com/office/drawing/2018/hyperlinkcolor" val="tx"/>
-                  </a:ext>
-                </a:extLst>
-              </a:hlinkClick>
             </a:endParaRPr>
           </a:p>
         </p:txBody>
       </p:sp>
       <p:pic>
         <p:nvPicPr>
-          <p:cNvPr id="7170" name="Picture 2">
+          <p:cNvPr id="17" name="그림 16">
             <a:extLst>
               <a:ext uri="{FF2B5EF4-FFF2-40B4-BE49-F238E27FC236}">
-                <a16:creationId xmlns:a16="http://schemas.microsoft.com/office/drawing/2014/main" id="{89325022-F44F-28CE-80B9-BB4EE199D3BB}"/>
+                <a16:creationId xmlns:a16="http://schemas.microsoft.com/office/drawing/2014/main" id="{39CBBFAE-103D-A7ED-C8F6-CB6DA5E07AD1}"/>
               </a:ext>
             </a:extLst>
           </p:cNvPr>
           <p:cNvPicPr>
-            <a:picLocks noChangeAspect="1" noChangeArrowheads="1"/>
+            <a:picLocks noChangeAspect="1"/>
           </p:cNvPicPr>
           <p:nvPr/>
         </p:nvPicPr>
         <p:blipFill>
-          <a:blip r:embed="rId5">
-            <a:extLst>
-              <a:ext uri="{28A0092B-C50C-407E-A947-70E740481C1C}">
-                <a14:useLocalDpi xmlns:a14="http://schemas.microsoft.com/office/drawing/2010/main" val="0"/>
-              </a:ext>
-            </a:extLst>
-          </a:blip>
-          <a:srcRect/>
+          <a:blip r:embed="rId3"/>
           <a:stretch>
             <a:fillRect/>
           </a:stretch>
         </p:blipFill>
-        <p:spPr bwMode="auto">
-          <a:xfrm>
-            <a:off x="2956346" y="3952320"/>
-            <a:ext cx="7706942" cy="2250869"/>
+        <p:spPr>
+          <a:xfrm>
+            <a:off x="6096000" y="2586942"/>
+            <a:ext cx="3863675" cy="2933954"/>
           </a:xfrm>
           <a:prstGeom prst="rect">
             <a:avLst/>
           </a:prstGeom>
-          <a:noFill/>
-          <a:extLst>
-            <a:ext uri="{909E8E84-426E-40DD-AFC4-6F175D3DCCD1}">
-              <a14:hiddenFill xmlns:a14="http://schemas.microsoft.com/office/drawing/2010/main">
-                <a:solidFill>
-                  <a:srgbClr val="FFFFFF"/>
-                </a:solidFill>
-              </a14:hiddenFill>
-            </a:ext>
-          </a:extLst>
         </p:spPr>
       </p:pic>
       <p:sp>
         <p:nvSpPr>
-          <p:cNvPr id="8" name="TextBox 7">
+          <p:cNvPr id="19" name="TextBox 18">
             <a:extLst>
               <a:ext uri="{FF2B5EF4-FFF2-40B4-BE49-F238E27FC236}">
-                <a16:creationId xmlns:a16="http://schemas.microsoft.com/office/drawing/2014/main" id="{E82D5D71-8A2C-B6C7-94E2-6246C77FA68F}"/>
+                <a16:creationId xmlns:a16="http://schemas.microsoft.com/office/drawing/2014/main" id="{4D6CFBC2-1A23-1286-6F47-4ECEBBDC0980}"/>
               </a:ext>
             </a:extLst>
           </p:cNvPr>
@@ -8036,8 +11324,8 @@
         </p:nvSpPr>
         <p:spPr>
           <a:xfrm>
-            <a:off x="1032296" y="3952320"/>
-            <a:ext cx="2987254" cy="338554"/>
+            <a:off x="5524500" y="5689298"/>
+            <a:ext cx="6096000" cy="338554"/>
           </a:xfrm>
           <a:prstGeom prst="rect">
             <a:avLst/>
@@ -8054,32 +11342,22 @@
               <a:rPr lang="en-US" altLang="ko-KR" sz="1600" dirty="0">
                 <a:latin typeface="D2Coding" panose="020B0609020101020101" pitchFamily="49" charset="-127"/>
                 <a:ea typeface="D2Coding" panose="020B0609020101020101" pitchFamily="49" charset="-127"/>
-                <a:sym typeface="Wingdings" panose="05000000000000000000" pitchFamily="2" charset="2"/>
-              </a:rPr>
-              <a:t>Deep Learning </a:t>
-            </a:r>
-            <a:r>
-              <a:rPr lang="ko-KR" altLang="en-US" sz="1600" dirty="0">
-                <a:latin typeface="D2Coding" panose="020B0609020101020101" pitchFamily="49" charset="-127"/>
-                <a:ea typeface="D2Coding" panose="020B0609020101020101" pitchFamily="49" charset="-127"/>
-                <a:sym typeface="Wingdings" panose="05000000000000000000" pitchFamily="2" charset="2"/>
-              </a:rPr>
-              <a:t>방식</a:t>
-            </a:r>
-            <a:endParaRPr lang="en-US" altLang="ko-KR" sz="1600" dirty="0">
+              </a:rPr>
+              <a:t>Plot of word vectors in a multidimensional space</a:t>
+            </a:r>
+            <a:endParaRPr lang="ko-KR" altLang="en-US" sz="1600" dirty="0">
               <a:latin typeface="D2Coding" panose="020B0609020101020101" pitchFamily="49" charset="-127"/>
               <a:ea typeface="D2Coding" panose="020B0609020101020101" pitchFamily="49" charset="-127"/>
-              <a:sym typeface="Wingdings" panose="05000000000000000000" pitchFamily="2" charset="2"/>
             </a:endParaRPr>
           </a:p>
         </p:txBody>
       </p:sp>
       <p:sp>
         <p:nvSpPr>
-          <p:cNvPr id="13" name="TextBox 12">
+          <p:cNvPr id="21" name="TextBox 20">
             <a:extLst>
               <a:ext uri="{FF2B5EF4-FFF2-40B4-BE49-F238E27FC236}">
-                <a16:creationId xmlns:a16="http://schemas.microsoft.com/office/drawing/2014/main" id="{AB389590-FF1D-9EAF-473E-0BAF0CF7372B}"/>
+                <a16:creationId xmlns:a16="http://schemas.microsoft.com/office/drawing/2014/main" id="{4B11CD4E-8905-C1D0-6D25-BE3CE6C372C7}"/>
               </a:ext>
             </a:extLst>
           </p:cNvPr>
@@ -8088,8 +11366,8 @@
         </p:nvSpPr>
         <p:spPr>
           <a:xfrm>
-            <a:off x="10663288" y="5205264"/>
-            <a:ext cx="1053067" cy="830997"/>
+            <a:off x="6953250" y="2217610"/>
+            <a:ext cx="2295525" cy="369332"/>
           </a:xfrm>
           <a:prstGeom prst="rect">
             <a:avLst/>
@@ -8103,61 +11381,23 @@
           <a:lstStyle/>
           <a:p>
             <a:r>
-              <a:rPr lang="ko-KR" altLang="en-US" sz="1200" dirty="0">
-                <a:latin typeface="D2Coding" panose="020B0609020101020101" pitchFamily="49" charset="-127"/>
-                <a:ea typeface="D2Coding" panose="020B0609020101020101" pitchFamily="49" charset="-127"/>
-              </a:rPr>
-              <a:t>(</a:t>
-            </a:r>
-            <a:r>
-              <a:rPr lang="ko-KR" altLang="en-US" sz="1200" dirty="0" err="1">
-                <a:latin typeface="D2Coding" panose="020B0609020101020101" pitchFamily="49" charset="-127"/>
-                <a:ea typeface="D2Coding" panose="020B0609020101020101" pitchFamily="49" charset="-127"/>
-              </a:rPr>
-              <a:t>batch</a:t>
-            </a:r>
-            <a:r>
-              <a:rPr lang="ko-KR" altLang="en-US" sz="1200" dirty="0">
-                <a:latin typeface="D2Coding" panose="020B0609020101020101" pitchFamily="49" charset="-127"/>
-                <a:ea typeface="D2Coding" panose="020B0609020101020101" pitchFamily="49" charset="-127"/>
-              </a:rPr>
-              <a:t>, </a:t>
-            </a:r>
-            <a:r>
-              <a:rPr lang="ko-KR" altLang="en-US" sz="1200" dirty="0" err="1">
-                <a:latin typeface="D2Coding" panose="020B0609020101020101" pitchFamily="49" charset="-127"/>
-                <a:ea typeface="D2Coding" panose="020B0609020101020101" pitchFamily="49" charset="-127"/>
-              </a:rPr>
-              <a:t>embedding</a:t>
-            </a:r>
-            <a:r>
-              <a:rPr lang="ko-KR" altLang="en-US" sz="1200" dirty="0">
-                <a:latin typeface="D2Coding" panose="020B0609020101020101" pitchFamily="49" charset="-127"/>
-                <a:ea typeface="D2Coding" panose="020B0609020101020101" pitchFamily="49" charset="-127"/>
-              </a:rPr>
-              <a:t> </a:t>
-            </a:r>
-            <a:r>
-              <a:rPr lang="ko-KR" altLang="en-US" sz="1200" dirty="0" err="1">
-                <a:latin typeface="D2Coding" panose="020B0609020101020101" pitchFamily="49" charset="-127"/>
-                <a:ea typeface="D2Coding" panose="020B0609020101020101" pitchFamily="49" charset="-127"/>
-              </a:rPr>
-              <a:t>size</a:t>
-            </a:r>
-            <a:r>
-              <a:rPr lang="ko-KR" altLang="en-US" sz="1200" dirty="0">
-                <a:latin typeface="D2Coding" panose="020B0609020101020101" pitchFamily="49" charset="-127"/>
-                <a:ea typeface="D2Coding" panose="020B0609020101020101" pitchFamily="49" charset="-127"/>
-              </a:rPr>
-              <a:t> 표기 오류)</a:t>
-            </a:r>
+              <a:rPr lang="en-US" altLang="ko-KR" dirty="0">
+                <a:latin typeface="D2Coding" panose="020B0609020101020101" pitchFamily="49" charset="-127"/>
+                <a:ea typeface="D2Coding" panose="020B0609020101020101" pitchFamily="49" charset="-127"/>
+              </a:rPr>
+              <a:t>Cosine similarity</a:t>
+            </a:r>
+            <a:endParaRPr lang="ko-KR" altLang="en-US" dirty="0">
+              <a:latin typeface="D2Coding" panose="020B0609020101020101" pitchFamily="49" charset="-127"/>
+              <a:ea typeface="D2Coding" panose="020B0609020101020101" pitchFamily="49" charset="-127"/>
+            </a:endParaRPr>
           </a:p>
         </p:txBody>
       </p:sp>
     </p:spTree>
     <p:extLst>
       <p:ext uri="{BB962C8B-B14F-4D97-AF65-F5344CB8AC3E}">
-        <p14:creationId xmlns:p14="http://schemas.microsoft.com/office/powerpoint/2010/main" val="2322676009"/>
+        <p14:creationId xmlns:p14="http://schemas.microsoft.com/office/powerpoint/2010/main" val="779192848"/>
       </p:ext>
     </p:extLst>
   </p:cSld>

--- a/CHAPTER 2 RAG Part I_Indexing Your Data.pptx
+++ b/CHAPTER 2 RAG Part I_Indexing Your Data.pptx
@@ -5,10 +5,10 @@
     <p:sldMasterId id="2147483660" r:id="rId1"/>
   </p:sldMasterIdLst>
   <p:notesMasterIdLst>
-    <p:notesMasterId r:id="rId16"/>
+    <p:notesMasterId r:id="rId21"/>
   </p:notesMasterIdLst>
   <p:handoutMasterIdLst>
-    <p:handoutMasterId r:id="rId17"/>
+    <p:handoutMasterId r:id="rId22"/>
   </p:handoutMasterIdLst>
   <p:sldIdLst>
     <p:sldId id="256" r:id="rId2"/>
@@ -25,6 +25,11 @@
     <p:sldId id="1147" r:id="rId13"/>
     <p:sldId id="1148" r:id="rId14"/>
     <p:sldId id="1149" r:id="rId15"/>
+    <p:sldId id="1154" r:id="rId16"/>
+    <p:sldId id="1153" r:id="rId17"/>
+    <p:sldId id="1150" r:id="rId18"/>
+    <p:sldId id="1151" r:id="rId19"/>
+    <p:sldId id="1152" r:id="rId20"/>
   </p:sldIdLst>
   <p:sldSz cx="12192000" cy="6858000"/>
   <p:notesSz cx="6858000" cy="9144000"/>
@@ -146,6 +151,11 @@
             <p14:sldId id="1147"/>
             <p14:sldId id="1148"/>
             <p14:sldId id="1149"/>
+            <p14:sldId id="1154"/>
+            <p14:sldId id="1153"/>
+            <p14:sldId id="1150"/>
+            <p14:sldId id="1151"/>
+            <p14:sldId id="1152"/>
           </p14:sldIdLst>
         </p14:section>
         <p14:section name="자세한 정보" id="{2CC34DB2-6590-42C0-AD4B-A04C6060184E}">
@@ -6403,12 +6413,42 @@
           </a:p>
         </p:txBody>
       </p:sp>
+      <p:pic>
+        <p:nvPicPr>
+          <p:cNvPr id="6" name="그림 5">
+            <a:extLst>
+              <a:ext uri="{FF2B5EF4-FFF2-40B4-BE49-F238E27FC236}">
+                <a16:creationId xmlns:a16="http://schemas.microsoft.com/office/drawing/2014/main" id="{650336E8-FDAF-78D3-69F7-76E8EDDEDF72}"/>
+              </a:ext>
+            </a:extLst>
+          </p:cNvPr>
+          <p:cNvPicPr>
+            <a:picLocks noChangeAspect="1"/>
+          </p:cNvPicPr>
+          <p:nvPr/>
+        </p:nvPicPr>
+        <p:blipFill>
+          <a:blip r:embed="rId2"/>
+          <a:stretch>
+            <a:fillRect/>
+          </a:stretch>
+        </p:blipFill>
+        <p:spPr>
+          <a:xfrm>
+            <a:off x="619125" y="1989752"/>
+            <a:ext cx="7712108" cy="1371719"/>
+          </a:xfrm>
+          <a:prstGeom prst="rect">
+            <a:avLst/>
+          </a:prstGeom>
+        </p:spPr>
+      </p:pic>
       <p:sp>
         <p:nvSpPr>
-          <p:cNvPr id="9" name="TextBox 8">
+          <p:cNvPr id="8" name="TextBox 7">
             <a:extLst>
               <a:ext uri="{FF2B5EF4-FFF2-40B4-BE49-F238E27FC236}">
-                <a16:creationId xmlns:a16="http://schemas.microsoft.com/office/drawing/2014/main" id="{6C977091-07CB-8CF5-976C-1D5E34563CEA}"/>
+                <a16:creationId xmlns:a16="http://schemas.microsoft.com/office/drawing/2014/main" id="{1FD3B2F3-0C31-2E6C-E69A-1D079B523DCA}"/>
               </a:ext>
             </a:extLst>
           </p:cNvPr>
@@ -6417,14 +6457,178 @@
         </p:nvSpPr>
         <p:spPr>
           <a:xfrm>
-            <a:off x="1781175" y="2113577"/>
-            <a:ext cx="9858375" cy="297517"/>
+            <a:off x="619125" y="3670655"/>
+            <a:ext cx="11029950" cy="793166"/>
+          </a:xfrm>
+          <a:prstGeom prst="rect">
+            <a:avLst/>
+          </a:prstGeom>
+          <a:noFill/>
+        </p:spPr>
+        <p:txBody>
+          <a:bodyPr wrap="square">
+            <a:spAutoFit/>
+          </a:bodyPr>
+          <a:lstStyle/>
+          <a:p>
+            <a:pPr marL="285750" indent="-285750">
+              <a:lnSpc>
+                <a:spcPct val="150000"/>
+              </a:lnSpc>
+              <a:buFont typeface="Wingdings" panose="05000000000000000000" pitchFamily="2" charset="2"/>
+              <a:buChar char="v"/>
+            </a:pPr>
+            <a:r>
+              <a:rPr lang="ko-KR" altLang="en-US" sz="1600" dirty="0" err="1">
+                <a:latin typeface="D2Coding" panose="020B0609020101020101" pitchFamily="49" charset="-127"/>
+                <a:ea typeface="D2Coding" panose="020B0609020101020101" pitchFamily="49" charset="-127"/>
+              </a:rPr>
+              <a:t>백엔드</a:t>
+            </a:r>
+            <a:r>
+              <a:rPr lang="ko-KR" altLang="en-US" sz="1600" dirty="0">
+                <a:latin typeface="D2Coding" panose="020B0609020101020101" pitchFamily="49" charset="-127"/>
+                <a:ea typeface="D2Coding" panose="020B0609020101020101" pitchFamily="49" charset="-127"/>
+              </a:rPr>
+              <a:t> 개발자들에게 </a:t>
+            </a:r>
+            <a:r>
+              <a:rPr lang="en-US" altLang="ko-KR" sz="1600" dirty="0">
+                <a:latin typeface="D2Coding" panose="020B0609020101020101" pitchFamily="49" charset="-127"/>
+                <a:ea typeface="D2Coding" panose="020B0609020101020101" pitchFamily="49" charset="-127"/>
+              </a:rPr>
+              <a:t>Pinecone</a:t>
+            </a:r>
+            <a:r>
+              <a:rPr lang="ko-KR" altLang="en-US" sz="1600" dirty="0">
+                <a:latin typeface="D2Coding" panose="020B0609020101020101" pitchFamily="49" charset="-127"/>
+                <a:ea typeface="D2Coding" panose="020B0609020101020101" pitchFamily="49" charset="-127"/>
+              </a:rPr>
+              <a:t>이나 </a:t>
+            </a:r>
+            <a:r>
+              <a:rPr lang="en-US" altLang="ko-KR" sz="1600" dirty="0">
+                <a:latin typeface="D2Coding" panose="020B0609020101020101" pitchFamily="49" charset="-127"/>
+                <a:ea typeface="D2Coding" panose="020B0609020101020101" pitchFamily="49" charset="-127"/>
+              </a:rPr>
+              <a:t>Milvus </a:t>
+            </a:r>
+            <a:r>
+              <a:rPr lang="ko-KR" altLang="en-US" sz="1600" dirty="0">
+                <a:latin typeface="D2Coding" panose="020B0609020101020101" pitchFamily="49" charset="-127"/>
+                <a:ea typeface="D2Coding" panose="020B0609020101020101" pitchFamily="49" charset="-127"/>
+              </a:rPr>
+              <a:t>같은 최신 전문 벡터 </a:t>
+            </a:r>
+            <a:r>
+              <a:rPr lang="en-US" altLang="ko-KR" sz="1600" dirty="0">
+                <a:latin typeface="D2Coding" panose="020B0609020101020101" pitchFamily="49" charset="-127"/>
+                <a:ea typeface="D2Coding" panose="020B0609020101020101" pitchFamily="49" charset="-127"/>
+              </a:rPr>
+              <a:t>DB</a:t>
+            </a:r>
+            <a:r>
+              <a:rPr lang="ko-KR" altLang="en-US" sz="1600" dirty="0">
+                <a:latin typeface="D2Coding" panose="020B0609020101020101" pitchFamily="49" charset="-127"/>
+                <a:ea typeface="D2Coding" panose="020B0609020101020101" pitchFamily="49" charset="-127"/>
+              </a:rPr>
+              <a:t>를 비싸게 도입할 필요가 없으며</a:t>
+            </a:r>
+            <a:r>
+              <a:rPr lang="en-US" altLang="ko-KR" sz="1600" dirty="0">
+                <a:latin typeface="D2Coding" panose="020B0609020101020101" pitchFamily="49" charset="-127"/>
+                <a:ea typeface="D2Coding" panose="020B0609020101020101" pitchFamily="49" charset="-127"/>
+              </a:rPr>
+              <a:t>,</a:t>
+            </a:r>
+            <a:r>
+              <a:rPr lang="ko-KR" altLang="en-US" sz="1600" dirty="0">
+                <a:latin typeface="D2Coding" panose="020B0609020101020101" pitchFamily="49" charset="-127"/>
+                <a:ea typeface="D2Coding" panose="020B0609020101020101" pitchFamily="49" charset="-127"/>
+              </a:rPr>
+              <a:t> 가장 친숙한 </a:t>
+            </a:r>
+            <a:r>
+              <a:rPr lang="en-US" altLang="ko-KR" sz="1600" dirty="0">
+                <a:latin typeface="D2Coding" panose="020B0609020101020101" pitchFamily="49" charset="-127"/>
+                <a:ea typeface="D2Coding" panose="020B0609020101020101" pitchFamily="49" charset="-127"/>
+              </a:rPr>
+              <a:t>PostgreSQL </a:t>
+            </a:r>
+            <a:r>
+              <a:rPr lang="ko-KR" altLang="en-US" sz="1600" dirty="0">
+                <a:latin typeface="D2Coding" panose="020B0609020101020101" pitchFamily="49" charset="-127"/>
+                <a:ea typeface="D2Coding" panose="020B0609020101020101" pitchFamily="49" charset="-127"/>
+              </a:rPr>
+              <a:t>데이터베이스에 플러그인</a:t>
+            </a:r>
+            <a:r>
+              <a:rPr lang="en-US" altLang="ko-KR" sz="1600" dirty="0">
+                <a:latin typeface="D2Coding" panose="020B0609020101020101" pitchFamily="49" charset="-127"/>
+                <a:ea typeface="D2Coding" panose="020B0609020101020101" pitchFamily="49" charset="-127"/>
+              </a:rPr>
+              <a:t>(</a:t>
+            </a:r>
+            <a:r>
+              <a:rPr lang="en-US" altLang="ko-KR" sz="1600" dirty="0" err="1">
+                <a:latin typeface="D2Coding" panose="020B0609020101020101" pitchFamily="49" charset="-127"/>
+                <a:ea typeface="D2Coding" panose="020B0609020101020101" pitchFamily="49" charset="-127"/>
+              </a:rPr>
+              <a:t>pgvector</a:t>
+            </a:r>
+            <a:r>
+              <a:rPr lang="en-US" altLang="ko-KR" sz="1600" dirty="0">
+                <a:latin typeface="D2Coding" panose="020B0609020101020101" pitchFamily="49" charset="-127"/>
+                <a:ea typeface="D2Coding" panose="020B0609020101020101" pitchFamily="49" charset="-127"/>
+              </a:rPr>
+              <a:t>) </a:t>
+            </a:r>
+            <a:r>
+              <a:rPr lang="ko-KR" altLang="en-US" sz="1600" dirty="0">
+                <a:latin typeface="D2Coding" panose="020B0609020101020101" pitchFamily="49" charset="-127"/>
+                <a:ea typeface="D2Coding" panose="020B0609020101020101" pitchFamily="49" charset="-127"/>
+              </a:rPr>
+              <a:t>하나만 켜면 벡터 </a:t>
+            </a:r>
+            <a:r>
+              <a:rPr lang="en-US" altLang="ko-KR" sz="1600" dirty="0">
+                <a:latin typeface="D2Coding" panose="020B0609020101020101" pitchFamily="49" charset="-127"/>
+                <a:ea typeface="D2Coding" panose="020B0609020101020101" pitchFamily="49" charset="-127"/>
+              </a:rPr>
+              <a:t>DB</a:t>
+            </a:r>
+            <a:r>
+              <a:rPr lang="ko-KR" altLang="en-US" sz="1600" dirty="0">
+                <a:latin typeface="D2Coding" panose="020B0609020101020101" pitchFamily="49" charset="-127"/>
+                <a:ea typeface="D2Coding" panose="020B0609020101020101" pitchFamily="49" charset="-127"/>
+              </a:rPr>
+              <a:t>로 변신</a:t>
+            </a:r>
+          </a:p>
+        </p:txBody>
+      </p:sp>
+      <p:sp>
+        <p:nvSpPr>
+          <p:cNvPr id="10" name="TextBox 9">
+            <a:extLst>
+              <a:ext uri="{FF2B5EF4-FFF2-40B4-BE49-F238E27FC236}">
+                <a16:creationId xmlns:a16="http://schemas.microsoft.com/office/drawing/2014/main" id="{46F2FE64-4976-2781-44ED-6BE72BCDDE82}"/>
+              </a:ext>
+            </a:extLst>
+          </p:cNvPr>
+          <p:cNvSpPr txBox="1"/>
+          <p:nvPr/>
+        </p:nvSpPr>
+        <p:spPr>
+          <a:xfrm>
+            <a:off x="1122296" y="5788190"/>
+            <a:ext cx="6450079" cy="338554"/>
           </a:xfrm>
           <a:prstGeom prst="rect">
             <a:avLst/>
           </a:prstGeom>
           <a:solidFill>
-            <a:srgbClr val="76E3FF"/>
+            <a:schemeClr val="tx1"/>
           </a:solidFill>
         </p:spPr>
         <p:txBody>
@@ -6433,13 +6637,290 @@
           </a:bodyPr>
           <a:lstStyle/>
           <a:p>
-            <a:pPr>
-              <a:lnSpc>
-                <a:spcPts val="1575"/>
-              </a:lnSpc>
-              <a:buNone/>
-            </a:pPr>
-            <a:endParaRPr lang="en-US" altLang="ko-KR" sz="1400" dirty="0">
+            <a:r>
+              <a:rPr lang="en-US" altLang="ko-KR" sz="1600" dirty="0" err="1">
+                <a:solidFill>
+                  <a:schemeClr val="bg1"/>
+                </a:solidFill>
+                <a:latin typeface="D2Coding" panose="020B0609020101020101" pitchFamily="49" charset="-127"/>
+                <a:ea typeface="D2Coding" panose="020B0609020101020101" pitchFamily="49" charset="-127"/>
+              </a:rPr>
+              <a:t>Colab</a:t>
+            </a:r>
+            <a:r>
+              <a:rPr lang="en-US" altLang="ko-KR" sz="1600" dirty="0">
+                <a:solidFill>
+                  <a:schemeClr val="bg1"/>
+                </a:solidFill>
+                <a:latin typeface="D2Coding" panose="020B0609020101020101" pitchFamily="49" charset="-127"/>
+                <a:ea typeface="D2Coding" panose="020B0609020101020101" pitchFamily="49" charset="-127"/>
+              </a:rPr>
+              <a:t> </a:t>
+            </a:r>
+            <a:r>
+              <a:rPr lang="ko-KR" altLang="en-US" sz="1600" dirty="0">
+                <a:solidFill>
+                  <a:schemeClr val="bg1"/>
+                </a:solidFill>
+                <a:latin typeface="D2Coding" panose="020B0609020101020101" pitchFamily="49" charset="-127"/>
+                <a:ea typeface="D2Coding" panose="020B0609020101020101" pitchFamily="49" charset="-127"/>
+              </a:rPr>
+              <a:t>환경에서 클라우드 </a:t>
+            </a:r>
+            <a:r>
+              <a:rPr lang="en-US" altLang="ko-KR" sz="1600" dirty="0" err="1">
+                <a:solidFill>
+                  <a:schemeClr val="bg1"/>
+                </a:solidFill>
+                <a:latin typeface="D2Coding" panose="020B0609020101020101" pitchFamily="49" charset="-127"/>
+                <a:ea typeface="D2Coding" panose="020B0609020101020101" pitchFamily="49" charset="-127"/>
+              </a:rPr>
+              <a:t>SupaBase</a:t>
+            </a:r>
+            <a:r>
+              <a:rPr lang="en-US" altLang="ko-KR" sz="1600" dirty="0">
+                <a:solidFill>
+                  <a:schemeClr val="bg1"/>
+                </a:solidFill>
+                <a:latin typeface="D2Coding" panose="020B0609020101020101" pitchFamily="49" charset="-127"/>
+                <a:ea typeface="D2Coding" panose="020B0609020101020101" pitchFamily="49" charset="-127"/>
+              </a:rPr>
+              <a:t> vector </a:t>
+            </a:r>
+            <a:r>
+              <a:rPr lang="en-US" altLang="ko-KR" sz="1600" dirty="0" err="1">
+                <a:solidFill>
+                  <a:schemeClr val="bg1"/>
+                </a:solidFill>
+                <a:latin typeface="D2Coding" panose="020B0609020101020101" pitchFamily="49" charset="-127"/>
+                <a:ea typeface="D2Coding" panose="020B0609020101020101" pitchFamily="49" charset="-127"/>
+              </a:rPr>
+              <a:t>db</a:t>
+            </a:r>
+            <a:r>
+              <a:rPr lang="ko-KR" altLang="en-US" sz="1600" dirty="0">
+                <a:solidFill>
+                  <a:schemeClr val="bg1"/>
+                </a:solidFill>
+                <a:latin typeface="D2Coding" panose="020B0609020101020101" pitchFamily="49" charset="-127"/>
+                <a:ea typeface="D2Coding" panose="020B0609020101020101" pitchFamily="49" charset="-127"/>
+              </a:rPr>
+              <a:t>에 저장하기</a:t>
+            </a:r>
+          </a:p>
+        </p:txBody>
+      </p:sp>
+      <p:pic>
+        <p:nvPicPr>
+          <p:cNvPr id="11" name="그래픽 10" descr="웹 디자인">
+            <a:extLst>
+              <a:ext uri="{FF2B5EF4-FFF2-40B4-BE49-F238E27FC236}">
+                <a16:creationId xmlns:a16="http://schemas.microsoft.com/office/drawing/2014/main" id="{FF4D50AC-E78E-C767-94A7-93D1D3787EBC}"/>
+              </a:ext>
+            </a:extLst>
+          </p:cNvPr>
+          <p:cNvPicPr>
+            <a:picLocks noChangeAspect="1"/>
+          </p:cNvPicPr>
+          <p:nvPr/>
+        </p:nvPicPr>
+        <p:blipFill>
+          <a:blip r:embed="rId3">
+            <a:extLst>
+              <a:ext uri="{96DAC541-7B7A-43D3-8B79-37D633B846F1}">
+                <asvg:svgBlip xmlns:asvg="http://schemas.microsoft.com/office/drawing/2016/SVG/main" r:embed="rId4"/>
+              </a:ext>
+            </a:extLst>
+          </a:blip>
+          <a:stretch>
+            <a:fillRect/>
+          </a:stretch>
+        </p:blipFill>
+        <p:spPr>
+          <a:xfrm>
+            <a:off x="578709" y="5686662"/>
+            <a:ext cx="543335" cy="543335"/>
+          </a:xfrm>
+          <a:prstGeom prst="rect">
+            <a:avLst/>
+          </a:prstGeom>
+        </p:spPr>
+      </p:pic>
+      <p:sp>
+        <p:nvSpPr>
+          <p:cNvPr id="12" name="TextBox 11">
+            <a:extLst>
+              <a:ext uri="{FF2B5EF4-FFF2-40B4-BE49-F238E27FC236}">
+                <a16:creationId xmlns:a16="http://schemas.microsoft.com/office/drawing/2014/main" id="{52087CF1-5C36-1787-787C-1970D6972574}"/>
+              </a:ext>
+            </a:extLst>
+          </p:cNvPr>
+          <p:cNvSpPr txBox="1"/>
+          <p:nvPr/>
+        </p:nvSpPr>
+        <p:spPr>
+          <a:xfrm>
+            <a:off x="1112519" y="4955866"/>
+            <a:ext cx="6450331" cy="338554"/>
+          </a:xfrm>
+          <a:prstGeom prst="rect">
+            <a:avLst/>
+          </a:prstGeom>
+          <a:solidFill>
+            <a:schemeClr val="tx1"/>
+          </a:solidFill>
+        </p:spPr>
+        <p:txBody>
+          <a:bodyPr wrap="square">
+            <a:spAutoFit/>
+          </a:bodyPr>
+          <a:lstStyle/>
+          <a:p>
+            <a:r>
+              <a:rPr lang="en-US" altLang="ko-KR" sz="1600" dirty="0" err="1">
+                <a:solidFill>
+                  <a:schemeClr val="bg1"/>
+                </a:solidFill>
+                <a:latin typeface="D2Coding" panose="020B0609020101020101" pitchFamily="49" charset="-127"/>
+                <a:ea typeface="D2Coding" panose="020B0609020101020101" pitchFamily="49" charset="-127"/>
+              </a:rPr>
+              <a:t>Colab</a:t>
+            </a:r>
+            <a:r>
+              <a:rPr lang="en-US" altLang="ko-KR" sz="1600" dirty="0">
+                <a:solidFill>
+                  <a:schemeClr val="bg1"/>
+                </a:solidFill>
+                <a:latin typeface="D2Coding" panose="020B0609020101020101" pitchFamily="49" charset="-127"/>
+                <a:ea typeface="D2Coding" panose="020B0609020101020101" pitchFamily="49" charset="-127"/>
+              </a:rPr>
+              <a:t> </a:t>
+            </a:r>
+            <a:r>
+              <a:rPr lang="ko-KR" altLang="en-US" sz="1600" dirty="0">
+                <a:solidFill>
+                  <a:schemeClr val="bg1"/>
+                </a:solidFill>
+                <a:latin typeface="D2Coding" panose="020B0609020101020101" pitchFamily="49" charset="-127"/>
+                <a:ea typeface="D2Coding" panose="020B0609020101020101" pitchFamily="49" charset="-127"/>
+              </a:rPr>
+              <a:t>환경에서 직접 </a:t>
+            </a:r>
+            <a:r>
+              <a:rPr lang="en-US" altLang="ko-KR" sz="1600" dirty="0" err="1">
+                <a:solidFill>
+                  <a:schemeClr val="bg1"/>
+                </a:solidFill>
+                <a:latin typeface="D2Coding" panose="020B0609020101020101" pitchFamily="49" charset="-127"/>
+                <a:ea typeface="D2Coding" panose="020B0609020101020101" pitchFamily="49" charset="-127"/>
+              </a:rPr>
+              <a:t>postgres</a:t>
+            </a:r>
+            <a:r>
+              <a:rPr lang="en-US" altLang="ko-KR" sz="1600" dirty="0">
+                <a:solidFill>
+                  <a:schemeClr val="bg1"/>
+                </a:solidFill>
+                <a:latin typeface="D2Coding" panose="020B0609020101020101" pitchFamily="49" charset="-127"/>
+                <a:ea typeface="D2Coding" panose="020B0609020101020101" pitchFamily="49" charset="-127"/>
+              </a:rPr>
+              <a:t> vector </a:t>
+            </a:r>
+            <a:r>
+              <a:rPr lang="en-US" altLang="ko-KR" sz="1600" dirty="0" err="1">
+                <a:solidFill>
+                  <a:schemeClr val="bg1"/>
+                </a:solidFill>
+                <a:latin typeface="D2Coding" panose="020B0609020101020101" pitchFamily="49" charset="-127"/>
+                <a:ea typeface="D2Coding" panose="020B0609020101020101" pitchFamily="49" charset="-127"/>
+              </a:rPr>
+              <a:t>db</a:t>
+            </a:r>
+            <a:r>
+              <a:rPr lang="ko-KR" altLang="en-US" sz="1600" dirty="0">
+                <a:solidFill>
+                  <a:schemeClr val="bg1"/>
+                </a:solidFill>
+                <a:latin typeface="D2Coding" panose="020B0609020101020101" pitchFamily="49" charset="-127"/>
+                <a:ea typeface="D2Coding" panose="020B0609020101020101" pitchFamily="49" charset="-127"/>
+              </a:rPr>
+              <a:t>에 저장하기</a:t>
+            </a:r>
+          </a:p>
+        </p:txBody>
+      </p:sp>
+      <p:pic>
+        <p:nvPicPr>
+          <p:cNvPr id="13" name="그래픽 12" descr="웹 디자인">
+            <a:extLst>
+              <a:ext uri="{FF2B5EF4-FFF2-40B4-BE49-F238E27FC236}">
+                <a16:creationId xmlns:a16="http://schemas.microsoft.com/office/drawing/2014/main" id="{0A0F9956-16EA-3725-FC30-CB7DEA41B1C2}"/>
+              </a:ext>
+            </a:extLst>
+          </p:cNvPr>
+          <p:cNvPicPr>
+            <a:picLocks noChangeAspect="1"/>
+          </p:cNvPicPr>
+          <p:nvPr/>
+        </p:nvPicPr>
+        <p:blipFill>
+          <a:blip r:embed="rId3">
+            <a:extLst>
+              <a:ext uri="{96DAC541-7B7A-43D3-8B79-37D633B846F1}">
+                <asvg:svgBlip xmlns:asvg="http://schemas.microsoft.com/office/drawing/2016/SVG/main" r:embed="rId4"/>
+              </a:ext>
+            </a:extLst>
+          </a:blip>
+          <a:stretch>
+            <a:fillRect/>
+          </a:stretch>
+        </p:blipFill>
+        <p:spPr>
+          <a:xfrm>
+            <a:off x="568932" y="4854338"/>
+            <a:ext cx="543335" cy="543335"/>
+          </a:xfrm>
+          <a:prstGeom prst="rect">
+            <a:avLst/>
+          </a:prstGeom>
+        </p:spPr>
+      </p:pic>
+      <p:sp>
+        <p:nvSpPr>
+          <p:cNvPr id="17" name="TextBox 16">
+            <a:extLst>
+              <a:ext uri="{FF2B5EF4-FFF2-40B4-BE49-F238E27FC236}">
+                <a16:creationId xmlns:a16="http://schemas.microsoft.com/office/drawing/2014/main" id="{5FFF4F43-5573-2F0B-D471-654F61007B3A}"/>
+              </a:ext>
+            </a:extLst>
+          </p:cNvPr>
+          <p:cNvSpPr txBox="1"/>
+          <p:nvPr/>
+        </p:nvSpPr>
+        <p:spPr>
+          <a:xfrm>
+            <a:off x="7686675" y="5806284"/>
+            <a:ext cx="1266825" cy="338554"/>
+          </a:xfrm>
+          <a:prstGeom prst="rect">
+            <a:avLst/>
+          </a:prstGeom>
+          <a:noFill/>
+        </p:spPr>
+        <p:txBody>
+          <a:bodyPr wrap="square">
+            <a:spAutoFit/>
+          </a:bodyPr>
+          <a:lstStyle/>
+          <a:p>
+            <a:r>
+              <a:rPr lang="en-US" altLang="ko-KR" sz="1600" dirty="0" err="1">
+                <a:latin typeface="D2Coding" panose="020B0609020101020101" pitchFamily="49" charset="-127"/>
+                <a:ea typeface="D2Coding" panose="020B0609020101020101" pitchFamily="49" charset="-127"/>
+              </a:rPr>
+              <a:t>claude</a:t>
+            </a:r>
+            <a:endParaRPr lang="ko-KR" altLang="en-US" sz="1600" dirty="0">
               <a:latin typeface="D2Coding" panose="020B0609020101020101" pitchFamily="49" charset="-127"/>
               <a:ea typeface="D2Coding" panose="020B0609020101020101" pitchFamily="49" charset="-127"/>
             </a:endParaRPr>
@@ -6450,6 +6931,2885 @@
     <p:extLst>
       <p:ext uri="{BB962C8B-B14F-4D97-AF65-F5344CB8AC3E}">
         <p14:creationId xmlns:p14="http://schemas.microsoft.com/office/powerpoint/2010/main" val="591459622"/>
+      </p:ext>
+    </p:extLst>
+  </p:cSld>
+  <p:clrMapOvr>
+    <a:masterClrMapping/>
+  </p:clrMapOvr>
+</p:sld>
+</file>
+
+<file path=ppt/slides/slide15.xml><?xml version="1.0" encoding="utf-8"?>
+<p:sld xmlns:a="http://schemas.openxmlformats.org/drawingml/2006/main" xmlns:r="http://schemas.openxmlformats.org/officeDocument/2006/relationships" xmlns:p="http://schemas.openxmlformats.org/presentationml/2006/main">
+  <p:cSld>
+    <p:spTree>
+      <p:nvGrpSpPr>
+        <p:cNvPr id="1" name="">
+          <a:extLst>
+            <a:ext uri="{FF2B5EF4-FFF2-40B4-BE49-F238E27FC236}">
+              <a16:creationId xmlns:a16="http://schemas.microsoft.com/office/drawing/2014/main" id="{93DCDCAF-F2C4-81B5-0B3B-08603E20639B}"/>
+            </a:ext>
+          </a:extLst>
+        </p:cNvPr>
+        <p:cNvGrpSpPr/>
+        <p:nvPr/>
+      </p:nvGrpSpPr>
+      <p:grpSpPr>
+        <a:xfrm>
+          <a:off x="0" y="0"/>
+          <a:ext cx="0" cy="0"/>
+          <a:chOff x="0" y="0"/>
+          <a:chExt cx="0" cy="0"/>
+        </a:xfrm>
+      </p:grpSpPr>
+      <p:pic>
+        <p:nvPicPr>
+          <p:cNvPr id="15362" name="Picture 2" descr="Simple RAG">
+            <a:extLst>
+              <a:ext uri="{FF2B5EF4-FFF2-40B4-BE49-F238E27FC236}">
+                <a16:creationId xmlns:a16="http://schemas.microsoft.com/office/drawing/2014/main" id="{31CD1155-AAC9-5F70-8CA2-AF2EF1027E08}"/>
+              </a:ext>
+            </a:extLst>
+          </p:cNvPr>
+          <p:cNvPicPr>
+            <a:picLocks noChangeAspect="1" noChangeArrowheads="1"/>
+          </p:cNvPicPr>
+          <p:nvPr/>
+        </p:nvPicPr>
+        <p:blipFill>
+          <a:blip r:embed="rId2">
+            <a:extLst>
+              <a:ext uri="{28A0092B-C50C-407E-A947-70E740481C1C}">
+                <a14:useLocalDpi xmlns:a14="http://schemas.microsoft.com/office/drawing/2010/main" val="0"/>
+              </a:ext>
+            </a:extLst>
+          </a:blip>
+          <a:srcRect/>
+          <a:stretch>
+            <a:fillRect/>
+          </a:stretch>
+        </p:blipFill>
+        <p:spPr bwMode="auto">
+          <a:xfrm>
+            <a:off x="1823476" y="2780252"/>
+            <a:ext cx="9220200" cy="3402350"/>
+          </a:xfrm>
+          <a:prstGeom prst="rect">
+            <a:avLst/>
+          </a:prstGeom>
+          <a:noFill/>
+          <a:extLst>
+            <a:ext uri="{909E8E84-426E-40DD-AFC4-6F175D3DCCD1}">
+              <a14:hiddenFill xmlns:a14="http://schemas.microsoft.com/office/drawing/2010/main">
+                <a:solidFill>
+                  <a:srgbClr val="FFFFFF"/>
+                </a:solidFill>
+              </a14:hiddenFill>
+            </a:ext>
+          </a:extLst>
+        </p:spPr>
+      </p:pic>
+      <p:sp>
+        <p:nvSpPr>
+          <p:cNvPr id="4" name="슬라이드 번호 개체 틀 3">
+            <a:extLst>
+              <a:ext uri="{FF2B5EF4-FFF2-40B4-BE49-F238E27FC236}">
+                <a16:creationId xmlns:a16="http://schemas.microsoft.com/office/drawing/2014/main" id="{78E4932E-8CA0-46DB-8C74-9E6720A8ED34}"/>
+              </a:ext>
+            </a:extLst>
+          </p:cNvPr>
+          <p:cNvSpPr>
+            <a:spLocks noGrp="1"/>
+          </p:cNvSpPr>
+          <p:nvPr>
+            <p:ph type="sldNum" sz="quarter" idx="12"/>
+          </p:nvPr>
+        </p:nvSpPr>
+        <p:spPr>
+          <a:xfrm>
+            <a:off x="10514011" y="6036261"/>
+            <a:ext cx="753545" cy="365125"/>
+          </a:xfrm>
+        </p:spPr>
+        <p:txBody>
+          <a:bodyPr/>
+          <a:lstStyle/>
+          <a:p>
+            <a:fld id="{D57F1E4F-1CFF-5643-939E-217C01CDF565}" type="slidenum">
+              <a:rPr lang="en-US" smtClean="0"/>
+              <a:pPr/>
+              <a:t>15</a:t>
+            </a:fld>
+            <a:endParaRPr lang="en-US" dirty="0"/>
+          </a:p>
+        </p:txBody>
+      </p:sp>
+      <p:sp>
+        <p:nvSpPr>
+          <p:cNvPr id="3" name="제목 1">
+            <a:extLst>
+              <a:ext uri="{FF2B5EF4-FFF2-40B4-BE49-F238E27FC236}">
+                <a16:creationId xmlns:a16="http://schemas.microsoft.com/office/drawing/2014/main" id="{CB7FA75D-5D50-0308-C9A0-C7189492E366}"/>
+              </a:ext>
+            </a:extLst>
+          </p:cNvPr>
+          <p:cNvSpPr txBox="1">
+            <a:spLocks/>
+          </p:cNvSpPr>
+          <p:nvPr/>
+        </p:nvSpPr>
+        <p:spPr>
+          <a:xfrm>
+            <a:off x="475645" y="481983"/>
+            <a:ext cx="10353762" cy="766439"/>
+          </a:xfrm>
+          <a:prstGeom prst="rect">
+            <a:avLst/>
+          </a:prstGeom>
+        </p:spPr>
+        <p:txBody>
+          <a:bodyPr vert="horz" lIns="91440" tIns="45720" rIns="91440" bIns="45720" rtlCol="0" anchor="ctr">
+            <a:normAutofit/>
+          </a:bodyPr>
+          <a:lstStyle>
+            <a:lvl1pPr algn="ctr" defTabSz="914400" rtl="0" eaLnBrk="1" latinLnBrk="1" hangingPunct="1">
+              <a:lnSpc>
+                <a:spcPct val="90000"/>
+              </a:lnSpc>
+              <a:spcBef>
+                <a:spcPct val="0"/>
+              </a:spcBef>
+              <a:buNone/>
+              <a:defRPr sz="3200" kern="1200" cap="all" baseline="0">
+                <a:solidFill>
+                  <a:schemeClr val="tx1"/>
+                </a:solidFill>
+                <a:effectLst/>
+                <a:latin typeface="Batang" panose="02030600000101010101" pitchFamily="18" charset="-127"/>
+                <a:ea typeface="Batang" panose="02030600000101010101" pitchFamily="18" charset="-127"/>
+                <a:cs typeface="+mj-cs"/>
+              </a:defRPr>
+            </a:lvl1pPr>
+          </a:lstStyle>
+          <a:p>
+            <a:pPr algn="l"/>
+            <a:r>
+              <a:rPr lang="en-US" altLang="ko-KR" sz="2800" cap="none" dirty="0">
+                <a:solidFill>
+                  <a:schemeClr val="bg2">
+                    <a:lumMod val="25000"/>
+                  </a:schemeClr>
+                </a:solidFill>
+                <a:latin typeface="D2Coding" panose="020B0609020101020101" pitchFamily="49" charset="-127"/>
+                <a:ea typeface="D2Coding" panose="020B0609020101020101" pitchFamily="49" charset="-127"/>
+                <a:cs typeface="Segoe UI Light" panose="020B0502040204020203" pitchFamily="34" charset="0"/>
+              </a:rPr>
+              <a:t>Summary</a:t>
+            </a:r>
+            <a:endParaRPr lang="ko-KR" altLang="en-US" sz="2800" cap="none" dirty="0">
+              <a:solidFill>
+                <a:schemeClr val="bg2">
+                  <a:lumMod val="25000"/>
+                </a:schemeClr>
+              </a:solidFill>
+              <a:latin typeface="D2Coding" panose="020B0609020101020101" pitchFamily="49" charset="-127"/>
+              <a:ea typeface="D2Coding" panose="020B0609020101020101" pitchFamily="49" charset="-127"/>
+              <a:cs typeface="Segoe UI Light" panose="020B0502040204020203" pitchFamily="34" charset="0"/>
+            </a:endParaRPr>
+          </a:p>
+        </p:txBody>
+      </p:sp>
+      <p:sp>
+        <p:nvSpPr>
+          <p:cNvPr id="5" name="TextBox 4">
+            <a:extLst>
+              <a:ext uri="{FF2B5EF4-FFF2-40B4-BE49-F238E27FC236}">
+                <a16:creationId xmlns:a16="http://schemas.microsoft.com/office/drawing/2014/main" id="{5D8E7A39-10E4-97D1-58B4-87B7EE0A627B}"/>
+              </a:ext>
+            </a:extLst>
+          </p:cNvPr>
+          <p:cNvSpPr txBox="1"/>
+          <p:nvPr/>
+        </p:nvSpPr>
+        <p:spPr>
+          <a:xfrm>
+            <a:off x="813826" y="4676167"/>
+            <a:ext cx="3867150" cy="1077218"/>
+          </a:xfrm>
+          <a:prstGeom prst="rect">
+            <a:avLst/>
+          </a:prstGeom>
+          <a:noFill/>
+        </p:spPr>
+        <p:txBody>
+          <a:bodyPr wrap="square">
+            <a:spAutoFit/>
+          </a:bodyPr>
+          <a:lstStyle/>
+          <a:p>
+            <a:pPr marL="342900" indent="-342900">
+              <a:buFont typeface="+mj-lt"/>
+              <a:buAutoNum type="arabicPeriod"/>
+            </a:pPr>
+            <a:r>
+              <a:rPr lang="en-US" altLang="ko-KR" sz="1600" dirty="0">
+                <a:latin typeface="D2Coding" panose="020B0609020101020101" pitchFamily="49" charset="-127"/>
+                <a:ea typeface="D2Coding" panose="020B0609020101020101" pitchFamily="49" charset="-127"/>
+              </a:rPr>
+              <a:t>Load (</a:t>
+            </a:r>
+            <a:r>
+              <a:rPr lang="ko-KR" altLang="en-US" sz="1600" dirty="0">
+                <a:latin typeface="D2Coding" panose="020B0609020101020101" pitchFamily="49" charset="-127"/>
+                <a:ea typeface="D2Coding" panose="020B0609020101020101" pitchFamily="49" charset="-127"/>
+              </a:rPr>
+              <a:t>데이터 불러오기</a:t>
+            </a:r>
+            <a:r>
+              <a:rPr lang="en-US" altLang="ko-KR" sz="1600" dirty="0">
+                <a:latin typeface="D2Coding" panose="020B0609020101020101" pitchFamily="49" charset="-127"/>
+                <a:ea typeface="D2Coding" panose="020B0609020101020101" pitchFamily="49" charset="-127"/>
+              </a:rPr>
+              <a:t>) </a:t>
+            </a:r>
+          </a:p>
+          <a:p>
+            <a:pPr marL="342900" indent="-342900">
+              <a:buFont typeface="+mj-lt"/>
+              <a:buAutoNum type="arabicPeriod"/>
+            </a:pPr>
+            <a:r>
+              <a:rPr lang="en-US" altLang="ko-KR" sz="1600" dirty="0">
+                <a:latin typeface="D2Coding" panose="020B0609020101020101" pitchFamily="49" charset="-127"/>
+                <a:ea typeface="D2Coding" panose="020B0609020101020101" pitchFamily="49" charset="-127"/>
+              </a:rPr>
+              <a:t>Split (</a:t>
+            </a:r>
+            <a:r>
+              <a:rPr lang="ko-KR" altLang="en-US" sz="1600" dirty="0">
+                <a:latin typeface="D2Coding" panose="020B0609020101020101" pitchFamily="49" charset="-127"/>
+                <a:ea typeface="D2Coding" panose="020B0609020101020101" pitchFamily="49" charset="-127"/>
+              </a:rPr>
+              <a:t>텍스트 분할하기</a:t>
+            </a:r>
+            <a:r>
+              <a:rPr lang="en-US" altLang="ko-KR" sz="1600" dirty="0">
+                <a:latin typeface="D2Coding" panose="020B0609020101020101" pitchFamily="49" charset="-127"/>
+                <a:ea typeface="D2Coding" panose="020B0609020101020101" pitchFamily="49" charset="-127"/>
+              </a:rPr>
+              <a:t>) </a:t>
+            </a:r>
+          </a:p>
+          <a:p>
+            <a:pPr marL="342900" indent="-342900">
+              <a:buFont typeface="+mj-lt"/>
+              <a:buAutoNum type="arabicPeriod"/>
+            </a:pPr>
+            <a:r>
+              <a:rPr lang="en-US" altLang="ko-KR" sz="1600" dirty="0">
+                <a:latin typeface="D2Coding" panose="020B0609020101020101" pitchFamily="49" charset="-127"/>
+                <a:ea typeface="D2Coding" panose="020B0609020101020101" pitchFamily="49" charset="-127"/>
+              </a:rPr>
+              <a:t>Embed (</a:t>
+            </a:r>
+            <a:r>
+              <a:rPr lang="ko-KR" altLang="en-US" sz="1600" dirty="0">
+                <a:latin typeface="D2Coding" panose="020B0609020101020101" pitchFamily="49" charset="-127"/>
+                <a:ea typeface="D2Coding" panose="020B0609020101020101" pitchFamily="49" charset="-127"/>
+              </a:rPr>
+              <a:t>의미를 숫자로 바꾸기</a:t>
+            </a:r>
+            <a:r>
+              <a:rPr lang="en-US" altLang="ko-KR" sz="1600" dirty="0">
+                <a:latin typeface="D2Coding" panose="020B0609020101020101" pitchFamily="49" charset="-127"/>
+                <a:ea typeface="D2Coding" panose="020B0609020101020101" pitchFamily="49" charset="-127"/>
+              </a:rPr>
+              <a:t>) </a:t>
+            </a:r>
+          </a:p>
+          <a:p>
+            <a:pPr marL="342900" indent="-342900">
+              <a:buFont typeface="+mj-lt"/>
+              <a:buAutoNum type="arabicPeriod"/>
+            </a:pPr>
+            <a:r>
+              <a:rPr lang="en-US" altLang="ko-KR" sz="1600" dirty="0">
+                <a:latin typeface="D2Coding" panose="020B0609020101020101" pitchFamily="49" charset="-127"/>
+                <a:ea typeface="D2Coding" panose="020B0609020101020101" pitchFamily="49" charset="-127"/>
+              </a:rPr>
+              <a:t>Store (</a:t>
+            </a:r>
+            <a:r>
+              <a:rPr lang="ko-KR" altLang="en-US" sz="1600" dirty="0">
+                <a:latin typeface="D2Coding" panose="020B0609020101020101" pitchFamily="49" charset="-127"/>
+                <a:ea typeface="D2Coding" panose="020B0609020101020101" pitchFamily="49" charset="-127"/>
+              </a:rPr>
+              <a:t>창고에 저장하기</a:t>
+            </a:r>
+            <a:r>
+              <a:rPr lang="en-US" altLang="ko-KR" sz="1600" dirty="0">
+                <a:latin typeface="D2Coding" panose="020B0609020101020101" pitchFamily="49" charset="-127"/>
+                <a:ea typeface="D2Coding" panose="020B0609020101020101" pitchFamily="49" charset="-127"/>
+              </a:rPr>
+              <a:t>)</a:t>
+            </a:r>
+          </a:p>
+        </p:txBody>
+      </p:sp>
+      <p:sp>
+        <p:nvSpPr>
+          <p:cNvPr id="8" name="TextBox 7">
+            <a:extLst>
+              <a:ext uri="{FF2B5EF4-FFF2-40B4-BE49-F238E27FC236}">
+                <a16:creationId xmlns:a16="http://schemas.microsoft.com/office/drawing/2014/main" id="{BE8E432C-288A-2CAC-90C0-0EC6692B0880}"/>
+              </a:ext>
+            </a:extLst>
+          </p:cNvPr>
+          <p:cNvSpPr txBox="1"/>
+          <p:nvPr/>
+        </p:nvSpPr>
+        <p:spPr>
+          <a:xfrm>
+            <a:off x="4366651" y="1617502"/>
+            <a:ext cx="4872599" cy="1077218"/>
+          </a:xfrm>
+          <a:prstGeom prst="rect">
+            <a:avLst/>
+          </a:prstGeom>
+          <a:noFill/>
+        </p:spPr>
+        <p:txBody>
+          <a:bodyPr wrap="square">
+            <a:spAutoFit/>
+          </a:bodyPr>
+          <a:lstStyle/>
+          <a:p>
+            <a:pPr marL="342900" indent="-342900">
+              <a:buFont typeface="+mj-lt"/>
+              <a:buAutoNum type="arabicPeriod" startAt="5"/>
+            </a:pPr>
+            <a:r>
+              <a:rPr lang="en-US" altLang="ko-KR" sz="1600" dirty="0">
+                <a:latin typeface="D2Coding" panose="020B0609020101020101" pitchFamily="49" charset="-127"/>
+                <a:ea typeface="D2Coding" panose="020B0609020101020101" pitchFamily="49" charset="-127"/>
+              </a:rPr>
+              <a:t>Question (</a:t>
+            </a:r>
+            <a:r>
+              <a:rPr lang="ko-KR" altLang="en-US" sz="1600" dirty="0">
+                <a:latin typeface="D2Coding" panose="020B0609020101020101" pitchFamily="49" charset="-127"/>
+                <a:ea typeface="D2Coding" panose="020B0609020101020101" pitchFamily="49" charset="-127"/>
+              </a:rPr>
+              <a:t>사용자의 질문</a:t>
+            </a:r>
+            <a:r>
+              <a:rPr lang="en-US" altLang="ko-KR" sz="1600" dirty="0">
+                <a:latin typeface="D2Coding" panose="020B0609020101020101" pitchFamily="49" charset="-127"/>
+                <a:ea typeface="D2Coding" panose="020B0609020101020101" pitchFamily="49" charset="-127"/>
+              </a:rPr>
+              <a:t>) </a:t>
+            </a:r>
+          </a:p>
+          <a:p>
+            <a:pPr marL="342900" indent="-342900">
+              <a:buFont typeface="+mj-lt"/>
+              <a:buAutoNum type="arabicPeriod" startAt="5"/>
+            </a:pPr>
+            <a:r>
+              <a:rPr lang="en-US" altLang="ko-KR" sz="1600" dirty="0">
+                <a:latin typeface="D2Coding" panose="020B0609020101020101" pitchFamily="49" charset="-127"/>
+                <a:ea typeface="D2Coding" panose="020B0609020101020101" pitchFamily="49" charset="-127"/>
+              </a:rPr>
+              <a:t>RETRIEVE (</a:t>
+            </a:r>
+            <a:r>
+              <a:rPr lang="ko-KR" altLang="en-US" sz="1600" dirty="0">
+                <a:latin typeface="D2Coding" panose="020B0609020101020101" pitchFamily="49" charset="-127"/>
+                <a:ea typeface="D2Coding" panose="020B0609020101020101" pitchFamily="49" charset="-127"/>
+              </a:rPr>
+              <a:t>벡터 검색 단계</a:t>
+            </a:r>
+            <a:r>
+              <a:rPr lang="en-US" altLang="ko-KR" sz="1600" dirty="0">
+                <a:latin typeface="D2Coding" panose="020B0609020101020101" pitchFamily="49" charset="-127"/>
+                <a:ea typeface="D2Coding" panose="020B0609020101020101" pitchFamily="49" charset="-127"/>
+              </a:rPr>
+              <a:t>) </a:t>
+            </a:r>
+          </a:p>
+          <a:p>
+            <a:pPr marL="342900" indent="-342900">
+              <a:buFont typeface="+mj-lt"/>
+              <a:buAutoNum type="arabicPeriod" startAt="5"/>
+            </a:pPr>
+            <a:r>
+              <a:rPr lang="en-US" altLang="ko-KR" sz="1600" dirty="0">
+                <a:latin typeface="D2Coding" panose="020B0609020101020101" pitchFamily="49" charset="-127"/>
+                <a:ea typeface="D2Coding" panose="020B0609020101020101" pitchFamily="49" charset="-127"/>
+              </a:rPr>
+              <a:t>PROMPT (</a:t>
+            </a:r>
+            <a:r>
+              <a:rPr lang="ko-KR" altLang="en-US" sz="1600" dirty="0">
+                <a:latin typeface="D2Coding" panose="020B0609020101020101" pitchFamily="49" charset="-127"/>
+                <a:ea typeface="D2Coding" panose="020B0609020101020101" pitchFamily="49" charset="-127"/>
+              </a:rPr>
+              <a:t>컨텍스트 결합 및 프롬프트 생성</a:t>
+            </a:r>
+            <a:r>
+              <a:rPr lang="en-US" altLang="ko-KR" sz="1600" dirty="0">
+                <a:latin typeface="D2Coding" panose="020B0609020101020101" pitchFamily="49" charset="-127"/>
+                <a:ea typeface="D2Coding" panose="020B0609020101020101" pitchFamily="49" charset="-127"/>
+              </a:rPr>
+              <a:t>) </a:t>
+            </a:r>
+          </a:p>
+          <a:p>
+            <a:pPr marL="342900" indent="-342900">
+              <a:buFont typeface="+mj-lt"/>
+              <a:buAutoNum type="arabicPeriod" startAt="5"/>
+            </a:pPr>
+            <a:r>
+              <a:rPr lang="en-US" altLang="ko-KR" sz="1600" dirty="0">
+                <a:latin typeface="D2Coding" panose="020B0609020101020101" pitchFamily="49" charset="-127"/>
+                <a:ea typeface="D2Coding" panose="020B0609020101020101" pitchFamily="49" charset="-127"/>
+              </a:rPr>
+              <a:t>LLM &amp; Answer (</a:t>
+            </a:r>
+            <a:r>
+              <a:rPr lang="ko-KR" altLang="en-US" sz="1600" dirty="0">
+                <a:latin typeface="D2Coding" panose="020B0609020101020101" pitchFamily="49" charset="-127"/>
+                <a:ea typeface="D2Coding" panose="020B0609020101020101" pitchFamily="49" charset="-127"/>
+              </a:rPr>
+              <a:t>생성 및 답변 전달</a:t>
+            </a:r>
+            <a:r>
+              <a:rPr lang="en-US" altLang="ko-KR" sz="1600" dirty="0">
+                <a:latin typeface="D2Coding" panose="020B0609020101020101" pitchFamily="49" charset="-127"/>
+                <a:ea typeface="D2Coding" panose="020B0609020101020101" pitchFamily="49" charset="-127"/>
+              </a:rPr>
+              <a:t>)</a:t>
+            </a:r>
+          </a:p>
+        </p:txBody>
+      </p:sp>
+      <p:sp>
+        <p:nvSpPr>
+          <p:cNvPr id="10" name="TextBox 9">
+            <a:extLst>
+              <a:ext uri="{FF2B5EF4-FFF2-40B4-BE49-F238E27FC236}">
+                <a16:creationId xmlns:a16="http://schemas.microsoft.com/office/drawing/2014/main" id="{BBC55E38-32AA-9217-506B-2C703A3E28E3}"/>
+              </a:ext>
+            </a:extLst>
+          </p:cNvPr>
+          <p:cNvSpPr txBox="1"/>
+          <p:nvPr/>
+        </p:nvSpPr>
+        <p:spPr>
+          <a:xfrm>
+            <a:off x="1823476" y="2156111"/>
+            <a:ext cx="2146742" cy="369332"/>
+          </a:xfrm>
+          <a:prstGeom prst="rect">
+            <a:avLst/>
+          </a:prstGeom>
+          <a:noFill/>
+        </p:spPr>
+        <p:txBody>
+          <a:bodyPr wrap="none" rtlCol="0">
+            <a:spAutoFit/>
+          </a:bodyPr>
+          <a:lstStyle/>
+          <a:p>
+            <a:r>
+              <a:rPr lang="en-US" altLang="ko-KR" dirty="0">
+                <a:latin typeface="D2Coding" panose="020B0609020101020101" pitchFamily="49" charset="-127"/>
+                <a:ea typeface="D2Coding" panose="020B0609020101020101" pitchFamily="49" charset="-127"/>
+                <a:hlinkClick r:id="rId3"/>
+              </a:rPr>
+              <a:t>RAG-Architectures</a:t>
+            </a:r>
+            <a:endParaRPr lang="ko-KR" altLang="en-US" dirty="0">
+              <a:latin typeface="D2Coding" panose="020B0609020101020101" pitchFamily="49" charset="-127"/>
+              <a:ea typeface="D2Coding" panose="020B0609020101020101" pitchFamily="49" charset="-127"/>
+            </a:endParaRPr>
+          </a:p>
+        </p:txBody>
+      </p:sp>
+    </p:spTree>
+    <p:extLst>
+      <p:ext uri="{BB962C8B-B14F-4D97-AF65-F5344CB8AC3E}">
+        <p14:creationId xmlns:p14="http://schemas.microsoft.com/office/powerpoint/2010/main" val="57616042"/>
+      </p:ext>
+    </p:extLst>
+  </p:cSld>
+  <p:clrMapOvr>
+    <a:masterClrMapping/>
+  </p:clrMapOvr>
+</p:sld>
+</file>
+
+<file path=ppt/slides/slide16.xml><?xml version="1.0" encoding="utf-8"?>
+<p:sld xmlns:a="http://schemas.openxmlformats.org/drawingml/2006/main" xmlns:r="http://schemas.openxmlformats.org/officeDocument/2006/relationships" xmlns:p="http://schemas.openxmlformats.org/presentationml/2006/main">
+  <p:cSld>
+    <p:spTree>
+      <p:nvGrpSpPr>
+        <p:cNvPr id="1" name="">
+          <a:extLst>
+            <a:ext uri="{FF2B5EF4-FFF2-40B4-BE49-F238E27FC236}">
+              <a16:creationId xmlns:a16="http://schemas.microsoft.com/office/drawing/2014/main" id="{C5AEC939-9714-3429-9980-6732A21A6E0A}"/>
+            </a:ext>
+          </a:extLst>
+        </p:cNvPr>
+        <p:cNvGrpSpPr/>
+        <p:nvPr/>
+      </p:nvGrpSpPr>
+      <p:grpSpPr>
+        <a:xfrm>
+          <a:off x="0" y="0"/>
+          <a:ext cx="0" cy="0"/>
+          <a:chOff x="0" y="0"/>
+          <a:chExt cx="0" cy="0"/>
+        </a:xfrm>
+      </p:grpSpPr>
+      <p:sp>
+        <p:nvSpPr>
+          <p:cNvPr id="4" name="슬라이드 번호 개체 틀 3">
+            <a:extLst>
+              <a:ext uri="{FF2B5EF4-FFF2-40B4-BE49-F238E27FC236}">
+                <a16:creationId xmlns:a16="http://schemas.microsoft.com/office/drawing/2014/main" id="{B4C5789D-D330-8F6D-AE46-66809080F544}"/>
+              </a:ext>
+            </a:extLst>
+          </p:cNvPr>
+          <p:cNvSpPr>
+            <a:spLocks noGrp="1"/>
+          </p:cNvSpPr>
+          <p:nvPr>
+            <p:ph type="sldNum" sz="quarter" idx="12"/>
+          </p:nvPr>
+        </p:nvSpPr>
+        <p:spPr>
+          <a:xfrm>
+            <a:off x="10514011" y="6036261"/>
+            <a:ext cx="753545" cy="365125"/>
+          </a:xfrm>
+        </p:spPr>
+        <p:txBody>
+          <a:bodyPr/>
+          <a:lstStyle/>
+          <a:p>
+            <a:fld id="{D57F1E4F-1CFF-5643-939E-217C01CDF565}" type="slidenum">
+              <a:rPr lang="en-US" smtClean="0"/>
+              <a:pPr/>
+              <a:t>16</a:t>
+            </a:fld>
+            <a:endParaRPr lang="en-US" dirty="0"/>
+          </a:p>
+        </p:txBody>
+      </p:sp>
+      <p:sp>
+        <p:nvSpPr>
+          <p:cNvPr id="3" name="제목 1">
+            <a:extLst>
+              <a:ext uri="{FF2B5EF4-FFF2-40B4-BE49-F238E27FC236}">
+                <a16:creationId xmlns:a16="http://schemas.microsoft.com/office/drawing/2014/main" id="{48FAAE74-6C6B-9245-BEA1-7F52DF1B4AA1}"/>
+              </a:ext>
+            </a:extLst>
+          </p:cNvPr>
+          <p:cNvSpPr txBox="1">
+            <a:spLocks/>
+          </p:cNvSpPr>
+          <p:nvPr/>
+        </p:nvSpPr>
+        <p:spPr>
+          <a:xfrm>
+            <a:off x="475645" y="481983"/>
+            <a:ext cx="10353762" cy="766439"/>
+          </a:xfrm>
+          <a:prstGeom prst="rect">
+            <a:avLst/>
+          </a:prstGeom>
+        </p:spPr>
+        <p:txBody>
+          <a:bodyPr vert="horz" lIns="91440" tIns="45720" rIns="91440" bIns="45720" rtlCol="0" anchor="ctr">
+            <a:normAutofit/>
+          </a:bodyPr>
+          <a:lstStyle>
+            <a:lvl1pPr algn="ctr" defTabSz="914400" rtl="0" eaLnBrk="1" latinLnBrk="1" hangingPunct="1">
+              <a:lnSpc>
+                <a:spcPct val="90000"/>
+              </a:lnSpc>
+              <a:spcBef>
+                <a:spcPct val="0"/>
+              </a:spcBef>
+              <a:buNone/>
+              <a:defRPr sz="3200" kern="1200" cap="all" baseline="0">
+                <a:solidFill>
+                  <a:schemeClr val="tx1"/>
+                </a:solidFill>
+                <a:effectLst/>
+                <a:latin typeface="Batang" panose="02030600000101010101" pitchFamily="18" charset="-127"/>
+                <a:ea typeface="Batang" panose="02030600000101010101" pitchFamily="18" charset="-127"/>
+                <a:cs typeface="+mj-cs"/>
+              </a:defRPr>
+            </a:lvl1pPr>
+          </a:lstStyle>
+          <a:p>
+            <a:pPr algn="l"/>
+            <a:r>
+              <a:rPr lang="en-US" altLang="ko-KR" sz="2800" cap="none" dirty="0">
+                <a:solidFill>
+                  <a:schemeClr val="bg2">
+                    <a:lumMod val="25000"/>
+                  </a:schemeClr>
+                </a:solidFill>
+                <a:latin typeface="D2Coding" panose="020B0609020101020101" pitchFamily="49" charset="-127"/>
+                <a:ea typeface="D2Coding" panose="020B0609020101020101" pitchFamily="49" charset="-127"/>
+                <a:cs typeface="Segoe UI Light" panose="020B0502040204020203" pitchFamily="34" charset="0"/>
+              </a:rPr>
+              <a:t>RAG(</a:t>
+            </a:r>
+            <a:r>
+              <a:rPr lang="ko-KR" altLang="en-US" sz="2800" cap="none" dirty="0">
+                <a:solidFill>
+                  <a:schemeClr val="bg2">
+                    <a:lumMod val="25000"/>
+                  </a:schemeClr>
+                </a:solidFill>
+                <a:latin typeface="D2Coding" panose="020B0609020101020101" pitchFamily="49" charset="-127"/>
+                <a:ea typeface="D2Coding" panose="020B0609020101020101" pitchFamily="49" charset="-127"/>
+                <a:cs typeface="Segoe UI Light" panose="020B0502040204020203" pitchFamily="34" charset="0"/>
+              </a:rPr>
+              <a:t>검색 증강 생성</a:t>
+            </a:r>
+            <a:r>
+              <a:rPr lang="en-US" altLang="ko-KR" sz="2800" cap="none" dirty="0">
+                <a:solidFill>
+                  <a:schemeClr val="bg2">
+                    <a:lumMod val="25000"/>
+                  </a:schemeClr>
+                </a:solidFill>
+                <a:latin typeface="D2Coding" panose="020B0609020101020101" pitchFamily="49" charset="-127"/>
+                <a:ea typeface="D2Coding" panose="020B0609020101020101" pitchFamily="49" charset="-127"/>
+                <a:cs typeface="Segoe UI Light" panose="020B0502040204020203" pitchFamily="34" charset="0"/>
+              </a:rPr>
+              <a:t>, Retrieval-Augmented Generation)</a:t>
+            </a:r>
+            <a:endParaRPr lang="ko-KR" altLang="en-US" sz="2800" cap="none" dirty="0">
+              <a:solidFill>
+                <a:schemeClr val="bg2">
+                  <a:lumMod val="25000"/>
+                </a:schemeClr>
+              </a:solidFill>
+              <a:latin typeface="D2Coding" panose="020B0609020101020101" pitchFamily="49" charset="-127"/>
+              <a:ea typeface="D2Coding" panose="020B0609020101020101" pitchFamily="49" charset="-127"/>
+              <a:cs typeface="Segoe UI Light" panose="020B0502040204020203" pitchFamily="34" charset="0"/>
+            </a:endParaRPr>
+          </a:p>
+        </p:txBody>
+      </p:sp>
+      <p:sp>
+        <p:nvSpPr>
+          <p:cNvPr id="5" name="TextBox 4">
+            <a:extLst>
+              <a:ext uri="{FF2B5EF4-FFF2-40B4-BE49-F238E27FC236}">
+                <a16:creationId xmlns:a16="http://schemas.microsoft.com/office/drawing/2014/main" id="{C6002052-A2F4-9839-D58F-E585521FDDD2}"/>
+              </a:ext>
+            </a:extLst>
+          </p:cNvPr>
+          <p:cNvSpPr txBox="1"/>
+          <p:nvPr/>
+        </p:nvSpPr>
+        <p:spPr>
+          <a:xfrm>
+            <a:off x="608284" y="1353850"/>
+            <a:ext cx="11021741" cy="4878900"/>
+          </a:xfrm>
+          <a:prstGeom prst="rect">
+            <a:avLst/>
+          </a:prstGeom>
+          <a:noFill/>
+        </p:spPr>
+        <p:txBody>
+          <a:bodyPr wrap="square">
+            <a:spAutoFit/>
+          </a:bodyPr>
+          <a:lstStyle/>
+          <a:p>
+            <a:pPr marL="342900" indent="-342900">
+              <a:lnSpc>
+                <a:spcPct val="150000"/>
+              </a:lnSpc>
+              <a:buFont typeface="+mj-lt"/>
+              <a:buAutoNum type="arabicPeriod"/>
+            </a:pPr>
+            <a:r>
+              <a:rPr lang="en-US" altLang="ko-KR" sz="1600" b="1" dirty="0">
+                <a:latin typeface="D2Coding" panose="020B0609020101020101" pitchFamily="49" charset="-127"/>
+                <a:ea typeface="D2Coding" panose="020B0609020101020101" pitchFamily="49" charset="-127"/>
+              </a:rPr>
+              <a:t>Load (</a:t>
+            </a:r>
+            <a:r>
+              <a:rPr lang="ko-KR" altLang="en-US" sz="1600" b="1" dirty="0">
+                <a:latin typeface="D2Coding" panose="020B0609020101020101" pitchFamily="49" charset="-127"/>
+                <a:ea typeface="D2Coding" panose="020B0609020101020101" pitchFamily="49" charset="-127"/>
+              </a:rPr>
+              <a:t>데이터 불러오기</a:t>
+            </a:r>
+            <a:r>
+              <a:rPr lang="en-US" altLang="ko-KR" sz="1600" b="1" dirty="0">
+                <a:latin typeface="D2Coding" panose="020B0609020101020101" pitchFamily="49" charset="-127"/>
+                <a:ea typeface="D2Coding" panose="020B0609020101020101" pitchFamily="49" charset="-127"/>
+              </a:rPr>
+              <a:t>) : </a:t>
+            </a:r>
+            <a:r>
+              <a:rPr lang="ko-KR" altLang="en-US" sz="1600" dirty="0">
+                <a:latin typeface="D2Coding" panose="020B0609020101020101" pitchFamily="49" charset="-127"/>
+                <a:ea typeface="D2Coding" panose="020B0609020101020101" pitchFamily="49" charset="-127"/>
+              </a:rPr>
+              <a:t>다양한 형태의 원본 데이터</a:t>
+            </a:r>
+            <a:r>
+              <a:rPr lang="en-US" altLang="ko-KR" sz="1600" dirty="0">
+                <a:latin typeface="D2Coding" panose="020B0609020101020101" pitchFamily="49" charset="-127"/>
+                <a:ea typeface="D2Coding" panose="020B0609020101020101" pitchFamily="49" charset="-127"/>
+              </a:rPr>
+              <a:t>(TXT, PDF, </a:t>
+            </a:r>
+            <a:r>
+              <a:rPr lang="ko-KR" altLang="en-US" sz="1600" dirty="0">
+                <a:latin typeface="D2Coding" panose="020B0609020101020101" pitchFamily="49" charset="-127"/>
+                <a:ea typeface="D2Coding" panose="020B0609020101020101" pitchFamily="49" charset="-127"/>
+              </a:rPr>
+              <a:t>웹페이지</a:t>
+            </a:r>
+            <a:r>
+              <a:rPr lang="en-US" altLang="ko-KR" sz="1600" dirty="0">
+                <a:latin typeface="D2Coding" panose="020B0609020101020101" pitchFamily="49" charset="-127"/>
+                <a:ea typeface="D2Coding" panose="020B0609020101020101" pitchFamily="49" charset="-127"/>
+              </a:rPr>
+              <a:t>, </a:t>
+            </a:r>
+            <a:r>
+              <a:rPr lang="ko-KR" altLang="en-US" sz="1600" dirty="0" err="1">
+                <a:latin typeface="D2Coding" panose="020B0609020101020101" pitchFamily="49" charset="-127"/>
+                <a:ea typeface="D2Coding" panose="020B0609020101020101" pitchFamily="49" charset="-127"/>
+              </a:rPr>
+              <a:t>노션</a:t>
+            </a:r>
+            <a:r>
+              <a:rPr lang="ko-KR" altLang="en-US" sz="1600" dirty="0">
+                <a:latin typeface="D2Coding" panose="020B0609020101020101" pitchFamily="49" charset="-127"/>
+                <a:ea typeface="D2Coding" panose="020B0609020101020101" pitchFamily="49" charset="-127"/>
+              </a:rPr>
+              <a:t> 등</a:t>
+            </a:r>
+            <a:r>
+              <a:rPr lang="en-US" altLang="ko-KR" sz="1600" dirty="0">
+                <a:latin typeface="D2Coding" panose="020B0609020101020101" pitchFamily="49" charset="-127"/>
+                <a:ea typeface="D2Coding" panose="020B0609020101020101" pitchFamily="49" charset="-127"/>
+              </a:rPr>
+              <a:t>)</a:t>
+            </a:r>
+            <a:r>
+              <a:rPr lang="ko-KR" altLang="en-US" sz="1600" dirty="0">
+                <a:latin typeface="D2Coding" panose="020B0609020101020101" pitchFamily="49" charset="-127"/>
+                <a:ea typeface="D2Coding" panose="020B0609020101020101" pitchFamily="49" charset="-127"/>
+              </a:rPr>
+              <a:t>를 시스템이 이해할 수 있는 공통 규격인 </a:t>
+            </a:r>
+            <a:r>
+              <a:rPr lang="en-US" altLang="ko-KR" sz="1600" dirty="0">
+                <a:latin typeface="D2Coding" panose="020B0609020101020101" pitchFamily="49" charset="-127"/>
+                <a:ea typeface="D2Coding" panose="020B0609020101020101" pitchFamily="49" charset="-127"/>
+              </a:rPr>
+              <a:t>Document </a:t>
+            </a:r>
+            <a:r>
+              <a:rPr lang="ko-KR" altLang="en-US" sz="1600" dirty="0">
+                <a:latin typeface="D2Coding" panose="020B0609020101020101" pitchFamily="49" charset="-127"/>
+                <a:ea typeface="D2Coding" panose="020B0609020101020101" pitchFamily="49" charset="-127"/>
+              </a:rPr>
+              <a:t>객체로 변환하는 단계 </a:t>
+            </a:r>
+            <a:r>
+              <a:rPr lang="en-US" altLang="ko-KR" sz="1600" dirty="0">
+                <a:latin typeface="D2Coding" panose="020B0609020101020101" pitchFamily="49" charset="-127"/>
+                <a:ea typeface="D2Coding" panose="020B0609020101020101" pitchFamily="49" charset="-127"/>
+                <a:sym typeface="Wingdings" panose="05000000000000000000" pitchFamily="2" charset="2"/>
+              </a:rPr>
+              <a:t></a:t>
+            </a:r>
+            <a:r>
+              <a:rPr lang="ko-KR" altLang="en-US" sz="1600" dirty="0">
+                <a:latin typeface="D2Coding" panose="020B0609020101020101" pitchFamily="49" charset="-127"/>
+                <a:ea typeface="D2Coding" panose="020B0609020101020101" pitchFamily="49" charset="-127"/>
+              </a:rPr>
+              <a:t> </a:t>
+            </a:r>
+            <a:r>
+              <a:rPr lang="en-US" altLang="ko-KR" sz="1600" dirty="0" err="1">
+                <a:latin typeface="D2Coding" panose="020B0609020101020101" pitchFamily="49" charset="-127"/>
+                <a:ea typeface="D2Coding" panose="020B0609020101020101" pitchFamily="49" charset="-127"/>
+              </a:rPr>
+              <a:t>TextLoader</a:t>
+            </a:r>
+            <a:r>
+              <a:rPr lang="en-US" altLang="ko-KR" sz="1600" dirty="0">
+                <a:latin typeface="D2Coding" panose="020B0609020101020101" pitchFamily="49" charset="-127"/>
+                <a:ea typeface="D2Coding" panose="020B0609020101020101" pitchFamily="49" charset="-127"/>
+              </a:rPr>
+              <a:t>()</a:t>
+            </a:r>
+          </a:p>
+          <a:p>
+            <a:pPr marL="342900" indent="-342900">
+              <a:lnSpc>
+                <a:spcPct val="150000"/>
+              </a:lnSpc>
+              <a:buFont typeface="+mj-lt"/>
+              <a:buAutoNum type="arabicPeriod"/>
+            </a:pPr>
+            <a:endParaRPr lang="en-US" altLang="ko-KR" sz="1100" dirty="0">
+              <a:latin typeface="D2Coding" panose="020B0609020101020101" pitchFamily="49" charset="-127"/>
+              <a:ea typeface="D2Coding" panose="020B0609020101020101" pitchFamily="49" charset="-127"/>
+            </a:endParaRPr>
+          </a:p>
+          <a:p>
+            <a:pPr marL="342900" indent="-342900">
+              <a:lnSpc>
+                <a:spcPct val="150000"/>
+              </a:lnSpc>
+              <a:buFont typeface="+mj-lt"/>
+              <a:buAutoNum type="arabicPeriod"/>
+            </a:pPr>
+            <a:r>
+              <a:rPr lang="en-US" altLang="ko-KR" sz="1600" b="1" dirty="0">
+                <a:latin typeface="D2Coding" panose="020B0609020101020101" pitchFamily="49" charset="-127"/>
+                <a:ea typeface="D2Coding" panose="020B0609020101020101" pitchFamily="49" charset="-127"/>
+              </a:rPr>
+              <a:t>Split (</a:t>
+            </a:r>
+            <a:r>
+              <a:rPr lang="ko-KR" altLang="en-US" sz="1600" b="1" dirty="0">
+                <a:latin typeface="D2Coding" panose="020B0609020101020101" pitchFamily="49" charset="-127"/>
+                <a:ea typeface="D2Coding" panose="020B0609020101020101" pitchFamily="49" charset="-127"/>
+              </a:rPr>
+              <a:t>텍스트 분할하기</a:t>
+            </a:r>
+            <a:r>
+              <a:rPr lang="en-US" altLang="ko-KR" sz="1600" b="1" dirty="0">
+                <a:latin typeface="D2Coding" panose="020B0609020101020101" pitchFamily="49" charset="-127"/>
+                <a:ea typeface="D2Coding" panose="020B0609020101020101" pitchFamily="49" charset="-127"/>
+              </a:rPr>
+              <a:t>) : </a:t>
+            </a:r>
+            <a:r>
+              <a:rPr lang="ko-KR" altLang="en-US" sz="1600" dirty="0">
+                <a:latin typeface="D2Coding" panose="020B0609020101020101" pitchFamily="49" charset="-127"/>
+                <a:ea typeface="D2Coding" panose="020B0609020101020101" pitchFamily="49" charset="-127"/>
+              </a:rPr>
+              <a:t>거대한 문서를 작은 조각</a:t>
+            </a:r>
+            <a:r>
+              <a:rPr lang="en-US" altLang="ko-KR" sz="1600" dirty="0">
+                <a:latin typeface="D2Coding" panose="020B0609020101020101" pitchFamily="49" charset="-127"/>
+                <a:ea typeface="D2Coding" panose="020B0609020101020101" pitchFamily="49" charset="-127"/>
+              </a:rPr>
+              <a:t>(Chunk)</a:t>
+            </a:r>
+            <a:r>
+              <a:rPr lang="ko-KR" altLang="en-US" sz="1600" dirty="0">
+                <a:latin typeface="D2Coding" panose="020B0609020101020101" pitchFamily="49" charset="-127"/>
+                <a:ea typeface="D2Coding" panose="020B0609020101020101" pitchFamily="49" charset="-127"/>
+              </a:rPr>
+              <a:t>으로 잘게 </a:t>
+            </a:r>
+            <a:r>
+              <a:rPr lang="ko-KR" altLang="en-US" sz="1600" dirty="0" err="1">
+                <a:latin typeface="D2Coding" panose="020B0609020101020101" pitchFamily="49" charset="-127"/>
+                <a:ea typeface="D2Coding" panose="020B0609020101020101" pitchFamily="49" charset="-127"/>
+              </a:rPr>
+              <a:t>쪼깨는</a:t>
+            </a:r>
+            <a:r>
+              <a:rPr lang="ko-KR" altLang="en-US" sz="1600" dirty="0">
+                <a:latin typeface="D2Coding" panose="020B0609020101020101" pitchFamily="49" charset="-127"/>
+                <a:ea typeface="D2Coding" panose="020B0609020101020101" pitchFamily="49" charset="-127"/>
+              </a:rPr>
+              <a:t> 단계로 </a:t>
+            </a:r>
+            <a:r>
+              <a:rPr lang="en-US" altLang="ko-KR" sz="1600" dirty="0">
+                <a:latin typeface="D2Coding" panose="020B0609020101020101" pitchFamily="49" charset="-127"/>
+                <a:ea typeface="D2Coding" panose="020B0609020101020101" pitchFamily="49" charset="-127"/>
+              </a:rPr>
+              <a:t>AI </a:t>
+            </a:r>
+            <a:r>
+              <a:rPr lang="ko-KR" altLang="en-US" sz="1600" dirty="0">
+                <a:latin typeface="D2Coding" panose="020B0609020101020101" pitchFamily="49" charset="-127"/>
+                <a:ea typeface="D2Coding" panose="020B0609020101020101" pitchFamily="49" charset="-127"/>
+              </a:rPr>
+              <a:t>모델</a:t>
+            </a:r>
+            <a:r>
+              <a:rPr lang="en-US" altLang="ko-KR" sz="1600" dirty="0">
+                <a:latin typeface="D2Coding" panose="020B0609020101020101" pitchFamily="49" charset="-127"/>
+                <a:ea typeface="D2Coding" panose="020B0609020101020101" pitchFamily="49" charset="-127"/>
+              </a:rPr>
+              <a:t>(LLM)</a:t>
+            </a:r>
+            <a:r>
+              <a:rPr lang="ko-KR" altLang="en-US" sz="1600" dirty="0">
+                <a:latin typeface="D2Coding" panose="020B0609020101020101" pitchFamily="49" charset="-127"/>
+                <a:ea typeface="D2Coding" panose="020B0609020101020101" pitchFamily="49" charset="-127"/>
+              </a:rPr>
+              <a:t>이 한 번에 읽을 수 있는 글자 수 제한</a:t>
+            </a:r>
+            <a:r>
+              <a:rPr lang="en-US" altLang="ko-KR" sz="1600" dirty="0">
+                <a:latin typeface="D2Coding" panose="020B0609020101020101" pitchFamily="49" charset="-127"/>
+                <a:ea typeface="D2Coding" panose="020B0609020101020101" pitchFamily="49" charset="-127"/>
+              </a:rPr>
+              <a:t>(Context Window)</a:t>
+            </a:r>
+            <a:r>
+              <a:rPr lang="ko-KR" altLang="en-US" sz="1600" dirty="0">
+                <a:latin typeface="D2Coding" panose="020B0609020101020101" pitchFamily="49" charset="-127"/>
+                <a:ea typeface="D2Coding" panose="020B0609020101020101" pitchFamily="49" charset="-127"/>
+              </a:rPr>
+              <a:t>을 초과하거나 불필요한 비용</a:t>
+            </a:r>
+            <a:r>
+              <a:rPr lang="en-US" altLang="ko-KR" sz="1600" dirty="0">
+                <a:latin typeface="D2Coding" panose="020B0609020101020101" pitchFamily="49" charset="-127"/>
+                <a:ea typeface="D2Coding" panose="020B0609020101020101" pitchFamily="49" charset="-127"/>
+              </a:rPr>
+              <a:t>(Token)</a:t>
+            </a:r>
+            <a:r>
+              <a:rPr lang="ko-KR" altLang="en-US" sz="1600" dirty="0">
+                <a:latin typeface="D2Coding" panose="020B0609020101020101" pitchFamily="49" charset="-127"/>
+                <a:ea typeface="D2Coding" panose="020B0609020101020101" pitchFamily="49" charset="-127"/>
+              </a:rPr>
+              <a:t>을 낭비하게 만들기 때문</a:t>
+            </a:r>
+            <a:r>
+              <a:rPr lang="en-US" altLang="ko-KR" sz="1600" dirty="0">
+                <a:latin typeface="D2Coding" panose="020B0609020101020101" pitchFamily="49" charset="-127"/>
+                <a:ea typeface="D2Coding" panose="020B0609020101020101" pitchFamily="49" charset="-127"/>
+              </a:rPr>
+              <a:t> </a:t>
+            </a:r>
+            <a:r>
+              <a:rPr lang="en-US" altLang="ko-KR" sz="1600" dirty="0">
+                <a:latin typeface="D2Coding" panose="020B0609020101020101" pitchFamily="49" charset="-127"/>
+                <a:ea typeface="D2Coding" panose="020B0609020101020101" pitchFamily="49" charset="-127"/>
+                <a:sym typeface="Wingdings" panose="05000000000000000000" pitchFamily="2" charset="2"/>
+              </a:rPr>
+              <a:t> </a:t>
+            </a:r>
+            <a:r>
+              <a:rPr lang="en-US" altLang="ko-KR" sz="1600" dirty="0" err="1">
+                <a:latin typeface="D2Coding" panose="020B0609020101020101" pitchFamily="49" charset="-127"/>
+                <a:ea typeface="D2Coding" panose="020B0609020101020101" pitchFamily="49" charset="-127"/>
+              </a:rPr>
+              <a:t>RecursiveCharacterTextSplitter</a:t>
+            </a:r>
+            <a:r>
+              <a:rPr lang="en-US" altLang="ko-KR" sz="1600" dirty="0">
+                <a:latin typeface="D2Coding" panose="020B0609020101020101" pitchFamily="49" charset="-127"/>
+                <a:ea typeface="D2Coding" panose="020B0609020101020101" pitchFamily="49" charset="-127"/>
+              </a:rPr>
+              <a:t>()</a:t>
+            </a:r>
+          </a:p>
+          <a:p>
+            <a:pPr marL="342900" indent="-342900">
+              <a:lnSpc>
+                <a:spcPct val="150000"/>
+              </a:lnSpc>
+              <a:buFont typeface="+mj-lt"/>
+              <a:buAutoNum type="arabicPeriod"/>
+            </a:pPr>
+            <a:endParaRPr lang="en-US" altLang="ko-KR" sz="1100" dirty="0">
+              <a:latin typeface="D2Coding" panose="020B0609020101020101" pitchFamily="49" charset="-127"/>
+              <a:ea typeface="D2Coding" panose="020B0609020101020101" pitchFamily="49" charset="-127"/>
+            </a:endParaRPr>
+          </a:p>
+          <a:p>
+            <a:pPr marL="342900" indent="-342900">
+              <a:lnSpc>
+                <a:spcPct val="150000"/>
+              </a:lnSpc>
+              <a:buFont typeface="+mj-lt"/>
+              <a:buAutoNum type="arabicPeriod"/>
+            </a:pPr>
+            <a:r>
+              <a:rPr lang="en-US" altLang="ko-KR" sz="1600" b="1" dirty="0">
+                <a:latin typeface="D2Coding" panose="020B0609020101020101" pitchFamily="49" charset="-127"/>
+                <a:ea typeface="D2Coding" panose="020B0609020101020101" pitchFamily="49" charset="-127"/>
+              </a:rPr>
+              <a:t>Embed (</a:t>
+            </a:r>
+            <a:r>
+              <a:rPr lang="ko-KR" altLang="en-US" sz="1600" b="1" dirty="0">
+                <a:latin typeface="D2Coding" panose="020B0609020101020101" pitchFamily="49" charset="-127"/>
+                <a:ea typeface="D2Coding" panose="020B0609020101020101" pitchFamily="49" charset="-127"/>
+              </a:rPr>
+              <a:t>의미를 숫자로 바꾸기</a:t>
+            </a:r>
+            <a:r>
+              <a:rPr lang="en-US" altLang="ko-KR" sz="1600" b="1" dirty="0">
+                <a:latin typeface="D2Coding" panose="020B0609020101020101" pitchFamily="49" charset="-127"/>
+                <a:ea typeface="D2Coding" panose="020B0609020101020101" pitchFamily="49" charset="-127"/>
+              </a:rPr>
+              <a:t>) : </a:t>
+            </a:r>
+            <a:r>
+              <a:rPr lang="ko-KR" altLang="en-US" sz="1600" dirty="0">
+                <a:latin typeface="D2Coding" panose="020B0609020101020101" pitchFamily="49" charset="-127"/>
+                <a:ea typeface="D2Coding" panose="020B0609020101020101" pitchFamily="49" charset="-127"/>
+              </a:rPr>
+              <a:t>쪼갠 글자 조각들을 컴퓨터가 연산할 수 있는 방향성 숫자 배열</a:t>
+            </a:r>
+            <a:r>
+              <a:rPr lang="en-US" altLang="ko-KR" sz="1600" dirty="0">
+                <a:latin typeface="D2Coding" panose="020B0609020101020101" pitchFamily="49" charset="-127"/>
+                <a:ea typeface="D2Coding" panose="020B0609020101020101" pitchFamily="49" charset="-127"/>
+              </a:rPr>
+              <a:t>(Numeric Vector)</a:t>
+            </a:r>
+            <a:r>
+              <a:rPr lang="ko-KR" altLang="en-US" sz="1600" dirty="0">
+                <a:latin typeface="D2Coding" panose="020B0609020101020101" pitchFamily="49" charset="-127"/>
+                <a:ea typeface="D2Coding" panose="020B0609020101020101" pitchFamily="49" charset="-127"/>
+              </a:rPr>
+              <a:t>로 변환하면 이 숫자들이 </a:t>
+            </a:r>
+            <a:r>
+              <a:rPr lang="en-US" altLang="ko-KR" sz="1600" dirty="0">
+                <a:latin typeface="D2Coding" panose="020B0609020101020101" pitchFamily="49" charset="-127"/>
+                <a:ea typeface="D2Coding" panose="020B0609020101020101" pitchFamily="49" charset="-127"/>
+              </a:rPr>
+              <a:t>'</a:t>
+            </a:r>
+            <a:r>
+              <a:rPr lang="ko-KR" altLang="en-US" sz="1600" dirty="0">
+                <a:latin typeface="D2Coding" panose="020B0609020101020101" pitchFamily="49" charset="-127"/>
+                <a:ea typeface="D2Coding" panose="020B0609020101020101" pitchFamily="49" charset="-127"/>
+              </a:rPr>
+              <a:t>진짜 의미</a:t>
+            </a:r>
+            <a:r>
+              <a:rPr lang="en-US" altLang="ko-KR" sz="1600" dirty="0">
+                <a:latin typeface="D2Coding" panose="020B0609020101020101" pitchFamily="49" charset="-127"/>
+                <a:ea typeface="D2Coding" panose="020B0609020101020101" pitchFamily="49" charset="-127"/>
+              </a:rPr>
+              <a:t>(Context)'</a:t>
+            </a:r>
+            <a:r>
+              <a:rPr lang="ko-KR" altLang="en-US" sz="1600" dirty="0">
+                <a:latin typeface="D2Coding" panose="020B0609020101020101" pitchFamily="49" charset="-127"/>
+                <a:ea typeface="D2Coding" panose="020B0609020101020101" pitchFamily="49" charset="-127"/>
+              </a:rPr>
+              <a:t>를 가지게 되어 유사도 검색이 가능 </a:t>
+            </a:r>
+            <a:r>
+              <a:rPr lang="en-US" altLang="ko-KR" sz="1600" dirty="0">
+                <a:latin typeface="D2Coding" panose="020B0609020101020101" pitchFamily="49" charset="-127"/>
+                <a:ea typeface="D2Coding" panose="020B0609020101020101" pitchFamily="49" charset="-127"/>
+                <a:sym typeface="Wingdings" panose="05000000000000000000" pitchFamily="2" charset="2"/>
+              </a:rPr>
+              <a:t> </a:t>
+            </a:r>
+            <a:r>
+              <a:rPr lang="ko-KR" altLang="en-US" sz="1600" dirty="0">
+                <a:latin typeface="D2Coding" panose="020B0609020101020101" pitchFamily="49" charset="-127"/>
+                <a:ea typeface="D2Coding" panose="020B0609020101020101" pitchFamily="49" charset="-127"/>
+              </a:rPr>
+              <a:t> </a:t>
+            </a:r>
+            <a:r>
+              <a:rPr lang="en-US" altLang="ko-KR" sz="1600" dirty="0" err="1">
+                <a:latin typeface="D2Coding" panose="020B0609020101020101" pitchFamily="49" charset="-127"/>
+                <a:ea typeface="D2Coding" panose="020B0609020101020101" pitchFamily="49" charset="-127"/>
+              </a:rPr>
+              <a:t>HuggingFaceEmbeddings</a:t>
+            </a:r>
+            <a:r>
+              <a:rPr lang="en-US" altLang="ko-KR" sz="1600" dirty="0">
+                <a:latin typeface="D2Coding" panose="020B0609020101020101" pitchFamily="49" charset="-127"/>
+                <a:ea typeface="D2Coding" panose="020B0609020101020101" pitchFamily="49" charset="-127"/>
+              </a:rPr>
+              <a:t> </a:t>
+            </a:r>
+            <a:r>
+              <a:rPr lang="ko-KR" altLang="en-US" sz="1600" dirty="0">
+                <a:latin typeface="D2Coding" panose="020B0609020101020101" pitchFamily="49" charset="-127"/>
+                <a:ea typeface="D2Coding" panose="020B0609020101020101" pitchFamily="49" charset="-127"/>
+              </a:rPr>
+              <a:t>모델</a:t>
+            </a:r>
+            <a:r>
+              <a:rPr lang="en-US" altLang="ko-KR" sz="1600" dirty="0">
+                <a:latin typeface="D2Coding" panose="020B0609020101020101" pitchFamily="49" charset="-127"/>
+                <a:ea typeface="D2Coding" panose="020B0609020101020101" pitchFamily="49" charset="-127"/>
+              </a:rPr>
+              <a:t>(all-MiniLM-L6-v2)</a:t>
+            </a:r>
+            <a:r>
+              <a:rPr lang="ko-KR" altLang="en-US" sz="1600" dirty="0">
+                <a:latin typeface="D2Coding" panose="020B0609020101020101" pitchFamily="49" charset="-127"/>
+                <a:ea typeface="D2Coding" panose="020B0609020101020101" pitchFamily="49" charset="-127"/>
+              </a:rPr>
+              <a:t>으로 글자 조각들을 </a:t>
+            </a:r>
+            <a:r>
+              <a:rPr lang="en-US" altLang="ko-KR" sz="1600" dirty="0">
+                <a:latin typeface="D2Coding" panose="020B0609020101020101" pitchFamily="49" charset="-127"/>
+                <a:ea typeface="D2Coding" panose="020B0609020101020101" pitchFamily="49" charset="-127"/>
+              </a:rPr>
+              <a:t>384</a:t>
+            </a:r>
+            <a:r>
+              <a:rPr lang="ko-KR" altLang="en-US" sz="1600" dirty="0">
+                <a:latin typeface="D2Coding" panose="020B0609020101020101" pitchFamily="49" charset="-127"/>
+                <a:ea typeface="D2Coding" panose="020B0609020101020101" pitchFamily="49" charset="-127"/>
+              </a:rPr>
+              <a:t>차원 수자로 변환</a:t>
+            </a:r>
+            <a:endParaRPr lang="en-US" altLang="ko-KR" sz="1600" dirty="0">
+              <a:latin typeface="D2Coding" panose="020B0609020101020101" pitchFamily="49" charset="-127"/>
+              <a:ea typeface="D2Coding" panose="020B0609020101020101" pitchFamily="49" charset="-127"/>
+            </a:endParaRPr>
+          </a:p>
+          <a:p>
+            <a:pPr marL="342900" indent="-342900">
+              <a:lnSpc>
+                <a:spcPct val="150000"/>
+              </a:lnSpc>
+              <a:buFont typeface="+mj-lt"/>
+              <a:buAutoNum type="arabicPeriod"/>
+            </a:pPr>
+            <a:endParaRPr lang="en-US" altLang="ko-KR" sz="1100" dirty="0">
+              <a:latin typeface="D2Coding" panose="020B0609020101020101" pitchFamily="49" charset="-127"/>
+              <a:ea typeface="D2Coding" panose="020B0609020101020101" pitchFamily="49" charset="-127"/>
+            </a:endParaRPr>
+          </a:p>
+          <a:p>
+            <a:pPr marL="342900" indent="-342900">
+              <a:lnSpc>
+                <a:spcPct val="150000"/>
+              </a:lnSpc>
+              <a:buFont typeface="+mj-lt"/>
+              <a:buAutoNum type="arabicPeriod"/>
+            </a:pPr>
+            <a:r>
+              <a:rPr lang="en-US" altLang="ko-KR" sz="1600" b="1" dirty="0">
+                <a:latin typeface="D2Coding" panose="020B0609020101020101" pitchFamily="49" charset="-127"/>
+                <a:ea typeface="D2Coding" panose="020B0609020101020101" pitchFamily="49" charset="-127"/>
+              </a:rPr>
+              <a:t>Store (</a:t>
+            </a:r>
+            <a:r>
+              <a:rPr lang="ko-KR" altLang="en-US" sz="1600" b="1" dirty="0">
+                <a:latin typeface="D2Coding" panose="020B0609020101020101" pitchFamily="49" charset="-127"/>
+                <a:ea typeface="D2Coding" panose="020B0609020101020101" pitchFamily="49" charset="-127"/>
+              </a:rPr>
+              <a:t>창고에 저장하기</a:t>
+            </a:r>
+            <a:r>
+              <a:rPr lang="en-US" altLang="ko-KR" sz="1600" b="1" dirty="0">
+                <a:latin typeface="D2Coding" panose="020B0609020101020101" pitchFamily="49" charset="-127"/>
+                <a:ea typeface="D2Coding" panose="020B0609020101020101" pitchFamily="49" charset="-127"/>
+              </a:rPr>
+              <a:t>):</a:t>
+            </a:r>
+            <a:r>
+              <a:rPr lang="en-US" altLang="ko-KR" sz="1600" dirty="0">
+                <a:latin typeface="D2Coding" panose="020B0609020101020101" pitchFamily="49" charset="-127"/>
+                <a:ea typeface="D2Coding" panose="020B0609020101020101" pitchFamily="49" charset="-127"/>
+              </a:rPr>
+              <a:t> </a:t>
+            </a:r>
+            <a:r>
+              <a:rPr lang="ko-KR" altLang="en-US" sz="1600" dirty="0">
+                <a:latin typeface="D2Coding" panose="020B0609020101020101" pitchFamily="49" charset="-127"/>
+                <a:ea typeface="D2Coding" panose="020B0609020101020101" pitchFamily="49" charset="-127"/>
+              </a:rPr>
+              <a:t>변환된 글자 조각들과 그에 대응하는 숫자</a:t>
+            </a:r>
+            <a:r>
+              <a:rPr lang="en-US" altLang="ko-KR" sz="1600" dirty="0">
+                <a:latin typeface="D2Coding" panose="020B0609020101020101" pitchFamily="49" charset="-127"/>
+                <a:ea typeface="D2Coding" panose="020B0609020101020101" pitchFamily="49" charset="-127"/>
+              </a:rPr>
+              <a:t>(</a:t>
+            </a:r>
+            <a:r>
+              <a:rPr lang="ko-KR" altLang="en-US" sz="1600" dirty="0" err="1">
+                <a:latin typeface="D2Coding" panose="020B0609020101020101" pitchFamily="49" charset="-127"/>
+                <a:ea typeface="D2Coding" panose="020B0609020101020101" pitchFamily="49" charset="-127"/>
+              </a:rPr>
+              <a:t>임베딩</a:t>
+            </a:r>
+            <a:r>
+              <a:rPr lang="ko-KR" altLang="en-US" sz="1600" dirty="0">
+                <a:latin typeface="D2Coding" panose="020B0609020101020101" pitchFamily="49" charset="-127"/>
+                <a:ea typeface="D2Coding" panose="020B0609020101020101" pitchFamily="49" charset="-127"/>
+              </a:rPr>
+              <a:t> 벡터</a:t>
+            </a:r>
+            <a:r>
+              <a:rPr lang="en-US" altLang="ko-KR" sz="1600" dirty="0">
+                <a:latin typeface="D2Coding" panose="020B0609020101020101" pitchFamily="49" charset="-127"/>
+                <a:ea typeface="D2Coding" panose="020B0609020101020101" pitchFamily="49" charset="-127"/>
+              </a:rPr>
+              <a:t>)</a:t>
+            </a:r>
+            <a:r>
+              <a:rPr lang="ko-KR" altLang="en-US" sz="1600" dirty="0">
+                <a:latin typeface="D2Coding" panose="020B0609020101020101" pitchFamily="49" charset="-127"/>
+                <a:ea typeface="D2Coding" panose="020B0609020101020101" pitchFamily="49" charset="-127"/>
+              </a:rPr>
+              <a:t>들을 나중에 언제든 꺼내 쓸 수 있도록 벡터 저장소</a:t>
+            </a:r>
+            <a:r>
+              <a:rPr lang="en-US" altLang="ko-KR" sz="1600" dirty="0">
+                <a:latin typeface="D2Coding" panose="020B0609020101020101" pitchFamily="49" charset="-127"/>
+                <a:ea typeface="D2Coding" panose="020B0609020101020101" pitchFamily="49" charset="-127"/>
+              </a:rPr>
+              <a:t>(</a:t>
+            </a:r>
+            <a:r>
+              <a:rPr lang="en-US" altLang="ko-KR" sz="1600" dirty="0" err="1">
+                <a:latin typeface="D2Coding" panose="020B0609020101020101" pitchFamily="49" charset="-127"/>
+                <a:ea typeface="D2Coding" panose="020B0609020101020101" pitchFamily="49" charset="-127"/>
+              </a:rPr>
+              <a:t>VectorStore</a:t>
+            </a:r>
+            <a:r>
+              <a:rPr lang="en-US" altLang="ko-KR" sz="1600" dirty="0">
+                <a:latin typeface="D2Coding" panose="020B0609020101020101" pitchFamily="49" charset="-127"/>
+                <a:ea typeface="D2Coding" panose="020B0609020101020101" pitchFamily="49" charset="-127"/>
+              </a:rPr>
+              <a:t>)</a:t>
+            </a:r>
+            <a:r>
+              <a:rPr lang="ko-KR" altLang="en-US" sz="1600" dirty="0">
+                <a:latin typeface="D2Coding" panose="020B0609020101020101" pitchFamily="49" charset="-127"/>
+                <a:ea typeface="D2Coding" panose="020B0609020101020101" pitchFamily="49" charset="-127"/>
+              </a:rPr>
+              <a:t>에 인덱싱하여 안전하게 보관하는 단계</a:t>
+            </a:r>
+            <a:r>
+              <a:rPr lang="en-US" altLang="ko-KR" sz="1600" dirty="0">
+                <a:latin typeface="D2Coding" panose="020B0609020101020101" pitchFamily="49" charset="-127"/>
+                <a:ea typeface="D2Coding" panose="020B0609020101020101" pitchFamily="49" charset="-127"/>
+              </a:rPr>
+              <a:t> </a:t>
+            </a:r>
+            <a:r>
+              <a:rPr lang="en-US" altLang="ko-KR" sz="1600" dirty="0">
+                <a:latin typeface="D2Coding" panose="020B0609020101020101" pitchFamily="49" charset="-127"/>
+                <a:ea typeface="D2Coding" panose="020B0609020101020101" pitchFamily="49" charset="-127"/>
+                <a:sym typeface="Wingdings" panose="05000000000000000000" pitchFamily="2" charset="2"/>
+              </a:rPr>
+              <a:t> </a:t>
+            </a:r>
+            <a:r>
+              <a:rPr lang="ko-KR" altLang="en-US" sz="1600" dirty="0">
+                <a:latin typeface="D2Coding" panose="020B0609020101020101" pitchFamily="49" charset="-127"/>
+                <a:ea typeface="D2Coding" panose="020B0609020101020101" pitchFamily="49" charset="-127"/>
+              </a:rPr>
+              <a:t>클라우드에 </a:t>
+            </a:r>
+            <a:r>
+              <a:rPr lang="en-US" altLang="ko-KR" sz="1600" dirty="0">
+                <a:latin typeface="D2Coding" panose="020B0609020101020101" pitchFamily="49" charset="-127"/>
+                <a:ea typeface="D2Coding" panose="020B0609020101020101" pitchFamily="49" charset="-127"/>
+              </a:rPr>
+              <a:t>documents </a:t>
+            </a:r>
+            <a:r>
+              <a:rPr lang="ko-KR" altLang="en-US" sz="1600" dirty="0">
+                <a:latin typeface="D2Coding" panose="020B0609020101020101" pitchFamily="49" charset="-127"/>
+                <a:ea typeface="D2Coding" panose="020B0609020101020101" pitchFamily="49" charset="-127"/>
+              </a:rPr>
+              <a:t>테이블을 만들고 </a:t>
+            </a:r>
+            <a:r>
+              <a:rPr lang="en-US" altLang="ko-KR" sz="1600" dirty="0" err="1">
+                <a:latin typeface="D2Coding" panose="020B0609020101020101" pitchFamily="49" charset="-127"/>
+                <a:ea typeface="D2Coding" panose="020B0609020101020101" pitchFamily="49" charset="-127"/>
+              </a:rPr>
+              <a:t>SupabaseVectorStore.from_documents</a:t>
+            </a:r>
+            <a:r>
+              <a:rPr lang="en-US" altLang="ko-KR" sz="1600" dirty="0">
+                <a:latin typeface="D2Coding" panose="020B0609020101020101" pitchFamily="49" charset="-127"/>
+                <a:ea typeface="D2Coding" panose="020B0609020101020101" pitchFamily="49" charset="-127"/>
+              </a:rPr>
+              <a:t>(...)</a:t>
+            </a:r>
+          </a:p>
+        </p:txBody>
+      </p:sp>
+    </p:spTree>
+    <p:extLst>
+      <p:ext uri="{BB962C8B-B14F-4D97-AF65-F5344CB8AC3E}">
+        <p14:creationId xmlns:p14="http://schemas.microsoft.com/office/powerpoint/2010/main" val="2273456986"/>
+      </p:ext>
+    </p:extLst>
+  </p:cSld>
+  <p:clrMapOvr>
+    <a:masterClrMapping/>
+  </p:clrMapOvr>
+</p:sld>
+</file>
+
+<file path=ppt/slides/slide17.xml><?xml version="1.0" encoding="utf-8"?>
+<p:sld xmlns:a="http://schemas.openxmlformats.org/drawingml/2006/main" xmlns:r="http://schemas.openxmlformats.org/officeDocument/2006/relationships" xmlns:p="http://schemas.openxmlformats.org/presentationml/2006/main">
+  <p:cSld>
+    <p:spTree>
+      <p:nvGrpSpPr>
+        <p:cNvPr id="1" name="">
+          <a:extLst>
+            <a:ext uri="{FF2B5EF4-FFF2-40B4-BE49-F238E27FC236}">
+              <a16:creationId xmlns:a16="http://schemas.microsoft.com/office/drawing/2014/main" id="{CE7F842C-9CAC-38E6-8FD9-D5DA947DEBB5}"/>
+            </a:ext>
+          </a:extLst>
+        </p:cNvPr>
+        <p:cNvGrpSpPr/>
+        <p:nvPr/>
+      </p:nvGrpSpPr>
+      <p:grpSpPr>
+        <a:xfrm>
+          <a:off x="0" y="0"/>
+          <a:ext cx="0" cy="0"/>
+          <a:chOff x="0" y="0"/>
+          <a:chExt cx="0" cy="0"/>
+        </a:xfrm>
+      </p:grpSpPr>
+      <p:sp>
+        <p:nvSpPr>
+          <p:cNvPr id="4" name="슬라이드 번호 개체 틀 3">
+            <a:extLst>
+              <a:ext uri="{FF2B5EF4-FFF2-40B4-BE49-F238E27FC236}">
+                <a16:creationId xmlns:a16="http://schemas.microsoft.com/office/drawing/2014/main" id="{A7EE8165-43B8-DA8C-46DF-D26611C00B68}"/>
+              </a:ext>
+            </a:extLst>
+          </p:cNvPr>
+          <p:cNvSpPr>
+            <a:spLocks noGrp="1"/>
+          </p:cNvSpPr>
+          <p:nvPr>
+            <p:ph type="sldNum" sz="quarter" idx="12"/>
+          </p:nvPr>
+        </p:nvSpPr>
+        <p:spPr>
+          <a:xfrm>
+            <a:off x="10514011" y="6036261"/>
+            <a:ext cx="753545" cy="365125"/>
+          </a:xfrm>
+        </p:spPr>
+        <p:txBody>
+          <a:bodyPr/>
+          <a:lstStyle/>
+          <a:p>
+            <a:fld id="{D57F1E4F-1CFF-5643-939E-217C01CDF565}" type="slidenum">
+              <a:rPr lang="en-US" smtClean="0"/>
+              <a:pPr/>
+              <a:t>17</a:t>
+            </a:fld>
+            <a:endParaRPr lang="en-US" dirty="0"/>
+          </a:p>
+        </p:txBody>
+      </p:sp>
+      <p:sp>
+        <p:nvSpPr>
+          <p:cNvPr id="3" name="제목 1">
+            <a:extLst>
+              <a:ext uri="{FF2B5EF4-FFF2-40B4-BE49-F238E27FC236}">
+                <a16:creationId xmlns:a16="http://schemas.microsoft.com/office/drawing/2014/main" id="{C243947F-3B13-B412-B1A4-2AFBF67B6C15}"/>
+              </a:ext>
+            </a:extLst>
+          </p:cNvPr>
+          <p:cNvSpPr txBox="1">
+            <a:spLocks/>
+          </p:cNvSpPr>
+          <p:nvPr/>
+        </p:nvSpPr>
+        <p:spPr>
+          <a:xfrm>
+            <a:off x="475645" y="481983"/>
+            <a:ext cx="10353762" cy="766439"/>
+          </a:xfrm>
+          <a:prstGeom prst="rect">
+            <a:avLst/>
+          </a:prstGeom>
+        </p:spPr>
+        <p:txBody>
+          <a:bodyPr vert="horz" lIns="91440" tIns="45720" rIns="91440" bIns="45720" rtlCol="0" anchor="ctr">
+            <a:normAutofit/>
+          </a:bodyPr>
+          <a:lstStyle>
+            <a:lvl1pPr algn="ctr" defTabSz="914400" rtl="0" eaLnBrk="1" latinLnBrk="1" hangingPunct="1">
+              <a:lnSpc>
+                <a:spcPct val="90000"/>
+              </a:lnSpc>
+              <a:spcBef>
+                <a:spcPct val="0"/>
+              </a:spcBef>
+              <a:buNone/>
+              <a:defRPr sz="3200" kern="1200" cap="all" baseline="0">
+                <a:solidFill>
+                  <a:schemeClr val="tx1"/>
+                </a:solidFill>
+                <a:effectLst/>
+                <a:latin typeface="Batang" panose="02030600000101010101" pitchFamily="18" charset="-127"/>
+                <a:ea typeface="Batang" panose="02030600000101010101" pitchFamily="18" charset="-127"/>
+                <a:cs typeface="+mj-cs"/>
+              </a:defRPr>
+            </a:lvl1pPr>
+          </a:lstStyle>
+          <a:p>
+            <a:pPr algn="l"/>
+            <a:r>
+              <a:rPr lang="en-US" altLang="ko-KR" sz="2800" cap="none" dirty="0">
+                <a:solidFill>
+                  <a:schemeClr val="bg2">
+                    <a:lumMod val="25000"/>
+                  </a:schemeClr>
+                </a:solidFill>
+                <a:latin typeface="D2Coding" panose="020B0609020101020101" pitchFamily="49" charset="-127"/>
+                <a:ea typeface="D2Coding" panose="020B0609020101020101" pitchFamily="49" charset="-127"/>
+                <a:cs typeface="Segoe UI Light" panose="020B0502040204020203" pitchFamily="34" charset="0"/>
+              </a:rPr>
+              <a:t>RAG(</a:t>
+            </a:r>
+            <a:r>
+              <a:rPr lang="ko-KR" altLang="en-US" sz="2800" cap="none" dirty="0">
+                <a:solidFill>
+                  <a:schemeClr val="bg2">
+                    <a:lumMod val="25000"/>
+                  </a:schemeClr>
+                </a:solidFill>
+                <a:latin typeface="D2Coding" panose="020B0609020101020101" pitchFamily="49" charset="-127"/>
+                <a:ea typeface="D2Coding" panose="020B0609020101020101" pitchFamily="49" charset="-127"/>
+                <a:cs typeface="Segoe UI Light" panose="020B0502040204020203" pitchFamily="34" charset="0"/>
+              </a:rPr>
+              <a:t>검색 증강 생성</a:t>
+            </a:r>
+            <a:r>
+              <a:rPr lang="en-US" altLang="ko-KR" sz="2800" cap="none" dirty="0">
+                <a:solidFill>
+                  <a:schemeClr val="bg2">
+                    <a:lumMod val="25000"/>
+                  </a:schemeClr>
+                </a:solidFill>
+                <a:latin typeface="D2Coding" panose="020B0609020101020101" pitchFamily="49" charset="-127"/>
+                <a:ea typeface="D2Coding" panose="020B0609020101020101" pitchFamily="49" charset="-127"/>
+                <a:cs typeface="Segoe UI Light" panose="020B0502040204020203" pitchFamily="34" charset="0"/>
+              </a:rPr>
+              <a:t>, Retrieval-Augmented Generation)</a:t>
+            </a:r>
+            <a:endParaRPr lang="ko-KR" altLang="en-US" sz="2800" cap="none" dirty="0">
+              <a:solidFill>
+                <a:schemeClr val="bg2">
+                  <a:lumMod val="25000"/>
+                </a:schemeClr>
+              </a:solidFill>
+              <a:latin typeface="D2Coding" panose="020B0609020101020101" pitchFamily="49" charset="-127"/>
+              <a:ea typeface="D2Coding" panose="020B0609020101020101" pitchFamily="49" charset="-127"/>
+              <a:cs typeface="Segoe UI Light" panose="020B0502040204020203" pitchFamily="34" charset="0"/>
+            </a:endParaRPr>
+          </a:p>
+        </p:txBody>
+      </p:sp>
+      <p:pic>
+        <p:nvPicPr>
+          <p:cNvPr id="11266" name="Picture 2" descr="index_diagram">
+            <a:extLst>
+              <a:ext uri="{FF2B5EF4-FFF2-40B4-BE49-F238E27FC236}">
+                <a16:creationId xmlns:a16="http://schemas.microsoft.com/office/drawing/2014/main" id="{5AC6592C-BD82-0D32-9BB4-24792A5FD224}"/>
+              </a:ext>
+            </a:extLst>
+          </p:cNvPr>
+          <p:cNvPicPr>
+            <a:picLocks noChangeAspect="1" noChangeArrowheads="1"/>
+          </p:cNvPicPr>
+          <p:nvPr/>
+        </p:nvPicPr>
+        <p:blipFill>
+          <a:blip r:embed="rId2">
+            <a:extLst>
+              <a:ext uri="{28A0092B-C50C-407E-A947-70E740481C1C}">
+                <a14:useLocalDpi xmlns:a14="http://schemas.microsoft.com/office/drawing/2010/main" val="0"/>
+              </a:ext>
+            </a:extLst>
+          </a:blip>
+          <a:srcRect/>
+          <a:stretch>
+            <a:fillRect/>
+          </a:stretch>
+        </p:blipFill>
+        <p:spPr bwMode="auto">
+          <a:xfrm>
+            <a:off x="1809750" y="1982281"/>
+            <a:ext cx="8055521" cy="4050836"/>
+          </a:xfrm>
+          <a:prstGeom prst="rect">
+            <a:avLst/>
+          </a:prstGeom>
+          <a:noFill/>
+          <a:extLst>
+            <a:ext uri="{909E8E84-426E-40DD-AFC4-6F175D3DCCD1}">
+              <a14:hiddenFill xmlns:a14="http://schemas.microsoft.com/office/drawing/2010/main">
+                <a:solidFill>
+                  <a:srgbClr val="FFFFFF"/>
+                </a:solidFill>
+              </a14:hiddenFill>
+            </a:ext>
+          </a:extLst>
+        </p:spPr>
+      </p:pic>
+      <p:sp>
+        <p:nvSpPr>
+          <p:cNvPr id="7" name="TextBox 6">
+            <a:extLst>
+              <a:ext uri="{FF2B5EF4-FFF2-40B4-BE49-F238E27FC236}">
+                <a16:creationId xmlns:a16="http://schemas.microsoft.com/office/drawing/2014/main" id="{40B795B2-462B-1D70-F75C-F6A7974637BE}"/>
+              </a:ext>
+            </a:extLst>
+          </p:cNvPr>
+          <p:cNvSpPr txBox="1"/>
+          <p:nvPr/>
+        </p:nvSpPr>
+        <p:spPr>
+          <a:xfrm>
+            <a:off x="1219923" y="5663785"/>
+            <a:ext cx="530915" cy="369332"/>
+          </a:xfrm>
+          <a:prstGeom prst="rect">
+            <a:avLst/>
+          </a:prstGeom>
+          <a:noFill/>
+        </p:spPr>
+        <p:txBody>
+          <a:bodyPr wrap="none" rtlCol="0">
+            <a:spAutoFit/>
+          </a:bodyPr>
+          <a:lstStyle/>
+          <a:p>
+            <a:r>
+              <a:rPr lang="en-US" altLang="ko-KR" dirty="0">
+                <a:latin typeface="D2Coding" panose="020B0609020101020101" pitchFamily="49" charset="-127"/>
+                <a:ea typeface="D2Coding" panose="020B0609020101020101" pitchFamily="49" charset="-127"/>
+                <a:hlinkClick r:id="rId3"/>
+              </a:rPr>
+              <a:t>RAG</a:t>
+            </a:r>
+            <a:endParaRPr lang="ko-KR" altLang="en-US" dirty="0">
+              <a:latin typeface="D2Coding" panose="020B0609020101020101" pitchFamily="49" charset="-127"/>
+              <a:ea typeface="D2Coding" panose="020B0609020101020101" pitchFamily="49" charset="-127"/>
+            </a:endParaRPr>
+          </a:p>
+        </p:txBody>
+      </p:sp>
+    </p:spTree>
+    <p:extLst>
+      <p:ext uri="{BB962C8B-B14F-4D97-AF65-F5344CB8AC3E}">
+        <p14:creationId xmlns:p14="http://schemas.microsoft.com/office/powerpoint/2010/main" val="710087885"/>
+      </p:ext>
+    </p:extLst>
+  </p:cSld>
+  <p:clrMapOvr>
+    <a:masterClrMapping/>
+  </p:clrMapOvr>
+</p:sld>
+</file>
+
+<file path=ppt/slides/slide18.xml><?xml version="1.0" encoding="utf-8"?>
+<p:sld xmlns:a="http://schemas.openxmlformats.org/drawingml/2006/main" xmlns:r="http://schemas.openxmlformats.org/officeDocument/2006/relationships" xmlns:p="http://schemas.openxmlformats.org/presentationml/2006/main">
+  <p:cSld>
+    <p:spTree>
+      <p:nvGrpSpPr>
+        <p:cNvPr id="1" name="">
+          <a:extLst>
+            <a:ext uri="{FF2B5EF4-FFF2-40B4-BE49-F238E27FC236}">
+              <a16:creationId xmlns:a16="http://schemas.microsoft.com/office/drawing/2014/main" id="{75E18721-1D54-F2C3-9D0C-19D25E4DED3C}"/>
+            </a:ext>
+          </a:extLst>
+        </p:cNvPr>
+        <p:cNvGrpSpPr/>
+        <p:nvPr/>
+      </p:nvGrpSpPr>
+      <p:grpSpPr>
+        <a:xfrm>
+          <a:off x="0" y="0"/>
+          <a:ext cx="0" cy="0"/>
+          <a:chOff x="0" y="0"/>
+          <a:chExt cx="0" cy="0"/>
+        </a:xfrm>
+      </p:grpSpPr>
+      <p:sp>
+        <p:nvSpPr>
+          <p:cNvPr id="4" name="슬라이드 번호 개체 틀 3">
+            <a:extLst>
+              <a:ext uri="{FF2B5EF4-FFF2-40B4-BE49-F238E27FC236}">
+                <a16:creationId xmlns:a16="http://schemas.microsoft.com/office/drawing/2014/main" id="{DAAC6D21-B116-9645-BE62-CC728796944D}"/>
+              </a:ext>
+            </a:extLst>
+          </p:cNvPr>
+          <p:cNvSpPr>
+            <a:spLocks noGrp="1"/>
+          </p:cNvSpPr>
+          <p:nvPr>
+            <p:ph type="sldNum" sz="quarter" idx="12"/>
+          </p:nvPr>
+        </p:nvSpPr>
+        <p:spPr>
+          <a:xfrm>
+            <a:off x="10514011" y="6036261"/>
+            <a:ext cx="753545" cy="365125"/>
+          </a:xfrm>
+        </p:spPr>
+        <p:txBody>
+          <a:bodyPr/>
+          <a:lstStyle/>
+          <a:p>
+            <a:fld id="{D57F1E4F-1CFF-5643-939E-217C01CDF565}" type="slidenum">
+              <a:rPr lang="en-US" smtClean="0"/>
+              <a:pPr/>
+              <a:t>18</a:t>
+            </a:fld>
+            <a:endParaRPr lang="en-US" dirty="0"/>
+          </a:p>
+        </p:txBody>
+      </p:sp>
+      <p:sp>
+        <p:nvSpPr>
+          <p:cNvPr id="3" name="제목 1">
+            <a:extLst>
+              <a:ext uri="{FF2B5EF4-FFF2-40B4-BE49-F238E27FC236}">
+                <a16:creationId xmlns:a16="http://schemas.microsoft.com/office/drawing/2014/main" id="{A8CCF26C-27E2-34A5-0A8D-96C10E06D993}"/>
+              </a:ext>
+            </a:extLst>
+          </p:cNvPr>
+          <p:cNvSpPr txBox="1">
+            <a:spLocks/>
+          </p:cNvSpPr>
+          <p:nvPr/>
+        </p:nvSpPr>
+        <p:spPr>
+          <a:xfrm>
+            <a:off x="475645" y="481983"/>
+            <a:ext cx="10353762" cy="766439"/>
+          </a:xfrm>
+          <a:prstGeom prst="rect">
+            <a:avLst/>
+          </a:prstGeom>
+        </p:spPr>
+        <p:txBody>
+          <a:bodyPr vert="horz" lIns="91440" tIns="45720" rIns="91440" bIns="45720" rtlCol="0" anchor="ctr">
+            <a:normAutofit/>
+          </a:bodyPr>
+          <a:lstStyle>
+            <a:lvl1pPr algn="ctr" defTabSz="914400" rtl="0" eaLnBrk="1" latinLnBrk="1" hangingPunct="1">
+              <a:lnSpc>
+                <a:spcPct val="90000"/>
+              </a:lnSpc>
+              <a:spcBef>
+                <a:spcPct val="0"/>
+              </a:spcBef>
+              <a:buNone/>
+              <a:defRPr sz="3200" kern="1200" cap="all" baseline="0">
+                <a:solidFill>
+                  <a:schemeClr val="tx1"/>
+                </a:solidFill>
+                <a:effectLst/>
+                <a:latin typeface="Batang" panose="02030600000101010101" pitchFamily="18" charset="-127"/>
+                <a:ea typeface="Batang" panose="02030600000101010101" pitchFamily="18" charset="-127"/>
+                <a:cs typeface="+mj-cs"/>
+              </a:defRPr>
+            </a:lvl1pPr>
+          </a:lstStyle>
+          <a:p>
+            <a:pPr algn="l"/>
+            <a:r>
+              <a:rPr lang="en-US" altLang="ko-KR" sz="2800" cap="none" dirty="0">
+                <a:solidFill>
+                  <a:schemeClr val="bg2">
+                    <a:lumMod val="25000"/>
+                  </a:schemeClr>
+                </a:solidFill>
+                <a:latin typeface="D2Coding" panose="020B0609020101020101" pitchFamily="49" charset="-127"/>
+                <a:ea typeface="D2Coding" panose="020B0609020101020101" pitchFamily="49" charset="-127"/>
+                <a:cs typeface="Segoe UI Light" panose="020B0502040204020203" pitchFamily="34" charset="0"/>
+              </a:rPr>
+              <a:t>RAG(</a:t>
+            </a:r>
+            <a:r>
+              <a:rPr lang="ko-KR" altLang="en-US" sz="2800" cap="none" dirty="0">
+                <a:solidFill>
+                  <a:schemeClr val="bg2">
+                    <a:lumMod val="25000"/>
+                  </a:schemeClr>
+                </a:solidFill>
+                <a:latin typeface="D2Coding" panose="020B0609020101020101" pitchFamily="49" charset="-127"/>
+                <a:ea typeface="D2Coding" panose="020B0609020101020101" pitchFamily="49" charset="-127"/>
+                <a:cs typeface="Segoe UI Light" panose="020B0502040204020203" pitchFamily="34" charset="0"/>
+              </a:rPr>
+              <a:t>검색 증강 생성</a:t>
+            </a:r>
+            <a:r>
+              <a:rPr lang="en-US" altLang="ko-KR" sz="2800" cap="none" dirty="0">
+                <a:solidFill>
+                  <a:schemeClr val="bg2">
+                    <a:lumMod val="25000"/>
+                  </a:schemeClr>
+                </a:solidFill>
+                <a:latin typeface="D2Coding" panose="020B0609020101020101" pitchFamily="49" charset="-127"/>
+                <a:ea typeface="D2Coding" panose="020B0609020101020101" pitchFamily="49" charset="-127"/>
+                <a:cs typeface="Segoe UI Light" panose="020B0502040204020203" pitchFamily="34" charset="0"/>
+              </a:rPr>
+              <a:t>, Retrieval-Augmented Generation)</a:t>
+            </a:r>
+            <a:endParaRPr lang="ko-KR" altLang="en-US" sz="2800" cap="none" dirty="0">
+              <a:solidFill>
+                <a:schemeClr val="bg2">
+                  <a:lumMod val="25000"/>
+                </a:schemeClr>
+              </a:solidFill>
+              <a:latin typeface="D2Coding" panose="020B0609020101020101" pitchFamily="49" charset="-127"/>
+              <a:ea typeface="D2Coding" panose="020B0609020101020101" pitchFamily="49" charset="-127"/>
+              <a:cs typeface="Segoe UI Light" panose="020B0502040204020203" pitchFamily="34" charset="0"/>
+            </a:endParaRPr>
+          </a:p>
+        </p:txBody>
+      </p:sp>
+      <p:sp>
+        <p:nvSpPr>
+          <p:cNvPr id="5" name="TextBox 4">
+            <a:extLst>
+              <a:ext uri="{FF2B5EF4-FFF2-40B4-BE49-F238E27FC236}">
+                <a16:creationId xmlns:a16="http://schemas.microsoft.com/office/drawing/2014/main" id="{73116C9C-E112-9017-C824-57FDABBD88D1}"/>
+              </a:ext>
+            </a:extLst>
+          </p:cNvPr>
+          <p:cNvSpPr txBox="1"/>
+          <p:nvPr/>
+        </p:nvSpPr>
+        <p:spPr>
+          <a:xfrm>
+            <a:off x="608284" y="1353850"/>
+            <a:ext cx="11021741" cy="4994316"/>
+          </a:xfrm>
+          <a:prstGeom prst="rect">
+            <a:avLst/>
+          </a:prstGeom>
+          <a:noFill/>
+        </p:spPr>
+        <p:txBody>
+          <a:bodyPr wrap="square">
+            <a:spAutoFit/>
+          </a:bodyPr>
+          <a:lstStyle/>
+          <a:p>
+            <a:pPr marL="342900" indent="-342900">
+              <a:lnSpc>
+                <a:spcPct val="150000"/>
+              </a:lnSpc>
+              <a:buFont typeface="+mj-lt"/>
+              <a:buAutoNum type="arabicPeriod"/>
+            </a:pPr>
+            <a:r>
+              <a:rPr lang="en-US" altLang="ko-KR" sz="1600" b="1" dirty="0">
+                <a:latin typeface="D2Coding" panose="020B0609020101020101" pitchFamily="49" charset="-127"/>
+                <a:ea typeface="D2Coding" panose="020B0609020101020101" pitchFamily="49" charset="-127"/>
+              </a:rPr>
+              <a:t>Question (</a:t>
+            </a:r>
+            <a:r>
+              <a:rPr lang="ko-KR" altLang="en-US" sz="1600" b="1" dirty="0">
+                <a:latin typeface="D2Coding" panose="020B0609020101020101" pitchFamily="49" charset="-127"/>
+                <a:ea typeface="D2Coding" panose="020B0609020101020101" pitchFamily="49" charset="-127"/>
+              </a:rPr>
+              <a:t>사용자의 질문</a:t>
+            </a:r>
+            <a:r>
+              <a:rPr lang="en-US" altLang="ko-KR" sz="1600" b="1" dirty="0">
+                <a:latin typeface="D2Coding" panose="020B0609020101020101" pitchFamily="49" charset="-127"/>
+                <a:ea typeface="D2Coding" panose="020B0609020101020101" pitchFamily="49" charset="-127"/>
+              </a:rPr>
+              <a:t>) </a:t>
+            </a:r>
+            <a:r>
+              <a:rPr lang="en-US" altLang="ko-KR" sz="1600" dirty="0">
+                <a:latin typeface="D2Coding" panose="020B0609020101020101" pitchFamily="49" charset="-127"/>
+                <a:ea typeface="D2Coding" panose="020B0609020101020101" pitchFamily="49" charset="-127"/>
+              </a:rPr>
+              <a:t>: </a:t>
+            </a:r>
+            <a:r>
+              <a:rPr lang="ko-KR" altLang="en-US" sz="1600" dirty="0">
+                <a:latin typeface="D2Coding" panose="020B0609020101020101" pitchFamily="49" charset="-127"/>
+                <a:ea typeface="D2Coding" panose="020B0609020101020101" pitchFamily="49" charset="-127"/>
+              </a:rPr>
+              <a:t>사용자가 서비스에 질문</a:t>
+            </a:r>
+            <a:r>
+              <a:rPr lang="en-US" altLang="ko-KR" sz="1600" dirty="0">
+                <a:latin typeface="D2Coding" panose="020B0609020101020101" pitchFamily="49" charset="-127"/>
+                <a:ea typeface="D2Coding" panose="020B0609020101020101" pitchFamily="49" charset="-127"/>
+              </a:rPr>
+              <a:t>(</a:t>
+            </a:r>
+            <a:r>
+              <a:rPr lang="ko-KR" altLang="en-US" sz="1600" dirty="0">
+                <a:latin typeface="D2Coding" panose="020B0609020101020101" pitchFamily="49" charset="-127"/>
+                <a:ea typeface="D2Coding" panose="020B0609020101020101" pitchFamily="49" charset="-127"/>
+              </a:rPr>
+              <a:t>예</a:t>
+            </a:r>
+            <a:r>
+              <a:rPr lang="en-US" altLang="ko-KR" sz="1600" dirty="0">
+                <a:latin typeface="D2Coding" panose="020B0609020101020101" pitchFamily="49" charset="-127"/>
+                <a:ea typeface="D2Coding" panose="020B0609020101020101" pitchFamily="49" charset="-127"/>
+              </a:rPr>
+              <a:t>: "</a:t>
+            </a:r>
+            <a:r>
+              <a:rPr lang="ko-KR" altLang="en-US" sz="1600" dirty="0" err="1">
+                <a:latin typeface="D2Coding" panose="020B0609020101020101" pitchFamily="49" charset="-127"/>
+                <a:ea typeface="D2Coding" panose="020B0609020101020101" pitchFamily="49" charset="-127"/>
+              </a:rPr>
+              <a:t>랭체인이</a:t>
+            </a:r>
+            <a:r>
+              <a:rPr lang="ko-KR" altLang="en-US" sz="1600" dirty="0">
+                <a:latin typeface="D2Coding" panose="020B0609020101020101" pitchFamily="49" charset="-127"/>
+                <a:ea typeface="D2Coding" panose="020B0609020101020101" pitchFamily="49" charset="-127"/>
+              </a:rPr>
+              <a:t> </a:t>
+            </a:r>
+            <a:r>
+              <a:rPr lang="ko-KR" altLang="en-US" sz="1600" dirty="0" err="1">
+                <a:latin typeface="D2Coding" panose="020B0609020101020101" pitchFamily="49" charset="-127"/>
+                <a:ea typeface="D2Coding" panose="020B0609020101020101" pitchFamily="49" charset="-127"/>
+              </a:rPr>
+              <a:t>뭔가요</a:t>
+            </a:r>
+            <a:r>
+              <a:rPr lang="en-US" altLang="ko-KR" sz="1600" dirty="0">
+                <a:latin typeface="D2Coding" panose="020B0609020101020101" pitchFamily="49" charset="-127"/>
+                <a:ea typeface="D2Coding" panose="020B0609020101020101" pitchFamily="49" charset="-127"/>
+              </a:rPr>
+              <a:t>?")</a:t>
+            </a:r>
+          </a:p>
+          <a:p>
+            <a:pPr marL="342900" indent="-342900">
+              <a:lnSpc>
+                <a:spcPct val="150000"/>
+              </a:lnSpc>
+              <a:buFont typeface="+mj-lt"/>
+              <a:buAutoNum type="arabicPeriod"/>
+            </a:pPr>
+            <a:endParaRPr lang="en-US" altLang="ko-KR" sz="1200" dirty="0">
+              <a:latin typeface="D2Coding" panose="020B0609020101020101" pitchFamily="49" charset="-127"/>
+              <a:ea typeface="D2Coding" panose="020B0609020101020101" pitchFamily="49" charset="-127"/>
+            </a:endParaRPr>
+          </a:p>
+          <a:p>
+            <a:pPr marL="342900" indent="-342900">
+              <a:lnSpc>
+                <a:spcPct val="150000"/>
+              </a:lnSpc>
+              <a:buFont typeface="+mj-lt"/>
+              <a:buAutoNum type="arabicPeriod"/>
+            </a:pPr>
+            <a:r>
+              <a:rPr lang="en-US" altLang="ko-KR" sz="1600" b="1" dirty="0">
+                <a:latin typeface="D2Coding" panose="020B0609020101020101" pitchFamily="49" charset="-127"/>
+                <a:ea typeface="D2Coding" panose="020B0609020101020101" pitchFamily="49" charset="-127"/>
+              </a:rPr>
+              <a:t>RETRIEVE (</a:t>
+            </a:r>
+            <a:r>
+              <a:rPr lang="ko-KR" altLang="en-US" sz="1600" b="1" dirty="0">
+                <a:latin typeface="D2Coding" panose="020B0609020101020101" pitchFamily="49" charset="-127"/>
+                <a:ea typeface="D2Coding" panose="020B0609020101020101" pitchFamily="49" charset="-127"/>
+              </a:rPr>
+              <a:t>벡터 검색 단계</a:t>
+            </a:r>
+            <a:r>
+              <a:rPr lang="en-US" altLang="ko-KR" sz="1600" b="1" dirty="0">
+                <a:latin typeface="D2Coding" panose="020B0609020101020101" pitchFamily="49" charset="-127"/>
+                <a:ea typeface="D2Coding" panose="020B0609020101020101" pitchFamily="49" charset="-127"/>
+              </a:rPr>
+              <a:t>) </a:t>
+            </a:r>
+            <a:r>
+              <a:rPr lang="en-US" altLang="ko-KR" sz="1600" dirty="0">
+                <a:latin typeface="D2Coding" panose="020B0609020101020101" pitchFamily="49" charset="-127"/>
+                <a:ea typeface="D2Coding" panose="020B0609020101020101" pitchFamily="49" charset="-127"/>
+              </a:rPr>
+              <a:t>: </a:t>
+            </a:r>
+            <a:r>
+              <a:rPr lang="ko-KR" altLang="en-US" sz="1600" dirty="0">
+                <a:latin typeface="D2Coding" panose="020B0609020101020101" pitchFamily="49" charset="-127"/>
+                <a:ea typeface="D2Coding" panose="020B0609020101020101" pitchFamily="49" charset="-127"/>
+              </a:rPr>
+              <a:t>질문을 </a:t>
+            </a:r>
+            <a:r>
+              <a:rPr lang="ko-KR" altLang="en-US" sz="1600" dirty="0" err="1">
+                <a:latin typeface="D2Coding" panose="020B0609020101020101" pitchFamily="49" charset="-127"/>
+                <a:ea typeface="D2Coding" panose="020B0609020101020101" pitchFamily="49" charset="-127"/>
+              </a:rPr>
+              <a:t>임베딩</a:t>
+            </a:r>
+            <a:r>
+              <a:rPr lang="ko-KR" altLang="en-US" sz="1600" dirty="0">
+                <a:latin typeface="D2Coding" panose="020B0609020101020101" pitchFamily="49" charset="-127"/>
+                <a:ea typeface="D2Coding" panose="020B0609020101020101" pitchFamily="49" charset="-127"/>
+              </a:rPr>
+              <a:t> 모델</a:t>
+            </a:r>
+            <a:r>
+              <a:rPr lang="en-US" altLang="ko-KR" sz="1600" dirty="0">
+                <a:latin typeface="D2Coding" panose="020B0609020101020101" pitchFamily="49" charset="-127"/>
+                <a:ea typeface="D2Coding" panose="020B0609020101020101" pitchFamily="49" charset="-127"/>
+              </a:rPr>
+              <a:t>(all-MiniLM-L6-v2)</a:t>
+            </a:r>
+            <a:r>
+              <a:rPr lang="ko-KR" altLang="en-US" sz="1600" dirty="0">
+                <a:latin typeface="D2Coding" panose="020B0609020101020101" pitchFamily="49" charset="-127"/>
+                <a:ea typeface="D2Coding" panose="020B0609020101020101" pitchFamily="49" charset="-127"/>
+              </a:rPr>
+              <a:t>을 통해 숫자로 바꾼 뒤</a:t>
+            </a:r>
+            <a:r>
+              <a:rPr lang="en-US" altLang="ko-KR" sz="1600" dirty="0">
+                <a:latin typeface="D2Coding" panose="020B0609020101020101" pitchFamily="49" charset="-127"/>
+                <a:ea typeface="D2Coding" panose="020B0609020101020101" pitchFamily="49" charset="-127"/>
+              </a:rPr>
+              <a:t>, Vector DB(</a:t>
+            </a:r>
+            <a:r>
+              <a:rPr lang="en-US" altLang="ko-KR" sz="1600" dirty="0" err="1">
+                <a:latin typeface="D2Coding" panose="020B0609020101020101" pitchFamily="49" charset="-127"/>
+                <a:ea typeface="D2Coding" panose="020B0609020101020101" pitchFamily="49" charset="-127"/>
+              </a:rPr>
+              <a:t>Supabase</a:t>
+            </a:r>
+            <a:r>
+              <a:rPr lang="en-US" altLang="ko-KR" sz="1600" dirty="0">
+                <a:latin typeface="D2Coding" panose="020B0609020101020101" pitchFamily="49" charset="-127"/>
+                <a:ea typeface="D2Coding" panose="020B0609020101020101" pitchFamily="49" charset="-127"/>
+              </a:rPr>
+              <a:t>/</a:t>
+            </a:r>
+            <a:r>
+              <a:rPr lang="en-US" altLang="ko-KR" sz="1600" dirty="0" err="1">
+                <a:latin typeface="D2Coding" panose="020B0609020101020101" pitchFamily="49" charset="-127"/>
+                <a:ea typeface="D2Coding" panose="020B0609020101020101" pitchFamily="49" charset="-127"/>
+              </a:rPr>
+              <a:t>pgvector</a:t>
+            </a:r>
+            <a:r>
+              <a:rPr lang="en-US" altLang="ko-KR" sz="1600" dirty="0">
+                <a:latin typeface="D2Coding" panose="020B0609020101020101" pitchFamily="49" charset="-127"/>
+                <a:ea typeface="D2Coding" panose="020B0609020101020101" pitchFamily="49" charset="-127"/>
+              </a:rPr>
+              <a:t>)</a:t>
+            </a:r>
+            <a:r>
+              <a:rPr lang="ko-KR" altLang="en-US" sz="1600" dirty="0">
+                <a:latin typeface="D2Coding" panose="020B0609020101020101" pitchFamily="49" charset="-127"/>
+                <a:ea typeface="D2Coding" panose="020B0609020101020101" pitchFamily="49" charset="-127"/>
+              </a:rPr>
+              <a:t>에 저장된 수많은 문서 조각 중 가장 유사도가 높은 핵심 조각</a:t>
+            </a:r>
+            <a:r>
+              <a:rPr lang="en-US" altLang="ko-KR" sz="1600" dirty="0">
+                <a:latin typeface="D2Coding" panose="020B0609020101020101" pitchFamily="49" charset="-127"/>
+                <a:ea typeface="D2Coding" panose="020B0609020101020101" pitchFamily="49" charset="-127"/>
+              </a:rPr>
+              <a:t>(</a:t>
+            </a:r>
+            <a:r>
+              <a:rPr lang="ko-KR" altLang="en-US" sz="1600" dirty="0">
+                <a:latin typeface="D2Coding" panose="020B0609020101020101" pitchFamily="49" charset="-127"/>
+                <a:ea typeface="D2Coding" panose="020B0609020101020101" pitchFamily="49" charset="-127"/>
+              </a:rPr>
+              <a:t>파란색으로 </a:t>
+            </a:r>
+            <a:r>
+              <a:rPr lang="ko-KR" altLang="en-US" sz="1600" dirty="0" err="1">
+                <a:latin typeface="D2Coding" panose="020B0609020101020101" pitchFamily="49" charset="-127"/>
+                <a:ea typeface="D2Coding" panose="020B0609020101020101" pitchFamily="49" charset="-127"/>
+              </a:rPr>
+              <a:t>하이라이트된</a:t>
+            </a:r>
+            <a:r>
+              <a:rPr lang="ko-KR" altLang="en-US" sz="1600" dirty="0">
+                <a:latin typeface="D2Coding" panose="020B0609020101020101" pitchFamily="49" charset="-127"/>
+                <a:ea typeface="D2Coding" panose="020B0609020101020101" pitchFamily="49" charset="-127"/>
+              </a:rPr>
+              <a:t> 칸들</a:t>
+            </a:r>
+            <a:r>
+              <a:rPr lang="en-US" altLang="ko-KR" sz="1600" dirty="0">
+                <a:latin typeface="D2Coding" panose="020B0609020101020101" pitchFamily="49" charset="-127"/>
+                <a:ea typeface="D2Coding" panose="020B0609020101020101" pitchFamily="49" charset="-127"/>
+              </a:rPr>
+              <a:t>)</a:t>
+            </a:r>
+            <a:r>
+              <a:rPr lang="ko-KR" altLang="en-US" sz="1600" dirty="0">
+                <a:latin typeface="D2Coding" panose="020B0609020101020101" pitchFamily="49" charset="-127"/>
+                <a:ea typeface="D2Coding" panose="020B0609020101020101" pitchFamily="49" charset="-127"/>
+              </a:rPr>
+              <a:t>만 돋보기로 빠르게 찾아냄</a:t>
+            </a:r>
+            <a:r>
+              <a:rPr lang="en-US" altLang="ko-KR" sz="1600" dirty="0">
+                <a:latin typeface="D2Coding" panose="020B0609020101020101" pitchFamily="49" charset="-127"/>
+                <a:ea typeface="D2Coding" panose="020B0609020101020101" pitchFamily="49" charset="-127"/>
+              </a:rPr>
+              <a:t>(Retrieve)</a:t>
+            </a:r>
+          </a:p>
+          <a:p>
+            <a:pPr marL="342900" indent="-342900">
+              <a:lnSpc>
+                <a:spcPct val="150000"/>
+              </a:lnSpc>
+              <a:buFont typeface="+mj-lt"/>
+              <a:buAutoNum type="arabicPeriod"/>
+            </a:pPr>
+            <a:endParaRPr lang="en-US" altLang="ko-KR" sz="1200" dirty="0">
+              <a:latin typeface="D2Coding" panose="020B0609020101020101" pitchFamily="49" charset="-127"/>
+              <a:ea typeface="D2Coding" panose="020B0609020101020101" pitchFamily="49" charset="-127"/>
+            </a:endParaRPr>
+          </a:p>
+          <a:p>
+            <a:pPr marL="342900" indent="-342900">
+              <a:lnSpc>
+                <a:spcPct val="150000"/>
+              </a:lnSpc>
+              <a:buFont typeface="+mj-lt"/>
+              <a:buAutoNum type="arabicPeriod"/>
+            </a:pPr>
+            <a:r>
+              <a:rPr lang="en-US" altLang="ko-KR" sz="1600" b="1" dirty="0">
+                <a:latin typeface="D2Coding" panose="020B0609020101020101" pitchFamily="49" charset="-127"/>
+                <a:ea typeface="D2Coding" panose="020B0609020101020101" pitchFamily="49" charset="-127"/>
+              </a:rPr>
+              <a:t>PROMPT (</a:t>
+            </a:r>
+            <a:r>
+              <a:rPr lang="ko-KR" altLang="en-US" sz="1600" b="1" dirty="0">
+                <a:latin typeface="D2Coding" panose="020B0609020101020101" pitchFamily="49" charset="-127"/>
+                <a:ea typeface="D2Coding" panose="020B0609020101020101" pitchFamily="49" charset="-127"/>
+              </a:rPr>
+              <a:t>컨텍스트 결합 및 프롬프트 생성</a:t>
+            </a:r>
+            <a:r>
+              <a:rPr lang="en-US" altLang="ko-KR" sz="1600" b="1" dirty="0">
+                <a:latin typeface="D2Coding" panose="020B0609020101020101" pitchFamily="49" charset="-127"/>
+                <a:ea typeface="D2Coding" panose="020B0609020101020101" pitchFamily="49" charset="-127"/>
+              </a:rPr>
+              <a:t>)</a:t>
+            </a:r>
+            <a:r>
+              <a:rPr lang="en-US" altLang="ko-KR" sz="1600" dirty="0">
+                <a:latin typeface="D2Coding" panose="020B0609020101020101" pitchFamily="49" charset="-127"/>
+                <a:ea typeface="D2Coding" panose="020B0609020101020101" pitchFamily="49" charset="-127"/>
+              </a:rPr>
+              <a:t> : </a:t>
+            </a:r>
+            <a:r>
+              <a:rPr lang="ko-KR" altLang="en-US" sz="1600" dirty="0">
+                <a:latin typeface="D2Coding" panose="020B0609020101020101" pitchFamily="49" charset="-127"/>
+                <a:ea typeface="D2Coding" panose="020B0609020101020101" pitchFamily="49" charset="-127"/>
+              </a:rPr>
+              <a:t>사용자 질문</a:t>
+            </a:r>
+            <a:r>
+              <a:rPr lang="en-US" altLang="ko-KR" sz="1600" dirty="0">
+                <a:latin typeface="D2Coding" panose="020B0609020101020101" pitchFamily="49" charset="-127"/>
+                <a:ea typeface="D2Coding" panose="020B0609020101020101" pitchFamily="49" charset="-127"/>
+              </a:rPr>
+              <a:t>(Question)</a:t>
+            </a:r>
+            <a:r>
+              <a:rPr lang="ko-KR" altLang="en-US" sz="1600" dirty="0">
+                <a:latin typeface="D2Coding" panose="020B0609020101020101" pitchFamily="49" charset="-127"/>
+                <a:ea typeface="D2Coding" panose="020B0609020101020101" pitchFamily="49" charset="-127"/>
+              </a:rPr>
+              <a:t>과 </a:t>
+            </a:r>
+            <a:r>
+              <a:rPr lang="en-US" altLang="ko-KR" sz="1600" dirty="0">
+                <a:latin typeface="D2Coding" panose="020B0609020101020101" pitchFamily="49" charset="-127"/>
+                <a:ea typeface="D2Coding" panose="020B0609020101020101" pitchFamily="49" charset="-127"/>
+              </a:rPr>
+              <a:t>Vector DB</a:t>
+            </a:r>
+            <a:r>
+              <a:rPr lang="ko-KR" altLang="en-US" sz="1600" dirty="0">
+                <a:latin typeface="D2Coding" panose="020B0609020101020101" pitchFamily="49" charset="-127"/>
+                <a:ea typeface="D2Coding" panose="020B0609020101020101" pitchFamily="49" charset="-127"/>
+              </a:rPr>
+              <a:t>에서 끄집어낸 참고 문서 조각</a:t>
+            </a:r>
+            <a:r>
+              <a:rPr lang="en-US" altLang="ko-KR" sz="1600" dirty="0">
+                <a:latin typeface="D2Coding" panose="020B0609020101020101" pitchFamily="49" charset="-127"/>
+                <a:ea typeface="D2Coding" panose="020B0609020101020101" pitchFamily="49" charset="-127"/>
+              </a:rPr>
+              <a:t>(Retrieve)</a:t>
+            </a:r>
+            <a:r>
+              <a:rPr lang="ko-KR" altLang="en-US" sz="1600" dirty="0">
+                <a:latin typeface="D2Coding" panose="020B0609020101020101" pitchFamily="49" charset="-127"/>
+                <a:ea typeface="D2Coding" panose="020B0609020101020101" pitchFamily="49" charset="-127"/>
+              </a:rPr>
+              <a:t>이 위아래 화살표를 통해 </a:t>
+            </a:r>
+            <a:r>
+              <a:rPr lang="en-US" altLang="ko-KR" sz="1600" dirty="0">
+                <a:latin typeface="D2Coding" panose="020B0609020101020101" pitchFamily="49" charset="-127"/>
+                <a:ea typeface="D2Coding" panose="020B0609020101020101" pitchFamily="49" charset="-127"/>
+              </a:rPr>
+              <a:t>PROMPT</a:t>
+            </a:r>
+            <a:r>
+              <a:rPr lang="ko-KR" altLang="en-US" sz="1600" dirty="0">
+                <a:latin typeface="D2Coding" panose="020B0609020101020101" pitchFamily="49" charset="-127"/>
+                <a:ea typeface="D2Coding" panose="020B0609020101020101" pitchFamily="49" charset="-127"/>
+              </a:rPr>
+              <a:t>라는 하나의 주머니로 합쳐지는 단계로 </a:t>
+            </a:r>
+            <a:r>
+              <a:rPr lang="en-US" altLang="ko-KR" sz="1600" dirty="0">
+                <a:latin typeface="D2Coding" panose="020B0609020101020101" pitchFamily="49" charset="-127"/>
+                <a:ea typeface="D2Coding" panose="020B0609020101020101" pitchFamily="49" charset="-127"/>
+              </a:rPr>
+              <a:t>LLM</a:t>
+            </a:r>
+            <a:r>
+              <a:rPr lang="ko-KR" altLang="en-US" sz="1600" dirty="0">
+                <a:latin typeface="D2Coding" panose="020B0609020101020101" pitchFamily="49" charset="-127"/>
+                <a:ea typeface="D2Coding" panose="020B0609020101020101" pitchFamily="49" charset="-127"/>
+              </a:rPr>
+              <a:t>에게 무작정 답을 달라고 하는 게 아니라</a:t>
+            </a:r>
+            <a:r>
+              <a:rPr lang="en-US" altLang="ko-KR" sz="1600" dirty="0">
+                <a:latin typeface="D2Coding" panose="020B0609020101020101" pitchFamily="49" charset="-127"/>
+                <a:ea typeface="D2Coding" panose="020B0609020101020101" pitchFamily="49" charset="-127"/>
+              </a:rPr>
+              <a:t>, "</a:t>
+            </a:r>
+            <a:r>
+              <a:rPr lang="ko-KR" altLang="en-US" sz="1600" dirty="0">
+                <a:latin typeface="D2Coding" panose="020B0609020101020101" pitchFamily="49" charset="-127"/>
+                <a:ea typeface="D2Coding" panose="020B0609020101020101" pitchFamily="49" charset="-127"/>
+              </a:rPr>
+              <a:t>다음 </a:t>
+            </a:r>
+            <a:r>
+              <a:rPr lang="en-US" altLang="ko-KR" sz="1600" dirty="0">
+                <a:latin typeface="D2Coding" panose="020B0609020101020101" pitchFamily="49" charset="-127"/>
+                <a:ea typeface="D2Coding" panose="020B0609020101020101" pitchFamily="49" charset="-127"/>
+              </a:rPr>
+              <a:t>[</a:t>
+            </a:r>
+            <a:r>
+              <a:rPr lang="ko-KR" altLang="en-US" sz="1600" dirty="0">
+                <a:latin typeface="D2Coding" panose="020B0609020101020101" pitchFamily="49" charset="-127"/>
+                <a:ea typeface="D2Coding" panose="020B0609020101020101" pitchFamily="49" charset="-127"/>
+              </a:rPr>
+              <a:t>참고 문서</a:t>
+            </a:r>
+            <a:r>
+              <a:rPr lang="en-US" altLang="ko-KR" sz="1600" dirty="0">
+                <a:latin typeface="D2Coding" panose="020B0609020101020101" pitchFamily="49" charset="-127"/>
+                <a:ea typeface="D2Coding" panose="020B0609020101020101" pitchFamily="49" charset="-127"/>
+              </a:rPr>
+              <a:t>]</a:t>
+            </a:r>
+            <a:r>
+              <a:rPr lang="ko-KR" altLang="en-US" sz="1600" dirty="0">
+                <a:latin typeface="D2Coding" panose="020B0609020101020101" pitchFamily="49" charset="-127"/>
+                <a:ea typeface="D2Coding" panose="020B0609020101020101" pitchFamily="49" charset="-127"/>
+              </a:rPr>
+              <a:t>를 바탕으로 </a:t>
+            </a:r>
+            <a:r>
+              <a:rPr lang="en-US" altLang="ko-KR" sz="1600" dirty="0">
+                <a:latin typeface="D2Coding" panose="020B0609020101020101" pitchFamily="49" charset="-127"/>
+                <a:ea typeface="D2Coding" panose="020B0609020101020101" pitchFamily="49" charset="-127"/>
+              </a:rPr>
+              <a:t>[</a:t>
+            </a:r>
+            <a:r>
+              <a:rPr lang="ko-KR" altLang="en-US" sz="1600" dirty="0">
+                <a:latin typeface="D2Coding" panose="020B0609020101020101" pitchFamily="49" charset="-127"/>
+                <a:ea typeface="D2Coding" panose="020B0609020101020101" pitchFamily="49" charset="-127"/>
+              </a:rPr>
+              <a:t>사용자의 질문</a:t>
+            </a:r>
+            <a:r>
+              <a:rPr lang="en-US" altLang="ko-KR" sz="1600" dirty="0">
+                <a:latin typeface="D2Coding" panose="020B0609020101020101" pitchFamily="49" charset="-127"/>
+                <a:ea typeface="D2Coding" panose="020B0609020101020101" pitchFamily="49" charset="-127"/>
+              </a:rPr>
+              <a:t>]</a:t>
+            </a:r>
+            <a:r>
+              <a:rPr lang="ko-KR" altLang="en-US" sz="1600" dirty="0">
+                <a:latin typeface="D2Coding" panose="020B0609020101020101" pitchFamily="49" charset="-127"/>
+                <a:ea typeface="D2Coding" panose="020B0609020101020101" pitchFamily="49" charset="-127"/>
+              </a:rPr>
+              <a:t>에 솔직하게 답해줘</a:t>
+            </a:r>
+            <a:r>
+              <a:rPr lang="en-US" altLang="ko-KR" sz="1600" dirty="0">
+                <a:latin typeface="D2Coding" panose="020B0609020101020101" pitchFamily="49" charset="-127"/>
+                <a:ea typeface="D2Coding" panose="020B0609020101020101" pitchFamily="49" charset="-127"/>
+              </a:rPr>
+              <a:t>"</a:t>
+            </a:r>
+            <a:r>
+              <a:rPr lang="ko-KR" altLang="en-US" sz="1600" dirty="0">
+                <a:latin typeface="D2Coding" panose="020B0609020101020101" pitchFamily="49" charset="-127"/>
+                <a:ea typeface="D2Coding" panose="020B0609020101020101" pitchFamily="49" charset="-127"/>
+              </a:rPr>
+              <a:t>라는 형태의 완성된 지시서</a:t>
+            </a:r>
+            <a:r>
+              <a:rPr lang="en-US" altLang="ko-KR" sz="1600" dirty="0">
+                <a:latin typeface="D2Coding" panose="020B0609020101020101" pitchFamily="49" charset="-127"/>
+                <a:ea typeface="D2Coding" panose="020B0609020101020101" pitchFamily="49" charset="-127"/>
+              </a:rPr>
+              <a:t>(</a:t>
+            </a:r>
+            <a:r>
+              <a:rPr lang="ko-KR" altLang="en-US" sz="1600" dirty="0">
+                <a:latin typeface="D2Coding" panose="020B0609020101020101" pitchFamily="49" charset="-127"/>
+                <a:ea typeface="D2Coding" panose="020B0609020101020101" pitchFamily="49" charset="-127"/>
+              </a:rPr>
+              <a:t>프롬프트</a:t>
+            </a:r>
+            <a:r>
+              <a:rPr lang="en-US" altLang="ko-KR" sz="1600" dirty="0">
+                <a:latin typeface="D2Coding" panose="020B0609020101020101" pitchFamily="49" charset="-127"/>
+                <a:ea typeface="D2Coding" panose="020B0609020101020101" pitchFamily="49" charset="-127"/>
+              </a:rPr>
+              <a:t>)</a:t>
+            </a:r>
+            <a:r>
+              <a:rPr lang="ko-KR" altLang="en-US" sz="1600" dirty="0">
+                <a:latin typeface="D2Coding" panose="020B0609020101020101" pitchFamily="49" charset="-127"/>
+                <a:ea typeface="D2Coding" panose="020B0609020101020101" pitchFamily="49" charset="-127"/>
+              </a:rPr>
+              <a:t>를 조립하는 단계</a:t>
+            </a:r>
+            <a:endParaRPr lang="en-US" altLang="ko-KR" sz="1600" dirty="0">
+              <a:latin typeface="D2Coding" panose="020B0609020101020101" pitchFamily="49" charset="-127"/>
+              <a:ea typeface="D2Coding" panose="020B0609020101020101" pitchFamily="49" charset="-127"/>
+            </a:endParaRPr>
+          </a:p>
+          <a:p>
+            <a:pPr marL="342900" indent="-342900">
+              <a:lnSpc>
+                <a:spcPct val="150000"/>
+              </a:lnSpc>
+              <a:buFont typeface="+mj-lt"/>
+              <a:buAutoNum type="arabicPeriod"/>
+            </a:pPr>
+            <a:endParaRPr lang="en-US" altLang="ko-KR" sz="1200" dirty="0">
+              <a:latin typeface="D2Coding" panose="020B0609020101020101" pitchFamily="49" charset="-127"/>
+              <a:ea typeface="D2Coding" panose="020B0609020101020101" pitchFamily="49" charset="-127"/>
+            </a:endParaRPr>
+          </a:p>
+          <a:p>
+            <a:pPr marL="342900" indent="-342900">
+              <a:lnSpc>
+                <a:spcPct val="150000"/>
+              </a:lnSpc>
+              <a:buFont typeface="+mj-lt"/>
+              <a:buAutoNum type="arabicPeriod"/>
+            </a:pPr>
+            <a:r>
+              <a:rPr lang="en-US" altLang="ko-KR" sz="1600" b="1" dirty="0">
+                <a:latin typeface="D2Coding" panose="020B0609020101020101" pitchFamily="49" charset="-127"/>
+                <a:ea typeface="D2Coding" panose="020B0609020101020101" pitchFamily="49" charset="-127"/>
+              </a:rPr>
+              <a:t>LLM &amp; Answer (</a:t>
+            </a:r>
+            <a:r>
+              <a:rPr lang="ko-KR" altLang="en-US" sz="1600" b="1" dirty="0">
+                <a:latin typeface="D2Coding" panose="020B0609020101020101" pitchFamily="49" charset="-127"/>
+                <a:ea typeface="D2Coding" panose="020B0609020101020101" pitchFamily="49" charset="-127"/>
+              </a:rPr>
+              <a:t>생성 및 답변 전달</a:t>
+            </a:r>
+            <a:r>
+              <a:rPr lang="en-US" altLang="ko-KR" sz="1600" b="1" dirty="0">
+                <a:latin typeface="D2Coding" panose="020B0609020101020101" pitchFamily="49" charset="-127"/>
+                <a:ea typeface="D2Coding" panose="020B0609020101020101" pitchFamily="49" charset="-127"/>
+              </a:rPr>
+              <a:t>)</a:t>
+            </a:r>
+            <a:r>
+              <a:rPr lang="en-US" altLang="ko-KR" sz="1600" dirty="0">
+                <a:latin typeface="D2Coding" panose="020B0609020101020101" pitchFamily="49" charset="-127"/>
+                <a:ea typeface="D2Coding" panose="020B0609020101020101" pitchFamily="49" charset="-127"/>
+              </a:rPr>
+              <a:t> : </a:t>
+            </a:r>
+            <a:r>
+              <a:rPr lang="ko-KR" altLang="en-US" sz="1600" dirty="0">
+                <a:latin typeface="D2Coding" panose="020B0609020101020101" pitchFamily="49" charset="-127"/>
+                <a:ea typeface="D2Coding" panose="020B0609020101020101" pitchFamily="49" charset="-127"/>
+              </a:rPr>
+              <a:t>조립된 프롬프트가 대형 언어 모델</a:t>
+            </a:r>
+            <a:r>
+              <a:rPr lang="en-US" altLang="ko-KR" sz="1600" dirty="0">
+                <a:latin typeface="D2Coding" panose="020B0609020101020101" pitchFamily="49" charset="-127"/>
+                <a:ea typeface="D2Coding" panose="020B0609020101020101" pitchFamily="49" charset="-127"/>
+              </a:rPr>
+              <a:t>(LLM, </a:t>
+            </a:r>
+            <a:r>
+              <a:rPr lang="ko-KR" altLang="en-US" sz="1600" dirty="0">
+                <a:latin typeface="D2Coding" panose="020B0609020101020101" pitchFamily="49" charset="-127"/>
+                <a:ea typeface="D2Coding" panose="020B0609020101020101" pitchFamily="49" charset="-127"/>
+              </a:rPr>
+              <a:t>예</a:t>
+            </a:r>
+            <a:r>
+              <a:rPr lang="en-US" altLang="ko-KR" sz="1600" dirty="0">
+                <a:latin typeface="D2Coding" panose="020B0609020101020101" pitchFamily="49" charset="-127"/>
+                <a:ea typeface="D2Coding" panose="020B0609020101020101" pitchFamily="49" charset="-127"/>
+              </a:rPr>
+              <a:t>: </a:t>
+            </a:r>
+            <a:r>
+              <a:rPr lang="en-US" altLang="ko-KR" sz="1600" dirty="0" err="1">
+                <a:latin typeface="D2Coding" panose="020B0609020101020101" pitchFamily="49" charset="-127"/>
+                <a:ea typeface="D2Coding" panose="020B0609020101020101" pitchFamily="49" charset="-127"/>
+              </a:rPr>
+              <a:t>Groq</a:t>
+            </a:r>
+            <a:r>
+              <a:rPr lang="en-US" altLang="ko-KR" sz="1600" dirty="0">
+                <a:latin typeface="D2Coding" panose="020B0609020101020101" pitchFamily="49" charset="-127"/>
+                <a:ea typeface="D2Coding" panose="020B0609020101020101" pitchFamily="49" charset="-127"/>
+              </a:rPr>
+              <a:t>/Llama3 </a:t>
+            </a:r>
+            <a:r>
+              <a:rPr lang="ko-KR" altLang="en-US" sz="1600" dirty="0">
+                <a:latin typeface="D2Coding" panose="020B0609020101020101" pitchFamily="49" charset="-127"/>
+                <a:ea typeface="D2Coding" panose="020B0609020101020101" pitchFamily="49" charset="-127"/>
+              </a:rPr>
+              <a:t>등</a:t>
+            </a:r>
+            <a:r>
+              <a:rPr lang="en-US" altLang="ko-KR" sz="1600" dirty="0">
+                <a:latin typeface="D2Coding" panose="020B0609020101020101" pitchFamily="49" charset="-127"/>
+                <a:ea typeface="D2Coding" panose="020B0609020101020101" pitchFamily="49" charset="-127"/>
+              </a:rPr>
+              <a:t>)</a:t>
+            </a:r>
+            <a:r>
+              <a:rPr lang="ko-KR" altLang="en-US" sz="1600" dirty="0">
+                <a:latin typeface="D2Coding" panose="020B0609020101020101" pitchFamily="49" charset="-127"/>
+                <a:ea typeface="D2Coding" panose="020B0609020101020101" pitchFamily="49" charset="-127"/>
+              </a:rPr>
+              <a:t>로 전달하면 </a:t>
+            </a:r>
+            <a:r>
+              <a:rPr lang="en-US" altLang="ko-KR" sz="1600" dirty="0">
+                <a:latin typeface="D2Coding" panose="020B0609020101020101" pitchFamily="49" charset="-127"/>
+                <a:ea typeface="D2Coding" panose="020B0609020101020101" pitchFamily="49" charset="-127"/>
+              </a:rPr>
+              <a:t>LLM</a:t>
+            </a:r>
+            <a:r>
+              <a:rPr lang="ko-KR" altLang="en-US" sz="1600" dirty="0">
+                <a:latin typeface="D2Coding" panose="020B0609020101020101" pitchFamily="49" charset="-127"/>
+                <a:ea typeface="D2Coding" panose="020B0609020101020101" pitchFamily="49" charset="-127"/>
+              </a:rPr>
+              <a:t>은 자신이 아는 지식으로 소설을 쓰는</a:t>
+            </a:r>
+            <a:r>
+              <a:rPr lang="en-US" altLang="ko-KR" sz="1600" dirty="0">
+                <a:latin typeface="D2Coding" panose="020B0609020101020101" pitchFamily="49" charset="-127"/>
+                <a:ea typeface="D2Coding" panose="020B0609020101020101" pitchFamily="49" charset="-127"/>
+              </a:rPr>
+              <a:t>(</a:t>
+            </a:r>
+            <a:r>
+              <a:rPr lang="ko-KR" altLang="en-US" sz="1600" dirty="0">
+                <a:latin typeface="D2Coding" panose="020B0609020101020101" pitchFamily="49" charset="-127"/>
+                <a:ea typeface="D2Coding" panose="020B0609020101020101" pitchFamily="49" charset="-127"/>
+              </a:rPr>
+              <a:t>환각 현상</a:t>
+            </a:r>
+            <a:r>
+              <a:rPr lang="en-US" altLang="ko-KR" sz="1600" dirty="0">
+                <a:latin typeface="D2Coding" panose="020B0609020101020101" pitchFamily="49" charset="-127"/>
+                <a:ea typeface="D2Coding" panose="020B0609020101020101" pitchFamily="49" charset="-127"/>
+              </a:rPr>
+              <a:t>)</a:t>
+            </a:r>
+            <a:r>
+              <a:rPr lang="ko-KR" altLang="en-US" sz="1600" dirty="0">
+                <a:latin typeface="D2Coding" panose="020B0609020101020101" pitchFamily="49" charset="-127"/>
+                <a:ea typeface="D2Coding" panose="020B0609020101020101" pitchFamily="49" charset="-127"/>
+              </a:rPr>
+              <a:t>대신</a:t>
+            </a:r>
+            <a:r>
+              <a:rPr lang="en-US" altLang="ko-KR" sz="1600" dirty="0">
+                <a:latin typeface="D2Coding" panose="020B0609020101020101" pitchFamily="49" charset="-127"/>
+                <a:ea typeface="D2Coding" panose="020B0609020101020101" pitchFamily="49" charset="-127"/>
+              </a:rPr>
+              <a:t>, </a:t>
+            </a:r>
+            <a:r>
+              <a:rPr lang="ko-KR" altLang="en-US" sz="1600" dirty="0">
+                <a:latin typeface="D2Coding" panose="020B0609020101020101" pitchFamily="49" charset="-127"/>
+                <a:ea typeface="D2Coding" panose="020B0609020101020101" pitchFamily="49" charset="-127"/>
+              </a:rPr>
+              <a:t>주어지는 참고 문서를 기반으로 정확하고 정제된 최종 답변</a:t>
+            </a:r>
+            <a:r>
+              <a:rPr lang="en-US" altLang="ko-KR" sz="1600" dirty="0">
+                <a:latin typeface="D2Coding" panose="020B0609020101020101" pitchFamily="49" charset="-127"/>
+                <a:ea typeface="D2Coding" panose="020B0609020101020101" pitchFamily="49" charset="-127"/>
+              </a:rPr>
+              <a:t>(Answer)</a:t>
+            </a:r>
+            <a:r>
+              <a:rPr lang="ko-KR" altLang="en-US" sz="1600" dirty="0">
+                <a:latin typeface="D2Coding" panose="020B0609020101020101" pitchFamily="49" charset="-127"/>
+                <a:ea typeface="D2Coding" panose="020B0609020101020101" pitchFamily="49" charset="-127"/>
+              </a:rPr>
+              <a:t>을 작성하여 사용자에게 </a:t>
+            </a:r>
+            <a:r>
+              <a:rPr lang="en-US" altLang="ko-KR" sz="1600" dirty="0">
+                <a:latin typeface="D2Coding" panose="020B0609020101020101" pitchFamily="49" charset="-127"/>
+                <a:ea typeface="D2Coding" panose="020B0609020101020101" pitchFamily="49" charset="-127"/>
+              </a:rPr>
+              <a:t>Generate</a:t>
+            </a:r>
+          </a:p>
+        </p:txBody>
+      </p:sp>
+    </p:spTree>
+    <p:extLst>
+      <p:ext uri="{BB962C8B-B14F-4D97-AF65-F5344CB8AC3E}">
+        <p14:creationId xmlns:p14="http://schemas.microsoft.com/office/powerpoint/2010/main" val="3020969316"/>
+      </p:ext>
+    </p:extLst>
+  </p:cSld>
+  <p:clrMapOvr>
+    <a:masterClrMapping/>
+  </p:clrMapOvr>
+</p:sld>
+</file>
+
+<file path=ppt/slides/slide19.xml><?xml version="1.0" encoding="utf-8"?>
+<p:sld xmlns:a="http://schemas.openxmlformats.org/drawingml/2006/main" xmlns:r="http://schemas.openxmlformats.org/officeDocument/2006/relationships" xmlns:p="http://schemas.openxmlformats.org/presentationml/2006/main">
+  <p:cSld>
+    <p:spTree>
+      <p:nvGrpSpPr>
+        <p:cNvPr id="1" name="">
+          <a:extLst>
+            <a:ext uri="{FF2B5EF4-FFF2-40B4-BE49-F238E27FC236}">
+              <a16:creationId xmlns:a16="http://schemas.microsoft.com/office/drawing/2014/main" id="{7F6574E4-5B38-625B-D78F-F70F559CDB33}"/>
+            </a:ext>
+          </a:extLst>
+        </p:cNvPr>
+        <p:cNvGrpSpPr/>
+        <p:nvPr/>
+      </p:nvGrpSpPr>
+      <p:grpSpPr>
+        <a:xfrm>
+          <a:off x="0" y="0"/>
+          <a:ext cx="0" cy="0"/>
+          <a:chOff x="0" y="0"/>
+          <a:chExt cx="0" cy="0"/>
+        </a:xfrm>
+      </p:grpSpPr>
+      <p:sp>
+        <p:nvSpPr>
+          <p:cNvPr id="4" name="슬라이드 번호 개체 틀 3">
+            <a:extLst>
+              <a:ext uri="{FF2B5EF4-FFF2-40B4-BE49-F238E27FC236}">
+                <a16:creationId xmlns:a16="http://schemas.microsoft.com/office/drawing/2014/main" id="{E3A55706-A236-05A0-0081-1EBD57FACE57}"/>
+              </a:ext>
+            </a:extLst>
+          </p:cNvPr>
+          <p:cNvSpPr>
+            <a:spLocks noGrp="1"/>
+          </p:cNvSpPr>
+          <p:nvPr>
+            <p:ph type="sldNum" sz="quarter" idx="12"/>
+          </p:nvPr>
+        </p:nvSpPr>
+        <p:spPr>
+          <a:xfrm>
+            <a:off x="10514011" y="6036261"/>
+            <a:ext cx="753545" cy="365125"/>
+          </a:xfrm>
+        </p:spPr>
+        <p:txBody>
+          <a:bodyPr/>
+          <a:lstStyle/>
+          <a:p>
+            <a:fld id="{D57F1E4F-1CFF-5643-939E-217C01CDF565}" type="slidenum">
+              <a:rPr lang="en-US" smtClean="0"/>
+              <a:pPr/>
+              <a:t>19</a:t>
+            </a:fld>
+            <a:endParaRPr lang="en-US" dirty="0"/>
+          </a:p>
+        </p:txBody>
+      </p:sp>
+      <p:sp>
+        <p:nvSpPr>
+          <p:cNvPr id="3" name="제목 1">
+            <a:extLst>
+              <a:ext uri="{FF2B5EF4-FFF2-40B4-BE49-F238E27FC236}">
+                <a16:creationId xmlns:a16="http://schemas.microsoft.com/office/drawing/2014/main" id="{22F9FC71-E2BD-5A5C-7CCF-D928284288C0}"/>
+              </a:ext>
+            </a:extLst>
+          </p:cNvPr>
+          <p:cNvSpPr txBox="1">
+            <a:spLocks/>
+          </p:cNvSpPr>
+          <p:nvPr/>
+        </p:nvSpPr>
+        <p:spPr>
+          <a:xfrm>
+            <a:off x="475645" y="481983"/>
+            <a:ext cx="10353762" cy="766439"/>
+          </a:xfrm>
+          <a:prstGeom prst="rect">
+            <a:avLst/>
+          </a:prstGeom>
+        </p:spPr>
+        <p:txBody>
+          <a:bodyPr vert="horz" lIns="91440" tIns="45720" rIns="91440" bIns="45720" rtlCol="0" anchor="ctr">
+            <a:normAutofit/>
+          </a:bodyPr>
+          <a:lstStyle>
+            <a:lvl1pPr algn="ctr" defTabSz="914400" rtl="0" eaLnBrk="1" latinLnBrk="1" hangingPunct="1">
+              <a:lnSpc>
+                <a:spcPct val="90000"/>
+              </a:lnSpc>
+              <a:spcBef>
+                <a:spcPct val="0"/>
+              </a:spcBef>
+              <a:buNone/>
+              <a:defRPr sz="3200" kern="1200" cap="all" baseline="0">
+                <a:solidFill>
+                  <a:schemeClr val="tx1"/>
+                </a:solidFill>
+                <a:effectLst/>
+                <a:latin typeface="Batang" panose="02030600000101010101" pitchFamily="18" charset="-127"/>
+                <a:ea typeface="Batang" panose="02030600000101010101" pitchFamily="18" charset="-127"/>
+                <a:cs typeface="+mj-cs"/>
+              </a:defRPr>
+            </a:lvl1pPr>
+          </a:lstStyle>
+          <a:p>
+            <a:pPr algn="l"/>
+            <a:r>
+              <a:rPr lang="en-US" altLang="ko-KR" sz="2800" cap="none" dirty="0">
+                <a:solidFill>
+                  <a:schemeClr val="bg2">
+                    <a:lumMod val="25000"/>
+                  </a:schemeClr>
+                </a:solidFill>
+                <a:latin typeface="D2Coding" panose="020B0609020101020101" pitchFamily="49" charset="-127"/>
+                <a:ea typeface="D2Coding" panose="020B0609020101020101" pitchFamily="49" charset="-127"/>
+                <a:cs typeface="Segoe UI Light" panose="020B0502040204020203" pitchFamily="34" charset="0"/>
+              </a:rPr>
+              <a:t>RAG(</a:t>
+            </a:r>
+            <a:r>
+              <a:rPr lang="ko-KR" altLang="en-US" sz="2800" cap="none" dirty="0">
+                <a:solidFill>
+                  <a:schemeClr val="bg2">
+                    <a:lumMod val="25000"/>
+                  </a:schemeClr>
+                </a:solidFill>
+                <a:latin typeface="D2Coding" panose="020B0609020101020101" pitchFamily="49" charset="-127"/>
+                <a:ea typeface="D2Coding" panose="020B0609020101020101" pitchFamily="49" charset="-127"/>
+                <a:cs typeface="Segoe UI Light" panose="020B0502040204020203" pitchFamily="34" charset="0"/>
+              </a:rPr>
+              <a:t>검색 증강 생성</a:t>
+            </a:r>
+            <a:r>
+              <a:rPr lang="en-US" altLang="ko-KR" sz="2800" cap="none" dirty="0">
+                <a:solidFill>
+                  <a:schemeClr val="bg2">
+                    <a:lumMod val="25000"/>
+                  </a:schemeClr>
+                </a:solidFill>
+                <a:latin typeface="D2Coding" panose="020B0609020101020101" pitchFamily="49" charset="-127"/>
+                <a:ea typeface="D2Coding" panose="020B0609020101020101" pitchFamily="49" charset="-127"/>
+                <a:cs typeface="Segoe UI Light" panose="020B0502040204020203" pitchFamily="34" charset="0"/>
+              </a:rPr>
+              <a:t>, Retrieval-Augmented Generation)</a:t>
+            </a:r>
+            <a:endParaRPr lang="ko-KR" altLang="en-US" sz="2800" cap="none" dirty="0">
+              <a:solidFill>
+                <a:schemeClr val="bg2">
+                  <a:lumMod val="25000"/>
+                </a:schemeClr>
+              </a:solidFill>
+              <a:latin typeface="D2Coding" panose="020B0609020101020101" pitchFamily="49" charset="-127"/>
+              <a:ea typeface="D2Coding" panose="020B0609020101020101" pitchFamily="49" charset="-127"/>
+              <a:cs typeface="Segoe UI Light" panose="020B0502040204020203" pitchFamily="34" charset="0"/>
+            </a:endParaRPr>
+          </a:p>
+        </p:txBody>
+      </p:sp>
+      <p:pic>
+        <p:nvPicPr>
+          <p:cNvPr id="11268" name="Picture 4" descr="retrieval_diagram">
+            <a:extLst>
+              <a:ext uri="{FF2B5EF4-FFF2-40B4-BE49-F238E27FC236}">
+                <a16:creationId xmlns:a16="http://schemas.microsoft.com/office/drawing/2014/main" id="{A9CB697F-86C4-E9CB-25B3-0303A1737A02}"/>
+              </a:ext>
+            </a:extLst>
+          </p:cNvPr>
+          <p:cNvPicPr>
+            <a:picLocks noChangeAspect="1" noChangeArrowheads="1"/>
+          </p:cNvPicPr>
+          <p:nvPr/>
+        </p:nvPicPr>
+        <p:blipFill>
+          <a:blip r:embed="rId2">
+            <a:extLst>
+              <a:ext uri="{28A0092B-C50C-407E-A947-70E740481C1C}">
+                <a14:useLocalDpi xmlns:a14="http://schemas.microsoft.com/office/drawing/2010/main" val="0"/>
+              </a:ext>
+            </a:extLst>
+          </a:blip>
+          <a:srcRect/>
+          <a:stretch>
+            <a:fillRect/>
+          </a:stretch>
+        </p:blipFill>
+        <p:spPr bwMode="auto">
+          <a:xfrm>
+            <a:off x="1809749" y="2325181"/>
+            <a:ext cx="8055521" cy="4132650"/>
+          </a:xfrm>
+          <a:prstGeom prst="rect">
+            <a:avLst/>
+          </a:prstGeom>
+          <a:noFill/>
+          <a:extLst>
+            <a:ext uri="{909E8E84-426E-40DD-AFC4-6F175D3DCCD1}">
+              <a14:hiddenFill xmlns:a14="http://schemas.microsoft.com/office/drawing/2010/main">
+                <a:solidFill>
+                  <a:srgbClr val="FFFFFF"/>
+                </a:solidFill>
+              </a14:hiddenFill>
+            </a:ext>
+          </a:extLst>
+        </p:spPr>
+      </p:pic>
+      <p:sp>
+        <p:nvSpPr>
+          <p:cNvPr id="6" name="TextBox 5">
+            <a:extLst>
+              <a:ext uri="{FF2B5EF4-FFF2-40B4-BE49-F238E27FC236}">
+                <a16:creationId xmlns:a16="http://schemas.microsoft.com/office/drawing/2014/main" id="{D2AC66DF-E377-DCF9-5FCC-231B680E30FA}"/>
+              </a:ext>
+            </a:extLst>
+          </p:cNvPr>
+          <p:cNvSpPr txBox="1"/>
+          <p:nvPr/>
+        </p:nvSpPr>
+        <p:spPr>
+          <a:xfrm>
+            <a:off x="638175" y="1333411"/>
+            <a:ext cx="10858500" cy="584775"/>
+          </a:xfrm>
+          <a:prstGeom prst="rect">
+            <a:avLst/>
+          </a:prstGeom>
+          <a:noFill/>
+        </p:spPr>
+        <p:txBody>
+          <a:bodyPr wrap="square">
+            <a:spAutoFit/>
+          </a:bodyPr>
+          <a:lstStyle/>
+          <a:p>
+            <a:pPr marL="285750" indent="-285750">
+              <a:buFont typeface="Wingdings" panose="05000000000000000000" pitchFamily="2" charset="2"/>
+              <a:buChar char="v"/>
+            </a:pPr>
+            <a:r>
+              <a:rPr lang="en-US" altLang="ko-KR" sz="1600" dirty="0">
+                <a:latin typeface="D2Coding" panose="020B0609020101020101" pitchFamily="49" charset="-127"/>
+                <a:ea typeface="D2Coding" panose="020B0609020101020101" pitchFamily="49" charset="-127"/>
+              </a:rPr>
+              <a:t>"</a:t>
+            </a:r>
+            <a:r>
+              <a:rPr lang="ko-KR" altLang="en-US" sz="1600" dirty="0">
+                <a:latin typeface="D2Coding" panose="020B0609020101020101" pitchFamily="49" charset="-127"/>
+                <a:ea typeface="D2Coding" panose="020B0609020101020101" pitchFamily="49" charset="-127"/>
+              </a:rPr>
+              <a:t>만약 여러분 회사의 방대한 모든 </a:t>
+            </a:r>
+            <a:r>
+              <a:rPr lang="ko-KR" altLang="en-US" sz="1600" dirty="0" err="1">
+                <a:latin typeface="D2Coding" panose="020B0609020101020101" pitchFamily="49" charset="-127"/>
+                <a:ea typeface="D2Coding" panose="020B0609020101020101" pitchFamily="49" charset="-127"/>
+              </a:rPr>
+              <a:t>규정집</a:t>
+            </a:r>
+            <a:r>
+              <a:rPr lang="en-US" altLang="ko-KR" sz="1600" dirty="0">
+                <a:latin typeface="D2Coding" panose="020B0609020101020101" pitchFamily="49" charset="-127"/>
+                <a:ea typeface="D2Coding" panose="020B0609020101020101" pitchFamily="49" charset="-127"/>
+              </a:rPr>
+              <a:t>(Huge Quantity)</a:t>
+            </a:r>
+            <a:r>
+              <a:rPr lang="ko-KR" altLang="en-US" sz="1600" dirty="0">
+                <a:latin typeface="D2Coding" panose="020B0609020101020101" pitchFamily="49" charset="-127"/>
+                <a:ea typeface="D2Coding" panose="020B0609020101020101" pitchFamily="49" charset="-127"/>
+              </a:rPr>
+              <a:t>을 </a:t>
+            </a:r>
+            <a:r>
+              <a:rPr lang="en-US" altLang="ko-KR" sz="1600" dirty="0">
+                <a:latin typeface="D2Coding" panose="020B0609020101020101" pitchFamily="49" charset="-127"/>
+                <a:ea typeface="D2Coding" panose="020B0609020101020101" pitchFamily="49" charset="-127"/>
+              </a:rPr>
+              <a:t>LLM</a:t>
+            </a:r>
+            <a:r>
+              <a:rPr lang="ko-KR" altLang="en-US" sz="1600" dirty="0">
+                <a:latin typeface="D2Coding" panose="020B0609020101020101" pitchFamily="49" charset="-127"/>
+                <a:ea typeface="D2Coding" panose="020B0609020101020101" pitchFamily="49" charset="-127"/>
+              </a:rPr>
+              <a:t>에게 참고하라고 한다면</a:t>
+            </a:r>
+            <a:r>
+              <a:rPr lang="en-US" altLang="ko-KR" sz="1600" dirty="0">
+                <a:latin typeface="D2Coding" panose="020B0609020101020101" pitchFamily="49" charset="-127"/>
+                <a:ea typeface="D2Coding" panose="020B0609020101020101" pitchFamily="49" charset="-127"/>
+              </a:rPr>
+              <a:t>, </a:t>
+            </a:r>
+            <a:r>
+              <a:rPr lang="ko-KR" altLang="en-US" sz="1600" dirty="0">
+                <a:latin typeface="D2Coding" panose="020B0609020101020101" pitchFamily="49" charset="-127"/>
+                <a:ea typeface="D2Coding" panose="020B0609020101020101" pitchFamily="49" charset="-127"/>
+              </a:rPr>
+              <a:t>매번 수천 페이지를 복사해서 붙여 넣으실 건가요</a:t>
+            </a:r>
+            <a:r>
+              <a:rPr lang="en-US" altLang="ko-KR" sz="1600" dirty="0">
+                <a:latin typeface="D2Coding" panose="020B0609020101020101" pitchFamily="49" charset="-127"/>
+                <a:ea typeface="D2Coding" panose="020B0609020101020101" pitchFamily="49" charset="-127"/>
+              </a:rPr>
+              <a:t>? </a:t>
+            </a:r>
+            <a:r>
+              <a:rPr lang="ko-KR" altLang="en-US" sz="1600" dirty="0">
+                <a:latin typeface="D2Coding" panose="020B0609020101020101" pitchFamily="49" charset="-127"/>
+                <a:ea typeface="D2Coding" panose="020B0609020101020101" pitchFamily="49" charset="-127"/>
+              </a:rPr>
+              <a:t>불가능하겠죠</a:t>
+            </a:r>
+            <a:r>
+              <a:rPr lang="en-US" altLang="ko-KR" sz="1600" dirty="0">
+                <a:latin typeface="D2Coding" panose="020B0609020101020101" pitchFamily="49" charset="-127"/>
+                <a:ea typeface="D2Coding" panose="020B0609020101020101" pitchFamily="49" charset="-127"/>
+              </a:rPr>
+              <a:t>? </a:t>
+            </a:r>
+            <a:r>
+              <a:rPr lang="ko-KR" altLang="en-US" sz="1600" dirty="0">
+                <a:latin typeface="D2Coding" panose="020B0609020101020101" pitchFamily="49" charset="-127"/>
+                <a:ea typeface="D2Coding" panose="020B0609020101020101" pitchFamily="49" charset="-127"/>
+              </a:rPr>
+              <a:t>그래서 </a:t>
+            </a:r>
+            <a:r>
+              <a:rPr lang="en-US" altLang="ko-KR" sz="1600" dirty="0">
+                <a:latin typeface="D2Coding" panose="020B0609020101020101" pitchFamily="49" charset="-127"/>
+                <a:ea typeface="D2Coding" panose="020B0609020101020101" pitchFamily="49" charset="-127"/>
+              </a:rPr>
+              <a:t>'</a:t>
+            </a:r>
+            <a:r>
+              <a:rPr lang="ko-KR" altLang="en-US" sz="1600" dirty="0">
+                <a:latin typeface="D2Coding" panose="020B0609020101020101" pitchFamily="49" charset="-127"/>
+                <a:ea typeface="D2Coding" panose="020B0609020101020101" pitchFamily="49" charset="-127"/>
+              </a:rPr>
+              <a:t>정답 조각 고르기 기술</a:t>
+            </a:r>
+            <a:r>
+              <a:rPr lang="en-US" altLang="ko-KR" sz="1600" dirty="0">
+                <a:latin typeface="D2Coding" panose="020B0609020101020101" pitchFamily="49" charset="-127"/>
+                <a:ea typeface="D2Coding" panose="020B0609020101020101" pitchFamily="49" charset="-127"/>
+              </a:rPr>
+              <a:t>'</a:t>
+            </a:r>
+            <a:r>
+              <a:rPr lang="ko-KR" altLang="en-US" sz="1600" dirty="0">
+                <a:latin typeface="D2Coding" panose="020B0609020101020101" pitchFamily="49" charset="-127"/>
+                <a:ea typeface="D2Coding" panose="020B0609020101020101" pitchFamily="49" charset="-127"/>
+              </a:rPr>
+              <a:t>이 필요합니다</a:t>
+            </a:r>
+            <a:r>
+              <a:rPr lang="en-US" altLang="ko-KR" sz="1600" dirty="0">
+                <a:latin typeface="D2Coding" panose="020B0609020101020101" pitchFamily="49" charset="-127"/>
+                <a:ea typeface="D2Coding" panose="020B0609020101020101" pitchFamily="49" charset="-127"/>
+              </a:rPr>
+              <a:t>.“</a:t>
+            </a:r>
+            <a:endParaRPr lang="ko-KR" altLang="en-US" sz="1600" dirty="0"/>
+          </a:p>
+        </p:txBody>
+      </p:sp>
+    </p:spTree>
+    <p:extLst>
+      <p:ext uri="{BB962C8B-B14F-4D97-AF65-F5344CB8AC3E}">
+        <p14:creationId xmlns:p14="http://schemas.microsoft.com/office/powerpoint/2010/main" val="1008490805"/>
       </p:ext>
     </p:extLst>
   </p:cSld>

--- a/CHAPTER 2 RAG Part I_Indexing Your Data.pptx
+++ b/CHAPTER 2 RAG Part I_Indexing Your Data.pptx
@@ -5,31 +5,34 @@
     <p:sldMasterId id="2147483660" r:id="rId1"/>
   </p:sldMasterIdLst>
   <p:notesMasterIdLst>
-    <p:notesMasterId r:id="rId21"/>
+    <p:notesMasterId r:id="rId24"/>
   </p:notesMasterIdLst>
   <p:handoutMasterIdLst>
-    <p:handoutMasterId r:id="rId22"/>
+    <p:handoutMasterId r:id="rId25"/>
   </p:handoutMasterIdLst>
   <p:sldIdLst>
     <p:sldId id="256" r:id="rId2"/>
     <p:sldId id="1136" r:id="rId3"/>
     <p:sldId id="1138" r:id="rId4"/>
     <p:sldId id="1139" r:id="rId5"/>
-    <p:sldId id="1140" r:id="rId6"/>
-    <p:sldId id="1141" r:id="rId7"/>
-    <p:sldId id="1142" r:id="rId8"/>
-    <p:sldId id="1143" r:id="rId9"/>
-    <p:sldId id="1145" r:id="rId10"/>
-    <p:sldId id="1144" r:id="rId11"/>
-    <p:sldId id="1146" r:id="rId12"/>
-    <p:sldId id="1147" r:id="rId13"/>
-    <p:sldId id="1148" r:id="rId14"/>
-    <p:sldId id="1149" r:id="rId15"/>
-    <p:sldId id="1154" r:id="rId16"/>
-    <p:sldId id="1153" r:id="rId17"/>
-    <p:sldId id="1150" r:id="rId18"/>
-    <p:sldId id="1151" r:id="rId19"/>
-    <p:sldId id="1152" r:id="rId20"/>
+    <p:sldId id="1155" r:id="rId6"/>
+    <p:sldId id="1156" r:id="rId7"/>
+    <p:sldId id="1157" r:id="rId8"/>
+    <p:sldId id="1140" r:id="rId9"/>
+    <p:sldId id="1141" r:id="rId10"/>
+    <p:sldId id="1142" r:id="rId11"/>
+    <p:sldId id="1143" r:id="rId12"/>
+    <p:sldId id="1145" r:id="rId13"/>
+    <p:sldId id="1144" r:id="rId14"/>
+    <p:sldId id="1146" r:id="rId15"/>
+    <p:sldId id="1147" r:id="rId16"/>
+    <p:sldId id="1148" r:id="rId17"/>
+    <p:sldId id="1149" r:id="rId18"/>
+    <p:sldId id="1154" r:id="rId19"/>
+    <p:sldId id="1153" r:id="rId20"/>
+    <p:sldId id="1150" r:id="rId21"/>
+    <p:sldId id="1151" r:id="rId22"/>
+    <p:sldId id="1152" r:id="rId23"/>
   </p:sldIdLst>
   <p:sldSz cx="12192000" cy="6858000"/>
   <p:notesSz cx="6858000" cy="9144000"/>
@@ -141,6 +144,9 @@
             <p14:sldId id="1136"/>
             <p14:sldId id="1138"/>
             <p14:sldId id="1139"/>
+            <p14:sldId id="1155"/>
+            <p14:sldId id="1156"/>
+            <p14:sldId id="1157"/>
             <p14:sldId id="1140"/>
             <p14:sldId id="1141"/>
             <p14:sldId id="1142"/>
@@ -280,7 +286,7 @@
                 <a:latin typeface="맑은 고딕" panose="020B0503020000020004" pitchFamily="50" charset="-127"/>
                 <a:ea typeface="맑은 고딕" panose="020B0503020000020004" pitchFamily="50" charset="-127"/>
               </a:rPr>
-              <a:t>2026-07-17</a:t>
+              <a:t>2026-07-30</a:t>
             </a:fld>
             <a:endParaRPr lang="ko-KR" altLang="en-US">
               <a:latin typeface="맑은 고딕" panose="020B0503020000020004" pitchFamily="50" charset="-127"/>
@@ -466,7 +472,7 @@
           <a:p>
             <a:fld id="{43E1C3DD-4A19-441D-907C-380838DB51C4}" type="datetime1">
               <a:rPr lang="ko-KR" altLang="en-US" noProof="0" smtClean="0"/>
-              <a:t>2026-07-17</a:t>
+              <a:t>2026-07-30</a:t>
             </a:fld>
             <a:endParaRPr lang="ko-KR" altLang="en-US" noProof="0"/>
           </a:p>
@@ -1314,7 +1320,7 @@
           <a:p>
             <a:fld id="{990475B5-67CA-4281-BDCA-DA943C3C8EB3}" type="datetime1">
               <a:rPr lang="ko-KR" altLang="en-US" noProof="0" smtClean="0"/>
-              <a:t>2026-07-17</a:t>
+              <a:t>2026-07-30</a:t>
             </a:fld>
             <a:endParaRPr lang="ko-KR" altLang="en-US" noProof="0"/>
           </a:p>
@@ -1968,7 +1974,7 @@
           <a:p>
             <a:fld id="{48A87A34-81AB-432B-8DAE-1953F412C126}" type="datetimeFigureOut">
               <a:rPr lang="en-US" smtClean="0"/>
-              <a:t>7/17/2026</a:t>
+              <a:t>7/30/2026</a:t>
             </a:fld>
             <a:endParaRPr lang="en-US" dirty="0"/>
           </a:p>
@@ -2264,7 +2270,7 @@
           <a:p>
             <a:fld id="{C655C81E-72E7-4D05-94B5-F45B321A525D}" type="datetime1">
               <a:rPr lang="ko-KR" altLang="en-US" noProof="0" smtClean="0"/>
-              <a:t>2026-07-17</a:t>
+              <a:t>2026-07-30</a:t>
             </a:fld>
             <a:endParaRPr lang="ko-KR" altLang="en-US" noProof="0" dirty="0">
               <a:latin typeface="맑은 고딕" panose="020B0503020000020004" pitchFamily="50" charset="-127"/>
@@ -3065,6 +3071,2594 @@
         <p:cNvPr id="1" name="">
           <a:extLst>
             <a:ext uri="{FF2B5EF4-FFF2-40B4-BE49-F238E27FC236}">
+              <a16:creationId xmlns:a16="http://schemas.microsoft.com/office/drawing/2014/main" id="{86FDAD8E-817C-3E4B-143B-51A72B003138}"/>
+            </a:ext>
+          </a:extLst>
+        </p:cNvPr>
+        <p:cNvGrpSpPr/>
+        <p:nvPr/>
+      </p:nvGrpSpPr>
+      <p:grpSpPr>
+        <a:xfrm>
+          <a:off x="0" y="0"/>
+          <a:ext cx="0" cy="0"/>
+          <a:chOff x="0" y="0"/>
+          <a:chExt cx="0" cy="0"/>
+        </a:xfrm>
+      </p:grpSpPr>
+      <p:sp>
+        <p:nvSpPr>
+          <p:cNvPr id="4" name="슬라이드 번호 개체 틀 3">
+            <a:extLst>
+              <a:ext uri="{FF2B5EF4-FFF2-40B4-BE49-F238E27FC236}">
+                <a16:creationId xmlns:a16="http://schemas.microsoft.com/office/drawing/2014/main" id="{8D8C690B-1A36-FBAB-0ABF-B1BA5339B799}"/>
+              </a:ext>
+            </a:extLst>
+          </p:cNvPr>
+          <p:cNvSpPr>
+            <a:spLocks noGrp="1"/>
+          </p:cNvSpPr>
+          <p:nvPr>
+            <p:ph type="sldNum" sz="quarter" idx="12"/>
+          </p:nvPr>
+        </p:nvSpPr>
+        <p:spPr>
+          <a:xfrm>
+            <a:off x="10514011" y="6036261"/>
+            <a:ext cx="753545" cy="365125"/>
+          </a:xfrm>
+        </p:spPr>
+        <p:txBody>
+          <a:bodyPr/>
+          <a:lstStyle/>
+          <a:p>
+            <a:fld id="{D57F1E4F-1CFF-5643-939E-217C01CDF565}" type="slidenum">
+              <a:rPr lang="en-US" smtClean="0"/>
+              <a:pPr/>
+              <a:t>10</a:t>
+            </a:fld>
+            <a:endParaRPr lang="en-US" dirty="0"/>
+          </a:p>
+        </p:txBody>
+      </p:sp>
+      <p:sp>
+        <p:nvSpPr>
+          <p:cNvPr id="3" name="제목 1">
+            <a:extLst>
+              <a:ext uri="{FF2B5EF4-FFF2-40B4-BE49-F238E27FC236}">
+                <a16:creationId xmlns:a16="http://schemas.microsoft.com/office/drawing/2014/main" id="{C9E8235B-A26E-8524-42D9-C62BA9C055CE}"/>
+              </a:ext>
+            </a:extLst>
+          </p:cNvPr>
+          <p:cNvSpPr txBox="1">
+            <a:spLocks/>
+          </p:cNvSpPr>
+          <p:nvPr/>
+        </p:nvSpPr>
+        <p:spPr>
+          <a:xfrm>
+            <a:off x="475645" y="481983"/>
+            <a:ext cx="10353762" cy="766439"/>
+          </a:xfrm>
+          <a:prstGeom prst="rect">
+            <a:avLst/>
+          </a:prstGeom>
+        </p:spPr>
+        <p:txBody>
+          <a:bodyPr vert="horz" lIns="91440" tIns="45720" rIns="91440" bIns="45720" rtlCol="0" anchor="ctr">
+            <a:normAutofit/>
+          </a:bodyPr>
+          <a:lstStyle>
+            <a:lvl1pPr algn="ctr" defTabSz="914400" rtl="0" eaLnBrk="1" latinLnBrk="1" hangingPunct="1">
+              <a:lnSpc>
+                <a:spcPct val="90000"/>
+              </a:lnSpc>
+              <a:spcBef>
+                <a:spcPct val="0"/>
+              </a:spcBef>
+              <a:buNone/>
+              <a:defRPr sz="3200" kern="1200" cap="all" baseline="0">
+                <a:solidFill>
+                  <a:schemeClr val="tx1"/>
+                </a:solidFill>
+                <a:effectLst/>
+                <a:latin typeface="Batang" panose="02030600000101010101" pitchFamily="18" charset="-127"/>
+                <a:ea typeface="Batang" panose="02030600000101010101" pitchFamily="18" charset="-127"/>
+                <a:cs typeface="+mj-cs"/>
+              </a:defRPr>
+            </a:lvl1pPr>
+          </a:lstStyle>
+          <a:p>
+            <a:pPr algn="l"/>
+            <a:r>
+              <a:rPr lang="en-US" altLang="ko-KR" sz="2800" cap="none" dirty="0">
+                <a:solidFill>
+                  <a:schemeClr val="bg2">
+                    <a:lumMod val="25000"/>
+                  </a:schemeClr>
+                </a:solidFill>
+                <a:latin typeface="D2Coding" panose="020B0609020101020101" pitchFamily="49" charset="-127"/>
+                <a:ea typeface="D2Coding" panose="020B0609020101020101" pitchFamily="49" charset="-127"/>
+                <a:cs typeface="Segoe UI Light" panose="020B0502040204020203" pitchFamily="34" charset="0"/>
+              </a:rPr>
+              <a:t>Embeddings: Converting Text to Numbers</a:t>
+            </a:r>
+            <a:endParaRPr lang="ko-KR" altLang="en-US" sz="2800" cap="none" dirty="0">
+              <a:solidFill>
+                <a:schemeClr val="bg2">
+                  <a:lumMod val="25000"/>
+                </a:schemeClr>
+              </a:solidFill>
+              <a:latin typeface="D2Coding" panose="020B0609020101020101" pitchFamily="49" charset="-127"/>
+              <a:ea typeface="D2Coding" panose="020B0609020101020101" pitchFamily="49" charset="-127"/>
+              <a:cs typeface="Segoe UI Light" panose="020B0502040204020203" pitchFamily="34" charset="0"/>
+            </a:endParaRPr>
+          </a:p>
+        </p:txBody>
+      </p:sp>
+      <p:sp>
+        <p:nvSpPr>
+          <p:cNvPr id="2" name="TextBox 1">
+            <a:extLst>
+              <a:ext uri="{FF2B5EF4-FFF2-40B4-BE49-F238E27FC236}">
+                <a16:creationId xmlns:a16="http://schemas.microsoft.com/office/drawing/2014/main" id="{525B9EBB-2E66-082D-EA15-D31933E2D58A}"/>
+              </a:ext>
+            </a:extLst>
+          </p:cNvPr>
+          <p:cNvSpPr txBox="1"/>
+          <p:nvPr/>
+        </p:nvSpPr>
+        <p:spPr>
+          <a:xfrm>
+            <a:off x="8439150" y="654811"/>
+            <a:ext cx="3181350" cy="400110"/>
+          </a:xfrm>
+          <a:prstGeom prst="rect">
+            <a:avLst/>
+          </a:prstGeom>
+          <a:noFill/>
+        </p:spPr>
+        <p:txBody>
+          <a:bodyPr wrap="square">
+            <a:spAutoFit/>
+          </a:bodyPr>
+          <a:lstStyle/>
+          <a:p>
+            <a:pPr algn="r"/>
+            <a:r>
+              <a:rPr lang="en-US" altLang="ko-KR" sz="2000" dirty="0">
+                <a:latin typeface="D2Coding" panose="020B0609020101020101" pitchFamily="49" charset="-127"/>
+                <a:ea typeface="D2Coding" panose="020B0609020101020101" pitchFamily="49" charset="-127"/>
+              </a:rPr>
+              <a:t>Embeddings Before LLMs</a:t>
+            </a:r>
+            <a:endParaRPr lang="ko-KR" altLang="en-US" sz="2000" dirty="0">
+              <a:latin typeface="D2Coding" panose="020B0609020101020101" pitchFamily="49" charset="-127"/>
+              <a:ea typeface="D2Coding" panose="020B0609020101020101" pitchFamily="49" charset="-127"/>
+            </a:endParaRPr>
+          </a:p>
+        </p:txBody>
+      </p:sp>
+      <p:pic>
+        <p:nvPicPr>
+          <p:cNvPr id="3074" name="Picture 2">
+            <a:extLst>
+              <a:ext uri="{FF2B5EF4-FFF2-40B4-BE49-F238E27FC236}">
+                <a16:creationId xmlns:a16="http://schemas.microsoft.com/office/drawing/2014/main" id="{2EFD2314-C375-B0E6-9A67-498A2AD4C924}"/>
+              </a:ext>
+            </a:extLst>
+          </p:cNvPr>
+          <p:cNvPicPr>
+            <a:picLocks noChangeAspect="1" noChangeArrowheads="1"/>
+          </p:cNvPicPr>
+          <p:nvPr/>
+        </p:nvPicPr>
+        <p:blipFill>
+          <a:blip r:embed="rId2">
+            <a:extLst>
+              <a:ext uri="{28A0092B-C50C-407E-A947-70E740481C1C}">
+                <a14:useLocalDpi xmlns:a14="http://schemas.microsoft.com/office/drawing/2010/main" val="0"/>
+              </a:ext>
+            </a:extLst>
+          </a:blip>
+          <a:srcRect/>
+          <a:stretch>
+            <a:fillRect/>
+          </a:stretch>
+        </p:blipFill>
+        <p:spPr bwMode="auto">
+          <a:xfrm>
+            <a:off x="1023376" y="2841595"/>
+            <a:ext cx="4686300" cy="2694091"/>
+          </a:xfrm>
+          <a:prstGeom prst="rect">
+            <a:avLst/>
+          </a:prstGeom>
+          <a:noFill/>
+          <a:extLst>
+            <a:ext uri="{909E8E84-426E-40DD-AFC4-6F175D3DCCD1}">
+              <a14:hiddenFill xmlns:a14="http://schemas.microsoft.com/office/drawing/2010/main">
+                <a:solidFill>
+                  <a:srgbClr val="FFFFFF"/>
+                </a:solidFill>
+              </a14:hiddenFill>
+            </a:ext>
+          </a:extLst>
+        </p:spPr>
+      </p:pic>
+      <p:sp>
+        <p:nvSpPr>
+          <p:cNvPr id="20" name="TextBox 19">
+            <a:extLst>
+              <a:ext uri="{FF2B5EF4-FFF2-40B4-BE49-F238E27FC236}">
+                <a16:creationId xmlns:a16="http://schemas.microsoft.com/office/drawing/2014/main" id="{FA2C1598-4E5C-FFC2-0164-1F80C2838B1C}"/>
+              </a:ext>
+            </a:extLst>
+          </p:cNvPr>
+          <p:cNvSpPr txBox="1"/>
+          <p:nvPr/>
+        </p:nvSpPr>
+        <p:spPr>
+          <a:xfrm>
+            <a:off x="1821656" y="2432427"/>
+            <a:ext cx="2883694" cy="374911"/>
+          </a:xfrm>
+          <a:prstGeom prst="rect">
+            <a:avLst/>
+          </a:prstGeom>
+          <a:noFill/>
+        </p:spPr>
+        <p:txBody>
+          <a:bodyPr wrap="square">
+            <a:spAutoFit/>
+          </a:bodyPr>
+          <a:lstStyle/>
+          <a:p>
+            <a:pPr algn="l">
+              <a:lnSpc>
+                <a:spcPts val="2250"/>
+              </a:lnSpc>
+              <a:buNone/>
+            </a:pPr>
+            <a:r>
+              <a:rPr lang="en-US" altLang="ko-KR" i="0" dirty="0">
+                <a:solidFill>
+                  <a:srgbClr val="242424"/>
+                </a:solidFill>
+                <a:effectLst/>
+                <a:latin typeface="D2Coding" panose="020B0609020101020101" pitchFamily="49" charset="-127"/>
+                <a:ea typeface="D2Coding" panose="020B0609020101020101" pitchFamily="49" charset="-127"/>
+              </a:rPr>
+              <a:t>Bag-of-Words algorithm</a:t>
+            </a:r>
+          </a:p>
+        </p:txBody>
+      </p:sp>
+      <p:sp>
+        <p:nvSpPr>
+          <p:cNvPr id="21" name="TextBox 20">
+            <a:extLst>
+              <a:ext uri="{FF2B5EF4-FFF2-40B4-BE49-F238E27FC236}">
+                <a16:creationId xmlns:a16="http://schemas.microsoft.com/office/drawing/2014/main" id="{2F6E6BED-D1C7-5B12-63BC-A7CC9B130F97}"/>
+              </a:ext>
+            </a:extLst>
+          </p:cNvPr>
+          <p:cNvSpPr txBox="1"/>
+          <p:nvPr/>
+        </p:nvSpPr>
+        <p:spPr>
+          <a:xfrm>
+            <a:off x="1023376" y="5672691"/>
+            <a:ext cx="4605899" cy="663002"/>
+          </a:xfrm>
+          <a:prstGeom prst="rect">
+            <a:avLst/>
+          </a:prstGeom>
+          <a:noFill/>
+        </p:spPr>
+        <p:txBody>
+          <a:bodyPr wrap="square">
+            <a:spAutoFit/>
+          </a:bodyPr>
+          <a:lstStyle/>
+          <a:p>
+            <a:pPr marL="285750" indent="-285750">
+              <a:lnSpc>
+                <a:spcPts val="2250"/>
+              </a:lnSpc>
+              <a:buFont typeface="Wingdings" panose="05000000000000000000" pitchFamily="2" charset="2"/>
+              <a:buChar char="§"/>
+            </a:pPr>
+            <a:r>
+              <a:rPr lang="en-US" altLang="ko-KR" sz="1600" i="0" dirty="0">
+                <a:solidFill>
+                  <a:srgbClr val="242424"/>
+                </a:solidFill>
+                <a:effectLst/>
+                <a:latin typeface="D2Coding" panose="020B0609020101020101" pitchFamily="49" charset="-127"/>
+                <a:ea typeface="D2Coding" panose="020B0609020101020101" pitchFamily="49" charset="-127"/>
+              </a:rPr>
+              <a:t>Bag-of-N grams algorithm</a:t>
+            </a:r>
+          </a:p>
+          <a:p>
+            <a:pPr marL="285750" indent="-285750">
+              <a:lnSpc>
+                <a:spcPts val="2250"/>
+              </a:lnSpc>
+              <a:buFont typeface="Wingdings" panose="05000000000000000000" pitchFamily="2" charset="2"/>
+              <a:buChar char="§"/>
+            </a:pPr>
+            <a:r>
+              <a:rPr lang="en-US" altLang="ko-KR" sz="1600" dirty="0">
+                <a:solidFill>
+                  <a:srgbClr val="242424"/>
+                </a:solidFill>
+                <a:latin typeface="D2Coding" panose="020B0609020101020101" pitchFamily="49" charset="-127"/>
+                <a:ea typeface="D2Coding" panose="020B0609020101020101" pitchFamily="49" charset="-127"/>
+              </a:rPr>
+              <a:t>TF-IDF algorithm</a:t>
+            </a:r>
+          </a:p>
+        </p:txBody>
+      </p:sp>
+      <p:sp>
+        <p:nvSpPr>
+          <p:cNvPr id="26" name="TextBox 25">
+            <a:extLst>
+              <a:ext uri="{FF2B5EF4-FFF2-40B4-BE49-F238E27FC236}">
+                <a16:creationId xmlns:a16="http://schemas.microsoft.com/office/drawing/2014/main" id="{AD20AD1A-9057-226C-BDF3-65256712E4FE}"/>
+              </a:ext>
+            </a:extLst>
+          </p:cNvPr>
+          <p:cNvSpPr txBox="1"/>
+          <p:nvPr/>
+        </p:nvSpPr>
+        <p:spPr>
+          <a:xfrm>
+            <a:off x="7648575" y="3017294"/>
+            <a:ext cx="4029075" cy="1448153"/>
+          </a:xfrm>
+          <a:prstGeom prst="rect">
+            <a:avLst/>
+          </a:prstGeom>
+          <a:noFill/>
+        </p:spPr>
+        <p:txBody>
+          <a:bodyPr wrap="square">
+            <a:spAutoFit/>
+          </a:bodyPr>
+          <a:lstStyle/>
+          <a:p>
+            <a:pPr marL="285750" indent="-285750">
+              <a:lnSpc>
+                <a:spcPct val="200000"/>
+              </a:lnSpc>
+              <a:buFont typeface="Wingdings" panose="05000000000000000000" pitchFamily="2" charset="2"/>
+              <a:buChar char="v"/>
+            </a:pPr>
+            <a:r>
+              <a:rPr lang="ko-KR" altLang="en-US" sz="1600" dirty="0">
+                <a:latin typeface="D2Coding" panose="020B0609020101020101" pitchFamily="49" charset="-127"/>
+                <a:ea typeface="D2Coding" panose="020B0609020101020101" pitchFamily="49" charset="-127"/>
+              </a:rPr>
+              <a:t>희소 </a:t>
+            </a:r>
+            <a:r>
+              <a:rPr lang="ko-KR" altLang="en-US" sz="1600" dirty="0" err="1">
+                <a:latin typeface="D2Coding" panose="020B0609020101020101" pitchFamily="49" charset="-127"/>
+                <a:ea typeface="D2Coding" panose="020B0609020101020101" pitchFamily="49" charset="-127"/>
+              </a:rPr>
+              <a:t>임베딩</a:t>
+            </a:r>
+            <a:r>
+              <a:rPr lang="en-US" altLang="ko-KR" sz="1600" dirty="0">
+                <a:latin typeface="D2Coding" panose="020B0609020101020101" pitchFamily="49" charset="-127"/>
+                <a:ea typeface="D2Coding" panose="020B0609020101020101" pitchFamily="49" charset="-127"/>
+              </a:rPr>
+              <a:t>(Sparse Embedding)</a:t>
+            </a:r>
+          </a:p>
+          <a:p>
+            <a:pPr marL="285750" indent="-285750">
+              <a:lnSpc>
+                <a:spcPct val="200000"/>
+              </a:lnSpc>
+              <a:buFont typeface="Wingdings" panose="05000000000000000000" pitchFamily="2" charset="2"/>
+              <a:buChar char="v"/>
+            </a:pPr>
+            <a:r>
+              <a:rPr lang="ko-KR" altLang="en-US" sz="1600" dirty="0">
+                <a:latin typeface="D2Coding" panose="020B0609020101020101" pitchFamily="49" charset="-127"/>
+                <a:ea typeface="D2Coding" panose="020B0609020101020101" pitchFamily="49" charset="-127"/>
+              </a:rPr>
+              <a:t>의미인식 불가</a:t>
+            </a:r>
+            <a:r>
+              <a:rPr lang="en-US" altLang="ko-KR" sz="1600" dirty="0">
+                <a:latin typeface="D2Coding" panose="020B0609020101020101" pitchFamily="49" charset="-127"/>
+                <a:ea typeface="D2Coding" panose="020B0609020101020101" pitchFamily="49" charset="-127"/>
+              </a:rPr>
+              <a:t>(No Semantic Embedding)</a:t>
+            </a:r>
+          </a:p>
+          <a:p>
+            <a:pPr lvl="1">
+              <a:lnSpc>
+                <a:spcPct val="200000"/>
+              </a:lnSpc>
+            </a:pPr>
+            <a:r>
+              <a:rPr lang="en-US" altLang="ko-KR" sz="1400" dirty="0">
+                <a:latin typeface="D2Coding" panose="020B0609020101020101" pitchFamily="49" charset="-127"/>
+                <a:ea typeface="D2Coding" panose="020B0609020101020101" pitchFamily="49" charset="-127"/>
+              </a:rPr>
+              <a:t>bright skies, sunny day</a:t>
+            </a:r>
+            <a:endParaRPr lang="ko-KR" altLang="en-US" sz="1400" dirty="0">
+              <a:latin typeface="D2Coding" panose="020B0609020101020101" pitchFamily="49" charset="-127"/>
+              <a:ea typeface="D2Coding" panose="020B0609020101020101" pitchFamily="49" charset="-127"/>
+            </a:endParaRPr>
+          </a:p>
+        </p:txBody>
+      </p:sp>
+      <p:sp>
+        <p:nvSpPr>
+          <p:cNvPr id="27" name="화살표: 줄무늬가 있는 오른쪽 26">
+            <a:extLst>
+              <a:ext uri="{FF2B5EF4-FFF2-40B4-BE49-F238E27FC236}">
+                <a16:creationId xmlns:a16="http://schemas.microsoft.com/office/drawing/2014/main" id="{B0B89421-3C18-1368-F3CA-D73E197124E2}"/>
+              </a:ext>
+            </a:extLst>
+          </p:cNvPr>
+          <p:cNvSpPr/>
+          <p:nvPr/>
+        </p:nvSpPr>
+        <p:spPr>
+          <a:xfrm>
+            <a:off x="6153151" y="3267074"/>
+            <a:ext cx="1238250" cy="1038225"/>
+          </a:xfrm>
+          <a:prstGeom prst="stripedRightArrow">
+            <a:avLst>
+              <a:gd name="adj1" fmla="val 70184"/>
+              <a:gd name="adj2" fmla="val 50000"/>
+            </a:avLst>
+          </a:prstGeom>
+        </p:spPr>
+        <p:style>
+          <a:lnRef idx="2">
+            <a:schemeClr val="accent1">
+              <a:shade val="15000"/>
+            </a:schemeClr>
+          </a:lnRef>
+          <a:fillRef idx="1">
+            <a:schemeClr val="accent1"/>
+          </a:fillRef>
+          <a:effectRef idx="0">
+            <a:schemeClr val="accent1"/>
+          </a:effectRef>
+          <a:fontRef idx="minor">
+            <a:schemeClr val="lt1"/>
+          </a:fontRef>
+        </p:style>
+        <p:txBody>
+          <a:bodyPr rtlCol="0" anchor="ctr"/>
+          <a:lstStyle/>
+          <a:p>
+            <a:pPr algn="ctr"/>
+            <a:r>
+              <a:rPr lang="ko-KR" altLang="en-US" sz="1600">
+                <a:latin typeface="D2Coding" panose="020B0609020101020101" pitchFamily="49" charset="-127"/>
+                <a:ea typeface="D2Coding" panose="020B0609020101020101" pitchFamily="49" charset="-127"/>
+              </a:rPr>
+              <a:t>약점</a:t>
+            </a:r>
+          </a:p>
+        </p:txBody>
+      </p:sp>
+      <p:sp>
+        <p:nvSpPr>
+          <p:cNvPr id="29" name="TextBox 28">
+            <a:extLst>
+              <a:ext uri="{FF2B5EF4-FFF2-40B4-BE49-F238E27FC236}">
+                <a16:creationId xmlns:a16="http://schemas.microsoft.com/office/drawing/2014/main" id="{A244DD2D-AA4F-98C3-EC7B-F918809EAB6C}"/>
+              </a:ext>
+            </a:extLst>
+          </p:cNvPr>
+          <p:cNvSpPr txBox="1"/>
+          <p:nvPr/>
+        </p:nvSpPr>
+        <p:spPr>
+          <a:xfrm>
+            <a:off x="552450" y="1248422"/>
+            <a:ext cx="11068050" cy="793166"/>
+          </a:xfrm>
+          <a:prstGeom prst="rect">
+            <a:avLst/>
+          </a:prstGeom>
+          <a:noFill/>
+        </p:spPr>
+        <p:txBody>
+          <a:bodyPr wrap="square">
+            <a:spAutoFit/>
+          </a:bodyPr>
+          <a:lstStyle/>
+          <a:p>
+            <a:pPr>
+              <a:lnSpc>
+                <a:spcPct val="150000"/>
+              </a:lnSpc>
+              <a:buNone/>
+            </a:pPr>
+            <a:r>
+              <a:rPr lang="ko-KR" altLang="en-US" sz="1600" dirty="0">
+                <a:latin typeface="D2Coding" panose="020B0609020101020101" pitchFamily="49" charset="-127"/>
+                <a:ea typeface="D2Coding" panose="020B0609020101020101" pitchFamily="49" charset="-127"/>
+              </a:rPr>
+              <a:t>모든</a:t>
+            </a:r>
+            <a:r>
+              <a:rPr lang="en-US" altLang="ko-KR" sz="1600" dirty="0">
+                <a:latin typeface="D2Coding" panose="020B0609020101020101" pitchFamily="49" charset="-127"/>
+                <a:ea typeface="D2Coding" panose="020B0609020101020101" pitchFamily="49" charset="-127"/>
+              </a:rPr>
+              <a:t> </a:t>
+            </a:r>
+            <a:r>
+              <a:rPr lang="ko-KR" altLang="en-US" sz="1600" dirty="0">
+                <a:latin typeface="D2Coding" panose="020B0609020101020101" pitchFamily="49" charset="-127"/>
+                <a:ea typeface="D2Coding" panose="020B0609020101020101" pitchFamily="49" charset="-127"/>
+              </a:rPr>
+              <a:t>단어의</a:t>
+            </a:r>
+            <a:r>
+              <a:rPr lang="en-US" altLang="ko-KR" sz="1600" dirty="0">
+                <a:latin typeface="D2Coding" panose="020B0609020101020101" pitchFamily="49" charset="-127"/>
+                <a:ea typeface="D2Coding" panose="020B0609020101020101" pitchFamily="49" charset="-127"/>
+              </a:rPr>
+              <a:t> </a:t>
+            </a:r>
+            <a:r>
+              <a:rPr lang="ko-KR" altLang="en-US" sz="1600" dirty="0">
+                <a:latin typeface="D2Coding" panose="020B0609020101020101" pitchFamily="49" charset="-127"/>
+                <a:ea typeface="D2Coding" panose="020B0609020101020101" pitchFamily="49" charset="-127"/>
+              </a:rPr>
+              <a:t>출현빈도를</a:t>
+            </a:r>
+            <a:r>
+              <a:rPr lang="en-US" altLang="ko-KR" sz="1600" dirty="0">
+                <a:latin typeface="D2Coding" panose="020B0609020101020101" pitchFamily="49" charset="-127"/>
+                <a:ea typeface="D2Coding" panose="020B0609020101020101" pitchFamily="49" charset="-127"/>
+              </a:rPr>
+              <a:t> </a:t>
+            </a:r>
+            <a:r>
+              <a:rPr lang="ko-KR" altLang="en-US" sz="1600" dirty="0">
+                <a:latin typeface="D2Coding" panose="020B0609020101020101" pitchFamily="49" charset="-127"/>
+                <a:ea typeface="D2Coding" panose="020B0609020101020101" pitchFamily="49" charset="-127"/>
+              </a:rPr>
+              <a:t>세어야</a:t>
+            </a:r>
+            <a:r>
+              <a:rPr lang="en-US" altLang="ko-KR" sz="1600" dirty="0">
+                <a:latin typeface="D2Coding" panose="020B0609020101020101" pitchFamily="49" charset="-127"/>
+                <a:ea typeface="D2Coding" panose="020B0609020101020101" pitchFamily="49" charset="-127"/>
+              </a:rPr>
+              <a:t> </a:t>
+            </a:r>
+            <a:r>
+              <a:rPr lang="ko-KR" altLang="en-US" sz="1600" dirty="0">
+                <a:latin typeface="D2Coding" panose="020B0609020101020101" pitchFamily="49" charset="-127"/>
+                <a:ea typeface="D2Coding" panose="020B0609020101020101" pitchFamily="49" charset="-127"/>
+              </a:rPr>
+              <a:t>하니</a:t>
+            </a:r>
+            <a:r>
+              <a:rPr lang="en-US" altLang="ko-KR" sz="1600" dirty="0">
+                <a:latin typeface="D2Coding" panose="020B0609020101020101" pitchFamily="49" charset="-127"/>
+                <a:ea typeface="D2Coding" panose="020B0609020101020101" pitchFamily="49" charset="-127"/>
+              </a:rPr>
+              <a:t> </a:t>
+            </a:r>
+            <a:r>
+              <a:rPr lang="ko-KR" altLang="en-US" sz="1600" dirty="0">
+                <a:latin typeface="D2Coding" panose="020B0609020101020101" pitchFamily="49" charset="-127"/>
+                <a:ea typeface="D2Coding" panose="020B0609020101020101" pitchFamily="49" charset="-127"/>
+              </a:rPr>
+              <a:t>한</a:t>
+            </a:r>
+            <a:r>
+              <a:rPr lang="en-US" altLang="ko-KR" sz="1600" dirty="0">
+                <a:latin typeface="D2Coding" panose="020B0609020101020101" pitchFamily="49" charset="-127"/>
+                <a:ea typeface="D2Coding" panose="020B0609020101020101" pitchFamily="49" charset="-127"/>
+              </a:rPr>
+              <a:t> </a:t>
+            </a:r>
+            <a:r>
+              <a:rPr lang="ko-KR" altLang="en-US" sz="1600" dirty="0">
+                <a:latin typeface="D2Coding" panose="020B0609020101020101" pitchFamily="49" charset="-127"/>
+                <a:ea typeface="D2Coding" panose="020B0609020101020101" pitchFamily="49" charset="-127"/>
+              </a:rPr>
+              <a:t>문장의</a:t>
+            </a:r>
+            <a:r>
+              <a:rPr lang="en-US" altLang="ko-KR" sz="1600" dirty="0">
+                <a:latin typeface="D2Coding" panose="020B0609020101020101" pitchFamily="49" charset="-127"/>
+                <a:ea typeface="D2Coding" panose="020B0609020101020101" pitchFamily="49" charset="-127"/>
+              </a:rPr>
+              <a:t> </a:t>
+            </a:r>
+            <a:r>
+              <a:rPr lang="ko-KR" altLang="en-US" sz="1600" dirty="0">
+                <a:latin typeface="D2Coding" panose="020B0609020101020101" pitchFamily="49" charset="-127"/>
+                <a:ea typeface="D2Coding" panose="020B0609020101020101" pitchFamily="49" charset="-127"/>
+              </a:rPr>
+              <a:t>벡터</a:t>
+            </a:r>
+            <a:r>
+              <a:rPr lang="en-US" altLang="ko-KR" sz="1600" dirty="0">
+                <a:latin typeface="D2Coding" panose="020B0609020101020101" pitchFamily="49" charset="-127"/>
+                <a:ea typeface="D2Coding" panose="020B0609020101020101" pitchFamily="49" charset="-127"/>
+              </a:rPr>
+              <a:t> </a:t>
+            </a:r>
+            <a:r>
+              <a:rPr lang="ko-KR" altLang="en-US" sz="1600" dirty="0">
+                <a:latin typeface="D2Coding" panose="020B0609020101020101" pitchFamily="49" charset="-127"/>
+                <a:ea typeface="D2Coding" panose="020B0609020101020101" pitchFamily="49" charset="-127"/>
+              </a:rPr>
+              <a:t>길이는</a:t>
+            </a:r>
+            <a:r>
+              <a:rPr lang="en-US" altLang="ko-KR" sz="1600" dirty="0">
+                <a:latin typeface="D2Coding" panose="020B0609020101020101" pitchFamily="49" charset="-127"/>
+                <a:ea typeface="D2Coding" panose="020B0609020101020101" pitchFamily="49" charset="-127"/>
+              </a:rPr>
+              <a:t> </a:t>
+            </a:r>
+            <a:r>
+              <a:rPr lang="ko-KR" altLang="en-US" sz="1600" dirty="0">
+                <a:latin typeface="D2Coding" panose="020B0609020101020101" pitchFamily="49" charset="-127"/>
+                <a:ea typeface="D2Coding" panose="020B0609020101020101" pitchFamily="49" charset="-127"/>
+              </a:rPr>
+              <a:t>단어</a:t>
+            </a:r>
+            <a:r>
+              <a:rPr lang="en-US" altLang="ko-KR" sz="1600" dirty="0">
+                <a:latin typeface="D2Coding" panose="020B0609020101020101" pitchFamily="49" charset="-127"/>
+                <a:ea typeface="D2Coding" panose="020B0609020101020101" pitchFamily="49" charset="-127"/>
+              </a:rPr>
+              <a:t> </a:t>
+            </a:r>
+            <a:r>
+              <a:rPr lang="ko-KR" altLang="en-US" sz="1600" dirty="0">
+                <a:latin typeface="D2Coding" panose="020B0609020101020101" pitchFamily="49" charset="-127"/>
+                <a:ea typeface="D2Coding" panose="020B0609020101020101" pitchFamily="49" charset="-127"/>
+              </a:rPr>
+              <a:t>수만큼</a:t>
+            </a:r>
+            <a:r>
+              <a:rPr lang="en-US" altLang="ko-KR" sz="1600" dirty="0">
+                <a:latin typeface="D2Coding" panose="020B0609020101020101" pitchFamily="49" charset="-127"/>
+                <a:ea typeface="D2Coding" panose="020B0609020101020101" pitchFamily="49" charset="-127"/>
+              </a:rPr>
+              <a:t> </a:t>
+            </a:r>
+            <a:r>
+              <a:rPr lang="ko-KR" altLang="en-US" sz="1600" dirty="0">
+                <a:latin typeface="D2Coding" panose="020B0609020101020101" pitchFamily="49" charset="-127"/>
+                <a:ea typeface="D2Coding" panose="020B0609020101020101" pitchFamily="49" charset="-127"/>
+              </a:rPr>
+              <a:t>커지고</a:t>
+            </a:r>
+            <a:r>
+              <a:rPr lang="en-US" altLang="ko-KR" sz="1600" dirty="0">
+                <a:latin typeface="D2Coding" panose="020B0609020101020101" pitchFamily="49" charset="-127"/>
+                <a:ea typeface="D2Coding" panose="020B0609020101020101" pitchFamily="49" charset="-127"/>
+              </a:rPr>
+              <a:t> </a:t>
+            </a:r>
+            <a:r>
+              <a:rPr lang="ko-KR" altLang="en-US" sz="1600" dirty="0">
+                <a:latin typeface="D2Coding" panose="020B0609020101020101" pitchFamily="49" charset="-127"/>
+                <a:ea typeface="D2Coding" panose="020B0609020101020101" pitchFamily="49" charset="-127"/>
+              </a:rPr>
+              <a:t>대부분</a:t>
+            </a:r>
+            <a:r>
+              <a:rPr lang="en-US" altLang="ko-KR" sz="1600" dirty="0">
+                <a:latin typeface="D2Coding" panose="020B0609020101020101" pitchFamily="49" charset="-127"/>
+                <a:ea typeface="D2Coding" panose="020B0609020101020101" pitchFamily="49" charset="-127"/>
+              </a:rPr>
+              <a:t> 0</a:t>
+            </a:r>
+            <a:r>
+              <a:rPr lang="ko-KR" altLang="en-US" sz="1600" dirty="0">
+                <a:latin typeface="D2Coding" panose="020B0609020101020101" pitchFamily="49" charset="-127"/>
+                <a:ea typeface="D2Coding" panose="020B0609020101020101" pitchFamily="49" charset="-127"/>
+              </a:rPr>
+              <a:t>으로</a:t>
+            </a:r>
+            <a:r>
+              <a:rPr lang="en-US" altLang="ko-KR" sz="1600" dirty="0">
+                <a:latin typeface="D2Coding" panose="020B0609020101020101" pitchFamily="49" charset="-127"/>
+                <a:ea typeface="D2Coding" panose="020B0609020101020101" pitchFamily="49" charset="-127"/>
+              </a:rPr>
+              <a:t> </a:t>
+            </a:r>
+            <a:r>
+              <a:rPr lang="ko-KR" altLang="en-US" sz="1600" dirty="0">
+                <a:latin typeface="D2Coding" panose="020B0609020101020101" pitchFamily="49" charset="-127"/>
+                <a:ea typeface="D2Coding" panose="020B0609020101020101" pitchFamily="49" charset="-127"/>
+              </a:rPr>
+              <a:t>구성하여 자원의 손실부작용과</a:t>
+            </a:r>
+            <a:r>
+              <a:rPr lang="en-US" altLang="ko-KR" sz="1600" dirty="0">
+                <a:latin typeface="D2Coding" panose="020B0609020101020101" pitchFamily="49" charset="-127"/>
+                <a:ea typeface="D2Coding" panose="020B0609020101020101" pitchFamily="49" charset="-127"/>
+              </a:rPr>
+              <a:t> </a:t>
+            </a:r>
+            <a:r>
+              <a:rPr lang="ko-KR" altLang="en-US" sz="1600" dirty="0">
+                <a:latin typeface="D2Coding" panose="020B0609020101020101" pitchFamily="49" charset="-127"/>
+                <a:ea typeface="D2Coding" panose="020B0609020101020101" pitchFamily="49" charset="-127"/>
+              </a:rPr>
+              <a:t>단어의 순서를 고려하지 않기</a:t>
+            </a:r>
+            <a:r>
+              <a:rPr lang="en-US" altLang="ko-KR" sz="1600" dirty="0">
+                <a:latin typeface="D2Coding" panose="020B0609020101020101" pitchFamily="49" charset="-127"/>
+                <a:ea typeface="D2Coding" panose="020B0609020101020101" pitchFamily="49" charset="-127"/>
+              </a:rPr>
+              <a:t> </a:t>
+            </a:r>
+            <a:r>
+              <a:rPr lang="ko-KR" altLang="en-US" sz="1600" dirty="0">
+                <a:latin typeface="D2Coding" panose="020B0609020101020101" pitchFamily="49" charset="-127"/>
+                <a:ea typeface="D2Coding" panose="020B0609020101020101" pitchFamily="49" charset="-127"/>
+              </a:rPr>
+              <a:t>때문에 단어의 의미를</a:t>
+            </a:r>
+            <a:r>
+              <a:rPr lang="en-US" altLang="ko-KR" sz="1600" dirty="0">
+                <a:latin typeface="D2Coding" panose="020B0609020101020101" pitchFamily="49" charset="-127"/>
+                <a:ea typeface="D2Coding" panose="020B0609020101020101" pitchFamily="49" charset="-127"/>
+              </a:rPr>
+              <a:t> </a:t>
+            </a:r>
+            <a:r>
+              <a:rPr lang="ko-KR" altLang="en-US" sz="1600" dirty="0">
+                <a:latin typeface="D2Coding" panose="020B0609020101020101" pitchFamily="49" charset="-127"/>
+                <a:ea typeface="D2Coding" panose="020B0609020101020101" pitchFamily="49" charset="-127"/>
+              </a:rPr>
+              <a:t>나타낼</a:t>
+            </a:r>
+            <a:r>
+              <a:rPr lang="en-US" altLang="ko-KR" sz="1600" dirty="0">
+                <a:latin typeface="D2Coding" panose="020B0609020101020101" pitchFamily="49" charset="-127"/>
+                <a:ea typeface="D2Coding" panose="020B0609020101020101" pitchFamily="49" charset="-127"/>
+              </a:rPr>
+              <a:t> </a:t>
+            </a:r>
+            <a:r>
+              <a:rPr lang="ko-KR" altLang="en-US" sz="1600" dirty="0">
+                <a:latin typeface="D2Coding" panose="020B0609020101020101" pitchFamily="49" charset="-127"/>
+                <a:ea typeface="D2Coding" panose="020B0609020101020101" pitchFamily="49" charset="-127"/>
+              </a:rPr>
+              <a:t>수가</a:t>
+            </a:r>
+            <a:r>
+              <a:rPr lang="en-US" altLang="ko-KR" sz="1600" dirty="0">
+                <a:latin typeface="D2Coding" panose="020B0609020101020101" pitchFamily="49" charset="-127"/>
+                <a:ea typeface="D2Coding" panose="020B0609020101020101" pitchFamily="49" charset="-127"/>
+              </a:rPr>
+              <a:t> </a:t>
+            </a:r>
+            <a:r>
+              <a:rPr lang="ko-KR" altLang="en-US" sz="1600" dirty="0">
+                <a:latin typeface="D2Coding" panose="020B0609020101020101" pitchFamily="49" charset="-127"/>
+                <a:ea typeface="D2Coding" panose="020B0609020101020101" pitchFamily="49" charset="-127"/>
+              </a:rPr>
+              <a:t>없음</a:t>
+            </a:r>
+          </a:p>
+        </p:txBody>
+      </p:sp>
+    </p:spTree>
+    <p:extLst>
+      <p:ext uri="{BB962C8B-B14F-4D97-AF65-F5344CB8AC3E}">
+        <p14:creationId xmlns:p14="http://schemas.microsoft.com/office/powerpoint/2010/main" val="1824194667"/>
+      </p:ext>
+    </p:extLst>
+  </p:cSld>
+  <p:clrMapOvr>
+    <a:masterClrMapping/>
+  </p:clrMapOvr>
+</p:sld>
+</file>
+
+<file path=ppt/slides/slide11.xml><?xml version="1.0" encoding="utf-8"?>
+<p:sld xmlns:a="http://schemas.openxmlformats.org/drawingml/2006/main" xmlns:r="http://schemas.openxmlformats.org/officeDocument/2006/relationships" xmlns:p="http://schemas.openxmlformats.org/presentationml/2006/main">
+  <p:cSld>
+    <p:spTree>
+      <p:nvGrpSpPr>
+        <p:cNvPr id="1" name="">
+          <a:extLst>
+            <a:ext uri="{FF2B5EF4-FFF2-40B4-BE49-F238E27FC236}">
+              <a16:creationId xmlns:a16="http://schemas.microsoft.com/office/drawing/2014/main" id="{3E0D1FBD-90CF-E311-8358-701261E9B0A2}"/>
+            </a:ext>
+          </a:extLst>
+        </p:cNvPr>
+        <p:cNvGrpSpPr/>
+        <p:nvPr/>
+      </p:nvGrpSpPr>
+      <p:grpSpPr>
+        <a:xfrm>
+          <a:off x="0" y="0"/>
+          <a:ext cx="0" cy="0"/>
+          <a:chOff x="0" y="0"/>
+          <a:chExt cx="0" cy="0"/>
+        </a:xfrm>
+      </p:grpSpPr>
+      <p:sp>
+        <p:nvSpPr>
+          <p:cNvPr id="4" name="슬라이드 번호 개체 틀 3">
+            <a:extLst>
+              <a:ext uri="{FF2B5EF4-FFF2-40B4-BE49-F238E27FC236}">
+                <a16:creationId xmlns:a16="http://schemas.microsoft.com/office/drawing/2014/main" id="{809C8D74-9333-A0DA-A789-DD724ABC1902}"/>
+              </a:ext>
+            </a:extLst>
+          </p:cNvPr>
+          <p:cNvSpPr>
+            <a:spLocks noGrp="1"/>
+          </p:cNvSpPr>
+          <p:nvPr>
+            <p:ph type="sldNum" sz="quarter" idx="12"/>
+          </p:nvPr>
+        </p:nvSpPr>
+        <p:spPr>
+          <a:xfrm>
+            <a:off x="10514011" y="6036261"/>
+            <a:ext cx="753545" cy="365125"/>
+          </a:xfrm>
+        </p:spPr>
+        <p:txBody>
+          <a:bodyPr/>
+          <a:lstStyle/>
+          <a:p>
+            <a:fld id="{D57F1E4F-1CFF-5643-939E-217C01CDF565}" type="slidenum">
+              <a:rPr lang="en-US" smtClean="0"/>
+              <a:pPr/>
+              <a:t>11</a:t>
+            </a:fld>
+            <a:endParaRPr lang="en-US" dirty="0"/>
+          </a:p>
+        </p:txBody>
+      </p:sp>
+      <p:sp>
+        <p:nvSpPr>
+          <p:cNvPr id="3" name="제목 1">
+            <a:extLst>
+              <a:ext uri="{FF2B5EF4-FFF2-40B4-BE49-F238E27FC236}">
+                <a16:creationId xmlns:a16="http://schemas.microsoft.com/office/drawing/2014/main" id="{FA5F9116-57D8-A712-175C-249585981793}"/>
+              </a:ext>
+            </a:extLst>
+          </p:cNvPr>
+          <p:cNvSpPr txBox="1">
+            <a:spLocks/>
+          </p:cNvSpPr>
+          <p:nvPr/>
+        </p:nvSpPr>
+        <p:spPr>
+          <a:xfrm>
+            <a:off x="475645" y="481983"/>
+            <a:ext cx="10353762" cy="766439"/>
+          </a:xfrm>
+          <a:prstGeom prst="rect">
+            <a:avLst/>
+          </a:prstGeom>
+        </p:spPr>
+        <p:txBody>
+          <a:bodyPr vert="horz" lIns="91440" tIns="45720" rIns="91440" bIns="45720" rtlCol="0" anchor="ctr">
+            <a:normAutofit/>
+          </a:bodyPr>
+          <a:lstStyle>
+            <a:lvl1pPr algn="ctr" defTabSz="914400" rtl="0" eaLnBrk="1" latinLnBrk="1" hangingPunct="1">
+              <a:lnSpc>
+                <a:spcPct val="90000"/>
+              </a:lnSpc>
+              <a:spcBef>
+                <a:spcPct val="0"/>
+              </a:spcBef>
+              <a:buNone/>
+              <a:defRPr sz="3200" kern="1200" cap="all" baseline="0">
+                <a:solidFill>
+                  <a:schemeClr val="tx1"/>
+                </a:solidFill>
+                <a:effectLst/>
+                <a:latin typeface="Batang" panose="02030600000101010101" pitchFamily="18" charset="-127"/>
+                <a:ea typeface="Batang" panose="02030600000101010101" pitchFamily="18" charset="-127"/>
+                <a:cs typeface="+mj-cs"/>
+              </a:defRPr>
+            </a:lvl1pPr>
+          </a:lstStyle>
+          <a:p>
+            <a:pPr algn="l"/>
+            <a:r>
+              <a:rPr lang="en-US" altLang="ko-KR" sz="2800" cap="none" dirty="0">
+                <a:solidFill>
+                  <a:schemeClr val="bg2">
+                    <a:lumMod val="25000"/>
+                  </a:schemeClr>
+                </a:solidFill>
+                <a:latin typeface="D2Coding" panose="020B0609020101020101" pitchFamily="49" charset="-127"/>
+                <a:ea typeface="D2Coding" panose="020B0609020101020101" pitchFamily="49" charset="-127"/>
+                <a:cs typeface="Segoe UI Light" panose="020B0502040204020203" pitchFamily="34" charset="0"/>
+              </a:rPr>
+              <a:t>Embeddings: Converting Text to Numbers</a:t>
+            </a:r>
+            <a:endParaRPr lang="ko-KR" altLang="en-US" sz="2800" cap="none" dirty="0">
+              <a:solidFill>
+                <a:schemeClr val="bg2">
+                  <a:lumMod val="25000"/>
+                </a:schemeClr>
+              </a:solidFill>
+              <a:latin typeface="D2Coding" panose="020B0609020101020101" pitchFamily="49" charset="-127"/>
+              <a:ea typeface="D2Coding" panose="020B0609020101020101" pitchFamily="49" charset="-127"/>
+              <a:cs typeface="Segoe UI Light" panose="020B0502040204020203" pitchFamily="34" charset="0"/>
+            </a:endParaRPr>
+          </a:p>
+        </p:txBody>
+      </p:sp>
+      <p:sp>
+        <p:nvSpPr>
+          <p:cNvPr id="2" name="TextBox 1">
+            <a:extLst>
+              <a:ext uri="{FF2B5EF4-FFF2-40B4-BE49-F238E27FC236}">
+                <a16:creationId xmlns:a16="http://schemas.microsoft.com/office/drawing/2014/main" id="{CF35F48B-8E97-8640-ACC0-6AA4786BC7DD}"/>
+              </a:ext>
+            </a:extLst>
+          </p:cNvPr>
+          <p:cNvSpPr txBox="1"/>
+          <p:nvPr/>
+        </p:nvSpPr>
+        <p:spPr>
+          <a:xfrm>
+            <a:off x="8439150" y="654811"/>
+            <a:ext cx="3181350" cy="400110"/>
+          </a:xfrm>
+          <a:prstGeom prst="rect">
+            <a:avLst/>
+          </a:prstGeom>
+          <a:noFill/>
+        </p:spPr>
+        <p:txBody>
+          <a:bodyPr wrap="square">
+            <a:spAutoFit/>
+          </a:bodyPr>
+          <a:lstStyle/>
+          <a:p>
+            <a:pPr algn="r"/>
+            <a:r>
+              <a:rPr lang="en-US" altLang="ko-KR" sz="2000" dirty="0">
+                <a:latin typeface="D2Coding" panose="020B0609020101020101" pitchFamily="49" charset="-127"/>
+                <a:ea typeface="D2Coding" panose="020B0609020101020101" pitchFamily="49" charset="-127"/>
+              </a:rPr>
+              <a:t>Embeddings Before LLMs</a:t>
+            </a:r>
+            <a:endParaRPr lang="ko-KR" altLang="en-US" sz="2000" dirty="0">
+              <a:latin typeface="D2Coding" panose="020B0609020101020101" pitchFamily="49" charset="-127"/>
+              <a:ea typeface="D2Coding" panose="020B0609020101020101" pitchFamily="49" charset="-127"/>
+            </a:endParaRPr>
+          </a:p>
+        </p:txBody>
+      </p:sp>
+      <p:sp>
+        <p:nvSpPr>
+          <p:cNvPr id="7" name="TextBox 6">
+            <a:extLst>
+              <a:ext uri="{FF2B5EF4-FFF2-40B4-BE49-F238E27FC236}">
+                <a16:creationId xmlns:a16="http://schemas.microsoft.com/office/drawing/2014/main" id="{246AED2F-BE85-50FF-D0EA-02A93D82203C}"/>
+              </a:ext>
+            </a:extLst>
+          </p:cNvPr>
+          <p:cNvSpPr txBox="1"/>
+          <p:nvPr/>
+        </p:nvSpPr>
+        <p:spPr>
+          <a:xfrm>
+            <a:off x="537022" y="1248422"/>
+            <a:ext cx="11179333" cy="793166"/>
+          </a:xfrm>
+          <a:prstGeom prst="rect">
+            <a:avLst/>
+          </a:prstGeom>
+          <a:noFill/>
+        </p:spPr>
+        <p:txBody>
+          <a:bodyPr wrap="square">
+            <a:spAutoFit/>
+          </a:bodyPr>
+          <a:lstStyle/>
+          <a:p>
+            <a:pPr>
+              <a:lnSpc>
+                <a:spcPct val="150000"/>
+              </a:lnSpc>
+            </a:pPr>
+            <a:r>
+              <a:rPr lang="ko-KR" altLang="en-US" sz="1600" dirty="0">
+                <a:latin typeface="D2Coding" panose="020B0609020101020101" pitchFamily="49" charset="-127"/>
+                <a:ea typeface="D2Coding" panose="020B0609020101020101" pitchFamily="49" charset="-127"/>
+              </a:rPr>
+              <a:t>세상에 단어가 딱 </a:t>
+            </a:r>
+            <a:r>
+              <a:rPr lang="en-US" altLang="ko-KR" sz="1600" dirty="0">
+                <a:latin typeface="D2Coding" panose="020B0609020101020101" pitchFamily="49" charset="-127"/>
+                <a:ea typeface="D2Coding" panose="020B0609020101020101" pitchFamily="49" charset="-127"/>
+              </a:rPr>
+              <a:t>4</a:t>
+            </a:r>
+            <a:r>
+              <a:rPr lang="ko-KR" altLang="en-US" sz="1600" dirty="0">
+                <a:latin typeface="D2Coding" panose="020B0609020101020101" pitchFamily="49" charset="-127"/>
+                <a:ea typeface="D2Coding" panose="020B0609020101020101" pitchFamily="49" charset="-127"/>
+              </a:rPr>
+              <a:t>개</a:t>
+            </a:r>
+            <a:r>
+              <a:rPr lang="en-US" altLang="ko-KR" sz="1600" dirty="0">
+                <a:latin typeface="D2Coding" panose="020B0609020101020101" pitchFamily="49" charset="-127"/>
+                <a:ea typeface="D2Coding" panose="020B0609020101020101" pitchFamily="49" charset="-127"/>
+              </a:rPr>
+              <a:t>("</a:t>
+            </a:r>
+            <a:r>
+              <a:rPr lang="ko-KR" altLang="en-US" sz="1600" dirty="0">
+                <a:latin typeface="D2Coding" panose="020B0609020101020101" pitchFamily="49" charset="-127"/>
+                <a:ea typeface="D2Coding" panose="020B0609020101020101" pitchFamily="49" charset="-127"/>
+              </a:rPr>
+              <a:t>대출</a:t>
+            </a:r>
+            <a:r>
+              <a:rPr lang="en-US" altLang="ko-KR" sz="1600" dirty="0">
+                <a:latin typeface="D2Coding" panose="020B0609020101020101" pitchFamily="49" charset="-127"/>
+                <a:ea typeface="D2Coding" panose="020B0609020101020101" pitchFamily="49" charset="-127"/>
+              </a:rPr>
+              <a:t>", "</a:t>
+            </a:r>
+            <a:r>
+              <a:rPr lang="ko-KR" altLang="en-US" sz="1600" dirty="0">
+                <a:latin typeface="D2Coding" panose="020B0609020101020101" pitchFamily="49" charset="-127"/>
+                <a:ea typeface="D2Coding" panose="020B0609020101020101" pitchFamily="49" charset="-127"/>
+              </a:rPr>
+              <a:t>광고</a:t>
+            </a:r>
+            <a:r>
+              <a:rPr lang="en-US" altLang="ko-KR" sz="1600" dirty="0">
+                <a:latin typeface="D2Coding" panose="020B0609020101020101" pitchFamily="49" charset="-127"/>
+                <a:ea typeface="D2Coding" panose="020B0609020101020101" pitchFamily="49" charset="-127"/>
+              </a:rPr>
+              <a:t>", "</a:t>
+            </a:r>
+            <a:r>
+              <a:rPr lang="ko-KR" altLang="en-US" sz="1600" dirty="0">
+                <a:latin typeface="D2Coding" panose="020B0609020101020101" pitchFamily="49" charset="-127"/>
+                <a:ea typeface="D2Coding" panose="020B0609020101020101" pitchFamily="49" charset="-127"/>
+              </a:rPr>
+              <a:t>안녕</a:t>
+            </a:r>
+            <a:r>
+              <a:rPr lang="en-US" altLang="ko-KR" sz="1600" dirty="0">
+                <a:latin typeface="D2Coding" panose="020B0609020101020101" pitchFamily="49" charset="-127"/>
+                <a:ea typeface="D2Coding" panose="020B0609020101020101" pitchFamily="49" charset="-127"/>
+              </a:rPr>
+              <a:t>", "</a:t>
+            </a:r>
+            <a:r>
+              <a:rPr lang="ko-KR" altLang="en-US" sz="1600" dirty="0">
+                <a:latin typeface="D2Coding" panose="020B0609020101020101" pitchFamily="49" charset="-127"/>
+                <a:ea typeface="D2Coding" panose="020B0609020101020101" pitchFamily="49" charset="-127"/>
+              </a:rPr>
+              <a:t>오늘</a:t>
+            </a:r>
+            <a:r>
+              <a:rPr lang="en-US" altLang="ko-KR" sz="1600" dirty="0">
+                <a:latin typeface="D2Coding" panose="020B0609020101020101" pitchFamily="49" charset="-127"/>
+                <a:ea typeface="D2Coding" panose="020B0609020101020101" pitchFamily="49" charset="-127"/>
+              </a:rPr>
+              <a:t>")</a:t>
+            </a:r>
+            <a:r>
+              <a:rPr lang="ko-KR" altLang="en-US" sz="1600" dirty="0">
+                <a:latin typeface="D2Coding" panose="020B0609020101020101" pitchFamily="49" charset="-127"/>
+                <a:ea typeface="D2Coding" panose="020B0609020101020101" pitchFamily="49" charset="-127"/>
+              </a:rPr>
+              <a:t>만 존재한다고 가정하고 예측모델이 새로운 메일 </a:t>
+            </a:r>
+            <a:r>
+              <a:rPr lang="en-US" altLang="ko-KR" sz="1600" dirty="0">
+                <a:latin typeface="D2Coding" panose="020B0609020101020101" pitchFamily="49" charset="-127"/>
+                <a:ea typeface="D2Coding" panose="020B0609020101020101" pitchFamily="49" charset="-127"/>
+              </a:rPr>
+              <a:t>2</a:t>
+            </a:r>
+            <a:r>
+              <a:rPr lang="ko-KR" altLang="en-US" sz="1600" dirty="0">
+                <a:latin typeface="D2Coding" panose="020B0609020101020101" pitchFamily="49" charset="-127"/>
+                <a:ea typeface="D2Coding" panose="020B0609020101020101" pitchFamily="49" charset="-127"/>
+              </a:rPr>
+              <a:t>개를 각각 정상과 스팸 어떤 것으로 분류하는지</a:t>
+            </a:r>
+            <a:r>
+              <a:rPr lang="en-US" altLang="ko-KR" sz="1600" dirty="0">
+                <a:latin typeface="D2Coding" panose="020B0609020101020101" pitchFamily="49" charset="-127"/>
+                <a:ea typeface="D2Coding" panose="020B0609020101020101" pitchFamily="49" charset="-127"/>
+              </a:rPr>
+              <a:t>? (</a:t>
+            </a:r>
+            <a:r>
+              <a:rPr lang="ko-KR" altLang="en-US" sz="1600" dirty="0">
+                <a:latin typeface="D2Coding" panose="020B0609020101020101" pitchFamily="49" charset="-127"/>
+                <a:ea typeface="D2Coding" panose="020B0609020101020101" pitchFamily="49" charset="-127"/>
+              </a:rPr>
+              <a:t>각 문장에 어떤 단어가 있는지 </a:t>
+            </a:r>
+            <a:r>
+              <a:rPr lang="en-US" altLang="ko-KR" sz="1600" dirty="0">
+                <a:latin typeface="D2Coding" panose="020B0609020101020101" pitchFamily="49" charset="-127"/>
+                <a:ea typeface="D2Coding" panose="020B0609020101020101" pitchFamily="49" charset="-127"/>
+              </a:rPr>
+              <a:t>key word </a:t>
+            </a:r>
+            <a:r>
+              <a:rPr lang="en-US" altLang="ko-KR" sz="1600" dirty="0" err="1">
+                <a:latin typeface="D2Coding" panose="020B0609020101020101" pitchFamily="49" charset="-127"/>
+                <a:ea typeface="D2Coding" panose="020B0609020101020101" pitchFamily="49" charset="-127"/>
+              </a:rPr>
+              <a:t>searc</a:t>
+            </a:r>
+            <a:r>
+              <a:rPr lang="ko-KR" altLang="en-US" sz="1600" dirty="0">
+                <a:latin typeface="D2Coding" panose="020B0609020101020101" pitchFamily="49" charset="-127"/>
+                <a:ea typeface="D2Coding" panose="020B0609020101020101" pitchFamily="49" charset="-127"/>
+              </a:rPr>
+              <a:t>가 가능</a:t>
+            </a:r>
+            <a:r>
+              <a:rPr lang="en-US" altLang="ko-KR" sz="1600" dirty="0">
+                <a:latin typeface="D2Coding" panose="020B0609020101020101" pitchFamily="49" charset="-127"/>
+                <a:ea typeface="D2Coding" panose="020B0609020101020101" pitchFamily="49" charset="-127"/>
+              </a:rPr>
+              <a:t>)</a:t>
+            </a:r>
+            <a:endParaRPr lang="ko-KR" altLang="en-US" sz="1600" dirty="0">
+              <a:latin typeface="D2Coding" panose="020B0609020101020101" pitchFamily="49" charset="-127"/>
+              <a:ea typeface="D2Coding" panose="020B0609020101020101" pitchFamily="49" charset="-127"/>
+            </a:endParaRPr>
+          </a:p>
+        </p:txBody>
+      </p:sp>
+      <p:sp>
+        <p:nvSpPr>
+          <p:cNvPr id="11" name="TextBox 10">
+            <a:extLst>
+              <a:ext uri="{FF2B5EF4-FFF2-40B4-BE49-F238E27FC236}">
+                <a16:creationId xmlns:a16="http://schemas.microsoft.com/office/drawing/2014/main" id="{132F6D4C-12A9-2B4B-E6C8-87D2F97DFBAC}"/>
+              </a:ext>
+            </a:extLst>
+          </p:cNvPr>
+          <p:cNvSpPr txBox="1"/>
+          <p:nvPr/>
+        </p:nvSpPr>
+        <p:spPr>
+          <a:xfrm>
+            <a:off x="933450" y="2932656"/>
+            <a:ext cx="4648200" cy="1440394"/>
+          </a:xfrm>
+          <a:prstGeom prst="rect">
+            <a:avLst/>
+          </a:prstGeom>
+          <a:noFill/>
+        </p:spPr>
+        <p:txBody>
+          <a:bodyPr wrap="square">
+            <a:spAutoFit/>
+          </a:bodyPr>
+          <a:lstStyle/>
+          <a:p>
+            <a:pPr>
+              <a:lnSpc>
+                <a:spcPct val="150000"/>
+              </a:lnSpc>
+            </a:pPr>
+            <a:r>
+              <a:rPr lang="ko-KR" altLang="en-US" sz="1500" dirty="0">
+                <a:latin typeface="D2Coding" panose="020B0609020101020101" pitchFamily="49" charset="-127"/>
+                <a:ea typeface="D2Coding" panose="020B0609020101020101" pitchFamily="49" charset="-127"/>
+              </a:rPr>
+              <a:t>스팸 메일 1: "대출 광고" </a:t>
+            </a:r>
+            <a:r>
+              <a:rPr lang="en-US" altLang="ko-KR" sz="1500" dirty="0">
+                <a:latin typeface="D2Coding" panose="020B0609020101020101" pitchFamily="49" charset="-127"/>
+                <a:ea typeface="D2Coding" panose="020B0609020101020101" pitchFamily="49" charset="-127"/>
+                <a:sym typeface="Wingdings" panose="05000000000000000000" pitchFamily="2" charset="2"/>
+              </a:rPr>
+              <a:t>  </a:t>
+            </a:r>
+            <a:r>
+              <a:rPr lang="ko-KR" altLang="en-US" sz="1500" dirty="0">
+                <a:latin typeface="D2Coding" panose="020B0609020101020101" pitchFamily="49" charset="-127"/>
+                <a:ea typeface="D2Coding" panose="020B0609020101020101" pitchFamily="49" charset="-127"/>
+              </a:rPr>
+              <a:t>[1, 1, 0, 0]</a:t>
+            </a:r>
+            <a:endParaRPr lang="en-US" altLang="ko-KR" sz="1500" dirty="0">
+              <a:latin typeface="D2Coding" panose="020B0609020101020101" pitchFamily="49" charset="-127"/>
+              <a:ea typeface="D2Coding" panose="020B0609020101020101" pitchFamily="49" charset="-127"/>
+            </a:endParaRPr>
+          </a:p>
+          <a:p>
+            <a:pPr>
+              <a:lnSpc>
+                <a:spcPct val="150000"/>
+              </a:lnSpc>
+            </a:pPr>
+            <a:r>
+              <a:rPr lang="ko-KR" altLang="en-US" sz="1500" dirty="0">
+                <a:latin typeface="D2Coding" panose="020B0609020101020101" pitchFamily="49" charset="-127"/>
+                <a:ea typeface="D2Coding" panose="020B0609020101020101" pitchFamily="49" charset="-127"/>
+              </a:rPr>
+              <a:t>스팸 메일 2: "오늘 대출" </a:t>
+            </a:r>
+            <a:r>
+              <a:rPr lang="en-US" altLang="ko-KR" sz="1500" dirty="0">
+                <a:latin typeface="D2Coding" panose="020B0609020101020101" pitchFamily="49" charset="-127"/>
+                <a:ea typeface="D2Coding" panose="020B0609020101020101" pitchFamily="49" charset="-127"/>
+                <a:sym typeface="Wingdings" panose="05000000000000000000" pitchFamily="2" charset="2"/>
+              </a:rPr>
+              <a:t> </a:t>
+            </a:r>
+            <a:r>
+              <a:rPr lang="ko-KR" altLang="en-US" sz="1500" dirty="0">
+                <a:latin typeface="D2Coding" panose="020B0609020101020101" pitchFamily="49" charset="-127"/>
+                <a:ea typeface="D2Coding" panose="020B0609020101020101" pitchFamily="49" charset="-127"/>
+              </a:rPr>
+              <a:t> [1, 0, 0, 1]</a:t>
+            </a:r>
+            <a:endParaRPr lang="en-US" altLang="ko-KR" sz="1500" dirty="0">
+              <a:latin typeface="D2Coding" panose="020B0609020101020101" pitchFamily="49" charset="-127"/>
+              <a:ea typeface="D2Coding" panose="020B0609020101020101" pitchFamily="49" charset="-127"/>
+            </a:endParaRPr>
+          </a:p>
+          <a:p>
+            <a:pPr>
+              <a:lnSpc>
+                <a:spcPct val="150000"/>
+              </a:lnSpc>
+            </a:pPr>
+            <a:r>
+              <a:rPr lang="ko-KR" altLang="en-US" sz="1500" dirty="0">
+                <a:latin typeface="D2Coding" panose="020B0609020101020101" pitchFamily="49" charset="-127"/>
+                <a:ea typeface="D2Coding" panose="020B0609020101020101" pitchFamily="49" charset="-127"/>
+              </a:rPr>
+              <a:t>정상 메일 1: "안녕 오늘" </a:t>
+            </a:r>
+            <a:r>
+              <a:rPr lang="en-US" altLang="ko-KR" sz="1500" dirty="0">
+                <a:latin typeface="D2Coding" panose="020B0609020101020101" pitchFamily="49" charset="-127"/>
+                <a:ea typeface="D2Coding" panose="020B0609020101020101" pitchFamily="49" charset="-127"/>
+                <a:sym typeface="Wingdings" panose="05000000000000000000" pitchFamily="2" charset="2"/>
+              </a:rPr>
+              <a:t> </a:t>
+            </a:r>
+            <a:r>
+              <a:rPr lang="ko-KR" altLang="en-US" sz="1500" dirty="0">
+                <a:latin typeface="D2Coding" panose="020B0609020101020101" pitchFamily="49" charset="-127"/>
+                <a:ea typeface="D2Coding" panose="020B0609020101020101" pitchFamily="49" charset="-127"/>
+              </a:rPr>
+              <a:t> [0, 0, 1, 1]</a:t>
+            </a:r>
+            <a:endParaRPr lang="en-US" altLang="ko-KR" sz="1500" dirty="0">
+              <a:latin typeface="D2Coding" panose="020B0609020101020101" pitchFamily="49" charset="-127"/>
+              <a:ea typeface="D2Coding" panose="020B0609020101020101" pitchFamily="49" charset="-127"/>
+            </a:endParaRPr>
+          </a:p>
+          <a:p>
+            <a:pPr>
+              <a:lnSpc>
+                <a:spcPct val="150000"/>
+              </a:lnSpc>
+            </a:pPr>
+            <a:r>
+              <a:rPr lang="ko-KR" altLang="en-US" sz="1500" dirty="0">
+                <a:latin typeface="D2Coding" panose="020B0609020101020101" pitchFamily="49" charset="-127"/>
+                <a:ea typeface="D2Coding" panose="020B0609020101020101" pitchFamily="49" charset="-127"/>
+              </a:rPr>
+              <a:t>정상 메일 2: "오늘 안녕" </a:t>
+            </a:r>
+            <a:r>
+              <a:rPr lang="en-US" altLang="ko-KR" sz="1500" dirty="0">
+                <a:latin typeface="D2Coding" panose="020B0609020101020101" pitchFamily="49" charset="-127"/>
+                <a:ea typeface="D2Coding" panose="020B0609020101020101" pitchFamily="49" charset="-127"/>
+                <a:sym typeface="Wingdings" panose="05000000000000000000" pitchFamily="2" charset="2"/>
+              </a:rPr>
+              <a:t> </a:t>
+            </a:r>
+            <a:r>
+              <a:rPr lang="ko-KR" altLang="en-US" sz="1500" dirty="0">
+                <a:latin typeface="D2Coding" panose="020B0609020101020101" pitchFamily="49" charset="-127"/>
+                <a:ea typeface="D2Coding" panose="020B0609020101020101" pitchFamily="49" charset="-127"/>
+              </a:rPr>
+              <a:t> [0, 0, 1, 1]</a:t>
+            </a:r>
+          </a:p>
+        </p:txBody>
+      </p:sp>
+      <p:sp>
+        <p:nvSpPr>
+          <p:cNvPr id="15" name="TextBox 14">
+            <a:extLst>
+              <a:ext uri="{FF2B5EF4-FFF2-40B4-BE49-F238E27FC236}">
+                <a16:creationId xmlns:a16="http://schemas.microsoft.com/office/drawing/2014/main" id="{6FF7D5F1-5B13-0386-F411-5809448CD7D2}"/>
+              </a:ext>
+            </a:extLst>
+          </p:cNvPr>
+          <p:cNvSpPr txBox="1"/>
+          <p:nvPr/>
+        </p:nvSpPr>
+        <p:spPr>
+          <a:xfrm>
+            <a:off x="5514974" y="3010363"/>
+            <a:ext cx="6248401" cy="553998"/>
+          </a:xfrm>
+          <a:prstGeom prst="rect">
+            <a:avLst/>
+          </a:prstGeom>
+          <a:noFill/>
+        </p:spPr>
+        <p:txBody>
+          <a:bodyPr wrap="square">
+            <a:spAutoFit/>
+          </a:bodyPr>
+          <a:lstStyle/>
+          <a:p>
+            <a:r>
+              <a:rPr lang="ko-KR" altLang="en-US" sz="1500" dirty="0">
+                <a:latin typeface="D2Coding" panose="020B0609020101020101" pitchFamily="49" charset="-127"/>
+                <a:ea typeface="D2Coding" panose="020B0609020101020101" pitchFamily="49" charset="-127"/>
+              </a:rPr>
+              <a:t>스팸 1  [1, 1, 0, 0] + 스팸 2  [1, 0, 0, 1] = [2, 1, 0, 1]</a:t>
+            </a:r>
+            <a:endParaRPr lang="en-US" altLang="ko-KR" sz="1500" dirty="0">
+              <a:latin typeface="D2Coding" panose="020B0609020101020101" pitchFamily="49" charset="-127"/>
+              <a:ea typeface="D2Coding" panose="020B0609020101020101" pitchFamily="49" charset="-127"/>
+            </a:endParaRPr>
+          </a:p>
+          <a:p>
+            <a:r>
+              <a:rPr lang="ko-KR" altLang="en-US" sz="1500" dirty="0">
+                <a:latin typeface="D2Coding" panose="020B0609020101020101" pitchFamily="49" charset="-127"/>
+                <a:ea typeface="D2Coding" panose="020B0609020101020101" pitchFamily="49" charset="-127"/>
+              </a:rPr>
+              <a:t>총 개수 2로 나누면 평균</a:t>
+            </a:r>
+            <a:r>
+              <a:rPr lang="en-US" altLang="ko-KR" sz="1500" dirty="0">
+                <a:latin typeface="D2Coding" panose="020B0609020101020101" pitchFamily="49" charset="-127"/>
+                <a:ea typeface="D2Coding" panose="020B0609020101020101" pitchFamily="49" charset="-127"/>
+              </a:rPr>
+              <a:t>(</a:t>
+            </a:r>
+            <a:r>
+              <a:rPr lang="ko-KR" altLang="en-US" sz="1500" dirty="0">
+                <a:latin typeface="D2Coding" panose="020B0609020101020101" pitchFamily="49" charset="-127"/>
+                <a:ea typeface="D2Coding" panose="020B0609020101020101" pitchFamily="49" charset="-127"/>
+              </a:rPr>
+              <a:t>대표</a:t>
+            </a:r>
+            <a:r>
+              <a:rPr lang="en-US" altLang="ko-KR" sz="1500" dirty="0">
+                <a:latin typeface="D2Coding" panose="020B0609020101020101" pitchFamily="49" charset="-127"/>
+                <a:ea typeface="D2Coding" panose="020B0609020101020101" pitchFamily="49" charset="-127"/>
+              </a:rPr>
+              <a:t>)</a:t>
+            </a:r>
+            <a:r>
+              <a:rPr lang="ko-KR" altLang="en-US" sz="1500" dirty="0">
+                <a:latin typeface="D2Coding" panose="020B0609020101020101" pitchFamily="49" charset="-127"/>
+                <a:ea typeface="D2Coding" panose="020B0609020101020101" pitchFamily="49" charset="-127"/>
+              </a:rPr>
+              <a:t> 벡터 </a:t>
+            </a:r>
+            <a:r>
+              <a:rPr lang="en-US" altLang="ko-KR" sz="1500" dirty="0">
+                <a:latin typeface="D2Coding" panose="020B0609020101020101" pitchFamily="49" charset="-127"/>
+                <a:ea typeface="D2Coding" panose="020B0609020101020101" pitchFamily="49" charset="-127"/>
+              </a:rPr>
+              <a:t>= </a:t>
+            </a:r>
+            <a:r>
+              <a:rPr lang="ko-KR" altLang="en-US" sz="1500" dirty="0">
+                <a:latin typeface="D2Coding" panose="020B0609020101020101" pitchFamily="49" charset="-127"/>
+                <a:ea typeface="D2Coding" panose="020B0609020101020101" pitchFamily="49" charset="-127"/>
+              </a:rPr>
+              <a:t>[1.0, 0.5, 0.0, 0.5]</a:t>
+            </a:r>
+          </a:p>
+        </p:txBody>
+      </p:sp>
+      <p:sp>
+        <p:nvSpPr>
+          <p:cNvPr id="16" name="TextBox 15">
+            <a:extLst>
+              <a:ext uri="{FF2B5EF4-FFF2-40B4-BE49-F238E27FC236}">
+                <a16:creationId xmlns:a16="http://schemas.microsoft.com/office/drawing/2014/main" id="{FF9AD14D-55D7-317F-7847-15E0E394731E}"/>
+              </a:ext>
+            </a:extLst>
+          </p:cNvPr>
+          <p:cNvSpPr txBox="1"/>
+          <p:nvPr/>
+        </p:nvSpPr>
+        <p:spPr>
+          <a:xfrm>
+            <a:off x="5548312" y="3742360"/>
+            <a:ext cx="6248401" cy="553998"/>
+          </a:xfrm>
+          <a:prstGeom prst="rect">
+            <a:avLst/>
+          </a:prstGeom>
+          <a:noFill/>
+        </p:spPr>
+        <p:txBody>
+          <a:bodyPr wrap="square">
+            <a:spAutoFit/>
+          </a:bodyPr>
+          <a:lstStyle/>
+          <a:p>
+            <a:r>
+              <a:rPr lang="ko-KR" altLang="en-US" sz="1500" dirty="0">
+                <a:latin typeface="D2Coding" panose="020B0609020101020101" pitchFamily="49" charset="-127"/>
+                <a:ea typeface="D2Coding" panose="020B0609020101020101" pitchFamily="49" charset="-127"/>
+              </a:rPr>
+              <a:t>정상 1  [0, 0</a:t>
+            </a:r>
+            <a:r>
+              <a:rPr lang="en-US" altLang="ko-KR" sz="1500" dirty="0">
+                <a:latin typeface="D2Coding" panose="020B0609020101020101" pitchFamily="49" charset="-127"/>
+                <a:ea typeface="D2Coding" panose="020B0609020101020101" pitchFamily="49" charset="-127"/>
+              </a:rPr>
+              <a:t>, </a:t>
+            </a:r>
+            <a:r>
+              <a:rPr lang="ko-KR" altLang="en-US" sz="1500" dirty="0">
+                <a:latin typeface="D2Coding" panose="020B0609020101020101" pitchFamily="49" charset="-127"/>
+                <a:ea typeface="D2Coding" panose="020B0609020101020101" pitchFamily="49" charset="-127"/>
+              </a:rPr>
+              <a:t>1, 1] + 정상 2  [0, 0</a:t>
+            </a:r>
+            <a:r>
+              <a:rPr lang="en-US" altLang="ko-KR" sz="1500" dirty="0">
+                <a:latin typeface="D2Coding" panose="020B0609020101020101" pitchFamily="49" charset="-127"/>
+                <a:ea typeface="D2Coding" panose="020B0609020101020101" pitchFamily="49" charset="-127"/>
+              </a:rPr>
+              <a:t>, </a:t>
+            </a:r>
+            <a:r>
+              <a:rPr lang="ko-KR" altLang="en-US" sz="1500" dirty="0">
+                <a:latin typeface="D2Coding" panose="020B0609020101020101" pitchFamily="49" charset="-127"/>
+                <a:ea typeface="D2Coding" panose="020B0609020101020101" pitchFamily="49" charset="-127"/>
+              </a:rPr>
+              <a:t>1, 1] = [</a:t>
+            </a:r>
+            <a:r>
+              <a:rPr lang="en-US" altLang="ko-KR" sz="1500" dirty="0">
+                <a:latin typeface="D2Coding" panose="020B0609020101020101" pitchFamily="49" charset="-127"/>
+                <a:ea typeface="D2Coding" panose="020B0609020101020101" pitchFamily="49" charset="-127"/>
+              </a:rPr>
+              <a:t>0</a:t>
+            </a:r>
+            <a:r>
+              <a:rPr lang="ko-KR" altLang="en-US" sz="1500" dirty="0">
+                <a:latin typeface="D2Coding" panose="020B0609020101020101" pitchFamily="49" charset="-127"/>
+                <a:ea typeface="D2Coding" panose="020B0609020101020101" pitchFamily="49" charset="-127"/>
+              </a:rPr>
+              <a:t>, </a:t>
+            </a:r>
+            <a:r>
+              <a:rPr lang="en-US" altLang="ko-KR" sz="1500" dirty="0">
+                <a:latin typeface="D2Coding" panose="020B0609020101020101" pitchFamily="49" charset="-127"/>
+                <a:ea typeface="D2Coding" panose="020B0609020101020101" pitchFamily="49" charset="-127"/>
+              </a:rPr>
+              <a:t>0</a:t>
+            </a:r>
+            <a:r>
+              <a:rPr lang="ko-KR" altLang="en-US" sz="1500" dirty="0">
+                <a:latin typeface="D2Coding" panose="020B0609020101020101" pitchFamily="49" charset="-127"/>
+                <a:ea typeface="D2Coding" panose="020B0609020101020101" pitchFamily="49" charset="-127"/>
+              </a:rPr>
+              <a:t>, </a:t>
+            </a:r>
+            <a:r>
+              <a:rPr lang="en-US" altLang="ko-KR" sz="1500" dirty="0">
+                <a:latin typeface="D2Coding" panose="020B0609020101020101" pitchFamily="49" charset="-127"/>
+                <a:ea typeface="D2Coding" panose="020B0609020101020101" pitchFamily="49" charset="-127"/>
+              </a:rPr>
+              <a:t>2</a:t>
+            </a:r>
+            <a:r>
+              <a:rPr lang="ko-KR" altLang="en-US" sz="1500" dirty="0">
+                <a:latin typeface="D2Coding" panose="020B0609020101020101" pitchFamily="49" charset="-127"/>
+                <a:ea typeface="D2Coding" panose="020B0609020101020101" pitchFamily="49" charset="-127"/>
+              </a:rPr>
+              <a:t>, </a:t>
+            </a:r>
+            <a:r>
+              <a:rPr lang="en-US" altLang="ko-KR" sz="1500" dirty="0">
+                <a:latin typeface="D2Coding" panose="020B0609020101020101" pitchFamily="49" charset="-127"/>
+                <a:ea typeface="D2Coding" panose="020B0609020101020101" pitchFamily="49" charset="-127"/>
+              </a:rPr>
+              <a:t>2</a:t>
+            </a:r>
+            <a:r>
+              <a:rPr lang="ko-KR" altLang="en-US" sz="1500" dirty="0">
+                <a:latin typeface="D2Coding" panose="020B0609020101020101" pitchFamily="49" charset="-127"/>
+                <a:ea typeface="D2Coding" panose="020B0609020101020101" pitchFamily="49" charset="-127"/>
+              </a:rPr>
+              <a:t>]</a:t>
+            </a:r>
+            <a:endParaRPr lang="en-US" altLang="ko-KR" sz="1500" dirty="0">
+              <a:latin typeface="D2Coding" panose="020B0609020101020101" pitchFamily="49" charset="-127"/>
+              <a:ea typeface="D2Coding" panose="020B0609020101020101" pitchFamily="49" charset="-127"/>
+            </a:endParaRPr>
+          </a:p>
+          <a:p>
+            <a:r>
+              <a:rPr lang="ko-KR" altLang="en-US" sz="1500" dirty="0">
+                <a:latin typeface="D2Coding" panose="020B0609020101020101" pitchFamily="49" charset="-127"/>
+                <a:ea typeface="D2Coding" panose="020B0609020101020101" pitchFamily="49" charset="-127"/>
+              </a:rPr>
+              <a:t>총 개수 2로 나누면 평균</a:t>
+            </a:r>
+            <a:r>
+              <a:rPr lang="en-US" altLang="ko-KR" sz="1500" dirty="0">
+                <a:latin typeface="D2Coding" panose="020B0609020101020101" pitchFamily="49" charset="-127"/>
+                <a:ea typeface="D2Coding" panose="020B0609020101020101" pitchFamily="49" charset="-127"/>
+              </a:rPr>
+              <a:t>(</a:t>
+            </a:r>
+            <a:r>
+              <a:rPr lang="ko-KR" altLang="en-US" sz="1500" dirty="0">
+                <a:latin typeface="D2Coding" panose="020B0609020101020101" pitchFamily="49" charset="-127"/>
+                <a:ea typeface="D2Coding" panose="020B0609020101020101" pitchFamily="49" charset="-127"/>
+              </a:rPr>
+              <a:t>대표</a:t>
+            </a:r>
+            <a:r>
+              <a:rPr lang="en-US" altLang="ko-KR" sz="1500" dirty="0">
+                <a:latin typeface="D2Coding" panose="020B0609020101020101" pitchFamily="49" charset="-127"/>
+                <a:ea typeface="D2Coding" panose="020B0609020101020101" pitchFamily="49" charset="-127"/>
+              </a:rPr>
+              <a:t>)</a:t>
+            </a:r>
+            <a:r>
+              <a:rPr lang="ko-KR" altLang="en-US" sz="1500" dirty="0">
+                <a:latin typeface="D2Coding" panose="020B0609020101020101" pitchFamily="49" charset="-127"/>
+                <a:ea typeface="D2Coding" panose="020B0609020101020101" pitchFamily="49" charset="-127"/>
+              </a:rPr>
+              <a:t> 벡터 </a:t>
+            </a:r>
+            <a:r>
+              <a:rPr lang="en-US" altLang="ko-KR" sz="1500" dirty="0">
+                <a:latin typeface="D2Coding" panose="020B0609020101020101" pitchFamily="49" charset="-127"/>
+                <a:ea typeface="D2Coding" panose="020B0609020101020101" pitchFamily="49" charset="-127"/>
+              </a:rPr>
+              <a:t>= </a:t>
+            </a:r>
+            <a:r>
+              <a:rPr lang="ko-KR" altLang="en-US" sz="1500" dirty="0">
+                <a:latin typeface="D2Coding" panose="020B0609020101020101" pitchFamily="49" charset="-127"/>
+                <a:ea typeface="D2Coding" panose="020B0609020101020101" pitchFamily="49" charset="-127"/>
+              </a:rPr>
+              <a:t>[</a:t>
+            </a:r>
+            <a:r>
+              <a:rPr lang="en-US" altLang="ko-KR" sz="1500" dirty="0">
+                <a:latin typeface="D2Coding" panose="020B0609020101020101" pitchFamily="49" charset="-127"/>
+                <a:ea typeface="D2Coding" panose="020B0609020101020101" pitchFamily="49" charset="-127"/>
+              </a:rPr>
+              <a:t>0</a:t>
+            </a:r>
+            <a:r>
+              <a:rPr lang="ko-KR" altLang="en-US" sz="1500" dirty="0">
+                <a:latin typeface="D2Coding" panose="020B0609020101020101" pitchFamily="49" charset="-127"/>
+                <a:ea typeface="D2Coding" panose="020B0609020101020101" pitchFamily="49" charset="-127"/>
+              </a:rPr>
+              <a:t>.0, 0.</a:t>
+            </a:r>
+            <a:r>
+              <a:rPr lang="en-US" altLang="ko-KR" sz="1500" dirty="0">
+                <a:latin typeface="D2Coding" panose="020B0609020101020101" pitchFamily="49" charset="-127"/>
+                <a:ea typeface="D2Coding" panose="020B0609020101020101" pitchFamily="49" charset="-127"/>
+              </a:rPr>
+              <a:t>0</a:t>
+            </a:r>
+            <a:r>
+              <a:rPr lang="ko-KR" altLang="en-US" sz="1500" dirty="0">
+                <a:latin typeface="D2Coding" panose="020B0609020101020101" pitchFamily="49" charset="-127"/>
+                <a:ea typeface="D2Coding" panose="020B0609020101020101" pitchFamily="49" charset="-127"/>
+              </a:rPr>
+              <a:t>, </a:t>
+            </a:r>
+            <a:r>
+              <a:rPr lang="en-US" altLang="ko-KR" sz="1500" dirty="0">
+                <a:latin typeface="D2Coding" panose="020B0609020101020101" pitchFamily="49" charset="-127"/>
+                <a:ea typeface="D2Coding" panose="020B0609020101020101" pitchFamily="49" charset="-127"/>
+              </a:rPr>
+              <a:t>1</a:t>
+            </a:r>
+            <a:r>
+              <a:rPr lang="ko-KR" altLang="en-US" sz="1500" dirty="0">
+                <a:latin typeface="D2Coding" panose="020B0609020101020101" pitchFamily="49" charset="-127"/>
+                <a:ea typeface="D2Coding" panose="020B0609020101020101" pitchFamily="49" charset="-127"/>
+              </a:rPr>
+              <a:t>.0, </a:t>
+            </a:r>
+            <a:r>
+              <a:rPr lang="en-US" altLang="ko-KR" sz="1500" dirty="0">
+                <a:latin typeface="D2Coding" panose="020B0609020101020101" pitchFamily="49" charset="-127"/>
+                <a:ea typeface="D2Coding" panose="020B0609020101020101" pitchFamily="49" charset="-127"/>
+              </a:rPr>
+              <a:t>1.0</a:t>
+            </a:r>
+            <a:r>
+              <a:rPr lang="ko-KR" altLang="en-US" sz="1500" dirty="0">
+                <a:latin typeface="D2Coding" panose="020B0609020101020101" pitchFamily="49" charset="-127"/>
+                <a:ea typeface="D2Coding" panose="020B0609020101020101" pitchFamily="49" charset="-127"/>
+              </a:rPr>
+              <a:t>]</a:t>
+            </a:r>
+          </a:p>
+        </p:txBody>
+      </p:sp>
+      <p:sp>
+        <p:nvSpPr>
+          <p:cNvPr id="23" name="TextBox 22">
+            <a:extLst>
+              <a:ext uri="{FF2B5EF4-FFF2-40B4-BE49-F238E27FC236}">
+                <a16:creationId xmlns:a16="http://schemas.microsoft.com/office/drawing/2014/main" id="{15B98BF7-067C-3085-3F74-763D2F3DD478}"/>
+              </a:ext>
+            </a:extLst>
+          </p:cNvPr>
+          <p:cNvSpPr txBox="1"/>
+          <p:nvPr/>
+        </p:nvSpPr>
+        <p:spPr>
+          <a:xfrm>
+            <a:off x="1352550" y="4771884"/>
+            <a:ext cx="4505325" cy="422167"/>
+          </a:xfrm>
+          <a:prstGeom prst="rect">
+            <a:avLst/>
+          </a:prstGeom>
+          <a:noFill/>
+        </p:spPr>
+        <p:txBody>
+          <a:bodyPr wrap="square">
+            <a:spAutoFit/>
+          </a:bodyPr>
+          <a:lstStyle/>
+          <a:p>
+            <a:pPr>
+              <a:lnSpc>
+                <a:spcPct val="150000"/>
+              </a:lnSpc>
+            </a:pPr>
+            <a:r>
+              <a:rPr lang="ko-KR" altLang="en-US" sz="1600" dirty="0">
+                <a:latin typeface="D2Coding" panose="020B0609020101020101" pitchFamily="49" charset="-127"/>
+                <a:ea typeface="D2Coding" panose="020B0609020101020101" pitchFamily="49" charset="-127"/>
+              </a:rPr>
+              <a:t>새로운 메일 </a:t>
+            </a:r>
+            <a:r>
+              <a:rPr lang="en-US" altLang="ko-KR" sz="1600" dirty="0">
+                <a:latin typeface="D2Coding" panose="020B0609020101020101" pitchFamily="49" charset="-127"/>
+                <a:ea typeface="D2Coding" panose="020B0609020101020101" pitchFamily="49" charset="-127"/>
+              </a:rPr>
+              <a:t>1</a:t>
+            </a:r>
+            <a:r>
+              <a:rPr lang="ko-KR" altLang="en-US" sz="1600" dirty="0">
+                <a:latin typeface="D2Coding" panose="020B0609020101020101" pitchFamily="49" charset="-127"/>
+                <a:ea typeface="D2Coding" panose="020B0609020101020101" pitchFamily="49" charset="-127"/>
+              </a:rPr>
+              <a:t>: "오늘 광고" </a:t>
+            </a:r>
+            <a:r>
+              <a:rPr lang="en-US" altLang="ko-KR" sz="1600" dirty="0">
+                <a:latin typeface="D2Coding" panose="020B0609020101020101" pitchFamily="49" charset="-127"/>
+                <a:ea typeface="D2Coding" panose="020B0609020101020101" pitchFamily="49" charset="-127"/>
+                <a:sym typeface="Wingdings" panose="05000000000000000000" pitchFamily="2" charset="2"/>
+              </a:rPr>
+              <a:t> </a:t>
+            </a:r>
+            <a:r>
+              <a:rPr lang="ko-KR" altLang="en-US" sz="1600" dirty="0">
+                <a:latin typeface="D2Coding" panose="020B0609020101020101" pitchFamily="49" charset="-127"/>
+                <a:ea typeface="D2Coding" panose="020B0609020101020101" pitchFamily="49" charset="-127"/>
+              </a:rPr>
+              <a:t> [0, </a:t>
+            </a:r>
+            <a:r>
+              <a:rPr lang="en-US" altLang="ko-KR" sz="1600" dirty="0">
+                <a:latin typeface="D2Coding" panose="020B0609020101020101" pitchFamily="49" charset="-127"/>
+                <a:ea typeface="D2Coding" panose="020B0609020101020101" pitchFamily="49" charset="-127"/>
+              </a:rPr>
+              <a:t>1</a:t>
+            </a:r>
+            <a:r>
+              <a:rPr lang="ko-KR" altLang="en-US" sz="1600" dirty="0">
+                <a:latin typeface="D2Coding" panose="020B0609020101020101" pitchFamily="49" charset="-127"/>
+                <a:ea typeface="D2Coding" panose="020B0609020101020101" pitchFamily="49" charset="-127"/>
+              </a:rPr>
+              <a:t>, </a:t>
+            </a:r>
+            <a:r>
+              <a:rPr lang="en-US" altLang="ko-KR" sz="1600" dirty="0">
+                <a:latin typeface="D2Coding" panose="020B0609020101020101" pitchFamily="49" charset="-127"/>
+                <a:ea typeface="D2Coding" panose="020B0609020101020101" pitchFamily="49" charset="-127"/>
+              </a:rPr>
+              <a:t>0</a:t>
+            </a:r>
+            <a:r>
+              <a:rPr lang="ko-KR" altLang="en-US" sz="1600" dirty="0">
+                <a:latin typeface="D2Coding" panose="020B0609020101020101" pitchFamily="49" charset="-127"/>
+                <a:ea typeface="D2Coding" panose="020B0609020101020101" pitchFamily="49" charset="-127"/>
+              </a:rPr>
+              <a:t>, 1]</a:t>
+            </a:r>
+          </a:p>
+        </p:txBody>
+      </p:sp>
+      <p:sp>
+        <p:nvSpPr>
+          <p:cNvPr id="24" name="직사각형 23">
+            <a:extLst>
+              <a:ext uri="{FF2B5EF4-FFF2-40B4-BE49-F238E27FC236}">
+                <a16:creationId xmlns:a16="http://schemas.microsoft.com/office/drawing/2014/main" id="{3C1BA9BB-70C0-196C-B038-1DEFDE00A415}"/>
+              </a:ext>
+            </a:extLst>
+          </p:cNvPr>
+          <p:cNvSpPr/>
+          <p:nvPr/>
+        </p:nvSpPr>
+        <p:spPr>
+          <a:xfrm>
+            <a:off x="822772" y="2894556"/>
+            <a:ext cx="10730534" cy="1476454"/>
+          </a:xfrm>
+          <a:prstGeom prst="rect">
+            <a:avLst/>
+          </a:prstGeom>
+          <a:noFill/>
+        </p:spPr>
+        <p:style>
+          <a:lnRef idx="2">
+            <a:schemeClr val="accent1">
+              <a:shade val="15000"/>
+            </a:schemeClr>
+          </a:lnRef>
+          <a:fillRef idx="1">
+            <a:schemeClr val="accent1"/>
+          </a:fillRef>
+          <a:effectRef idx="0">
+            <a:schemeClr val="accent1"/>
+          </a:effectRef>
+          <a:fontRef idx="minor">
+            <a:schemeClr val="lt1"/>
+          </a:fontRef>
+        </p:style>
+        <p:txBody>
+          <a:bodyPr rtlCol="0" anchor="ctr"/>
+          <a:lstStyle/>
+          <a:p>
+            <a:pPr algn="ctr"/>
+            <a:endParaRPr lang="ko-KR" altLang="en-US"/>
+          </a:p>
+        </p:txBody>
+      </p:sp>
+      <p:sp>
+        <p:nvSpPr>
+          <p:cNvPr id="26" name="TextBox 25">
+            <a:extLst>
+              <a:ext uri="{FF2B5EF4-FFF2-40B4-BE49-F238E27FC236}">
+                <a16:creationId xmlns:a16="http://schemas.microsoft.com/office/drawing/2014/main" id="{384EA96A-04DF-6DCB-7EF2-220B31A4D51C}"/>
+              </a:ext>
+            </a:extLst>
+          </p:cNvPr>
+          <p:cNvSpPr txBox="1"/>
+          <p:nvPr/>
+        </p:nvSpPr>
+        <p:spPr>
+          <a:xfrm>
+            <a:off x="2590965" y="2563084"/>
+            <a:ext cx="1696055" cy="338554"/>
+          </a:xfrm>
+          <a:prstGeom prst="rect">
+            <a:avLst/>
+          </a:prstGeom>
+          <a:noFill/>
+        </p:spPr>
+        <p:txBody>
+          <a:bodyPr wrap="square">
+            <a:spAutoFit/>
+          </a:bodyPr>
+          <a:lstStyle/>
+          <a:p>
+            <a:r>
+              <a:rPr lang="ko-KR" altLang="en-US" sz="1600">
+                <a:latin typeface="D2Coding" panose="020B0609020101020101" pitchFamily="49" charset="-127"/>
+                <a:ea typeface="D2Coding" panose="020B0609020101020101" pitchFamily="49" charset="-127"/>
+              </a:rPr>
+              <a:t>학습된 모델 </a:t>
+            </a:r>
+            <a:endParaRPr lang="ko-KR" altLang="en-US" sz="1600" dirty="0"/>
+          </a:p>
+        </p:txBody>
+      </p:sp>
+      <p:pic>
+        <p:nvPicPr>
+          <p:cNvPr id="28" name="그래픽 27" descr="모니터">
+            <a:extLst>
+              <a:ext uri="{FF2B5EF4-FFF2-40B4-BE49-F238E27FC236}">
+                <a16:creationId xmlns:a16="http://schemas.microsoft.com/office/drawing/2014/main" id="{B57E3CBA-A542-E1D3-7B29-C4103F7FCC41}"/>
+              </a:ext>
+            </a:extLst>
+          </p:cNvPr>
+          <p:cNvPicPr>
+            <a:picLocks noChangeAspect="1"/>
+          </p:cNvPicPr>
+          <p:nvPr/>
+        </p:nvPicPr>
+        <p:blipFill>
+          <a:blip r:embed="rId2">
+            <a:extLst>
+              <a:ext uri="{96DAC541-7B7A-43D3-8B79-37D633B846F1}">
+                <asvg:svgBlip xmlns:asvg="http://schemas.microsoft.com/office/drawing/2016/SVG/main" r:embed="rId3"/>
+              </a:ext>
+            </a:extLst>
+          </a:blip>
+          <a:stretch>
+            <a:fillRect/>
+          </a:stretch>
+        </p:blipFill>
+        <p:spPr>
+          <a:xfrm>
+            <a:off x="2057400" y="2399091"/>
+            <a:ext cx="533565" cy="533565"/>
+          </a:xfrm>
+          <a:prstGeom prst="rect">
+            <a:avLst/>
+          </a:prstGeom>
+        </p:spPr>
+      </p:pic>
+      <p:sp>
+        <p:nvSpPr>
+          <p:cNvPr id="30" name="TextBox 29">
+            <a:extLst>
+              <a:ext uri="{FF2B5EF4-FFF2-40B4-BE49-F238E27FC236}">
+                <a16:creationId xmlns:a16="http://schemas.microsoft.com/office/drawing/2014/main" id="{63C1F85D-A860-A277-940F-ACB9A2B89B60}"/>
+              </a:ext>
+            </a:extLst>
+          </p:cNvPr>
+          <p:cNvSpPr txBox="1"/>
+          <p:nvPr/>
+        </p:nvSpPr>
+        <p:spPr>
+          <a:xfrm>
+            <a:off x="1352549" y="5592885"/>
+            <a:ext cx="4505325" cy="422167"/>
+          </a:xfrm>
+          <a:prstGeom prst="rect">
+            <a:avLst/>
+          </a:prstGeom>
+          <a:noFill/>
+        </p:spPr>
+        <p:txBody>
+          <a:bodyPr wrap="square">
+            <a:spAutoFit/>
+          </a:bodyPr>
+          <a:lstStyle/>
+          <a:p>
+            <a:pPr>
+              <a:lnSpc>
+                <a:spcPct val="150000"/>
+              </a:lnSpc>
+            </a:pPr>
+            <a:r>
+              <a:rPr lang="ko-KR" altLang="en-US" sz="1600" dirty="0">
+                <a:latin typeface="D2Coding" panose="020B0609020101020101" pitchFamily="49" charset="-127"/>
+                <a:ea typeface="D2Coding" panose="020B0609020101020101" pitchFamily="49" charset="-127"/>
+              </a:rPr>
+              <a:t>새로운 메일 2: "오늘 구제" </a:t>
+            </a:r>
+            <a:r>
+              <a:rPr lang="en-US" altLang="ko-KR" sz="1600" dirty="0">
+                <a:latin typeface="D2Coding" panose="020B0609020101020101" pitchFamily="49" charset="-127"/>
+                <a:ea typeface="D2Coding" panose="020B0609020101020101" pitchFamily="49" charset="-127"/>
+                <a:sym typeface="Wingdings" panose="05000000000000000000" pitchFamily="2" charset="2"/>
+              </a:rPr>
+              <a:t> </a:t>
+            </a:r>
+            <a:r>
+              <a:rPr lang="ko-KR" altLang="en-US" sz="1600" dirty="0">
+                <a:latin typeface="D2Coding" panose="020B0609020101020101" pitchFamily="49" charset="-127"/>
+                <a:ea typeface="D2Coding" panose="020B0609020101020101" pitchFamily="49" charset="-127"/>
+              </a:rPr>
+              <a:t> [0, </a:t>
+            </a:r>
+            <a:r>
+              <a:rPr lang="en-US" altLang="ko-KR" sz="1600" dirty="0">
+                <a:latin typeface="D2Coding" panose="020B0609020101020101" pitchFamily="49" charset="-127"/>
+                <a:ea typeface="D2Coding" panose="020B0609020101020101" pitchFamily="49" charset="-127"/>
+              </a:rPr>
+              <a:t>0</a:t>
+            </a:r>
+            <a:r>
+              <a:rPr lang="ko-KR" altLang="en-US" sz="1600" dirty="0">
+                <a:latin typeface="D2Coding" panose="020B0609020101020101" pitchFamily="49" charset="-127"/>
+                <a:ea typeface="D2Coding" panose="020B0609020101020101" pitchFamily="49" charset="-127"/>
+              </a:rPr>
+              <a:t>, </a:t>
+            </a:r>
+            <a:r>
+              <a:rPr lang="en-US" altLang="ko-KR" sz="1600" dirty="0">
+                <a:latin typeface="D2Coding" panose="020B0609020101020101" pitchFamily="49" charset="-127"/>
+                <a:ea typeface="D2Coding" panose="020B0609020101020101" pitchFamily="49" charset="-127"/>
+              </a:rPr>
+              <a:t>0</a:t>
+            </a:r>
+            <a:r>
+              <a:rPr lang="ko-KR" altLang="en-US" sz="1600" dirty="0">
+                <a:latin typeface="D2Coding" panose="020B0609020101020101" pitchFamily="49" charset="-127"/>
+                <a:ea typeface="D2Coding" panose="020B0609020101020101" pitchFamily="49" charset="-127"/>
+              </a:rPr>
+              <a:t>, 1]</a:t>
+            </a:r>
+          </a:p>
+        </p:txBody>
+      </p:sp>
+      <p:cxnSp>
+        <p:nvCxnSpPr>
+          <p:cNvPr id="32" name="직선 화살표 연결선 31">
+            <a:extLst>
+              <a:ext uri="{FF2B5EF4-FFF2-40B4-BE49-F238E27FC236}">
+                <a16:creationId xmlns:a16="http://schemas.microsoft.com/office/drawing/2014/main" id="{6793DB13-110C-04AD-92FB-F33365531635}"/>
+              </a:ext>
+            </a:extLst>
+          </p:cNvPr>
+          <p:cNvCxnSpPr>
+            <a:cxnSpLocks/>
+            <a:stCxn id="23" idx="3"/>
+            <a:endCxn id="39" idx="1"/>
+          </p:cNvCxnSpPr>
+          <p:nvPr/>
+        </p:nvCxnSpPr>
+        <p:spPr>
+          <a:xfrm>
+            <a:off x="5857875" y="4982968"/>
+            <a:ext cx="2776538" cy="20525"/>
+          </a:xfrm>
+          <a:prstGeom prst="straightConnector1">
+            <a:avLst/>
+          </a:prstGeom>
+          <a:ln>
+            <a:tailEnd type="triangle"/>
+          </a:ln>
+        </p:spPr>
+        <p:style>
+          <a:lnRef idx="1">
+            <a:schemeClr val="dk1"/>
+          </a:lnRef>
+          <a:fillRef idx="0">
+            <a:schemeClr val="dk1"/>
+          </a:fillRef>
+          <a:effectRef idx="0">
+            <a:schemeClr val="dk1"/>
+          </a:effectRef>
+          <a:fontRef idx="minor">
+            <a:schemeClr val="tx1"/>
+          </a:fontRef>
+        </p:style>
+      </p:cxnSp>
+      <p:cxnSp>
+        <p:nvCxnSpPr>
+          <p:cNvPr id="34" name="직선 화살표 연결선 33">
+            <a:extLst>
+              <a:ext uri="{FF2B5EF4-FFF2-40B4-BE49-F238E27FC236}">
+                <a16:creationId xmlns:a16="http://schemas.microsoft.com/office/drawing/2014/main" id="{D671A3D7-A499-9FB7-4EDB-C2DDDC2038E5}"/>
+              </a:ext>
+            </a:extLst>
+          </p:cNvPr>
+          <p:cNvCxnSpPr>
+            <a:cxnSpLocks/>
+            <a:stCxn id="30" idx="3"/>
+            <a:endCxn id="48" idx="1"/>
+          </p:cNvCxnSpPr>
+          <p:nvPr/>
+        </p:nvCxnSpPr>
+        <p:spPr>
+          <a:xfrm flipV="1">
+            <a:off x="5857874" y="5783340"/>
+            <a:ext cx="2776539" cy="20629"/>
+          </a:xfrm>
+          <a:prstGeom prst="straightConnector1">
+            <a:avLst/>
+          </a:prstGeom>
+          <a:ln>
+            <a:tailEnd type="triangle"/>
+          </a:ln>
+        </p:spPr>
+        <p:style>
+          <a:lnRef idx="1">
+            <a:schemeClr val="dk1"/>
+          </a:lnRef>
+          <a:fillRef idx="0">
+            <a:schemeClr val="dk1"/>
+          </a:fillRef>
+          <a:effectRef idx="0">
+            <a:schemeClr val="dk1"/>
+          </a:effectRef>
+          <a:fontRef idx="minor">
+            <a:schemeClr val="tx1"/>
+          </a:fontRef>
+        </p:style>
+      </p:cxnSp>
+      <p:pic>
+        <p:nvPicPr>
+          <p:cNvPr id="39" name="그래픽 38" descr="모니터">
+            <a:extLst>
+              <a:ext uri="{FF2B5EF4-FFF2-40B4-BE49-F238E27FC236}">
+                <a16:creationId xmlns:a16="http://schemas.microsoft.com/office/drawing/2014/main" id="{249C88CB-8243-AEF7-541C-658AAEF70CF7}"/>
+              </a:ext>
+            </a:extLst>
+          </p:cNvPr>
+          <p:cNvPicPr>
+            <a:picLocks noChangeAspect="1"/>
+          </p:cNvPicPr>
+          <p:nvPr/>
+        </p:nvPicPr>
+        <p:blipFill>
+          <a:blip r:embed="rId2">
+            <a:extLst>
+              <a:ext uri="{96DAC541-7B7A-43D3-8B79-37D633B846F1}">
+                <asvg:svgBlip xmlns:asvg="http://schemas.microsoft.com/office/drawing/2016/SVG/main" r:embed="rId3"/>
+              </a:ext>
+            </a:extLst>
+          </a:blip>
+          <a:stretch>
+            <a:fillRect/>
+          </a:stretch>
+        </p:blipFill>
+        <p:spPr>
+          <a:xfrm>
+            <a:off x="8634413" y="4736710"/>
+            <a:ext cx="533565" cy="533565"/>
+          </a:xfrm>
+          <a:prstGeom prst="rect">
+            <a:avLst/>
+          </a:prstGeom>
+        </p:spPr>
+      </p:pic>
+      <p:pic>
+        <p:nvPicPr>
+          <p:cNvPr id="48" name="그래픽 47" descr="모니터">
+            <a:extLst>
+              <a:ext uri="{FF2B5EF4-FFF2-40B4-BE49-F238E27FC236}">
+                <a16:creationId xmlns:a16="http://schemas.microsoft.com/office/drawing/2014/main" id="{383E9A1B-9316-3F3F-2D83-75692CAD3A8A}"/>
+              </a:ext>
+            </a:extLst>
+          </p:cNvPr>
+          <p:cNvPicPr>
+            <a:picLocks noChangeAspect="1"/>
+          </p:cNvPicPr>
+          <p:nvPr/>
+        </p:nvPicPr>
+        <p:blipFill>
+          <a:blip r:embed="rId2">
+            <a:extLst>
+              <a:ext uri="{96DAC541-7B7A-43D3-8B79-37D633B846F1}">
+                <asvg:svgBlip xmlns:asvg="http://schemas.microsoft.com/office/drawing/2016/SVG/main" r:embed="rId3"/>
+              </a:ext>
+            </a:extLst>
+          </a:blip>
+          <a:stretch>
+            <a:fillRect/>
+          </a:stretch>
+        </p:blipFill>
+        <p:spPr>
+          <a:xfrm>
+            <a:off x="8634413" y="5516557"/>
+            <a:ext cx="533565" cy="533565"/>
+          </a:xfrm>
+          <a:prstGeom prst="rect">
+            <a:avLst/>
+          </a:prstGeom>
+        </p:spPr>
+      </p:pic>
+    </p:spTree>
+    <p:extLst>
+      <p:ext uri="{BB962C8B-B14F-4D97-AF65-F5344CB8AC3E}">
+        <p14:creationId xmlns:p14="http://schemas.microsoft.com/office/powerpoint/2010/main" val="1426322056"/>
+      </p:ext>
+    </p:extLst>
+  </p:cSld>
+  <p:clrMapOvr>
+    <a:masterClrMapping/>
+  </p:clrMapOvr>
+</p:sld>
+</file>
+
+<file path=ppt/slides/slide12.xml><?xml version="1.0" encoding="utf-8"?>
+<p:sld xmlns:a="http://schemas.openxmlformats.org/drawingml/2006/main" xmlns:r="http://schemas.openxmlformats.org/officeDocument/2006/relationships" xmlns:p="http://schemas.openxmlformats.org/presentationml/2006/main">
+  <p:cSld>
+    <p:spTree>
+      <p:nvGrpSpPr>
+        <p:cNvPr id="1" name="">
+          <a:extLst>
+            <a:ext uri="{FF2B5EF4-FFF2-40B4-BE49-F238E27FC236}">
+              <a16:creationId xmlns:a16="http://schemas.microsoft.com/office/drawing/2014/main" id="{4FD9C13E-F294-2A6E-3342-FFC723E0EAEA}"/>
+            </a:ext>
+          </a:extLst>
+        </p:cNvPr>
+        <p:cNvGrpSpPr/>
+        <p:nvPr/>
+      </p:nvGrpSpPr>
+      <p:grpSpPr>
+        <a:xfrm>
+          <a:off x="0" y="0"/>
+          <a:ext cx="0" cy="0"/>
+          <a:chOff x="0" y="0"/>
+          <a:chExt cx="0" cy="0"/>
+        </a:xfrm>
+      </p:grpSpPr>
+      <p:sp>
+        <p:nvSpPr>
+          <p:cNvPr id="4" name="슬라이드 번호 개체 틀 3">
+            <a:extLst>
+              <a:ext uri="{FF2B5EF4-FFF2-40B4-BE49-F238E27FC236}">
+                <a16:creationId xmlns:a16="http://schemas.microsoft.com/office/drawing/2014/main" id="{9C6849D0-C491-D099-4000-839C3D78D53A}"/>
+              </a:ext>
+            </a:extLst>
+          </p:cNvPr>
+          <p:cNvSpPr>
+            <a:spLocks noGrp="1"/>
+          </p:cNvSpPr>
+          <p:nvPr>
+            <p:ph type="sldNum" sz="quarter" idx="12"/>
+          </p:nvPr>
+        </p:nvSpPr>
+        <p:spPr>
+          <a:xfrm>
+            <a:off x="10514011" y="6036261"/>
+            <a:ext cx="753545" cy="365125"/>
+          </a:xfrm>
+        </p:spPr>
+        <p:txBody>
+          <a:bodyPr/>
+          <a:lstStyle/>
+          <a:p>
+            <a:fld id="{D57F1E4F-1CFF-5643-939E-217C01CDF565}" type="slidenum">
+              <a:rPr lang="en-US" smtClean="0"/>
+              <a:pPr/>
+              <a:t>12</a:t>
+            </a:fld>
+            <a:endParaRPr lang="en-US" dirty="0"/>
+          </a:p>
+        </p:txBody>
+      </p:sp>
+      <p:sp>
+        <p:nvSpPr>
+          <p:cNvPr id="3" name="제목 1">
+            <a:extLst>
+              <a:ext uri="{FF2B5EF4-FFF2-40B4-BE49-F238E27FC236}">
+                <a16:creationId xmlns:a16="http://schemas.microsoft.com/office/drawing/2014/main" id="{D5BA32C1-1767-EA50-91DB-819B96D78493}"/>
+              </a:ext>
+            </a:extLst>
+          </p:cNvPr>
+          <p:cNvSpPr txBox="1">
+            <a:spLocks/>
+          </p:cNvSpPr>
+          <p:nvPr/>
+        </p:nvSpPr>
+        <p:spPr>
+          <a:xfrm>
+            <a:off x="475645" y="481983"/>
+            <a:ext cx="10353762" cy="766439"/>
+          </a:xfrm>
+          <a:prstGeom prst="rect">
+            <a:avLst/>
+          </a:prstGeom>
+        </p:spPr>
+        <p:txBody>
+          <a:bodyPr vert="horz" lIns="91440" tIns="45720" rIns="91440" bIns="45720" rtlCol="0" anchor="ctr">
+            <a:normAutofit/>
+          </a:bodyPr>
+          <a:lstStyle>
+            <a:lvl1pPr algn="ctr" defTabSz="914400" rtl="0" eaLnBrk="1" latinLnBrk="1" hangingPunct="1">
+              <a:lnSpc>
+                <a:spcPct val="90000"/>
+              </a:lnSpc>
+              <a:spcBef>
+                <a:spcPct val="0"/>
+              </a:spcBef>
+              <a:buNone/>
+              <a:defRPr sz="3200" kern="1200" cap="all" baseline="0">
+                <a:solidFill>
+                  <a:schemeClr val="tx1"/>
+                </a:solidFill>
+                <a:effectLst/>
+                <a:latin typeface="Batang" panose="02030600000101010101" pitchFamily="18" charset="-127"/>
+                <a:ea typeface="Batang" panose="02030600000101010101" pitchFamily="18" charset="-127"/>
+                <a:cs typeface="+mj-cs"/>
+              </a:defRPr>
+            </a:lvl1pPr>
+          </a:lstStyle>
+          <a:p>
+            <a:pPr algn="l"/>
+            <a:r>
+              <a:rPr lang="en-US" altLang="ko-KR" sz="2800" cap="none" dirty="0">
+                <a:solidFill>
+                  <a:schemeClr val="bg2">
+                    <a:lumMod val="25000"/>
+                  </a:schemeClr>
+                </a:solidFill>
+                <a:latin typeface="D2Coding" panose="020B0609020101020101" pitchFamily="49" charset="-127"/>
+                <a:ea typeface="D2Coding" panose="020B0609020101020101" pitchFamily="49" charset="-127"/>
+                <a:cs typeface="Segoe UI Light" panose="020B0502040204020203" pitchFamily="34" charset="0"/>
+              </a:rPr>
+              <a:t>LLM-Based Embeddings </a:t>
+            </a:r>
+            <a:endParaRPr lang="ko-KR" altLang="en-US" sz="2800" cap="none" dirty="0">
+              <a:solidFill>
+                <a:schemeClr val="bg2">
+                  <a:lumMod val="25000"/>
+                </a:schemeClr>
+              </a:solidFill>
+              <a:latin typeface="D2Coding" panose="020B0609020101020101" pitchFamily="49" charset="-127"/>
+              <a:ea typeface="D2Coding" panose="020B0609020101020101" pitchFamily="49" charset="-127"/>
+              <a:cs typeface="Segoe UI Light" panose="020B0502040204020203" pitchFamily="34" charset="0"/>
+            </a:endParaRPr>
+          </a:p>
+        </p:txBody>
+      </p:sp>
+      <p:sp>
+        <p:nvSpPr>
+          <p:cNvPr id="2" name="TextBox 1">
+            <a:extLst>
+              <a:ext uri="{FF2B5EF4-FFF2-40B4-BE49-F238E27FC236}">
+                <a16:creationId xmlns:a16="http://schemas.microsoft.com/office/drawing/2014/main" id="{61BDF977-EBB2-5BE7-BA5F-D0695C11FC0F}"/>
+              </a:ext>
+            </a:extLst>
+          </p:cNvPr>
+          <p:cNvSpPr txBox="1"/>
+          <p:nvPr/>
+        </p:nvSpPr>
+        <p:spPr>
+          <a:xfrm>
+            <a:off x="7200900" y="654811"/>
+            <a:ext cx="4419600" cy="400110"/>
+          </a:xfrm>
+          <a:prstGeom prst="rect">
+            <a:avLst/>
+          </a:prstGeom>
+          <a:noFill/>
+        </p:spPr>
+        <p:txBody>
+          <a:bodyPr wrap="square">
+            <a:spAutoFit/>
+          </a:bodyPr>
+          <a:lstStyle/>
+          <a:p>
+            <a:pPr algn="r"/>
+            <a:r>
+              <a:rPr lang="en-US" altLang="ko-KR" sz="2000" dirty="0">
+                <a:latin typeface="D2Coding" panose="020B0609020101020101" pitchFamily="49" charset="-127"/>
+                <a:ea typeface="D2Coding" panose="020B0609020101020101" pitchFamily="49" charset="-127"/>
+              </a:rPr>
+              <a:t>Semantic Embeddings Explained</a:t>
+            </a:r>
+            <a:endParaRPr lang="ko-KR" altLang="en-US" sz="2000" dirty="0">
+              <a:latin typeface="D2Coding" panose="020B0609020101020101" pitchFamily="49" charset="-127"/>
+              <a:ea typeface="D2Coding" panose="020B0609020101020101" pitchFamily="49" charset="-127"/>
+            </a:endParaRPr>
+          </a:p>
+        </p:txBody>
+      </p:sp>
+      <p:sp>
+        <p:nvSpPr>
+          <p:cNvPr id="7" name="TextBox 6">
+            <a:extLst>
+              <a:ext uri="{FF2B5EF4-FFF2-40B4-BE49-F238E27FC236}">
+                <a16:creationId xmlns:a16="http://schemas.microsoft.com/office/drawing/2014/main" id="{EFB1B62A-A13C-786F-E0F6-33F6742DFD56}"/>
+              </a:ext>
+            </a:extLst>
+          </p:cNvPr>
+          <p:cNvSpPr txBox="1"/>
+          <p:nvPr/>
+        </p:nvSpPr>
+        <p:spPr>
+          <a:xfrm>
+            <a:off x="537022" y="1248422"/>
+            <a:ext cx="11179333" cy="465320"/>
+          </a:xfrm>
+          <a:prstGeom prst="rect">
+            <a:avLst/>
+          </a:prstGeom>
+          <a:noFill/>
+        </p:spPr>
+        <p:txBody>
+          <a:bodyPr wrap="square">
+            <a:spAutoFit/>
+          </a:bodyPr>
+          <a:lstStyle/>
+          <a:p>
+            <a:pPr>
+              <a:lnSpc>
+                <a:spcPct val="150000"/>
+              </a:lnSpc>
+            </a:pPr>
+            <a:r>
+              <a:rPr lang="ko-KR" altLang="en-US" dirty="0">
+                <a:latin typeface="D2Coding" panose="020B0609020101020101" pitchFamily="49" charset="-127"/>
+                <a:ea typeface="D2Coding" panose="020B0609020101020101" pitchFamily="49" charset="-127"/>
+              </a:rPr>
+              <a:t>차원은 특정 </a:t>
+            </a:r>
+            <a:r>
+              <a:rPr lang="en-US" altLang="ko-KR" dirty="0">
+                <a:latin typeface="D2Coding" panose="020B0609020101020101" pitchFamily="49" charset="-127"/>
+                <a:ea typeface="D2Coding" panose="020B0609020101020101" pitchFamily="49" charset="-127"/>
+              </a:rPr>
+              <a:t>Feature, </a:t>
+            </a:r>
+            <a:r>
+              <a:rPr lang="ko-KR" altLang="en-US" dirty="0">
+                <a:latin typeface="D2Coding" panose="020B0609020101020101" pitchFamily="49" charset="-127"/>
+                <a:ea typeface="D2Coding" panose="020B0609020101020101" pitchFamily="49" charset="-127"/>
+              </a:rPr>
+              <a:t>즉 의미</a:t>
+            </a:r>
+            <a:r>
+              <a:rPr lang="en-US" altLang="ko-KR" dirty="0">
+                <a:latin typeface="D2Coding" panose="020B0609020101020101" pitchFamily="49" charset="-127"/>
+                <a:ea typeface="D2Coding" panose="020B0609020101020101" pitchFamily="49" charset="-127"/>
+              </a:rPr>
+              <a:t>(semantic dimension)</a:t>
+            </a:r>
+            <a:r>
+              <a:rPr lang="ko-KR" altLang="en-US" dirty="0">
+                <a:latin typeface="D2Coding" panose="020B0609020101020101" pitchFamily="49" charset="-127"/>
+                <a:ea typeface="D2Coding" panose="020B0609020101020101" pitchFamily="49" charset="-127"/>
+              </a:rPr>
+              <a:t>를 나타냄</a:t>
+            </a:r>
+          </a:p>
+        </p:txBody>
+      </p:sp>
+      <p:pic>
+        <p:nvPicPr>
+          <p:cNvPr id="12" name="그림 11">
+            <a:extLst>
+              <a:ext uri="{FF2B5EF4-FFF2-40B4-BE49-F238E27FC236}">
+                <a16:creationId xmlns:a16="http://schemas.microsoft.com/office/drawing/2014/main" id="{9376B82E-8B6E-FCEE-91B1-12493B6A06B2}"/>
+              </a:ext>
+            </a:extLst>
+          </p:cNvPr>
+          <p:cNvPicPr>
+            <a:picLocks noChangeAspect="1"/>
+          </p:cNvPicPr>
+          <p:nvPr/>
+        </p:nvPicPr>
+        <p:blipFill>
+          <a:blip r:embed="rId2"/>
+          <a:stretch>
+            <a:fillRect/>
+          </a:stretch>
+        </p:blipFill>
+        <p:spPr>
+          <a:xfrm>
+            <a:off x="1563874" y="3019425"/>
+            <a:ext cx="2861914" cy="2501471"/>
+          </a:xfrm>
+          <a:prstGeom prst="rect">
+            <a:avLst/>
+          </a:prstGeom>
+        </p:spPr>
+      </p:pic>
+      <p:sp>
+        <p:nvSpPr>
+          <p:cNvPr id="15" name="TextBox 14">
+            <a:extLst>
+              <a:ext uri="{FF2B5EF4-FFF2-40B4-BE49-F238E27FC236}">
+                <a16:creationId xmlns:a16="http://schemas.microsoft.com/office/drawing/2014/main" id="{616F8386-CECD-6CE6-2553-C04C3A31695E}"/>
+              </a:ext>
+            </a:extLst>
+          </p:cNvPr>
+          <p:cNvSpPr txBox="1"/>
+          <p:nvPr/>
+        </p:nvSpPr>
+        <p:spPr>
+          <a:xfrm>
+            <a:off x="1055501" y="5752268"/>
+            <a:ext cx="3773674" cy="338554"/>
+          </a:xfrm>
+          <a:prstGeom prst="rect">
+            <a:avLst/>
+          </a:prstGeom>
+          <a:noFill/>
+        </p:spPr>
+        <p:txBody>
+          <a:bodyPr wrap="square">
+            <a:spAutoFit/>
+          </a:bodyPr>
+          <a:lstStyle/>
+          <a:p>
+            <a:r>
+              <a:rPr lang="en-US" altLang="ko-KR" sz="1600" dirty="0">
+                <a:latin typeface="D2Coding" panose="020B0609020101020101" pitchFamily="49" charset="-127"/>
+                <a:ea typeface="D2Coding" panose="020B0609020101020101" pitchFamily="49" charset="-127"/>
+              </a:rPr>
+              <a:t>Semantic representations of words</a:t>
+            </a:r>
+            <a:endParaRPr lang="ko-KR" altLang="en-US" sz="1600" dirty="0">
+              <a:latin typeface="D2Coding" panose="020B0609020101020101" pitchFamily="49" charset="-127"/>
+              <a:ea typeface="D2Coding" panose="020B0609020101020101" pitchFamily="49" charset="-127"/>
+            </a:endParaRPr>
+          </a:p>
+        </p:txBody>
+      </p:sp>
+      <p:pic>
+        <p:nvPicPr>
+          <p:cNvPr id="17" name="그림 16">
+            <a:extLst>
+              <a:ext uri="{FF2B5EF4-FFF2-40B4-BE49-F238E27FC236}">
+                <a16:creationId xmlns:a16="http://schemas.microsoft.com/office/drawing/2014/main" id="{39CBBFAE-103D-A7ED-C8F6-CB6DA5E07AD1}"/>
+              </a:ext>
+            </a:extLst>
+          </p:cNvPr>
+          <p:cNvPicPr>
+            <a:picLocks noChangeAspect="1"/>
+          </p:cNvPicPr>
+          <p:nvPr/>
+        </p:nvPicPr>
+        <p:blipFill>
+          <a:blip r:embed="rId3"/>
+          <a:stretch>
+            <a:fillRect/>
+          </a:stretch>
+        </p:blipFill>
+        <p:spPr>
+          <a:xfrm>
+            <a:off x="6096000" y="2586942"/>
+            <a:ext cx="3863675" cy="2933954"/>
+          </a:xfrm>
+          <a:prstGeom prst="rect">
+            <a:avLst/>
+          </a:prstGeom>
+        </p:spPr>
+      </p:pic>
+      <p:sp>
+        <p:nvSpPr>
+          <p:cNvPr id="19" name="TextBox 18">
+            <a:extLst>
+              <a:ext uri="{FF2B5EF4-FFF2-40B4-BE49-F238E27FC236}">
+                <a16:creationId xmlns:a16="http://schemas.microsoft.com/office/drawing/2014/main" id="{4D6CFBC2-1A23-1286-6F47-4ECEBBDC0980}"/>
+              </a:ext>
+            </a:extLst>
+          </p:cNvPr>
+          <p:cNvSpPr txBox="1"/>
+          <p:nvPr/>
+        </p:nvSpPr>
+        <p:spPr>
+          <a:xfrm>
+            <a:off x="5524500" y="5689298"/>
+            <a:ext cx="6096000" cy="338554"/>
+          </a:xfrm>
+          <a:prstGeom prst="rect">
+            <a:avLst/>
+          </a:prstGeom>
+          <a:noFill/>
+        </p:spPr>
+        <p:txBody>
+          <a:bodyPr wrap="square">
+            <a:spAutoFit/>
+          </a:bodyPr>
+          <a:lstStyle/>
+          <a:p>
+            <a:r>
+              <a:rPr lang="en-US" altLang="ko-KR" sz="1600" dirty="0">
+                <a:latin typeface="D2Coding" panose="020B0609020101020101" pitchFamily="49" charset="-127"/>
+                <a:ea typeface="D2Coding" panose="020B0609020101020101" pitchFamily="49" charset="-127"/>
+              </a:rPr>
+              <a:t>Plot of word vectors in a multidimensional space</a:t>
+            </a:r>
+            <a:endParaRPr lang="ko-KR" altLang="en-US" sz="1600" dirty="0">
+              <a:latin typeface="D2Coding" panose="020B0609020101020101" pitchFamily="49" charset="-127"/>
+              <a:ea typeface="D2Coding" panose="020B0609020101020101" pitchFamily="49" charset="-127"/>
+            </a:endParaRPr>
+          </a:p>
+        </p:txBody>
+      </p:sp>
+      <p:sp>
+        <p:nvSpPr>
+          <p:cNvPr id="21" name="TextBox 20">
+            <a:extLst>
+              <a:ext uri="{FF2B5EF4-FFF2-40B4-BE49-F238E27FC236}">
+                <a16:creationId xmlns:a16="http://schemas.microsoft.com/office/drawing/2014/main" id="{4B11CD4E-8905-C1D0-6D25-BE3CE6C372C7}"/>
+              </a:ext>
+            </a:extLst>
+          </p:cNvPr>
+          <p:cNvSpPr txBox="1"/>
+          <p:nvPr/>
+        </p:nvSpPr>
+        <p:spPr>
+          <a:xfrm>
+            <a:off x="6953250" y="2217610"/>
+            <a:ext cx="2295525" cy="369332"/>
+          </a:xfrm>
+          <a:prstGeom prst="rect">
+            <a:avLst/>
+          </a:prstGeom>
+          <a:noFill/>
+        </p:spPr>
+        <p:txBody>
+          <a:bodyPr wrap="square">
+            <a:spAutoFit/>
+          </a:bodyPr>
+          <a:lstStyle/>
+          <a:p>
+            <a:r>
+              <a:rPr lang="en-US" altLang="ko-KR" dirty="0">
+                <a:latin typeface="D2Coding" panose="020B0609020101020101" pitchFamily="49" charset="-127"/>
+                <a:ea typeface="D2Coding" panose="020B0609020101020101" pitchFamily="49" charset="-127"/>
+              </a:rPr>
+              <a:t>Cosine similarity</a:t>
+            </a:r>
+            <a:endParaRPr lang="ko-KR" altLang="en-US" dirty="0">
+              <a:latin typeface="D2Coding" panose="020B0609020101020101" pitchFamily="49" charset="-127"/>
+              <a:ea typeface="D2Coding" panose="020B0609020101020101" pitchFamily="49" charset="-127"/>
+            </a:endParaRPr>
+          </a:p>
+        </p:txBody>
+      </p:sp>
+    </p:spTree>
+    <p:extLst>
+      <p:ext uri="{BB962C8B-B14F-4D97-AF65-F5344CB8AC3E}">
+        <p14:creationId xmlns:p14="http://schemas.microsoft.com/office/powerpoint/2010/main" val="779192848"/>
+      </p:ext>
+    </p:extLst>
+  </p:cSld>
+  <p:clrMapOvr>
+    <a:masterClrMapping/>
+  </p:clrMapOvr>
+</p:sld>
+</file>
+
+<file path=ppt/slides/slide13.xml><?xml version="1.0" encoding="utf-8"?>
+<p:sld xmlns:a="http://schemas.openxmlformats.org/drawingml/2006/main" xmlns:r="http://schemas.openxmlformats.org/officeDocument/2006/relationships" xmlns:p="http://schemas.openxmlformats.org/presentationml/2006/main">
+  <p:cSld>
+    <p:spTree>
+      <p:nvGrpSpPr>
+        <p:cNvPr id="1" name="">
+          <a:extLst>
+            <a:ext uri="{FF2B5EF4-FFF2-40B4-BE49-F238E27FC236}">
               <a16:creationId xmlns:a16="http://schemas.microsoft.com/office/drawing/2014/main" id="{F3D51295-47CC-7FDC-BF9B-2262C9DCFCE3}"/>
             </a:ext>
           </a:extLst>
@@ -3109,7 +5703,7 @@
             <a:fld id="{D57F1E4F-1CFF-5643-939E-217C01CDF565}" type="slidenum">
               <a:rPr lang="en-US" smtClean="0"/>
               <a:pPr/>
-              <a:t>10</a:t>
+              <a:t>13</a:t>
             </a:fld>
             <a:endParaRPr lang="en-US" dirty="0"/>
           </a:p>
@@ -3590,7 +6184,7 @@
 </p:sld>
 </file>
 
-<file path=ppt/slides/slide11.xml><?xml version="1.0" encoding="utf-8"?>
+<file path=ppt/slides/slide14.xml><?xml version="1.0" encoding="utf-8"?>
 <p:sld xmlns:a="http://schemas.openxmlformats.org/drawingml/2006/main" xmlns:r="http://schemas.openxmlformats.org/officeDocument/2006/relationships" xmlns:p="http://schemas.openxmlformats.org/presentationml/2006/main">
   <p:cSld>
     <p:spTree>
@@ -3642,7 +6236,7 @@
             <a:fld id="{D57F1E4F-1CFF-5643-939E-217C01CDF565}" type="slidenum">
               <a:rPr lang="en-US" smtClean="0"/>
               <a:pPr/>
-              <a:t>11</a:t>
+              <a:t>14</a:t>
             </a:fld>
             <a:endParaRPr lang="en-US" dirty="0"/>
           </a:p>
@@ -4463,7 +7057,7 @@
 </p:sld>
 </file>
 
-<file path=ppt/slides/slide12.xml><?xml version="1.0" encoding="utf-8"?>
+<file path=ppt/slides/slide15.xml><?xml version="1.0" encoding="utf-8"?>
 <p:sld xmlns:a="http://schemas.openxmlformats.org/drawingml/2006/main" xmlns:r="http://schemas.openxmlformats.org/officeDocument/2006/relationships" xmlns:p="http://schemas.openxmlformats.org/presentationml/2006/main">
   <p:cSld>
     <p:spTree>
@@ -4515,7 +7109,7 @@
             <a:fld id="{D57F1E4F-1CFF-5643-939E-217C01CDF565}" type="slidenum">
               <a:rPr lang="en-US" smtClean="0"/>
               <a:pPr/>
-              <a:t>12</a:t>
+              <a:t>15</a:t>
             </a:fld>
             <a:endParaRPr lang="en-US" dirty="0"/>
           </a:p>
@@ -5583,7 +8177,7 @@
 </p:sld>
 </file>
 
-<file path=ppt/slides/slide13.xml><?xml version="1.0" encoding="utf-8"?>
+<file path=ppt/slides/slide16.xml><?xml version="1.0" encoding="utf-8"?>
 <p:sld xmlns:a="http://schemas.openxmlformats.org/drawingml/2006/main" xmlns:r="http://schemas.openxmlformats.org/officeDocument/2006/relationships" xmlns:p="http://schemas.openxmlformats.org/presentationml/2006/main">
   <p:cSld>
     <p:spTree>
@@ -5635,7 +8229,7 @@
             <a:fld id="{D57F1E4F-1CFF-5643-939E-217C01CDF565}" type="slidenum">
               <a:rPr lang="en-US" smtClean="0"/>
               <a:pPr/>
-              <a:t>13</a:t>
+              <a:t>16</a:t>
             </a:fld>
             <a:endParaRPr lang="en-US" dirty="0"/>
           </a:p>
@@ -6196,7 +8790,7 @@
 </p:sld>
 </file>
 
-<file path=ppt/slides/slide14.xml><?xml version="1.0" encoding="utf-8"?>
+<file path=ppt/slides/slide17.xml><?xml version="1.0" encoding="utf-8"?>
 <p:sld xmlns:a="http://schemas.openxmlformats.org/drawingml/2006/main" xmlns:r="http://schemas.openxmlformats.org/officeDocument/2006/relationships" xmlns:p="http://schemas.openxmlformats.org/presentationml/2006/main">
   <p:cSld>
     <p:spTree>
@@ -6248,7 +8842,7 @@
             <a:fld id="{D57F1E4F-1CFF-5643-939E-217C01CDF565}" type="slidenum">
               <a:rPr lang="en-US" smtClean="0"/>
               <a:pPr/>
-              <a:t>14</a:t>
+              <a:t>17</a:t>
             </a:fld>
             <a:endParaRPr lang="en-US" dirty="0"/>
           </a:p>
@@ -6940,7 +9534,7 @@
 </p:sld>
 </file>
 
-<file path=ppt/slides/slide15.xml><?xml version="1.0" encoding="utf-8"?>
+<file path=ppt/slides/slide18.xml><?xml version="1.0" encoding="utf-8"?>
 <p:sld xmlns:a="http://schemas.openxmlformats.org/drawingml/2006/main" xmlns:r="http://schemas.openxmlformats.org/officeDocument/2006/relationships" xmlns:p="http://schemas.openxmlformats.org/presentationml/2006/main">
   <p:cSld>
     <p:spTree>
@@ -7039,7 +9633,7 @@
             <a:fld id="{D57F1E4F-1CFF-5643-939E-217C01CDF565}" type="slidenum">
               <a:rPr lang="en-US" smtClean="0"/>
               <a:pPr/>
-              <a:t>15</a:t>
+              <a:t>18</a:t>
             </a:fld>
             <a:endParaRPr lang="en-US" dirty="0"/>
           </a:p>
@@ -7450,7 +10044,7 @@
 </p:sld>
 </file>
 
-<file path=ppt/slides/slide16.xml><?xml version="1.0" encoding="utf-8"?>
+<file path=ppt/slides/slide19.xml><?xml version="1.0" encoding="utf-8"?>
 <p:sld xmlns:a="http://schemas.openxmlformats.org/drawingml/2006/main" xmlns:r="http://schemas.openxmlformats.org/officeDocument/2006/relationships" xmlns:p="http://schemas.openxmlformats.org/presentationml/2006/main">
   <p:cSld>
     <p:spTree>
@@ -7502,7 +10096,7 @@
             <a:fld id="{D57F1E4F-1CFF-5643-939E-217C01CDF565}" type="slidenum">
               <a:rPr lang="en-US" smtClean="0"/>
               <a:pPr/>
-              <a:t>16</a:t>
+              <a:t>19</a:t>
             </a:fld>
             <a:endParaRPr lang="en-US" dirty="0"/>
           </a:p>
@@ -8264,1552 +10858,6 @@
     <p:extLst>
       <p:ext uri="{BB962C8B-B14F-4D97-AF65-F5344CB8AC3E}">
         <p14:creationId xmlns:p14="http://schemas.microsoft.com/office/powerpoint/2010/main" val="2273456986"/>
-      </p:ext>
-    </p:extLst>
-  </p:cSld>
-  <p:clrMapOvr>
-    <a:masterClrMapping/>
-  </p:clrMapOvr>
-</p:sld>
-</file>
-
-<file path=ppt/slides/slide17.xml><?xml version="1.0" encoding="utf-8"?>
-<p:sld xmlns:a="http://schemas.openxmlformats.org/drawingml/2006/main" xmlns:r="http://schemas.openxmlformats.org/officeDocument/2006/relationships" xmlns:p="http://schemas.openxmlformats.org/presentationml/2006/main">
-  <p:cSld>
-    <p:spTree>
-      <p:nvGrpSpPr>
-        <p:cNvPr id="1" name="">
-          <a:extLst>
-            <a:ext uri="{FF2B5EF4-FFF2-40B4-BE49-F238E27FC236}">
-              <a16:creationId xmlns:a16="http://schemas.microsoft.com/office/drawing/2014/main" id="{CE7F842C-9CAC-38E6-8FD9-D5DA947DEBB5}"/>
-            </a:ext>
-          </a:extLst>
-        </p:cNvPr>
-        <p:cNvGrpSpPr/>
-        <p:nvPr/>
-      </p:nvGrpSpPr>
-      <p:grpSpPr>
-        <a:xfrm>
-          <a:off x="0" y="0"/>
-          <a:ext cx="0" cy="0"/>
-          <a:chOff x="0" y="0"/>
-          <a:chExt cx="0" cy="0"/>
-        </a:xfrm>
-      </p:grpSpPr>
-      <p:sp>
-        <p:nvSpPr>
-          <p:cNvPr id="4" name="슬라이드 번호 개체 틀 3">
-            <a:extLst>
-              <a:ext uri="{FF2B5EF4-FFF2-40B4-BE49-F238E27FC236}">
-                <a16:creationId xmlns:a16="http://schemas.microsoft.com/office/drawing/2014/main" id="{A7EE8165-43B8-DA8C-46DF-D26611C00B68}"/>
-              </a:ext>
-            </a:extLst>
-          </p:cNvPr>
-          <p:cNvSpPr>
-            <a:spLocks noGrp="1"/>
-          </p:cNvSpPr>
-          <p:nvPr>
-            <p:ph type="sldNum" sz="quarter" idx="12"/>
-          </p:nvPr>
-        </p:nvSpPr>
-        <p:spPr>
-          <a:xfrm>
-            <a:off x="10514011" y="6036261"/>
-            <a:ext cx="753545" cy="365125"/>
-          </a:xfrm>
-        </p:spPr>
-        <p:txBody>
-          <a:bodyPr/>
-          <a:lstStyle/>
-          <a:p>
-            <a:fld id="{D57F1E4F-1CFF-5643-939E-217C01CDF565}" type="slidenum">
-              <a:rPr lang="en-US" smtClean="0"/>
-              <a:pPr/>
-              <a:t>17</a:t>
-            </a:fld>
-            <a:endParaRPr lang="en-US" dirty="0"/>
-          </a:p>
-        </p:txBody>
-      </p:sp>
-      <p:sp>
-        <p:nvSpPr>
-          <p:cNvPr id="3" name="제목 1">
-            <a:extLst>
-              <a:ext uri="{FF2B5EF4-FFF2-40B4-BE49-F238E27FC236}">
-                <a16:creationId xmlns:a16="http://schemas.microsoft.com/office/drawing/2014/main" id="{C243947F-3B13-B412-B1A4-2AFBF67B6C15}"/>
-              </a:ext>
-            </a:extLst>
-          </p:cNvPr>
-          <p:cNvSpPr txBox="1">
-            <a:spLocks/>
-          </p:cNvSpPr>
-          <p:nvPr/>
-        </p:nvSpPr>
-        <p:spPr>
-          <a:xfrm>
-            <a:off x="475645" y="481983"/>
-            <a:ext cx="10353762" cy="766439"/>
-          </a:xfrm>
-          <a:prstGeom prst="rect">
-            <a:avLst/>
-          </a:prstGeom>
-        </p:spPr>
-        <p:txBody>
-          <a:bodyPr vert="horz" lIns="91440" tIns="45720" rIns="91440" bIns="45720" rtlCol="0" anchor="ctr">
-            <a:normAutofit/>
-          </a:bodyPr>
-          <a:lstStyle>
-            <a:lvl1pPr algn="ctr" defTabSz="914400" rtl="0" eaLnBrk="1" latinLnBrk="1" hangingPunct="1">
-              <a:lnSpc>
-                <a:spcPct val="90000"/>
-              </a:lnSpc>
-              <a:spcBef>
-                <a:spcPct val="0"/>
-              </a:spcBef>
-              <a:buNone/>
-              <a:defRPr sz="3200" kern="1200" cap="all" baseline="0">
-                <a:solidFill>
-                  <a:schemeClr val="tx1"/>
-                </a:solidFill>
-                <a:effectLst/>
-                <a:latin typeface="Batang" panose="02030600000101010101" pitchFamily="18" charset="-127"/>
-                <a:ea typeface="Batang" panose="02030600000101010101" pitchFamily="18" charset="-127"/>
-                <a:cs typeface="+mj-cs"/>
-              </a:defRPr>
-            </a:lvl1pPr>
-          </a:lstStyle>
-          <a:p>
-            <a:pPr algn="l"/>
-            <a:r>
-              <a:rPr lang="en-US" altLang="ko-KR" sz="2800" cap="none" dirty="0">
-                <a:solidFill>
-                  <a:schemeClr val="bg2">
-                    <a:lumMod val="25000"/>
-                  </a:schemeClr>
-                </a:solidFill>
-                <a:latin typeface="D2Coding" panose="020B0609020101020101" pitchFamily="49" charset="-127"/>
-                <a:ea typeface="D2Coding" panose="020B0609020101020101" pitchFamily="49" charset="-127"/>
-                <a:cs typeface="Segoe UI Light" panose="020B0502040204020203" pitchFamily="34" charset="0"/>
-              </a:rPr>
-              <a:t>RAG(</a:t>
-            </a:r>
-            <a:r>
-              <a:rPr lang="ko-KR" altLang="en-US" sz="2800" cap="none" dirty="0">
-                <a:solidFill>
-                  <a:schemeClr val="bg2">
-                    <a:lumMod val="25000"/>
-                  </a:schemeClr>
-                </a:solidFill>
-                <a:latin typeface="D2Coding" panose="020B0609020101020101" pitchFamily="49" charset="-127"/>
-                <a:ea typeface="D2Coding" panose="020B0609020101020101" pitchFamily="49" charset="-127"/>
-                <a:cs typeface="Segoe UI Light" panose="020B0502040204020203" pitchFamily="34" charset="0"/>
-              </a:rPr>
-              <a:t>검색 증강 생성</a:t>
-            </a:r>
-            <a:r>
-              <a:rPr lang="en-US" altLang="ko-KR" sz="2800" cap="none" dirty="0">
-                <a:solidFill>
-                  <a:schemeClr val="bg2">
-                    <a:lumMod val="25000"/>
-                  </a:schemeClr>
-                </a:solidFill>
-                <a:latin typeface="D2Coding" panose="020B0609020101020101" pitchFamily="49" charset="-127"/>
-                <a:ea typeface="D2Coding" panose="020B0609020101020101" pitchFamily="49" charset="-127"/>
-                <a:cs typeface="Segoe UI Light" panose="020B0502040204020203" pitchFamily="34" charset="0"/>
-              </a:rPr>
-              <a:t>, Retrieval-Augmented Generation)</a:t>
-            </a:r>
-            <a:endParaRPr lang="ko-KR" altLang="en-US" sz="2800" cap="none" dirty="0">
-              <a:solidFill>
-                <a:schemeClr val="bg2">
-                  <a:lumMod val="25000"/>
-                </a:schemeClr>
-              </a:solidFill>
-              <a:latin typeface="D2Coding" panose="020B0609020101020101" pitchFamily="49" charset="-127"/>
-              <a:ea typeface="D2Coding" panose="020B0609020101020101" pitchFamily="49" charset="-127"/>
-              <a:cs typeface="Segoe UI Light" panose="020B0502040204020203" pitchFamily="34" charset="0"/>
-            </a:endParaRPr>
-          </a:p>
-        </p:txBody>
-      </p:sp>
-      <p:pic>
-        <p:nvPicPr>
-          <p:cNvPr id="11266" name="Picture 2" descr="index_diagram">
-            <a:extLst>
-              <a:ext uri="{FF2B5EF4-FFF2-40B4-BE49-F238E27FC236}">
-                <a16:creationId xmlns:a16="http://schemas.microsoft.com/office/drawing/2014/main" id="{5AC6592C-BD82-0D32-9BB4-24792A5FD224}"/>
-              </a:ext>
-            </a:extLst>
-          </p:cNvPr>
-          <p:cNvPicPr>
-            <a:picLocks noChangeAspect="1" noChangeArrowheads="1"/>
-          </p:cNvPicPr>
-          <p:nvPr/>
-        </p:nvPicPr>
-        <p:blipFill>
-          <a:blip r:embed="rId2">
-            <a:extLst>
-              <a:ext uri="{28A0092B-C50C-407E-A947-70E740481C1C}">
-                <a14:useLocalDpi xmlns:a14="http://schemas.microsoft.com/office/drawing/2010/main" val="0"/>
-              </a:ext>
-            </a:extLst>
-          </a:blip>
-          <a:srcRect/>
-          <a:stretch>
-            <a:fillRect/>
-          </a:stretch>
-        </p:blipFill>
-        <p:spPr bwMode="auto">
-          <a:xfrm>
-            <a:off x="1809750" y="1982281"/>
-            <a:ext cx="8055521" cy="4050836"/>
-          </a:xfrm>
-          <a:prstGeom prst="rect">
-            <a:avLst/>
-          </a:prstGeom>
-          <a:noFill/>
-          <a:extLst>
-            <a:ext uri="{909E8E84-426E-40DD-AFC4-6F175D3DCCD1}">
-              <a14:hiddenFill xmlns:a14="http://schemas.microsoft.com/office/drawing/2010/main">
-                <a:solidFill>
-                  <a:srgbClr val="FFFFFF"/>
-                </a:solidFill>
-              </a14:hiddenFill>
-            </a:ext>
-          </a:extLst>
-        </p:spPr>
-      </p:pic>
-      <p:sp>
-        <p:nvSpPr>
-          <p:cNvPr id="7" name="TextBox 6">
-            <a:extLst>
-              <a:ext uri="{FF2B5EF4-FFF2-40B4-BE49-F238E27FC236}">
-                <a16:creationId xmlns:a16="http://schemas.microsoft.com/office/drawing/2014/main" id="{40B795B2-462B-1D70-F75C-F6A7974637BE}"/>
-              </a:ext>
-            </a:extLst>
-          </p:cNvPr>
-          <p:cNvSpPr txBox="1"/>
-          <p:nvPr/>
-        </p:nvSpPr>
-        <p:spPr>
-          <a:xfrm>
-            <a:off x="1219923" y="5663785"/>
-            <a:ext cx="530915" cy="369332"/>
-          </a:xfrm>
-          <a:prstGeom prst="rect">
-            <a:avLst/>
-          </a:prstGeom>
-          <a:noFill/>
-        </p:spPr>
-        <p:txBody>
-          <a:bodyPr wrap="none" rtlCol="0">
-            <a:spAutoFit/>
-          </a:bodyPr>
-          <a:lstStyle/>
-          <a:p>
-            <a:r>
-              <a:rPr lang="en-US" altLang="ko-KR" dirty="0">
-                <a:latin typeface="D2Coding" panose="020B0609020101020101" pitchFamily="49" charset="-127"/>
-                <a:ea typeface="D2Coding" panose="020B0609020101020101" pitchFamily="49" charset="-127"/>
-                <a:hlinkClick r:id="rId3"/>
-              </a:rPr>
-              <a:t>RAG</a:t>
-            </a:r>
-            <a:endParaRPr lang="ko-KR" altLang="en-US" dirty="0">
-              <a:latin typeface="D2Coding" panose="020B0609020101020101" pitchFamily="49" charset="-127"/>
-              <a:ea typeface="D2Coding" panose="020B0609020101020101" pitchFamily="49" charset="-127"/>
-            </a:endParaRPr>
-          </a:p>
-        </p:txBody>
-      </p:sp>
-    </p:spTree>
-    <p:extLst>
-      <p:ext uri="{BB962C8B-B14F-4D97-AF65-F5344CB8AC3E}">
-        <p14:creationId xmlns:p14="http://schemas.microsoft.com/office/powerpoint/2010/main" val="710087885"/>
-      </p:ext>
-    </p:extLst>
-  </p:cSld>
-  <p:clrMapOvr>
-    <a:masterClrMapping/>
-  </p:clrMapOvr>
-</p:sld>
-</file>
-
-<file path=ppt/slides/slide18.xml><?xml version="1.0" encoding="utf-8"?>
-<p:sld xmlns:a="http://schemas.openxmlformats.org/drawingml/2006/main" xmlns:r="http://schemas.openxmlformats.org/officeDocument/2006/relationships" xmlns:p="http://schemas.openxmlformats.org/presentationml/2006/main">
-  <p:cSld>
-    <p:spTree>
-      <p:nvGrpSpPr>
-        <p:cNvPr id="1" name="">
-          <a:extLst>
-            <a:ext uri="{FF2B5EF4-FFF2-40B4-BE49-F238E27FC236}">
-              <a16:creationId xmlns:a16="http://schemas.microsoft.com/office/drawing/2014/main" id="{75E18721-1D54-F2C3-9D0C-19D25E4DED3C}"/>
-            </a:ext>
-          </a:extLst>
-        </p:cNvPr>
-        <p:cNvGrpSpPr/>
-        <p:nvPr/>
-      </p:nvGrpSpPr>
-      <p:grpSpPr>
-        <a:xfrm>
-          <a:off x="0" y="0"/>
-          <a:ext cx="0" cy="0"/>
-          <a:chOff x="0" y="0"/>
-          <a:chExt cx="0" cy="0"/>
-        </a:xfrm>
-      </p:grpSpPr>
-      <p:sp>
-        <p:nvSpPr>
-          <p:cNvPr id="4" name="슬라이드 번호 개체 틀 3">
-            <a:extLst>
-              <a:ext uri="{FF2B5EF4-FFF2-40B4-BE49-F238E27FC236}">
-                <a16:creationId xmlns:a16="http://schemas.microsoft.com/office/drawing/2014/main" id="{DAAC6D21-B116-9645-BE62-CC728796944D}"/>
-              </a:ext>
-            </a:extLst>
-          </p:cNvPr>
-          <p:cNvSpPr>
-            <a:spLocks noGrp="1"/>
-          </p:cNvSpPr>
-          <p:nvPr>
-            <p:ph type="sldNum" sz="quarter" idx="12"/>
-          </p:nvPr>
-        </p:nvSpPr>
-        <p:spPr>
-          <a:xfrm>
-            <a:off x="10514011" y="6036261"/>
-            <a:ext cx="753545" cy="365125"/>
-          </a:xfrm>
-        </p:spPr>
-        <p:txBody>
-          <a:bodyPr/>
-          <a:lstStyle/>
-          <a:p>
-            <a:fld id="{D57F1E4F-1CFF-5643-939E-217C01CDF565}" type="slidenum">
-              <a:rPr lang="en-US" smtClean="0"/>
-              <a:pPr/>
-              <a:t>18</a:t>
-            </a:fld>
-            <a:endParaRPr lang="en-US" dirty="0"/>
-          </a:p>
-        </p:txBody>
-      </p:sp>
-      <p:sp>
-        <p:nvSpPr>
-          <p:cNvPr id="3" name="제목 1">
-            <a:extLst>
-              <a:ext uri="{FF2B5EF4-FFF2-40B4-BE49-F238E27FC236}">
-                <a16:creationId xmlns:a16="http://schemas.microsoft.com/office/drawing/2014/main" id="{A8CCF26C-27E2-34A5-0A8D-96C10E06D993}"/>
-              </a:ext>
-            </a:extLst>
-          </p:cNvPr>
-          <p:cNvSpPr txBox="1">
-            <a:spLocks/>
-          </p:cNvSpPr>
-          <p:nvPr/>
-        </p:nvSpPr>
-        <p:spPr>
-          <a:xfrm>
-            <a:off x="475645" y="481983"/>
-            <a:ext cx="10353762" cy="766439"/>
-          </a:xfrm>
-          <a:prstGeom prst="rect">
-            <a:avLst/>
-          </a:prstGeom>
-        </p:spPr>
-        <p:txBody>
-          <a:bodyPr vert="horz" lIns="91440" tIns="45720" rIns="91440" bIns="45720" rtlCol="0" anchor="ctr">
-            <a:normAutofit/>
-          </a:bodyPr>
-          <a:lstStyle>
-            <a:lvl1pPr algn="ctr" defTabSz="914400" rtl="0" eaLnBrk="1" latinLnBrk="1" hangingPunct="1">
-              <a:lnSpc>
-                <a:spcPct val="90000"/>
-              </a:lnSpc>
-              <a:spcBef>
-                <a:spcPct val="0"/>
-              </a:spcBef>
-              <a:buNone/>
-              <a:defRPr sz="3200" kern="1200" cap="all" baseline="0">
-                <a:solidFill>
-                  <a:schemeClr val="tx1"/>
-                </a:solidFill>
-                <a:effectLst/>
-                <a:latin typeface="Batang" panose="02030600000101010101" pitchFamily="18" charset="-127"/>
-                <a:ea typeface="Batang" panose="02030600000101010101" pitchFamily="18" charset="-127"/>
-                <a:cs typeface="+mj-cs"/>
-              </a:defRPr>
-            </a:lvl1pPr>
-          </a:lstStyle>
-          <a:p>
-            <a:pPr algn="l"/>
-            <a:r>
-              <a:rPr lang="en-US" altLang="ko-KR" sz="2800" cap="none" dirty="0">
-                <a:solidFill>
-                  <a:schemeClr val="bg2">
-                    <a:lumMod val="25000"/>
-                  </a:schemeClr>
-                </a:solidFill>
-                <a:latin typeface="D2Coding" panose="020B0609020101020101" pitchFamily="49" charset="-127"/>
-                <a:ea typeface="D2Coding" panose="020B0609020101020101" pitchFamily="49" charset="-127"/>
-                <a:cs typeface="Segoe UI Light" panose="020B0502040204020203" pitchFamily="34" charset="0"/>
-              </a:rPr>
-              <a:t>RAG(</a:t>
-            </a:r>
-            <a:r>
-              <a:rPr lang="ko-KR" altLang="en-US" sz="2800" cap="none" dirty="0">
-                <a:solidFill>
-                  <a:schemeClr val="bg2">
-                    <a:lumMod val="25000"/>
-                  </a:schemeClr>
-                </a:solidFill>
-                <a:latin typeface="D2Coding" panose="020B0609020101020101" pitchFamily="49" charset="-127"/>
-                <a:ea typeface="D2Coding" panose="020B0609020101020101" pitchFamily="49" charset="-127"/>
-                <a:cs typeface="Segoe UI Light" panose="020B0502040204020203" pitchFamily="34" charset="0"/>
-              </a:rPr>
-              <a:t>검색 증강 생성</a:t>
-            </a:r>
-            <a:r>
-              <a:rPr lang="en-US" altLang="ko-KR" sz="2800" cap="none" dirty="0">
-                <a:solidFill>
-                  <a:schemeClr val="bg2">
-                    <a:lumMod val="25000"/>
-                  </a:schemeClr>
-                </a:solidFill>
-                <a:latin typeface="D2Coding" panose="020B0609020101020101" pitchFamily="49" charset="-127"/>
-                <a:ea typeface="D2Coding" panose="020B0609020101020101" pitchFamily="49" charset="-127"/>
-                <a:cs typeface="Segoe UI Light" panose="020B0502040204020203" pitchFamily="34" charset="0"/>
-              </a:rPr>
-              <a:t>, Retrieval-Augmented Generation)</a:t>
-            </a:r>
-            <a:endParaRPr lang="ko-KR" altLang="en-US" sz="2800" cap="none" dirty="0">
-              <a:solidFill>
-                <a:schemeClr val="bg2">
-                  <a:lumMod val="25000"/>
-                </a:schemeClr>
-              </a:solidFill>
-              <a:latin typeface="D2Coding" panose="020B0609020101020101" pitchFamily="49" charset="-127"/>
-              <a:ea typeface="D2Coding" panose="020B0609020101020101" pitchFamily="49" charset="-127"/>
-              <a:cs typeface="Segoe UI Light" panose="020B0502040204020203" pitchFamily="34" charset="0"/>
-            </a:endParaRPr>
-          </a:p>
-        </p:txBody>
-      </p:sp>
-      <p:sp>
-        <p:nvSpPr>
-          <p:cNvPr id="5" name="TextBox 4">
-            <a:extLst>
-              <a:ext uri="{FF2B5EF4-FFF2-40B4-BE49-F238E27FC236}">
-                <a16:creationId xmlns:a16="http://schemas.microsoft.com/office/drawing/2014/main" id="{73116C9C-E112-9017-C824-57FDABBD88D1}"/>
-              </a:ext>
-            </a:extLst>
-          </p:cNvPr>
-          <p:cNvSpPr txBox="1"/>
-          <p:nvPr/>
-        </p:nvSpPr>
-        <p:spPr>
-          <a:xfrm>
-            <a:off x="608284" y="1353850"/>
-            <a:ext cx="11021741" cy="4994316"/>
-          </a:xfrm>
-          <a:prstGeom prst="rect">
-            <a:avLst/>
-          </a:prstGeom>
-          <a:noFill/>
-        </p:spPr>
-        <p:txBody>
-          <a:bodyPr wrap="square">
-            <a:spAutoFit/>
-          </a:bodyPr>
-          <a:lstStyle/>
-          <a:p>
-            <a:pPr marL="342900" indent="-342900">
-              <a:lnSpc>
-                <a:spcPct val="150000"/>
-              </a:lnSpc>
-              <a:buFont typeface="+mj-lt"/>
-              <a:buAutoNum type="arabicPeriod"/>
-            </a:pPr>
-            <a:r>
-              <a:rPr lang="en-US" altLang="ko-KR" sz="1600" b="1" dirty="0">
-                <a:latin typeface="D2Coding" panose="020B0609020101020101" pitchFamily="49" charset="-127"/>
-                <a:ea typeface="D2Coding" panose="020B0609020101020101" pitchFamily="49" charset="-127"/>
-              </a:rPr>
-              <a:t>Question (</a:t>
-            </a:r>
-            <a:r>
-              <a:rPr lang="ko-KR" altLang="en-US" sz="1600" b="1" dirty="0">
-                <a:latin typeface="D2Coding" panose="020B0609020101020101" pitchFamily="49" charset="-127"/>
-                <a:ea typeface="D2Coding" panose="020B0609020101020101" pitchFamily="49" charset="-127"/>
-              </a:rPr>
-              <a:t>사용자의 질문</a:t>
-            </a:r>
-            <a:r>
-              <a:rPr lang="en-US" altLang="ko-KR" sz="1600" b="1" dirty="0">
-                <a:latin typeface="D2Coding" panose="020B0609020101020101" pitchFamily="49" charset="-127"/>
-                <a:ea typeface="D2Coding" panose="020B0609020101020101" pitchFamily="49" charset="-127"/>
-              </a:rPr>
-              <a:t>) </a:t>
-            </a:r>
-            <a:r>
-              <a:rPr lang="en-US" altLang="ko-KR" sz="1600" dirty="0">
-                <a:latin typeface="D2Coding" panose="020B0609020101020101" pitchFamily="49" charset="-127"/>
-                <a:ea typeface="D2Coding" panose="020B0609020101020101" pitchFamily="49" charset="-127"/>
-              </a:rPr>
-              <a:t>: </a:t>
-            </a:r>
-            <a:r>
-              <a:rPr lang="ko-KR" altLang="en-US" sz="1600" dirty="0">
-                <a:latin typeface="D2Coding" panose="020B0609020101020101" pitchFamily="49" charset="-127"/>
-                <a:ea typeface="D2Coding" panose="020B0609020101020101" pitchFamily="49" charset="-127"/>
-              </a:rPr>
-              <a:t>사용자가 서비스에 질문</a:t>
-            </a:r>
-            <a:r>
-              <a:rPr lang="en-US" altLang="ko-KR" sz="1600" dirty="0">
-                <a:latin typeface="D2Coding" panose="020B0609020101020101" pitchFamily="49" charset="-127"/>
-                <a:ea typeface="D2Coding" panose="020B0609020101020101" pitchFamily="49" charset="-127"/>
-              </a:rPr>
-              <a:t>(</a:t>
-            </a:r>
-            <a:r>
-              <a:rPr lang="ko-KR" altLang="en-US" sz="1600" dirty="0">
-                <a:latin typeface="D2Coding" panose="020B0609020101020101" pitchFamily="49" charset="-127"/>
-                <a:ea typeface="D2Coding" panose="020B0609020101020101" pitchFamily="49" charset="-127"/>
-              </a:rPr>
-              <a:t>예</a:t>
-            </a:r>
-            <a:r>
-              <a:rPr lang="en-US" altLang="ko-KR" sz="1600" dirty="0">
-                <a:latin typeface="D2Coding" panose="020B0609020101020101" pitchFamily="49" charset="-127"/>
-                <a:ea typeface="D2Coding" panose="020B0609020101020101" pitchFamily="49" charset="-127"/>
-              </a:rPr>
-              <a:t>: "</a:t>
-            </a:r>
-            <a:r>
-              <a:rPr lang="ko-KR" altLang="en-US" sz="1600" dirty="0" err="1">
-                <a:latin typeface="D2Coding" panose="020B0609020101020101" pitchFamily="49" charset="-127"/>
-                <a:ea typeface="D2Coding" panose="020B0609020101020101" pitchFamily="49" charset="-127"/>
-              </a:rPr>
-              <a:t>랭체인이</a:t>
-            </a:r>
-            <a:r>
-              <a:rPr lang="ko-KR" altLang="en-US" sz="1600" dirty="0">
-                <a:latin typeface="D2Coding" panose="020B0609020101020101" pitchFamily="49" charset="-127"/>
-                <a:ea typeface="D2Coding" panose="020B0609020101020101" pitchFamily="49" charset="-127"/>
-              </a:rPr>
-              <a:t> </a:t>
-            </a:r>
-            <a:r>
-              <a:rPr lang="ko-KR" altLang="en-US" sz="1600" dirty="0" err="1">
-                <a:latin typeface="D2Coding" panose="020B0609020101020101" pitchFamily="49" charset="-127"/>
-                <a:ea typeface="D2Coding" panose="020B0609020101020101" pitchFamily="49" charset="-127"/>
-              </a:rPr>
-              <a:t>뭔가요</a:t>
-            </a:r>
-            <a:r>
-              <a:rPr lang="en-US" altLang="ko-KR" sz="1600" dirty="0">
-                <a:latin typeface="D2Coding" panose="020B0609020101020101" pitchFamily="49" charset="-127"/>
-                <a:ea typeface="D2Coding" panose="020B0609020101020101" pitchFamily="49" charset="-127"/>
-              </a:rPr>
-              <a:t>?")</a:t>
-            </a:r>
-          </a:p>
-          <a:p>
-            <a:pPr marL="342900" indent="-342900">
-              <a:lnSpc>
-                <a:spcPct val="150000"/>
-              </a:lnSpc>
-              <a:buFont typeface="+mj-lt"/>
-              <a:buAutoNum type="arabicPeriod"/>
-            </a:pPr>
-            <a:endParaRPr lang="en-US" altLang="ko-KR" sz="1200" dirty="0">
-              <a:latin typeface="D2Coding" panose="020B0609020101020101" pitchFamily="49" charset="-127"/>
-              <a:ea typeface="D2Coding" panose="020B0609020101020101" pitchFamily="49" charset="-127"/>
-            </a:endParaRPr>
-          </a:p>
-          <a:p>
-            <a:pPr marL="342900" indent="-342900">
-              <a:lnSpc>
-                <a:spcPct val="150000"/>
-              </a:lnSpc>
-              <a:buFont typeface="+mj-lt"/>
-              <a:buAutoNum type="arabicPeriod"/>
-            </a:pPr>
-            <a:r>
-              <a:rPr lang="en-US" altLang="ko-KR" sz="1600" b="1" dirty="0">
-                <a:latin typeface="D2Coding" panose="020B0609020101020101" pitchFamily="49" charset="-127"/>
-                <a:ea typeface="D2Coding" panose="020B0609020101020101" pitchFamily="49" charset="-127"/>
-              </a:rPr>
-              <a:t>RETRIEVE (</a:t>
-            </a:r>
-            <a:r>
-              <a:rPr lang="ko-KR" altLang="en-US" sz="1600" b="1" dirty="0">
-                <a:latin typeface="D2Coding" panose="020B0609020101020101" pitchFamily="49" charset="-127"/>
-                <a:ea typeface="D2Coding" panose="020B0609020101020101" pitchFamily="49" charset="-127"/>
-              </a:rPr>
-              <a:t>벡터 검색 단계</a:t>
-            </a:r>
-            <a:r>
-              <a:rPr lang="en-US" altLang="ko-KR" sz="1600" b="1" dirty="0">
-                <a:latin typeface="D2Coding" panose="020B0609020101020101" pitchFamily="49" charset="-127"/>
-                <a:ea typeface="D2Coding" panose="020B0609020101020101" pitchFamily="49" charset="-127"/>
-              </a:rPr>
-              <a:t>) </a:t>
-            </a:r>
-            <a:r>
-              <a:rPr lang="en-US" altLang="ko-KR" sz="1600" dirty="0">
-                <a:latin typeface="D2Coding" panose="020B0609020101020101" pitchFamily="49" charset="-127"/>
-                <a:ea typeface="D2Coding" panose="020B0609020101020101" pitchFamily="49" charset="-127"/>
-              </a:rPr>
-              <a:t>: </a:t>
-            </a:r>
-            <a:r>
-              <a:rPr lang="ko-KR" altLang="en-US" sz="1600" dirty="0">
-                <a:latin typeface="D2Coding" panose="020B0609020101020101" pitchFamily="49" charset="-127"/>
-                <a:ea typeface="D2Coding" panose="020B0609020101020101" pitchFamily="49" charset="-127"/>
-              </a:rPr>
-              <a:t>질문을 </a:t>
-            </a:r>
-            <a:r>
-              <a:rPr lang="ko-KR" altLang="en-US" sz="1600" dirty="0" err="1">
-                <a:latin typeface="D2Coding" panose="020B0609020101020101" pitchFamily="49" charset="-127"/>
-                <a:ea typeface="D2Coding" panose="020B0609020101020101" pitchFamily="49" charset="-127"/>
-              </a:rPr>
-              <a:t>임베딩</a:t>
-            </a:r>
-            <a:r>
-              <a:rPr lang="ko-KR" altLang="en-US" sz="1600" dirty="0">
-                <a:latin typeface="D2Coding" panose="020B0609020101020101" pitchFamily="49" charset="-127"/>
-                <a:ea typeface="D2Coding" panose="020B0609020101020101" pitchFamily="49" charset="-127"/>
-              </a:rPr>
-              <a:t> 모델</a:t>
-            </a:r>
-            <a:r>
-              <a:rPr lang="en-US" altLang="ko-KR" sz="1600" dirty="0">
-                <a:latin typeface="D2Coding" panose="020B0609020101020101" pitchFamily="49" charset="-127"/>
-                <a:ea typeface="D2Coding" panose="020B0609020101020101" pitchFamily="49" charset="-127"/>
-              </a:rPr>
-              <a:t>(all-MiniLM-L6-v2)</a:t>
-            </a:r>
-            <a:r>
-              <a:rPr lang="ko-KR" altLang="en-US" sz="1600" dirty="0">
-                <a:latin typeface="D2Coding" panose="020B0609020101020101" pitchFamily="49" charset="-127"/>
-                <a:ea typeface="D2Coding" panose="020B0609020101020101" pitchFamily="49" charset="-127"/>
-              </a:rPr>
-              <a:t>을 통해 숫자로 바꾼 뒤</a:t>
-            </a:r>
-            <a:r>
-              <a:rPr lang="en-US" altLang="ko-KR" sz="1600" dirty="0">
-                <a:latin typeface="D2Coding" panose="020B0609020101020101" pitchFamily="49" charset="-127"/>
-                <a:ea typeface="D2Coding" panose="020B0609020101020101" pitchFamily="49" charset="-127"/>
-              </a:rPr>
-              <a:t>, Vector DB(</a:t>
-            </a:r>
-            <a:r>
-              <a:rPr lang="en-US" altLang="ko-KR" sz="1600" dirty="0" err="1">
-                <a:latin typeface="D2Coding" panose="020B0609020101020101" pitchFamily="49" charset="-127"/>
-                <a:ea typeface="D2Coding" panose="020B0609020101020101" pitchFamily="49" charset="-127"/>
-              </a:rPr>
-              <a:t>Supabase</a:t>
-            </a:r>
-            <a:r>
-              <a:rPr lang="en-US" altLang="ko-KR" sz="1600" dirty="0">
-                <a:latin typeface="D2Coding" panose="020B0609020101020101" pitchFamily="49" charset="-127"/>
-                <a:ea typeface="D2Coding" panose="020B0609020101020101" pitchFamily="49" charset="-127"/>
-              </a:rPr>
-              <a:t>/</a:t>
-            </a:r>
-            <a:r>
-              <a:rPr lang="en-US" altLang="ko-KR" sz="1600" dirty="0" err="1">
-                <a:latin typeface="D2Coding" panose="020B0609020101020101" pitchFamily="49" charset="-127"/>
-                <a:ea typeface="D2Coding" panose="020B0609020101020101" pitchFamily="49" charset="-127"/>
-              </a:rPr>
-              <a:t>pgvector</a:t>
-            </a:r>
-            <a:r>
-              <a:rPr lang="en-US" altLang="ko-KR" sz="1600" dirty="0">
-                <a:latin typeface="D2Coding" panose="020B0609020101020101" pitchFamily="49" charset="-127"/>
-                <a:ea typeface="D2Coding" panose="020B0609020101020101" pitchFamily="49" charset="-127"/>
-              </a:rPr>
-              <a:t>)</a:t>
-            </a:r>
-            <a:r>
-              <a:rPr lang="ko-KR" altLang="en-US" sz="1600" dirty="0">
-                <a:latin typeface="D2Coding" panose="020B0609020101020101" pitchFamily="49" charset="-127"/>
-                <a:ea typeface="D2Coding" panose="020B0609020101020101" pitchFamily="49" charset="-127"/>
-              </a:rPr>
-              <a:t>에 저장된 수많은 문서 조각 중 가장 유사도가 높은 핵심 조각</a:t>
-            </a:r>
-            <a:r>
-              <a:rPr lang="en-US" altLang="ko-KR" sz="1600" dirty="0">
-                <a:latin typeface="D2Coding" panose="020B0609020101020101" pitchFamily="49" charset="-127"/>
-                <a:ea typeface="D2Coding" panose="020B0609020101020101" pitchFamily="49" charset="-127"/>
-              </a:rPr>
-              <a:t>(</a:t>
-            </a:r>
-            <a:r>
-              <a:rPr lang="ko-KR" altLang="en-US" sz="1600" dirty="0">
-                <a:latin typeface="D2Coding" panose="020B0609020101020101" pitchFamily="49" charset="-127"/>
-                <a:ea typeface="D2Coding" panose="020B0609020101020101" pitchFamily="49" charset="-127"/>
-              </a:rPr>
-              <a:t>파란색으로 </a:t>
-            </a:r>
-            <a:r>
-              <a:rPr lang="ko-KR" altLang="en-US" sz="1600" dirty="0" err="1">
-                <a:latin typeface="D2Coding" panose="020B0609020101020101" pitchFamily="49" charset="-127"/>
-                <a:ea typeface="D2Coding" panose="020B0609020101020101" pitchFamily="49" charset="-127"/>
-              </a:rPr>
-              <a:t>하이라이트된</a:t>
-            </a:r>
-            <a:r>
-              <a:rPr lang="ko-KR" altLang="en-US" sz="1600" dirty="0">
-                <a:latin typeface="D2Coding" panose="020B0609020101020101" pitchFamily="49" charset="-127"/>
-                <a:ea typeface="D2Coding" panose="020B0609020101020101" pitchFamily="49" charset="-127"/>
-              </a:rPr>
-              <a:t> 칸들</a:t>
-            </a:r>
-            <a:r>
-              <a:rPr lang="en-US" altLang="ko-KR" sz="1600" dirty="0">
-                <a:latin typeface="D2Coding" panose="020B0609020101020101" pitchFamily="49" charset="-127"/>
-                <a:ea typeface="D2Coding" panose="020B0609020101020101" pitchFamily="49" charset="-127"/>
-              </a:rPr>
-              <a:t>)</a:t>
-            </a:r>
-            <a:r>
-              <a:rPr lang="ko-KR" altLang="en-US" sz="1600" dirty="0">
-                <a:latin typeface="D2Coding" panose="020B0609020101020101" pitchFamily="49" charset="-127"/>
-                <a:ea typeface="D2Coding" panose="020B0609020101020101" pitchFamily="49" charset="-127"/>
-              </a:rPr>
-              <a:t>만 돋보기로 빠르게 찾아냄</a:t>
-            </a:r>
-            <a:r>
-              <a:rPr lang="en-US" altLang="ko-KR" sz="1600" dirty="0">
-                <a:latin typeface="D2Coding" panose="020B0609020101020101" pitchFamily="49" charset="-127"/>
-                <a:ea typeface="D2Coding" panose="020B0609020101020101" pitchFamily="49" charset="-127"/>
-              </a:rPr>
-              <a:t>(Retrieve)</a:t>
-            </a:r>
-          </a:p>
-          <a:p>
-            <a:pPr marL="342900" indent="-342900">
-              <a:lnSpc>
-                <a:spcPct val="150000"/>
-              </a:lnSpc>
-              <a:buFont typeface="+mj-lt"/>
-              <a:buAutoNum type="arabicPeriod"/>
-            </a:pPr>
-            <a:endParaRPr lang="en-US" altLang="ko-KR" sz="1200" dirty="0">
-              <a:latin typeface="D2Coding" panose="020B0609020101020101" pitchFamily="49" charset="-127"/>
-              <a:ea typeface="D2Coding" panose="020B0609020101020101" pitchFamily="49" charset="-127"/>
-            </a:endParaRPr>
-          </a:p>
-          <a:p>
-            <a:pPr marL="342900" indent="-342900">
-              <a:lnSpc>
-                <a:spcPct val="150000"/>
-              </a:lnSpc>
-              <a:buFont typeface="+mj-lt"/>
-              <a:buAutoNum type="arabicPeriod"/>
-            </a:pPr>
-            <a:r>
-              <a:rPr lang="en-US" altLang="ko-KR" sz="1600" b="1" dirty="0">
-                <a:latin typeface="D2Coding" panose="020B0609020101020101" pitchFamily="49" charset="-127"/>
-                <a:ea typeface="D2Coding" panose="020B0609020101020101" pitchFamily="49" charset="-127"/>
-              </a:rPr>
-              <a:t>PROMPT (</a:t>
-            </a:r>
-            <a:r>
-              <a:rPr lang="ko-KR" altLang="en-US" sz="1600" b="1" dirty="0">
-                <a:latin typeface="D2Coding" panose="020B0609020101020101" pitchFamily="49" charset="-127"/>
-                <a:ea typeface="D2Coding" panose="020B0609020101020101" pitchFamily="49" charset="-127"/>
-              </a:rPr>
-              <a:t>컨텍스트 결합 및 프롬프트 생성</a:t>
-            </a:r>
-            <a:r>
-              <a:rPr lang="en-US" altLang="ko-KR" sz="1600" b="1" dirty="0">
-                <a:latin typeface="D2Coding" panose="020B0609020101020101" pitchFamily="49" charset="-127"/>
-                <a:ea typeface="D2Coding" panose="020B0609020101020101" pitchFamily="49" charset="-127"/>
-              </a:rPr>
-              <a:t>)</a:t>
-            </a:r>
-            <a:r>
-              <a:rPr lang="en-US" altLang="ko-KR" sz="1600" dirty="0">
-                <a:latin typeface="D2Coding" panose="020B0609020101020101" pitchFamily="49" charset="-127"/>
-                <a:ea typeface="D2Coding" panose="020B0609020101020101" pitchFamily="49" charset="-127"/>
-              </a:rPr>
-              <a:t> : </a:t>
-            </a:r>
-            <a:r>
-              <a:rPr lang="ko-KR" altLang="en-US" sz="1600" dirty="0">
-                <a:latin typeface="D2Coding" panose="020B0609020101020101" pitchFamily="49" charset="-127"/>
-                <a:ea typeface="D2Coding" panose="020B0609020101020101" pitchFamily="49" charset="-127"/>
-              </a:rPr>
-              <a:t>사용자 질문</a:t>
-            </a:r>
-            <a:r>
-              <a:rPr lang="en-US" altLang="ko-KR" sz="1600" dirty="0">
-                <a:latin typeface="D2Coding" panose="020B0609020101020101" pitchFamily="49" charset="-127"/>
-                <a:ea typeface="D2Coding" panose="020B0609020101020101" pitchFamily="49" charset="-127"/>
-              </a:rPr>
-              <a:t>(Question)</a:t>
-            </a:r>
-            <a:r>
-              <a:rPr lang="ko-KR" altLang="en-US" sz="1600" dirty="0">
-                <a:latin typeface="D2Coding" panose="020B0609020101020101" pitchFamily="49" charset="-127"/>
-                <a:ea typeface="D2Coding" panose="020B0609020101020101" pitchFamily="49" charset="-127"/>
-              </a:rPr>
-              <a:t>과 </a:t>
-            </a:r>
-            <a:r>
-              <a:rPr lang="en-US" altLang="ko-KR" sz="1600" dirty="0">
-                <a:latin typeface="D2Coding" panose="020B0609020101020101" pitchFamily="49" charset="-127"/>
-                <a:ea typeface="D2Coding" panose="020B0609020101020101" pitchFamily="49" charset="-127"/>
-              </a:rPr>
-              <a:t>Vector DB</a:t>
-            </a:r>
-            <a:r>
-              <a:rPr lang="ko-KR" altLang="en-US" sz="1600" dirty="0">
-                <a:latin typeface="D2Coding" panose="020B0609020101020101" pitchFamily="49" charset="-127"/>
-                <a:ea typeface="D2Coding" panose="020B0609020101020101" pitchFamily="49" charset="-127"/>
-              </a:rPr>
-              <a:t>에서 끄집어낸 참고 문서 조각</a:t>
-            </a:r>
-            <a:r>
-              <a:rPr lang="en-US" altLang="ko-KR" sz="1600" dirty="0">
-                <a:latin typeface="D2Coding" panose="020B0609020101020101" pitchFamily="49" charset="-127"/>
-                <a:ea typeface="D2Coding" panose="020B0609020101020101" pitchFamily="49" charset="-127"/>
-              </a:rPr>
-              <a:t>(Retrieve)</a:t>
-            </a:r>
-            <a:r>
-              <a:rPr lang="ko-KR" altLang="en-US" sz="1600" dirty="0">
-                <a:latin typeface="D2Coding" panose="020B0609020101020101" pitchFamily="49" charset="-127"/>
-                <a:ea typeface="D2Coding" panose="020B0609020101020101" pitchFamily="49" charset="-127"/>
-              </a:rPr>
-              <a:t>이 위아래 화살표를 통해 </a:t>
-            </a:r>
-            <a:r>
-              <a:rPr lang="en-US" altLang="ko-KR" sz="1600" dirty="0">
-                <a:latin typeface="D2Coding" panose="020B0609020101020101" pitchFamily="49" charset="-127"/>
-                <a:ea typeface="D2Coding" panose="020B0609020101020101" pitchFamily="49" charset="-127"/>
-              </a:rPr>
-              <a:t>PROMPT</a:t>
-            </a:r>
-            <a:r>
-              <a:rPr lang="ko-KR" altLang="en-US" sz="1600" dirty="0">
-                <a:latin typeface="D2Coding" panose="020B0609020101020101" pitchFamily="49" charset="-127"/>
-                <a:ea typeface="D2Coding" panose="020B0609020101020101" pitchFamily="49" charset="-127"/>
-              </a:rPr>
-              <a:t>라는 하나의 주머니로 합쳐지는 단계로 </a:t>
-            </a:r>
-            <a:r>
-              <a:rPr lang="en-US" altLang="ko-KR" sz="1600" dirty="0">
-                <a:latin typeface="D2Coding" panose="020B0609020101020101" pitchFamily="49" charset="-127"/>
-                <a:ea typeface="D2Coding" panose="020B0609020101020101" pitchFamily="49" charset="-127"/>
-              </a:rPr>
-              <a:t>LLM</a:t>
-            </a:r>
-            <a:r>
-              <a:rPr lang="ko-KR" altLang="en-US" sz="1600" dirty="0">
-                <a:latin typeface="D2Coding" panose="020B0609020101020101" pitchFamily="49" charset="-127"/>
-                <a:ea typeface="D2Coding" panose="020B0609020101020101" pitchFamily="49" charset="-127"/>
-              </a:rPr>
-              <a:t>에게 무작정 답을 달라고 하는 게 아니라</a:t>
-            </a:r>
-            <a:r>
-              <a:rPr lang="en-US" altLang="ko-KR" sz="1600" dirty="0">
-                <a:latin typeface="D2Coding" panose="020B0609020101020101" pitchFamily="49" charset="-127"/>
-                <a:ea typeface="D2Coding" panose="020B0609020101020101" pitchFamily="49" charset="-127"/>
-              </a:rPr>
-              <a:t>, "</a:t>
-            </a:r>
-            <a:r>
-              <a:rPr lang="ko-KR" altLang="en-US" sz="1600" dirty="0">
-                <a:latin typeface="D2Coding" panose="020B0609020101020101" pitchFamily="49" charset="-127"/>
-                <a:ea typeface="D2Coding" panose="020B0609020101020101" pitchFamily="49" charset="-127"/>
-              </a:rPr>
-              <a:t>다음 </a:t>
-            </a:r>
-            <a:r>
-              <a:rPr lang="en-US" altLang="ko-KR" sz="1600" dirty="0">
-                <a:latin typeface="D2Coding" panose="020B0609020101020101" pitchFamily="49" charset="-127"/>
-                <a:ea typeface="D2Coding" panose="020B0609020101020101" pitchFamily="49" charset="-127"/>
-              </a:rPr>
-              <a:t>[</a:t>
-            </a:r>
-            <a:r>
-              <a:rPr lang="ko-KR" altLang="en-US" sz="1600" dirty="0">
-                <a:latin typeface="D2Coding" panose="020B0609020101020101" pitchFamily="49" charset="-127"/>
-                <a:ea typeface="D2Coding" panose="020B0609020101020101" pitchFamily="49" charset="-127"/>
-              </a:rPr>
-              <a:t>참고 문서</a:t>
-            </a:r>
-            <a:r>
-              <a:rPr lang="en-US" altLang="ko-KR" sz="1600" dirty="0">
-                <a:latin typeface="D2Coding" panose="020B0609020101020101" pitchFamily="49" charset="-127"/>
-                <a:ea typeface="D2Coding" panose="020B0609020101020101" pitchFamily="49" charset="-127"/>
-              </a:rPr>
-              <a:t>]</a:t>
-            </a:r>
-            <a:r>
-              <a:rPr lang="ko-KR" altLang="en-US" sz="1600" dirty="0">
-                <a:latin typeface="D2Coding" panose="020B0609020101020101" pitchFamily="49" charset="-127"/>
-                <a:ea typeface="D2Coding" panose="020B0609020101020101" pitchFamily="49" charset="-127"/>
-              </a:rPr>
-              <a:t>를 바탕으로 </a:t>
-            </a:r>
-            <a:r>
-              <a:rPr lang="en-US" altLang="ko-KR" sz="1600" dirty="0">
-                <a:latin typeface="D2Coding" panose="020B0609020101020101" pitchFamily="49" charset="-127"/>
-                <a:ea typeface="D2Coding" panose="020B0609020101020101" pitchFamily="49" charset="-127"/>
-              </a:rPr>
-              <a:t>[</a:t>
-            </a:r>
-            <a:r>
-              <a:rPr lang="ko-KR" altLang="en-US" sz="1600" dirty="0">
-                <a:latin typeface="D2Coding" panose="020B0609020101020101" pitchFamily="49" charset="-127"/>
-                <a:ea typeface="D2Coding" panose="020B0609020101020101" pitchFamily="49" charset="-127"/>
-              </a:rPr>
-              <a:t>사용자의 질문</a:t>
-            </a:r>
-            <a:r>
-              <a:rPr lang="en-US" altLang="ko-KR" sz="1600" dirty="0">
-                <a:latin typeface="D2Coding" panose="020B0609020101020101" pitchFamily="49" charset="-127"/>
-                <a:ea typeface="D2Coding" panose="020B0609020101020101" pitchFamily="49" charset="-127"/>
-              </a:rPr>
-              <a:t>]</a:t>
-            </a:r>
-            <a:r>
-              <a:rPr lang="ko-KR" altLang="en-US" sz="1600" dirty="0">
-                <a:latin typeface="D2Coding" panose="020B0609020101020101" pitchFamily="49" charset="-127"/>
-                <a:ea typeface="D2Coding" panose="020B0609020101020101" pitchFamily="49" charset="-127"/>
-              </a:rPr>
-              <a:t>에 솔직하게 답해줘</a:t>
-            </a:r>
-            <a:r>
-              <a:rPr lang="en-US" altLang="ko-KR" sz="1600" dirty="0">
-                <a:latin typeface="D2Coding" panose="020B0609020101020101" pitchFamily="49" charset="-127"/>
-                <a:ea typeface="D2Coding" panose="020B0609020101020101" pitchFamily="49" charset="-127"/>
-              </a:rPr>
-              <a:t>"</a:t>
-            </a:r>
-            <a:r>
-              <a:rPr lang="ko-KR" altLang="en-US" sz="1600" dirty="0">
-                <a:latin typeface="D2Coding" panose="020B0609020101020101" pitchFamily="49" charset="-127"/>
-                <a:ea typeface="D2Coding" panose="020B0609020101020101" pitchFamily="49" charset="-127"/>
-              </a:rPr>
-              <a:t>라는 형태의 완성된 지시서</a:t>
-            </a:r>
-            <a:r>
-              <a:rPr lang="en-US" altLang="ko-KR" sz="1600" dirty="0">
-                <a:latin typeface="D2Coding" panose="020B0609020101020101" pitchFamily="49" charset="-127"/>
-                <a:ea typeface="D2Coding" panose="020B0609020101020101" pitchFamily="49" charset="-127"/>
-              </a:rPr>
-              <a:t>(</a:t>
-            </a:r>
-            <a:r>
-              <a:rPr lang="ko-KR" altLang="en-US" sz="1600" dirty="0">
-                <a:latin typeface="D2Coding" panose="020B0609020101020101" pitchFamily="49" charset="-127"/>
-                <a:ea typeface="D2Coding" panose="020B0609020101020101" pitchFamily="49" charset="-127"/>
-              </a:rPr>
-              <a:t>프롬프트</a:t>
-            </a:r>
-            <a:r>
-              <a:rPr lang="en-US" altLang="ko-KR" sz="1600" dirty="0">
-                <a:latin typeface="D2Coding" panose="020B0609020101020101" pitchFamily="49" charset="-127"/>
-                <a:ea typeface="D2Coding" panose="020B0609020101020101" pitchFamily="49" charset="-127"/>
-              </a:rPr>
-              <a:t>)</a:t>
-            </a:r>
-            <a:r>
-              <a:rPr lang="ko-KR" altLang="en-US" sz="1600" dirty="0">
-                <a:latin typeface="D2Coding" panose="020B0609020101020101" pitchFamily="49" charset="-127"/>
-                <a:ea typeface="D2Coding" panose="020B0609020101020101" pitchFamily="49" charset="-127"/>
-              </a:rPr>
-              <a:t>를 조립하는 단계</a:t>
-            </a:r>
-            <a:endParaRPr lang="en-US" altLang="ko-KR" sz="1600" dirty="0">
-              <a:latin typeface="D2Coding" panose="020B0609020101020101" pitchFamily="49" charset="-127"/>
-              <a:ea typeface="D2Coding" panose="020B0609020101020101" pitchFamily="49" charset="-127"/>
-            </a:endParaRPr>
-          </a:p>
-          <a:p>
-            <a:pPr marL="342900" indent="-342900">
-              <a:lnSpc>
-                <a:spcPct val="150000"/>
-              </a:lnSpc>
-              <a:buFont typeface="+mj-lt"/>
-              <a:buAutoNum type="arabicPeriod"/>
-            </a:pPr>
-            <a:endParaRPr lang="en-US" altLang="ko-KR" sz="1200" dirty="0">
-              <a:latin typeface="D2Coding" panose="020B0609020101020101" pitchFamily="49" charset="-127"/>
-              <a:ea typeface="D2Coding" panose="020B0609020101020101" pitchFamily="49" charset="-127"/>
-            </a:endParaRPr>
-          </a:p>
-          <a:p>
-            <a:pPr marL="342900" indent="-342900">
-              <a:lnSpc>
-                <a:spcPct val="150000"/>
-              </a:lnSpc>
-              <a:buFont typeface="+mj-lt"/>
-              <a:buAutoNum type="arabicPeriod"/>
-            </a:pPr>
-            <a:r>
-              <a:rPr lang="en-US" altLang="ko-KR" sz="1600" b="1" dirty="0">
-                <a:latin typeface="D2Coding" panose="020B0609020101020101" pitchFamily="49" charset="-127"/>
-                <a:ea typeface="D2Coding" panose="020B0609020101020101" pitchFamily="49" charset="-127"/>
-              </a:rPr>
-              <a:t>LLM &amp; Answer (</a:t>
-            </a:r>
-            <a:r>
-              <a:rPr lang="ko-KR" altLang="en-US" sz="1600" b="1" dirty="0">
-                <a:latin typeface="D2Coding" panose="020B0609020101020101" pitchFamily="49" charset="-127"/>
-                <a:ea typeface="D2Coding" panose="020B0609020101020101" pitchFamily="49" charset="-127"/>
-              </a:rPr>
-              <a:t>생성 및 답변 전달</a:t>
-            </a:r>
-            <a:r>
-              <a:rPr lang="en-US" altLang="ko-KR" sz="1600" b="1" dirty="0">
-                <a:latin typeface="D2Coding" panose="020B0609020101020101" pitchFamily="49" charset="-127"/>
-                <a:ea typeface="D2Coding" panose="020B0609020101020101" pitchFamily="49" charset="-127"/>
-              </a:rPr>
-              <a:t>)</a:t>
-            </a:r>
-            <a:r>
-              <a:rPr lang="en-US" altLang="ko-KR" sz="1600" dirty="0">
-                <a:latin typeface="D2Coding" panose="020B0609020101020101" pitchFamily="49" charset="-127"/>
-                <a:ea typeface="D2Coding" panose="020B0609020101020101" pitchFamily="49" charset="-127"/>
-              </a:rPr>
-              <a:t> : </a:t>
-            </a:r>
-            <a:r>
-              <a:rPr lang="ko-KR" altLang="en-US" sz="1600" dirty="0">
-                <a:latin typeface="D2Coding" panose="020B0609020101020101" pitchFamily="49" charset="-127"/>
-                <a:ea typeface="D2Coding" panose="020B0609020101020101" pitchFamily="49" charset="-127"/>
-              </a:rPr>
-              <a:t>조립된 프롬프트가 대형 언어 모델</a:t>
-            </a:r>
-            <a:r>
-              <a:rPr lang="en-US" altLang="ko-KR" sz="1600" dirty="0">
-                <a:latin typeface="D2Coding" panose="020B0609020101020101" pitchFamily="49" charset="-127"/>
-                <a:ea typeface="D2Coding" panose="020B0609020101020101" pitchFamily="49" charset="-127"/>
-              </a:rPr>
-              <a:t>(LLM, </a:t>
-            </a:r>
-            <a:r>
-              <a:rPr lang="ko-KR" altLang="en-US" sz="1600" dirty="0">
-                <a:latin typeface="D2Coding" panose="020B0609020101020101" pitchFamily="49" charset="-127"/>
-                <a:ea typeface="D2Coding" panose="020B0609020101020101" pitchFamily="49" charset="-127"/>
-              </a:rPr>
-              <a:t>예</a:t>
-            </a:r>
-            <a:r>
-              <a:rPr lang="en-US" altLang="ko-KR" sz="1600" dirty="0">
-                <a:latin typeface="D2Coding" panose="020B0609020101020101" pitchFamily="49" charset="-127"/>
-                <a:ea typeface="D2Coding" panose="020B0609020101020101" pitchFamily="49" charset="-127"/>
-              </a:rPr>
-              <a:t>: </a:t>
-            </a:r>
-            <a:r>
-              <a:rPr lang="en-US" altLang="ko-KR" sz="1600" dirty="0" err="1">
-                <a:latin typeface="D2Coding" panose="020B0609020101020101" pitchFamily="49" charset="-127"/>
-                <a:ea typeface="D2Coding" panose="020B0609020101020101" pitchFamily="49" charset="-127"/>
-              </a:rPr>
-              <a:t>Groq</a:t>
-            </a:r>
-            <a:r>
-              <a:rPr lang="en-US" altLang="ko-KR" sz="1600" dirty="0">
-                <a:latin typeface="D2Coding" panose="020B0609020101020101" pitchFamily="49" charset="-127"/>
-                <a:ea typeface="D2Coding" panose="020B0609020101020101" pitchFamily="49" charset="-127"/>
-              </a:rPr>
-              <a:t>/Llama3 </a:t>
-            </a:r>
-            <a:r>
-              <a:rPr lang="ko-KR" altLang="en-US" sz="1600" dirty="0">
-                <a:latin typeface="D2Coding" panose="020B0609020101020101" pitchFamily="49" charset="-127"/>
-                <a:ea typeface="D2Coding" panose="020B0609020101020101" pitchFamily="49" charset="-127"/>
-              </a:rPr>
-              <a:t>등</a:t>
-            </a:r>
-            <a:r>
-              <a:rPr lang="en-US" altLang="ko-KR" sz="1600" dirty="0">
-                <a:latin typeface="D2Coding" panose="020B0609020101020101" pitchFamily="49" charset="-127"/>
-                <a:ea typeface="D2Coding" panose="020B0609020101020101" pitchFamily="49" charset="-127"/>
-              </a:rPr>
-              <a:t>)</a:t>
-            </a:r>
-            <a:r>
-              <a:rPr lang="ko-KR" altLang="en-US" sz="1600" dirty="0">
-                <a:latin typeface="D2Coding" panose="020B0609020101020101" pitchFamily="49" charset="-127"/>
-                <a:ea typeface="D2Coding" panose="020B0609020101020101" pitchFamily="49" charset="-127"/>
-              </a:rPr>
-              <a:t>로 전달하면 </a:t>
-            </a:r>
-            <a:r>
-              <a:rPr lang="en-US" altLang="ko-KR" sz="1600" dirty="0">
-                <a:latin typeface="D2Coding" panose="020B0609020101020101" pitchFamily="49" charset="-127"/>
-                <a:ea typeface="D2Coding" panose="020B0609020101020101" pitchFamily="49" charset="-127"/>
-              </a:rPr>
-              <a:t>LLM</a:t>
-            </a:r>
-            <a:r>
-              <a:rPr lang="ko-KR" altLang="en-US" sz="1600" dirty="0">
-                <a:latin typeface="D2Coding" panose="020B0609020101020101" pitchFamily="49" charset="-127"/>
-                <a:ea typeface="D2Coding" panose="020B0609020101020101" pitchFamily="49" charset="-127"/>
-              </a:rPr>
-              <a:t>은 자신이 아는 지식으로 소설을 쓰는</a:t>
-            </a:r>
-            <a:r>
-              <a:rPr lang="en-US" altLang="ko-KR" sz="1600" dirty="0">
-                <a:latin typeface="D2Coding" panose="020B0609020101020101" pitchFamily="49" charset="-127"/>
-                <a:ea typeface="D2Coding" panose="020B0609020101020101" pitchFamily="49" charset="-127"/>
-              </a:rPr>
-              <a:t>(</a:t>
-            </a:r>
-            <a:r>
-              <a:rPr lang="ko-KR" altLang="en-US" sz="1600" dirty="0">
-                <a:latin typeface="D2Coding" panose="020B0609020101020101" pitchFamily="49" charset="-127"/>
-                <a:ea typeface="D2Coding" panose="020B0609020101020101" pitchFamily="49" charset="-127"/>
-              </a:rPr>
-              <a:t>환각 현상</a:t>
-            </a:r>
-            <a:r>
-              <a:rPr lang="en-US" altLang="ko-KR" sz="1600" dirty="0">
-                <a:latin typeface="D2Coding" panose="020B0609020101020101" pitchFamily="49" charset="-127"/>
-                <a:ea typeface="D2Coding" panose="020B0609020101020101" pitchFamily="49" charset="-127"/>
-              </a:rPr>
-              <a:t>)</a:t>
-            </a:r>
-            <a:r>
-              <a:rPr lang="ko-KR" altLang="en-US" sz="1600" dirty="0">
-                <a:latin typeface="D2Coding" panose="020B0609020101020101" pitchFamily="49" charset="-127"/>
-                <a:ea typeface="D2Coding" panose="020B0609020101020101" pitchFamily="49" charset="-127"/>
-              </a:rPr>
-              <a:t>대신</a:t>
-            </a:r>
-            <a:r>
-              <a:rPr lang="en-US" altLang="ko-KR" sz="1600" dirty="0">
-                <a:latin typeface="D2Coding" panose="020B0609020101020101" pitchFamily="49" charset="-127"/>
-                <a:ea typeface="D2Coding" panose="020B0609020101020101" pitchFamily="49" charset="-127"/>
-              </a:rPr>
-              <a:t>, </a:t>
-            </a:r>
-            <a:r>
-              <a:rPr lang="ko-KR" altLang="en-US" sz="1600" dirty="0">
-                <a:latin typeface="D2Coding" panose="020B0609020101020101" pitchFamily="49" charset="-127"/>
-                <a:ea typeface="D2Coding" panose="020B0609020101020101" pitchFamily="49" charset="-127"/>
-              </a:rPr>
-              <a:t>주어지는 참고 문서를 기반으로 정확하고 정제된 최종 답변</a:t>
-            </a:r>
-            <a:r>
-              <a:rPr lang="en-US" altLang="ko-KR" sz="1600" dirty="0">
-                <a:latin typeface="D2Coding" panose="020B0609020101020101" pitchFamily="49" charset="-127"/>
-                <a:ea typeface="D2Coding" panose="020B0609020101020101" pitchFamily="49" charset="-127"/>
-              </a:rPr>
-              <a:t>(Answer)</a:t>
-            </a:r>
-            <a:r>
-              <a:rPr lang="ko-KR" altLang="en-US" sz="1600" dirty="0">
-                <a:latin typeface="D2Coding" panose="020B0609020101020101" pitchFamily="49" charset="-127"/>
-                <a:ea typeface="D2Coding" panose="020B0609020101020101" pitchFamily="49" charset="-127"/>
-              </a:rPr>
-              <a:t>을 작성하여 사용자에게 </a:t>
-            </a:r>
-            <a:r>
-              <a:rPr lang="en-US" altLang="ko-KR" sz="1600" dirty="0">
-                <a:latin typeface="D2Coding" panose="020B0609020101020101" pitchFamily="49" charset="-127"/>
-                <a:ea typeface="D2Coding" panose="020B0609020101020101" pitchFamily="49" charset="-127"/>
-              </a:rPr>
-              <a:t>Generate</a:t>
-            </a:r>
-          </a:p>
-        </p:txBody>
-      </p:sp>
-    </p:spTree>
-    <p:extLst>
-      <p:ext uri="{BB962C8B-B14F-4D97-AF65-F5344CB8AC3E}">
-        <p14:creationId xmlns:p14="http://schemas.microsoft.com/office/powerpoint/2010/main" val="3020969316"/>
-      </p:ext>
-    </p:extLst>
-  </p:cSld>
-  <p:clrMapOvr>
-    <a:masterClrMapping/>
-  </p:clrMapOvr>
-</p:sld>
-</file>
-
-<file path=ppt/slides/slide19.xml><?xml version="1.0" encoding="utf-8"?>
-<p:sld xmlns:a="http://schemas.openxmlformats.org/drawingml/2006/main" xmlns:r="http://schemas.openxmlformats.org/officeDocument/2006/relationships" xmlns:p="http://schemas.openxmlformats.org/presentationml/2006/main">
-  <p:cSld>
-    <p:spTree>
-      <p:nvGrpSpPr>
-        <p:cNvPr id="1" name="">
-          <a:extLst>
-            <a:ext uri="{FF2B5EF4-FFF2-40B4-BE49-F238E27FC236}">
-              <a16:creationId xmlns:a16="http://schemas.microsoft.com/office/drawing/2014/main" id="{7F6574E4-5B38-625B-D78F-F70F559CDB33}"/>
-            </a:ext>
-          </a:extLst>
-        </p:cNvPr>
-        <p:cNvGrpSpPr/>
-        <p:nvPr/>
-      </p:nvGrpSpPr>
-      <p:grpSpPr>
-        <a:xfrm>
-          <a:off x="0" y="0"/>
-          <a:ext cx="0" cy="0"/>
-          <a:chOff x="0" y="0"/>
-          <a:chExt cx="0" cy="0"/>
-        </a:xfrm>
-      </p:grpSpPr>
-      <p:sp>
-        <p:nvSpPr>
-          <p:cNvPr id="4" name="슬라이드 번호 개체 틀 3">
-            <a:extLst>
-              <a:ext uri="{FF2B5EF4-FFF2-40B4-BE49-F238E27FC236}">
-                <a16:creationId xmlns:a16="http://schemas.microsoft.com/office/drawing/2014/main" id="{E3A55706-A236-05A0-0081-1EBD57FACE57}"/>
-              </a:ext>
-            </a:extLst>
-          </p:cNvPr>
-          <p:cNvSpPr>
-            <a:spLocks noGrp="1"/>
-          </p:cNvSpPr>
-          <p:nvPr>
-            <p:ph type="sldNum" sz="quarter" idx="12"/>
-          </p:nvPr>
-        </p:nvSpPr>
-        <p:spPr>
-          <a:xfrm>
-            <a:off x="10514011" y="6036261"/>
-            <a:ext cx="753545" cy="365125"/>
-          </a:xfrm>
-        </p:spPr>
-        <p:txBody>
-          <a:bodyPr/>
-          <a:lstStyle/>
-          <a:p>
-            <a:fld id="{D57F1E4F-1CFF-5643-939E-217C01CDF565}" type="slidenum">
-              <a:rPr lang="en-US" smtClean="0"/>
-              <a:pPr/>
-              <a:t>19</a:t>
-            </a:fld>
-            <a:endParaRPr lang="en-US" dirty="0"/>
-          </a:p>
-        </p:txBody>
-      </p:sp>
-      <p:sp>
-        <p:nvSpPr>
-          <p:cNvPr id="3" name="제목 1">
-            <a:extLst>
-              <a:ext uri="{FF2B5EF4-FFF2-40B4-BE49-F238E27FC236}">
-                <a16:creationId xmlns:a16="http://schemas.microsoft.com/office/drawing/2014/main" id="{22F9FC71-E2BD-5A5C-7CCF-D928284288C0}"/>
-              </a:ext>
-            </a:extLst>
-          </p:cNvPr>
-          <p:cNvSpPr txBox="1">
-            <a:spLocks/>
-          </p:cNvSpPr>
-          <p:nvPr/>
-        </p:nvSpPr>
-        <p:spPr>
-          <a:xfrm>
-            <a:off x="475645" y="481983"/>
-            <a:ext cx="10353762" cy="766439"/>
-          </a:xfrm>
-          <a:prstGeom prst="rect">
-            <a:avLst/>
-          </a:prstGeom>
-        </p:spPr>
-        <p:txBody>
-          <a:bodyPr vert="horz" lIns="91440" tIns="45720" rIns="91440" bIns="45720" rtlCol="0" anchor="ctr">
-            <a:normAutofit/>
-          </a:bodyPr>
-          <a:lstStyle>
-            <a:lvl1pPr algn="ctr" defTabSz="914400" rtl="0" eaLnBrk="1" latinLnBrk="1" hangingPunct="1">
-              <a:lnSpc>
-                <a:spcPct val="90000"/>
-              </a:lnSpc>
-              <a:spcBef>
-                <a:spcPct val="0"/>
-              </a:spcBef>
-              <a:buNone/>
-              <a:defRPr sz="3200" kern="1200" cap="all" baseline="0">
-                <a:solidFill>
-                  <a:schemeClr val="tx1"/>
-                </a:solidFill>
-                <a:effectLst/>
-                <a:latin typeface="Batang" panose="02030600000101010101" pitchFamily="18" charset="-127"/>
-                <a:ea typeface="Batang" panose="02030600000101010101" pitchFamily="18" charset="-127"/>
-                <a:cs typeface="+mj-cs"/>
-              </a:defRPr>
-            </a:lvl1pPr>
-          </a:lstStyle>
-          <a:p>
-            <a:pPr algn="l"/>
-            <a:r>
-              <a:rPr lang="en-US" altLang="ko-KR" sz="2800" cap="none" dirty="0">
-                <a:solidFill>
-                  <a:schemeClr val="bg2">
-                    <a:lumMod val="25000"/>
-                  </a:schemeClr>
-                </a:solidFill>
-                <a:latin typeface="D2Coding" panose="020B0609020101020101" pitchFamily="49" charset="-127"/>
-                <a:ea typeface="D2Coding" panose="020B0609020101020101" pitchFamily="49" charset="-127"/>
-                <a:cs typeface="Segoe UI Light" panose="020B0502040204020203" pitchFamily="34" charset="0"/>
-              </a:rPr>
-              <a:t>RAG(</a:t>
-            </a:r>
-            <a:r>
-              <a:rPr lang="ko-KR" altLang="en-US" sz="2800" cap="none" dirty="0">
-                <a:solidFill>
-                  <a:schemeClr val="bg2">
-                    <a:lumMod val="25000"/>
-                  </a:schemeClr>
-                </a:solidFill>
-                <a:latin typeface="D2Coding" panose="020B0609020101020101" pitchFamily="49" charset="-127"/>
-                <a:ea typeface="D2Coding" panose="020B0609020101020101" pitchFamily="49" charset="-127"/>
-                <a:cs typeface="Segoe UI Light" panose="020B0502040204020203" pitchFamily="34" charset="0"/>
-              </a:rPr>
-              <a:t>검색 증강 생성</a:t>
-            </a:r>
-            <a:r>
-              <a:rPr lang="en-US" altLang="ko-KR" sz="2800" cap="none" dirty="0">
-                <a:solidFill>
-                  <a:schemeClr val="bg2">
-                    <a:lumMod val="25000"/>
-                  </a:schemeClr>
-                </a:solidFill>
-                <a:latin typeface="D2Coding" panose="020B0609020101020101" pitchFamily="49" charset="-127"/>
-                <a:ea typeface="D2Coding" panose="020B0609020101020101" pitchFamily="49" charset="-127"/>
-                <a:cs typeface="Segoe UI Light" panose="020B0502040204020203" pitchFamily="34" charset="0"/>
-              </a:rPr>
-              <a:t>, Retrieval-Augmented Generation)</a:t>
-            </a:r>
-            <a:endParaRPr lang="ko-KR" altLang="en-US" sz="2800" cap="none" dirty="0">
-              <a:solidFill>
-                <a:schemeClr val="bg2">
-                  <a:lumMod val="25000"/>
-                </a:schemeClr>
-              </a:solidFill>
-              <a:latin typeface="D2Coding" panose="020B0609020101020101" pitchFamily="49" charset="-127"/>
-              <a:ea typeface="D2Coding" panose="020B0609020101020101" pitchFamily="49" charset="-127"/>
-              <a:cs typeface="Segoe UI Light" panose="020B0502040204020203" pitchFamily="34" charset="0"/>
-            </a:endParaRPr>
-          </a:p>
-        </p:txBody>
-      </p:sp>
-      <p:pic>
-        <p:nvPicPr>
-          <p:cNvPr id="11268" name="Picture 4" descr="retrieval_diagram">
-            <a:extLst>
-              <a:ext uri="{FF2B5EF4-FFF2-40B4-BE49-F238E27FC236}">
-                <a16:creationId xmlns:a16="http://schemas.microsoft.com/office/drawing/2014/main" id="{A9CB697F-86C4-E9CB-25B3-0303A1737A02}"/>
-              </a:ext>
-            </a:extLst>
-          </p:cNvPr>
-          <p:cNvPicPr>
-            <a:picLocks noChangeAspect="1" noChangeArrowheads="1"/>
-          </p:cNvPicPr>
-          <p:nvPr/>
-        </p:nvPicPr>
-        <p:blipFill>
-          <a:blip r:embed="rId2">
-            <a:extLst>
-              <a:ext uri="{28A0092B-C50C-407E-A947-70E740481C1C}">
-                <a14:useLocalDpi xmlns:a14="http://schemas.microsoft.com/office/drawing/2010/main" val="0"/>
-              </a:ext>
-            </a:extLst>
-          </a:blip>
-          <a:srcRect/>
-          <a:stretch>
-            <a:fillRect/>
-          </a:stretch>
-        </p:blipFill>
-        <p:spPr bwMode="auto">
-          <a:xfrm>
-            <a:off x="1809749" y="2325181"/>
-            <a:ext cx="8055521" cy="4132650"/>
-          </a:xfrm>
-          <a:prstGeom prst="rect">
-            <a:avLst/>
-          </a:prstGeom>
-          <a:noFill/>
-          <a:extLst>
-            <a:ext uri="{909E8E84-426E-40DD-AFC4-6F175D3DCCD1}">
-              <a14:hiddenFill xmlns:a14="http://schemas.microsoft.com/office/drawing/2010/main">
-                <a:solidFill>
-                  <a:srgbClr val="FFFFFF"/>
-                </a:solidFill>
-              </a14:hiddenFill>
-            </a:ext>
-          </a:extLst>
-        </p:spPr>
-      </p:pic>
-      <p:sp>
-        <p:nvSpPr>
-          <p:cNvPr id="6" name="TextBox 5">
-            <a:extLst>
-              <a:ext uri="{FF2B5EF4-FFF2-40B4-BE49-F238E27FC236}">
-                <a16:creationId xmlns:a16="http://schemas.microsoft.com/office/drawing/2014/main" id="{D2AC66DF-E377-DCF9-5FCC-231B680E30FA}"/>
-              </a:ext>
-            </a:extLst>
-          </p:cNvPr>
-          <p:cNvSpPr txBox="1"/>
-          <p:nvPr/>
-        </p:nvSpPr>
-        <p:spPr>
-          <a:xfrm>
-            <a:off x="638175" y="1333411"/>
-            <a:ext cx="10858500" cy="584775"/>
-          </a:xfrm>
-          <a:prstGeom prst="rect">
-            <a:avLst/>
-          </a:prstGeom>
-          <a:noFill/>
-        </p:spPr>
-        <p:txBody>
-          <a:bodyPr wrap="square">
-            <a:spAutoFit/>
-          </a:bodyPr>
-          <a:lstStyle/>
-          <a:p>
-            <a:pPr marL="285750" indent="-285750">
-              <a:buFont typeface="Wingdings" panose="05000000000000000000" pitchFamily="2" charset="2"/>
-              <a:buChar char="v"/>
-            </a:pPr>
-            <a:r>
-              <a:rPr lang="en-US" altLang="ko-KR" sz="1600" dirty="0">
-                <a:latin typeface="D2Coding" panose="020B0609020101020101" pitchFamily="49" charset="-127"/>
-                <a:ea typeface="D2Coding" panose="020B0609020101020101" pitchFamily="49" charset="-127"/>
-              </a:rPr>
-              <a:t>"</a:t>
-            </a:r>
-            <a:r>
-              <a:rPr lang="ko-KR" altLang="en-US" sz="1600" dirty="0">
-                <a:latin typeface="D2Coding" panose="020B0609020101020101" pitchFamily="49" charset="-127"/>
-                <a:ea typeface="D2Coding" panose="020B0609020101020101" pitchFamily="49" charset="-127"/>
-              </a:rPr>
-              <a:t>만약 여러분 회사의 방대한 모든 </a:t>
-            </a:r>
-            <a:r>
-              <a:rPr lang="ko-KR" altLang="en-US" sz="1600" dirty="0" err="1">
-                <a:latin typeface="D2Coding" panose="020B0609020101020101" pitchFamily="49" charset="-127"/>
-                <a:ea typeface="D2Coding" panose="020B0609020101020101" pitchFamily="49" charset="-127"/>
-              </a:rPr>
-              <a:t>규정집</a:t>
-            </a:r>
-            <a:r>
-              <a:rPr lang="en-US" altLang="ko-KR" sz="1600" dirty="0">
-                <a:latin typeface="D2Coding" panose="020B0609020101020101" pitchFamily="49" charset="-127"/>
-                <a:ea typeface="D2Coding" panose="020B0609020101020101" pitchFamily="49" charset="-127"/>
-              </a:rPr>
-              <a:t>(Huge Quantity)</a:t>
-            </a:r>
-            <a:r>
-              <a:rPr lang="ko-KR" altLang="en-US" sz="1600" dirty="0">
-                <a:latin typeface="D2Coding" panose="020B0609020101020101" pitchFamily="49" charset="-127"/>
-                <a:ea typeface="D2Coding" panose="020B0609020101020101" pitchFamily="49" charset="-127"/>
-              </a:rPr>
-              <a:t>을 </a:t>
-            </a:r>
-            <a:r>
-              <a:rPr lang="en-US" altLang="ko-KR" sz="1600" dirty="0">
-                <a:latin typeface="D2Coding" panose="020B0609020101020101" pitchFamily="49" charset="-127"/>
-                <a:ea typeface="D2Coding" panose="020B0609020101020101" pitchFamily="49" charset="-127"/>
-              </a:rPr>
-              <a:t>LLM</a:t>
-            </a:r>
-            <a:r>
-              <a:rPr lang="ko-KR" altLang="en-US" sz="1600" dirty="0">
-                <a:latin typeface="D2Coding" panose="020B0609020101020101" pitchFamily="49" charset="-127"/>
-                <a:ea typeface="D2Coding" panose="020B0609020101020101" pitchFamily="49" charset="-127"/>
-              </a:rPr>
-              <a:t>에게 참고하라고 한다면</a:t>
-            </a:r>
-            <a:r>
-              <a:rPr lang="en-US" altLang="ko-KR" sz="1600" dirty="0">
-                <a:latin typeface="D2Coding" panose="020B0609020101020101" pitchFamily="49" charset="-127"/>
-                <a:ea typeface="D2Coding" panose="020B0609020101020101" pitchFamily="49" charset="-127"/>
-              </a:rPr>
-              <a:t>, </a:t>
-            </a:r>
-            <a:r>
-              <a:rPr lang="ko-KR" altLang="en-US" sz="1600" dirty="0">
-                <a:latin typeface="D2Coding" panose="020B0609020101020101" pitchFamily="49" charset="-127"/>
-                <a:ea typeface="D2Coding" panose="020B0609020101020101" pitchFamily="49" charset="-127"/>
-              </a:rPr>
-              <a:t>매번 수천 페이지를 복사해서 붙여 넣으실 건가요</a:t>
-            </a:r>
-            <a:r>
-              <a:rPr lang="en-US" altLang="ko-KR" sz="1600" dirty="0">
-                <a:latin typeface="D2Coding" panose="020B0609020101020101" pitchFamily="49" charset="-127"/>
-                <a:ea typeface="D2Coding" panose="020B0609020101020101" pitchFamily="49" charset="-127"/>
-              </a:rPr>
-              <a:t>? </a:t>
-            </a:r>
-            <a:r>
-              <a:rPr lang="ko-KR" altLang="en-US" sz="1600" dirty="0">
-                <a:latin typeface="D2Coding" panose="020B0609020101020101" pitchFamily="49" charset="-127"/>
-                <a:ea typeface="D2Coding" panose="020B0609020101020101" pitchFamily="49" charset="-127"/>
-              </a:rPr>
-              <a:t>불가능하겠죠</a:t>
-            </a:r>
-            <a:r>
-              <a:rPr lang="en-US" altLang="ko-KR" sz="1600" dirty="0">
-                <a:latin typeface="D2Coding" panose="020B0609020101020101" pitchFamily="49" charset="-127"/>
-                <a:ea typeface="D2Coding" panose="020B0609020101020101" pitchFamily="49" charset="-127"/>
-              </a:rPr>
-              <a:t>? </a:t>
-            </a:r>
-            <a:r>
-              <a:rPr lang="ko-KR" altLang="en-US" sz="1600" dirty="0">
-                <a:latin typeface="D2Coding" panose="020B0609020101020101" pitchFamily="49" charset="-127"/>
-                <a:ea typeface="D2Coding" panose="020B0609020101020101" pitchFamily="49" charset="-127"/>
-              </a:rPr>
-              <a:t>그래서 </a:t>
-            </a:r>
-            <a:r>
-              <a:rPr lang="en-US" altLang="ko-KR" sz="1600" dirty="0">
-                <a:latin typeface="D2Coding" panose="020B0609020101020101" pitchFamily="49" charset="-127"/>
-                <a:ea typeface="D2Coding" panose="020B0609020101020101" pitchFamily="49" charset="-127"/>
-              </a:rPr>
-              <a:t>'</a:t>
-            </a:r>
-            <a:r>
-              <a:rPr lang="ko-KR" altLang="en-US" sz="1600" dirty="0">
-                <a:latin typeface="D2Coding" panose="020B0609020101020101" pitchFamily="49" charset="-127"/>
-                <a:ea typeface="D2Coding" panose="020B0609020101020101" pitchFamily="49" charset="-127"/>
-              </a:rPr>
-              <a:t>정답 조각 고르기 기술</a:t>
-            </a:r>
-            <a:r>
-              <a:rPr lang="en-US" altLang="ko-KR" sz="1600" dirty="0">
-                <a:latin typeface="D2Coding" panose="020B0609020101020101" pitchFamily="49" charset="-127"/>
-                <a:ea typeface="D2Coding" panose="020B0609020101020101" pitchFamily="49" charset="-127"/>
-              </a:rPr>
-              <a:t>'</a:t>
-            </a:r>
-            <a:r>
-              <a:rPr lang="ko-KR" altLang="en-US" sz="1600" dirty="0">
-                <a:latin typeface="D2Coding" panose="020B0609020101020101" pitchFamily="49" charset="-127"/>
-                <a:ea typeface="D2Coding" panose="020B0609020101020101" pitchFamily="49" charset="-127"/>
-              </a:rPr>
-              <a:t>이 필요합니다</a:t>
-            </a:r>
-            <a:r>
-              <a:rPr lang="en-US" altLang="ko-KR" sz="1600" dirty="0">
-                <a:latin typeface="D2Coding" panose="020B0609020101020101" pitchFamily="49" charset="-127"/>
-                <a:ea typeface="D2Coding" panose="020B0609020101020101" pitchFamily="49" charset="-127"/>
-              </a:rPr>
-              <a:t>.“</a:t>
-            </a:r>
-            <a:endParaRPr lang="ko-KR" altLang="en-US" sz="1600" dirty="0"/>
-          </a:p>
-        </p:txBody>
-      </p:sp>
-    </p:spTree>
-    <p:extLst>
-      <p:ext uri="{BB962C8B-B14F-4D97-AF65-F5344CB8AC3E}">
-        <p14:creationId xmlns:p14="http://schemas.microsoft.com/office/powerpoint/2010/main" val="1008490805"/>
       </p:ext>
     </p:extLst>
   </p:cSld>
@@ -10017,6 +11065,1552 @@
     <p:extLst>
       <p:ext uri="{BB962C8B-B14F-4D97-AF65-F5344CB8AC3E}">
         <p14:creationId xmlns:p14="http://schemas.microsoft.com/office/powerpoint/2010/main" val="2827070286"/>
+      </p:ext>
+    </p:extLst>
+  </p:cSld>
+  <p:clrMapOvr>
+    <a:masterClrMapping/>
+  </p:clrMapOvr>
+</p:sld>
+</file>
+
+<file path=ppt/slides/slide20.xml><?xml version="1.0" encoding="utf-8"?>
+<p:sld xmlns:a="http://schemas.openxmlformats.org/drawingml/2006/main" xmlns:r="http://schemas.openxmlformats.org/officeDocument/2006/relationships" xmlns:p="http://schemas.openxmlformats.org/presentationml/2006/main">
+  <p:cSld>
+    <p:spTree>
+      <p:nvGrpSpPr>
+        <p:cNvPr id="1" name="">
+          <a:extLst>
+            <a:ext uri="{FF2B5EF4-FFF2-40B4-BE49-F238E27FC236}">
+              <a16:creationId xmlns:a16="http://schemas.microsoft.com/office/drawing/2014/main" id="{CE7F842C-9CAC-38E6-8FD9-D5DA947DEBB5}"/>
+            </a:ext>
+          </a:extLst>
+        </p:cNvPr>
+        <p:cNvGrpSpPr/>
+        <p:nvPr/>
+      </p:nvGrpSpPr>
+      <p:grpSpPr>
+        <a:xfrm>
+          <a:off x="0" y="0"/>
+          <a:ext cx="0" cy="0"/>
+          <a:chOff x="0" y="0"/>
+          <a:chExt cx="0" cy="0"/>
+        </a:xfrm>
+      </p:grpSpPr>
+      <p:sp>
+        <p:nvSpPr>
+          <p:cNvPr id="4" name="슬라이드 번호 개체 틀 3">
+            <a:extLst>
+              <a:ext uri="{FF2B5EF4-FFF2-40B4-BE49-F238E27FC236}">
+                <a16:creationId xmlns:a16="http://schemas.microsoft.com/office/drawing/2014/main" id="{A7EE8165-43B8-DA8C-46DF-D26611C00B68}"/>
+              </a:ext>
+            </a:extLst>
+          </p:cNvPr>
+          <p:cNvSpPr>
+            <a:spLocks noGrp="1"/>
+          </p:cNvSpPr>
+          <p:nvPr>
+            <p:ph type="sldNum" sz="quarter" idx="12"/>
+          </p:nvPr>
+        </p:nvSpPr>
+        <p:spPr>
+          <a:xfrm>
+            <a:off x="10514011" y="6036261"/>
+            <a:ext cx="753545" cy="365125"/>
+          </a:xfrm>
+        </p:spPr>
+        <p:txBody>
+          <a:bodyPr/>
+          <a:lstStyle/>
+          <a:p>
+            <a:fld id="{D57F1E4F-1CFF-5643-939E-217C01CDF565}" type="slidenum">
+              <a:rPr lang="en-US" smtClean="0"/>
+              <a:pPr/>
+              <a:t>20</a:t>
+            </a:fld>
+            <a:endParaRPr lang="en-US" dirty="0"/>
+          </a:p>
+        </p:txBody>
+      </p:sp>
+      <p:sp>
+        <p:nvSpPr>
+          <p:cNvPr id="3" name="제목 1">
+            <a:extLst>
+              <a:ext uri="{FF2B5EF4-FFF2-40B4-BE49-F238E27FC236}">
+                <a16:creationId xmlns:a16="http://schemas.microsoft.com/office/drawing/2014/main" id="{C243947F-3B13-B412-B1A4-2AFBF67B6C15}"/>
+              </a:ext>
+            </a:extLst>
+          </p:cNvPr>
+          <p:cNvSpPr txBox="1">
+            <a:spLocks/>
+          </p:cNvSpPr>
+          <p:nvPr/>
+        </p:nvSpPr>
+        <p:spPr>
+          <a:xfrm>
+            <a:off x="475645" y="481983"/>
+            <a:ext cx="10353762" cy="766439"/>
+          </a:xfrm>
+          <a:prstGeom prst="rect">
+            <a:avLst/>
+          </a:prstGeom>
+        </p:spPr>
+        <p:txBody>
+          <a:bodyPr vert="horz" lIns="91440" tIns="45720" rIns="91440" bIns="45720" rtlCol="0" anchor="ctr">
+            <a:normAutofit/>
+          </a:bodyPr>
+          <a:lstStyle>
+            <a:lvl1pPr algn="ctr" defTabSz="914400" rtl="0" eaLnBrk="1" latinLnBrk="1" hangingPunct="1">
+              <a:lnSpc>
+                <a:spcPct val="90000"/>
+              </a:lnSpc>
+              <a:spcBef>
+                <a:spcPct val="0"/>
+              </a:spcBef>
+              <a:buNone/>
+              <a:defRPr sz="3200" kern="1200" cap="all" baseline="0">
+                <a:solidFill>
+                  <a:schemeClr val="tx1"/>
+                </a:solidFill>
+                <a:effectLst/>
+                <a:latin typeface="Batang" panose="02030600000101010101" pitchFamily="18" charset="-127"/>
+                <a:ea typeface="Batang" panose="02030600000101010101" pitchFamily="18" charset="-127"/>
+                <a:cs typeface="+mj-cs"/>
+              </a:defRPr>
+            </a:lvl1pPr>
+          </a:lstStyle>
+          <a:p>
+            <a:pPr algn="l"/>
+            <a:r>
+              <a:rPr lang="en-US" altLang="ko-KR" sz="2800" cap="none" dirty="0">
+                <a:solidFill>
+                  <a:schemeClr val="bg2">
+                    <a:lumMod val="25000"/>
+                  </a:schemeClr>
+                </a:solidFill>
+                <a:latin typeface="D2Coding" panose="020B0609020101020101" pitchFamily="49" charset="-127"/>
+                <a:ea typeface="D2Coding" panose="020B0609020101020101" pitchFamily="49" charset="-127"/>
+                <a:cs typeface="Segoe UI Light" panose="020B0502040204020203" pitchFamily="34" charset="0"/>
+              </a:rPr>
+              <a:t>RAG(</a:t>
+            </a:r>
+            <a:r>
+              <a:rPr lang="ko-KR" altLang="en-US" sz="2800" cap="none" dirty="0">
+                <a:solidFill>
+                  <a:schemeClr val="bg2">
+                    <a:lumMod val="25000"/>
+                  </a:schemeClr>
+                </a:solidFill>
+                <a:latin typeface="D2Coding" panose="020B0609020101020101" pitchFamily="49" charset="-127"/>
+                <a:ea typeface="D2Coding" panose="020B0609020101020101" pitchFamily="49" charset="-127"/>
+                <a:cs typeface="Segoe UI Light" panose="020B0502040204020203" pitchFamily="34" charset="0"/>
+              </a:rPr>
+              <a:t>검색 증강 생성</a:t>
+            </a:r>
+            <a:r>
+              <a:rPr lang="en-US" altLang="ko-KR" sz="2800" cap="none" dirty="0">
+                <a:solidFill>
+                  <a:schemeClr val="bg2">
+                    <a:lumMod val="25000"/>
+                  </a:schemeClr>
+                </a:solidFill>
+                <a:latin typeface="D2Coding" panose="020B0609020101020101" pitchFamily="49" charset="-127"/>
+                <a:ea typeface="D2Coding" panose="020B0609020101020101" pitchFamily="49" charset="-127"/>
+                <a:cs typeface="Segoe UI Light" panose="020B0502040204020203" pitchFamily="34" charset="0"/>
+              </a:rPr>
+              <a:t>, Retrieval-Augmented Generation)</a:t>
+            </a:r>
+            <a:endParaRPr lang="ko-KR" altLang="en-US" sz="2800" cap="none" dirty="0">
+              <a:solidFill>
+                <a:schemeClr val="bg2">
+                  <a:lumMod val="25000"/>
+                </a:schemeClr>
+              </a:solidFill>
+              <a:latin typeface="D2Coding" panose="020B0609020101020101" pitchFamily="49" charset="-127"/>
+              <a:ea typeface="D2Coding" panose="020B0609020101020101" pitchFamily="49" charset="-127"/>
+              <a:cs typeface="Segoe UI Light" panose="020B0502040204020203" pitchFamily="34" charset="0"/>
+            </a:endParaRPr>
+          </a:p>
+        </p:txBody>
+      </p:sp>
+      <p:pic>
+        <p:nvPicPr>
+          <p:cNvPr id="11266" name="Picture 2" descr="index_diagram">
+            <a:extLst>
+              <a:ext uri="{FF2B5EF4-FFF2-40B4-BE49-F238E27FC236}">
+                <a16:creationId xmlns:a16="http://schemas.microsoft.com/office/drawing/2014/main" id="{5AC6592C-BD82-0D32-9BB4-24792A5FD224}"/>
+              </a:ext>
+            </a:extLst>
+          </p:cNvPr>
+          <p:cNvPicPr>
+            <a:picLocks noChangeAspect="1" noChangeArrowheads="1"/>
+          </p:cNvPicPr>
+          <p:nvPr/>
+        </p:nvPicPr>
+        <p:blipFill>
+          <a:blip r:embed="rId2">
+            <a:extLst>
+              <a:ext uri="{28A0092B-C50C-407E-A947-70E740481C1C}">
+                <a14:useLocalDpi xmlns:a14="http://schemas.microsoft.com/office/drawing/2010/main" val="0"/>
+              </a:ext>
+            </a:extLst>
+          </a:blip>
+          <a:srcRect/>
+          <a:stretch>
+            <a:fillRect/>
+          </a:stretch>
+        </p:blipFill>
+        <p:spPr bwMode="auto">
+          <a:xfrm>
+            <a:off x="1809750" y="1982281"/>
+            <a:ext cx="8055521" cy="4050836"/>
+          </a:xfrm>
+          <a:prstGeom prst="rect">
+            <a:avLst/>
+          </a:prstGeom>
+          <a:noFill/>
+          <a:extLst>
+            <a:ext uri="{909E8E84-426E-40DD-AFC4-6F175D3DCCD1}">
+              <a14:hiddenFill xmlns:a14="http://schemas.microsoft.com/office/drawing/2010/main">
+                <a:solidFill>
+                  <a:srgbClr val="FFFFFF"/>
+                </a:solidFill>
+              </a14:hiddenFill>
+            </a:ext>
+          </a:extLst>
+        </p:spPr>
+      </p:pic>
+      <p:sp>
+        <p:nvSpPr>
+          <p:cNvPr id="7" name="TextBox 6">
+            <a:extLst>
+              <a:ext uri="{FF2B5EF4-FFF2-40B4-BE49-F238E27FC236}">
+                <a16:creationId xmlns:a16="http://schemas.microsoft.com/office/drawing/2014/main" id="{40B795B2-462B-1D70-F75C-F6A7974637BE}"/>
+              </a:ext>
+            </a:extLst>
+          </p:cNvPr>
+          <p:cNvSpPr txBox="1"/>
+          <p:nvPr/>
+        </p:nvSpPr>
+        <p:spPr>
+          <a:xfrm>
+            <a:off x="1219923" y="5663785"/>
+            <a:ext cx="530915" cy="369332"/>
+          </a:xfrm>
+          <a:prstGeom prst="rect">
+            <a:avLst/>
+          </a:prstGeom>
+          <a:noFill/>
+        </p:spPr>
+        <p:txBody>
+          <a:bodyPr wrap="none" rtlCol="0">
+            <a:spAutoFit/>
+          </a:bodyPr>
+          <a:lstStyle/>
+          <a:p>
+            <a:r>
+              <a:rPr lang="en-US" altLang="ko-KR" dirty="0">
+                <a:latin typeface="D2Coding" panose="020B0609020101020101" pitchFamily="49" charset="-127"/>
+                <a:ea typeface="D2Coding" panose="020B0609020101020101" pitchFamily="49" charset="-127"/>
+                <a:hlinkClick r:id="rId3"/>
+              </a:rPr>
+              <a:t>RAG</a:t>
+            </a:r>
+            <a:endParaRPr lang="ko-KR" altLang="en-US" dirty="0">
+              <a:latin typeface="D2Coding" panose="020B0609020101020101" pitchFamily="49" charset="-127"/>
+              <a:ea typeface="D2Coding" panose="020B0609020101020101" pitchFamily="49" charset="-127"/>
+            </a:endParaRPr>
+          </a:p>
+        </p:txBody>
+      </p:sp>
+    </p:spTree>
+    <p:extLst>
+      <p:ext uri="{BB962C8B-B14F-4D97-AF65-F5344CB8AC3E}">
+        <p14:creationId xmlns:p14="http://schemas.microsoft.com/office/powerpoint/2010/main" val="710087885"/>
+      </p:ext>
+    </p:extLst>
+  </p:cSld>
+  <p:clrMapOvr>
+    <a:masterClrMapping/>
+  </p:clrMapOvr>
+</p:sld>
+</file>
+
+<file path=ppt/slides/slide21.xml><?xml version="1.0" encoding="utf-8"?>
+<p:sld xmlns:a="http://schemas.openxmlformats.org/drawingml/2006/main" xmlns:r="http://schemas.openxmlformats.org/officeDocument/2006/relationships" xmlns:p="http://schemas.openxmlformats.org/presentationml/2006/main">
+  <p:cSld>
+    <p:spTree>
+      <p:nvGrpSpPr>
+        <p:cNvPr id="1" name="">
+          <a:extLst>
+            <a:ext uri="{FF2B5EF4-FFF2-40B4-BE49-F238E27FC236}">
+              <a16:creationId xmlns:a16="http://schemas.microsoft.com/office/drawing/2014/main" id="{75E18721-1D54-F2C3-9D0C-19D25E4DED3C}"/>
+            </a:ext>
+          </a:extLst>
+        </p:cNvPr>
+        <p:cNvGrpSpPr/>
+        <p:nvPr/>
+      </p:nvGrpSpPr>
+      <p:grpSpPr>
+        <a:xfrm>
+          <a:off x="0" y="0"/>
+          <a:ext cx="0" cy="0"/>
+          <a:chOff x="0" y="0"/>
+          <a:chExt cx="0" cy="0"/>
+        </a:xfrm>
+      </p:grpSpPr>
+      <p:sp>
+        <p:nvSpPr>
+          <p:cNvPr id="4" name="슬라이드 번호 개체 틀 3">
+            <a:extLst>
+              <a:ext uri="{FF2B5EF4-FFF2-40B4-BE49-F238E27FC236}">
+                <a16:creationId xmlns:a16="http://schemas.microsoft.com/office/drawing/2014/main" id="{DAAC6D21-B116-9645-BE62-CC728796944D}"/>
+              </a:ext>
+            </a:extLst>
+          </p:cNvPr>
+          <p:cNvSpPr>
+            <a:spLocks noGrp="1"/>
+          </p:cNvSpPr>
+          <p:nvPr>
+            <p:ph type="sldNum" sz="quarter" idx="12"/>
+          </p:nvPr>
+        </p:nvSpPr>
+        <p:spPr>
+          <a:xfrm>
+            <a:off x="10514011" y="6036261"/>
+            <a:ext cx="753545" cy="365125"/>
+          </a:xfrm>
+        </p:spPr>
+        <p:txBody>
+          <a:bodyPr/>
+          <a:lstStyle/>
+          <a:p>
+            <a:fld id="{D57F1E4F-1CFF-5643-939E-217C01CDF565}" type="slidenum">
+              <a:rPr lang="en-US" smtClean="0"/>
+              <a:pPr/>
+              <a:t>21</a:t>
+            </a:fld>
+            <a:endParaRPr lang="en-US" dirty="0"/>
+          </a:p>
+        </p:txBody>
+      </p:sp>
+      <p:sp>
+        <p:nvSpPr>
+          <p:cNvPr id="3" name="제목 1">
+            <a:extLst>
+              <a:ext uri="{FF2B5EF4-FFF2-40B4-BE49-F238E27FC236}">
+                <a16:creationId xmlns:a16="http://schemas.microsoft.com/office/drawing/2014/main" id="{A8CCF26C-27E2-34A5-0A8D-96C10E06D993}"/>
+              </a:ext>
+            </a:extLst>
+          </p:cNvPr>
+          <p:cNvSpPr txBox="1">
+            <a:spLocks/>
+          </p:cNvSpPr>
+          <p:nvPr/>
+        </p:nvSpPr>
+        <p:spPr>
+          <a:xfrm>
+            <a:off x="475645" y="481983"/>
+            <a:ext cx="10353762" cy="766439"/>
+          </a:xfrm>
+          <a:prstGeom prst="rect">
+            <a:avLst/>
+          </a:prstGeom>
+        </p:spPr>
+        <p:txBody>
+          <a:bodyPr vert="horz" lIns="91440" tIns="45720" rIns="91440" bIns="45720" rtlCol="0" anchor="ctr">
+            <a:normAutofit/>
+          </a:bodyPr>
+          <a:lstStyle>
+            <a:lvl1pPr algn="ctr" defTabSz="914400" rtl="0" eaLnBrk="1" latinLnBrk="1" hangingPunct="1">
+              <a:lnSpc>
+                <a:spcPct val="90000"/>
+              </a:lnSpc>
+              <a:spcBef>
+                <a:spcPct val="0"/>
+              </a:spcBef>
+              <a:buNone/>
+              <a:defRPr sz="3200" kern="1200" cap="all" baseline="0">
+                <a:solidFill>
+                  <a:schemeClr val="tx1"/>
+                </a:solidFill>
+                <a:effectLst/>
+                <a:latin typeface="Batang" panose="02030600000101010101" pitchFamily="18" charset="-127"/>
+                <a:ea typeface="Batang" panose="02030600000101010101" pitchFamily="18" charset="-127"/>
+                <a:cs typeface="+mj-cs"/>
+              </a:defRPr>
+            </a:lvl1pPr>
+          </a:lstStyle>
+          <a:p>
+            <a:pPr algn="l"/>
+            <a:r>
+              <a:rPr lang="en-US" altLang="ko-KR" sz="2800" cap="none" dirty="0">
+                <a:solidFill>
+                  <a:schemeClr val="bg2">
+                    <a:lumMod val="25000"/>
+                  </a:schemeClr>
+                </a:solidFill>
+                <a:latin typeface="D2Coding" panose="020B0609020101020101" pitchFamily="49" charset="-127"/>
+                <a:ea typeface="D2Coding" panose="020B0609020101020101" pitchFamily="49" charset="-127"/>
+                <a:cs typeface="Segoe UI Light" panose="020B0502040204020203" pitchFamily="34" charset="0"/>
+              </a:rPr>
+              <a:t>RAG(</a:t>
+            </a:r>
+            <a:r>
+              <a:rPr lang="ko-KR" altLang="en-US" sz="2800" cap="none" dirty="0">
+                <a:solidFill>
+                  <a:schemeClr val="bg2">
+                    <a:lumMod val="25000"/>
+                  </a:schemeClr>
+                </a:solidFill>
+                <a:latin typeface="D2Coding" panose="020B0609020101020101" pitchFamily="49" charset="-127"/>
+                <a:ea typeface="D2Coding" panose="020B0609020101020101" pitchFamily="49" charset="-127"/>
+                <a:cs typeface="Segoe UI Light" panose="020B0502040204020203" pitchFamily="34" charset="0"/>
+              </a:rPr>
+              <a:t>검색 증강 생성</a:t>
+            </a:r>
+            <a:r>
+              <a:rPr lang="en-US" altLang="ko-KR" sz="2800" cap="none" dirty="0">
+                <a:solidFill>
+                  <a:schemeClr val="bg2">
+                    <a:lumMod val="25000"/>
+                  </a:schemeClr>
+                </a:solidFill>
+                <a:latin typeface="D2Coding" panose="020B0609020101020101" pitchFamily="49" charset="-127"/>
+                <a:ea typeface="D2Coding" panose="020B0609020101020101" pitchFamily="49" charset="-127"/>
+                <a:cs typeface="Segoe UI Light" panose="020B0502040204020203" pitchFamily="34" charset="0"/>
+              </a:rPr>
+              <a:t>, Retrieval-Augmented Generation)</a:t>
+            </a:r>
+            <a:endParaRPr lang="ko-KR" altLang="en-US" sz="2800" cap="none" dirty="0">
+              <a:solidFill>
+                <a:schemeClr val="bg2">
+                  <a:lumMod val="25000"/>
+                </a:schemeClr>
+              </a:solidFill>
+              <a:latin typeface="D2Coding" panose="020B0609020101020101" pitchFamily="49" charset="-127"/>
+              <a:ea typeface="D2Coding" panose="020B0609020101020101" pitchFamily="49" charset="-127"/>
+              <a:cs typeface="Segoe UI Light" panose="020B0502040204020203" pitchFamily="34" charset="0"/>
+            </a:endParaRPr>
+          </a:p>
+        </p:txBody>
+      </p:sp>
+      <p:sp>
+        <p:nvSpPr>
+          <p:cNvPr id="5" name="TextBox 4">
+            <a:extLst>
+              <a:ext uri="{FF2B5EF4-FFF2-40B4-BE49-F238E27FC236}">
+                <a16:creationId xmlns:a16="http://schemas.microsoft.com/office/drawing/2014/main" id="{73116C9C-E112-9017-C824-57FDABBD88D1}"/>
+              </a:ext>
+            </a:extLst>
+          </p:cNvPr>
+          <p:cNvSpPr txBox="1"/>
+          <p:nvPr/>
+        </p:nvSpPr>
+        <p:spPr>
+          <a:xfrm>
+            <a:off x="608284" y="1353850"/>
+            <a:ext cx="11021741" cy="4994316"/>
+          </a:xfrm>
+          <a:prstGeom prst="rect">
+            <a:avLst/>
+          </a:prstGeom>
+          <a:noFill/>
+        </p:spPr>
+        <p:txBody>
+          <a:bodyPr wrap="square">
+            <a:spAutoFit/>
+          </a:bodyPr>
+          <a:lstStyle/>
+          <a:p>
+            <a:pPr marL="342900" indent="-342900">
+              <a:lnSpc>
+                <a:spcPct val="150000"/>
+              </a:lnSpc>
+              <a:buFont typeface="+mj-lt"/>
+              <a:buAutoNum type="arabicPeriod"/>
+            </a:pPr>
+            <a:r>
+              <a:rPr lang="en-US" altLang="ko-KR" sz="1600" b="1" dirty="0">
+                <a:latin typeface="D2Coding" panose="020B0609020101020101" pitchFamily="49" charset="-127"/>
+                <a:ea typeface="D2Coding" panose="020B0609020101020101" pitchFamily="49" charset="-127"/>
+              </a:rPr>
+              <a:t>Question (</a:t>
+            </a:r>
+            <a:r>
+              <a:rPr lang="ko-KR" altLang="en-US" sz="1600" b="1" dirty="0">
+                <a:latin typeface="D2Coding" panose="020B0609020101020101" pitchFamily="49" charset="-127"/>
+                <a:ea typeface="D2Coding" panose="020B0609020101020101" pitchFamily="49" charset="-127"/>
+              </a:rPr>
+              <a:t>사용자의 질문</a:t>
+            </a:r>
+            <a:r>
+              <a:rPr lang="en-US" altLang="ko-KR" sz="1600" b="1" dirty="0">
+                <a:latin typeface="D2Coding" panose="020B0609020101020101" pitchFamily="49" charset="-127"/>
+                <a:ea typeface="D2Coding" panose="020B0609020101020101" pitchFamily="49" charset="-127"/>
+              </a:rPr>
+              <a:t>) </a:t>
+            </a:r>
+            <a:r>
+              <a:rPr lang="en-US" altLang="ko-KR" sz="1600" dirty="0">
+                <a:latin typeface="D2Coding" panose="020B0609020101020101" pitchFamily="49" charset="-127"/>
+                <a:ea typeface="D2Coding" panose="020B0609020101020101" pitchFamily="49" charset="-127"/>
+              </a:rPr>
+              <a:t>: </a:t>
+            </a:r>
+            <a:r>
+              <a:rPr lang="ko-KR" altLang="en-US" sz="1600" dirty="0">
+                <a:latin typeface="D2Coding" panose="020B0609020101020101" pitchFamily="49" charset="-127"/>
+                <a:ea typeface="D2Coding" panose="020B0609020101020101" pitchFamily="49" charset="-127"/>
+              </a:rPr>
+              <a:t>사용자가 서비스에 질문</a:t>
+            </a:r>
+            <a:r>
+              <a:rPr lang="en-US" altLang="ko-KR" sz="1600" dirty="0">
+                <a:latin typeface="D2Coding" panose="020B0609020101020101" pitchFamily="49" charset="-127"/>
+                <a:ea typeface="D2Coding" panose="020B0609020101020101" pitchFamily="49" charset="-127"/>
+              </a:rPr>
+              <a:t>(</a:t>
+            </a:r>
+            <a:r>
+              <a:rPr lang="ko-KR" altLang="en-US" sz="1600" dirty="0">
+                <a:latin typeface="D2Coding" panose="020B0609020101020101" pitchFamily="49" charset="-127"/>
+                <a:ea typeface="D2Coding" panose="020B0609020101020101" pitchFamily="49" charset="-127"/>
+              </a:rPr>
+              <a:t>예</a:t>
+            </a:r>
+            <a:r>
+              <a:rPr lang="en-US" altLang="ko-KR" sz="1600" dirty="0">
+                <a:latin typeface="D2Coding" panose="020B0609020101020101" pitchFamily="49" charset="-127"/>
+                <a:ea typeface="D2Coding" panose="020B0609020101020101" pitchFamily="49" charset="-127"/>
+              </a:rPr>
+              <a:t>: "</a:t>
+            </a:r>
+            <a:r>
+              <a:rPr lang="ko-KR" altLang="en-US" sz="1600" dirty="0" err="1">
+                <a:latin typeface="D2Coding" panose="020B0609020101020101" pitchFamily="49" charset="-127"/>
+                <a:ea typeface="D2Coding" panose="020B0609020101020101" pitchFamily="49" charset="-127"/>
+              </a:rPr>
+              <a:t>랭체인이</a:t>
+            </a:r>
+            <a:r>
+              <a:rPr lang="ko-KR" altLang="en-US" sz="1600" dirty="0">
+                <a:latin typeface="D2Coding" panose="020B0609020101020101" pitchFamily="49" charset="-127"/>
+                <a:ea typeface="D2Coding" panose="020B0609020101020101" pitchFamily="49" charset="-127"/>
+              </a:rPr>
+              <a:t> </a:t>
+            </a:r>
+            <a:r>
+              <a:rPr lang="ko-KR" altLang="en-US" sz="1600" dirty="0" err="1">
+                <a:latin typeface="D2Coding" panose="020B0609020101020101" pitchFamily="49" charset="-127"/>
+                <a:ea typeface="D2Coding" panose="020B0609020101020101" pitchFamily="49" charset="-127"/>
+              </a:rPr>
+              <a:t>뭔가요</a:t>
+            </a:r>
+            <a:r>
+              <a:rPr lang="en-US" altLang="ko-KR" sz="1600" dirty="0">
+                <a:latin typeface="D2Coding" panose="020B0609020101020101" pitchFamily="49" charset="-127"/>
+                <a:ea typeface="D2Coding" panose="020B0609020101020101" pitchFamily="49" charset="-127"/>
+              </a:rPr>
+              <a:t>?")</a:t>
+            </a:r>
+          </a:p>
+          <a:p>
+            <a:pPr marL="342900" indent="-342900">
+              <a:lnSpc>
+                <a:spcPct val="150000"/>
+              </a:lnSpc>
+              <a:buFont typeface="+mj-lt"/>
+              <a:buAutoNum type="arabicPeriod"/>
+            </a:pPr>
+            <a:endParaRPr lang="en-US" altLang="ko-KR" sz="1200" dirty="0">
+              <a:latin typeface="D2Coding" panose="020B0609020101020101" pitchFamily="49" charset="-127"/>
+              <a:ea typeface="D2Coding" panose="020B0609020101020101" pitchFamily="49" charset="-127"/>
+            </a:endParaRPr>
+          </a:p>
+          <a:p>
+            <a:pPr marL="342900" indent="-342900">
+              <a:lnSpc>
+                <a:spcPct val="150000"/>
+              </a:lnSpc>
+              <a:buFont typeface="+mj-lt"/>
+              <a:buAutoNum type="arabicPeriod"/>
+            </a:pPr>
+            <a:r>
+              <a:rPr lang="en-US" altLang="ko-KR" sz="1600" b="1" dirty="0">
+                <a:latin typeface="D2Coding" panose="020B0609020101020101" pitchFamily="49" charset="-127"/>
+                <a:ea typeface="D2Coding" panose="020B0609020101020101" pitchFamily="49" charset="-127"/>
+              </a:rPr>
+              <a:t>RETRIEVE (</a:t>
+            </a:r>
+            <a:r>
+              <a:rPr lang="ko-KR" altLang="en-US" sz="1600" b="1" dirty="0">
+                <a:latin typeface="D2Coding" panose="020B0609020101020101" pitchFamily="49" charset="-127"/>
+                <a:ea typeface="D2Coding" panose="020B0609020101020101" pitchFamily="49" charset="-127"/>
+              </a:rPr>
+              <a:t>벡터 검색 단계</a:t>
+            </a:r>
+            <a:r>
+              <a:rPr lang="en-US" altLang="ko-KR" sz="1600" b="1" dirty="0">
+                <a:latin typeface="D2Coding" panose="020B0609020101020101" pitchFamily="49" charset="-127"/>
+                <a:ea typeface="D2Coding" panose="020B0609020101020101" pitchFamily="49" charset="-127"/>
+              </a:rPr>
+              <a:t>) </a:t>
+            </a:r>
+            <a:r>
+              <a:rPr lang="en-US" altLang="ko-KR" sz="1600" dirty="0">
+                <a:latin typeface="D2Coding" panose="020B0609020101020101" pitchFamily="49" charset="-127"/>
+                <a:ea typeface="D2Coding" panose="020B0609020101020101" pitchFamily="49" charset="-127"/>
+              </a:rPr>
+              <a:t>: </a:t>
+            </a:r>
+            <a:r>
+              <a:rPr lang="ko-KR" altLang="en-US" sz="1600" dirty="0">
+                <a:latin typeface="D2Coding" panose="020B0609020101020101" pitchFamily="49" charset="-127"/>
+                <a:ea typeface="D2Coding" panose="020B0609020101020101" pitchFamily="49" charset="-127"/>
+              </a:rPr>
+              <a:t>질문을 </a:t>
+            </a:r>
+            <a:r>
+              <a:rPr lang="ko-KR" altLang="en-US" sz="1600" dirty="0" err="1">
+                <a:latin typeface="D2Coding" panose="020B0609020101020101" pitchFamily="49" charset="-127"/>
+                <a:ea typeface="D2Coding" panose="020B0609020101020101" pitchFamily="49" charset="-127"/>
+              </a:rPr>
+              <a:t>임베딩</a:t>
+            </a:r>
+            <a:r>
+              <a:rPr lang="ko-KR" altLang="en-US" sz="1600" dirty="0">
+                <a:latin typeface="D2Coding" panose="020B0609020101020101" pitchFamily="49" charset="-127"/>
+                <a:ea typeface="D2Coding" panose="020B0609020101020101" pitchFamily="49" charset="-127"/>
+              </a:rPr>
+              <a:t> 모델</a:t>
+            </a:r>
+            <a:r>
+              <a:rPr lang="en-US" altLang="ko-KR" sz="1600" dirty="0">
+                <a:latin typeface="D2Coding" panose="020B0609020101020101" pitchFamily="49" charset="-127"/>
+                <a:ea typeface="D2Coding" panose="020B0609020101020101" pitchFamily="49" charset="-127"/>
+              </a:rPr>
+              <a:t>(all-MiniLM-L6-v2)</a:t>
+            </a:r>
+            <a:r>
+              <a:rPr lang="ko-KR" altLang="en-US" sz="1600" dirty="0">
+                <a:latin typeface="D2Coding" panose="020B0609020101020101" pitchFamily="49" charset="-127"/>
+                <a:ea typeface="D2Coding" panose="020B0609020101020101" pitchFamily="49" charset="-127"/>
+              </a:rPr>
+              <a:t>을 통해 숫자로 바꾼 뒤</a:t>
+            </a:r>
+            <a:r>
+              <a:rPr lang="en-US" altLang="ko-KR" sz="1600" dirty="0">
+                <a:latin typeface="D2Coding" panose="020B0609020101020101" pitchFamily="49" charset="-127"/>
+                <a:ea typeface="D2Coding" panose="020B0609020101020101" pitchFamily="49" charset="-127"/>
+              </a:rPr>
+              <a:t>, Vector DB(</a:t>
+            </a:r>
+            <a:r>
+              <a:rPr lang="en-US" altLang="ko-KR" sz="1600" dirty="0" err="1">
+                <a:latin typeface="D2Coding" panose="020B0609020101020101" pitchFamily="49" charset="-127"/>
+                <a:ea typeface="D2Coding" panose="020B0609020101020101" pitchFamily="49" charset="-127"/>
+              </a:rPr>
+              <a:t>Supabase</a:t>
+            </a:r>
+            <a:r>
+              <a:rPr lang="en-US" altLang="ko-KR" sz="1600" dirty="0">
+                <a:latin typeface="D2Coding" panose="020B0609020101020101" pitchFamily="49" charset="-127"/>
+                <a:ea typeface="D2Coding" panose="020B0609020101020101" pitchFamily="49" charset="-127"/>
+              </a:rPr>
+              <a:t>/</a:t>
+            </a:r>
+            <a:r>
+              <a:rPr lang="en-US" altLang="ko-KR" sz="1600" dirty="0" err="1">
+                <a:latin typeface="D2Coding" panose="020B0609020101020101" pitchFamily="49" charset="-127"/>
+                <a:ea typeface="D2Coding" panose="020B0609020101020101" pitchFamily="49" charset="-127"/>
+              </a:rPr>
+              <a:t>pgvector</a:t>
+            </a:r>
+            <a:r>
+              <a:rPr lang="en-US" altLang="ko-KR" sz="1600" dirty="0">
+                <a:latin typeface="D2Coding" panose="020B0609020101020101" pitchFamily="49" charset="-127"/>
+                <a:ea typeface="D2Coding" panose="020B0609020101020101" pitchFamily="49" charset="-127"/>
+              </a:rPr>
+              <a:t>)</a:t>
+            </a:r>
+            <a:r>
+              <a:rPr lang="ko-KR" altLang="en-US" sz="1600" dirty="0">
+                <a:latin typeface="D2Coding" panose="020B0609020101020101" pitchFamily="49" charset="-127"/>
+                <a:ea typeface="D2Coding" panose="020B0609020101020101" pitchFamily="49" charset="-127"/>
+              </a:rPr>
+              <a:t>에 저장된 수많은 문서 조각 중 가장 유사도가 높은 핵심 조각</a:t>
+            </a:r>
+            <a:r>
+              <a:rPr lang="en-US" altLang="ko-KR" sz="1600" dirty="0">
+                <a:latin typeface="D2Coding" panose="020B0609020101020101" pitchFamily="49" charset="-127"/>
+                <a:ea typeface="D2Coding" panose="020B0609020101020101" pitchFamily="49" charset="-127"/>
+              </a:rPr>
+              <a:t>(</a:t>
+            </a:r>
+            <a:r>
+              <a:rPr lang="ko-KR" altLang="en-US" sz="1600" dirty="0">
+                <a:latin typeface="D2Coding" panose="020B0609020101020101" pitchFamily="49" charset="-127"/>
+                <a:ea typeface="D2Coding" panose="020B0609020101020101" pitchFamily="49" charset="-127"/>
+              </a:rPr>
+              <a:t>파란색으로 </a:t>
+            </a:r>
+            <a:r>
+              <a:rPr lang="ko-KR" altLang="en-US" sz="1600" dirty="0" err="1">
+                <a:latin typeface="D2Coding" panose="020B0609020101020101" pitchFamily="49" charset="-127"/>
+                <a:ea typeface="D2Coding" panose="020B0609020101020101" pitchFamily="49" charset="-127"/>
+              </a:rPr>
+              <a:t>하이라이트된</a:t>
+            </a:r>
+            <a:r>
+              <a:rPr lang="ko-KR" altLang="en-US" sz="1600" dirty="0">
+                <a:latin typeface="D2Coding" panose="020B0609020101020101" pitchFamily="49" charset="-127"/>
+                <a:ea typeface="D2Coding" panose="020B0609020101020101" pitchFamily="49" charset="-127"/>
+              </a:rPr>
+              <a:t> 칸들</a:t>
+            </a:r>
+            <a:r>
+              <a:rPr lang="en-US" altLang="ko-KR" sz="1600" dirty="0">
+                <a:latin typeface="D2Coding" panose="020B0609020101020101" pitchFamily="49" charset="-127"/>
+                <a:ea typeface="D2Coding" panose="020B0609020101020101" pitchFamily="49" charset="-127"/>
+              </a:rPr>
+              <a:t>)</a:t>
+            </a:r>
+            <a:r>
+              <a:rPr lang="ko-KR" altLang="en-US" sz="1600" dirty="0">
+                <a:latin typeface="D2Coding" panose="020B0609020101020101" pitchFamily="49" charset="-127"/>
+                <a:ea typeface="D2Coding" panose="020B0609020101020101" pitchFamily="49" charset="-127"/>
+              </a:rPr>
+              <a:t>만 돋보기로 빠르게 찾아냄</a:t>
+            </a:r>
+            <a:r>
+              <a:rPr lang="en-US" altLang="ko-KR" sz="1600" dirty="0">
+                <a:latin typeface="D2Coding" panose="020B0609020101020101" pitchFamily="49" charset="-127"/>
+                <a:ea typeface="D2Coding" panose="020B0609020101020101" pitchFamily="49" charset="-127"/>
+              </a:rPr>
+              <a:t>(Retrieve)</a:t>
+            </a:r>
+          </a:p>
+          <a:p>
+            <a:pPr marL="342900" indent="-342900">
+              <a:lnSpc>
+                <a:spcPct val="150000"/>
+              </a:lnSpc>
+              <a:buFont typeface="+mj-lt"/>
+              <a:buAutoNum type="arabicPeriod"/>
+            </a:pPr>
+            <a:endParaRPr lang="en-US" altLang="ko-KR" sz="1200" dirty="0">
+              <a:latin typeface="D2Coding" panose="020B0609020101020101" pitchFamily="49" charset="-127"/>
+              <a:ea typeface="D2Coding" panose="020B0609020101020101" pitchFamily="49" charset="-127"/>
+            </a:endParaRPr>
+          </a:p>
+          <a:p>
+            <a:pPr marL="342900" indent="-342900">
+              <a:lnSpc>
+                <a:spcPct val="150000"/>
+              </a:lnSpc>
+              <a:buFont typeface="+mj-lt"/>
+              <a:buAutoNum type="arabicPeriod"/>
+            </a:pPr>
+            <a:r>
+              <a:rPr lang="en-US" altLang="ko-KR" sz="1600" b="1" dirty="0">
+                <a:latin typeface="D2Coding" panose="020B0609020101020101" pitchFamily="49" charset="-127"/>
+                <a:ea typeface="D2Coding" panose="020B0609020101020101" pitchFamily="49" charset="-127"/>
+              </a:rPr>
+              <a:t>PROMPT (</a:t>
+            </a:r>
+            <a:r>
+              <a:rPr lang="ko-KR" altLang="en-US" sz="1600" b="1" dirty="0">
+                <a:latin typeface="D2Coding" panose="020B0609020101020101" pitchFamily="49" charset="-127"/>
+                <a:ea typeface="D2Coding" panose="020B0609020101020101" pitchFamily="49" charset="-127"/>
+              </a:rPr>
+              <a:t>컨텍스트 결합 및 프롬프트 생성</a:t>
+            </a:r>
+            <a:r>
+              <a:rPr lang="en-US" altLang="ko-KR" sz="1600" b="1" dirty="0">
+                <a:latin typeface="D2Coding" panose="020B0609020101020101" pitchFamily="49" charset="-127"/>
+                <a:ea typeface="D2Coding" panose="020B0609020101020101" pitchFamily="49" charset="-127"/>
+              </a:rPr>
+              <a:t>)</a:t>
+            </a:r>
+            <a:r>
+              <a:rPr lang="en-US" altLang="ko-KR" sz="1600" dirty="0">
+                <a:latin typeface="D2Coding" panose="020B0609020101020101" pitchFamily="49" charset="-127"/>
+                <a:ea typeface="D2Coding" panose="020B0609020101020101" pitchFamily="49" charset="-127"/>
+              </a:rPr>
+              <a:t> : </a:t>
+            </a:r>
+            <a:r>
+              <a:rPr lang="ko-KR" altLang="en-US" sz="1600" dirty="0">
+                <a:latin typeface="D2Coding" panose="020B0609020101020101" pitchFamily="49" charset="-127"/>
+                <a:ea typeface="D2Coding" panose="020B0609020101020101" pitchFamily="49" charset="-127"/>
+              </a:rPr>
+              <a:t>사용자 질문</a:t>
+            </a:r>
+            <a:r>
+              <a:rPr lang="en-US" altLang="ko-KR" sz="1600" dirty="0">
+                <a:latin typeface="D2Coding" panose="020B0609020101020101" pitchFamily="49" charset="-127"/>
+                <a:ea typeface="D2Coding" panose="020B0609020101020101" pitchFamily="49" charset="-127"/>
+              </a:rPr>
+              <a:t>(Question)</a:t>
+            </a:r>
+            <a:r>
+              <a:rPr lang="ko-KR" altLang="en-US" sz="1600" dirty="0">
+                <a:latin typeface="D2Coding" panose="020B0609020101020101" pitchFamily="49" charset="-127"/>
+                <a:ea typeface="D2Coding" panose="020B0609020101020101" pitchFamily="49" charset="-127"/>
+              </a:rPr>
+              <a:t>과 </a:t>
+            </a:r>
+            <a:r>
+              <a:rPr lang="en-US" altLang="ko-KR" sz="1600" dirty="0">
+                <a:latin typeface="D2Coding" panose="020B0609020101020101" pitchFamily="49" charset="-127"/>
+                <a:ea typeface="D2Coding" panose="020B0609020101020101" pitchFamily="49" charset="-127"/>
+              </a:rPr>
+              <a:t>Vector DB</a:t>
+            </a:r>
+            <a:r>
+              <a:rPr lang="ko-KR" altLang="en-US" sz="1600" dirty="0">
+                <a:latin typeface="D2Coding" panose="020B0609020101020101" pitchFamily="49" charset="-127"/>
+                <a:ea typeface="D2Coding" panose="020B0609020101020101" pitchFamily="49" charset="-127"/>
+              </a:rPr>
+              <a:t>에서 끄집어낸 참고 문서 조각</a:t>
+            </a:r>
+            <a:r>
+              <a:rPr lang="en-US" altLang="ko-KR" sz="1600" dirty="0">
+                <a:latin typeface="D2Coding" panose="020B0609020101020101" pitchFamily="49" charset="-127"/>
+                <a:ea typeface="D2Coding" panose="020B0609020101020101" pitchFamily="49" charset="-127"/>
+              </a:rPr>
+              <a:t>(Retrieve)</a:t>
+            </a:r>
+            <a:r>
+              <a:rPr lang="ko-KR" altLang="en-US" sz="1600" dirty="0">
+                <a:latin typeface="D2Coding" panose="020B0609020101020101" pitchFamily="49" charset="-127"/>
+                <a:ea typeface="D2Coding" panose="020B0609020101020101" pitchFamily="49" charset="-127"/>
+              </a:rPr>
+              <a:t>이 위아래 화살표를 통해 </a:t>
+            </a:r>
+            <a:r>
+              <a:rPr lang="en-US" altLang="ko-KR" sz="1600" dirty="0">
+                <a:latin typeface="D2Coding" panose="020B0609020101020101" pitchFamily="49" charset="-127"/>
+                <a:ea typeface="D2Coding" panose="020B0609020101020101" pitchFamily="49" charset="-127"/>
+              </a:rPr>
+              <a:t>PROMPT</a:t>
+            </a:r>
+            <a:r>
+              <a:rPr lang="ko-KR" altLang="en-US" sz="1600" dirty="0">
+                <a:latin typeface="D2Coding" panose="020B0609020101020101" pitchFamily="49" charset="-127"/>
+                <a:ea typeface="D2Coding" panose="020B0609020101020101" pitchFamily="49" charset="-127"/>
+              </a:rPr>
+              <a:t>라는 하나의 주머니로 합쳐지는 단계로 </a:t>
+            </a:r>
+            <a:r>
+              <a:rPr lang="en-US" altLang="ko-KR" sz="1600" dirty="0">
+                <a:latin typeface="D2Coding" panose="020B0609020101020101" pitchFamily="49" charset="-127"/>
+                <a:ea typeface="D2Coding" panose="020B0609020101020101" pitchFamily="49" charset="-127"/>
+              </a:rPr>
+              <a:t>LLM</a:t>
+            </a:r>
+            <a:r>
+              <a:rPr lang="ko-KR" altLang="en-US" sz="1600" dirty="0">
+                <a:latin typeface="D2Coding" panose="020B0609020101020101" pitchFamily="49" charset="-127"/>
+                <a:ea typeface="D2Coding" panose="020B0609020101020101" pitchFamily="49" charset="-127"/>
+              </a:rPr>
+              <a:t>에게 무작정 답을 달라고 하는 게 아니라</a:t>
+            </a:r>
+            <a:r>
+              <a:rPr lang="en-US" altLang="ko-KR" sz="1600" dirty="0">
+                <a:latin typeface="D2Coding" panose="020B0609020101020101" pitchFamily="49" charset="-127"/>
+                <a:ea typeface="D2Coding" panose="020B0609020101020101" pitchFamily="49" charset="-127"/>
+              </a:rPr>
+              <a:t>, "</a:t>
+            </a:r>
+            <a:r>
+              <a:rPr lang="ko-KR" altLang="en-US" sz="1600" dirty="0">
+                <a:latin typeface="D2Coding" panose="020B0609020101020101" pitchFamily="49" charset="-127"/>
+                <a:ea typeface="D2Coding" panose="020B0609020101020101" pitchFamily="49" charset="-127"/>
+              </a:rPr>
+              <a:t>다음 </a:t>
+            </a:r>
+            <a:r>
+              <a:rPr lang="en-US" altLang="ko-KR" sz="1600" dirty="0">
+                <a:latin typeface="D2Coding" panose="020B0609020101020101" pitchFamily="49" charset="-127"/>
+                <a:ea typeface="D2Coding" panose="020B0609020101020101" pitchFamily="49" charset="-127"/>
+              </a:rPr>
+              <a:t>[</a:t>
+            </a:r>
+            <a:r>
+              <a:rPr lang="ko-KR" altLang="en-US" sz="1600" dirty="0">
+                <a:latin typeface="D2Coding" panose="020B0609020101020101" pitchFamily="49" charset="-127"/>
+                <a:ea typeface="D2Coding" panose="020B0609020101020101" pitchFamily="49" charset="-127"/>
+              </a:rPr>
+              <a:t>참고 문서</a:t>
+            </a:r>
+            <a:r>
+              <a:rPr lang="en-US" altLang="ko-KR" sz="1600" dirty="0">
+                <a:latin typeface="D2Coding" panose="020B0609020101020101" pitchFamily="49" charset="-127"/>
+                <a:ea typeface="D2Coding" panose="020B0609020101020101" pitchFamily="49" charset="-127"/>
+              </a:rPr>
+              <a:t>]</a:t>
+            </a:r>
+            <a:r>
+              <a:rPr lang="ko-KR" altLang="en-US" sz="1600" dirty="0">
+                <a:latin typeface="D2Coding" panose="020B0609020101020101" pitchFamily="49" charset="-127"/>
+                <a:ea typeface="D2Coding" panose="020B0609020101020101" pitchFamily="49" charset="-127"/>
+              </a:rPr>
+              <a:t>를 바탕으로 </a:t>
+            </a:r>
+            <a:r>
+              <a:rPr lang="en-US" altLang="ko-KR" sz="1600" dirty="0">
+                <a:latin typeface="D2Coding" panose="020B0609020101020101" pitchFamily="49" charset="-127"/>
+                <a:ea typeface="D2Coding" panose="020B0609020101020101" pitchFamily="49" charset="-127"/>
+              </a:rPr>
+              <a:t>[</a:t>
+            </a:r>
+            <a:r>
+              <a:rPr lang="ko-KR" altLang="en-US" sz="1600" dirty="0">
+                <a:latin typeface="D2Coding" panose="020B0609020101020101" pitchFamily="49" charset="-127"/>
+                <a:ea typeface="D2Coding" panose="020B0609020101020101" pitchFamily="49" charset="-127"/>
+              </a:rPr>
+              <a:t>사용자의 질문</a:t>
+            </a:r>
+            <a:r>
+              <a:rPr lang="en-US" altLang="ko-KR" sz="1600" dirty="0">
+                <a:latin typeface="D2Coding" panose="020B0609020101020101" pitchFamily="49" charset="-127"/>
+                <a:ea typeface="D2Coding" panose="020B0609020101020101" pitchFamily="49" charset="-127"/>
+              </a:rPr>
+              <a:t>]</a:t>
+            </a:r>
+            <a:r>
+              <a:rPr lang="ko-KR" altLang="en-US" sz="1600" dirty="0">
+                <a:latin typeface="D2Coding" panose="020B0609020101020101" pitchFamily="49" charset="-127"/>
+                <a:ea typeface="D2Coding" panose="020B0609020101020101" pitchFamily="49" charset="-127"/>
+              </a:rPr>
+              <a:t>에 솔직하게 답해줘</a:t>
+            </a:r>
+            <a:r>
+              <a:rPr lang="en-US" altLang="ko-KR" sz="1600" dirty="0">
+                <a:latin typeface="D2Coding" panose="020B0609020101020101" pitchFamily="49" charset="-127"/>
+                <a:ea typeface="D2Coding" panose="020B0609020101020101" pitchFamily="49" charset="-127"/>
+              </a:rPr>
+              <a:t>"</a:t>
+            </a:r>
+            <a:r>
+              <a:rPr lang="ko-KR" altLang="en-US" sz="1600" dirty="0">
+                <a:latin typeface="D2Coding" panose="020B0609020101020101" pitchFamily="49" charset="-127"/>
+                <a:ea typeface="D2Coding" panose="020B0609020101020101" pitchFamily="49" charset="-127"/>
+              </a:rPr>
+              <a:t>라는 형태의 완성된 지시서</a:t>
+            </a:r>
+            <a:r>
+              <a:rPr lang="en-US" altLang="ko-KR" sz="1600" dirty="0">
+                <a:latin typeface="D2Coding" panose="020B0609020101020101" pitchFamily="49" charset="-127"/>
+                <a:ea typeface="D2Coding" panose="020B0609020101020101" pitchFamily="49" charset="-127"/>
+              </a:rPr>
+              <a:t>(</a:t>
+            </a:r>
+            <a:r>
+              <a:rPr lang="ko-KR" altLang="en-US" sz="1600" dirty="0">
+                <a:latin typeface="D2Coding" panose="020B0609020101020101" pitchFamily="49" charset="-127"/>
+                <a:ea typeface="D2Coding" panose="020B0609020101020101" pitchFamily="49" charset="-127"/>
+              </a:rPr>
+              <a:t>프롬프트</a:t>
+            </a:r>
+            <a:r>
+              <a:rPr lang="en-US" altLang="ko-KR" sz="1600" dirty="0">
+                <a:latin typeface="D2Coding" panose="020B0609020101020101" pitchFamily="49" charset="-127"/>
+                <a:ea typeface="D2Coding" panose="020B0609020101020101" pitchFamily="49" charset="-127"/>
+              </a:rPr>
+              <a:t>)</a:t>
+            </a:r>
+            <a:r>
+              <a:rPr lang="ko-KR" altLang="en-US" sz="1600" dirty="0">
+                <a:latin typeface="D2Coding" panose="020B0609020101020101" pitchFamily="49" charset="-127"/>
+                <a:ea typeface="D2Coding" panose="020B0609020101020101" pitchFamily="49" charset="-127"/>
+              </a:rPr>
+              <a:t>를 조립하는 단계</a:t>
+            </a:r>
+            <a:endParaRPr lang="en-US" altLang="ko-KR" sz="1600" dirty="0">
+              <a:latin typeface="D2Coding" panose="020B0609020101020101" pitchFamily="49" charset="-127"/>
+              <a:ea typeface="D2Coding" panose="020B0609020101020101" pitchFamily="49" charset="-127"/>
+            </a:endParaRPr>
+          </a:p>
+          <a:p>
+            <a:pPr marL="342900" indent="-342900">
+              <a:lnSpc>
+                <a:spcPct val="150000"/>
+              </a:lnSpc>
+              <a:buFont typeface="+mj-lt"/>
+              <a:buAutoNum type="arabicPeriod"/>
+            </a:pPr>
+            <a:endParaRPr lang="en-US" altLang="ko-KR" sz="1200" dirty="0">
+              <a:latin typeface="D2Coding" panose="020B0609020101020101" pitchFamily="49" charset="-127"/>
+              <a:ea typeface="D2Coding" panose="020B0609020101020101" pitchFamily="49" charset="-127"/>
+            </a:endParaRPr>
+          </a:p>
+          <a:p>
+            <a:pPr marL="342900" indent="-342900">
+              <a:lnSpc>
+                <a:spcPct val="150000"/>
+              </a:lnSpc>
+              <a:buFont typeface="+mj-lt"/>
+              <a:buAutoNum type="arabicPeriod"/>
+            </a:pPr>
+            <a:r>
+              <a:rPr lang="en-US" altLang="ko-KR" sz="1600" b="1" dirty="0">
+                <a:latin typeface="D2Coding" panose="020B0609020101020101" pitchFamily="49" charset="-127"/>
+                <a:ea typeface="D2Coding" panose="020B0609020101020101" pitchFamily="49" charset="-127"/>
+              </a:rPr>
+              <a:t>LLM &amp; Answer (</a:t>
+            </a:r>
+            <a:r>
+              <a:rPr lang="ko-KR" altLang="en-US" sz="1600" b="1" dirty="0">
+                <a:latin typeface="D2Coding" panose="020B0609020101020101" pitchFamily="49" charset="-127"/>
+                <a:ea typeface="D2Coding" panose="020B0609020101020101" pitchFamily="49" charset="-127"/>
+              </a:rPr>
+              <a:t>생성 및 답변 전달</a:t>
+            </a:r>
+            <a:r>
+              <a:rPr lang="en-US" altLang="ko-KR" sz="1600" b="1" dirty="0">
+                <a:latin typeface="D2Coding" panose="020B0609020101020101" pitchFamily="49" charset="-127"/>
+                <a:ea typeface="D2Coding" panose="020B0609020101020101" pitchFamily="49" charset="-127"/>
+              </a:rPr>
+              <a:t>)</a:t>
+            </a:r>
+            <a:r>
+              <a:rPr lang="en-US" altLang="ko-KR" sz="1600" dirty="0">
+                <a:latin typeface="D2Coding" panose="020B0609020101020101" pitchFamily="49" charset="-127"/>
+                <a:ea typeface="D2Coding" panose="020B0609020101020101" pitchFamily="49" charset="-127"/>
+              </a:rPr>
+              <a:t> : </a:t>
+            </a:r>
+            <a:r>
+              <a:rPr lang="ko-KR" altLang="en-US" sz="1600" dirty="0">
+                <a:latin typeface="D2Coding" panose="020B0609020101020101" pitchFamily="49" charset="-127"/>
+                <a:ea typeface="D2Coding" panose="020B0609020101020101" pitchFamily="49" charset="-127"/>
+              </a:rPr>
+              <a:t>조립된 프롬프트가 대형 언어 모델</a:t>
+            </a:r>
+            <a:r>
+              <a:rPr lang="en-US" altLang="ko-KR" sz="1600" dirty="0">
+                <a:latin typeface="D2Coding" panose="020B0609020101020101" pitchFamily="49" charset="-127"/>
+                <a:ea typeface="D2Coding" panose="020B0609020101020101" pitchFamily="49" charset="-127"/>
+              </a:rPr>
+              <a:t>(LLM, </a:t>
+            </a:r>
+            <a:r>
+              <a:rPr lang="ko-KR" altLang="en-US" sz="1600" dirty="0">
+                <a:latin typeface="D2Coding" panose="020B0609020101020101" pitchFamily="49" charset="-127"/>
+                <a:ea typeface="D2Coding" panose="020B0609020101020101" pitchFamily="49" charset="-127"/>
+              </a:rPr>
+              <a:t>예</a:t>
+            </a:r>
+            <a:r>
+              <a:rPr lang="en-US" altLang="ko-KR" sz="1600" dirty="0">
+                <a:latin typeface="D2Coding" panose="020B0609020101020101" pitchFamily="49" charset="-127"/>
+                <a:ea typeface="D2Coding" panose="020B0609020101020101" pitchFamily="49" charset="-127"/>
+              </a:rPr>
+              <a:t>: </a:t>
+            </a:r>
+            <a:r>
+              <a:rPr lang="en-US" altLang="ko-KR" sz="1600" dirty="0" err="1">
+                <a:latin typeface="D2Coding" panose="020B0609020101020101" pitchFamily="49" charset="-127"/>
+                <a:ea typeface="D2Coding" panose="020B0609020101020101" pitchFamily="49" charset="-127"/>
+              </a:rPr>
+              <a:t>Groq</a:t>
+            </a:r>
+            <a:r>
+              <a:rPr lang="en-US" altLang="ko-KR" sz="1600" dirty="0">
+                <a:latin typeface="D2Coding" panose="020B0609020101020101" pitchFamily="49" charset="-127"/>
+                <a:ea typeface="D2Coding" panose="020B0609020101020101" pitchFamily="49" charset="-127"/>
+              </a:rPr>
+              <a:t>/Llama3 </a:t>
+            </a:r>
+            <a:r>
+              <a:rPr lang="ko-KR" altLang="en-US" sz="1600" dirty="0">
+                <a:latin typeface="D2Coding" panose="020B0609020101020101" pitchFamily="49" charset="-127"/>
+                <a:ea typeface="D2Coding" panose="020B0609020101020101" pitchFamily="49" charset="-127"/>
+              </a:rPr>
+              <a:t>등</a:t>
+            </a:r>
+            <a:r>
+              <a:rPr lang="en-US" altLang="ko-KR" sz="1600" dirty="0">
+                <a:latin typeface="D2Coding" panose="020B0609020101020101" pitchFamily="49" charset="-127"/>
+                <a:ea typeface="D2Coding" panose="020B0609020101020101" pitchFamily="49" charset="-127"/>
+              </a:rPr>
+              <a:t>)</a:t>
+            </a:r>
+            <a:r>
+              <a:rPr lang="ko-KR" altLang="en-US" sz="1600" dirty="0">
+                <a:latin typeface="D2Coding" panose="020B0609020101020101" pitchFamily="49" charset="-127"/>
+                <a:ea typeface="D2Coding" panose="020B0609020101020101" pitchFamily="49" charset="-127"/>
+              </a:rPr>
+              <a:t>로 전달하면 </a:t>
+            </a:r>
+            <a:r>
+              <a:rPr lang="en-US" altLang="ko-KR" sz="1600" dirty="0">
+                <a:latin typeface="D2Coding" panose="020B0609020101020101" pitchFamily="49" charset="-127"/>
+                <a:ea typeface="D2Coding" panose="020B0609020101020101" pitchFamily="49" charset="-127"/>
+              </a:rPr>
+              <a:t>LLM</a:t>
+            </a:r>
+            <a:r>
+              <a:rPr lang="ko-KR" altLang="en-US" sz="1600" dirty="0">
+                <a:latin typeface="D2Coding" panose="020B0609020101020101" pitchFamily="49" charset="-127"/>
+                <a:ea typeface="D2Coding" panose="020B0609020101020101" pitchFamily="49" charset="-127"/>
+              </a:rPr>
+              <a:t>은 자신이 아는 지식으로 소설을 쓰는</a:t>
+            </a:r>
+            <a:r>
+              <a:rPr lang="en-US" altLang="ko-KR" sz="1600" dirty="0">
+                <a:latin typeface="D2Coding" panose="020B0609020101020101" pitchFamily="49" charset="-127"/>
+                <a:ea typeface="D2Coding" panose="020B0609020101020101" pitchFamily="49" charset="-127"/>
+              </a:rPr>
+              <a:t>(</a:t>
+            </a:r>
+            <a:r>
+              <a:rPr lang="ko-KR" altLang="en-US" sz="1600" dirty="0">
+                <a:latin typeface="D2Coding" panose="020B0609020101020101" pitchFamily="49" charset="-127"/>
+                <a:ea typeface="D2Coding" panose="020B0609020101020101" pitchFamily="49" charset="-127"/>
+              </a:rPr>
+              <a:t>환각 현상</a:t>
+            </a:r>
+            <a:r>
+              <a:rPr lang="en-US" altLang="ko-KR" sz="1600" dirty="0">
+                <a:latin typeface="D2Coding" panose="020B0609020101020101" pitchFamily="49" charset="-127"/>
+                <a:ea typeface="D2Coding" panose="020B0609020101020101" pitchFamily="49" charset="-127"/>
+              </a:rPr>
+              <a:t>)</a:t>
+            </a:r>
+            <a:r>
+              <a:rPr lang="ko-KR" altLang="en-US" sz="1600" dirty="0">
+                <a:latin typeface="D2Coding" panose="020B0609020101020101" pitchFamily="49" charset="-127"/>
+                <a:ea typeface="D2Coding" panose="020B0609020101020101" pitchFamily="49" charset="-127"/>
+              </a:rPr>
+              <a:t>대신</a:t>
+            </a:r>
+            <a:r>
+              <a:rPr lang="en-US" altLang="ko-KR" sz="1600" dirty="0">
+                <a:latin typeface="D2Coding" panose="020B0609020101020101" pitchFamily="49" charset="-127"/>
+                <a:ea typeface="D2Coding" panose="020B0609020101020101" pitchFamily="49" charset="-127"/>
+              </a:rPr>
+              <a:t>, </a:t>
+            </a:r>
+            <a:r>
+              <a:rPr lang="ko-KR" altLang="en-US" sz="1600" dirty="0">
+                <a:latin typeface="D2Coding" panose="020B0609020101020101" pitchFamily="49" charset="-127"/>
+                <a:ea typeface="D2Coding" panose="020B0609020101020101" pitchFamily="49" charset="-127"/>
+              </a:rPr>
+              <a:t>주어지는 참고 문서를 기반으로 정확하고 정제된 최종 답변</a:t>
+            </a:r>
+            <a:r>
+              <a:rPr lang="en-US" altLang="ko-KR" sz="1600" dirty="0">
+                <a:latin typeface="D2Coding" panose="020B0609020101020101" pitchFamily="49" charset="-127"/>
+                <a:ea typeface="D2Coding" panose="020B0609020101020101" pitchFamily="49" charset="-127"/>
+              </a:rPr>
+              <a:t>(Answer)</a:t>
+            </a:r>
+            <a:r>
+              <a:rPr lang="ko-KR" altLang="en-US" sz="1600" dirty="0">
+                <a:latin typeface="D2Coding" panose="020B0609020101020101" pitchFamily="49" charset="-127"/>
+                <a:ea typeface="D2Coding" panose="020B0609020101020101" pitchFamily="49" charset="-127"/>
+              </a:rPr>
+              <a:t>을 작성하여 사용자에게 </a:t>
+            </a:r>
+            <a:r>
+              <a:rPr lang="en-US" altLang="ko-KR" sz="1600" dirty="0">
+                <a:latin typeface="D2Coding" panose="020B0609020101020101" pitchFamily="49" charset="-127"/>
+                <a:ea typeface="D2Coding" panose="020B0609020101020101" pitchFamily="49" charset="-127"/>
+              </a:rPr>
+              <a:t>Generate</a:t>
+            </a:r>
+          </a:p>
+        </p:txBody>
+      </p:sp>
+    </p:spTree>
+    <p:extLst>
+      <p:ext uri="{BB962C8B-B14F-4D97-AF65-F5344CB8AC3E}">
+        <p14:creationId xmlns:p14="http://schemas.microsoft.com/office/powerpoint/2010/main" val="3020969316"/>
+      </p:ext>
+    </p:extLst>
+  </p:cSld>
+  <p:clrMapOvr>
+    <a:masterClrMapping/>
+  </p:clrMapOvr>
+</p:sld>
+</file>
+
+<file path=ppt/slides/slide22.xml><?xml version="1.0" encoding="utf-8"?>
+<p:sld xmlns:a="http://schemas.openxmlformats.org/drawingml/2006/main" xmlns:r="http://schemas.openxmlformats.org/officeDocument/2006/relationships" xmlns:p="http://schemas.openxmlformats.org/presentationml/2006/main">
+  <p:cSld>
+    <p:spTree>
+      <p:nvGrpSpPr>
+        <p:cNvPr id="1" name="">
+          <a:extLst>
+            <a:ext uri="{FF2B5EF4-FFF2-40B4-BE49-F238E27FC236}">
+              <a16:creationId xmlns:a16="http://schemas.microsoft.com/office/drawing/2014/main" id="{7F6574E4-5B38-625B-D78F-F70F559CDB33}"/>
+            </a:ext>
+          </a:extLst>
+        </p:cNvPr>
+        <p:cNvGrpSpPr/>
+        <p:nvPr/>
+      </p:nvGrpSpPr>
+      <p:grpSpPr>
+        <a:xfrm>
+          <a:off x="0" y="0"/>
+          <a:ext cx="0" cy="0"/>
+          <a:chOff x="0" y="0"/>
+          <a:chExt cx="0" cy="0"/>
+        </a:xfrm>
+      </p:grpSpPr>
+      <p:sp>
+        <p:nvSpPr>
+          <p:cNvPr id="4" name="슬라이드 번호 개체 틀 3">
+            <a:extLst>
+              <a:ext uri="{FF2B5EF4-FFF2-40B4-BE49-F238E27FC236}">
+                <a16:creationId xmlns:a16="http://schemas.microsoft.com/office/drawing/2014/main" id="{E3A55706-A236-05A0-0081-1EBD57FACE57}"/>
+              </a:ext>
+            </a:extLst>
+          </p:cNvPr>
+          <p:cNvSpPr>
+            <a:spLocks noGrp="1"/>
+          </p:cNvSpPr>
+          <p:nvPr>
+            <p:ph type="sldNum" sz="quarter" idx="12"/>
+          </p:nvPr>
+        </p:nvSpPr>
+        <p:spPr>
+          <a:xfrm>
+            <a:off x="10514011" y="6036261"/>
+            <a:ext cx="753545" cy="365125"/>
+          </a:xfrm>
+        </p:spPr>
+        <p:txBody>
+          <a:bodyPr/>
+          <a:lstStyle/>
+          <a:p>
+            <a:fld id="{D57F1E4F-1CFF-5643-939E-217C01CDF565}" type="slidenum">
+              <a:rPr lang="en-US" smtClean="0"/>
+              <a:pPr/>
+              <a:t>22</a:t>
+            </a:fld>
+            <a:endParaRPr lang="en-US" dirty="0"/>
+          </a:p>
+        </p:txBody>
+      </p:sp>
+      <p:sp>
+        <p:nvSpPr>
+          <p:cNvPr id="3" name="제목 1">
+            <a:extLst>
+              <a:ext uri="{FF2B5EF4-FFF2-40B4-BE49-F238E27FC236}">
+                <a16:creationId xmlns:a16="http://schemas.microsoft.com/office/drawing/2014/main" id="{22F9FC71-E2BD-5A5C-7CCF-D928284288C0}"/>
+              </a:ext>
+            </a:extLst>
+          </p:cNvPr>
+          <p:cNvSpPr txBox="1">
+            <a:spLocks/>
+          </p:cNvSpPr>
+          <p:nvPr/>
+        </p:nvSpPr>
+        <p:spPr>
+          <a:xfrm>
+            <a:off x="475645" y="481983"/>
+            <a:ext cx="10353762" cy="766439"/>
+          </a:xfrm>
+          <a:prstGeom prst="rect">
+            <a:avLst/>
+          </a:prstGeom>
+        </p:spPr>
+        <p:txBody>
+          <a:bodyPr vert="horz" lIns="91440" tIns="45720" rIns="91440" bIns="45720" rtlCol="0" anchor="ctr">
+            <a:normAutofit/>
+          </a:bodyPr>
+          <a:lstStyle>
+            <a:lvl1pPr algn="ctr" defTabSz="914400" rtl="0" eaLnBrk="1" latinLnBrk="1" hangingPunct="1">
+              <a:lnSpc>
+                <a:spcPct val="90000"/>
+              </a:lnSpc>
+              <a:spcBef>
+                <a:spcPct val="0"/>
+              </a:spcBef>
+              <a:buNone/>
+              <a:defRPr sz="3200" kern="1200" cap="all" baseline="0">
+                <a:solidFill>
+                  <a:schemeClr val="tx1"/>
+                </a:solidFill>
+                <a:effectLst/>
+                <a:latin typeface="Batang" panose="02030600000101010101" pitchFamily="18" charset="-127"/>
+                <a:ea typeface="Batang" panose="02030600000101010101" pitchFamily="18" charset="-127"/>
+                <a:cs typeface="+mj-cs"/>
+              </a:defRPr>
+            </a:lvl1pPr>
+          </a:lstStyle>
+          <a:p>
+            <a:pPr algn="l"/>
+            <a:r>
+              <a:rPr lang="en-US" altLang="ko-KR" sz="2800" cap="none" dirty="0">
+                <a:solidFill>
+                  <a:schemeClr val="bg2">
+                    <a:lumMod val="25000"/>
+                  </a:schemeClr>
+                </a:solidFill>
+                <a:latin typeface="D2Coding" panose="020B0609020101020101" pitchFamily="49" charset="-127"/>
+                <a:ea typeface="D2Coding" panose="020B0609020101020101" pitchFamily="49" charset="-127"/>
+                <a:cs typeface="Segoe UI Light" panose="020B0502040204020203" pitchFamily="34" charset="0"/>
+              </a:rPr>
+              <a:t>RAG(</a:t>
+            </a:r>
+            <a:r>
+              <a:rPr lang="ko-KR" altLang="en-US" sz="2800" cap="none" dirty="0">
+                <a:solidFill>
+                  <a:schemeClr val="bg2">
+                    <a:lumMod val="25000"/>
+                  </a:schemeClr>
+                </a:solidFill>
+                <a:latin typeface="D2Coding" panose="020B0609020101020101" pitchFamily="49" charset="-127"/>
+                <a:ea typeface="D2Coding" panose="020B0609020101020101" pitchFamily="49" charset="-127"/>
+                <a:cs typeface="Segoe UI Light" panose="020B0502040204020203" pitchFamily="34" charset="0"/>
+              </a:rPr>
+              <a:t>검색 증강 생성</a:t>
+            </a:r>
+            <a:r>
+              <a:rPr lang="en-US" altLang="ko-KR" sz="2800" cap="none" dirty="0">
+                <a:solidFill>
+                  <a:schemeClr val="bg2">
+                    <a:lumMod val="25000"/>
+                  </a:schemeClr>
+                </a:solidFill>
+                <a:latin typeface="D2Coding" panose="020B0609020101020101" pitchFamily="49" charset="-127"/>
+                <a:ea typeface="D2Coding" panose="020B0609020101020101" pitchFamily="49" charset="-127"/>
+                <a:cs typeface="Segoe UI Light" panose="020B0502040204020203" pitchFamily="34" charset="0"/>
+              </a:rPr>
+              <a:t>, Retrieval-Augmented Generation)</a:t>
+            </a:r>
+            <a:endParaRPr lang="ko-KR" altLang="en-US" sz="2800" cap="none" dirty="0">
+              <a:solidFill>
+                <a:schemeClr val="bg2">
+                  <a:lumMod val="25000"/>
+                </a:schemeClr>
+              </a:solidFill>
+              <a:latin typeface="D2Coding" panose="020B0609020101020101" pitchFamily="49" charset="-127"/>
+              <a:ea typeface="D2Coding" panose="020B0609020101020101" pitchFamily="49" charset="-127"/>
+              <a:cs typeface="Segoe UI Light" panose="020B0502040204020203" pitchFamily="34" charset="0"/>
+            </a:endParaRPr>
+          </a:p>
+        </p:txBody>
+      </p:sp>
+      <p:pic>
+        <p:nvPicPr>
+          <p:cNvPr id="11268" name="Picture 4" descr="retrieval_diagram">
+            <a:extLst>
+              <a:ext uri="{FF2B5EF4-FFF2-40B4-BE49-F238E27FC236}">
+                <a16:creationId xmlns:a16="http://schemas.microsoft.com/office/drawing/2014/main" id="{A9CB697F-86C4-E9CB-25B3-0303A1737A02}"/>
+              </a:ext>
+            </a:extLst>
+          </p:cNvPr>
+          <p:cNvPicPr>
+            <a:picLocks noChangeAspect="1" noChangeArrowheads="1"/>
+          </p:cNvPicPr>
+          <p:nvPr/>
+        </p:nvPicPr>
+        <p:blipFill>
+          <a:blip r:embed="rId2">
+            <a:extLst>
+              <a:ext uri="{28A0092B-C50C-407E-A947-70E740481C1C}">
+                <a14:useLocalDpi xmlns:a14="http://schemas.microsoft.com/office/drawing/2010/main" val="0"/>
+              </a:ext>
+            </a:extLst>
+          </a:blip>
+          <a:srcRect/>
+          <a:stretch>
+            <a:fillRect/>
+          </a:stretch>
+        </p:blipFill>
+        <p:spPr bwMode="auto">
+          <a:xfrm>
+            <a:off x="1809749" y="2325181"/>
+            <a:ext cx="8055521" cy="4132650"/>
+          </a:xfrm>
+          <a:prstGeom prst="rect">
+            <a:avLst/>
+          </a:prstGeom>
+          <a:noFill/>
+          <a:extLst>
+            <a:ext uri="{909E8E84-426E-40DD-AFC4-6F175D3DCCD1}">
+              <a14:hiddenFill xmlns:a14="http://schemas.microsoft.com/office/drawing/2010/main">
+                <a:solidFill>
+                  <a:srgbClr val="FFFFFF"/>
+                </a:solidFill>
+              </a14:hiddenFill>
+            </a:ext>
+          </a:extLst>
+        </p:spPr>
+      </p:pic>
+      <p:sp>
+        <p:nvSpPr>
+          <p:cNvPr id="6" name="TextBox 5">
+            <a:extLst>
+              <a:ext uri="{FF2B5EF4-FFF2-40B4-BE49-F238E27FC236}">
+                <a16:creationId xmlns:a16="http://schemas.microsoft.com/office/drawing/2014/main" id="{D2AC66DF-E377-DCF9-5FCC-231B680E30FA}"/>
+              </a:ext>
+            </a:extLst>
+          </p:cNvPr>
+          <p:cNvSpPr txBox="1"/>
+          <p:nvPr/>
+        </p:nvSpPr>
+        <p:spPr>
+          <a:xfrm>
+            <a:off x="638175" y="1333411"/>
+            <a:ext cx="10858500" cy="584775"/>
+          </a:xfrm>
+          <a:prstGeom prst="rect">
+            <a:avLst/>
+          </a:prstGeom>
+          <a:noFill/>
+        </p:spPr>
+        <p:txBody>
+          <a:bodyPr wrap="square">
+            <a:spAutoFit/>
+          </a:bodyPr>
+          <a:lstStyle/>
+          <a:p>
+            <a:pPr marL="285750" indent="-285750">
+              <a:buFont typeface="Wingdings" panose="05000000000000000000" pitchFamily="2" charset="2"/>
+              <a:buChar char="v"/>
+            </a:pPr>
+            <a:r>
+              <a:rPr lang="en-US" altLang="ko-KR" sz="1600" dirty="0">
+                <a:latin typeface="D2Coding" panose="020B0609020101020101" pitchFamily="49" charset="-127"/>
+                <a:ea typeface="D2Coding" panose="020B0609020101020101" pitchFamily="49" charset="-127"/>
+              </a:rPr>
+              <a:t>"</a:t>
+            </a:r>
+            <a:r>
+              <a:rPr lang="ko-KR" altLang="en-US" sz="1600" dirty="0">
+                <a:latin typeface="D2Coding" panose="020B0609020101020101" pitchFamily="49" charset="-127"/>
+                <a:ea typeface="D2Coding" panose="020B0609020101020101" pitchFamily="49" charset="-127"/>
+              </a:rPr>
+              <a:t>만약 여러분 회사의 방대한 모든 </a:t>
+            </a:r>
+            <a:r>
+              <a:rPr lang="ko-KR" altLang="en-US" sz="1600" dirty="0" err="1">
+                <a:latin typeface="D2Coding" panose="020B0609020101020101" pitchFamily="49" charset="-127"/>
+                <a:ea typeface="D2Coding" panose="020B0609020101020101" pitchFamily="49" charset="-127"/>
+              </a:rPr>
+              <a:t>규정집</a:t>
+            </a:r>
+            <a:r>
+              <a:rPr lang="en-US" altLang="ko-KR" sz="1600" dirty="0">
+                <a:latin typeface="D2Coding" panose="020B0609020101020101" pitchFamily="49" charset="-127"/>
+                <a:ea typeface="D2Coding" panose="020B0609020101020101" pitchFamily="49" charset="-127"/>
+              </a:rPr>
+              <a:t>(Huge Quantity)</a:t>
+            </a:r>
+            <a:r>
+              <a:rPr lang="ko-KR" altLang="en-US" sz="1600" dirty="0">
+                <a:latin typeface="D2Coding" panose="020B0609020101020101" pitchFamily="49" charset="-127"/>
+                <a:ea typeface="D2Coding" panose="020B0609020101020101" pitchFamily="49" charset="-127"/>
+              </a:rPr>
+              <a:t>을 </a:t>
+            </a:r>
+            <a:r>
+              <a:rPr lang="en-US" altLang="ko-KR" sz="1600" dirty="0">
+                <a:latin typeface="D2Coding" panose="020B0609020101020101" pitchFamily="49" charset="-127"/>
+                <a:ea typeface="D2Coding" panose="020B0609020101020101" pitchFamily="49" charset="-127"/>
+              </a:rPr>
+              <a:t>LLM</a:t>
+            </a:r>
+            <a:r>
+              <a:rPr lang="ko-KR" altLang="en-US" sz="1600" dirty="0">
+                <a:latin typeface="D2Coding" panose="020B0609020101020101" pitchFamily="49" charset="-127"/>
+                <a:ea typeface="D2Coding" panose="020B0609020101020101" pitchFamily="49" charset="-127"/>
+              </a:rPr>
+              <a:t>에게 참고하라고 한다면</a:t>
+            </a:r>
+            <a:r>
+              <a:rPr lang="en-US" altLang="ko-KR" sz="1600" dirty="0">
+                <a:latin typeface="D2Coding" panose="020B0609020101020101" pitchFamily="49" charset="-127"/>
+                <a:ea typeface="D2Coding" panose="020B0609020101020101" pitchFamily="49" charset="-127"/>
+              </a:rPr>
+              <a:t>, </a:t>
+            </a:r>
+            <a:r>
+              <a:rPr lang="ko-KR" altLang="en-US" sz="1600" dirty="0">
+                <a:latin typeface="D2Coding" panose="020B0609020101020101" pitchFamily="49" charset="-127"/>
+                <a:ea typeface="D2Coding" panose="020B0609020101020101" pitchFamily="49" charset="-127"/>
+              </a:rPr>
+              <a:t>매번 수천 페이지를 복사해서 붙여 넣으실 건가요</a:t>
+            </a:r>
+            <a:r>
+              <a:rPr lang="en-US" altLang="ko-KR" sz="1600" dirty="0">
+                <a:latin typeface="D2Coding" panose="020B0609020101020101" pitchFamily="49" charset="-127"/>
+                <a:ea typeface="D2Coding" panose="020B0609020101020101" pitchFamily="49" charset="-127"/>
+              </a:rPr>
+              <a:t>? </a:t>
+            </a:r>
+            <a:r>
+              <a:rPr lang="ko-KR" altLang="en-US" sz="1600" dirty="0">
+                <a:latin typeface="D2Coding" panose="020B0609020101020101" pitchFamily="49" charset="-127"/>
+                <a:ea typeface="D2Coding" panose="020B0609020101020101" pitchFamily="49" charset="-127"/>
+              </a:rPr>
+              <a:t>불가능하겠죠</a:t>
+            </a:r>
+            <a:r>
+              <a:rPr lang="en-US" altLang="ko-KR" sz="1600" dirty="0">
+                <a:latin typeface="D2Coding" panose="020B0609020101020101" pitchFamily="49" charset="-127"/>
+                <a:ea typeface="D2Coding" panose="020B0609020101020101" pitchFamily="49" charset="-127"/>
+              </a:rPr>
+              <a:t>? </a:t>
+            </a:r>
+            <a:r>
+              <a:rPr lang="ko-KR" altLang="en-US" sz="1600" dirty="0">
+                <a:latin typeface="D2Coding" panose="020B0609020101020101" pitchFamily="49" charset="-127"/>
+                <a:ea typeface="D2Coding" panose="020B0609020101020101" pitchFamily="49" charset="-127"/>
+              </a:rPr>
+              <a:t>그래서 </a:t>
+            </a:r>
+            <a:r>
+              <a:rPr lang="en-US" altLang="ko-KR" sz="1600" dirty="0">
+                <a:latin typeface="D2Coding" panose="020B0609020101020101" pitchFamily="49" charset="-127"/>
+                <a:ea typeface="D2Coding" panose="020B0609020101020101" pitchFamily="49" charset="-127"/>
+              </a:rPr>
+              <a:t>'</a:t>
+            </a:r>
+            <a:r>
+              <a:rPr lang="ko-KR" altLang="en-US" sz="1600" dirty="0">
+                <a:latin typeface="D2Coding" panose="020B0609020101020101" pitchFamily="49" charset="-127"/>
+                <a:ea typeface="D2Coding" panose="020B0609020101020101" pitchFamily="49" charset="-127"/>
+              </a:rPr>
+              <a:t>정답 조각 고르기 기술</a:t>
+            </a:r>
+            <a:r>
+              <a:rPr lang="en-US" altLang="ko-KR" sz="1600" dirty="0">
+                <a:latin typeface="D2Coding" panose="020B0609020101020101" pitchFamily="49" charset="-127"/>
+                <a:ea typeface="D2Coding" panose="020B0609020101020101" pitchFamily="49" charset="-127"/>
+              </a:rPr>
+              <a:t>'</a:t>
+            </a:r>
+            <a:r>
+              <a:rPr lang="ko-KR" altLang="en-US" sz="1600" dirty="0">
+                <a:latin typeface="D2Coding" panose="020B0609020101020101" pitchFamily="49" charset="-127"/>
+                <a:ea typeface="D2Coding" panose="020B0609020101020101" pitchFamily="49" charset="-127"/>
+              </a:rPr>
+              <a:t>이 필요합니다</a:t>
+            </a:r>
+            <a:r>
+              <a:rPr lang="en-US" altLang="ko-KR" sz="1600" dirty="0">
+                <a:latin typeface="D2Coding" panose="020B0609020101020101" pitchFamily="49" charset="-127"/>
+                <a:ea typeface="D2Coding" panose="020B0609020101020101" pitchFamily="49" charset="-127"/>
+              </a:rPr>
+              <a:t>.“</a:t>
+            </a:r>
+            <a:endParaRPr lang="ko-KR" altLang="en-US" sz="1600" dirty="0"/>
+          </a:p>
+        </p:txBody>
+      </p:sp>
+    </p:spTree>
+    <p:extLst>
+      <p:ext uri="{BB962C8B-B14F-4D97-AF65-F5344CB8AC3E}">
+        <p14:creationId xmlns:p14="http://schemas.microsoft.com/office/powerpoint/2010/main" val="1008490805"/>
       </p:ext>
     </p:extLst>
   </p:cSld>
@@ -11167,6 +13761,755 @@
         <p:cNvPr id="1" name="">
           <a:extLst>
             <a:ext uri="{FF2B5EF4-FFF2-40B4-BE49-F238E27FC236}">
+              <a16:creationId xmlns:a16="http://schemas.microsoft.com/office/drawing/2014/main" id="{2AB0AB53-D16C-B5E3-5588-2D996C98D4FF}"/>
+            </a:ext>
+          </a:extLst>
+        </p:cNvPr>
+        <p:cNvGrpSpPr/>
+        <p:nvPr/>
+      </p:nvGrpSpPr>
+      <p:grpSpPr>
+        <a:xfrm>
+          <a:off x="0" y="0"/>
+          <a:ext cx="0" cy="0"/>
+          <a:chOff x="0" y="0"/>
+          <a:chExt cx="0" cy="0"/>
+        </a:xfrm>
+      </p:grpSpPr>
+      <p:sp>
+        <p:nvSpPr>
+          <p:cNvPr id="4" name="슬라이드 번호 개체 틀 3">
+            <a:extLst>
+              <a:ext uri="{FF2B5EF4-FFF2-40B4-BE49-F238E27FC236}">
+                <a16:creationId xmlns:a16="http://schemas.microsoft.com/office/drawing/2014/main" id="{CF89B22B-019E-7422-E8C9-75BC944DC5BD}"/>
+              </a:ext>
+            </a:extLst>
+          </p:cNvPr>
+          <p:cNvSpPr>
+            <a:spLocks noGrp="1"/>
+          </p:cNvSpPr>
+          <p:nvPr>
+            <p:ph type="sldNum" sz="quarter" idx="12"/>
+          </p:nvPr>
+        </p:nvSpPr>
+        <p:spPr>
+          <a:xfrm>
+            <a:off x="10514011" y="6036261"/>
+            <a:ext cx="753545" cy="365125"/>
+          </a:xfrm>
+        </p:spPr>
+        <p:txBody>
+          <a:bodyPr/>
+          <a:lstStyle/>
+          <a:p>
+            <a:fld id="{D57F1E4F-1CFF-5643-939E-217C01CDF565}" type="slidenum">
+              <a:rPr lang="en-US" smtClean="0"/>
+              <a:pPr/>
+              <a:t>5</a:t>
+            </a:fld>
+            <a:endParaRPr lang="en-US" dirty="0"/>
+          </a:p>
+        </p:txBody>
+      </p:sp>
+      <p:sp>
+        <p:nvSpPr>
+          <p:cNvPr id="3" name="제목 1">
+            <a:extLst>
+              <a:ext uri="{FF2B5EF4-FFF2-40B4-BE49-F238E27FC236}">
+                <a16:creationId xmlns:a16="http://schemas.microsoft.com/office/drawing/2014/main" id="{49423641-A831-F9DB-647F-E9692BB829EF}"/>
+              </a:ext>
+            </a:extLst>
+          </p:cNvPr>
+          <p:cNvSpPr txBox="1">
+            <a:spLocks/>
+          </p:cNvSpPr>
+          <p:nvPr/>
+        </p:nvSpPr>
+        <p:spPr>
+          <a:xfrm>
+            <a:off x="475645" y="481983"/>
+            <a:ext cx="10353762" cy="766439"/>
+          </a:xfrm>
+          <a:prstGeom prst="rect">
+            <a:avLst/>
+          </a:prstGeom>
+        </p:spPr>
+        <p:txBody>
+          <a:bodyPr vert="horz" lIns="91440" tIns="45720" rIns="91440" bIns="45720" rtlCol="0" anchor="ctr">
+            <a:normAutofit/>
+          </a:bodyPr>
+          <a:lstStyle>
+            <a:lvl1pPr algn="ctr" defTabSz="914400" rtl="0" eaLnBrk="1" latinLnBrk="1" hangingPunct="1">
+              <a:lnSpc>
+                <a:spcPct val="90000"/>
+              </a:lnSpc>
+              <a:spcBef>
+                <a:spcPct val="0"/>
+              </a:spcBef>
+              <a:buNone/>
+              <a:defRPr sz="3200" kern="1200" cap="all" baseline="0">
+                <a:solidFill>
+                  <a:schemeClr val="tx1"/>
+                </a:solidFill>
+                <a:effectLst/>
+                <a:latin typeface="Batang" panose="02030600000101010101" pitchFamily="18" charset="-127"/>
+                <a:ea typeface="Batang" panose="02030600000101010101" pitchFamily="18" charset="-127"/>
+                <a:cs typeface="+mj-cs"/>
+              </a:defRPr>
+            </a:lvl1pPr>
+          </a:lstStyle>
+          <a:p>
+            <a:pPr algn="l"/>
+            <a:r>
+              <a:rPr lang="en-US" altLang="ko-KR" sz="2800" cap="none" dirty="0">
+                <a:solidFill>
+                  <a:schemeClr val="bg2">
+                    <a:lumMod val="25000"/>
+                  </a:schemeClr>
+                </a:solidFill>
+                <a:latin typeface="D2Coding" panose="020B0609020101020101" pitchFamily="49" charset="-127"/>
+                <a:ea typeface="D2Coding" panose="020B0609020101020101" pitchFamily="49" charset="-127"/>
+                <a:cs typeface="Segoe UI Light" panose="020B0502040204020203" pitchFamily="34" charset="0"/>
+              </a:rPr>
+              <a:t>Basic RAG Pipeline</a:t>
+            </a:r>
+            <a:endParaRPr lang="ko-KR" altLang="en-US" sz="2800" cap="none" dirty="0">
+              <a:solidFill>
+                <a:schemeClr val="bg2">
+                  <a:lumMod val="25000"/>
+                </a:schemeClr>
+              </a:solidFill>
+              <a:latin typeface="D2Coding" panose="020B0609020101020101" pitchFamily="49" charset="-127"/>
+              <a:ea typeface="D2Coding" panose="020B0609020101020101" pitchFamily="49" charset="-127"/>
+              <a:cs typeface="Segoe UI Light" panose="020B0502040204020203" pitchFamily="34" charset="0"/>
+            </a:endParaRPr>
+          </a:p>
+        </p:txBody>
+      </p:sp>
+      <p:sp>
+        <p:nvSpPr>
+          <p:cNvPr id="2" name="AutoShape 2">
+            <a:extLst>
+              <a:ext uri="{FF2B5EF4-FFF2-40B4-BE49-F238E27FC236}">
+                <a16:creationId xmlns:a16="http://schemas.microsoft.com/office/drawing/2014/main" id="{86168D61-8A4C-F442-6ECB-29D2790DBB52}"/>
+              </a:ext>
+            </a:extLst>
+          </p:cNvPr>
+          <p:cNvSpPr>
+            <a:spLocks noChangeAspect="1" noChangeArrowheads="1"/>
+          </p:cNvSpPr>
+          <p:nvPr/>
+        </p:nvSpPr>
+        <p:spPr bwMode="auto">
+          <a:xfrm>
+            <a:off x="5943600" y="3276600"/>
+            <a:ext cx="304800" cy="304800"/>
+          </a:xfrm>
+          <a:prstGeom prst="rect">
+            <a:avLst/>
+          </a:prstGeom>
+          <a:noFill/>
+          <a:extLst>
+            <a:ext uri="{909E8E84-426E-40DD-AFC4-6F175D3DCCD1}">
+              <a14:hiddenFill xmlns:a14="http://schemas.microsoft.com/office/drawing/2010/main">
+                <a:solidFill>
+                  <a:srgbClr val="FFFFFF"/>
+                </a:solidFill>
+              </a14:hiddenFill>
+            </a:ext>
+          </a:extLst>
+        </p:spPr>
+        <p:txBody>
+          <a:bodyPr vert="horz" wrap="square" lIns="91440" tIns="45720" rIns="91440" bIns="45720" numCol="1" anchor="t" anchorCtr="0" compatLnSpc="1">
+            <a:prstTxWarp prst="textNoShape">
+              <a:avLst/>
+            </a:prstTxWarp>
+          </a:bodyPr>
+          <a:lstStyle/>
+          <a:p>
+            <a:endParaRPr lang="ko-KR" altLang="en-US"/>
+          </a:p>
+        </p:txBody>
+      </p:sp>
+      <p:pic>
+        <p:nvPicPr>
+          <p:cNvPr id="7" name="그림 6">
+            <a:extLst>
+              <a:ext uri="{FF2B5EF4-FFF2-40B4-BE49-F238E27FC236}">
+                <a16:creationId xmlns:a16="http://schemas.microsoft.com/office/drawing/2014/main" id="{B2E58D4C-0BCB-5478-FA2D-48173632AD56}"/>
+              </a:ext>
+            </a:extLst>
+          </p:cNvPr>
+          <p:cNvPicPr>
+            <a:picLocks noChangeAspect="1"/>
+          </p:cNvPicPr>
+          <p:nvPr/>
+        </p:nvPicPr>
+        <p:blipFill>
+          <a:blip r:embed="rId2"/>
+          <a:stretch>
+            <a:fillRect/>
+          </a:stretch>
+        </p:blipFill>
+        <p:spPr>
+          <a:xfrm>
+            <a:off x="656731" y="1391684"/>
+            <a:ext cx="10353763" cy="4827139"/>
+          </a:xfrm>
+          <a:prstGeom prst="rect">
+            <a:avLst/>
+          </a:prstGeom>
+        </p:spPr>
+      </p:pic>
+    </p:spTree>
+    <p:extLst>
+      <p:ext uri="{BB962C8B-B14F-4D97-AF65-F5344CB8AC3E}">
+        <p14:creationId xmlns:p14="http://schemas.microsoft.com/office/powerpoint/2010/main" val="2126312896"/>
+      </p:ext>
+    </p:extLst>
+  </p:cSld>
+  <p:clrMapOvr>
+    <a:masterClrMapping/>
+  </p:clrMapOvr>
+</p:sld>
+</file>
+
+<file path=ppt/slides/slide6.xml><?xml version="1.0" encoding="utf-8"?>
+<p:sld xmlns:a="http://schemas.openxmlformats.org/drawingml/2006/main" xmlns:r="http://schemas.openxmlformats.org/officeDocument/2006/relationships" xmlns:p="http://schemas.openxmlformats.org/presentationml/2006/main">
+  <p:cSld>
+    <p:spTree>
+      <p:nvGrpSpPr>
+        <p:cNvPr id="1" name="">
+          <a:extLst>
+            <a:ext uri="{FF2B5EF4-FFF2-40B4-BE49-F238E27FC236}">
+              <a16:creationId xmlns:a16="http://schemas.microsoft.com/office/drawing/2014/main" id="{992B41B4-1D46-0D9A-0AB4-C8EF5376D6EC}"/>
+            </a:ext>
+          </a:extLst>
+        </p:cNvPr>
+        <p:cNvGrpSpPr/>
+        <p:nvPr/>
+      </p:nvGrpSpPr>
+      <p:grpSpPr>
+        <a:xfrm>
+          <a:off x="0" y="0"/>
+          <a:ext cx="0" cy="0"/>
+          <a:chOff x="0" y="0"/>
+          <a:chExt cx="0" cy="0"/>
+        </a:xfrm>
+      </p:grpSpPr>
+      <p:sp>
+        <p:nvSpPr>
+          <p:cNvPr id="4" name="슬라이드 번호 개체 틀 3">
+            <a:extLst>
+              <a:ext uri="{FF2B5EF4-FFF2-40B4-BE49-F238E27FC236}">
+                <a16:creationId xmlns:a16="http://schemas.microsoft.com/office/drawing/2014/main" id="{3988F654-70B8-53E9-E70C-25E48F1FA509}"/>
+              </a:ext>
+            </a:extLst>
+          </p:cNvPr>
+          <p:cNvSpPr>
+            <a:spLocks noGrp="1"/>
+          </p:cNvSpPr>
+          <p:nvPr>
+            <p:ph type="sldNum" sz="quarter" idx="12"/>
+          </p:nvPr>
+        </p:nvSpPr>
+        <p:spPr>
+          <a:xfrm>
+            <a:off x="10514011" y="6036261"/>
+            <a:ext cx="753545" cy="365125"/>
+          </a:xfrm>
+        </p:spPr>
+        <p:txBody>
+          <a:bodyPr/>
+          <a:lstStyle/>
+          <a:p>
+            <a:fld id="{D57F1E4F-1CFF-5643-939E-217C01CDF565}" type="slidenum">
+              <a:rPr lang="en-US" smtClean="0"/>
+              <a:pPr/>
+              <a:t>6</a:t>
+            </a:fld>
+            <a:endParaRPr lang="en-US" dirty="0"/>
+          </a:p>
+        </p:txBody>
+      </p:sp>
+      <p:sp>
+        <p:nvSpPr>
+          <p:cNvPr id="3" name="제목 1">
+            <a:extLst>
+              <a:ext uri="{FF2B5EF4-FFF2-40B4-BE49-F238E27FC236}">
+                <a16:creationId xmlns:a16="http://schemas.microsoft.com/office/drawing/2014/main" id="{AA47A670-E7C8-FE41-30F5-1DAF393D6C99}"/>
+              </a:ext>
+            </a:extLst>
+          </p:cNvPr>
+          <p:cNvSpPr txBox="1">
+            <a:spLocks/>
+          </p:cNvSpPr>
+          <p:nvPr/>
+        </p:nvSpPr>
+        <p:spPr>
+          <a:xfrm>
+            <a:off x="475645" y="481983"/>
+            <a:ext cx="10353762" cy="766439"/>
+          </a:xfrm>
+          <a:prstGeom prst="rect">
+            <a:avLst/>
+          </a:prstGeom>
+        </p:spPr>
+        <p:txBody>
+          <a:bodyPr vert="horz" lIns="91440" tIns="45720" rIns="91440" bIns="45720" rtlCol="0" anchor="ctr">
+            <a:normAutofit/>
+          </a:bodyPr>
+          <a:lstStyle>
+            <a:lvl1pPr algn="ctr" defTabSz="914400" rtl="0" eaLnBrk="1" latinLnBrk="1" hangingPunct="1">
+              <a:lnSpc>
+                <a:spcPct val="90000"/>
+              </a:lnSpc>
+              <a:spcBef>
+                <a:spcPct val="0"/>
+              </a:spcBef>
+              <a:buNone/>
+              <a:defRPr sz="3200" kern="1200" cap="all" baseline="0">
+                <a:solidFill>
+                  <a:schemeClr val="tx1"/>
+                </a:solidFill>
+                <a:effectLst/>
+                <a:latin typeface="Batang" panose="02030600000101010101" pitchFamily="18" charset="-127"/>
+                <a:ea typeface="Batang" panose="02030600000101010101" pitchFamily="18" charset="-127"/>
+                <a:cs typeface="+mj-cs"/>
+              </a:defRPr>
+            </a:lvl1pPr>
+          </a:lstStyle>
+          <a:p>
+            <a:pPr algn="l"/>
+            <a:r>
+              <a:rPr lang="en-US" altLang="ko-KR" sz="2800" cap="none" dirty="0">
+                <a:solidFill>
+                  <a:schemeClr val="bg2">
+                    <a:lumMod val="25000"/>
+                  </a:schemeClr>
+                </a:solidFill>
+                <a:latin typeface="D2Coding" panose="020B0609020101020101" pitchFamily="49" charset="-127"/>
+                <a:ea typeface="D2Coding" panose="020B0609020101020101" pitchFamily="49" charset="-127"/>
+                <a:cs typeface="Segoe UI Light" panose="020B0502040204020203" pitchFamily="34" charset="0"/>
+              </a:rPr>
+              <a:t>Basic RAG Pipeline</a:t>
+            </a:r>
+            <a:endParaRPr lang="ko-KR" altLang="en-US" sz="2800" cap="none" dirty="0">
+              <a:solidFill>
+                <a:schemeClr val="bg2">
+                  <a:lumMod val="25000"/>
+                </a:schemeClr>
+              </a:solidFill>
+              <a:latin typeface="D2Coding" panose="020B0609020101020101" pitchFamily="49" charset="-127"/>
+              <a:ea typeface="D2Coding" panose="020B0609020101020101" pitchFamily="49" charset="-127"/>
+              <a:cs typeface="Segoe UI Light" panose="020B0502040204020203" pitchFamily="34" charset="0"/>
+            </a:endParaRPr>
+          </a:p>
+        </p:txBody>
+      </p:sp>
+      <p:sp>
+        <p:nvSpPr>
+          <p:cNvPr id="2" name="AutoShape 2">
+            <a:extLst>
+              <a:ext uri="{FF2B5EF4-FFF2-40B4-BE49-F238E27FC236}">
+                <a16:creationId xmlns:a16="http://schemas.microsoft.com/office/drawing/2014/main" id="{7817456C-82D4-E557-3BCB-FAECC3E5165F}"/>
+              </a:ext>
+            </a:extLst>
+          </p:cNvPr>
+          <p:cNvSpPr>
+            <a:spLocks noChangeAspect="1" noChangeArrowheads="1"/>
+          </p:cNvSpPr>
+          <p:nvPr/>
+        </p:nvSpPr>
+        <p:spPr bwMode="auto">
+          <a:xfrm>
+            <a:off x="5943600" y="3276600"/>
+            <a:ext cx="304800" cy="304800"/>
+          </a:xfrm>
+          <a:prstGeom prst="rect">
+            <a:avLst/>
+          </a:prstGeom>
+          <a:noFill/>
+          <a:extLst>
+            <a:ext uri="{909E8E84-426E-40DD-AFC4-6F175D3DCCD1}">
+              <a14:hiddenFill xmlns:a14="http://schemas.microsoft.com/office/drawing/2010/main">
+                <a:solidFill>
+                  <a:srgbClr val="FFFFFF"/>
+                </a:solidFill>
+              </a14:hiddenFill>
+            </a:ext>
+          </a:extLst>
+        </p:spPr>
+        <p:txBody>
+          <a:bodyPr vert="horz" wrap="square" lIns="91440" tIns="45720" rIns="91440" bIns="45720" numCol="1" anchor="t" anchorCtr="0" compatLnSpc="1">
+            <a:prstTxWarp prst="textNoShape">
+              <a:avLst/>
+            </a:prstTxWarp>
+          </a:bodyPr>
+          <a:lstStyle/>
+          <a:p>
+            <a:endParaRPr lang="ko-KR" altLang="en-US"/>
+          </a:p>
+        </p:txBody>
+      </p:sp>
+      <p:pic>
+        <p:nvPicPr>
+          <p:cNvPr id="9" name="그림 8">
+            <a:extLst>
+              <a:ext uri="{FF2B5EF4-FFF2-40B4-BE49-F238E27FC236}">
+                <a16:creationId xmlns:a16="http://schemas.microsoft.com/office/drawing/2014/main" id="{DD02BB5A-B3F0-7886-0289-4C494F9D2D2F}"/>
+              </a:ext>
+            </a:extLst>
+          </p:cNvPr>
+          <p:cNvPicPr>
+            <a:picLocks noChangeAspect="1"/>
+          </p:cNvPicPr>
+          <p:nvPr/>
+        </p:nvPicPr>
+        <p:blipFill>
+          <a:blip r:embed="rId2"/>
+          <a:stretch>
+            <a:fillRect/>
+          </a:stretch>
+        </p:blipFill>
+        <p:spPr>
+          <a:xfrm>
+            <a:off x="1390326" y="2070967"/>
+            <a:ext cx="8774622" cy="3142748"/>
+          </a:xfrm>
+          <a:prstGeom prst="rect">
+            <a:avLst/>
+          </a:prstGeom>
+        </p:spPr>
+      </p:pic>
+      <p:sp>
+        <p:nvSpPr>
+          <p:cNvPr id="5" name="TextBox 4">
+            <a:extLst>
+              <a:ext uri="{FF2B5EF4-FFF2-40B4-BE49-F238E27FC236}">
+                <a16:creationId xmlns:a16="http://schemas.microsoft.com/office/drawing/2014/main" id="{7708E3AC-1B21-5665-4DC5-D7CA0588B7C2}"/>
+              </a:ext>
+            </a:extLst>
+          </p:cNvPr>
+          <p:cNvSpPr txBox="1"/>
+          <p:nvPr/>
+        </p:nvSpPr>
+        <p:spPr>
+          <a:xfrm>
+            <a:off x="8439150" y="654811"/>
+            <a:ext cx="3181350" cy="400110"/>
+          </a:xfrm>
+          <a:prstGeom prst="rect">
+            <a:avLst/>
+          </a:prstGeom>
+          <a:noFill/>
+        </p:spPr>
+        <p:txBody>
+          <a:bodyPr wrap="square">
+            <a:spAutoFit/>
+          </a:bodyPr>
+          <a:lstStyle/>
+          <a:p>
+            <a:pPr algn="r"/>
+            <a:r>
+              <a:rPr lang="en-US" altLang="ko-KR" sz="2000" dirty="0">
+                <a:latin typeface="D2Coding" panose="020B0609020101020101" pitchFamily="49" charset="-127"/>
+                <a:ea typeface="D2Coding" panose="020B0609020101020101" pitchFamily="49" charset="-127"/>
+              </a:rPr>
+              <a:t>Data Indexing</a:t>
+            </a:r>
+            <a:endParaRPr lang="ko-KR" altLang="en-US" sz="2000" dirty="0">
+              <a:latin typeface="D2Coding" panose="020B0609020101020101" pitchFamily="49" charset="-127"/>
+              <a:ea typeface="D2Coding" panose="020B0609020101020101" pitchFamily="49" charset="-127"/>
+            </a:endParaRPr>
+          </a:p>
+        </p:txBody>
+      </p:sp>
+    </p:spTree>
+    <p:extLst>
+      <p:ext uri="{BB962C8B-B14F-4D97-AF65-F5344CB8AC3E}">
+        <p14:creationId xmlns:p14="http://schemas.microsoft.com/office/powerpoint/2010/main" val="2377536087"/>
+      </p:ext>
+    </p:extLst>
+  </p:cSld>
+  <p:clrMapOvr>
+    <a:masterClrMapping/>
+  </p:clrMapOvr>
+</p:sld>
+</file>
+
+<file path=ppt/slides/slide7.xml><?xml version="1.0" encoding="utf-8"?>
+<p:sld xmlns:a="http://schemas.openxmlformats.org/drawingml/2006/main" xmlns:r="http://schemas.openxmlformats.org/officeDocument/2006/relationships" xmlns:p="http://schemas.openxmlformats.org/presentationml/2006/main">
+  <p:cSld>
+    <p:spTree>
+      <p:nvGrpSpPr>
+        <p:cNvPr id="1" name="">
+          <a:extLst>
+            <a:ext uri="{FF2B5EF4-FFF2-40B4-BE49-F238E27FC236}">
+              <a16:creationId xmlns:a16="http://schemas.microsoft.com/office/drawing/2014/main" id="{141A81BC-AF22-466F-5EB5-7C85CE2DC4CA}"/>
+            </a:ext>
+          </a:extLst>
+        </p:cNvPr>
+        <p:cNvGrpSpPr/>
+        <p:nvPr/>
+      </p:nvGrpSpPr>
+      <p:grpSpPr>
+        <a:xfrm>
+          <a:off x="0" y="0"/>
+          <a:ext cx="0" cy="0"/>
+          <a:chOff x="0" y="0"/>
+          <a:chExt cx="0" cy="0"/>
+        </a:xfrm>
+      </p:grpSpPr>
+      <p:sp>
+        <p:nvSpPr>
+          <p:cNvPr id="4" name="슬라이드 번호 개체 틀 3">
+            <a:extLst>
+              <a:ext uri="{FF2B5EF4-FFF2-40B4-BE49-F238E27FC236}">
+                <a16:creationId xmlns:a16="http://schemas.microsoft.com/office/drawing/2014/main" id="{92855AF8-F813-9A43-1AD6-BEE7E8FA8EEF}"/>
+              </a:ext>
+            </a:extLst>
+          </p:cNvPr>
+          <p:cNvSpPr>
+            <a:spLocks noGrp="1"/>
+          </p:cNvSpPr>
+          <p:nvPr>
+            <p:ph type="sldNum" sz="quarter" idx="12"/>
+          </p:nvPr>
+        </p:nvSpPr>
+        <p:spPr>
+          <a:xfrm>
+            <a:off x="10514011" y="6036261"/>
+            <a:ext cx="753545" cy="365125"/>
+          </a:xfrm>
+        </p:spPr>
+        <p:txBody>
+          <a:bodyPr/>
+          <a:lstStyle/>
+          <a:p>
+            <a:fld id="{D57F1E4F-1CFF-5643-939E-217C01CDF565}" type="slidenum">
+              <a:rPr lang="en-US" smtClean="0"/>
+              <a:pPr/>
+              <a:t>7</a:t>
+            </a:fld>
+            <a:endParaRPr lang="en-US" dirty="0"/>
+          </a:p>
+        </p:txBody>
+      </p:sp>
+      <p:sp>
+        <p:nvSpPr>
+          <p:cNvPr id="3" name="제목 1">
+            <a:extLst>
+              <a:ext uri="{FF2B5EF4-FFF2-40B4-BE49-F238E27FC236}">
+                <a16:creationId xmlns:a16="http://schemas.microsoft.com/office/drawing/2014/main" id="{A07A3216-FE72-EDF9-7303-55BCE87940FF}"/>
+              </a:ext>
+            </a:extLst>
+          </p:cNvPr>
+          <p:cNvSpPr txBox="1">
+            <a:spLocks/>
+          </p:cNvSpPr>
+          <p:nvPr/>
+        </p:nvSpPr>
+        <p:spPr>
+          <a:xfrm>
+            <a:off x="475645" y="481983"/>
+            <a:ext cx="10353762" cy="766439"/>
+          </a:xfrm>
+          <a:prstGeom prst="rect">
+            <a:avLst/>
+          </a:prstGeom>
+        </p:spPr>
+        <p:txBody>
+          <a:bodyPr vert="horz" lIns="91440" tIns="45720" rIns="91440" bIns="45720" rtlCol="0" anchor="ctr">
+            <a:normAutofit/>
+          </a:bodyPr>
+          <a:lstStyle>
+            <a:lvl1pPr algn="ctr" defTabSz="914400" rtl="0" eaLnBrk="1" latinLnBrk="1" hangingPunct="1">
+              <a:lnSpc>
+                <a:spcPct val="90000"/>
+              </a:lnSpc>
+              <a:spcBef>
+                <a:spcPct val="0"/>
+              </a:spcBef>
+              <a:buNone/>
+              <a:defRPr sz="3200" kern="1200" cap="all" baseline="0">
+                <a:solidFill>
+                  <a:schemeClr val="tx1"/>
+                </a:solidFill>
+                <a:effectLst/>
+                <a:latin typeface="Batang" panose="02030600000101010101" pitchFamily="18" charset="-127"/>
+                <a:ea typeface="Batang" panose="02030600000101010101" pitchFamily="18" charset="-127"/>
+                <a:cs typeface="+mj-cs"/>
+              </a:defRPr>
+            </a:lvl1pPr>
+          </a:lstStyle>
+          <a:p>
+            <a:pPr algn="l"/>
+            <a:r>
+              <a:rPr lang="en-US" altLang="ko-KR" sz="2800" cap="none" dirty="0">
+                <a:solidFill>
+                  <a:schemeClr val="bg2">
+                    <a:lumMod val="25000"/>
+                  </a:schemeClr>
+                </a:solidFill>
+                <a:latin typeface="D2Coding" panose="020B0609020101020101" pitchFamily="49" charset="-127"/>
+                <a:ea typeface="D2Coding" panose="020B0609020101020101" pitchFamily="49" charset="-127"/>
+                <a:cs typeface="Segoe UI Light" panose="020B0502040204020203" pitchFamily="34" charset="0"/>
+              </a:rPr>
+              <a:t>Basic RAG Pipeline</a:t>
+            </a:r>
+            <a:endParaRPr lang="ko-KR" altLang="en-US" sz="2800" cap="none" dirty="0">
+              <a:solidFill>
+                <a:schemeClr val="bg2">
+                  <a:lumMod val="25000"/>
+                </a:schemeClr>
+              </a:solidFill>
+              <a:latin typeface="D2Coding" panose="020B0609020101020101" pitchFamily="49" charset="-127"/>
+              <a:ea typeface="D2Coding" panose="020B0609020101020101" pitchFamily="49" charset="-127"/>
+              <a:cs typeface="Segoe UI Light" panose="020B0502040204020203" pitchFamily="34" charset="0"/>
+            </a:endParaRPr>
+          </a:p>
+        </p:txBody>
+      </p:sp>
+      <p:sp>
+        <p:nvSpPr>
+          <p:cNvPr id="2" name="AutoShape 2">
+            <a:extLst>
+              <a:ext uri="{FF2B5EF4-FFF2-40B4-BE49-F238E27FC236}">
+                <a16:creationId xmlns:a16="http://schemas.microsoft.com/office/drawing/2014/main" id="{2AB7355C-86AC-6AAE-3552-145850DC0B7A}"/>
+              </a:ext>
+            </a:extLst>
+          </p:cNvPr>
+          <p:cNvSpPr>
+            <a:spLocks noChangeAspect="1" noChangeArrowheads="1"/>
+          </p:cNvSpPr>
+          <p:nvPr/>
+        </p:nvSpPr>
+        <p:spPr bwMode="auto">
+          <a:xfrm>
+            <a:off x="5943600" y="3276600"/>
+            <a:ext cx="304800" cy="304800"/>
+          </a:xfrm>
+          <a:prstGeom prst="rect">
+            <a:avLst/>
+          </a:prstGeom>
+          <a:noFill/>
+          <a:extLst>
+            <a:ext uri="{909E8E84-426E-40DD-AFC4-6F175D3DCCD1}">
+              <a14:hiddenFill xmlns:a14="http://schemas.microsoft.com/office/drawing/2010/main">
+                <a:solidFill>
+                  <a:srgbClr val="FFFFFF"/>
+                </a:solidFill>
+              </a14:hiddenFill>
+            </a:ext>
+          </a:extLst>
+        </p:spPr>
+        <p:txBody>
+          <a:bodyPr vert="horz" wrap="square" lIns="91440" tIns="45720" rIns="91440" bIns="45720" numCol="1" anchor="t" anchorCtr="0" compatLnSpc="1">
+            <a:prstTxWarp prst="textNoShape">
+              <a:avLst/>
+            </a:prstTxWarp>
+          </a:bodyPr>
+          <a:lstStyle/>
+          <a:p>
+            <a:endParaRPr lang="ko-KR" altLang="en-US"/>
+          </a:p>
+        </p:txBody>
+      </p:sp>
+      <p:pic>
+        <p:nvPicPr>
+          <p:cNvPr id="12" name="그림 11">
+            <a:extLst>
+              <a:ext uri="{FF2B5EF4-FFF2-40B4-BE49-F238E27FC236}">
+                <a16:creationId xmlns:a16="http://schemas.microsoft.com/office/drawing/2014/main" id="{84285380-B40E-187A-030B-04E12E45A80E}"/>
+              </a:ext>
+            </a:extLst>
+          </p:cNvPr>
+          <p:cNvPicPr>
+            <a:picLocks noChangeAspect="1"/>
+          </p:cNvPicPr>
+          <p:nvPr/>
+        </p:nvPicPr>
+        <p:blipFill>
+          <a:blip r:embed="rId2"/>
+          <a:stretch>
+            <a:fillRect/>
+          </a:stretch>
+        </p:blipFill>
+        <p:spPr>
+          <a:xfrm>
+            <a:off x="1392552" y="1643485"/>
+            <a:ext cx="8837298" cy="4575338"/>
+          </a:xfrm>
+          <a:prstGeom prst="rect">
+            <a:avLst/>
+          </a:prstGeom>
+        </p:spPr>
+      </p:pic>
+      <p:sp>
+        <p:nvSpPr>
+          <p:cNvPr id="5" name="TextBox 4">
+            <a:extLst>
+              <a:ext uri="{FF2B5EF4-FFF2-40B4-BE49-F238E27FC236}">
+                <a16:creationId xmlns:a16="http://schemas.microsoft.com/office/drawing/2014/main" id="{BB542657-A59B-8A0A-0A9C-41DC4391D97F}"/>
+              </a:ext>
+            </a:extLst>
+          </p:cNvPr>
+          <p:cNvSpPr txBox="1"/>
+          <p:nvPr/>
+        </p:nvSpPr>
+        <p:spPr>
+          <a:xfrm>
+            <a:off x="7419975" y="654811"/>
+            <a:ext cx="4200525" cy="400110"/>
+          </a:xfrm>
+          <a:prstGeom prst="rect">
+            <a:avLst/>
+          </a:prstGeom>
+          <a:noFill/>
+        </p:spPr>
+        <p:txBody>
+          <a:bodyPr wrap="square">
+            <a:spAutoFit/>
+          </a:bodyPr>
+          <a:lstStyle/>
+          <a:p>
+            <a:pPr algn="r"/>
+            <a:r>
+              <a:rPr lang="en-US" altLang="ko-KR" sz="2000" dirty="0">
+                <a:latin typeface="D2Coding" panose="020B0609020101020101" pitchFamily="49" charset="-127"/>
+                <a:ea typeface="D2Coding" panose="020B0609020101020101" pitchFamily="49" charset="-127"/>
+              </a:rPr>
+              <a:t>Data Retrieval &amp; Generation</a:t>
+            </a:r>
+            <a:endParaRPr lang="ko-KR" altLang="en-US" sz="2000" dirty="0">
+              <a:latin typeface="D2Coding" panose="020B0609020101020101" pitchFamily="49" charset="-127"/>
+              <a:ea typeface="D2Coding" panose="020B0609020101020101" pitchFamily="49" charset="-127"/>
+            </a:endParaRPr>
+          </a:p>
+        </p:txBody>
+      </p:sp>
+    </p:spTree>
+    <p:extLst>
+      <p:ext uri="{BB962C8B-B14F-4D97-AF65-F5344CB8AC3E}">
+        <p14:creationId xmlns:p14="http://schemas.microsoft.com/office/powerpoint/2010/main" val="1889453177"/>
+      </p:ext>
+    </p:extLst>
+  </p:cSld>
+  <p:clrMapOvr>
+    <a:masterClrMapping/>
+  </p:clrMapOvr>
+</p:sld>
+</file>
+
+<file path=ppt/slides/slide8.xml><?xml version="1.0" encoding="utf-8"?>
+<p:sld xmlns:a="http://schemas.openxmlformats.org/drawingml/2006/main" xmlns:r="http://schemas.openxmlformats.org/officeDocument/2006/relationships" xmlns:p="http://schemas.openxmlformats.org/presentationml/2006/main">
+  <p:cSld>
+    <p:spTree>
+      <p:nvGrpSpPr>
+        <p:cNvPr id="1" name="">
+          <a:extLst>
+            <a:ext uri="{FF2B5EF4-FFF2-40B4-BE49-F238E27FC236}">
               <a16:creationId xmlns:a16="http://schemas.microsoft.com/office/drawing/2014/main" id="{AE06AADB-16FD-D031-093A-078B9B45A5A7}"/>
             </a:ext>
           </a:extLst>
@@ -11211,7 +14554,7 @@
             <a:fld id="{D57F1E4F-1CFF-5643-939E-217C01CDF565}" type="slidenum">
               <a:rPr lang="en-US" smtClean="0"/>
               <a:pPr/>
-              <a:t>5</a:t>
+              <a:t>8</a:t>
             </a:fld>
             <a:endParaRPr lang="en-US" dirty="0"/>
           </a:p>
@@ -11629,7 +14972,7 @@
 </p:sld>
 </file>
 
-<file path=ppt/slides/slide6.xml><?xml version="1.0" encoding="utf-8"?>
+<file path=ppt/slides/slide9.xml><?xml version="1.0" encoding="utf-8"?>
 <p:sld xmlns:a="http://schemas.openxmlformats.org/drawingml/2006/main" xmlns:r="http://schemas.openxmlformats.org/officeDocument/2006/relationships" xmlns:p="http://schemas.openxmlformats.org/presentationml/2006/main">
   <p:cSld>
     <p:spTree>
@@ -11681,7 +15024,7 @@
             <a:fld id="{D57F1E4F-1CFF-5643-939E-217C01CDF565}" type="slidenum">
               <a:rPr lang="en-US" smtClean="0"/>
               <a:pPr/>
-              <a:t>6</a:t>
+              <a:t>9</a:t>
             </a:fld>
             <a:endParaRPr lang="en-US" dirty="0"/>
           </a:p>
@@ -12170,2594 +15513,6 @@
     <p:extLst>
       <p:ext uri="{BB962C8B-B14F-4D97-AF65-F5344CB8AC3E}">
         <p14:creationId xmlns:p14="http://schemas.microsoft.com/office/powerpoint/2010/main" val="3967838855"/>
-      </p:ext>
-    </p:extLst>
-  </p:cSld>
-  <p:clrMapOvr>
-    <a:masterClrMapping/>
-  </p:clrMapOvr>
-</p:sld>
-</file>
-
-<file path=ppt/slides/slide7.xml><?xml version="1.0" encoding="utf-8"?>
-<p:sld xmlns:a="http://schemas.openxmlformats.org/drawingml/2006/main" xmlns:r="http://schemas.openxmlformats.org/officeDocument/2006/relationships" xmlns:p="http://schemas.openxmlformats.org/presentationml/2006/main">
-  <p:cSld>
-    <p:spTree>
-      <p:nvGrpSpPr>
-        <p:cNvPr id="1" name="">
-          <a:extLst>
-            <a:ext uri="{FF2B5EF4-FFF2-40B4-BE49-F238E27FC236}">
-              <a16:creationId xmlns:a16="http://schemas.microsoft.com/office/drawing/2014/main" id="{86FDAD8E-817C-3E4B-143B-51A72B003138}"/>
-            </a:ext>
-          </a:extLst>
-        </p:cNvPr>
-        <p:cNvGrpSpPr/>
-        <p:nvPr/>
-      </p:nvGrpSpPr>
-      <p:grpSpPr>
-        <a:xfrm>
-          <a:off x="0" y="0"/>
-          <a:ext cx="0" cy="0"/>
-          <a:chOff x="0" y="0"/>
-          <a:chExt cx="0" cy="0"/>
-        </a:xfrm>
-      </p:grpSpPr>
-      <p:sp>
-        <p:nvSpPr>
-          <p:cNvPr id="4" name="슬라이드 번호 개체 틀 3">
-            <a:extLst>
-              <a:ext uri="{FF2B5EF4-FFF2-40B4-BE49-F238E27FC236}">
-                <a16:creationId xmlns:a16="http://schemas.microsoft.com/office/drawing/2014/main" id="{8D8C690B-1A36-FBAB-0ABF-B1BA5339B799}"/>
-              </a:ext>
-            </a:extLst>
-          </p:cNvPr>
-          <p:cNvSpPr>
-            <a:spLocks noGrp="1"/>
-          </p:cNvSpPr>
-          <p:nvPr>
-            <p:ph type="sldNum" sz="quarter" idx="12"/>
-          </p:nvPr>
-        </p:nvSpPr>
-        <p:spPr>
-          <a:xfrm>
-            <a:off x="10514011" y="6036261"/>
-            <a:ext cx="753545" cy="365125"/>
-          </a:xfrm>
-        </p:spPr>
-        <p:txBody>
-          <a:bodyPr/>
-          <a:lstStyle/>
-          <a:p>
-            <a:fld id="{D57F1E4F-1CFF-5643-939E-217C01CDF565}" type="slidenum">
-              <a:rPr lang="en-US" smtClean="0"/>
-              <a:pPr/>
-              <a:t>7</a:t>
-            </a:fld>
-            <a:endParaRPr lang="en-US" dirty="0"/>
-          </a:p>
-        </p:txBody>
-      </p:sp>
-      <p:sp>
-        <p:nvSpPr>
-          <p:cNvPr id="3" name="제목 1">
-            <a:extLst>
-              <a:ext uri="{FF2B5EF4-FFF2-40B4-BE49-F238E27FC236}">
-                <a16:creationId xmlns:a16="http://schemas.microsoft.com/office/drawing/2014/main" id="{C9E8235B-A26E-8524-42D9-C62BA9C055CE}"/>
-              </a:ext>
-            </a:extLst>
-          </p:cNvPr>
-          <p:cNvSpPr txBox="1">
-            <a:spLocks/>
-          </p:cNvSpPr>
-          <p:nvPr/>
-        </p:nvSpPr>
-        <p:spPr>
-          <a:xfrm>
-            <a:off x="475645" y="481983"/>
-            <a:ext cx="10353762" cy="766439"/>
-          </a:xfrm>
-          <a:prstGeom prst="rect">
-            <a:avLst/>
-          </a:prstGeom>
-        </p:spPr>
-        <p:txBody>
-          <a:bodyPr vert="horz" lIns="91440" tIns="45720" rIns="91440" bIns="45720" rtlCol="0" anchor="ctr">
-            <a:normAutofit/>
-          </a:bodyPr>
-          <a:lstStyle>
-            <a:lvl1pPr algn="ctr" defTabSz="914400" rtl="0" eaLnBrk="1" latinLnBrk="1" hangingPunct="1">
-              <a:lnSpc>
-                <a:spcPct val="90000"/>
-              </a:lnSpc>
-              <a:spcBef>
-                <a:spcPct val="0"/>
-              </a:spcBef>
-              <a:buNone/>
-              <a:defRPr sz="3200" kern="1200" cap="all" baseline="0">
-                <a:solidFill>
-                  <a:schemeClr val="tx1"/>
-                </a:solidFill>
-                <a:effectLst/>
-                <a:latin typeface="Batang" panose="02030600000101010101" pitchFamily="18" charset="-127"/>
-                <a:ea typeface="Batang" panose="02030600000101010101" pitchFamily="18" charset="-127"/>
-                <a:cs typeface="+mj-cs"/>
-              </a:defRPr>
-            </a:lvl1pPr>
-          </a:lstStyle>
-          <a:p>
-            <a:pPr algn="l"/>
-            <a:r>
-              <a:rPr lang="en-US" altLang="ko-KR" sz="2800" cap="none" dirty="0">
-                <a:solidFill>
-                  <a:schemeClr val="bg2">
-                    <a:lumMod val="25000"/>
-                  </a:schemeClr>
-                </a:solidFill>
-                <a:latin typeface="D2Coding" panose="020B0609020101020101" pitchFamily="49" charset="-127"/>
-                <a:ea typeface="D2Coding" panose="020B0609020101020101" pitchFamily="49" charset="-127"/>
-                <a:cs typeface="Segoe UI Light" panose="020B0502040204020203" pitchFamily="34" charset="0"/>
-              </a:rPr>
-              <a:t>Embeddings: Converting Text to Numbers</a:t>
-            </a:r>
-            <a:endParaRPr lang="ko-KR" altLang="en-US" sz="2800" cap="none" dirty="0">
-              <a:solidFill>
-                <a:schemeClr val="bg2">
-                  <a:lumMod val="25000"/>
-                </a:schemeClr>
-              </a:solidFill>
-              <a:latin typeface="D2Coding" panose="020B0609020101020101" pitchFamily="49" charset="-127"/>
-              <a:ea typeface="D2Coding" panose="020B0609020101020101" pitchFamily="49" charset="-127"/>
-              <a:cs typeface="Segoe UI Light" panose="020B0502040204020203" pitchFamily="34" charset="0"/>
-            </a:endParaRPr>
-          </a:p>
-        </p:txBody>
-      </p:sp>
-      <p:sp>
-        <p:nvSpPr>
-          <p:cNvPr id="2" name="TextBox 1">
-            <a:extLst>
-              <a:ext uri="{FF2B5EF4-FFF2-40B4-BE49-F238E27FC236}">
-                <a16:creationId xmlns:a16="http://schemas.microsoft.com/office/drawing/2014/main" id="{525B9EBB-2E66-082D-EA15-D31933E2D58A}"/>
-              </a:ext>
-            </a:extLst>
-          </p:cNvPr>
-          <p:cNvSpPr txBox="1"/>
-          <p:nvPr/>
-        </p:nvSpPr>
-        <p:spPr>
-          <a:xfrm>
-            <a:off x="8439150" y="654811"/>
-            <a:ext cx="3181350" cy="400110"/>
-          </a:xfrm>
-          <a:prstGeom prst="rect">
-            <a:avLst/>
-          </a:prstGeom>
-          <a:noFill/>
-        </p:spPr>
-        <p:txBody>
-          <a:bodyPr wrap="square">
-            <a:spAutoFit/>
-          </a:bodyPr>
-          <a:lstStyle/>
-          <a:p>
-            <a:pPr algn="r"/>
-            <a:r>
-              <a:rPr lang="en-US" altLang="ko-KR" sz="2000" dirty="0">
-                <a:latin typeface="D2Coding" panose="020B0609020101020101" pitchFamily="49" charset="-127"/>
-                <a:ea typeface="D2Coding" panose="020B0609020101020101" pitchFamily="49" charset="-127"/>
-              </a:rPr>
-              <a:t>Embeddings Before LLMs</a:t>
-            </a:r>
-            <a:endParaRPr lang="ko-KR" altLang="en-US" sz="2000" dirty="0">
-              <a:latin typeface="D2Coding" panose="020B0609020101020101" pitchFamily="49" charset="-127"/>
-              <a:ea typeface="D2Coding" panose="020B0609020101020101" pitchFamily="49" charset="-127"/>
-            </a:endParaRPr>
-          </a:p>
-        </p:txBody>
-      </p:sp>
-      <p:pic>
-        <p:nvPicPr>
-          <p:cNvPr id="3074" name="Picture 2">
-            <a:extLst>
-              <a:ext uri="{FF2B5EF4-FFF2-40B4-BE49-F238E27FC236}">
-                <a16:creationId xmlns:a16="http://schemas.microsoft.com/office/drawing/2014/main" id="{2EFD2314-C375-B0E6-9A67-498A2AD4C924}"/>
-              </a:ext>
-            </a:extLst>
-          </p:cNvPr>
-          <p:cNvPicPr>
-            <a:picLocks noChangeAspect="1" noChangeArrowheads="1"/>
-          </p:cNvPicPr>
-          <p:nvPr/>
-        </p:nvPicPr>
-        <p:blipFill>
-          <a:blip r:embed="rId2">
-            <a:extLst>
-              <a:ext uri="{28A0092B-C50C-407E-A947-70E740481C1C}">
-                <a14:useLocalDpi xmlns:a14="http://schemas.microsoft.com/office/drawing/2010/main" val="0"/>
-              </a:ext>
-            </a:extLst>
-          </a:blip>
-          <a:srcRect/>
-          <a:stretch>
-            <a:fillRect/>
-          </a:stretch>
-        </p:blipFill>
-        <p:spPr bwMode="auto">
-          <a:xfrm>
-            <a:off x="1023376" y="2841595"/>
-            <a:ext cx="4686300" cy="2694091"/>
-          </a:xfrm>
-          <a:prstGeom prst="rect">
-            <a:avLst/>
-          </a:prstGeom>
-          <a:noFill/>
-          <a:extLst>
-            <a:ext uri="{909E8E84-426E-40DD-AFC4-6F175D3DCCD1}">
-              <a14:hiddenFill xmlns:a14="http://schemas.microsoft.com/office/drawing/2010/main">
-                <a:solidFill>
-                  <a:srgbClr val="FFFFFF"/>
-                </a:solidFill>
-              </a14:hiddenFill>
-            </a:ext>
-          </a:extLst>
-        </p:spPr>
-      </p:pic>
-      <p:sp>
-        <p:nvSpPr>
-          <p:cNvPr id="20" name="TextBox 19">
-            <a:extLst>
-              <a:ext uri="{FF2B5EF4-FFF2-40B4-BE49-F238E27FC236}">
-                <a16:creationId xmlns:a16="http://schemas.microsoft.com/office/drawing/2014/main" id="{FA2C1598-4E5C-FFC2-0164-1F80C2838B1C}"/>
-              </a:ext>
-            </a:extLst>
-          </p:cNvPr>
-          <p:cNvSpPr txBox="1"/>
-          <p:nvPr/>
-        </p:nvSpPr>
-        <p:spPr>
-          <a:xfrm>
-            <a:off x="1821656" y="2432427"/>
-            <a:ext cx="2883694" cy="374911"/>
-          </a:xfrm>
-          <a:prstGeom prst="rect">
-            <a:avLst/>
-          </a:prstGeom>
-          <a:noFill/>
-        </p:spPr>
-        <p:txBody>
-          <a:bodyPr wrap="square">
-            <a:spAutoFit/>
-          </a:bodyPr>
-          <a:lstStyle/>
-          <a:p>
-            <a:pPr algn="l">
-              <a:lnSpc>
-                <a:spcPts val="2250"/>
-              </a:lnSpc>
-              <a:buNone/>
-            </a:pPr>
-            <a:r>
-              <a:rPr lang="en-US" altLang="ko-KR" i="0" dirty="0">
-                <a:solidFill>
-                  <a:srgbClr val="242424"/>
-                </a:solidFill>
-                <a:effectLst/>
-                <a:latin typeface="D2Coding" panose="020B0609020101020101" pitchFamily="49" charset="-127"/>
-                <a:ea typeface="D2Coding" panose="020B0609020101020101" pitchFamily="49" charset="-127"/>
-              </a:rPr>
-              <a:t>Bag-of-Words algorithm</a:t>
-            </a:r>
-          </a:p>
-        </p:txBody>
-      </p:sp>
-      <p:sp>
-        <p:nvSpPr>
-          <p:cNvPr id="21" name="TextBox 20">
-            <a:extLst>
-              <a:ext uri="{FF2B5EF4-FFF2-40B4-BE49-F238E27FC236}">
-                <a16:creationId xmlns:a16="http://schemas.microsoft.com/office/drawing/2014/main" id="{2F6E6BED-D1C7-5B12-63BC-A7CC9B130F97}"/>
-              </a:ext>
-            </a:extLst>
-          </p:cNvPr>
-          <p:cNvSpPr txBox="1"/>
-          <p:nvPr/>
-        </p:nvSpPr>
-        <p:spPr>
-          <a:xfrm>
-            <a:off x="1023376" y="5672691"/>
-            <a:ext cx="4605899" cy="663002"/>
-          </a:xfrm>
-          <a:prstGeom prst="rect">
-            <a:avLst/>
-          </a:prstGeom>
-          <a:noFill/>
-        </p:spPr>
-        <p:txBody>
-          <a:bodyPr wrap="square">
-            <a:spAutoFit/>
-          </a:bodyPr>
-          <a:lstStyle/>
-          <a:p>
-            <a:pPr marL="285750" indent="-285750">
-              <a:lnSpc>
-                <a:spcPts val="2250"/>
-              </a:lnSpc>
-              <a:buFont typeface="Wingdings" panose="05000000000000000000" pitchFamily="2" charset="2"/>
-              <a:buChar char="§"/>
-            </a:pPr>
-            <a:r>
-              <a:rPr lang="en-US" altLang="ko-KR" sz="1600" i="0" dirty="0">
-                <a:solidFill>
-                  <a:srgbClr val="242424"/>
-                </a:solidFill>
-                <a:effectLst/>
-                <a:latin typeface="D2Coding" panose="020B0609020101020101" pitchFamily="49" charset="-127"/>
-                <a:ea typeface="D2Coding" panose="020B0609020101020101" pitchFamily="49" charset="-127"/>
-              </a:rPr>
-              <a:t>Bag-of-N grams algorithm</a:t>
-            </a:r>
-          </a:p>
-          <a:p>
-            <a:pPr marL="285750" indent="-285750">
-              <a:lnSpc>
-                <a:spcPts val="2250"/>
-              </a:lnSpc>
-              <a:buFont typeface="Wingdings" panose="05000000000000000000" pitchFamily="2" charset="2"/>
-              <a:buChar char="§"/>
-            </a:pPr>
-            <a:r>
-              <a:rPr lang="en-US" altLang="ko-KR" sz="1600" dirty="0">
-                <a:solidFill>
-                  <a:srgbClr val="242424"/>
-                </a:solidFill>
-                <a:latin typeface="D2Coding" panose="020B0609020101020101" pitchFamily="49" charset="-127"/>
-                <a:ea typeface="D2Coding" panose="020B0609020101020101" pitchFamily="49" charset="-127"/>
-              </a:rPr>
-              <a:t>TF-IDF algorithm</a:t>
-            </a:r>
-          </a:p>
-        </p:txBody>
-      </p:sp>
-      <p:sp>
-        <p:nvSpPr>
-          <p:cNvPr id="26" name="TextBox 25">
-            <a:extLst>
-              <a:ext uri="{FF2B5EF4-FFF2-40B4-BE49-F238E27FC236}">
-                <a16:creationId xmlns:a16="http://schemas.microsoft.com/office/drawing/2014/main" id="{AD20AD1A-9057-226C-BDF3-65256712E4FE}"/>
-              </a:ext>
-            </a:extLst>
-          </p:cNvPr>
-          <p:cNvSpPr txBox="1"/>
-          <p:nvPr/>
-        </p:nvSpPr>
-        <p:spPr>
-          <a:xfrm>
-            <a:off x="7648575" y="3017294"/>
-            <a:ext cx="4029075" cy="1448153"/>
-          </a:xfrm>
-          <a:prstGeom prst="rect">
-            <a:avLst/>
-          </a:prstGeom>
-          <a:noFill/>
-        </p:spPr>
-        <p:txBody>
-          <a:bodyPr wrap="square">
-            <a:spAutoFit/>
-          </a:bodyPr>
-          <a:lstStyle/>
-          <a:p>
-            <a:pPr marL="285750" indent="-285750">
-              <a:lnSpc>
-                <a:spcPct val="200000"/>
-              </a:lnSpc>
-              <a:buFont typeface="Wingdings" panose="05000000000000000000" pitchFamily="2" charset="2"/>
-              <a:buChar char="v"/>
-            </a:pPr>
-            <a:r>
-              <a:rPr lang="ko-KR" altLang="en-US" sz="1600" dirty="0">
-                <a:latin typeface="D2Coding" panose="020B0609020101020101" pitchFamily="49" charset="-127"/>
-                <a:ea typeface="D2Coding" panose="020B0609020101020101" pitchFamily="49" charset="-127"/>
-              </a:rPr>
-              <a:t>희소 </a:t>
-            </a:r>
-            <a:r>
-              <a:rPr lang="ko-KR" altLang="en-US" sz="1600" dirty="0" err="1">
-                <a:latin typeface="D2Coding" panose="020B0609020101020101" pitchFamily="49" charset="-127"/>
-                <a:ea typeface="D2Coding" panose="020B0609020101020101" pitchFamily="49" charset="-127"/>
-              </a:rPr>
-              <a:t>임베딩</a:t>
-            </a:r>
-            <a:r>
-              <a:rPr lang="en-US" altLang="ko-KR" sz="1600" dirty="0">
-                <a:latin typeface="D2Coding" panose="020B0609020101020101" pitchFamily="49" charset="-127"/>
-                <a:ea typeface="D2Coding" panose="020B0609020101020101" pitchFamily="49" charset="-127"/>
-              </a:rPr>
-              <a:t>(Sparse Embedding)</a:t>
-            </a:r>
-          </a:p>
-          <a:p>
-            <a:pPr marL="285750" indent="-285750">
-              <a:lnSpc>
-                <a:spcPct val="200000"/>
-              </a:lnSpc>
-              <a:buFont typeface="Wingdings" panose="05000000000000000000" pitchFamily="2" charset="2"/>
-              <a:buChar char="v"/>
-            </a:pPr>
-            <a:r>
-              <a:rPr lang="ko-KR" altLang="en-US" sz="1600" dirty="0">
-                <a:latin typeface="D2Coding" panose="020B0609020101020101" pitchFamily="49" charset="-127"/>
-                <a:ea typeface="D2Coding" panose="020B0609020101020101" pitchFamily="49" charset="-127"/>
-              </a:rPr>
-              <a:t>의미인식 불가</a:t>
-            </a:r>
-            <a:r>
-              <a:rPr lang="en-US" altLang="ko-KR" sz="1600" dirty="0">
-                <a:latin typeface="D2Coding" panose="020B0609020101020101" pitchFamily="49" charset="-127"/>
-                <a:ea typeface="D2Coding" panose="020B0609020101020101" pitchFamily="49" charset="-127"/>
-              </a:rPr>
-              <a:t>(No Semantic Embedding)</a:t>
-            </a:r>
-          </a:p>
-          <a:p>
-            <a:pPr lvl="1">
-              <a:lnSpc>
-                <a:spcPct val="200000"/>
-              </a:lnSpc>
-            </a:pPr>
-            <a:r>
-              <a:rPr lang="en-US" altLang="ko-KR" sz="1400" dirty="0">
-                <a:latin typeface="D2Coding" panose="020B0609020101020101" pitchFamily="49" charset="-127"/>
-                <a:ea typeface="D2Coding" panose="020B0609020101020101" pitchFamily="49" charset="-127"/>
-              </a:rPr>
-              <a:t>bright skies, sunny day</a:t>
-            </a:r>
-            <a:endParaRPr lang="ko-KR" altLang="en-US" sz="1400" dirty="0">
-              <a:latin typeface="D2Coding" panose="020B0609020101020101" pitchFamily="49" charset="-127"/>
-              <a:ea typeface="D2Coding" panose="020B0609020101020101" pitchFamily="49" charset="-127"/>
-            </a:endParaRPr>
-          </a:p>
-        </p:txBody>
-      </p:sp>
-      <p:sp>
-        <p:nvSpPr>
-          <p:cNvPr id="27" name="화살표: 줄무늬가 있는 오른쪽 26">
-            <a:extLst>
-              <a:ext uri="{FF2B5EF4-FFF2-40B4-BE49-F238E27FC236}">
-                <a16:creationId xmlns:a16="http://schemas.microsoft.com/office/drawing/2014/main" id="{B0B89421-3C18-1368-F3CA-D73E197124E2}"/>
-              </a:ext>
-            </a:extLst>
-          </p:cNvPr>
-          <p:cNvSpPr/>
-          <p:nvPr/>
-        </p:nvSpPr>
-        <p:spPr>
-          <a:xfrm>
-            <a:off x="6153151" y="3267074"/>
-            <a:ext cx="1238250" cy="1038225"/>
-          </a:xfrm>
-          <a:prstGeom prst="stripedRightArrow">
-            <a:avLst>
-              <a:gd name="adj1" fmla="val 70184"/>
-              <a:gd name="adj2" fmla="val 50000"/>
-            </a:avLst>
-          </a:prstGeom>
-        </p:spPr>
-        <p:style>
-          <a:lnRef idx="2">
-            <a:schemeClr val="accent1">
-              <a:shade val="15000"/>
-            </a:schemeClr>
-          </a:lnRef>
-          <a:fillRef idx="1">
-            <a:schemeClr val="accent1"/>
-          </a:fillRef>
-          <a:effectRef idx="0">
-            <a:schemeClr val="accent1"/>
-          </a:effectRef>
-          <a:fontRef idx="minor">
-            <a:schemeClr val="lt1"/>
-          </a:fontRef>
-        </p:style>
-        <p:txBody>
-          <a:bodyPr rtlCol="0" anchor="ctr"/>
-          <a:lstStyle/>
-          <a:p>
-            <a:pPr algn="ctr"/>
-            <a:r>
-              <a:rPr lang="ko-KR" altLang="en-US" sz="1600">
-                <a:latin typeface="D2Coding" panose="020B0609020101020101" pitchFamily="49" charset="-127"/>
-                <a:ea typeface="D2Coding" panose="020B0609020101020101" pitchFamily="49" charset="-127"/>
-              </a:rPr>
-              <a:t>약점</a:t>
-            </a:r>
-          </a:p>
-        </p:txBody>
-      </p:sp>
-      <p:sp>
-        <p:nvSpPr>
-          <p:cNvPr id="29" name="TextBox 28">
-            <a:extLst>
-              <a:ext uri="{FF2B5EF4-FFF2-40B4-BE49-F238E27FC236}">
-                <a16:creationId xmlns:a16="http://schemas.microsoft.com/office/drawing/2014/main" id="{A244DD2D-AA4F-98C3-EC7B-F918809EAB6C}"/>
-              </a:ext>
-            </a:extLst>
-          </p:cNvPr>
-          <p:cNvSpPr txBox="1"/>
-          <p:nvPr/>
-        </p:nvSpPr>
-        <p:spPr>
-          <a:xfrm>
-            <a:off x="552450" y="1248422"/>
-            <a:ext cx="11068050" cy="793166"/>
-          </a:xfrm>
-          <a:prstGeom prst="rect">
-            <a:avLst/>
-          </a:prstGeom>
-          <a:noFill/>
-        </p:spPr>
-        <p:txBody>
-          <a:bodyPr wrap="square">
-            <a:spAutoFit/>
-          </a:bodyPr>
-          <a:lstStyle/>
-          <a:p>
-            <a:pPr>
-              <a:lnSpc>
-                <a:spcPct val="150000"/>
-              </a:lnSpc>
-              <a:buNone/>
-            </a:pPr>
-            <a:r>
-              <a:rPr lang="ko-KR" altLang="en-US" sz="1600" dirty="0">
-                <a:latin typeface="D2Coding" panose="020B0609020101020101" pitchFamily="49" charset="-127"/>
-                <a:ea typeface="D2Coding" panose="020B0609020101020101" pitchFamily="49" charset="-127"/>
-              </a:rPr>
-              <a:t>모든</a:t>
-            </a:r>
-            <a:r>
-              <a:rPr lang="en-US" altLang="ko-KR" sz="1600" dirty="0">
-                <a:latin typeface="D2Coding" panose="020B0609020101020101" pitchFamily="49" charset="-127"/>
-                <a:ea typeface="D2Coding" panose="020B0609020101020101" pitchFamily="49" charset="-127"/>
-              </a:rPr>
-              <a:t> </a:t>
-            </a:r>
-            <a:r>
-              <a:rPr lang="ko-KR" altLang="en-US" sz="1600" dirty="0">
-                <a:latin typeface="D2Coding" panose="020B0609020101020101" pitchFamily="49" charset="-127"/>
-                <a:ea typeface="D2Coding" panose="020B0609020101020101" pitchFamily="49" charset="-127"/>
-              </a:rPr>
-              <a:t>단어의</a:t>
-            </a:r>
-            <a:r>
-              <a:rPr lang="en-US" altLang="ko-KR" sz="1600" dirty="0">
-                <a:latin typeface="D2Coding" panose="020B0609020101020101" pitchFamily="49" charset="-127"/>
-                <a:ea typeface="D2Coding" panose="020B0609020101020101" pitchFamily="49" charset="-127"/>
-              </a:rPr>
-              <a:t> </a:t>
-            </a:r>
-            <a:r>
-              <a:rPr lang="ko-KR" altLang="en-US" sz="1600" dirty="0">
-                <a:latin typeface="D2Coding" panose="020B0609020101020101" pitchFamily="49" charset="-127"/>
-                <a:ea typeface="D2Coding" panose="020B0609020101020101" pitchFamily="49" charset="-127"/>
-              </a:rPr>
-              <a:t>출현빈도를</a:t>
-            </a:r>
-            <a:r>
-              <a:rPr lang="en-US" altLang="ko-KR" sz="1600" dirty="0">
-                <a:latin typeface="D2Coding" panose="020B0609020101020101" pitchFamily="49" charset="-127"/>
-                <a:ea typeface="D2Coding" panose="020B0609020101020101" pitchFamily="49" charset="-127"/>
-              </a:rPr>
-              <a:t> </a:t>
-            </a:r>
-            <a:r>
-              <a:rPr lang="ko-KR" altLang="en-US" sz="1600" dirty="0">
-                <a:latin typeface="D2Coding" panose="020B0609020101020101" pitchFamily="49" charset="-127"/>
-                <a:ea typeface="D2Coding" panose="020B0609020101020101" pitchFamily="49" charset="-127"/>
-              </a:rPr>
-              <a:t>세어야</a:t>
-            </a:r>
-            <a:r>
-              <a:rPr lang="en-US" altLang="ko-KR" sz="1600" dirty="0">
-                <a:latin typeface="D2Coding" panose="020B0609020101020101" pitchFamily="49" charset="-127"/>
-                <a:ea typeface="D2Coding" panose="020B0609020101020101" pitchFamily="49" charset="-127"/>
-              </a:rPr>
-              <a:t> </a:t>
-            </a:r>
-            <a:r>
-              <a:rPr lang="ko-KR" altLang="en-US" sz="1600" dirty="0">
-                <a:latin typeface="D2Coding" panose="020B0609020101020101" pitchFamily="49" charset="-127"/>
-                <a:ea typeface="D2Coding" panose="020B0609020101020101" pitchFamily="49" charset="-127"/>
-              </a:rPr>
-              <a:t>하니</a:t>
-            </a:r>
-            <a:r>
-              <a:rPr lang="en-US" altLang="ko-KR" sz="1600" dirty="0">
-                <a:latin typeface="D2Coding" panose="020B0609020101020101" pitchFamily="49" charset="-127"/>
-                <a:ea typeface="D2Coding" panose="020B0609020101020101" pitchFamily="49" charset="-127"/>
-              </a:rPr>
-              <a:t> </a:t>
-            </a:r>
-            <a:r>
-              <a:rPr lang="ko-KR" altLang="en-US" sz="1600" dirty="0">
-                <a:latin typeface="D2Coding" panose="020B0609020101020101" pitchFamily="49" charset="-127"/>
-                <a:ea typeface="D2Coding" panose="020B0609020101020101" pitchFamily="49" charset="-127"/>
-              </a:rPr>
-              <a:t>한</a:t>
-            </a:r>
-            <a:r>
-              <a:rPr lang="en-US" altLang="ko-KR" sz="1600" dirty="0">
-                <a:latin typeface="D2Coding" panose="020B0609020101020101" pitchFamily="49" charset="-127"/>
-                <a:ea typeface="D2Coding" panose="020B0609020101020101" pitchFamily="49" charset="-127"/>
-              </a:rPr>
-              <a:t> </a:t>
-            </a:r>
-            <a:r>
-              <a:rPr lang="ko-KR" altLang="en-US" sz="1600" dirty="0">
-                <a:latin typeface="D2Coding" panose="020B0609020101020101" pitchFamily="49" charset="-127"/>
-                <a:ea typeface="D2Coding" panose="020B0609020101020101" pitchFamily="49" charset="-127"/>
-              </a:rPr>
-              <a:t>문장의</a:t>
-            </a:r>
-            <a:r>
-              <a:rPr lang="en-US" altLang="ko-KR" sz="1600" dirty="0">
-                <a:latin typeface="D2Coding" panose="020B0609020101020101" pitchFamily="49" charset="-127"/>
-                <a:ea typeface="D2Coding" panose="020B0609020101020101" pitchFamily="49" charset="-127"/>
-              </a:rPr>
-              <a:t> </a:t>
-            </a:r>
-            <a:r>
-              <a:rPr lang="ko-KR" altLang="en-US" sz="1600" dirty="0">
-                <a:latin typeface="D2Coding" panose="020B0609020101020101" pitchFamily="49" charset="-127"/>
-                <a:ea typeface="D2Coding" panose="020B0609020101020101" pitchFamily="49" charset="-127"/>
-              </a:rPr>
-              <a:t>벡터</a:t>
-            </a:r>
-            <a:r>
-              <a:rPr lang="en-US" altLang="ko-KR" sz="1600" dirty="0">
-                <a:latin typeface="D2Coding" panose="020B0609020101020101" pitchFamily="49" charset="-127"/>
-                <a:ea typeface="D2Coding" panose="020B0609020101020101" pitchFamily="49" charset="-127"/>
-              </a:rPr>
-              <a:t> </a:t>
-            </a:r>
-            <a:r>
-              <a:rPr lang="ko-KR" altLang="en-US" sz="1600" dirty="0">
-                <a:latin typeface="D2Coding" panose="020B0609020101020101" pitchFamily="49" charset="-127"/>
-                <a:ea typeface="D2Coding" panose="020B0609020101020101" pitchFamily="49" charset="-127"/>
-              </a:rPr>
-              <a:t>길이는</a:t>
-            </a:r>
-            <a:r>
-              <a:rPr lang="en-US" altLang="ko-KR" sz="1600" dirty="0">
-                <a:latin typeface="D2Coding" panose="020B0609020101020101" pitchFamily="49" charset="-127"/>
-                <a:ea typeface="D2Coding" panose="020B0609020101020101" pitchFamily="49" charset="-127"/>
-              </a:rPr>
-              <a:t> </a:t>
-            </a:r>
-            <a:r>
-              <a:rPr lang="ko-KR" altLang="en-US" sz="1600" dirty="0">
-                <a:latin typeface="D2Coding" panose="020B0609020101020101" pitchFamily="49" charset="-127"/>
-                <a:ea typeface="D2Coding" panose="020B0609020101020101" pitchFamily="49" charset="-127"/>
-              </a:rPr>
-              <a:t>단어</a:t>
-            </a:r>
-            <a:r>
-              <a:rPr lang="en-US" altLang="ko-KR" sz="1600" dirty="0">
-                <a:latin typeface="D2Coding" panose="020B0609020101020101" pitchFamily="49" charset="-127"/>
-                <a:ea typeface="D2Coding" panose="020B0609020101020101" pitchFamily="49" charset="-127"/>
-              </a:rPr>
-              <a:t> </a:t>
-            </a:r>
-            <a:r>
-              <a:rPr lang="ko-KR" altLang="en-US" sz="1600" dirty="0">
-                <a:latin typeface="D2Coding" panose="020B0609020101020101" pitchFamily="49" charset="-127"/>
-                <a:ea typeface="D2Coding" panose="020B0609020101020101" pitchFamily="49" charset="-127"/>
-              </a:rPr>
-              <a:t>수만큼</a:t>
-            </a:r>
-            <a:r>
-              <a:rPr lang="en-US" altLang="ko-KR" sz="1600" dirty="0">
-                <a:latin typeface="D2Coding" panose="020B0609020101020101" pitchFamily="49" charset="-127"/>
-                <a:ea typeface="D2Coding" panose="020B0609020101020101" pitchFamily="49" charset="-127"/>
-              </a:rPr>
-              <a:t> </a:t>
-            </a:r>
-            <a:r>
-              <a:rPr lang="ko-KR" altLang="en-US" sz="1600" dirty="0">
-                <a:latin typeface="D2Coding" panose="020B0609020101020101" pitchFamily="49" charset="-127"/>
-                <a:ea typeface="D2Coding" panose="020B0609020101020101" pitchFamily="49" charset="-127"/>
-              </a:rPr>
-              <a:t>커지고</a:t>
-            </a:r>
-            <a:r>
-              <a:rPr lang="en-US" altLang="ko-KR" sz="1600" dirty="0">
-                <a:latin typeface="D2Coding" panose="020B0609020101020101" pitchFamily="49" charset="-127"/>
-                <a:ea typeface="D2Coding" panose="020B0609020101020101" pitchFamily="49" charset="-127"/>
-              </a:rPr>
-              <a:t> </a:t>
-            </a:r>
-            <a:r>
-              <a:rPr lang="ko-KR" altLang="en-US" sz="1600" dirty="0">
-                <a:latin typeface="D2Coding" panose="020B0609020101020101" pitchFamily="49" charset="-127"/>
-                <a:ea typeface="D2Coding" panose="020B0609020101020101" pitchFamily="49" charset="-127"/>
-              </a:rPr>
-              <a:t>대부분</a:t>
-            </a:r>
-            <a:r>
-              <a:rPr lang="en-US" altLang="ko-KR" sz="1600" dirty="0">
-                <a:latin typeface="D2Coding" panose="020B0609020101020101" pitchFamily="49" charset="-127"/>
-                <a:ea typeface="D2Coding" panose="020B0609020101020101" pitchFamily="49" charset="-127"/>
-              </a:rPr>
-              <a:t> 0</a:t>
-            </a:r>
-            <a:r>
-              <a:rPr lang="ko-KR" altLang="en-US" sz="1600" dirty="0">
-                <a:latin typeface="D2Coding" panose="020B0609020101020101" pitchFamily="49" charset="-127"/>
-                <a:ea typeface="D2Coding" panose="020B0609020101020101" pitchFamily="49" charset="-127"/>
-              </a:rPr>
-              <a:t>으로</a:t>
-            </a:r>
-            <a:r>
-              <a:rPr lang="en-US" altLang="ko-KR" sz="1600" dirty="0">
-                <a:latin typeface="D2Coding" panose="020B0609020101020101" pitchFamily="49" charset="-127"/>
-                <a:ea typeface="D2Coding" panose="020B0609020101020101" pitchFamily="49" charset="-127"/>
-              </a:rPr>
-              <a:t> </a:t>
-            </a:r>
-            <a:r>
-              <a:rPr lang="ko-KR" altLang="en-US" sz="1600" dirty="0">
-                <a:latin typeface="D2Coding" panose="020B0609020101020101" pitchFamily="49" charset="-127"/>
-                <a:ea typeface="D2Coding" panose="020B0609020101020101" pitchFamily="49" charset="-127"/>
-              </a:rPr>
-              <a:t>구성하여 자원의 손실부작용과</a:t>
-            </a:r>
-            <a:r>
-              <a:rPr lang="en-US" altLang="ko-KR" sz="1600" dirty="0">
-                <a:latin typeface="D2Coding" panose="020B0609020101020101" pitchFamily="49" charset="-127"/>
-                <a:ea typeface="D2Coding" panose="020B0609020101020101" pitchFamily="49" charset="-127"/>
-              </a:rPr>
-              <a:t> </a:t>
-            </a:r>
-            <a:r>
-              <a:rPr lang="ko-KR" altLang="en-US" sz="1600" dirty="0">
-                <a:latin typeface="D2Coding" panose="020B0609020101020101" pitchFamily="49" charset="-127"/>
-                <a:ea typeface="D2Coding" panose="020B0609020101020101" pitchFamily="49" charset="-127"/>
-              </a:rPr>
-              <a:t>단어의 순서를 고려하지 않기</a:t>
-            </a:r>
-            <a:r>
-              <a:rPr lang="en-US" altLang="ko-KR" sz="1600" dirty="0">
-                <a:latin typeface="D2Coding" panose="020B0609020101020101" pitchFamily="49" charset="-127"/>
-                <a:ea typeface="D2Coding" panose="020B0609020101020101" pitchFamily="49" charset="-127"/>
-              </a:rPr>
-              <a:t> </a:t>
-            </a:r>
-            <a:r>
-              <a:rPr lang="ko-KR" altLang="en-US" sz="1600" dirty="0">
-                <a:latin typeface="D2Coding" panose="020B0609020101020101" pitchFamily="49" charset="-127"/>
-                <a:ea typeface="D2Coding" panose="020B0609020101020101" pitchFamily="49" charset="-127"/>
-              </a:rPr>
-              <a:t>때문에 단어의 의미를</a:t>
-            </a:r>
-            <a:r>
-              <a:rPr lang="en-US" altLang="ko-KR" sz="1600" dirty="0">
-                <a:latin typeface="D2Coding" panose="020B0609020101020101" pitchFamily="49" charset="-127"/>
-                <a:ea typeface="D2Coding" panose="020B0609020101020101" pitchFamily="49" charset="-127"/>
-              </a:rPr>
-              <a:t> </a:t>
-            </a:r>
-            <a:r>
-              <a:rPr lang="ko-KR" altLang="en-US" sz="1600" dirty="0">
-                <a:latin typeface="D2Coding" panose="020B0609020101020101" pitchFamily="49" charset="-127"/>
-                <a:ea typeface="D2Coding" panose="020B0609020101020101" pitchFamily="49" charset="-127"/>
-              </a:rPr>
-              <a:t>나타낼</a:t>
-            </a:r>
-            <a:r>
-              <a:rPr lang="en-US" altLang="ko-KR" sz="1600" dirty="0">
-                <a:latin typeface="D2Coding" panose="020B0609020101020101" pitchFamily="49" charset="-127"/>
-                <a:ea typeface="D2Coding" panose="020B0609020101020101" pitchFamily="49" charset="-127"/>
-              </a:rPr>
-              <a:t> </a:t>
-            </a:r>
-            <a:r>
-              <a:rPr lang="ko-KR" altLang="en-US" sz="1600" dirty="0">
-                <a:latin typeface="D2Coding" panose="020B0609020101020101" pitchFamily="49" charset="-127"/>
-                <a:ea typeface="D2Coding" panose="020B0609020101020101" pitchFamily="49" charset="-127"/>
-              </a:rPr>
-              <a:t>수가</a:t>
-            </a:r>
-            <a:r>
-              <a:rPr lang="en-US" altLang="ko-KR" sz="1600" dirty="0">
-                <a:latin typeface="D2Coding" panose="020B0609020101020101" pitchFamily="49" charset="-127"/>
-                <a:ea typeface="D2Coding" panose="020B0609020101020101" pitchFamily="49" charset="-127"/>
-              </a:rPr>
-              <a:t> </a:t>
-            </a:r>
-            <a:r>
-              <a:rPr lang="ko-KR" altLang="en-US" sz="1600" dirty="0">
-                <a:latin typeface="D2Coding" panose="020B0609020101020101" pitchFamily="49" charset="-127"/>
-                <a:ea typeface="D2Coding" panose="020B0609020101020101" pitchFamily="49" charset="-127"/>
-              </a:rPr>
-              <a:t>없음</a:t>
-            </a:r>
-          </a:p>
-        </p:txBody>
-      </p:sp>
-    </p:spTree>
-    <p:extLst>
-      <p:ext uri="{BB962C8B-B14F-4D97-AF65-F5344CB8AC3E}">
-        <p14:creationId xmlns:p14="http://schemas.microsoft.com/office/powerpoint/2010/main" val="1824194667"/>
-      </p:ext>
-    </p:extLst>
-  </p:cSld>
-  <p:clrMapOvr>
-    <a:masterClrMapping/>
-  </p:clrMapOvr>
-</p:sld>
-</file>
-
-<file path=ppt/slides/slide8.xml><?xml version="1.0" encoding="utf-8"?>
-<p:sld xmlns:a="http://schemas.openxmlformats.org/drawingml/2006/main" xmlns:r="http://schemas.openxmlformats.org/officeDocument/2006/relationships" xmlns:p="http://schemas.openxmlformats.org/presentationml/2006/main">
-  <p:cSld>
-    <p:spTree>
-      <p:nvGrpSpPr>
-        <p:cNvPr id="1" name="">
-          <a:extLst>
-            <a:ext uri="{FF2B5EF4-FFF2-40B4-BE49-F238E27FC236}">
-              <a16:creationId xmlns:a16="http://schemas.microsoft.com/office/drawing/2014/main" id="{3E0D1FBD-90CF-E311-8358-701261E9B0A2}"/>
-            </a:ext>
-          </a:extLst>
-        </p:cNvPr>
-        <p:cNvGrpSpPr/>
-        <p:nvPr/>
-      </p:nvGrpSpPr>
-      <p:grpSpPr>
-        <a:xfrm>
-          <a:off x="0" y="0"/>
-          <a:ext cx="0" cy="0"/>
-          <a:chOff x="0" y="0"/>
-          <a:chExt cx="0" cy="0"/>
-        </a:xfrm>
-      </p:grpSpPr>
-      <p:sp>
-        <p:nvSpPr>
-          <p:cNvPr id="4" name="슬라이드 번호 개체 틀 3">
-            <a:extLst>
-              <a:ext uri="{FF2B5EF4-FFF2-40B4-BE49-F238E27FC236}">
-                <a16:creationId xmlns:a16="http://schemas.microsoft.com/office/drawing/2014/main" id="{809C8D74-9333-A0DA-A789-DD724ABC1902}"/>
-              </a:ext>
-            </a:extLst>
-          </p:cNvPr>
-          <p:cNvSpPr>
-            <a:spLocks noGrp="1"/>
-          </p:cNvSpPr>
-          <p:nvPr>
-            <p:ph type="sldNum" sz="quarter" idx="12"/>
-          </p:nvPr>
-        </p:nvSpPr>
-        <p:spPr>
-          <a:xfrm>
-            <a:off x="10514011" y="6036261"/>
-            <a:ext cx="753545" cy="365125"/>
-          </a:xfrm>
-        </p:spPr>
-        <p:txBody>
-          <a:bodyPr/>
-          <a:lstStyle/>
-          <a:p>
-            <a:fld id="{D57F1E4F-1CFF-5643-939E-217C01CDF565}" type="slidenum">
-              <a:rPr lang="en-US" smtClean="0"/>
-              <a:pPr/>
-              <a:t>8</a:t>
-            </a:fld>
-            <a:endParaRPr lang="en-US" dirty="0"/>
-          </a:p>
-        </p:txBody>
-      </p:sp>
-      <p:sp>
-        <p:nvSpPr>
-          <p:cNvPr id="3" name="제목 1">
-            <a:extLst>
-              <a:ext uri="{FF2B5EF4-FFF2-40B4-BE49-F238E27FC236}">
-                <a16:creationId xmlns:a16="http://schemas.microsoft.com/office/drawing/2014/main" id="{FA5F9116-57D8-A712-175C-249585981793}"/>
-              </a:ext>
-            </a:extLst>
-          </p:cNvPr>
-          <p:cNvSpPr txBox="1">
-            <a:spLocks/>
-          </p:cNvSpPr>
-          <p:nvPr/>
-        </p:nvSpPr>
-        <p:spPr>
-          <a:xfrm>
-            <a:off x="475645" y="481983"/>
-            <a:ext cx="10353762" cy="766439"/>
-          </a:xfrm>
-          <a:prstGeom prst="rect">
-            <a:avLst/>
-          </a:prstGeom>
-        </p:spPr>
-        <p:txBody>
-          <a:bodyPr vert="horz" lIns="91440" tIns="45720" rIns="91440" bIns="45720" rtlCol="0" anchor="ctr">
-            <a:normAutofit/>
-          </a:bodyPr>
-          <a:lstStyle>
-            <a:lvl1pPr algn="ctr" defTabSz="914400" rtl="0" eaLnBrk="1" latinLnBrk="1" hangingPunct="1">
-              <a:lnSpc>
-                <a:spcPct val="90000"/>
-              </a:lnSpc>
-              <a:spcBef>
-                <a:spcPct val="0"/>
-              </a:spcBef>
-              <a:buNone/>
-              <a:defRPr sz="3200" kern="1200" cap="all" baseline="0">
-                <a:solidFill>
-                  <a:schemeClr val="tx1"/>
-                </a:solidFill>
-                <a:effectLst/>
-                <a:latin typeface="Batang" panose="02030600000101010101" pitchFamily="18" charset="-127"/>
-                <a:ea typeface="Batang" panose="02030600000101010101" pitchFamily="18" charset="-127"/>
-                <a:cs typeface="+mj-cs"/>
-              </a:defRPr>
-            </a:lvl1pPr>
-          </a:lstStyle>
-          <a:p>
-            <a:pPr algn="l"/>
-            <a:r>
-              <a:rPr lang="en-US" altLang="ko-KR" sz="2800" cap="none" dirty="0">
-                <a:solidFill>
-                  <a:schemeClr val="bg2">
-                    <a:lumMod val="25000"/>
-                  </a:schemeClr>
-                </a:solidFill>
-                <a:latin typeface="D2Coding" panose="020B0609020101020101" pitchFamily="49" charset="-127"/>
-                <a:ea typeface="D2Coding" panose="020B0609020101020101" pitchFamily="49" charset="-127"/>
-                <a:cs typeface="Segoe UI Light" panose="020B0502040204020203" pitchFamily="34" charset="0"/>
-              </a:rPr>
-              <a:t>Embeddings: Converting Text to Numbers</a:t>
-            </a:r>
-            <a:endParaRPr lang="ko-KR" altLang="en-US" sz="2800" cap="none" dirty="0">
-              <a:solidFill>
-                <a:schemeClr val="bg2">
-                  <a:lumMod val="25000"/>
-                </a:schemeClr>
-              </a:solidFill>
-              <a:latin typeface="D2Coding" panose="020B0609020101020101" pitchFamily="49" charset="-127"/>
-              <a:ea typeface="D2Coding" panose="020B0609020101020101" pitchFamily="49" charset="-127"/>
-              <a:cs typeface="Segoe UI Light" panose="020B0502040204020203" pitchFamily="34" charset="0"/>
-            </a:endParaRPr>
-          </a:p>
-        </p:txBody>
-      </p:sp>
-      <p:sp>
-        <p:nvSpPr>
-          <p:cNvPr id="2" name="TextBox 1">
-            <a:extLst>
-              <a:ext uri="{FF2B5EF4-FFF2-40B4-BE49-F238E27FC236}">
-                <a16:creationId xmlns:a16="http://schemas.microsoft.com/office/drawing/2014/main" id="{CF35F48B-8E97-8640-ACC0-6AA4786BC7DD}"/>
-              </a:ext>
-            </a:extLst>
-          </p:cNvPr>
-          <p:cNvSpPr txBox="1"/>
-          <p:nvPr/>
-        </p:nvSpPr>
-        <p:spPr>
-          <a:xfrm>
-            <a:off x="8439150" y="654811"/>
-            <a:ext cx="3181350" cy="400110"/>
-          </a:xfrm>
-          <a:prstGeom prst="rect">
-            <a:avLst/>
-          </a:prstGeom>
-          <a:noFill/>
-        </p:spPr>
-        <p:txBody>
-          <a:bodyPr wrap="square">
-            <a:spAutoFit/>
-          </a:bodyPr>
-          <a:lstStyle/>
-          <a:p>
-            <a:pPr algn="r"/>
-            <a:r>
-              <a:rPr lang="en-US" altLang="ko-KR" sz="2000" dirty="0">
-                <a:latin typeface="D2Coding" panose="020B0609020101020101" pitchFamily="49" charset="-127"/>
-                <a:ea typeface="D2Coding" panose="020B0609020101020101" pitchFamily="49" charset="-127"/>
-              </a:rPr>
-              <a:t>Embeddings Before LLMs</a:t>
-            </a:r>
-            <a:endParaRPr lang="ko-KR" altLang="en-US" sz="2000" dirty="0">
-              <a:latin typeface="D2Coding" panose="020B0609020101020101" pitchFamily="49" charset="-127"/>
-              <a:ea typeface="D2Coding" panose="020B0609020101020101" pitchFamily="49" charset="-127"/>
-            </a:endParaRPr>
-          </a:p>
-        </p:txBody>
-      </p:sp>
-      <p:sp>
-        <p:nvSpPr>
-          <p:cNvPr id="7" name="TextBox 6">
-            <a:extLst>
-              <a:ext uri="{FF2B5EF4-FFF2-40B4-BE49-F238E27FC236}">
-                <a16:creationId xmlns:a16="http://schemas.microsoft.com/office/drawing/2014/main" id="{246AED2F-BE85-50FF-D0EA-02A93D82203C}"/>
-              </a:ext>
-            </a:extLst>
-          </p:cNvPr>
-          <p:cNvSpPr txBox="1"/>
-          <p:nvPr/>
-        </p:nvSpPr>
-        <p:spPr>
-          <a:xfrm>
-            <a:off x="537022" y="1248422"/>
-            <a:ext cx="11179333" cy="793166"/>
-          </a:xfrm>
-          <a:prstGeom prst="rect">
-            <a:avLst/>
-          </a:prstGeom>
-          <a:noFill/>
-        </p:spPr>
-        <p:txBody>
-          <a:bodyPr wrap="square">
-            <a:spAutoFit/>
-          </a:bodyPr>
-          <a:lstStyle/>
-          <a:p>
-            <a:pPr>
-              <a:lnSpc>
-                <a:spcPct val="150000"/>
-              </a:lnSpc>
-            </a:pPr>
-            <a:r>
-              <a:rPr lang="ko-KR" altLang="en-US" sz="1600" dirty="0">
-                <a:latin typeface="D2Coding" panose="020B0609020101020101" pitchFamily="49" charset="-127"/>
-                <a:ea typeface="D2Coding" panose="020B0609020101020101" pitchFamily="49" charset="-127"/>
-              </a:rPr>
-              <a:t>세상에 단어가 딱 </a:t>
-            </a:r>
-            <a:r>
-              <a:rPr lang="en-US" altLang="ko-KR" sz="1600" dirty="0">
-                <a:latin typeface="D2Coding" panose="020B0609020101020101" pitchFamily="49" charset="-127"/>
-                <a:ea typeface="D2Coding" panose="020B0609020101020101" pitchFamily="49" charset="-127"/>
-              </a:rPr>
-              <a:t>4</a:t>
-            </a:r>
-            <a:r>
-              <a:rPr lang="ko-KR" altLang="en-US" sz="1600" dirty="0">
-                <a:latin typeface="D2Coding" panose="020B0609020101020101" pitchFamily="49" charset="-127"/>
-                <a:ea typeface="D2Coding" panose="020B0609020101020101" pitchFamily="49" charset="-127"/>
-              </a:rPr>
-              <a:t>개</a:t>
-            </a:r>
-            <a:r>
-              <a:rPr lang="en-US" altLang="ko-KR" sz="1600" dirty="0">
-                <a:latin typeface="D2Coding" panose="020B0609020101020101" pitchFamily="49" charset="-127"/>
-                <a:ea typeface="D2Coding" panose="020B0609020101020101" pitchFamily="49" charset="-127"/>
-              </a:rPr>
-              <a:t>("</a:t>
-            </a:r>
-            <a:r>
-              <a:rPr lang="ko-KR" altLang="en-US" sz="1600" dirty="0">
-                <a:latin typeface="D2Coding" panose="020B0609020101020101" pitchFamily="49" charset="-127"/>
-                <a:ea typeface="D2Coding" panose="020B0609020101020101" pitchFamily="49" charset="-127"/>
-              </a:rPr>
-              <a:t>대출</a:t>
-            </a:r>
-            <a:r>
-              <a:rPr lang="en-US" altLang="ko-KR" sz="1600" dirty="0">
-                <a:latin typeface="D2Coding" panose="020B0609020101020101" pitchFamily="49" charset="-127"/>
-                <a:ea typeface="D2Coding" panose="020B0609020101020101" pitchFamily="49" charset="-127"/>
-              </a:rPr>
-              <a:t>", "</a:t>
-            </a:r>
-            <a:r>
-              <a:rPr lang="ko-KR" altLang="en-US" sz="1600" dirty="0">
-                <a:latin typeface="D2Coding" panose="020B0609020101020101" pitchFamily="49" charset="-127"/>
-                <a:ea typeface="D2Coding" panose="020B0609020101020101" pitchFamily="49" charset="-127"/>
-              </a:rPr>
-              <a:t>광고</a:t>
-            </a:r>
-            <a:r>
-              <a:rPr lang="en-US" altLang="ko-KR" sz="1600" dirty="0">
-                <a:latin typeface="D2Coding" panose="020B0609020101020101" pitchFamily="49" charset="-127"/>
-                <a:ea typeface="D2Coding" panose="020B0609020101020101" pitchFamily="49" charset="-127"/>
-              </a:rPr>
-              <a:t>", "</a:t>
-            </a:r>
-            <a:r>
-              <a:rPr lang="ko-KR" altLang="en-US" sz="1600" dirty="0">
-                <a:latin typeface="D2Coding" panose="020B0609020101020101" pitchFamily="49" charset="-127"/>
-                <a:ea typeface="D2Coding" panose="020B0609020101020101" pitchFamily="49" charset="-127"/>
-              </a:rPr>
-              <a:t>안녕</a:t>
-            </a:r>
-            <a:r>
-              <a:rPr lang="en-US" altLang="ko-KR" sz="1600" dirty="0">
-                <a:latin typeface="D2Coding" panose="020B0609020101020101" pitchFamily="49" charset="-127"/>
-                <a:ea typeface="D2Coding" panose="020B0609020101020101" pitchFamily="49" charset="-127"/>
-              </a:rPr>
-              <a:t>", "</a:t>
-            </a:r>
-            <a:r>
-              <a:rPr lang="ko-KR" altLang="en-US" sz="1600" dirty="0">
-                <a:latin typeface="D2Coding" panose="020B0609020101020101" pitchFamily="49" charset="-127"/>
-                <a:ea typeface="D2Coding" panose="020B0609020101020101" pitchFamily="49" charset="-127"/>
-              </a:rPr>
-              <a:t>오늘</a:t>
-            </a:r>
-            <a:r>
-              <a:rPr lang="en-US" altLang="ko-KR" sz="1600" dirty="0">
-                <a:latin typeface="D2Coding" panose="020B0609020101020101" pitchFamily="49" charset="-127"/>
-                <a:ea typeface="D2Coding" panose="020B0609020101020101" pitchFamily="49" charset="-127"/>
-              </a:rPr>
-              <a:t>")</a:t>
-            </a:r>
-            <a:r>
-              <a:rPr lang="ko-KR" altLang="en-US" sz="1600" dirty="0">
-                <a:latin typeface="D2Coding" panose="020B0609020101020101" pitchFamily="49" charset="-127"/>
-                <a:ea typeface="D2Coding" panose="020B0609020101020101" pitchFamily="49" charset="-127"/>
-              </a:rPr>
-              <a:t>만 존재한다고 가정하고 예측모델이 새로운 메일 </a:t>
-            </a:r>
-            <a:r>
-              <a:rPr lang="en-US" altLang="ko-KR" sz="1600" dirty="0">
-                <a:latin typeface="D2Coding" panose="020B0609020101020101" pitchFamily="49" charset="-127"/>
-                <a:ea typeface="D2Coding" panose="020B0609020101020101" pitchFamily="49" charset="-127"/>
-              </a:rPr>
-              <a:t>2</a:t>
-            </a:r>
-            <a:r>
-              <a:rPr lang="ko-KR" altLang="en-US" sz="1600" dirty="0">
-                <a:latin typeface="D2Coding" panose="020B0609020101020101" pitchFamily="49" charset="-127"/>
-                <a:ea typeface="D2Coding" panose="020B0609020101020101" pitchFamily="49" charset="-127"/>
-              </a:rPr>
-              <a:t>개를 각각 정상과 스팸 어떤 것으로 분류하는지</a:t>
-            </a:r>
-            <a:r>
-              <a:rPr lang="en-US" altLang="ko-KR" sz="1600" dirty="0">
-                <a:latin typeface="D2Coding" panose="020B0609020101020101" pitchFamily="49" charset="-127"/>
-                <a:ea typeface="D2Coding" panose="020B0609020101020101" pitchFamily="49" charset="-127"/>
-              </a:rPr>
-              <a:t>? (</a:t>
-            </a:r>
-            <a:r>
-              <a:rPr lang="ko-KR" altLang="en-US" sz="1600" dirty="0">
-                <a:latin typeface="D2Coding" panose="020B0609020101020101" pitchFamily="49" charset="-127"/>
-                <a:ea typeface="D2Coding" panose="020B0609020101020101" pitchFamily="49" charset="-127"/>
-              </a:rPr>
-              <a:t>각 문장에 어떤 단어가 있는지 </a:t>
-            </a:r>
-            <a:r>
-              <a:rPr lang="en-US" altLang="ko-KR" sz="1600" dirty="0">
-                <a:latin typeface="D2Coding" panose="020B0609020101020101" pitchFamily="49" charset="-127"/>
-                <a:ea typeface="D2Coding" panose="020B0609020101020101" pitchFamily="49" charset="-127"/>
-              </a:rPr>
-              <a:t>key word </a:t>
-            </a:r>
-            <a:r>
-              <a:rPr lang="en-US" altLang="ko-KR" sz="1600" dirty="0" err="1">
-                <a:latin typeface="D2Coding" panose="020B0609020101020101" pitchFamily="49" charset="-127"/>
-                <a:ea typeface="D2Coding" panose="020B0609020101020101" pitchFamily="49" charset="-127"/>
-              </a:rPr>
-              <a:t>searc</a:t>
-            </a:r>
-            <a:r>
-              <a:rPr lang="ko-KR" altLang="en-US" sz="1600" dirty="0">
-                <a:latin typeface="D2Coding" panose="020B0609020101020101" pitchFamily="49" charset="-127"/>
-                <a:ea typeface="D2Coding" panose="020B0609020101020101" pitchFamily="49" charset="-127"/>
-              </a:rPr>
-              <a:t>가 가능</a:t>
-            </a:r>
-            <a:r>
-              <a:rPr lang="en-US" altLang="ko-KR" sz="1600" dirty="0">
-                <a:latin typeface="D2Coding" panose="020B0609020101020101" pitchFamily="49" charset="-127"/>
-                <a:ea typeface="D2Coding" panose="020B0609020101020101" pitchFamily="49" charset="-127"/>
-              </a:rPr>
-              <a:t>)</a:t>
-            </a:r>
-            <a:endParaRPr lang="ko-KR" altLang="en-US" sz="1600" dirty="0">
-              <a:latin typeface="D2Coding" panose="020B0609020101020101" pitchFamily="49" charset="-127"/>
-              <a:ea typeface="D2Coding" panose="020B0609020101020101" pitchFamily="49" charset="-127"/>
-            </a:endParaRPr>
-          </a:p>
-        </p:txBody>
-      </p:sp>
-      <p:sp>
-        <p:nvSpPr>
-          <p:cNvPr id="11" name="TextBox 10">
-            <a:extLst>
-              <a:ext uri="{FF2B5EF4-FFF2-40B4-BE49-F238E27FC236}">
-                <a16:creationId xmlns:a16="http://schemas.microsoft.com/office/drawing/2014/main" id="{132F6D4C-12A9-2B4B-E6C8-87D2F97DFBAC}"/>
-              </a:ext>
-            </a:extLst>
-          </p:cNvPr>
-          <p:cNvSpPr txBox="1"/>
-          <p:nvPr/>
-        </p:nvSpPr>
-        <p:spPr>
-          <a:xfrm>
-            <a:off x="933450" y="2932656"/>
-            <a:ext cx="4648200" cy="1440394"/>
-          </a:xfrm>
-          <a:prstGeom prst="rect">
-            <a:avLst/>
-          </a:prstGeom>
-          <a:noFill/>
-        </p:spPr>
-        <p:txBody>
-          <a:bodyPr wrap="square">
-            <a:spAutoFit/>
-          </a:bodyPr>
-          <a:lstStyle/>
-          <a:p>
-            <a:pPr>
-              <a:lnSpc>
-                <a:spcPct val="150000"/>
-              </a:lnSpc>
-            </a:pPr>
-            <a:r>
-              <a:rPr lang="ko-KR" altLang="en-US" sz="1500" dirty="0">
-                <a:latin typeface="D2Coding" panose="020B0609020101020101" pitchFamily="49" charset="-127"/>
-                <a:ea typeface="D2Coding" panose="020B0609020101020101" pitchFamily="49" charset="-127"/>
-              </a:rPr>
-              <a:t>스팸 메일 1: "대출 광고" </a:t>
-            </a:r>
-            <a:r>
-              <a:rPr lang="en-US" altLang="ko-KR" sz="1500" dirty="0">
-                <a:latin typeface="D2Coding" panose="020B0609020101020101" pitchFamily="49" charset="-127"/>
-                <a:ea typeface="D2Coding" panose="020B0609020101020101" pitchFamily="49" charset="-127"/>
-                <a:sym typeface="Wingdings" panose="05000000000000000000" pitchFamily="2" charset="2"/>
-              </a:rPr>
-              <a:t>  </a:t>
-            </a:r>
-            <a:r>
-              <a:rPr lang="ko-KR" altLang="en-US" sz="1500" dirty="0">
-                <a:latin typeface="D2Coding" panose="020B0609020101020101" pitchFamily="49" charset="-127"/>
-                <a:ea typeface="D2Coding" panose="020B0609020101020101" pitchFamily="49" charset="-127"/>
-              </a:rPr>
-              <a:t>[1, 1, 0, 0]</a:t>
-            </a:r>
-            <a:endParaRPr lang="en-US" altLang="ko-KR" sz="1500" dirty="0">
-              <a:latin typeface="D2Coding" panose="020B0609020101020101" pitchFamily="49" charset="-127"/>
-              <a:ea typeface="D2Coding" panose="020B0609020101020101" pitchFamily="49" charset="-127"/>
-            </a:endParaRPr>
-          </a:p>
-          <a:p>
-            <a:pPr>
-              <a:lnSpc>
-                <a:spcPct val="150000"/>
-              </a:lnSpc>
-            </a:pPr>
-            <a:r>
-              <a:rPr lang="ko-KR" altLang="en-US" sz="1500" dirty="0">
-                <a:latin typeface="D2Coding" panose="020B0609020101020101" pitchFamily="49" charset="-127"/>
-                <a:ea typeface="D2Coding" panose="020B0609020101020101" pitchFamily="49" charset="-127"/>
-              </a:rPr>
-              <a:t>스팸 메일 2: "오늘 대출" </a:t>
-            </a:r>
-            <a:r>
-              <a:rPr lang="en-US" altLang="ko-KR" sz="1500" dirty="0">
-                <a:latin typeface="D2Coding" panose="020B0609020101020101" pitchFamily="49" charset="-127"/>
-                <a:ea typeface="D2Coding" panose="020B0609020101020101" pitchFamily="49" charset="-127"/>
-                <a:sym typeface="Wingdings" panose="05000000000000000000" pitchFamily="2" charset="2"/>
-              </a:rPr>
-              <a:t> </a:t>
-            </a:r>
-            <a:r>
-              <a:rPr lang="ko-KR" altLang="en-US" sz="1500" dirty="0">
-                <a:latin typeface="D2Coding" panose="020B0609020101020101" pitchFamily="49" charset="-127"/>
-                <a:ea typeface="D2Coding" panose="020B0609020101020101" pitchFamily="49" charset="-127"/>
-              </a:rPr>
-              <a:t> [1, 0, 0, 1]</a:t>
-            </a:r>
-            <a:endParaRPr lang="en-US" altLang="ko-KR" sz="1500" dirty="0">
-              <a:latin typeface="D2Coding" panose="020B0609020101020101" pitchFamily="49" charset="-127"/>
-              <a:ea typeface="D2Coding" panose="020B0609020101020101" pitchFamily="49" charset="-127"/>
-            </a:endParaRPr>
-          </a:p>
-          <a:p>
-            <a:pPr>
-              <a:lnSpc>
-                <a:spcPct val="150000"/>
-              </a:lnSpc>
-            </a:pPr>
-            <a:r>
-              <a:rPr lang="ko-KR" altLang="en-US" sz="1500" dirty="0">
-                <a:latin typeface="D2Coding" panose="020B0609020101020101" pitchFamily="49" charset="-127"/>
-                <a:ea typeface="D2Coding" panose="020B0609020101020101" pitchFamily="49" charset="-127"/>
-              </a:rPr>
-              <a:t>정상 메일 1: "안녕 오늘" </a:t>
-            </a:r>
-            <a:r>
-              <a:rPr lang="en-US" altLang="ko-KR" sz="1500" dirty="0">
-                <a:latin typeface="D2Coding" panose="020B0609020101020101" pitchFamily="49" charset="-127"/>
-                <a:ea typeface="D2Coding" panose="020B0609020101020101" pitchFamily="49" charset="-127"/>
-                <a:sym typeface="Wingdings" panose="05000000000000000000" pitchFamily="2" charset="2"/>
-              </a:rPr>
-              <a:t> </a:t>
-            </a:r>
-            <a:r>
-              <a:rPr lang="ko-KR" altLang="en-US" sz="1500" dirty="0">
-                <a:latin typeface="D2Coding" panose="020B0609020101020101" pitchFamily="49" charset="-127"/>
-                <a:ea typeface="D2Coding" panose="020B0609020101020101" pitchFamily="49" charset="-127"/>
-              </a:rPr>
-              <a:t> [0, 0, 1, 1]</a:t>
-            </a:r>
-            <a:endParaRPr lang="en-US" altLang="ko-KR" sz="1500" dirty="0">
-              <a:latin typeface="D2Coding" panose="020B0609020101020101" pitchFamily="49" charset="-127"/>
-              <a:ea typeface="D2Coding" panose="020B0609020101020101" pitchFamily="49" charset="-127"/>
-            </a:endParaRPr>
-          </a:p>
-          <a:p>
-            <a:pPr>
-              <a:lnSpc>
-                <a:spcPct val="150000"/>
-              </a:lnSpc>
-            </a:pPr>
-            <a:r>
-              <a:rPr lang="ko-KR" altLang="en-US" sz="1500" dirty="0">
-                <a:latin typeface="D2Coding" panose="020B0609020101020101" pitchFamily="49" charset="-127"/>
-                <a:ea typeface="D2Coding" panose="020B0609020101020101" pitchFamily="49" charset="-127"/>
-              </a:rPr>
-              <a:t>정상 메일 2: "오늘 안녕" </a:t>
-            </a:r>
-            <a:r>
-              <a:rPr lang="en-US" altLang="ko-KR" sz="1500" dirty="0">
-                <a:latin typeface="D2Coding" panose="020B0609020101020101" pitchFamily="49" charset="-127"/>
-                <a:ea typeface="D2Coding" panose="020B0609020101020101" pitchFamily="49" charset="-127"/>
-                <a:sym typeface="Wingdings" panose="05000000000000000000" pitchFamily="2" charset="2"/>
-              </a:rPr>
-              <a:t> </a:t>
-            </a:r>
-            <a:r>
-              <a:rPr lang="ko-KR" altLang="en-US" sz="1500" dirty="0">
-                <a:latin typeface="D2Coding" panose="020B0609020101020101" pitchFamily="49" charset="-127"/>
-                <a:ea typeface="D2Coding" panose="020B0609020101020101" pitchFamily="49" charset="-127"/>
-              </a:rPr>
-              <a:t> [0, 0, 1, 1]</a:t>
-            </a:r>
-          </a:p>
-        </p:txBody>
-      </p:sp>
-      <p:sp>
-        <p:nvSpPr>
-          <p:cNvPr id="15" name="TextBox 14">
-            <a:extLst>
-              <a:ext uri="{FF2B5EF4-FFF2-40B4-BE49-F238E27FC236}">
-                <a16:creationId xmlns:a16="http://schemas.microsoft.com/office/drawing/2014/main" id="{6FF7D5F1-5B13-0386-F411-5809448CD7D2}"/>
-              </a:ext>
-            </a:extLst>
-          </p:cNvPr>
-          <p:cNvSpPr txBox="1"/>
-          <p:nvPr/>
-        </p:nvSpPr>
-        <p:spPr>
-          <a:xfrm>
-            <a:off x="5514974" y="3010363"/>
-            <a:ext cx="6248401" cy="553998"/>
-          </a:xfrm>
-          <a:prstGeom prst="rect">
-            <a:avLst/>
-          </a:prstGeom>
-          <a:noFill/>
-        </p:spPr>
-        <p:txBody>
-          <a:bodyPr wrap="square">
-            <a:spAutoFit/>
-          </a:bodyPr>
-          <a:lstStyle/>
-          <a:p>
-            <a:r>
-              <a:rPr lang="ko-KR" altLang="en-US" sz="1500" dirty="0">
-                <a:latin typeface="D2Coding" panose="020B0609020101020101" pitchFamily="49" charset="-127"/>
-                <a:ea typeface="D2Coding" panose="020B0609020101020101" pitchFamily="49" charset="-127"/>
-              </a:rPr>
-              <a:t>스팸 1  [1, 1, 0, 0] + 스팸 2  [1, 0, 0, 1] = [2, 1, 0, 1]</a:t>
-            </a:r>
-            <a:endParaRPr lang="en-US" altLang="ko-KR" sz="1500" dirty="0">
-              <a:latin typeface="D2Coding" panose="020B0609020101020101" pitchFamily="49" charset="-127"/>
-              <a:ea typeface="D2Coding" panose="020B0609020101020101" pitchFamily="49" charset="-127"/>
-            </a:endParaRPr>
-          </a:p>
-          <a:p>
-            <a:r>
-              <a:rPr lang="ko-KR" altLang="en-US" sz="1500" dirty="0">
-                <a:latin typeface="D2Coding" panose="020B0609020101020101" pitchFamily="49" charset="-127"/>
-                <a:ea typeface="D2Coding" panose="020B0609020101020101" pitchFamily="49" charset="-127"/>
-              </a:rPr>
-              <a:t>총 개수 2로 나누면 평균</a:t>
-            </a:r>
-            <a:r>
-              <a:rPr lang="en-US" altLang="ko-KR" sz="1500" dirty="0">
-                <a:latin typeface="D2Coding" panose="020B0609020101020101" pitchFamily="49" charset="-127"/>
-                <a:ea typeface="D2Coding" panose="020B0609020101020101" pitchFamily="49" charset="-127"/>
-              </a:rPr>
-              <a:t>(</a:t>
-            </a:r>
-            <a:r>
-              <a:rPr lang="ko-KR" altLang="en-US" sz="1500" dirty="0">
-                <a:latin typeface="D2Coding" panose="020B0609020101020101" pitchFamily="49" charset="-127"/>
-                <a:ea typeface="D2Coding" panose="020B0609020101020101" pitchFamily="49" charset="-127"/>
-              </a:rPr>
-              <a:t>대표</a:t>
-            </a:r>
-            <a:r>
-              <a:rPr lang="en-US" altLang="ko-KR" sz="1500" dirty="0">
-                <a:latin typeface="D2Coding" panose="020B0609020101020101" pitchFamily="49" charset="-127"/>
-                <a:ea typeface="D2Coding" panose="020B0609020101020101" pitchFamily="49" charset="-127"/>
-              </a:rPr>
-              <a:t>)</a:t>
-            </a:r>
-            <a:r>
-              <a:rPr lang="ko-KR" altLang="en-US" sz="1500" dirty="0">
-                <a:latin typeface="D2Coding" panose="020B0609020101020101" pitchFamily="49" charset="-127"/>
-                <a:ea typeface="D2Coding" panose="020B0609020101020101" pitchFamily="49" charset="-127"/>
-              </a:rPr>
-              <a:t> 벡터 </a:t>
-            </a:r>
-            <a:r>
-              <a:rPr lang="en-US" altLang="ko-KR" sz="1500" dirty="0">
-                <a:latin typeface="D2Coding" panose="020B0609020101020101" pitchFamily="49" charset="-127"/>
-                <a:ea typeface="D2Coding" panose="020B0609020101020101" pitchFamily="49" charset="-127"/>
-              </a:rPr>
-              <a:t>= </a:t>
-            </a:r>
-            <a:r>
-              <a:rPr lang="ko-KR" altLang="en-US" sz="1500" dirty="0">
-                <a:latin typeface="D2Coding" panose="020B0609020101020101" pitchFamily="49" charset="-127"/>
-                <a:ea typeface="D2Coding" panose="020B0609020101020101" pitchFamily="49" charset="-127"/>
-              </a:rPr>
-              <a:t>[1.0, 0.5, 0.0, 0.5]</a:t>
-            </a:r>
-          </a:p>
-        </p:txBody>
-      </p:sp>
-      <p:sp>
-        <p:nvSpPr>
-          <p:cNvPr id="16" name="TextBox 15">
-            <a:extLst>
-              <a:ext uri="{FF2B5EF4-FFF2-40B4-BE49-F238E27FC236}">
-                <a16:creationId xmlns:a16="http://schemas.microsoft.com/office/drawing/2014/main" id="{FF9AD14D-55D7-317F-7847-15E0E394731E}"/>
-              </a:ext>
-            </a:extLst>
-          </p:cNvPr>
-          <p:cNvSpPr txBox="1"/>
-          <p:nvPr/>
-        </p:nvSpPr>
-        <p:spPr>
-          <a:xfrm>
-            <a:off x="5548312" y="3742360"/>
-            <a:ext cx="6248401" cy="553998"/>
-          </a:xfrm>
-          <a:prstGeom prst="rect">
-            <a:avLst/>
-          </a:prstGeom>
-          <a:noFill/>
-        </p:spPr>
-        <p:txBody>
-          <a:bodyPr wrap="square">
-            <a:spAutoFit/>
-          </a:bodyPr>
-          <a:lstStyle/>
-          <a:p>
-            <a:r>
-              <a:rPr lang="ko-KR" altLang="en-US" sz="1500" dirty="0">
-                <a:latin typeface="D2Coding" panose="020B0609020101020101" pitchFamily="49" charset="-127"/>
-                <a:ea typeface="D2Coding" panose="020B0609020101020101" pitchFamily="49" charset="-127"/>
-              </a:rPr>
-              <a:t>정상 1  [0, 0</a:t>
-            </a:r>
-            <a:r>
-              <a:rPr lang="en-US" altLang="ko-KR" sz="1500" dirty="0">
-                <a:latin typeface="D2Coding" panose="020B0609020101020101" pitchFamily="49" charset="-127"/>
-                <a:ea typeface="D2Coding" panose="020B0609020101020101" pitchFamily="49" charset="-127"/>
-              </a:rPr>
-              <a:t>, </a:t>
-            </a:r>
-            <a:r>
-              <a:rPr lang="ko-KR" altLang="en-US" sz="1500" dirty="0">
-                <a:latin typeface="D2Coding" panose="020B0609020101020101" pitchFamily="49" charset="-127"/>
-                <a:ea typeface="D2Coding" panose="020B0609020101020101" pitchFamily="49" charset="-127"/>
-              </a:rPr>
-              <a:t>1, 1] + 정상 2  [0, 0</a:t>
-            </a:r>
-            <a:r>
-              <a:rPr lang="en-US" altLang="ko-KR" sz="1500" dirty="0">
-                <a:latin typeface="D2Coding" panose="020B0609020101020101" pitchFamily="49" charset="-127"/>
-                <a:ea typeface="D2Coding" panose="020B0609020101020101" pitchFamily="49" charset="-127"/>
-              </a:rPr>
-              <a:t>, </a:t>
-            </a:r>
-            <a:r>
-              <a:rPr lang="ko-KR" altLang="en-US" sz="1500" dirty="0">
-                <a:latin typeface="D2Coding" panose="020B0609020101020101" pitchFamily="49" charset="-127"/>
-                <a:ea typeface="D2Coding" panose="020B0609020101020101" pitchFamily="49" charset="-127"/>
-              </a:rPr>
-              <a:t>1, 1] = [</a:t>
-            </a:r>
-            <a:r>
-              <a:rPr lang="en-US" altLang="ko-KR" sz="1500" dirty="0">
-                <a:latin typeface="D2Coding" panose="020B0609020101020101" pitchFamily="49" charset="-127"/>
-                <a:ea typeface="D2Coding" panose="020B0609020101020101" pitchFamily="49" charset="-127"/>
-              </a:rPr>
-              <a:t>0</a:t>
-            </a:r>
-            <a:r>
-              <a:rPr lang="ko-KR" altLang="en-US" sz="1500" dirty="0">
-                <a:latin typeface="D2Coding" panose="020B0609020101020101" pitchFamily="49" charset="-127"/>
-                <a:ea typeface="D2Coding" panose="020B0609020101020101" pitchFamily="49" charset="-127"/>
-              </a:rPr>
-              <a:t>, </a:t>
-            </a:r>
-            <a:r>
-              <a:rPr lang="en-US" altLang="ko-KR" sz="1500" dirty="0">
-                <a:latin typeface="D2Coding" panose="020B0609020101020101" pitchFamily="49" charset="-127"/>
-                <a:ea typeface="D2Coding" panose="020B0609020101020101" pitchFamily="49" charset="-127"/>
-              </a:rPr>
-              <a:t>0</a:t>
-            </a:r>
-            <a:r>
-              <a:rPr lang="ko-KR" altLang="en-US" sz="1500" dirty="0">
-                <a:latin typeface="D2Coding" panose="020B0609020101020101" pitchFamily="49" charset="-127"/>
-                <a:ea typeface="D2Coding" panose="020B0609020101020101" pitchFamily="49" charset="-127"/>
-              </a:rPr>
-              <a:t>, </a:t>
-            </a:r>
-            <a:r>
-              <a:rPr lang="en-US" altLang="ko-KR" sz="1500" dirty="0">
-                <a:latin typeface="D2Coding" panose="020B0609020101020101" pitchFamily="49" charset="-127"/>
-                <a:ea typeface="D2Coding" panose="020B0609020101020101" pitchFamily="49" charset="-127"/>
-              </a:rPr>
-              <a:t>2</a:t>
-            </a:r>
-            <a:r>
-              <a:rPr lang="ko-KR" altLang="en-US" sz="1500" dirty="0">
-                <a:latin typeface="D2Coding" panose="020B0609020101020101" pitchFamily="49" charset="-127"/>
-                <a:ea typeface="D2Coding" panose="020B0609020101020101" pitchFamily="49" charset="-127"/>
-              </a:rPr>
-              <a:t>, </a:t>
-            </a:r>
-            <a:r>
-              <a:rPr lang="en-US" altLang="ko-KR" sz="1500" dirty="0">
-                <a:latin typeface="D2Coding" panose="020B0609020101020101" pitchFamily="49" charset="-127"/>
-                <a:ea typeface="D2Coding" panose="020B0609020101020101" pitchFamily="49" charset="-127"/>
-              </a:rPr>
-              <a:t>2</a:t>
-            </a:r>
-            <a:r>
-              <a:rPr lang="ko-KR" altLang="en-US" sz="1500" dirty="0">
-                <a:latin typeface="D2Coding" panose="020B0609020101020101" pitchFamily="49" charset="-127"/>
-                <a:ea typeface="D2Coding" panose="020B0609020101020101" pitchFamily="49" charset="-127"/>
-              </a:rPr>
-              <a:t>]</a:t>
-            </a:r>
-            <a:endParaRPr lang="en-US" altLang="ko-KR" sz="1500" dirty="0">
-              <a:latin typeface="D2Coding" panose="020B0609020101020101" pitchFamily="49" charset="-127"/>
-              <a:ea typeface="D2Coding" panose="020B0609020101020101" pitchFamily="49" charset="-127"/>
-            </a:endParaRPr>
-          </a:p>
-          <a:p>
-            <a:r>
-              <a:rPr lang="ko-KR" altLang="en-US" sz="1500" dirty="0">
-                <a:latin typeface="D2Coding" panose="020B0609020101020101" pitchFamily="49" charset="-127"/>
-                <a:ea typeface="D2Coding" panose="020B0609020101020101" pitchFamily="49" charset="-127"/>
-              </a:rPr>
-              <a:t>총 개수 2로 나누면 평균</a:t>
-            </a:r>
-            <a:r>
-              <a:rPr lang="en-US" altLang="ko-KR" sz="1500" dirty="0">
-                <a:latin typeface="D2Coding" panose="020B0609020101020101" pitchFamily="49" charset="-127"/>
-                <a:ea typeface="D2Coding" panose="020B0609020101020101" pitchFamily="49" charset="-127"/>
-              </a:rPr>
-              <a:t>(</a:t>
-            </a:r>
-            <a:r>
-              <a:rPr lang="ko-KR" altLang="en-US" sz="1500" dirty="0">
-                <a:latin typeface="D2Coding" panose="020B0609020101020101" pitchFamily="49" charset="-127"/>
-                <a:ea typeface="D2Coding" panose="020B0609020101020101" pitchFamily="49" charset="-127"/>
-              </a:rPr>
-              <a:t>대표</a:t>
-            </a:r>
-            <a:r>
-              <a:rPr lang="en-US" altLang="ko-KR" sz="1500" dirty="0">
-                <a:latin typeface="D2Coding" panose="020B0609020101020101" pitchFamily="49" charset="-127"/>
-                <a:ea typeface="D2Coding" panose="020B0609020101020101" pitchFamily="49" charset="-127"/>
-              </a:rPr>
-              <a:t>)</a:t>
-            </a:r>
-            <a:r>
-              <a:rPr lang="ko-KR" altLang="en-US" sz="1500" dirty="0">
-                <a:latin typeface="D2Coding" panose="020B0609020101020101" pitchFamily="49" charset="-127"/>
-                <a:ea typeface="D2Coding" panose="020B0609020101020101" pitchFamily="49" charset="-127"/>
-              </a:rPr>
-              <a:t> 벡터 </a:t>
-            </a:r>
-            <a:r>
-              <a:rPr lang="en-US" altLang="ko-KR" sz="1500" dirty="0">
-                <a:latin typeface="D2Coding" panose="020B0609020101020101" pitchFamily="49" charset="-127"/>
-                <a:ea typeface="D2Coding" panose="020B0609020101020101" pitchFamily="49" charset="-127"/>
-              </a:rPr>
-              <a:t>= </a:t>
-            </a:r>
-            <a:r>
-              <a:rPr lang="ko-KR" altLang="en-US" sz="1500" dirty="0">
-                <a:latin typeface="D2Coding" panose="020B0609020101020101" pitchFamily="49" charset="-127"/>
-                <a:ea typeface="D2Coding" panose="020B0609020101020101" pitchFamily="49" charset="-127"/>
-              </a:rPr>
-              <a:t>[</a:t>
-            </a:r>
-            <a:r>
-              <a:rPr lang="en-US" altLang="ko-KR" sz="1500" dirty="0">
-                <a:latin typeface="D2Coding" panose="020B0609020101020101" pitchFamily="49" charset="-127"/>
-                <a:ea typeface="D2Coding" panose="020B0609020101020101" pitchFamily="49" charset="-127"/>
-              </a:rPr>
-              <a:t>0</a:t>
-            </a:r>
-            <a:r>
-              <a:rPr lang="ko-KR" altLang="en-US" sz="1500" dirty="0">
-                <a:latin typeface="D2Coding" panose="020B0609020101020101" pitchFamily="49" charset="-127"/>
-                <a:ea typeface="D2Coding" panose="020B0609020101020101" pitchFamily="49" charset="-127"/>
-              </a:rPr>
-              <a:t>.0, 0.</a:t>
-            </a:r>
-            <a:r>
-              <a:rPr lang="en-US" altLang="ko-KR" sz="1500" dirty="0">
-                <a:latin typeface="D2Coding" panose="020B0609020101020101" pitchFamily="49" charset="-127"/>
-                <a:ea typeface="D2Coding" panose="020B0609020101020101" pitchFamily="49" charset="-127"/>
-              </a:rPr>
-              <a:t>0</a:t>
-            </a:r>
-            <a:r>
-              <a:rPr lang="ko-KR" altLang="en-US" sz="1500" dirty="0">
-                <a:latin typeface="D2Coding" panose="020B0609020101020101" pitchFamily="49" charset="-127"/>
-                <a:ea typeface="D2Coding" panose="020B0609020101020101" pitchFamily="49" charset="-127"/>
-              </a:rPr>
-              <a:t>, </a:t>
-            </a:r>
-            <a:r>
-              <a:rPr lang="en-US" altLang="ko-KR" sz="1500" dirty="0">
-                <a:latin typeface="D2Coding" panose="020B0609020101020101" pitchFamily="49" charset="-127"/>
-                <a:ea typeface="D2Coding" panose="020B0609020101020101" pitchFamily="49" charset="-127"/>
-              </a:rPr>
-              <a:t>1</a:t>
-            </a:r>
-            <a:r>
-              <a:rPr lang="ko-KR" altLang="en-US" sz="1500" dirty="0">
-                <a:latin typeface="D2Coding" panose="020B0609020101020101" pitchFamily="49" charset="-127"/>
-                <a:ea typeface="D2Coding" panose="020B0609020101020101" pitchFamily="49" charset="-127"/>
-              </a:rPr>
-              <a:t>.0, </a:t>
-            </a:r>
-            <a:r>
-              <a:rPr lang="en-US" altLang="ko-KR" sz="1500" dirty="0">
-                <a:latin typeface="D2Coding" panose="020B0609020101020101" pitchFamily="49" charset="-127"/>
-                <a:ea typeface="D2Coding" panose="020B0609020101020101" pitchFamily="49" charset="-127"/>
-              </a:rPr>
-              <a:t>1.0</a:t>
-            </a:r>
-            <a:r>
-              <a:rPr lang="ko-KR" altLang="en-US" sz="1500" dirty="0">
-                <a:latin typeface="D2Coding" panose="020B0609020101020101" pitchFamily="49" charset="-127"/>
-                <a:ea typeface="D2Coding" panose="020B0609020101020101" pitchFamily="49" charset="-127"/>
-              </a:rPr>
-              <a:t>]</a:t>
-            </a:r>
-          </a:p>
-        </p:txBody>
-      </p:sp>
-      <p:sp>
-        <p:nvSpPr>
-          <p:cNvPr id="23" name="TextBox 22">
-            <a:extLst>
-              <a:ext uri="{FF2B5EF4-FFF2-40B4-BE49-F238E27FC236}">
-                <a16:creationId xmlns:a16="http://schemas.microsoft.com/office/drawing/2014/main" id="{15B98BF7-067C-3085-3F74-763D2F3DD478}"/>
-              </a:ext>
-            </a:extLst>
-          </p:cNvPr>
-          <p:cNvSpPr txBox="1"/>
-          <p:nvPr/>
-        </p:nvSpPr>
-        <p:spPr>
-          <a:xfrm>
-            <a:off x="1352550" y="4771884"/>
-            <a:ext cx="4505325" cy="422167"/>
-          </a:xfrm>
-          <a:prstGeom prst="rect">
-            <a:avLst/>
-          </a:prstGeom>
-          <a:noFill/>
-        </p:spPr>
-        <p:txBody>
-          <a:bodyPr wrap="square">
-            <a:spAutoFit/>
-          </a:bodyPr>
-          <a:lstStyle/>
-          <a:p>
-            <a:pPr>
-              <a:lnSpc>
-                <a:spcPct val="150000"/>
-              </a:lnSpc>
-            </a:pPr>
-            <a:r>
-              <a:rPr lang="ko-KR" altLang="en-US" sz="1600" dirty="0">
-                <a:latin typeface="D2Coding" panose="020B0609020101020101" pitchFamily="49" charset="-127"/>
-                <a:ea typeface="D2Coding" panose="020B0609020101020101" pitchFamily="49" charset="-127"/>
-              </a:rPr>
-              <a:t>새로운 메일 </a:t>
-            </a:r>
-            <a:r>
-              <a:rPr lang="en-US" altLang="ko-KR" sz="1600" dirty="0">
-                <a:latin typeface="D2Coding" panose="020B0609020101020101" pitchFamily="49" charset="-127"/>
-                <a:ea typeface="D2Coding" panose="020B0609020101020101" pitchFamily="49" charset="-127"/>
-              </a:rPr>
-              <a:t>1</a:t>
-            </a:r>
-            <a:r>
-              <a:rPr lang="ko-KR" altLang="en-US" sz="1600" dirty="0">
-                <a:latin typeface="D2Coding" panose="020B0609020101020101" pitchFamily="49" charset="-127"/>
-                <a:ea typeface="D2Coding" panose="020B0609020101020101" pitchFamily="49" charset="-127"/>
-              </a:rPr>
-              <a:t>: "오늘 광고" </a:t>
-            </a:r>
-            <a:r>
-              <a:rPr lang="en-US" altLang="ko-KR" sz="1600" dirty="0">
-                <a:latin typeface="D2Coding" panose="020B0609020101020101" pitchFamily="49" charset="-127"/>
-                <a:ea typeface="D2Coding" panose="020B0609020101020101" pitchFamily="49" charset="-127"/>
-                <a:sym typeface="Wingdings" panose="05000000000000000000" pitchFamily="2" charset="2"/>
-              </a:rPr>
-              <a:t> </a:t>
-            </a:r>
-            <a:r>
-              <a:rPr lang="ko-KR" altLang="en-US" sz="1600" dirty="0">
-                <a:latin typeface="D2Coding" panose="020B0609020101020101" pitchFamily="49" charset="-127"/>
-                <a:ea typeface="D2Coding" panose="020B0609020101020101" pitchFamily="49" charset="-127"/>
-              </a:rPr>
-              <a:t> [0, </a:t>
-            </a:r>
-            <a:r>
-              <a:rPr lang="en-US" altLang="ko-KR" sz="1600" dirty="0">
-                <a:latin typeface="D2Coding" panose="020B0609020101020101" pitchFamily="49" charset="-127"/>
-                <a:ea typeface="D2Coding" panose="020B0609020101020101" pitchFamily="49" charset="-127"/>
-              </a:rPr>
-              <a:t>1</a:t>
-            </a:r>
-            <a:r>
-              <a:rPr lang="ko-KR" altLang="en-US" sz="1600" dirty="0">
-                <a:latin typeface="D2Coding" panose="020B0609020101020101" pitchFamily="49" charset="-127"/>
-                <a:ea typeface="D2Coding" panose="020B0609020101020101" pitchFamily="49" charset="-127"/>
-              </a:rPr>
-              <a:t>, </a:t>
-            </a:r>
-            <a:r>
-              <a:rPr lang="en-US" altLang="ko-KR" sz="1600" dirty="0">
-                <a:latin typeface="D2Coding" panose="020B0609020101020101" pitchFamily="49" charset="-127"/>
-                <a:ea typeface="D2Coding" panose="020B0609020101020101" pitchFamily="49" charset="-127"/>
-              </a:rPr>
-              <a:t>0</a:t>
-            </a:r>
-            <a:r>
-              <a:rPr lang="ko-KR" altLang="en-US" sz="1600" dirty="0">
-                <a:latin typeface="D2Coding" panose="020B0609020101020101" pitchFamily="49" charset="-127"/>
-                <a:ea typeface="D2Coding" panose="020B0609020101020101" pitchFamily="49" charset="-127"/>
-              </a:rPr>
-              <a:t>, 1]</a:t>
-            </a:r>
-          </a:p>
-        </p:txBody>
-      </p:sp>
-      <p:sp>
-        <p:nvSpPr>
-          <p:cNvPr id="24" name="직사각형 23">
-            <a:extLst>
-              <a:ext uri="{FF2B5EF4-FFF2-40B4-BE49-F238E27FC236}">
-                <a16:creationId xmlns:a16="http://schemas.microsoft.com/office/drawing/2014/main" id="{3C1BA9BB-70C0-196C-B038-1DEFDE00A415}"/>
-              </a:ext>
-            </a:extLst>
-          </p:cNvPr>
-          <p:cNvSpPr/>
-          <p:nvPr/>
-        </p:nvSpPr>
-        <p:spPr>
-          <a:xfrm>
-            <a:off x="822772" y="2894556"/>
-            <a:ext cx="10730534" cy="1476454"/>
-          </a:xfrm>
-          <a:prstGeom prst="rect">
-            <a:avLst/>
-          </a:prstGeom>
-          <a:noFill/>
-        </p:spPr>
-        <p:style>
-          <a:lnRef idx="2">
-            <a:schemeClr val="accent1">
-              <a:shade val="15000"/>
-            </a:schemeClr>
-          </a:lnRef>
-          <a:fillRef idx="1">
-            <a:schemeClr val="accent1"/>
-          </a:fillRef>
-          <a:effectRef idx="0">
-            <a:schemeClr val="accent1"/>
-          </a:effectRef>
-          <a:fontRef idx="minor">
-            <a:schemeClr val="lt1"/>
-          </a:fontRef>
-        </p:style>
-        <p:txBody>
-          <a:bodyPr rtlCol="0" anchor="ctr"/>
-          <a:lstStyle/>
-          <a:p>
-            <a:pPr algn="ctr"/>
-            <a:endParaRPr lang="ko-KR" altLang="en-US"/>
-          </a:p>
-        </p:txBody>
-      </p:sp>
-      <p:sp>
-        <p:nvSpPr>
-          <p:cNvPr id="26" name="TextBox 25">
-            <a:extLst>
-              <a:ext uri="{FF2B5EF4-FFF2-40B4-BE49-F238E27FC236}">
-                <a16:creationId xmlns:a16="http://schemas.microsoft.com/office/drawing/2014/main" id="{384EA96A-04DF-6DCB-7EF2-220B31A4D51C}"/>
-              </a:ext>
-            </a:extLst>
-          </p:cNvPr>
-          <p:cNvSpPr txBox="1"/>
-          <p:nvPr/>
-        </p:nvSpPr>
-        <p:spPr>
-          <a:xfrm>
-            <a:off x="2590965" y="2563084"/>
-            <a:ext cx="1696055" cy="338554"/>
-          </a:xfrm>
-          <a:prstGeom prst="rect">
-            <a:avLst/>
-          </a:prstGeom>
-          <a:noFill/>
-        </p:spPr>
-        <p:txBody>
-          <a:bodyPr wrap="square">
-            <a:spAutoFit/>
-          </a:bodyPr>
-          <a:lstStyle/>
-          <a:p>
-            <a:r>
-              <a:rPr lang="ko-KR" altLang="en-US" sz="1600">
-                <a:latin typeface="D2Coding" panose="020B0609020101020101" pitchFamily="49" charset="-127"/>
-                <a:ea typeface="D2Coding" panose="020B0609020101020101" pitchFamily="49" charset="-127"/>
-              </a:rPr>
-              <a:t>학습된 모델 </a:t>
-            </a:r>
-            <a:endParaRPr lang="ko-KR" altLang="en-US" sz="1600" dirty="0"/>
-          </a:p>
-        </p:txBody>
-      </p:sp>
-      <p:pic>
-        <p:nvPicPr>
-          <p:cNvPr id="28" name="그래픽 27" descr="모니터">
-            <a:extLst>
-              <a:ext uri="{FF2B5EF4-FFF2-40B4-BE49-F238E27FC236}">
-                <a16:creationId xmlns:a16="http://schemas.microsoft.com/office/drawing/2014/main" id="{B57E3CBA-A542-E1D3-7B29-C4103F7FCC41}"/>
-              </a:ext>
-            </a:extLst>
-          </p:cNvPr>
-          <p:cNvPicPr>
-            <a:picLocks noChangeAspect="1"/>
-          </p:cNvPicPr>
-          <p:nvPr/>
-        </p:nvPicPr>
-        <p:blipFill>
-          <a:blip r:embed="rId2">
-            <a:extLst>
-              <a:ext uri="{96DAC541-7B7A-43D3-8B79-37D633B846F1}">
-                <asvg:svgBlip xmlns:asvg="http://schemas.microsoft.com/office/drawing/2016/SVG/main" r:embed="rId3"/>
-              </a:ext>
-            </a:extLst>
-          </a:blip>
-          <a:stretch>
-            <a:fillRect/>
-          </a:stretch>
-        </p:blipFill>
-        <p:spPr>
-          <a:xfrm>
-            <a:off x="2057400" y="2399091"/>
-            <a:ext cx="533565" cy="533565"/>
-          </a:xfrm>
-          <a:prstGeom prst="rect">
-            <a:avLst/>
-          </a:prstGeom>
-        </p:spPr>
-      </p:pic>
-      <p:sp>
-        <p:nvSpPr>
-          <p:cNvPr id="30" name="TextBox 29">
-            <a:extLst>
-              <a:ext uri="{FF2B5EF4-FFF2-40B4-BE49-F238E27FC236}">
-                <a16:creationId xmlns:a16="http://schemas.microsoft.com/office/drawing/2014/main" id="{63C1F85D-A860-A277-940F-ACB9A2B89B60}"/>
-              </a:ext>
-            </a:extLst>
-          </p:cNvPr>
-          <p:cNvSpPr txBox="1"/>
-          <p:nvPr/>
-        </p:nvSpPr>
-        <p:spPr>
-          <a:xfrm>
-            <a:off x="1352549" y="5592885"/>
-            <a:ext cx="4505325" cy="422167"/>
-          </a:xfrm>
-          <a:prstGeom prst="rect">
-            <a:avLst/>
-          </a:prstGeom>
-          <a:noFill/>
-        </p:spPr>
-        <p:txBody>
-          <a:bodyPr wrap="square">
-            <a:spAutoFit/>
-          </a:bodyPr>
-          <a:lstStyle/>
-          <a:p>
-            <a:pPr>
-              <a:lnSpc>
-                <a:spcPct val="150000"/>
-              </a:lnSpc>
-            </a:pPr>
-            <a:r>
-              <a:rPr lang="ko-KR" altLang="en-US" sz="1600" dirty="0">
-                <a:latin typeface="D2Coding" panose="020B0609020101020101" pitchFamily="49" charset="-127"/>
-                <a:ea typeface="D2Coding" panose="020B0609020101020101" pitchFamily="49" charset="-127"/>
-              </a:rPr>
-              <a:t>새로운 메일 2: "오늘 구제" </a:t>
-            </a:r>
-            <a:r>
-              <a:rPr lang="en-US" altLang="ko-KR" sz="1600" dirty="0">
-                <a:latin typeface="D2Coding" panose="020B0609020101020101" pitchFamily="49" charset="-127"/>
-                <a:ea typeface="D2Coding" panose="020B0609020101020101" pitchFamily="49" charset="-127"/>
-                <a:sym typeface="Wingdings" panose="05000000000000000000" pitchFamily="2" charset="2"/>
-              </a:rPr>
-              <a:t> </a:t>
-            </a:r>
-            <a:r>
-              <a:rPr lang="ko-KR" altLang="en-US" sz="1600" dirty="0">
-                <a:latin typeface="D2Coding" panose="020B0609020101020101" pitchFamily="49" charset="-127"/>
-                <a:ea typeface="D2Coding" panose="020B0609020101020101" pitchFamily="49" charset="-127"/>
-              </a:rPr>
-              <a:t> [0, </a:t>
-            </a:r>
-            <a:r>
-              <a:rPr lang="en-US" altLang="ko-KR" sz="1600" dirty="0">
-                <a:latin typeface="D2Coding" panose="020B0609020101020101" pitchFamily="49" charset="-127"/>
-                <a:ea typeface="D2Coding" panose="020B0609020101020101" pitchFamily="49" charset="-127"/>
-              </a:rPr>
-              <a:t>0</a:t>
-            </a:r>
-            <a:r>
-              <a:rPr lang="ko-KR" altLang="en-US" sz="1600" dirty="0">
-                <a:latin typeface="D2Coding" panose="020B0609020101020101" pitchFamily="49" charset="-127"/>
-                <a:ea typeface="D2Coding" panose="020B0609020101020101" pitchFamily="49" charset="-127"/>
-              </a:rPr>
-              <a:t>, </a:t>
-            </a:r>
-            <a:r>
-              <a:rPr lang="en-US" altLang="ko-KR" sz="1600" dirty="0">
-                <a:latin typeface="D2Coding" panose="020B0609020101020101" pitchFamily="49" charset="-127"/>
-                <a:ea typeface="D2Coding" panose="020B0609020101020101" pitchFamily="49" charset="-127"/>
-              </a:rPr>
-              <a:t>0</a:t>
-            </a:r>
-            <a:r>
-              <a:rPr lang="ko-KR" altLang="en-US" sz="1600" dirty="0">
-                <a:latin typeface="D2Coding" panose="020B0609020101020101" pitchFamily="49" charset="-127"/>
-                <a:ea typeface="D2Coding" panose="020B0609020101020101" pitchFamily="49" charset="-127"/>
-              </a:rPr>
-              <a:t>, 1]</a:t>
-            </a:r>
-          </a:p>
-        </p:txBody>
-      </p:sp>
-      <p:cxnSp>
-        <p:nvCxnSpPr>
-          <p:cNvPr id="32" name="직선 화살표 연결선 31">
-            <a:extLst>
-              <a:ext uri="{FF2B5EF4-FFF2-40B4-BE49-F238E27FC236}">
-                <a16:creationId xmlns:a16="http://schemas.microsoft.com/office/drawing/2014/main" id="{6793DB13-110C-04AD-92FB-F33365531635}"/>
-              </a:ext>
-            </a:extLst>
-          </p:cNvPr>
-          <p:cNvCxnSpPr>
-            <a:cxnSpLocks/>
-            <a:stCxn id="23" idx="3"/>
-            <a:endCxn id="39" idx="1"/>
-          </p:cNvCxnSpPr>
-          <p:nvPr/>
-        </p:nvCxnSpPr>
-        <p:spPr>
-          <a:xfrm>
-            <a:off x="5857875" y="4982968"/>
-            <a:ext cx="2776538" cy="20525"/>
-          </a:xfrm>
-          <a:prstGeom prst="straightConnector1">
-            <a:avLst/>
-          </a:prstGeom>
-          <a:ln>
-            <a:tailEnd type="triangle"/>
-          </a:ln>
-        </p:spPr>
-        <p:style>
-          <a:lnRef idx="1">
-            <a:schemeClr val="dk1"/>
-          </a:lnRef>
-          <a:fillRef idx="0">
-            <a:schemeClr val="dk1"/>
-          </a:fillRef>
-          <a:effectRef idx="0">
-            <a:schemeClr val="dk1"/>
-          </a:effectRef>
-          <a:fontRef idx="minor">
-            <a:schemeClr val="tx1"/>
-          </a:fontRef>
-        </p:style>
-      </p:cxnSp>
-      <p:cxnSp>
-        <p:nvCxnSpPr>
-          <p:cNvPr id="34" name="직선 화살표 연결선 33">
-            <a:extLst>
-              <a:ext uri="{FF2B5EF4-FFF2-40B4-BE49-F238E27FC236}">
-                <a16:creationId xmlns:a16="http://schemas.microsoft.com/office/drawing/2014/main" id="{D671A3D7-A499-9FB7-4EDB-C2DDDC2038E5}"/>
-              </a:ext>
-            </a:extLst>
-          </p:cNvPr>
-          <p:cNvCxnSpPr>
-            <a:cxnSpLocks/>
-            <a:stCxn id="30" idx="3"/>
-            <a:endCxn id="48" idx="1"/>
-          </p:cNvCxnSpPr>
-          <p:nvPr/>
-        </p:nvCxnSpPr>
-        <p:spPr>
-          <a:xfrm flipV="1">
-            <a:off x="5857874" y="5783340"/>
-            <a:ext cx="2776539" cy="20629"/>
-          </a:xfrm>
-          <a:prstGeom prst="straightConnector1">
-            <a:avLst/>
-          </a:prstGeom>
-          <a:ln>
-            <a:tailEnd type="triangle"/>
-          </a:ln>
-        </p:spPr>
-        <p:style>
-          <a:lnRef idx="1">
-            <a:schemeClr val="dk1"/>
-          </a:lnRef>
-          <a:fillRef idx="0">
-            <a:schemeClr val="dk1"/>
-          </a:fillRef>
-          <a:effectRef idx="0">
-            <a:schemeClr val="dk1"/>
-          </a:effectRef>
-          <a:fontRef idx="minor">
-            <a:schemeClr val="tx1"/>
-          </a:fontRef>
-        </p:style>
-      </p:cxnSp>
-      <p:pic>
-        <p:nvPicPr>
-          <p:cNvPr id="39" name="그래픽 38" descr="모니터">
-            <a:extLst>
-              <a:ext uri="{FF2B5EF4-FFF2-40B4-BE49-F238E27FC236}">
-                <a16:creationId xmlns:a16="http://schemas.microsoft.com/office/drawing/2014/main" id="{249C88CB-8243-AEF7-541C-658AAEF70CF7}"/>
-              </a:ext>
-            </a:extLst>
-          </p:cNvPr>
-          <p:cNvPicPr>
-            <a:picLocks noChangeAspect="1"/>
-          </p:cNvPicPr>
-          <p:nvPr/>
-        </p:nvPicPr>
-        <p:blipFill>
-          <a:blip r:embed="rId2">
-            <a:extLst>
-              <a:ext uri="{96DAC541-7B7A-43D3-8B79-37D633B846F1}">
-                <asvg:svgBlip xmlns:asvg="http://schemas.microsoft.com/office/drawing/2016/SVG/main" r:embed="rId3"/>
-              </a:ext>
-            </a:extLst>
-          </a:blip>
-          <a:stretch>
-            <a:fillRect/>
-          </a:stretch>
-        </p:blipFill>
-        <p:spPr>
-          <a:xfrm>
-            <a:off x="8634413" y="4736710"/>
-            <a:ext cx="533565" cy="533565"/>
-          </a:xfrm>
-          <a:prstGeom prst="rect">
-            <a:avLst/>
-          </a:prstGeom>
-        </p:spPr>
-      </p:pic>
-      <p:pic>
-        <p:nvPicPr>
-          <p:cNvPr id="48" name="그래픽 47" descr="모니터">
-            <a:extLst>
-              <a:ext uri="{FF2B5EF4-FFF2-40B4-BE49-F238E27FC236}">
-                <a16:creationId xmlns:a16="http://schemas.microsoft.com/office/drawing/2014/main" id="{383E9A1B-9316-3F3F-2D83-75692CAD3A8A}"/>
-              </a:ext>
-            </a:extLst>
-          </p:cNvPr>
-          <p:cNvPicPr>
-            <a:picLocks noChangeAspect="1"/>
-          </p:cNvPicPr>
-          <p:nvPr/>
-        </p:nvPicPr>
-        <p:blipFill>
-          <a:blip r:embed="rId2">
-            <a:extLst>
-              <a:ext uri="{96DAC541-7B7A-43D3-8B79-37D633B846F1}">
-                <asvg:svgBlip xmlns:asvg="http://schemas.microsoft.com/office/drawing/2016/SVG/main" r:embed="rId3"/>
-              </a:ext>
-            </a:extLst>
-          </a:blip>
-          <a:stretch>
-            <a:fillRect/>
-          </a:stretch>
-        </p:blipFill>
-        <p:spPr>
-          <a:xfrm>
-            <a:off x="8634413" y="5516557"/>
-            <a:ext cx="533565" cy="533565"/>
-          </a:xfrm>
-          <a:prstGeom prst="rect">
-            <a:avLst/>
-          </a:prstGeom>
-        </p:spPr>
-      </p:pic>
-    </p:spTree>
-    <p:extLst>
-      <p:ext uri="{BB962C8B-B14F-4D97-AF65-F5344CB8AC3E}">
-        <p14:creationId xmlns:p14="http://schemas.microsoft.com/office/powerpoint/2010/main" val="1426322056"/>
-      </p:ext>
-    </p:extLst>
-  </p:cSld>
-  <p:clrMapOvr>
-    <a:masterClrMapping/>
-  </p:clrMapOvr>
-</p:sld>
-</file>
-
-<file path=ppt/slides/slide9.xml><?xml version="1.0" encoding="utf-8"?>
-<p:sld xmlns:a="http://schemas.openxmlformats.org/drawingml/2006/main" xmlns:r="http://schemas.openxmlformats.org/officeDocument/2006/relationships" xmlns:p="http://schemas.openxmlformats.org/presentationml/2006/main">
-  <p:cSld>
-    <p:spTree>
-      <p:nvGrpSpPr>
-        <p:cNvPr id="1" name="">
-          <a:extLst>
-            <a:ext uri="{FF2B5EF4-FFF2-40B4-BE49-F238E27FC236}">
-              <a16:creationId xmlns:a16="http://schemas.microsoft.com/office/drawing/2014/main" id="{4FD9C13E-F294-2A6E-3342-FFC723E0EAEA}"/>
-            </a:ext>
-          </a:extLst>
-        </p:cNvPr>
-        <p:cNvGrpSpPr/>
-        <p:nvPr/>
-      </p:nvGrpSpPr>
-      <p:grpSpPr>
-        <a:xfrm>
-          <a:off x="0" y="0"/>
-          <a:ext cx="0" cy="0"/>
-          <a:chOff x="0" y="0"/>
-          <a:chExt cx="0" cy="0"/>
-        </a:xfrm>
-      </p:grpSpPr>
-      <p:sp>
-        <p:nvSpPr>
-          <p:cNvPr id="4" name="슬라이드 번호 개체 틀 3">
-            <a:extLst>
-              <a:ext uri="{FF2B5EF4-FFF2-40B4-BE49-F238E27FC236}">
-                <a16:creationId xmlns:a16="http://schemas.microsoft.com/office/drawing/2014/main" id="{9C6849D0-C491-D099-4000-839C3D78D53A}"/>
-              </a:ext>
-            </a:extLst>
-          </p:cNvPr>
-          <p:cNvSpPr>
-            <a:spLocks noGrp="1"/>
-          </p:cNvSpPr>
-          <p:nvPr>
-            <p:ph type="sldNum" sz="quarter" idx="12"/>
-          </p:nvPr>
-        </p:nvSpPr>
-        <p:spPr>
-          <a:xfrm>
-            <a:off x="10514011" y="6036261"/>
-            <a:ext cx="753545" cy="365125"/>
-          </a:xfrm>
-        </p:spPr>
-        <p:txBody>
-          <a:bodyPr/>
-          <a:lstStyle/>
-          <a:p>
-            <a:fld id="{D57F1E4F-1CFF-5643-939E-217C01CDF565}" type="slidenum">
-              <a:rPr lang="en-US" smtClean="0"/>
-              <a:pPr/>
-              <a:t>9</a:t>
-            </a:fld>
-            <a:endParaRPr lang="en-US" dirty="0"/>
-          </a:p>
-        </p:txBody>
-      </p:sp>
-      <p:sp>
-        <p:nvSpPr>
-          <p:cNvPr id="3" name="제목 1">
-            <a:extLst>
-              <a:ext uri="{FF2B5EF4-FFF2-40B4-BE49-F238E27FC236}">
-                <a16:creationId xmlns:a16="http://schemas.microsoft.com/office/drawing/2014/main" id="{D5BA32C1-1767-EA50-91DB-819B96D78493}"/>
-              </a:ext>
-            </a:extLst>
-          </p:cNvPr>
-          <p:cNvSpPr txBox="1">
-            <a:spLocks/>
-          </p:cNvSpPr>
-          <p:nvPr/>
-        </p:nvSpPr>
-        <p:spPr>
-          <a:xfrm>
-            <a:off x="475645" y="481983"/>
-            <a:ext cx="10353762" cy="766439"/>
-          </a:xfrm>
-          <a:prstGeom prst="rect">
-            <a:avLst/>
-          </a:prstGeom>
-        </p:spPr>
-        <p:txBody>
-          <a:bodyPr vert="horz" lIns="91440" tIns="45720" rIns="91440" bIns="45720" rtlCol="0" anchor="ctr">
-            <a:normAutofit/>
-          </a:bodyPr>
-          <a:lstStyle>
-            <a:lvl1pPr algn="ctr" defTabSz="914400" rtl="0" eaLnBrk="1" latinLnBrk="1" hangingPunct="1">
-              <a:lnSpc>
-                <a:spcPct val="90000"/>
-              </a:lnSpc>
-              <a:spcBef>
-                <a:spcPct val="0"/>
-              </a:spcBef>
-              <a:buNone/>
-              <a:defRPr sz="3200" kern="1200" cap="all" baseline="0">
-                <a:solidFill>
-                  <a:schemeClr val="tx1"/>
-                </a:solidFill>
-                <a:effectLst/>
-                <a:latin typeface="Batang" panose="02030600000101010101" pitchFamily="18" charset="-127"/>
-                <a:ea typeface="Batang" panose="02030600000101010101" pitchFamily="18" charset="-127"/>
-                <a:cs typeface="+mj-cs"/>
-              </a:defRPr>
-            </a:lvl1pPr>
-          </a:lstStyle>
-          <a:p>
-            <a:pPr algn="l"/>
-            <a:r>
-              <a:rPr lang="en-US" altLang="ko-KR" sz="2800" cap="none" dirty="0">
-                <a:solidFill>
-                  <a:schemeClr val="bg2">
-                    <a:lumMod val="25000"/>
-                  </a:schemeClr>
-                </a:solidFill>
-                <a:latin typeface="D2Coding" panose="020B0609020101020101" pitchFamily="49" charset="-127"/>
-                <a:ea typeface="D2Coding" panose="020B0609020101020101" pitchFamily="49" charset="-127"/>
-                <a:cs typeface="Segoe UI Light" panose="020B0502040204020203" pitchFamily="34" charset="0"/>
-              </a:rPr>
-              <a:t>LLM-Based Embeddings </a:t>
-            </a:r>
-            <a:endParaRPr lang="ko-KR" altLang="en-US" sz="2800" cap="none" dirty="0">
-              <a:solidFill>
-                <a:schemeClr val="bg2">
-                  <a:lumMod val="25000"/>
-                </a:schemeClr>
-              </a:solidFill>
-              <a:latin typeface="D2Coding" panose="020B0609020101020101" pitchFamily="49" charset="-127"/>
-              <a:ea typeface="D2Coding" panose="020B0609020101020101" pitchFamily="49" charset="-127"/>
-              <a:cs typeface="Segoe UI Light" panose="020B0502040204020203" pitchFamily="34" charset="0"/>
-            </a:endParaRPr>
-          </a:p>
-        </p:txBody>
-      </p:sp>
-      <p:sp>
-        <p:nvSpPr>
-          <p:cNvPr id="2" name="TextBox 1">
-            <a:extLst>
-              <a:ext uri="{FF2B5EF4-FFF2-40B4-BE49-F238E27FC236}">
-                <a16:creationId xmlns:a16="http://schemas.microsoft.com/office/drawing/2014/main" id="{61BDF977-EBB2-5BE7-BA5F-D0695C11FC0F}"/>
-              </a:ext>
-            </a:extLst>
-          </p:cNvPr>
-          <p:cNvSpPr txBox="1"/>
-          <p:nvPr/>
-        </p:nvSpPr>
-        <p:spPr>
-          <a:xfrm>
-            <a:off x="7200900" y="654811"/>
-            <a:ext cx="4419600" cy="400110"/>
-          </a:xfrm>
-          <a:prstGeom prst="rect">
-            <a:avLst/>
-          </a:prstGeom>
-          <a:noFill/>
-        </p:spPr>
-        <p:txBody>
-          <a:bodyPr wrap="square">
-            <a:spAutoFit/>
-          </a:bodyPr>
-          <a:lstStyle/>
-          <a:p>
-            <a:pPr algn="r"/>
-            <a:r>
-              <a:rPr lang="en-US" altLang="ko-KR" sz="2000" dirty="0">
-                <a:latin typeface="D2Coding" panose="020B0609020101020101" pitchFamily="49" charset="-127"/>
-                <a:ea typeface="D2Coding" panose="020B0609020101020101" pitchFamily="49" charset="-127"/>
-              </a:rPr>
-              <a:t>Semantic Embeddings Explained</a:t>
-            </a:r>
-            <a:endParaRPr lang="ko-KR" altLang="en-US" sz="2000" dirty="0">
-              <a:latin typeface="D2Coding" panose="020B0609020101020101" pitchFamily="49" charset="-127"/>
-              <a:ea typeface="D2Coding" panose="020B0609020101020101" pitchFamily="49" charset="-127"/>
-            </a:endParaRPr>
-          </a:p>
-        </p:txBody>
-      </p:sp>
-      <p:sp>
-        <p:nvSpPr>
-          <p:cNvPr id="7" name="TextBox 6">
-            <a:extLst>
-              <a:ext uri="{FF2B5EF4-FFF2-40B4-BE49-F238E27FC236}">
-                <a16:creationId xmlns:a16="http://schemas.microsoft.com/office/drawing/2014/main" id="{EFB1B62A-A13C-786F-E0F6-33F6742DFD56}"/>
-              </a:ext>
-            </a:extLst>
-          </p:cNvPr>
-          <p:cNvSpPr txBox="1"/>
-          <p:nvPr/>
-        </p:nvSpPr>
-        <p:spPr>
-          <a:xfrm>
-            <a:off x="537022" y="1248422"/>
-            <a:ext cx="11179333" cy="465320"/>
-          </a:xfrm>
-          <a:prstGeom prst="rect">
-            <a:avLst/>
-          </a:prstGeom>
-          <a:noFill/>
-        </p:spPr>
-        <p:txBody>
-          <a:bodyPr wrap="square">
-            <a:spAutoFit/>
-          </a:bodyPr>
-          <a:lstStyle/>
-          <a:p>
-            <a:pPr>
-              <a:lnSpc>
-                <a:spcPct val="150000"/>
-              </a:lnSpc>
-            </a:pPr>
-            <a:r>
-              <a:rPr lang="ko-KR" altLang="en-US" dirty="0">
-                <a:latin typeface="D2Coding" panose="020B0609020101020101" pitchFamily="49" charset="-127"/>
-                <a:ea typeface="D2Coding" panose="020B0609020101020101" pitchFamily="49" charset="-127"/>
-              </a:rPr>
-              <a:t>차원은 특정 </a:t>
-            </a:r>
-            <a:r>
-              <a:rPr lang="en-US" altLang="ko-KR" dirty="0">
-                <a:latin typeface="D2Coding" panose="020B0609020101020101" pitchFamily="49" charset="-127"/>
-                <a:ea typeface="D2Coding" panose="020B0609020101020101" pitchFamily="49" charset="-127"/>
-              </a:rPr>
-              <a:t>Feature, </a:t>
-            </a:r>
-            <a:r>
-              <a:rPr lang="ko-KR" altLang="en-US" dirty="0">
-                <a:latin typeface="D2Coding" panose="020B0609020101020101" pitchFamily="49" charset="-127"/>
-                <a:ea typeface="D2Coding" panose="020B0609020101020101" pitchFamily="49" charset="-127"/>
-              </a:rPr>
-              <a:t>즉 의미</a:t>
-            </a:r>
-            <a:r>
-              <a:rPr lang="en-US" altLang="ko-KR" dirty="0">
-                <a:latin typeface="D2Coding" panose="020B0609020101020101" pitchFamily="49" charset="-127"/>
-                <a:ea typeface="D2Coding" panose="020B0609020101020101" pitchFamily="49" charset="-127"/>
-              </a:rPr>
-              <a:t>(semantic dimension)</a:t>
-            </a:r>
-            <a:r>
-              <a:rPr lang="ko-KR" altLang="en-US" dirty="0">
-                <a:latin typeface="D2Coding" panose="020B0609020101020101" pitchFamily="49" charset="-127"/>
-                <a:ea typeface="D2Coding" panose="020B0609020101020101" pitchFamily="49" charset="-127"/>
-              </a:rPr>
-              <a:t>를 나타냄</a:t>
-            </a:r>
-          </a:p>
-        </p:txBody>
-      </p:sp>
-      <p:pic>
-        <p:nvPicPr>
-          <p:cNvPr id="12" name="그림 11">
-            <a:extLst>
-              <a:ext uri="{FF2B5EF4-FFF2-40B4-BE49-F238E27FC236}">
-                <a16:creationId xmlns:a16="http://schemas.microsoft.com/office/drawing/2014/main" id="{9376B82E-8B6E-FCEE-91B1-12493B6A06B2}"/>
-              </a:ext>
-            </a:extLst>
-          </p:cNvPr>
-          <p:cNvPicPr>
-            <a:picLocks noChangeAspect="1"/>
-          </p:cNvPicPr>
-          <p:nvPr/>
-        </p:nvPicPr>
-        <p:blipFill>
-          <a:blip r:embed="rId2"/>
-          <a:stretch>
-            <a:fillRect/>
-          </a:stretch>
-        </p:blipFill>
-        <p:spPr>
-          <a:xfrm>
-            <a:off x="1563874" y="3019425"/>
-            <a:ext cx="2861914" cy="2501471"/>
-          </a:xfrm>
-          <a:prstGeom prst="rect">
-            <a:avLst/>
-          </a:prstGeom>
-        </p:spPr>
-      </p:pic>
-      <p:sp>
-        <p:nvSpPr>
-          <p:cNvPr id="15" name="TextBox 14">
-            <a:extLst>
-              <a:ext uri="{FF2B5EF4-FFF2-40B4-BE49-F238E27FC236}">
-                <a16:creationId xmlns:a16="http://schemas.microsoft.com/office/drawing/2014/main" id="{616F8386-CECD-6CE6-2553-C04C3A31695E}"/>
-              </a:ext>
-            </a:extLst>
-          </p:cNvPr>
-          <p:cNvSpPr txBox="1"/>
-          <p:nvPr/>
-        </p:nvSpPr>
-        <p:spPr>
-          <a:xfrm>
-            <a:off x="1055501" y="5752268"/>
-            <a:ext cx="3773674" cy="338554"/>
-          </a:xfrm>
-          <a:prstGeom prst="rect">
-            <a:avLst/>
-          </a:prstGeom>
-          <a:noFill/>
-        </p:spPr>
-        <p:txBody>
-          <a:bodyPr wrap="square">
-            <a:spAutoFit/>
-          </a:bodyPr>
-          <a:lstStyle/>
-          <a:p>
-            <a:r>
-              <a:rPr lang="en-US" altLang="ko-KR" sz="1600" dirty="0">
-                <a:latin typeface="D2Coding" panose="020B0609020101020101" pitchFamily="49" charset="-127"/>
-                <a:ea typeface="D2Coding" panose="020B0609020101020101" pitchFamily="49" charset="-127"/>
-              </a:rPr>
-              <a:t>Semantic representations of words</a:t>
-            </a:r>
-            <a:endParaRPr lang="ko-KR" altLang="en-US" sz="1600" dirty="0">
-              <a:latin typeface="D2Coding" panose="020B0609020101020101" pitchFamily="49" charset="-127"/>
-              <a:ea typeface="D2Coding" panose="020B0609020101020101" pitchFamily="49" charset="-127"/>
-            </a:endParaRPr>
-          </a:p>
-        </p:txBody>
-      </p:sp>
-      <p:pic>
-        <p:nvPicPr>
-          <p:cNvPr id="17" name="그림 16">
-            <a:extLst>
-              <a:ext uri="{FF2B5EF4-FFF2-40B4-BE49-F238E27FC236}">
-                <a16:creationId xmlns:a16="http://schemas.microsoft.com/office/drawing/2014/main" id="{39CBBFAE-103D-A7ED-C8F6-CB6DA5E07AD1}"/>
-              </a:ext>
-            </a:extLst>
-          </p:cNvPr>
-          <p:cNvPicPr>
-            <a:picLocks noChangeAspect="1"/>
-          </p:cNvPicPr>
-          <p:nvPr/>
-        </p:nvPicPr>
-        <p:blipFill>
-          <a:blip r:embed="rId3"/>
-          <a:stretch>
-            <a:fillRect/>
-          </a:stretch>
-        </p:blipFill>
-        <p:spPr>
-          <a:xfrm>
-            <a:off x="6096000" y="2586942"/>
-            <a:ext cx="3863675" cy="2933954"/>
-          </a:xfrm>
-          <a:prstGeom prst="rect">
-            <a:avLst/>
-          </a:prstGeom>
-        </p:spPr>
-      </p:pic>
-      <p:sp>
-        <p:nvSpPr>
-          <p:cNvPr id="19" name="TextBox 18">
-            <a:extLst>
-              <a:ext uri="{FF2B5EF4-FFF2-40B4-BE49-F238E27FC236}">
-                <a16:creationId xmlns:a16="http://schemas.microsoft.com/office/drawing/2014/main" id="{4D6CFBC2-1A23-1286-6F47-4ECEBBDC0980}"/>
-              </a:ext>
-            </a:extLst>
-          </p:cNvPr>
-          <p:cNvSpPr txBox="1"/>
-          <p:nvPr/>
-        </p:nvSpPr>
-        <p:spPr>
-          <a:xfrm>
-            <a:off x="5524500" y="5689298"/>
-            <a:ext cx="6096000" cy="338554"/>
-          </a:xfrm>
-          <a:prstGeom prst="rect">
-            <a:avLst/>
-          </a:prstGeom>
-          <a:noFill/>
-        </p:spPr>
-        <p:txBody>
-          <a:bodyPr wrap="square">
-            <a:spAutoFit/>
-          </a:bodyPr>
-          <a:lstStyle/>
-          <a:p>
-            <a:r>
-              <a:rPr lang="en-US" altLang="ko-KR" sz="1600" dirty="0">
-                <a:latin typeface="D2Coding" panose="020B0609020101020101" pitchFamily="49" charset="-127"/>
-                <a:ea typeface="D2Coding" panose="020B0609020101020101" pitchFamily="49" charset="-127"/>
-              </a:rPr>
-              <a:t>Plot of word vectors in a multidimensional space</a:t>
-            </a:r>
-            <a:endParaRPr lang="ko-KR" altLang="en-US" sz="1600" dirty="0">
-              <a:latin typeface="D2Coding" panose="020B0609020101020101" pitchFamily="49" charset="-127"/>
-              <a:ea typeface="D2Coding" panose="020B0609020101020101" pitchFamily="49" charset="-127"/>
-            </a:endParaRPr>
-          </a:p>
-        </p:txBody>
-      </p:sp>
-      <p:sp>
-        <p:nvSpPr>
-          <p:cNvPr id="21" name="TextBox 20">
-            <a:extLst>
-              <a:ext uri="{FF2B5EF4-FFF2-40B4-BE49-F238E27FC236}">
-                <a16:creationId xmlns:a16="http://schemas.microsoft.com/office/drawing/2014/main" id="{4B11CD4E-8905-C1D0-6D25-BE3CE6C372C7}"/>
-              </a:ext>
-            </a:extLst>
-          </p:cNvPr>
-          <p:cNvSpPr txBox="1"/>
-          <p:nvPr/>
-        </p:nvSpPr>
-        <p:spPr>
-          <a:xfrm>
-            <a:off x="6953250" y="2217610"/>
-            <a:ext cx="2295525" cy="369332"/>
-          </a:xfrm>
-          <a:prstGeom prst="rect">
-            <a:avLst/>
-          </a:prstGeom>
-          <a:noFill/>
-        </p:spPr>
-        <p:txBody>
-          <a:bodyPr wrap="square">
-            <a:spAutoFit/>
-          </a:bodyPr>
-          <a:lstStyle/>
-          <a:p>
-            <a:r>
-              <a:rPr lang="en-US" altLang="ko-KR" dirty="0">
-                <a:latin typeface="D2Coding" panose="020B0609020101020101" pitchFamily="49" charset="-127"/>
-                <a:ea typeface="D2Coding" panose="020B0609020101020101" pitchFamily="49" charset="-127"/>
-              </a:rPr>
-              <a:t>Cosine similarity</a:t>
-            </a:r>
-            <a:endParaRPr lang="ko-KR" altLang="en-US" dirty="0">
-              <a:latin typeface="D2Coding" panose="020B0609020101020101" pitchFamily="49" charset="-127"/>
-              <a:ea typeface="D2Coding" panose="020B0609020101020101" pitchFamily="49" charset="-127"/>
-            </a:endParaRPr>
-          </a:p>
-        </p:txBody>
-      </p:sp>
-    </p:spTree>
-    <p:extLst>
-      <p:ext uri="{BB962C8B-B14F-4D97-AF65-F5344CB8AC3E}">
-        <p14:creationId xmlns:p14="http://schemas.microsoft.com/office/powerpoint/2010/main" val="779192848"/>
       </p:ext>
     </p:extLst>
   </p:cSld>

--- a/CHAPTER 2 RAG Part I_Indexing Your Data.pptx
+++ b/CHAPTER 2 RAG Part I_Indexing Your Data.pptx
@@ -14216,7 +14216,7 @@
                 <a:latin typeface="D2Coding" panose="020B0609020101020101" pitchFamily="49" charset="-127"/>
                 <a:ea typeface="D2Coding" panose="020B0609020101020101" pitchFamily="49" charset="-127"/>
               </a:rPr>
-              <a:t>Data Indexing</a:t>
+              <a:t>1. Data Indexing</a:t>
             </a:r>
             <a:endParaRPr lang="ko-KR" altLang="en-US" sz="2000" dirty="0">
               <a:latin typeface="D2Coding" panose="020B0609020101020101" pitchFamily="49" charset="-127"/>
@@ -14480,7 +14480,7 @@
                 <a:latin typeface="D2Coding" panose="020B0609020101020101" pitchFamily="49" charset="-127"/>
                 <a:ea typeface="D2Coding" panose="020B0609020101020101" pitchFamily="49" charset="-127"/>
               </a:rPr>
-              <a:t>Data Retrieval &amp; Generation</a:t>
+              <a:t>2. Data Retrieval &amp; Generation</a:t>
             </a:r>
             <a:endParaRPr lang="ko-KR" altLang="en-US" sz="2000" dirty="0">
               <a:latin typeface="D2Coding" panose="020B0609020101020101" pitchFamily="49" charset="-127"/>
